--- a/Seminario de Sistemas/Clases/Clase 14 - Preparacion de la sustentacion y cierre/Presentacion.pptx
+++ b/Seminario de Sistemas/Clases/Clase 14 - Preparacion de la sustentacion y cierre/Presentacion.pptx
@@ -19,6 +19,12 @@
     <p:sldId id="267" r:id="rId18"/>
     <p:sldId id="268" r:id="rId19"/>
     <p:sldId id="269" r:id="rId20"/>
+    <p:sldId id="270" r:id="rId21"/>
+    <p:sldId id="271" r:id="rId22"/>
+    <p:sldId id="272" r:id="rId23"/>
+    <p:sldId id="273" r:id="rId24"/>
+    <p:sldId id="274" r:id="rId25"/>
+    <p:sldId id="275" r:id="rId26"/>
   </p:sldIdLst>
   <p:sldSz cx="12191695" cy="6858000" type="screen4x3"/>
   <p:notesSz cx="6858000" cy="9144000"/>
@@ -3619,111 +3625,21 @@
                 </a:solidFill>
                 <a:latin typeface="Calibri"/>
               </a:rPr>
-              <a:t>Taller PI — pasos guiados</a:t>
-            </a:r>
-          </a:p>
-        </p:txBody>
-      </p:sp>
-      <p:sp>
-        <p:nvSpPr>
-          <p:cNvPr id="5" name="Rounded Rectangle 4"/>
-          <p:cNvSpPr/>
-          <p:nvPr/>
-        </p:nvSpPr>
-        <p:spPr>
-          <a:xfrm>
-            <a:off x="457200" y="1234440"/>
-            <a:ext cx="11277295" cy="950976"/>
-          </a:xfrm>
-          <a:prstGeom prst="roundRect">
-            <a:avLst>
-              <a:gd name="adj" fmla="val 12000"/>
-            </a:avLst>
-          </a:prstGeom>
-          <a:solidFill>
-            <a:srgbClr val="F2F2F2"/>
-          </a:solidFill>
-          <a:ln>
-            <a:noFill/>
-          </a:ln>
-        </p:spPr>
-        <p:style>
-          <a:lnRef idx="1">
-            <a:schemeClr val="accent1"/>
-          </a:lnRef>
-          <a:fillRef idx="3">
-            <a:schemeClr val="accent1"/>
-          </a:fillRef>
-          <a:effectRef idx="2">
-            <a:schemeClr val="accent1"/>
-          </a:effectRef>
-          <a:fontRef idx="minor">
-            <a:schemeClr val="lt1"/>
-          </a:fontRef>
-        </p:style>
-        <p:txBody>
-          <a:bodyPr rtlCol="0" anchor="ctr"/>
-          <a:lstStyle/>
-          <a:p>
-            <a:pPr algn="ctr"/>
-          </a:p>
-        </p:txBody>
-      </p:sp>
-      <p:sp>
-        <p:nvSpPr>
-          <p:cNvPr id="6" name="Rounded Rectangle 5"/>
-          <p:cNvSpPr/>
-          <p:nvPr/>
-        </p:nvSpPr>
-        <p:spPr>
-          <a:xfrm>
-            <a:off x="594360" y="1490472"/>
-            <a:ext cx="438912" cy="438912"/>
-          </a:xfrm>
-          <a:prstGeom prst="roundRect">
-            <a:avLst>
-              <a:gd name="adj" fmla="val 12000"/>
-            </a:avLst>
-          </a:prstGeom>
-          <a:solidFill>
-            <a:srgbClr val="095292"/>
-          </a:solidFill>
-          <a:ln>
-            <a:noFill/>
-          </a:ln>
-        </p:spPr>
-        <p:style>
-          <a:lnRef idx="1">
-            <a:schemeClr val="accent1"/>
-          </a:lnRef>
-          <a:fillRef idx="3">
-            <a:schemeClr val="accent1"/>
-          </a:fillRef>
-          <a:effectRef idx="2">
-            <a:schemeClr val="accent1"/>
-          </a:effectRef>
-          <a:fontRef idx="minor">
-            <a:schemeClr val="lt1"/>
-          </a:fontRef>
-        </p:style>
-        <p:txBody>
-          <a:bodyPr rtlCol="0" anchor="ctr"/>
-          <a:lstStyle/>
-          <a:p>
-            <a:pPr algn="ctr"/>
-          </a:p>
-        </p:txBody>
-      </p:sp>
-      <p:sp>
-        <p:nvSpPr>
-          <p:cNvPr id="7" name="TextBox 6"/>
+              <a:t>El reparto del guion en bloques con tiempos es criterio de evaluacion... (2/2)</a:t>
+            </a:r>
+          </a:p>
+        </p:txBody>
+      </p:sp>
+      <p:sp>
+        <p:nvSpPr>
+          <p:cNvPr id="5" name="TextBox 4"/>
           <p:cNvSpPr txBox="1"/>
           <p:nvPr/>
         </p:nvSpPr>
         <p:spPr>
           <a:xfrm>
-            <a:off x="594360" y="1490472"/>
-            <a:ext cx="438912" cy="438912"/>
+            <a:off x="457200" y="1170432"/>
+            <a:ext cx="11277295" cy="5230368"/>
           </a:xfrm>
           <a:prstGeom prst="rect">
             <a:avLst/>
@@ -3731,677 +3647,79 @@
           <a:noFill/>
         </p:spPr>
         <p:txBody>
-          <a:bodyPr wrap="square" anchor="ctr"/>
-          <a:lstStyle/>
-          <a:p>
-            <a:pPr algn="ctr"/>
-            <a:r>
-              <a:rPr sz="1600" b="1" i="0">
-                <a:solidFill>
-                  <a:srgbClr val="FFFFFF"/>
-                </a:solidFill>
-                <a:latin typeface="Calibri"/>
-              </a:rPr>
-              <a:t>1</a:t>
-            </a:r>
-          </a:p>
-        </p:txBody>
-      </p:sp>
-      <p:sp>
-        <p:nvSpPr>
-          <p:cNvPr id="8" name="TextBox 7"/>
-          <p:cNvSpPr txBox="1"/>
-          <p:nvPr/>
-        </p:nvSpPr>
-        <p:spPr>
-          <a:xfrm>
-            <a:off x="1188720" y="1325880"/>
-            <a:ext cx="10271455" cy="786384"/>
-          </a:xfrm>
-          <a:prstGeom prst="rect">
-            <a:avLst/>
-          </a:prstGeom>
-          <a:noFill/>
-        </p:spPr>
-        <p:txBody>
-          <a:bodyPr wrap="square" anchor="ctr"/>
-          <a:lstStyle/>
-          <a:p>
-            <a:r>
-              <a:rPr sz="1100" b="1" i="0">
-                <a:solidFill>
-                  <a:srgbClr val="095292"/>
-                </a:solidFill>
-                <a:latin typeface="Calibri"/>
-              </a:rPr>
-              <a:t>Paso 1. Arme en Google Docs el guion cronometrado de doce minutos con las cinco secciones obligatorias en orden problema, requisitos, modelo, interfaz y decisiones, asignando a cada bloque su rango de minutos exacto y la evidencia que se muestra en pantalla en ese bloque; ningun bloque puede quedar sin rango de minutos ni sin evidencia asociada. Si el docente autorizo equipo, escriba ademas el nombre del responsable de cada bloque y reparta de modo que ningun integrante quede con menos de dos minutos.</a:t>
-            </a:r>
-          </a:p>
-        </p:txBody>
-      </p:sp>
-      <p:sp>
-        <p:nvSpPr>
-          <p:cNvPr id="9" name="Rounded Rectangle 8"/>
-          <p:cNvSpPr/>
-          <p:nvPr/>
-        </p:nvSpPr>
-        <p:spPr>
-          <a:xfrm>
-            <a:off x="457200" y="2276856"/>
-            <a:ext cx="11277295" cy="950976"/>
-          </a:xfrm>
-          <a:prstGeom prst="roundRect">
-            <a:avLst>
-              <a:gd name="adj" fmla="val 12000"/>
-            </a:avLst>
-          </a:prstGeom>
-          <a:solidFill>
-            <a:srgbClr val="E8F4FA"/>
-          </a:solidFill>
-          <a:ln>
-            <a:noFill/>
-          </a:ln>
-        </p:spPr>
-        <p:style>
-          <a:lnRef idx="1">
-            <a:schemeClr val="accent1"/>
-          </a:lnRef>
-          <a:fillRef idx="3">
-            <a:schemeClr val="accent1"/>
-          </a:fillRef>
-          <a:effectRef idx="2">
-            <a:schemeClr val="accent1"/>
-          </a:effectRef>
-          <a:fontRef idx="minor">
-            <a:schemeClr val="lt1"/>
-          </a:fontRef>
-        </p:style>
-        <p:txBody>
-          <a:bodyPr rtlCol="0" anchor="ctr"/>
-          <a:lstStyle/>
-          <a:p>
-            <a:pPr algn="ctr"/>
-          </a:p>
-        </p:txBody>
-      </p:sp>
-      <p:sp>
-        <p:nvSpPr>
-          <p:cNvPr id="10" name="Rounded Rectangle 9"/>
-          <p:cNvSpPr/>
-          <p:nvPr/>
-        </p:nvSpPr>
-        <p:spPr>
-          <a:xfrm>
-            <a:off x="594360" y="2532888"/>
-            <a:ext cx="438912" cy="438912"/>
-          </a:xfrm>
-          <a:prstGeom prst="roundRect">
-            <a:avLst>
-              <a:gd name="adj" fmla="val 12000"/>
-            </a:avLst>
-          </a:prstGeom>
-          <a:solidFill>
-            <a:srgbClr val="095292"/>
-          </a:solidFill>
-          <a:ln>
-            <a:noFill/>
-          </a:ln>
-        </p:spPr>
-        <p:style>
-          <a:lnRef idx="1">
-            <a:schemeClr val="accent1"/>
-          </a:lnRef>
-          <a:fillRef idx="3">
-            <a:schemeClr val="accent1"/>
-          </a:fillRef>
-          <a:effectRef idx="2">
-            <a:schemeClr val="accent1"/>
-          </a:effectRef>
-          <a:fontRef idx="minor">
-            <a:schemeClr val="lt1"/>
-          </a:fontRef>
-        </p:style>
-        <p:txBody>
-          <a:bodyPr rtlCol="0" anchor="ctr"/>
-          <a:lstStyle/>
-          <a:p>
-            <a:pPr algn="ctr"/>
-          </a:p>
-        </p:txBody>
-      </p:sp>
-      <p:sp>
-        <p:nvSpPr>
-          <p:cNvPr id="11" name="TextBox 10"/>
-          <p:cNvSpPr txBox="1"/>
-          <p:nvPr/>
-        </p:nvSpPr>
-        <p:spPr>
-          <a:xfrm>
-            <a:off x="594360" y="2532888"/>
-            <a:ext cx="438912" cy="438912"/>
-          </a:xfrm>
-          <a:prstGeom prst="rect">
-            <a:avLst/>
-          </a:prstGeom>
-          <a:noFill/>
-        </p:spPr>
-        <p:txBody>
-          <a:bodyPr wrap="square" anchor="ctr"/>
-          <a:lstStyle/>
-          <a:p>
-            <a:pPr algn="ctr"/>
-            <a:r>
-              <a:rPr sz="1600" b="1" i="0">
-                <a:solidFill>
-                  <a:srgbClr val="FFFFFF"/>
-                </a:solidFill>
-                <a:latin typeface="Calibri"/>
-              </a:rPr>
-              <a:t>2</a:t>
-            </a:r>
-          </a:p>
-        </p:txBody>
-      </p:sp>
-      <p:sp>
-        <p:nvSpPr>
-          <p:cNvPr id="12" name="TextBox 11"/>
-          <p:cNvSpPr txBox="1"/>
-          <p:nvPr/>
-        </p:nvSpPr>
-        <p:spPr>
-          <a:xfrm>
-            <a:off x="1188720" y="2368296"/>
-            <a:ext cx="10271455" cy="786384"/>
-          </a:xfrm>
-          <a:prstGeom prst="rect">
-            <a:avLst/>
-          </a:prstGeom>
-          <a:noFill/>
-        </p:spPr>
-        <p:txBody>
-          <a:bodyPr wrap="square" anchor="ctr"/>
-          <a:lstStyle/>
-          <a:p>
-            <a:r>
-              <a:rPr sz="1400" b="1" i="0">
-                <a:solidFill>
-                  <a:srgbClr val="095292"/>
-                </a:solidFill>
-                <a:latin typeface="Calibri"/>
-              </a:rPr>
-              <a:t>Paso 2. Llenen la tabla de tres decisiones de diseño de VetCare con las cuatro columnas decision, alternativa descartada, criterio y consecuencia asumida; una de las tres decisiones debe ser sobre el modelo de clases y otra sobre un requisito no funcional.</a:t>
-            </a:r>
-          </a:p>
-        </p:txBody>
-      </p:sp>
-      <p:sp>
-        <p:nvSpPr>
-          <p:cNvPr id="13" name="Rounded Rectangle 12"/>
-          <p:cNvSpPr/>
-          <p:nvPr/>
-        </p:nvSpPr>
-        <p:spPr>
-          <a:xfrm>
-            <a:off x="457200" y="3319272"/>
-            <a:ext cx="11277295" cy="950976"/>
-          </a:xfrm>
-          <a:prstGeom prst="roundRect">
-            <a:avLst>
-              <a:gd name="adj" fmla="val 12000"/>
-            </a:avLst>
-          </a:prstGeom>
-          <a:solidFill>
-            <a:srgbClr val="F2F2F2"/>
-          </a:solidFill>
-          <a:ln>
-            <a:noFill/>
-          </a:ln>
-        </p:spPr>
-        <p:style>
-          <a:lnRef idx="1">
-            <a:schemeClr val="accent1"/>
-          </a:lnRef>
-          <a:fillRef idx="3">
-            <a:schemeClr val="accent1"/>
-          </a:fillRef>
-          <a:effectRef idx="2">
-            <a:schemeClr val="accent1"/>
-          </a:effectRef>
-          <a:fontRef idx="minor">
-            <a:schemeClr val="lt1"/>
-          </a:fontRef>
-        </p:style>
-        <p:txBody>
-          <a:bodyPr rtlCol="0" anchor="ctr"/>
-          <a:lstStyle/>
-          <a:p>
-            <a:pPr algn="ctr"/>
-          </a:p>
-        </p:txBody>
-      </p:sp>
-      <p:sp>
-        <p:nvSpPr>
-          <p:cNvPr id="14" name="Rounded Rectangle 13"/>
-          <p:cNvSpPr/>
-          <p:nvPr/>
-        </p:nvSpPr>
-        <p:spPr>
-          <a:xfrm>
-            <a:off x="594360" y="3575304"/>
-            <a:ext cx="438912" cy="438912"/>
-          </a:xfrm>
-          <a:prstGeom prst="roundRect">
-            <a:avLst>
-              <a:gd name="adj" fmla="val 12000"/>
-            </a:avLst>
-          </a:prstGeom>
-          <a:solidFill>
-            <a:srgbClr val="095292"/>
-          </a:solidFill>
-          <a:ln>
-            <a:noFill/>
-          </a:ln>
-        </p:spPr>
-        <p:style>
-          <a:lnRef idx="1">
-            <a:schemeClr val="accent1"/>
-          </a:lnRef>
-          <a:fillRef idx="3">
-            <a:schemeClr val="accent1"/>
-          </a:fillRef>
-          <a:effectRef idx="2">
-            <a:schemeClr val="accent1"/>
-          </a:effectRef>
-          <a:fontRef idx="minor">
-            <a:schemeClr val="lt1"/>
-          </a:fontRef>
-        </p:style>
-        <p:txBody>
-          <a:bodyPr rtlCol="0" anchor="ctr"/>
-          <a:lstStyle/>
-          <a:p>
-            <a:pPr algn="ctr"/>
-          </a:p>
-        </p:txBody>
-      </p:sp>
-      <p:sp>
-        <p:nvSpPr>
-          <p:cNvPr id="15" name="TextBox 14"/>
-          <p:cNvSpPr txBox="1"/>
-          <p:nvPr/>
-        </p:nvSpPr>
-        <p:spPr>
-          <a:xfrm>
-            <a:off x="594360" y="3575304"/>
-            <a:ext cx="438912" cy="438912"/>
-          </a:xfrm>
-          <a:prstGeom prst="rect">
-            <a:avLst/>
-          </a:prstGeom>
-          <a:noFill/>
-        </p:spPr>
-        <p:txBody>
-          <a:bodyPr wrap="square" anchor="ctr"/>
-          <a:lstStyle/>
-          <a:p>
-            <a:pPr algn="ctr"/>
-            <a:r>
-              <a:rPr sz="1600" b="1" i="0">
-                <a:solidFill>
-                  <a:srgbClr val="FFFFFF"/>
-                </a:solidFill>
-                <a:latin typeface="Calibri"/>
-              </a:rPr>
-              <a:t>3</a:t>
-            </a:r>
-          </a:p>
-        </p:txBody>
-      </p:sp>
-      <p:sp>
-        <p:nvSpPr>
-          <p:cNvPr id="16" name="TextBox 15"/>
-          <p:cNvSpPr txBox="1"/>
-          <p:nvPr/>
-        </p:nvSpPr>
-        <p:spPr>
-          <a:xfrm>
-            <a:off x="1188720" y="3410712"/>
-            <a:ext cx="10271455" cy="786384"/>
-          </a:xfrm>
-          <a:prstGeom prst="rect">
-            <a:avLst/>
-          </a:prstGeom>
-          <a:noFill/>
-        </p:spPr>
-        <p:txBody>
-          <a:bodyPr wrap="square" anchor="ctr"/>
-          <a:lstStyle/>
-          <a:p>
-            <a:r>
-              <a:rPr sz="1400" b="1" i="0">
-                <a:solidFill>
-                  <a:srgbClr val="095292"/>
-                </a:solidFill>
-                <a:latin typeface="Calibri"/>
-              </a:rPr>
-              <a:t>Paso 3. Construyan el banco de diez preguntas del jurado con su respuesta en maximo dos frases, incluyendo obligatoriamente que pasa si dos recepcionistas registran la misma mascota, como se mide su RNF de tiempo de respuesta y que quedo fuera del alcance.</a:t>
-            </a:r>
-          </a:p>
-        </p:txBody>
-      </p:sp>
-      <p:sp>
-        <p:nvSpPr>
-          <p:cNvPr id="17" name="Rounded Rectangle 16"/>
-          <p:cNvSpPr/>
-          <p:nvPr/>
-        </p:nvSpPr>
-        <p:spPr>
-          <a:xfrm>
-            <a:off x="457200" y="4361688"/>
-            <a:ext cx="11277295" cy="950976"/>
-          </a:xfrm>
-          <a:prstGeom prst="roundRect">
-            <a:avLst>
-              <a:gd name="adj" fmla="val 12000"/>
-            </a:avLst>
-          </a:prstGeom>
-          <a:solidFill>
-            <a:srgbClr val="E8F4FA"/>
-          </a:solidFill>
-          <a:ln>
-            <a:noFill/>
-          </a:ln>
-        </p:spPr>
-        <p:style>
-          <a:lnRef idx="1">
-            <a:schemeClr val="accent1"/>
-          </a:lnRef>
-          <a:fillRef idx="3">
-            <a:schemeClr val="accent1"/>
-          </a:fillRef>
-          <a:effectRef idx="2">
-            <a:schemeClr val="accent1"/>
-          </a:effectRef>
-          <a:fontRef idx="minor">
-            <a:schemeClr val="lt1"/>
-          </a:fontRef>
-        </p:style>
-        <p:txBody>
-          <a:bodyPr rtlCol="0" anchor="ctr"/>
-          <a:lstStyle/>
-          <a:p>
-            <a:pPr algn="ctr"/>
-          </a:p>
-        </p:txBody>
-      </p:sp>
-      <p:sp>
-        <p:nvSpPr>
-          <p:cNvPr id="18" name="Rounded Rectangle 17"/>
-          <p:cNvSpPr/>
-          <p:nvPr/>
-        </p:nvSpPr>
-        <p:spPr>
-          <a:xfrm>
-            <a:off x="594360" y="4617720"/>
-            <a:ext cx="438912" cy="438912"/>
-          </a:xfrm>
-          <a:prstGeom prst="roundRect">
-            <a:avLst>
-              <a:gd name="adj" fmla="val 12000"/>
-            </a:avLst>
-          </a:prstGeom>
-          <a:solidFill>
-            <a:srgbClr val="095292"/>
-          </a:solidFill>
-          <a:ln>
-            <a:noFill/>
-          </a:ln>
-        </p:spPr>
-        <p:style>
-          <a:lnRef idx="1">
-            <a:schemeClr val="accent1"/>
-          </a:lnRef>
-          <a:fillRef idx="3">
-            <a:schemeClr val="accent1"/>
-          </a:fillRef>
-          <a:effectRef idx="2">
-            <a:schemeClr val="accent1"/>
-          </a:effectRef>
-          <a:fontRef idx="minor">
-            <a:schemeClr val="lt1"/>
-          </a:fontRef>
-        </p:style>
-        <p:txBody>
-          <a:bodyPr rtlCol="0" anchor="ctr"/>
-          <a:lstStyle/>
-          <a:p>
-            <a:pPr algn="ctr"/>
-          </a:p>
-        </p:txBody>
-      </p:sp>
-      <p:sp>
-        <p:nvSpPr>
-          <p:cNvPr id="19" name="TextBox 18"/>
-          <p:cNvSpPr txBox="1"/>
-          <p:nvPr/>
-        </p:nvSpPr>
-        <p:spPr>
-          <a:xfrm>
-            <a:off x="594360" y="4617720"/>
-            <a:ext cx="438912" cy="438912"/>
-          </a:xfrm>
-          <a:prstGeom prst="rect">
-            <a:avLst/>
-          </a:prstGeom>
-          <a:noFill/>
-        </p:spPr>
-        <p:txBody>
-          <a:bodyPr wrap="square" anchor="ctr"/>
-          <a:lstStyle/>
-          <a:p>
-            <a:pPr algn="ctr"/>
-            <a:r>
-              <a:rPr sz="1600" b="1" i="0">
-                <a:solidFill>
-                  <a:srgbClr val="FFFFFF"/>
-                </a:solidFill>
-                <a:latin typeface="Calibri"/>
-              </a:rPr>
-              <a:t>4</a:t>
-            </a:r>
-          </a:p>
-        </p:txBody>
-      </p:sp>
-      <p:sp>
-        <p:nvSpPr>
-          <p:cNvPr id="20" name="TextBox 19"/>
-          <p:cNvSpPr txBox="1"/>
-          <p:nvPr/>
-        </p:nvSpPr>
-        <p:spPr>
-          <a:xfrm>
-            <a:off x="1188720" y="4453128"/>
-            <a:ext cx="10271455" cy="786384"/>
-          </a:xfrm>
-          <a:prstGeom prst="rect">
-            <a:avLst/>
-          </a:prstGeom>
-          <a:noFill/>
-        </p:spPr>
-        <p:txBody>
-          <a:bodyPr wrap="square" anchor="ctr"/>
-          <a:lstStyle/>
-          <a:p>
-            <a:r>
-              <a:rPr sz="1400" b="1" i="0">
-                <a:solidFill>
-                  <a:srgbClr val="095292"/>
-                </a:solidFill>
-                <a:latin typeface="Calibri"/>
-              </a:rPr>
-              <a:t>Paso 4. Haga un ensayo cronometrado de pie, con el prototipo abierto, y registre el tiempo real de cada bloque; recorte lo que se paso y anote los dos puntos donde se enredo al hablar (si trabaja en equipo, donde se enredo la transicion entre un expositor y el siguiente).</a:t>
-            </a:r>
-          </a:p>
-        </p:txBody>
-      </p:sp>
-      <p:sp>
-        <p:nvSpPr>
-          <p:cNvPr id="21" name="Rounded Rectangle 20"/>
-          <p:cNvSpPr/>
-          <p:nvPr/>
-        </p:nvSpPr>
-        <p:spPr>
-          <a:xfrm>
-            <a:off x="457200" y="5404104"/>
-            <a:ext cx="11277295" cy="950976"/>
-          </a:xfrm>
-          <a:prstGeom prst="roundRect">
-            <a:avLst>
-              <a:gd name="adj" fmla="val 12000"/>
-            </a:avLst>
-          </a:prstGeom>
-          <a:solidFill>
-            <a:srgbClr val="F2F2F2"/>
-          </a:solidFill>
-          <a:ln>
-            <a:noFill/>
-          </a:ln>
-        </p:spPr>
-        <p:style>
-          <a:lnRef idx="1">
-            <a:schemeClr val="accent1"/>
-          </a:lnRef>
-          <a:fillRef idx="3">
-            <a:schemeClr val="accent1"/>
-          </a:fillRef>
-          <a:effectRef idx="2">
-            <a:schemeClr val="accent1"/>
-          </a:effectRef>
-          <a:fontRef idx="minor">
-            <a:schemeClr val="lt1"/>
-          </a:fontRef>
-        </p:style>
-        <p:txBody>
-          <a:bodyPr rtlCol="0" anchor="ctr"/>
-          <a:lstStyle/>
-          <a:p>
-            <a:pPr algn="ctr"/>
-          </a:p>
-        </p:txBody>
-      </p:sp>
-      <p:sp>
-        <p:nvSpPr>
-          <p:cNvPr id="22" name="Rounded Rectangle 21"/>
-          <p:cNvSpPr/>
-          <p:nvPr/>
-        </p:nvSpPr>
-        <p:spPr>
-          <a:xfrm>
-            <a:off x="594360" y="5660136"/>
-            <a:ext cx="438912" cy="438912"/>
-          </a:xfrm>
-          <a:prstGeom prst="roundRect">
-            <a:avLst>
-              <a:gd name="adj" fmla="val 12000"/>
-            </a:avLst>
-          </a:prstGeom>
-          <a:solidFill>
-            <a:srgbClr val="095292"/>
-          </a:solidFill>
-          <a:ln>
-            <a:noFill/>
-          </a:ln>
-        </p:spPr>
-        <p:style>
-          <a:lnRef idx="1">
-            <a:schemeClr val="accent1"/>
-          </a:lnRef>
-          <a:fillRef idx="3">
-            <a:schemeClr val="accent1"/>
-          </a:fillRef>
-          <a:effectRef idx="2">
-            <a:schemeClr val="accent1"/>
-          </a:effectRef>
-          <a:fontRef idx="minor">
-            <a:schemeClr val="lt1"/>
-          </a:fontRef>
-        </p:style>
-        <p:txBody>
-          <a:bodyPr rtlCol="0" anchor="ctr"/>
-          <a:lstStyle/>
-          <a:p>
-            <a:pPr algn="ctr"/>
-          </a:p>
-        </p:txBody>
-      </p:sp>
-      <p:sp>
-        <p:nvSpPr>
-          <p:cNvPr id="23" name="TextBox 22"/>
-          <p:cNvSpPr txBox="1"/>
-          <p:nvPr/>
-        </p:nvSpPr>
-        <p:spPr>
-          <a:xfrm>
-            <a:off x="594360" y="5660136"/>
-            <a:ext cx="438912" cy="438912"/>
-          </a:xfrm>
-          <a:prstGeom prst="rect">
-            <a:avLst/>
-          </a:prstGeom>
-          <a:noFill/>
-        </p:spPr>
-        <p:txBody>
-          <a:bodyPr wrap="square" anchor="ctr"/>
-          <a:lstStyle/>
-          <a:p>
-            <a:pPr algn="ctr"/>
-            <a:r>
-              <a:rPr sz="1600" b="1" i="0">
-                <a:solidFill>
-                  <a:srgbClr val="FFFFFF"/>
-                </a:solidFill>
-                <a:latin typeface="Calibri"/>
-              </a:rPr>
-              <a:t>5</a:t>
-            </a:r>
-          </a:p>
-        </p:txBody>
-      </p:sp>
-      <p:sp>
-        <p:nvSpPr>
-          <p:cNvPr id="24" name="TextBox 23"/>
-          <p:cNvSpPr txBox="1"/>
-          <p:nvPr/>
-        </p:nvSpPr>
-        <p:spPr>
-          <a:xfrm>
-            <a:off x="1188720" y="5495544"/>
-            <a:ext cx="10271455" cy="786384"/>
-          </a:xfrm>
-          <a:prstGeom prst="rect">
-            <a:avLst/>
-          </a:prstGeom>
-          <a:noFill/>
-        </p:spPr>
-        <p:txBody>
-          <a:bodyPr wrap="square" anchor="ctr"/>
-          <a:lstStyle/>
-          <a:p>
-            <a:r>
-              <a:rPr sz="1400" b="1" i="0">
-                <a:solidFill>
-                  <a:srgbClr val="095292"/>
-                </a:solidFill>
-                <a:latin typeface="Calibri"/>
-              </a:rPr>
-              <a:t>Paso 5. Consoliden el documento final armando el indice completo desde problema hasta trazabilidad, verifiquen que los nombres de las clases, los campos del diccionario y los campos de las pantallas coinciden exactamente, y corrijan al menos una inconsistencia encontrada dejando constancia de cual era.</a:t>
-            </a:r>
-          </a:p>
-        </p:txBody>
-      </p:sp>
-      <p:sp>
-        <p:nvSpPr>
-          <p:cNvPr id="25" name="TextBox 24"/>
+          <a:bodyPr wrap="square">
+            <a:spAutoFit/>
+          </a:bodyPr>
+          <a:lstStyle/>
+          <a:p>
+            <a:pPr>
+              <a:spcAft>
+                <a:spcPts val="800"/>
+              </a:spcAft>
+            </a:pPr>
+            <a:r>
+              <a:rPr sz="2000" b="0" i="0">
+                <a:solidFill>
+                  <a:srgbClr val="333333"/>
+                </a:solidFill>
+                <a:latin typeface="Calibri"/>
+              </a:rPr>
+              <a:t>–   Porque el jurado tiene derecho a preguntarle a cualquiera sobre cualquier parte.</a:t>
+            </a:r>
+          </a:p>
+          <a:p>
+            <a:pPr>
+              <a:spcAft>
+                <a:spcPts val="800"/>
+              </a:spcAft>
+            </a:pPr>
+            <a:r>
+              <a:rPr sz="2000" b="0" i="0">
+                <a:solidFill>
+                  <a:srgbClr val="333333"/>
+                </a:solidFill>
+                <a:latin typeface="Calibri"/>
+              </a:rPr>
+              <a:t>–   Se ensaya cronometrado al menos dos veces, en voz alta y de pie, porque el tiempo estimado leyendo en silencio siempre es la mitad del real.</a:t>
+            </a:r>
+          </a:p>
+          <a:p>
+            <a:pPr>
+              <a:spcAft>
+                <a:spcPts val="800"/>
+              </a:spcAft>
+            </a:pPr>
+            <a:r>
+              <a:rPr sz="2000" b="0" i="0">
+                <a:solidFill>
+                  <a:srgbClr val="333333"/>
+                </a:solidFill>
+                <a:latin typeface="Calibri"/>
+              </a:rPr>
+              <a:t>–   Ademas se prepara el plan B tecnico: capturas del prototipo por si falla el internet, el documento en PDF descargado y los diagramas exportados a imagen.</a:t>
+            </a:r>
+          </a:p>
+          <a:p>
+            <a:pPr>
+              <a:spcAft>
+                <a:spcPts val="800"/>
+              </a:spcAft>
+            </a:pPr>
+            <a:r>
+              <a:rPr sz="2000" b="0" i="0">
+                <a:solidFill>
+                  <a:srgbClr val="333333"/>
+                </a:solidFill>
+                <a:latin typeface="Calibri"/>
+              </a:rPr>
+              <a:t>–   Y algo que parece obvio pero se olvida siempre: quien maneja el prototipo debe haberlo recorrido antes haciendo clic en cosas que no estaban en el guion, porque el jurado va a hacer exactamente eso.</a:t>
+            </a:r>
+          </a:p>
+        </p:txBody>
+      </p:sp>
+      <p:sp>
+        <p:nvSpPr>
+          <p:cNvPr id="6" name="TextBox 5"/>
           <p:cNvSpPr txBox="1"/>
           <p:nvPr/>
         </p:nvSpPr>
@@ -4575,7 +3893,7 @@
                 </a:solidFill>
                 <a:latin typeface="Calibri"/>
               </a:rPr>
-              <a:t>Antes de entregar — autochequeo</a:t>
+              <a:t>Guion de sustentacion VetCare: doce minutos cronometrados y quien dice que</a:t>
             </a:r>
           </a:p>
         </p:txBody>
@@ -4589,7 +3907,7 @@
         <p:spPr>
           <a:xfrm>
             <a:off x="457200" y="1261872"/>
-            <a:ext cx="11277295" cy="566928"/>
+            <a:ext cx="11277295" cy="4773168"/>
           </a:xfrm>
           <a:prstGeom prst="roundRect">
             <a:avLst>
@@ -4597,7 +3915,7 @@
             </a:avLst>
           </a:prstGeom>
           <a:solidFill>
-            <a:srgbClr val="F2F2F2"/>
+            <a:srgbClr val="1E2A38"/>
           </a:solidFill>
           <a:ln>
             <a:noFill/>
@@ -4633,19 +3951,17 @@
         </p:nvSpPr>
         <p:spPr>
           <a:xfrm>
-            <a:off x="640080" y="1408175"/>
-            <a:ext cx="274320" cy="274320"/>
+            <a:off x="457200" y="1261872"/>
+            <a:ext cx="11277295" cy="320040"/>
           </a:xfrm>
           <a:prstGeom prst="rect">
             <a:avLst/>
           </a:prstGeom>
           <a:solidFill>
-            <a:srgbClr val="FFFFFF"/>
+            <a:srgbClr val="095292"/>
           </a:solidFill>
           <a:ln>
-            <a:solidFill>
-              <a:srgbClr val="333333"/>
-            </a:solidFill>
+            <a:noFill/>
           </a:ln>
         </p:spPr>
         <p:style>
@@ -4672,44 +3988,33 @@
       </p:sp>
       <p:sp>
         <p:nvSpPr>
-          <p:cNvPr id="7" name="Rectangle 6"/>
-          <p:cNvSpPr/>
-          <p:nvPr/>
-        </p:nvSpPr>
-        <p:spPr>
-          <a:xfrm>
-            <a:off x="640080" y="1408175"/>
-            <a:ext cx="73152" cy="274320"/>
-          </a:xfrm>
-          <a:prstGeom prst="rect">
-            <a:avLst/>
-          </a:prstGeom>
-          <a:solidFill>
-            <a:srgbClr val="269CCB"/>
-          </a:solidFill>
-          <a:ln>
-            <a:noFill/>
-          </a:ln>
-        </p:spPr>
-        <p:style>
-          <a:lnRef idx="1">
-            <a:schemeClr val="accent1"/>
-          </a:lnRef>
-          <a:fillRef idx="3">
-            <a:schemeClr val="accent1"/>
-          </a:fillRef>
-          <a:effectRef idx="2">
-            <a:schemeClr val="accent1"/>
-          </a:effectRef>
-          <a:fontRef idx="minor">
-            <a:schemeClr val="lt1"/>
-          </a:fontRef>
-        </p:style>
-        <p:txBody>
-          <a:bodyPr rtlCol="0" anchor="ctr"/>
-          <a:lstStyle/>
-          <a:p>
-            <a:pPr algn="ctr"/>
+          <p:cNvPr id="7" name="TextBox 6"/>
+          <p:cNvSpPr txBox="1"/>
+          <p:nvPr/>
+        </p:nvSpPr>
+        <p:spPr>
+          <a:xfrm>
+            <a:off x="685800" y="1307592"/>
+            <a:ext cx="10820095" cy="256032"/>
+          </a:xfrm>
+          <a:prstGeom prst="rect">
+            <a:avLst/>
+          </a:prstGeom>
+          <a:noFill/>
+        </p:spPr>
+        <p:txBody>
+          <a:bodyPr wrap="square" anchor="ctr"/>
+          <a:lstStyle/>
+          <a:p>
+            <a:r>
+              <a:rPr sz="1000" b="1" i="0">
+                <a:solidFill>
+                  <a:srgbClr val="269CCB"/>
+                </a:solidFill>
+                <a:latin typeface="Calibri"/>
+              </a:rPr>
+              <a:t>● ● ●</a:t>
+            </a:r>
           </a:p>
         </p:txBody>
       </p:sp>
@@ -4721,8 +4026,8 @@
         </p:nvSpPr>
         <p:spPr>
           <a:xfrm>
-            <a:off x="1097280" y="1353312"/>
-            <a:ext cx="10362895" cy="402336"/>
+            <a:off x="777240" y="1719072"/>
+            <a:ext cx="10637215" cy="4133087"/>
           </a:xfrm>
           <a:prstGeom prst="rect">
             <a:avLst/>
@@ -4730,354 +4035,242 @@
           <a:noFill/>
         </p:spPr>
         <p:txBody>
-          <a:bodyPr wrap="square" anchor="ctr"/>
-          <a:lstStyle/>
-          <a:p>
-            <a:r>
-              <a:rPr sz="1500" b="0" i="0">
-                <a:solidFill>
-                  <a:srgbClr val="333333"/>
-                </a:solidFill>
-                <a:latin typeface="Calibri"/>
-              </a:rPr>
-              <a:t>Si el jurado le pregunta por una parte que no alcanzo a mostrar, puede responderla sin buscar ayuda (y si hay equipo autorizado, cualquier integrante puede responder por cualquier bloque).</a:t>
-            </a:r>
-          </a:p>
-        </p:txBody>
-      </p:sp>
-      <p:sp>
-        <p:nvSpPr>
-          <p:cNvPr id="9" name="Rounded Rectangle 8"/>
-          <p:cNvSpPr/>
-          <p:nvPr/>
-        </p:nvSpPr>
-        <p:spPr>
-          <a:xfrm>
-            <a:off x="457200" y="1938528"/>
-            <a:ext cx="11277295" cy="566928"/>
-          </a:xfrm>
-          <a:prstGeom prst="roundRect">
-            <a:avLst>
-              <a:gd name="adj" fmla="val 12000"/>
-            </a:avLst>
-          </a:prstGeom>
-          <a:solidFill>
-            <a:srgbClr val="F2F2F2"/>
-          </a:solidFill>
-          <a:ln>
-            <a:noFill/>
-          </a:ln>
-        </p:spPr>
-        <p:style>
-          <a:lnRef idx="1">
-            <a:schemeClr val="accent1"/>
-          </a:lnRef>
-          <a:fillRef idx="3">
-            <a:schemeClr val="accent1"/>
-          </a:fillRef>
-          <a:effectRef idx="2">
-            <a:schemeClr val="accent1"/>
-          </a:effectRef>
-          <a:fontRef idx="minor">
-            <a:schemeClr val="lt1"/>
-          </a:fontRef>
-        </p:style>
-        <p:txBody>
-          <a:bodyPr rtlCol="0" anchor="ctr"/>
+          <a:bodyPr wrap="square">
+            <a:spAutoFit/>
+          </a:bodyPr>
+          <a:lstStyle/>
+          <a:p>
+            <a:pPr>
+              <a:spcAft>
+                <a:spcPts val="400"/>
+              </a:spcAft>
+            </a:pPr>
+            <a:r>
+              <a:rPr sz="1400" b="0" i="0">
+                <a:solidFill>
+                  <a:srgbClr val="FFFFFF"/>
+                </a:solidFill>
+                <a:latin typeface="Calibri"/>
+              </a:rPr>
+              <a:t>00:00-01:30 | PROBLEMA    | Huellitas: fichas extraviadas, 8 min por historial, cero metricas</a:t>
+            </a:r>
+          </a:p>
+          <a:p>
+            <a:pPr>
+              <a:spcAft>
+                <a:spcPts val="400"/>
+              </a:spcAft>
+            </a:pPr>
+            <a:r>
+              <a:rPr sz="1400" b="0" i="0">
+                <a:solidFill>
+                  <a:srgbClr val="FFFFFF"/>
+                </a:solidFill>
+                <a:latin typeface="Calibri"/>
+              </a:rPr>
+              <a:t>01:30-03:00 | ALCANCE     | Lo que si entra y lo que quedo por fuera, con la razon</a:t>
+            </a:r>
+          </a:p>
+          <a:p>
+            <a:pPr>
+              <a:spcAft>
+                <a:spcPts val="400"/>
+              </a:spcAft>
+            </a:pPr>
+            <a:r>
+              <a:rPr sz="1400" b="0" i="0">
+                <a:solidFill>
+                  <a:srgbClr val="FFFFFF"/>
+                </a:solidFill>
+                <a:latin typeface="Calibri"/>
+              </a:rPr>
+              <a:t>03:00-05:00 | REQUISITOS  | Solo los 3 RF criticos y 2 RNF medibles; el resto en el documento</a:t>
+            </a:r>
+          </a:p>
+          <a:p>
+            <a:pPr>
+              <a:spcAft>
+                <a:spcPts val="400"/>
+              </a:spcAft>
+            </a:pPr>
+            <a:r>
+              <a:rPr sz="1400" b="0" i="0">
+                <a:solidFill>
+                  <a:srgbClr val="FFFFFF"/>
+                </a:solidFill>
+                <a:latin typeface="Calibri"/>
+              </a:rPr>
+              <a:t>05:00-07:00 | MODELO      | Casos de uso y clases: Mascota, Dueño, Historia_Clinica, Cita</a:t>
+            </a:r>
+          </a:p>
+          <a:p>
+            <a:pPr>
+              <a:spcAft>
+                <a:spcPts val="400"/>
+              </a:spcAft>
+            </a:pPr>
+            <a:r>
+              <a:rPr sz="1400" b="0" i="0">
+                <a:solidFill>
+                  <a:srgbClr val="FFFFFF"/>
+                </a:solidFill>
+                <a:latin typeface="Calibri"/>
+              </a:rPr>
+              <a:t>07:00-09:00 | INTERFAZ    | Prototipo en vivo: registrar mascota -&gt; confirmacion -&gt; buscar</a:t>
+            </a:r>
+          </a:p>
+          <a:p>
+            <a:pPr>
+              <a:spcAft>
+                <a:spcPts val="400"/>
+              </a:spcAft>
+            </a:pPr>
+            <a:r>
+              <a:rPr sz="1400" b="0" i="0">
+                <a:solidFill>
+                  <a:srgbClr val="FFFFFF"/>
+                </a:solidFill>
+                <a:latin typeface="Calibri"/>
+              </a:rPr>
+              <a:t>09:00-11:00 | DECISIONES  | 3 decisiones con alternativa descartada, criterio y consecuencia</a:t>
+            </a:r>
+          </a:p>
+          <a:p>
+            <a:pPr>
+              <a:spcAft>
+                <a:spcPts val="400"/>
+              </a:spcAft>
+            </a:pPr>
+            <a:r>
+              <a:rPr sz="1400" b="0" i="0">
+                <a:solidFill>
+                  <a:srgbClr val="FFFFFF"/>
+                </a:solidFill>
+                <a:latin typeface="Calibri"/>
+              </a:rPr>
+              <a:t>11:00-11:30 | RIESGOS     | Que queda abierto y que recibe Programacion II</a:t>
+            </a:r>
+          </a:p>
+          <a:p>
+            <a:pPr>
+              <a:spcAft>
+                <a:spcPts val="400"/>
+              </a:spcAft>
+            </a:pPr>
+            <a:r>
+              <a:rPr sz="1400" b="0" i="0">
+                <a:solidFill>
+                  <a:srgbClr val="FFFFFF"/>
+                </a:solidFill>
+                <a:latin typeface="Calibri"/>
+              </a:rPr>
+              <a:t>11:30-12:00 | CIERRE      | Una frase de valor para la clinica, no un resumen</a:t>
+            </a:r>
+          </a:p>
+          <a:p>
+            <a:pPr>
+              <a:spcAft>
+                <a:spcPts val="400"/>
+              </a:spcAft>
+            </a:pPr>
+            <a:r>
+              <a:rPr sz="1400" b="0" i="0">
+                <a:solidFill>
+                  <a:srgbClr val="FFFFFF"/>
+                </a:solidFill>
+                <a:latin typeface="Calibri"/>
+              </a:rPr>
+              <a:t>--- Reparto: todos hablan minimo 2 minutos y todos responden minimo 1 pregunta</a:t>
+            </a:r>
+          </a:p>
+          <a:p>
+            <a:pPr>
+              <a:spcAft>
+                <a:spcPts val="400"/>
+              </a:spcAft>
+            </a:pPr>
+            <a:r>
+              <a:rPr sz="1400" b="0" i="0">
+                <a:solidFill>
+                  <a:srgbClr val="FFFFFF"/>
+                </a:solidFill>
+                <a:latin typeface="Calibri"/>
+              </a:rPr>
+              <a:t>--- Regla: nadie lee la diapositiva; la diapositiva es el plano, la voz es el argumento</a:t>
+            </a:r>
+          </a:p>
+          <a:p>
+            <a:pPr>
+              <a:spcAft>
+                <a:spcPts val="400"/>
+              </a:spcAft>
+            </a:pPr>
+            <a:r>
+              <a:rPr sz="1400" b="0" i="0">
+                <a:solidFill>
+                  <a:srgbClr val="FFFFFF"/>
+                </a:solidFill>
+                <a:latin typeface="Calibri"/>
+              </a:rPr>
+              <a:t>--- Cada pantalla proyectada debe poder señalar el RF que la origina</a:t>
+            </a:r>
+          </a:p>
+          <a:p>
+            <a:pPr>
+              <a:spcAft>
+                <a:spcPts val="400"/>
+              </a:spcAft>
+            </a:pPr>
+            <a:r>
+              <a:rPr sz="1400" b="0" i="0">
+                <a:solidFill>
+                  <a:srgbClr val="FFFFFF"/>
+                </a:solidFill>
+                <a:latin typeface="Calibri"/>
+              </a:rPr>
+              <a:t>--- Plan B: capturas del prototipo, PDF descargado y diagramas exportados a imagen</a:t>
+            </a:r>
+          </a:p>
+        </p:txBody>
+      </p:sp>
+      <p:sp>
+        <p:nvSpPr>
+          <p:cNvPr id="9" name="TextBox 8"/>
+          <p:cNvSpPr txBox="1"/>
+          <p:nvPr/>
+        </p:nvSpPr>
+        <p:spPr>
+          <a:xfrm>
+            <a:off x="457200" y="6080760"/>
+            <a:ext cx="11277295" cy="320040"/>
+          </a:xfrm>
+          <a:prstGeom prst="rect">
+            <a:avLst/>
+          </a:prstGeom>
+          <a:noFill/>
+        </p:spPr>
+        <p:txBody>
+          <a:bodyPr wrap="square">
+            <a:spAutoFit/>
+          </a:bodyPr>
           <a:lstStyle/>
           <a:p>
             <a:pPr algn="ctr"/>
-          </a:p>
-        </p:txBody>
-      </p:sp>
-      <p:sp>
-        <p:nvSpPr>
-          <p:cNvPr id="10" name="Rectangle 9"/>
-          <p:cNvSpPr/>
-          <p:nvPr/>
-        </p:nvSpPr>
-        <p:spPr>
-          <a:xfrm>
-            <a:off x="640080" y="2084832"/>
-            <a:ext cx="274320" cy="274320"/>
-          </a:xfrm>
-          <a:prstGeom prst="rect">
-            <a:avLst/>
-          </a:prstGeom>
-          <a:solidFill>
-            <a:srgbClr val="FFFFFF"/>
-          </a:solidFill>
-          <a:ln>
-            <a:solidFill>
-              <a:srgbClr val="333333"/>
-            </a:solidFill>
-          </a:ln>
-        </p:spPr>
-        <p:style>
-          <a:lnRef idx="1">
-            <a:schemeClr val="accent1"/>
-          </a:lnRef>
-          <a:fillRef idx="3">
-            <a:schemeClr val="accent1"/>
-          </a:fillRef>
-          <a:effectRef idx="2">
-            <a:schemeClr val="accent1"/>
-          </a:effectRef>
-          <a:fontRef idx="minor">
-            <a:schemeClr val="lt1"/>
-          </a:fontRef>
-        </p:style>
-        <p:txBody>
-          <a:bodyPr rtlCol="0" anchor="ctr"/>
-          <a:lstStyle/>
-          <a:p>
-            <a:pPr algn="ctr"/>
-          </a:p>
-        </p:txBody>
-      </p:sp>
-      <p:sp>
-        <p:nvSpPr>
-          <p:cNvPr id="11" name="Rectangle 10"/>
-          <p:cNvSpPr/>
-          <p:nvPr/>
-        </p:nvSpPr>
-        <p:spPr>
-          <a:xfrm>
-            <a:off x="640080" y="2084832"/>
-            <a:ext cx="73152" cy="274320"/>
-          </a:xfrm>
-          <a:prstGeom prst="rect">
-            <a:avLst/>
-          </a:prstGeom>
-          <a:solidFill>
-            <a:srgbClr val="269CCB"/>
-          </a:solidFill>
-          <a:ln>
-            <a:noFill/>
-          </a:ln>
-        </p:spPr>
-        <p:style>
-          <a:lnRef idx="1">
-            <a:schemeClr val="accent1"/>
-          </a:lnRef>
-          <a:fillRef idx="3">
-            <a:schemeClr val="accent1"/>
-          </a:fillRef>
-          <a:effectRef idx="2">
-            <a:schemeClr val="accent1"/>
-          </a:effectRef>
-          <a:fontRef idx="minor">
-            <a:schemeClr val="lt1"/>
-          </a:fontRef>
-        </p:style>
-        <p:txBody>
-          <a:bodyPr rtlCol="0" anchor="ctr"/>
-          <a:lstStyle/>
-          <a:p>
-            <a:pPr algn="ctr"/>
-          </a:p>
-        </p:txBody>
-      </p:sp>
-      <p:sp>
-        <p:nvSpPr>
-          <p:cNvPr id="12" name="TextBox 11"/>
-          <p:cNvSpPr txBox="1"/>
-          <p:nvPr/>
-        </p:nvSpPr>
-        <p:spPr>
-          <a:xfrm>
-            <a:off x="1097280" y="2029968"/>
-            <a:ext cx="10362895" cy="402336"/>
-          </a:xfrm>
-          <a:prstGeom prst="rect">
-            <a:avLst/>
-          </a:prstGeom>
-          <a:noFill/>
-        </p:spPr>
-        <p:txBody>
-          <a:bodyPr wrap="square" anchor="ctr"/>
-          <a:lstStyle/>
-          <a:p>
-            <a:r>
-              <a:rPr sz="1500" b="0" i="0">
-                <a:solidFill>
-                  <a:srgbClr val="333333"/>
-                </a:solidFill>
-                <a:latin typeface="Calibri"/>
-              </a:rPr>
-              <a:t>De sus tres decisiones de diseño, cual podria haberse tomado al reves sin que el proyecto se cayera, y que perderia la clinica si se hubiera tomado asi.</a:t>
-            </a:r>
-          </a:p>
-        </p:txBody>
-      </p:sp>
-      <p:sp>
-        <p:nvSpPr>
-          <p:cNvPr id="13" name="Rounded Rectangle 12"/>
-          <p:cNvSpPr/>
-          <p:nvPr/>
-        </p:nvSpPr>
-        <p:spPr>
-          <a:xfrm>
-            <a:off x="457200" y="2615184"/>
-            <a:ext cx="11277295" cy="566928"/>
-          </a:xfrm>
-          <a:prstGeom prst="roundRect">
-            <a:avLst>
-              <a:gd name="adj" fmla="val 12000"/>
-            </a:avLst>
-          </a:prstGeom>
-          <a:solidFill>
-            <a:srgbClr val="F2F2F2"/>
-          </a:solidFill>
-          <a:ln>
-            <a:noFill/>
-          </a:ln>
-        </p:spPr>
-        <p:style>
-          <a:lnRef idx="1">
-            <a:schemeClr val="accent1"/>
-          </a:lnRef>
-          <a:fillRef idx="3">
-            <a:schemeClr val="accent1"/>
-          </a:fillRef>
-          <a:effectRef idx="2">
-            <a:schemeClr val="accent1"/>
-          </a:effectRef>
-          <a:fontRef idx="minor">
-            <a:schemeClr val="lt1"/>
-          </a:fontRef>
-        </p:style>
-        <p:txBody>
-          <a:bodyPr rtlCol="0" anchor="ctr"/>
-          <a:lstStyle/>
-          <a:p>
-            <a:pPr algn="ctr"/>
-          </a:p>
-        </p:txBody>
-      </p:sp>
-      <p:sp>
-        <p:nvSpPr>
-          <p:cNvPr id="14" name="Rectangle 13"/>
-          <p:cNvSpPr/>
-          <p:nvPr/>
-        </p:nvSpPr>
-        <p:spPr>
-          <a:xfrm>
-            <a:off x="640080" y="2761488"/>
-            <a:ext cx="274320" cy="274320"/>
-          </a:xfrm>
-          <a:prstGeom prst="rect">
-            <a:avLst/>
-          </a:prstGeom>
-          <a:solidFill>
-            <a:srgbClr val="FFFFFF"/>
-          </a:solidFill>
-          <a:ln>
-            <a:solidFill>
-              <a:srgbClr val="333333"/>
-            </a:solidFill>
-          </a:ln>
-        </p:spPr>
-        <p:style>
-          <a:lnRef idx="1">
-            <a:schemeClr val="accent1"/>
-          </a:lnRef>
-          <a:fillRef idx="3">
-            <a:schemeClr val="accent1"/>
-          </a:fillRef>
-          <a:effectRef idx="2">
-            <a:schemeClr val="accent1"/>
-          </a:effectRef>
-          <a:fontRef idx="minor">
-            <a:schemeClr val="lt1"/>
-          </a:fontRef>
-        </p:style>
-        <p:txBody>
-          <a:bodyPr rtlCol="0" anchor="ctr"/>
-          <a:lstStyle/>
-          <a:p>
-            <a:pPr algn="ctr"/>
-          </a:p>
-        </p:txBody>
-      </p:sp>
-      <p:sp>
-        <p:nvSpPr>
-          <p:cNvPr id="15" name="Rectangle 14"/>
-          <p:cNvSpPr/>
-          <p:nvPr/>
-        </p:nvSpPr>
-        <p:spPr>
-          <a:xfrm>
-            <a:off x="640080" y="2761488"/>
-            <a:ext cx="73152" cy="274320"/>
-          </a:xfrm>
-          <a:prstGeom prst="rect">
-            <a:avLst/>
-          </a:prstGeom>
-          <a:solidFill>
-            <a:srgbClr val="269CCB"/>
-          </a:solidFill>
-          <a:ln>
-            <a:noFill/>
-          </a:ln>
-        </p:spPr>
-        <p:style>
-          <a:lnRef idx="1">
-            <a:schemeClr val="accent1"/>
-          </a:lnRef>
-          <a:fillRef idx="3">
-            <a:schemeClr val="accent1"/>
-          </a:fillRef>
-          <a:effectRef idx="2">
-            <a:schemeClr val="accent1"/>
-          </a:effectRef>
-          <a:fontRef idx="minor">
-            <a:schemeClr val="lt1"/>
-          </a:fontRef>
-        </p:style>
-        <p:txBody>
-          <a:bodyPr rtlCol="0" anchor="ctr"/>
-          <a:lstStyle/>
-          <a:p>
-            <a:pPr algn="ctr"/>
-          </a:p>
-        </p:txBody>
-      </p:sp>
-      <p:sp>
-        <p:nvSpPr>
-          <p:cNvPr id="16" name="TextBox 15"/>
-          <p:cNvSpPr txBox="1"/>
-          <p:nvPr/>
-        </p:nvSpPr>
-        <p:spPr>
-          <a:xfrm>
-            <a:off x="1097280" y="2706624"/>
-            <a:ext cx="10362895" cy="402336"/>
-          </a:xfrm>
-          <a:prstGeom prst="rect">
-            <a:avLst/>
-          </a:prstGeom>
-          <a:noFill/>
-        </p:spPr>
-        <p:txBody>
-          <a:bodyPr wrap="square" anchor="ctr"/>
-          <a:lstStyle/>
-          <a:p>
-            <a:r>
-              <a:rPr sz="1500" b="0" i="0">
-                <a:solidFill>
-                  <a:srgbClr val="333333"/>
-                </a:solidFill>
-                <a:latin typeface="Calibri"/>
-              </a:rPr>
-              <a:t>Si el internet falla justo antes de mostrar el prototipo, que hace el equipo en los siguientes quince segundos para no perder el bloque de interfaz.</a:t>
-            </a:r>
-          </a:p>
-        </p:txBody>
-      </p:sp>
-      <p:sp>
-        <p:nvSpPr>
-          <p:cNvPr id="17" name="TextBox 16"/>
+            <a:r>
+              <a:rPr sz="1200" b="0" i="1">
+                <a:solidFill>
+                  <a:srgbClr val="666666"/>
+                </a:solidFill>
+                <a:latin typeface="Calibri"/>
+              </a:rPr>
+              <a:t>Un paquete de diseño no se narra en orden cronologico: se defiende en orden de embudo, del dolor a la decision.</a:t>
+            </a:r>
+          </a:p>
+        </p:txBody>
+      </p:sp>
+      <p:sp>
+        <p:nvSpPr>
+          <p:cNvPr id="10" name="TextBox 9"/>
           <p:cNvSpPr txBox="1"/>
           <p:nvPr/>
         </p:nvSpPr>
@@ -5251,7 +4444,7 @@
                 </a:solidFill>
                 <a:latin typeface="Calibri"/>
               </a:rPr>
-              <a:t>Criterios de exito / entregable</a:t>
+              <a:t>Demo del dia</a:t>
             </a:r>
           </a:p>
         </p:txBody>
@@ -5299,7 +4492,7 @@
                 </a:solidFill>
                 <a:latin typeface="Calibri"/>
               </a:rPr>
-              <a:t>Entregable:</a:t>
+              <a:t>Herramienta:</a:t>
             </a:r>
             <a:r>
               <a:rPr sz="2000" b="0" i="0">
@@ -5308,7 +4501,7 @@
                 </a:solidFill>
                 <a:latin typeface="Calibri"/>
               </a:rPr>
-              <a:t> Un documento en Google Docs con el guion minuto a minuto repartido en bloques con tiempos y evidencia (con responsable nominal solo si el docente autorizo equipo), la tabla de tres decisiones de diseño defendidas y el banco de diez preguntas con su respuesta, mas el indice del documento final consolidado, subido a la plataforma del curso.</a:t>
+              <a:t> Google Docs · draw.io · Figma o Penpot</a:t>
             </a:r>
           </a:p>
           <a:p>
@@ -5333,7 +4526,7 @@
                 </a:solidFill>
                 <a:latin typeface="Calibri"/>
               </a:rPr>
-              <a:t>Exito:</a:t>
+              <a:t>Demo:</a:t>
             </a:r>
             <a:r>
               <a:rPr sz="2000" b="0" i="0">
@@ -5342,7 +4535,7 @@
                 </a:solidFill>
                 <a:latin typeface="Calibri"/>
               </a:rPr>
-              <a:t> El guion tiene las cinco secciones en el orden problema, requisitos, modelo, interfaz y decisiones, con minutos asignados que suman doce, cada bloque con su evidencia en pantalla y, si el docente autorizo equipo, todos los integrantes hablando al menos dos minutos.</a:t>
+              <a:t> El docente proyecta una sustentacion mal hecha y una bien hecha del mismo paquete VetCare, y luego arma en vivo la tabla de decisiones para justificar por que Historia_Clinica es una clase aparte de Mascota.</a:t>
             </a:r>
           </a:p>
           <a:p>
@@ -5358,127 +4551,7 @@
                 </a:solidFill>
                 <a:latin typeface="Calibri"/>
               </a:rPr>
-              <a:t>–   </a:t>
-            </a:r>
-            <a:r>
-              <a:rPr sz="2000" b="1" i="0">
-                <a:solidFill>
-                  <a:srgbClr val="333333"/>
-                </a:solidFill>
-                <a:latin typeface="Calibri"/>
-              </a:rPr>
-              <a:t>Exito:</a:t>
-            </a:r>
-            <a:r>
-              <a:rPr sz="2000" b="0" i="0">
-                <a:solidFill>
-                  <a:srgbClr val="333333"/>
-                </a:solidFill>
-                <a:latin typeface="Calibri"/>
-              </a:rPr>
-              <a:t> Las tres decisiones de diseño estan escritas con las cuatro columnas completas, incluida la consecuencia asumida, y ninguna se justifica por gusto o por costumbre.</a:t>
-            </a:r>
-          </a:p>
-          <a:p>
-            <a:pPr>
-              <a:spcAft>
-                <a:spcPts val="800"/>
-              </a:spcAft>
-            </a:pPr>
-            <a:r>
-              <a:rPr sz="2000" b="0" i="0">
-                <a:solidFill>
-                  <a:srgbClr val="333333"/>
-                </a:solidFill>
-                <a:latin typeface="Calibri"/>
-              </a:rPr>
-              <a:t>–   </a:t>
-            </a:r>
-            <a:r>
-              <a:rPr sz="2000" b="1" i="0">
-                <a:solidFill>
-                  <a:srgbClr val="333333"/>
-                </a:solidFill>
-                <a:latin typeface="Calibri"/>
-              </a:rPr>
-              <a:t>Exito:</a:t>
-            </a:r>
-            <a:r>
-              <a:rPr sz="2000" b="0" i="0">
-                <a:solidFill>
-                  <a:srgbClr val="333333"/>
-                </a:solidFill>
-                <a:latin typeface="Calibri"/>
-              </a:rPr>
-              <a:t> El banco tiene diez preguntas con respuesta de maximo dos frases y contempla al menos un caso de concurrencia, uno de medicion de RNF y uno de alcance excluido.</a:t>
-            </a:r>
-          </a:p>
-          <a:p>
-            <a:pPr>
-              <a:spcAft>
-                <a:spcPts val="800"/>
-              </a:spcAft>
-            </a:pPr>
-            <a:r>
-              <a:rPr sz="2000" b="0" i="0">
-                <a:solidFill>
-                  <a:srgbClr val="333333"/>
-                </a:solidFill>
-                <a:latin typeface="Calibri"/>
-              </a:rPr>
-              <a:t>–   </a:t>
-            </a:r>
-            <a:r>
-              <a:rPr sz="2000" b="1" i="0">
-                <a:solidFill>
-                  <a:srgbClr val="333333"/>
-                </a:solidFill>
-                <a:latin typeface="Calibri"/>
-              </a:rPr>
-              <a:t>Exito:</a:t>
-            </a:r>
-            <a:r>
-              <a:rPr sz="2000" b="0" i="0">
-                <a:solidFill>
-                  <a:srgbClr val="333333"/>
-                </a:solidFill>
-                <a:latin typeface="Calibri"/>
-              </a:rPr>
-              <a:t> El documento final consolidado tiene indice, version y al menos una inconsistencia entre artefactos detectada y corregida, dejando registro de cual era.</a:t>
-            </a:r>
-          </a:p>
-          <a:p>
-            <a:pPr>
-              <a:spcAft>
-                <a:spcPts val="800"/>
-              </a:spcAft>
-            </a:pPr>
-            <a:r>
-              <a:rPr sz="2000" b="0" i="0">
-                <a:solidFill>
-                  <a:srgbClr val="333333"/>
-                </a:solidFill>
-                <a:latin typeface="Calibri"/>
-              </a:rPr>
-              <a:t>–   </a:t>
-            </a:r>
-            <a:r>
-              <a:rPr sz="2000" b="1" i="0">
-                <a:solidFill>
-                  <a:srgbClr val="333333"/>
-                </a:solidFill>
-                <a:latin typeface="Calibri"/>
-              </a:rPr>
-              <a:t>Entrega en la plataforma del curso</a:t>
-            </a:r>
-            <a:r>
-              <a:rPr sz="2000" b="0" i="0">
-                <a:solidFill>
-                  <a:srgbClr val="333333"/>
-                </a:solidFill>
-                <a:latin typeface="Calibri"/>
-              </a:rPr>
-              <a:t> — en la fecha que indique el docente.</a:t>
+              <a:t>–   Mismo dominio VetCare — no otro ejemplo. Aqui se diseña, no se programa.</a:t>
             </a:r>
           </a:p>
         </p:txBody>
@@ -5553,7 +4626,7 @@
         <p:spPr>
           <a:xfrm>
             <a:off x="0" y="0"/>
-            <a:ext cx="12191695" cy="960120"/>
+            <a:ext cx="12191695" cy="1170432"/>
           </a:xfrm>
           <a:prstGeom prst="rect">
             <a:avLst/>
@@ -5595,7 +4668,7 @@
         </p:nvSpPr>
         <p:spPr>
           <a:xfrm>
-            <a:off x="0" y="960120"/>
+            <a:off x="0" y="1170432"/>
             <a:ext cx="12191695" cy="41148"/>
           </a:xfrm>
           <a:prstGeom prst="rect">
@@ -5639,7 +4712,7 @@
         <p:spPr>
           <a:xfrm>
             <a:off x="457200" y="164592"/>
-            <a:ext cx="11277295" cy="502920"/>
+            <a:ext cx="11277295" cy="384048"/>
           </a:xfrm>
           <a:prstGeom prst="rect">
             <a:avLst/>
@@ -5659,21 +4732,594 @@
                 </a:solidFill>
                 <a:latin typeface="Calibri"/>
               </a:rPr>
-              <a:t>Para el PI esta semana</a:t>
-            </a:r>
-          </a:p>
-        </p:txBody>
-      </p:sp>
-      <p:sp>
-        <p:nvSpPr>
-          <p:cNvPr id="5" name="Rounded Rectangle 4"/>
+              <a:t>Herramientas de hoy</a:t>
+            </a:r>
+          </a:p>
+        </p:txBody>
+      </p:sp>
+      <p:sp>
+        <p:nvSpPr>
+          <p:cNvPr id="5" name="TextBox 4"/>
+          <p:cNvSpPr txBox="1"/>
+          <p:nvPr/>
+        </p:nvSpPr>
+        <p:spPr>
+          <a:xfrm>
+            <a:off x="457200" y="566928"/>
+            <a:ext cx="11277295" cy="411480"/>
+          </a:xfrm>
+          <a:prstGeom prst="rect">
+            <a:avLst/>
+          </a:prstGeom>
+          <a:noFill/>
+        </p:spPr>
+        <p:txBody>
+          <a:bodyPr wrap="square">
+            <a:spAutoFit/>
+          </a:bodyPr>
+          <a:lstStyle/>
+          <a:p>
+            <a:r>
+              <a:rPr sz="1400" b="0" i="0">
+                <a:solidFill>
+                  <a:srgbClr val="B8D8EE"/>
+                </a:solidFill>
+                <a:latin typeface="Calibri"/>
+              </a:rPr>
+              <a:t>Gratis · funcionan en el navegador</a:t>
+            </a:r>
+          </a:p>
+        </p:txBody>
+      </p:sp>
+      <p:sp>
+        <p:nvSpPr>
+          <p:cNvPr id="6" name="Rounded Rectangle 5"/>
           <p:cNvSpPr/>
           <p:nvPr/>
         </p:nvSpPr>
         <p:spPr>
           <a:xfrm>
-            <a:off x="457200" y="1261872"/>
-            <a:ext cx="11277295" cy="1051560"/>
+            <a:off x="457200" y="1591056"/>
+            <a:ext cx="3624986" cy="2299716"/>
+          </a:xfrm>
+          <a:prstGeom prst="roundRect">
+            <a:avLst>
+              <a:gd name="adj" fmla="val 12000"/>
+            </a:avLst>
+          </a:prstGeom>
+          <a:solidFill>
+            <a:srgbClr val="F2F2F2"/>
+          </a:solidFill>
+          <a:ln>
+            <a:noFill/>
+          </a:ln>
+        </p:spPr>
+        <p:style>
+          <a:lnRef idx="1">
+            <a:schemeClr val="accent1"/>
+          </a:lnRef>
+          <a:fillRef idx="3">
+            <a:schemeClr val="accent1"/>
+          </a:fillRef>
+          <a:effectRef idx="2">
+            <a:schemeClr val="accent1"/>
+          </a:effectRef>
+          <a:fontRef idx="minor">
+            <a:schemeClr val="lt1"/>
+          </a:fontRef>
+        </p:style>
+        <p:txBody>
+          <a:bodyPr rtlCol="0" anchor="ctr"/>
+          <a:lstStyle/>
+          <a:p>
+            <a:pPr algn="ctr"/>
+          </a:p>
+        </p:txBody>
+      </p:sp>
+      <p:sp>
+        <p:nvSpPr>
+          <p:cNvPr id="7" name="Rectangle 6"/>
+          <p:cNvSpPr/>
+          <p:nvPr/>
+        </p:nvSpPr>
+        <p:spPr>
+          <a:xfrm>
+            <a:off x="457200" y="1591056"/>
+            <a:ext cx="3624986" cy="64008"/>
+          </a:xfrm>
+          <a:prstGeom prst="rect">
+            <a:avLst/>
+          </a:prstGeom>
+          <a:solidFill>
+            <a:srgbClr val="095292"/>
+          </a:solidFill>
+          <a:ln>
+            <a:noFill/>
+          </a:ln>
+        </p:spPr>
+        <p:style>
+          <a:lnRef idx="1">
+            <a:schemeClr val="accent1"/>
+          </a:lnRef>
+          <a:fillRef idx="3">
+            <a:schemeClr val="accent1"/>
+          </a:fillRef>
+          <a:effectRef idx="2">
+            <a:schemeClr val="accent1"/>
+          </a:effectRef>
+          <a:fontRef idx="minor">
+            <a:schemeClr val="lt1"/>
+          </a:fontRef>
+        </p:style>
+        <p:txBody>
+          <a:bodyPr rtlCol="0" anchor="ctr"/>
+          <a:lstStyle/>
+          <a:p>
+            <a:pPr algn="ctr"/>
+          </a:p>
+        </p:txBody>
+      </p:sp>
+      <p:sp>
+        <p:nvSpPr>
+          <p:cNvPr id="8" name="Rectangle 7"/>
+          <p:cNvSpPr/>
+          <p:nvPr/>
+        </p:nvSpPr>
+        <p:spPr>
+          <a:xfrm>
+            <a:off x="457200" y="1655064"/>
+            <a:ext cx="3624986" cy="27432"/>
+          </a:xfrm>
+          <a:prstGeom prst="rect">
+            <a:avLst/>
+          </a:prstGeom>
+          <a:solidFill>
+            <a:srgbClr val="FFD000"/>
+          </a:solidFill>
+          <a:ln>
+            <a:noFill/>
+          </a:ln>
+        </p:spPr>
+        <p:style>
+          <a:lnRef idx="1">
+            <a:schemeClr val="accent1"/>
+          </a:lnRef>
+          <a:fillRef idx="3">
+            <a:schemeClr val="accent1"/>
+          </a:fillRef>
+          <a:effectRef idx="2">
+            <a:schemeClr val="accent1"/>
+          </a:effectRef>
+          <a:fontRef idx="minor">
+            <a:schemeClr val="lt1"/>
+          </a:fontRef>
+        </p:style>
+        <p:txBody>
+          <a:bodyPr rtlCol="0" anchor="ctr"/>
+          <a:lstStyle/>
+          <a:p>
+            <a:pPr algn="ctr"/>
+          </a:p>
+        </p:txBody>
+      </p:sp>
+      <p:pic>
+        <p:nvPicPr>
+          <p:cNvPr id="9" name="Picture 8" descr="drawio.png"/>
+          <p:cNvPicPr>
+            <a:picLocks noChangeAspect="1"/>
+          </p:cNvPicPr>
+          <p:nvPr/>
+        </p:nvPicPr>
+        <p:blipFill>
+          <a:blip r:embed="rId2"/>
+          <a:stretch>
+            <a:fillRect/>
+          </a:stretch>
+        </p:blipFill>
+        <p:spPr>
+          <a:xfrm>
+            <a:off x="1659331" y="1847087"/>
+            <a:ext cx="1220724" cy="1220724"/>
+          </a:xfrm>
+          <a:prstGeom prst="rect">
+            <a:avLst/>
+          </a:prstGeom>
+        </p:spPr>
+      </p:pic>
+      <p:sp>
+        <p:nvSpPr>
+          <p:cNvPr id="10" name="TextBox 9"/>
+          <p:cNvSpPr txBox="1"/>
+          <p:nvPr/>
+        </p:nvSpPr>
+        <p:spPr>
+          <a:xfrm>
+            <a:off x="530352" y="3159251"/>
+            <a:ext cx="3478682" cy="621792"/>
+          </a:xfrm>
+          <a:prstGeom prst="rect">
+            <a:avLst/>
+          </a:prstGeom>
+          <a:noFill/>
+        </p:spPr>
+        <p:txBody>
+          <a:bodyPr wrap="square" anchor="t"/>
+          <a:lstStyle/>
+          <a:p>
+            <a:pPr algn="ctr"/>
+            <a:r>
+              <a:rPr sz="1300" b="1" i="0">
+                <a:solidFill>
+                  <a:srgbClr val="095292"/>
+                </a:solidFill>
+                <a:latin typeface="Calibri"/>
+              </a:rPr>
+              <a:t>Draw.Io</a:t>
+            </a:r>
+          </a:p>
+          <a:p>
+            <a:pPr algn="ctr">
+              <a:spcBef>
+                <a:spcPts val="200"/>
+              </a:spcBef>
+            </a:pPr>
+            <a:r>
+              <a:rPr sz="1000" b="0" i="0">
+                <a:solidFill>
+                  <a:srgbClr val="666666"/>
+                </a:solidFill>
+                <a:latin typeface="Calibri"/>
+              </a:rPr>
+              <a:t>Diagramas UML y de contexto</a:t>
+            </a:r>
+          </a:p>
+        </p:txBody>
+      </p:sp>
+      <p:sp>
+        <p:nvSpPr>
+          <p:cNvPr id="11" name="Rounded Rectangle 10"/>
+          <p:cNvSpPr/>
+          <p:nvPr/>
+        </p:nvSpPr>
+        <p:spPr>
+          <a:xfrm>
+            <a:off x="4283354" y="1591056"/>
+            <a:ext cx="3624986" cy="2299716"/>
+          </a:xfrm>
+          <a:prstGeom prst="roundRect">
+            <a:avLst>
+              <a:gd name="adj" fmla="val 12000"/>
+            </a:avLst>
+          </a:prstGeom>
+          <a:solidFill>
+            <a:srgbClr val="F2F2F2"/>
+          </a:solidFill>
+          <a:ln>
+            <a:noFill/>
+          </a:ln>
+        </p:spPr>
+        <p:style>
+          <a:lnRef idx="1">
+            <a:schemeClr val="accent1"/>
+          </a:lnRef>
+          <a:fillRef idx="3">
+            <a:schemeClr val="accent1"/>
+          </a:fillRef>
+          <a:effectRef idx="2">
+            <a:schemeClr val="accent1"/>
+          </a:effectRef>
+          <a:fontRef idx="minor">
+            <a:schemeClr val="lt1"/>
+          </a:fontRef>
+        </p:style>
+        <p:txBody>
+          <a:bodyPr rtlCol="0" anchor="ctr"/>
+          <a:lstStyle/>
+          <a:p>
+            <a:pPr algn="ctr"/>
+          </a:p>
+        </p:txBody>
+      </p:sp>
+      <p:sp>
+        <p:nvSpPr>
+          <p:cNvPr id="12" name="Rectangle 11"/>
+          <p:cNvSpPr/>
+          <p:nvPr/>
+        </p:nvSpPr>
+        <p:spPr>
+          <a:xfrm>
+            <a:off x="4283354" y="1591056"/>
+            <a:ext cx="3624986" cy="64008"/>
+          </a:xfrm>
+          <a:prstGeom prst="rect">
+            <a:avLst/>
+          </a:prstGeom>
+          <a:solidFill>
+            <a:srgbClr val="095292"/>
+          </a:solidFill>
+          <a:ln>
+            <a:noFill/>
+          </a:ln>
+        </p:spPr>
+        <p:style>
+          <a:lnRef idx="1">
+            <a:schemeClr val="accent1"/>
+          </a:lnRef>
+          <a:fillRef idx="3">
+            <a:schemeClr val="accent1"/>
+          </a:fillRef>
+          <a:effectRef idx="2">
+            <a:schemeClr val="accent1"/>
+          </a:effectRef>
+          <a:fontRef idx="minor">
+            <a:schemeClr val="lt1"/>
+          </a:fontRef>
+        </p:style>
+        <p:txBody>
+          <a:bodyPr rtlCol="0" anchor="ctr"/>
+          <a:lstStyle/>
+          <a:p>
+            <a:pPr algn="ctr"/>
+          </a:p>
+        </p:txBody>
+      </p:sp>
+      <p:sp>
+        <p:nvSpPr>
+          <p:cNvPr id="13" name="Rectangle 12"/>
+          <p:cNvSpPr/>
+          <p:nvPr/>
+        </p:nvSpPr>
+        <p:spPr>
+          <a:xfrm>
+            <a:off x="4283354" y="1655064"/>
+            <a:ext cx="3624986" cy="27432"/>
+          </a:xfrm>
+          <a:prstGeom prst="rect">
+            <a:avLst/>
+          </a:prstGeom>
+          <a:solidFill>
+            <a:srgbClr val="FFD000"/>
+          </a:solidFill>
+          <a:ln>
+            <a:noFill/>
+          </a:ln>
+        </p:spPr>
+        <p:style>
+          <a:lnRef idx="1">
+            <a:schemeClr val="accent1"/>
+          </a:lnRef>
+          <a:fillRef idx="3">
+            <a:schemeClr val="accent1"/>
+          </a:fillRef>
+          <a:effectRef idx="2">
+            <a:schemeClr val="accent1"/>
+          </a:effectRef>
+          <a:fontRef idx="minor">
+            <a:schemeClr val="lt1"/>
+          </a:fontRef>
+        </p:style>
+        <p:txBody>
+          <a:bodyPr rtlCol="0" anchor="ctr"/>
+          <a:lstStyle/>
+          <a:p>
+            <a:pPr algn="ctr"/>
+          </a:p>
+        </p:txBody>
+      </p:sp>
+      <p:pic>
+        <p:nvPicPr>
+          <p:cNvPr id="14" name="Picture 13" descr="google_docs.png"/>
+          <p:cNvPicPr>
+            <a:picLocks noChangeAspect="1"/>
+          </p:cNvPicPr>
+          <p:nvPr/>
+        </p:nvPicPr>
+        <p:blipFill>
+          <a:blip r:embed="rId3"/>
+          <a:stretch>
+            <a:fillRect/>
+          </a:stretch>
+        </p:blipFill>
+        <p:spPr>
+          <a:xfrm>
+            <a:off x="5485485" y="1847087"/>
+            <a:ext cx="1220724" cy="1220724"/>
+          </a:xfrm>
+          <a:prstGeom prst="rect">
+            <a:avLst/>
+          </a:prstGeom>
+        </p:spPr>
+      </p:pic>
+      <p:sp>
+        <p:nvSpPr>
+          <p:cNvPr id="15" name="TextBox 14"/>
+          <p:cNvSpPr txBox="1"/>
+          <p:nvPr/>
+        </p:nvSpPr>
+        <p:spPr>
+          <a:xfrm>
+            <a:off x="4356506" y="3159251"/>
+            <a:ext cx="3478682" cy="621792"/>
+          </a:xfrm>
+          <a:prstGeom prst="rect">
+            <a:avLst/>
+          </a:prstGeom>
+          <a:noFill/>
+        </p:spPr>
+        <p:txBody>
+          <a:bodyPr wrap="square" anchor="t"/>
+          <a:lstStyle/>
+          <a:p>
+            <a:pPr algn="ctr"/>
+            <a:r>
+              <a:rPr sz="1300" b="1" i="0">
+                <a:solidFill>
+                  <a:srgbClr val="095292"/>
+                </a:solidFill>
+                <a:latin typeface="Calibri"/>
+              </a:rPr>
+              <a:t>google docs</a:t>
+            </a:r>
+          </a:p>
+          <a:p>
+            <a:pPr algn="ctr">
+              <a:spcBef>
+                <a:spcPts val="200"/>
+              </a:spcBef>
+            </a:pPr>
+            <a:r>
+              <a:rPr sz="1000" b="0" i="0">
+                <a:solidFill>
+                  <a:srgbClr val="666666"/>
+                </a:solidFill>
+                <a:latin typeface="Calibri"/>
+              </a:rPr>
+              <a:t>Documentos del paquete de diseño</a:t>
+            </a:r>
+          </a:p>
+        </p:txBody>
+      </p:sp>
+      <p:sp>
+        <p:nvSpPr>
+          <p:cNvPr id="16" name="Rounded Rectangle 15"/>
+          <p:cNvSpPr/>
+          <p:nvPr/>
+        </p:nvSpPr>
+        <p:spPr>
+          <a:xfrm>
+            <a:off x="8109508" y="1591056"/>
+            <a:ext cx="3624986" cy="2299716"/>
+          </a:xfrm>
+          <a:prstGeom prst="roundRect">
+            <a:avLst>
+              <a:gd name="adj" fmla="val 12000"/>
+            </a:avLst>
+          </a:prstGeom>
+          <a:solidFill>
+            <a:srgbClr val="F2F2F2"/>
+          </a:solidFill>
+          <a:ln>
+            <a:noFill/>
+          </a:ln>
+        </p:spPr>
+        <p:style>
+          <a:lnRef idx="1">
+            <a:schemeClr val="accent1"/>
+          </a:lnRef>
+          <a:fillRef idx="3">
+            <a:schemeClr val="accent1"/>
+          </a:fillRef>
+          <a:effectRef idx="2">
+            <a:schemeClr val="accent1"/>
+          </a:effectRef>
+          <a:fontRef idx="minor">
+            <a:schemeClr val="lt1"/>
+          </a:fontRef>
+        </p:style>
+        <p:txBody>
+          <a:bodyPr rtlCol="0" anchor="ctr"/>
+          <a:lstStyle/>
+          <a:p>
+            <a:pPr algn="ctr"/>
+          </a:p>
+        </p:txBody>
+      </p:sp>
+      <p:sp>
+        <p:nvSpPr>
+          <p:cNvPr id="17" name="Rectangle 16"/>
+          <p:cNvSpPr/>
+          <p:nvPr/>
+        </p:nvSpPr>
+        <p:spPr>
+          <a:xfrm>
+            <a:off x="8109508" y="1591056"/>
+            <a:ext cx="3624986" cy="64008"/>
+          </a:xfrm>
+          <a:prstGeom prst="rect">
+            <a:avLst/>
+          </a:prstGeom>
+          <a:solidFill>
+            <a:srgbClr val="095292"/>
+          </a:solidFill>
+          <a:ln>
+            <a:noFill/>
+          </a:ln>
+        </p:spPr>
+        <p:style>
+          <a:lnRef idx="1">
+            <a:schemeClr val="accent1"/>
+          </a:lnRef>
+          <a:fillRef idx="3">
+            <a:schemeClr val="accent1"/>
+          </a:fillRef>
+          <a:effectRef idx="2">
+            <a:schemeClr val="accent1"/>
+          </a:effectRef>
+          <a:fontRef idx="minor">
+            <a:schemeClr val="lt1"/>
+          </a:fontRef>
+        </p:style>
+        <p:txBody>
+          <a:bodyPr rtlCol="0" anchor="ctr"/>
+          <a:lstStyle/>
+          <a:p>
+            <a:pPr algn="ctr"/>
+          </a:p>
+        </p:txBody>
+      </p:sp>
+      <p:sp>
+        <p:nvSpPr>
+          <p:cNvPr id="18" name="Rectangle 17"/>
+          <p:cNvSpPr/>
+          <p:nvPr/>
+        </p:nvSpPr>
+        <p:spPr>
+          <a:xfrm>
+            <a:off x="8109508" y="1655064"/>
+            <a:ext cx="3624986" cy="27432"/>
+          </a:xfrm>
+          <a:prstGeom prst="rect">
+            <a:avLst/>
+          </a:prstGeom>
+          <a:solidFill>
+            <a:srgbClr val="FFD000"/>
+          </a:solidFill>
+          <a:ln>
+            <a:noFill/>
+          </a:ln>
+        </p:spPr>
+        <p:style>
+          <a:lnRef idx="1">
+            <a:schemeClr val="accent1"/>
+          </a:lnRef>
+          <a:fillRef idx="3">
+            <a:schemeClr val="accent1"/>
+          </a:fillRef>
+          <a:effectRef idx="2">
+            <a:schemeClr val="accent1"/>
+          </a:effectRef>
+          <a:fontRef idx="minor">
+            <a:schemeClr val="lt1"/>
+          </a:fontRef>
+        </p:style>
+        <p:txBody>
+          <a:bodyPr rtlCol="0" anchor="ctr"/>
+          <a:lstStyle/>
+          <a:p>
+            <a:pPr algn="ctr"/>
+          </a:p>
+        </p:txBody>
+      </p:sp>
+      <p:sp>
+        <p:nvSpPr>
+          <p:cNvPr id="19" name="Rounded Rectangle 18"/>
+          <p:cNvSpPr/>
+          <p:nvPr/>
+        </p:nvSpPr>
+        <p:spPr>
+          <a:xfrm>
+            <a:off x="9311640" y="1847087"/>
+            <a:ext cx="1220724" cy="1220724"/>
           </a:xfrm>
           <a:prstGeom prst="roundRect">
             <a:avLst>
@@ -5711,20 +5357,104 @@
       </p:sp>
       <p:sp>
         <p:nvSpPr>
-          <p:cNvPr id="6" name="Rectangle 5"/>
+          <p:cNvPr id="20" name="TextBox 19"/>
+          <p:cNvSpPr txBox="1"/>
+          <p:nvPr/>
+        </p:nvSpPr>
+        <p:spPr>
+          <a:xfrm>
+            <a:off x="9311640" y="1847087"/>
+            <a:ext cx="1220724" cy="1220724"/>
+          </a:xfrm>
+          <a:prstGeom prst="rect">
+            <a:avLst/>
+          </a:prstGeom>
+          <a:noFill/>
+        </p:spPr>
+        <p:txBody>
+          <a:bodyPr wrap="square" anchor="ctr"/>
+          <a:lstStyle/>
+          <a:p>
+            <a:pPr algn="ctr"/>
+            <a:r>
+              <a:rPr sz="1600" b="1" i="0">
+                <a:solidFill>
+                  <a:srgbClr val="095292"/>
+                </a:solidFill>
+                <a:latin typeface="Calibri"/>
+              </a:rPr>
+              <a:t>F</a:t>
+            </a:r>
+          </a:p>
+        </p:txBody>
+      </p:sp>
+      <p:sp>
+        <p:nvSpPr>
+          <p:cNvPr id="21" name="TextBox 20"/>
+          <p:cNvSpPr txBox="1"/>
+          <p:nvPr/>
+        </p:nvSpPr>
+        <p:spPr>
+          <a:xfrm>
+            <a:off x="8182660" y="3159251"/>
+            <a:ext cx="3478682" cy="621792"/>
+          </a:xfrm>
+          <a:prstGeom prst="rect">
+            <a:avLst/>
+          </a:prstGeom>
+          <a:noFill/>
+        </p:spPr>
+        <p:txBody>
+          <a:bodyPr wrap="square" anchor="t"/>
+          <a:lstStyle/>
+          <a:p>
+            <a:pPr algn="ctr"/>
+            <a:r>
+              <a:rPr sz="1300" b="1" i="0">
+                <a:solidFill>
+                  <a:srgbClr val="095292"/>
+                </a:solidFill>
+                <a:latin typeface="Calibri"/>
+              </a:rPr>
+              <a:t>Figma</a:t>
+            </a:r>
+          </a:p>
+          <a:p>
+            <a:pPr algn="ctr">
+              <a:spcBef>
+                <a:spcPts val="200"/>
+              </a:spcBef>
+            </a:pPr>
+            <a:r>
+              <a:rPr sz="1000" b="0" i="0">
+                <a:solidFill>
+                  <a:srgbClr val="666666"/>
+                </a:solidFill>
+                <a:latin typeface="Calibri"/>
+              </a:rPr>
+              <a:t>Wireframes y prototipo navegable</a:t>
+            </a:r>
+          </a:p>
+        </p:txBody>
+      </p:sp>
+      <p:sp>
+        <p:nvSpPr>
+          <p:cNvPr id="22" name="Rounded Rectangle 21"/>
           <p:cNvSpPr/>
           <p:nvPr/>
         </p:nvSpPr>
         <p:spPr>
           <a:xfrm>
-            <a:off x="457200" y="1261872"/>
-            <a:ext cx="128016" cy="1051560"/>
-          </a:xfrm>
-          <a:prstGeom prst="rect">
-            <a:avLst/>
+            <a:off x="2370277" y="4055364"/>
+            <a:ext cx="3624986" cy="2299716"/>
+          </a:xfrm>
+          <a:prstGeom prst="roundRect">
+            <a:avLst>
+              <a:gd name="adj" fmla="val 12000"/>
+            </a:avLst>
           </a:prstGeom>
           <a:solidFill>
-            <a:srgbClr val="269CCB"/>
+            <a:srgbClr val="F2F2F2"/>
           </a:solidFill>
           <a:ln>
             <a:noFill/>
@@ -5754,72 +5484,20 @@
       </p:sp>
       <p:sp>
         <p:nvSpPr>
-          <p:cNvPr id="7" name="TextBox 6"/>
-          <p:cNvSpPr txBox="1"/>
-          <p:nvPr/>
-        </p:nvSpPr>
-        <p:spPr>
-          <a:xfrm>
-            <a:off x="777240" y="1399031"/>
-            <a:ext cx="10774375" cy="822959"/>
-          </a:xfrm>
-          <a:prstGeom prst="rect">
-            <a:avLst/>
-          </a:prstGeom>
-          <a:noFill/>
-        </p:spPr>
-        <p:txBody>
-          <a:bodyPr wrap="square">
-            <a:spAutoFit/>
-          </a:bodyPr>
-          <a:lstStyle/>
-          <a:p>
-            <a:r>
-              <a:rPr sz="1200" b="1" i="0">
-                <a:solidFill>
-                  <a:srgbClr val="269CCB"/>
-                </a:solidFill>
-                <a:latin typeface="Calibri"/>
-              </a:rPr>
-              <a:t>Info</a:t>
-            </a:r>
-          </a:p>
-          <a:p>
-            <a:pPr>
-              <a:spcBef>
-                <a:spcPts val="400"/>
-              </a:spcBef>
-            </a:pPr>
-            <a:r>
-              <a:rPr sz="1400" b="0" i="0">
-                <a:solidFill>
-                  <a:srgbClr val="333333"/>
-                </a:solidFill>
-                <a:latin typeface="Calibri"/>
-              </a:rPr>
-              <a:t>Hito: Queda armado el guion cronometrado de sustentacion de VetCare y consolidado el documento final de diseño en una sola pieza coherente.</a:t>
-            </a:r>
-          </a:p>
-        </p:txBody>
-      </p:sp>
-      <p:sp>
-        <p:nvSpPr>
-          <p:cNvPr id="8" name="Rounded Rectangle 7"/>
+          <p:cNvPr id="23" name="Rectangle 22"/>
           <p:cNvSpPr/>
           <p:nvPr/>
         </p:nvSpPr>
         <p:spPr>
           <a:xfrm>
-            <a:off x="457200" y="2478024"/>
-            <a:ext cx="11277295" cy="1051560"/>
-          </a:xfrm>
-          <a:prstGeom prst="roundRect">
-            <a:avLst>
-              <a:gd name="adj" fmla="val 12000"/>
-            </a:avLst>
+            <a:off x="2370277" y="4055364"/>
+            <a:ext cx="3624986" cy="64008"/>
+          </a:xfrm>
+          <a:prstGeom prst="rect">
+            <a:avLst/>
           </a:prstGeom>
           <a:solidFill>
-            <a:srgbClr val="FFF8E1"/>
+            <a:srgbClr val="095292"/>
           </a:solidFill>
           <a:ln>
             <a:noFill/>
@@ -5849,14 +5527,14 @@
       </p:sp>
       <p:sp>
         <p:nvSpPr>
-          <p:cNvPr id="9" name="Rectangle 8"/>
+          <p:cNvPr id="24" name="Rectangle 23"/>
           <p:cNvSpPr/>
           <p:nvPr/>
         </p:nvSpPr>
         <p:spPr>
           <a:xfrm>
-            <a:off x="457200" y="2478024"/>
-            <a:ext cx="128016" cy="1051560"/>
+            <a:off x="2370277" y="4119372"/>
+            <a:ext cx="3624986" cy="27432"/>
           </a:xfrm>
           <a:prstGeom prst="rect">
             <a:avLst/>
@@ -5892,64 +5570,14 @@
       </p:sp>
       <p:sp>
         <p:nvSpPr>
-          <p:cNvPr id="10" name="TextBox 9"/>
-          <p:cNvSpPr txBox="1"/>
-          <p:nvPr/>
-        </p:nvSpPr>
-        <p:spPr>
-          <a:xfrm>
-            <a:off x="777240" y="2615184"/>
-            <a:ext cx="10774375" cy="822959"/>
-          </a:xfrm>
-          <a:prstGeom prst="rect">
-            <a:avLst/>
-          </a:prstGeom>
-          <a:noFill/>
-        </p:spPr>
-        <p:txBody>
-          <a:bodyPr wrap="square">
-            <a:spAutoFit/>
-          </a:bodyPr>
-          <a:lstStyle/>
-          <a:p>
-            <a:r>
-              <a:rPr sz="1200" b="1" i="0">
-                <a:solidFill>
-                  <a:srgbClr val="FFD000"/>
-                </a:solidFill>
-                <a:latin typeface="Calibri"/>
-              </a:rPr>
-              <a:t>Aclaración</a:t>
-            </a:r>
-          </a:p>
-          <a:p>
-            <a:pPr>
-              <a:spcBef>
-                <a:spcPts val="400"/>
-              </a:spcBef>
-            </a:pPr>
-            <a:r>
-              <a:rPr sz="1400" b="0" i="0">
-                <a:solidFill>
-                  <a:srgbClr val="333333"/>
-                </a:solidFill>
-                <a:latin typeface="Calibri"/>
-              </a:rPr>
-              <a:t>Enunciado completo: Clases/Proyecto Integrador/ (VetCare).</a:t>
-            </a:r>
-          </a:p>
-        </p:txBody>
-      </p:sp>
-      <p:sp>
-        <p:nvSpPr>
-          <p:cNvPr id="11" name="Rounded Rectangle 10"/>
+          <p:cNvPr id="25" name="Rounded Rectangle 24"/>
           <p:cNvSpPr/>
           <p:nvPr/>
         </p:nvSpPr>
         <p:spPr>
           <a:xfrm>
-            <a:off x="457200" y="3694176"/>
-            <a:ext cx="11277295" cy="1051560"/>
+            <a:off x="3572408" y="4311396"/>
+            <a:ext cx="1220724" cy="1220724"/>
           </a:xfrm>
           <a:prstGeom prst="roundRect">
             <a:avLst>
@@ -5957,7 +5585,7 @@
             </a:avLst>
           </a:prstGeom>
           <a:solidFill>
-            <a:srgbClr val="FBE4E4"/>
+            <a:srgbClr val="E8F4FA"/>
           </a:solidFill>
           <a:ln>
             <a:noFill/>
@@ -5987,20 +5615,104 @@
       </p:sp>
       <p:sp>
         <p:nvSpPr>
-          <p:cNvPr id="12" name="Rectangle 11"/>
+          <p:cNvPr id="26" name="TextBox 25"/>
+          <p:cNvSpPr txBox="1"/>
+          <p:nvPr/>
+        </p:nvSpPr>
+        <p:spPr>
+          <a:xfrm>
+            <a:off x="3572408" y="4311396"/>
+            <a:ext cx="1220724" cy="1220724"/>
+          </a:xfrm>
+          <a:prstGeom prst="rect">
+            <a:avLst/>
+          </a:prstGeom>
+          <a:noFill/>
+        </p:spPr>
+        <p:txBody>
+          <a:bodyPr wrap="square" anchor="ctr"/>
+          <a:lstStyle/>
+          <a:p>
+            <a:pPr algn="ctr"/>
+            <a:r>
+              <a:rPr sz="1600" b="1" i="0">
+                <a:solidFill>
+                  <a:srgbClr val="095292"/>
+                </a:solidFill>
+                <a:latin typeface="Calibri"/>
+              </a:rPr>
+              <a:t>P</a:t>
+            </a:r>
+          </a:p>
+        </p:txBody>
+      </p:sp>
+      <p:sp>
+        <p:nvSpPr>
+          <p:cNvPr id="27" name="TextBox 26"/>
+          <p:cNvSpPr txBox="1"/>
+          <p:nvPr/>
+        </p:nvSpPr>
+        <p:spPr>
+          <a:xfrm>
+            <a:off x="2443429" y="5623560"/>
+            <a:ext cx="3478682" cy="621792"/>
+          </a:xfrm>
+          <a:prstGeom prst="rect">
+            <a:avLst/>
+          </a:prstGeom>
+          <a:noFill/>
+        </p:spPr>
+        <p:txBody>
+          <a:bodyPr wrap="square" anchor="t"/>
+          <a:lstStyle/>
+          <a:p>
+            <a:pPr algn="ctr"/>
+            <a:r>
+              <a:rPr sz="1300" b="1" i="0">
+                <a:solidFill>
+                  <a:srgbClr val="095292"/>
+                </a:solidFill>
+                <a:latin typeface="Calibri"/>
+              </a:rPr>
+              <a:t>Penpot</a:t>
+            </a:r>
+          </a:p>
+          <a:p>
+            <a:pPr algn="ctr">
+              <a:spcBef>
+                <a:spcPts val="200"/>
+              </a:spcBef>
+            </a:pPr>
+            <a:r>
+              <a:rPr sz="1000" b="0" i="0">
+                <a:solidFill>
+                  <a:srgbClr val="666666"/>
+                </a:solidFill>
+                <a:latin typeface="Calibri"/>
+              </a:rPr>
+              <a:t>Alternativa libre a Figma</a:t>
+            </a:r>
+          </a:p>
+        </p:txBody>
+      </p:sp>
+      <p:sp>
+        <p:nvSpPr>
+          <p:cNvPr id="28" name="Rounded Rectangle 27"/>
           <p:cNvSpPr/>
           <p:nvPr/>
         </p:nvSpPr>
         <p:spPr>
           <a:xfrm>
-            <a:off x="457200" y="3694176"/>
-            <a:ext cx="128016" cy="1051560"/>
-          </a:xfrm>
-          <a:prstGeom prst="rect">
-            <a:avLst/>
+            <a:off x="6196431" y="4055364"/>
+            <a:ext cx="3624986" cy="2299716"/>
+          </a:xfrm>
+          <a:prstGeom prst="roundRect">
+            <a:avLst>
+              <a:gd name="adj" fmla="val 12000"/>
+            </a:avLst>
           </a:prstGeom>
           <a:solidFill>
-            <a:srgbClr val="A02030"/>
+            <a:srgbClr val="F2F2F2"/>
           </a:solidFill>
           <a:ln>
             <a:noFill/>
@@ -6030,14 +5742,124 @@
       </p:sp>
       <p:sp>
         <p:nvSpPr>
-          <p:cNvPr id="13" name="TextBox 12"/>
+          <p:cNvPr id="29" name="Rectangle 28"/>
+          <p:cNvSpPr/>
+          <p:nvPr/>
+        </p:nvSpPr>
+        <p:spPr>
+          <a:xfrm>
+            <a:off x="6196431" y="4055364"/>
+            <a:ext cx="3624986" cy="64008"/>
+          </a:xfrm>
+          <a:prstGeom prst="rect">
+            <a:avLst/>
+          </a:prstGeom>
+          <a:solidFill>
+            <a:srgbClr val="095292"/>
+          </a:solidFill>
+          <a:ln>
+            <a:noFill/>
+          </a:ln>
+        </p:spPr>
+        <p:style>
+          <a:lnRef idx="1">
+            <a:schemeClr val="accent1"/>
+          </a:lnRef>
+          <a:fillRef idx="3">
+            <a:schemeClr val="accent1"/>
+          </a:fillRef>
+          <a:effectRef idx="2">
+            <a:schemeClr val="accent1"/>
+          </a:effectRef>
+          <a:fontRef idx="minor">
+            <a:schemeClr val="lt1"/>
+          </a:fontRef>
+        </p:style>
+        <p:txBody>
+          <a:bodyPr rtlCol="0" anchor="ctr"/>
+          <a:lstStyle/>
+          <a:p>
+            <a:pPr algn="ctr"/>
+          </a:p>
+        </p:txBody>
+      </p:sp>
+      <p:sp>
+        <p:nvSpPr>
+          <p:cNvPr id="30" name="Rectangle 29"/>
+          <p:cNvSpPr/>
+          <p:nvPr/>
+        </p:nvSpPr>
+        <p:spPr>
+          <a:xfrm>
+            <a:off x="6196431" y="4119372"/>
+            <a:ext cx="3624986" cy="27432"/>
+          </a:xfrm>
+          <a:prstGeom prst="rect">
+            <a:avLst/>
+          </a:prstGeom>
+          <a:solidFill>
+            <a:srgbClr val="FFD000"/>
+          </a:solidFill>
+          <a:ln>
+            <a:noFill/>
+          </a:ln>
+        </p:spPr>
+        <p:style>
+          <a:lnRef idx="1">
+            <a:schemeClr val="accent1"/>
+          </a:lnRef>
+          <a:fillRef idx="3">
+            <a:schemeClr val="accent1"/>
+          </a:fillRef>
+          <a:effectRef idx="2">
+            <a:schemeClr val="accent1"/>
+          </a:effectRef>
+          <a:fontRef idx="minor">
+            <a:schemeClr val="lt1"/>
+          </a:fontRef>
+        </p:style>
+        <p:txBody>
+          <a:bodyPr rtlCol="0" anchor="ctr"/>
+          <a:lstStyle/>
+          <a:p>
+            <a:pPr algn="ctr"/>
+          </a:p>
+        </p:txBody>
+      </p:sp>
+      <p:pic>
+        <p:nvPicPr>
+          <p:cNvPr id="31" name="Picture 30" descr="examlab.png"/>
+          <p:cNvPicPr>
+            <a:picLocks noChangeAspect="1"/>
+          </p:cNvPicPr>
+          <p:nvPr/>
+        </p:nvPicPr>
+        <p:blipFill>
+          <a:blip r:embed="rId4"/>
+          <a:stretch>
+            <a:fillRect/>
+          </a:stretch>
+        </p:blipFill>
+        <p:spPr>
+          <a:xfrm>
+            <a:off x="7398562" y="4311396"/>
+            <a:ext cx="1220724" cy="1220724"/>
+          </a:xfrm>
+          <a:prstGeom prst="rect">
+            <a:avLst/>
+          </a:prstGeom>
+        </p:spPr>
+      </p:pic>
+      <p:sp>
+        <p:nvSpPr>
+          <p:cNvPr id="32" name="TextBox 31"/>
           <p:cNvSpPr txBox="1"/>
           <p:nvPr/>
         </p:nvSpPr>
         <p:spPr>
           <a:xfrm>
-            <a:off x="777240" y="3831336"/>
-            <a:ext cx="10774375" cy="822959"/>
+            <a:off x="6269583" y="5623560"/>
+            <a:ext cx="3478682" cy="621792"/>
           </a:xfrm>
           <a:prstGeom prst="rect">
             <a:avLst/>
@@ -6045,42 +5867,41 @@
           <a:noFill/>
         </p:spPr>
         <p:txBody>
-          <a:bodyPr wrap="square">
-            <a:spAutoFit/>
-          </a:bodyPr>
-          <a:lstStyle/>
-          <a:p>
-            <a:r>
-              <a:rPr sz="1200" b="1" i="0">
-                <a:solidFill>
-                  <a:srgbClr val="A02030"/>
-                </a:solidFill>
-                <a:latin typeface="Calibri"/>
-              </a:rPr>
-              <a:t>Atención</a:t>
-            </a:r>
-          </a:p>
-          <a:p>
-            <a:pPr>
+          <a:bodyPr wrap="square" anchor="t"/>
+          <a:lstStyle/>
+          <a:p>
+            <a:pPr algn="ctr"/>
+            <a:r>
+              <a:rPr sz="1300" b="1" i="0">
+                <a:solidFill>
+                  <a:srgbClr val="095292"/>
+                </a:solidFill>
+                <a:latin typeface="Calibri"/>
+              </a:rPr>
+              <a:t>la plataforma del curso</a:t>
+            </a:r>
+          </a:p>
+          <a:p>
+            <a:pPr algn="ctr">
               <a:spcBef>
-                <a:spcPts val="400"/>
+                <a:spcPts val="200"/>
               </a:spcBef>
             </a:pPr>
             <a:r>
-              <a:rPr sz="1400" b="0" i="0">
-                <a:solidFill>
-                  <a:srgbClr val="333333"/>
-                </a:solidFill>
-                <a:latin typeface="Calibri"/>
-              </a:rPr>
-              <a:t>Entrega del taller, si el docente lo asigna · en la fecha que indique el docente.</a:t>
-            </a:r>
-          </a:p>
-        </p:txBody>
-      </p:sp>
-      <p:sp>
-        <p:nvSpPr>
-          <p:cNvPr id="14" name="TextBox 13"/>
+              <a:rPr sz="1000" b="0" i="0">
+                <a:solidFill>
+                  <a:srgbClr val="666666"/>
+                </a:solidFill>
+                <a:latin typeface="Calibri"/>
+              </a:rPr>
+              <a:t>Entrega del taller · en la fecha que indique el docente</a:t>
+            </a:r>
+          </a:p>
+        </p:txBody>
+      </p:sp>
+      <p:sp>
+        <p:nvSpPr>
+          <p:cNvPr id="33" name="TextBox 32"/>
           <p:cNvSpPr txBox="1"/>
           <p:nvPr/>
         </p:nvSpPr>
@@ -6148,7 +5969,1695 @@
         <p:spPr>
           <a:xfrm>
             <a:off x="0" y="0"/>
-            <a:ext cx="12191695" cy="164592"/>
+            <a:ext cx="12191695" cy="960120"/>
+          </a:xfrm>
+          <a:prstGeom prst="rect">
+            <a:avLst/>
+          </a:prstGeom>
+          <a:solidFill>
+            <a:srgbClr val="095292"/>
+          </a:solidFill>
+          <a:ln>
+            <a:noFill/>
+          </a:ln>
+        </p:spPr>
+        <p:style>
+          <a:lnRef idx="1">
+            <a:schemeClr val="accent1"/>
+          </a:lnRef>
+          <a:fillRef idx="3">
+            <a:schemeClr val="accent1"/>
+          </a:fillRef>
+          <a:effectRef idx="2">
+            <a:schemeClr val="accent1"/>
+          </a:effectRef>
+          <a:fontRef idx="minor">
+            <a:schemeClr val="lt1"/>
+          </a:fontRef>
+        </p:style>
+        <p:txBody>
+          <a:bodyPr rtlCol="0" anchor="ctr"/>
+          <a:lstStyle/>
+          <a:p>
+            <a:pPr algn="ctr"/>
+          </a:p>
+        </p:txBody>
+      </p:sp>
+      <p:sp>
+        <p:nvSpPr>
+          <p:cNvPr id="3" name="Rectangle 2"/>
+          <p:cNvSpPr/>
+          <p:nvPr/>
+        </p:nvSpPr>
+        <p:spPr>
+          <a:xfrm>
+            <a:off x="0" y="960120"/>
+            <a:ext cx="12191695" cy="41148"/>
+          </a:xfrm>
+          <a:prstGeom prst="rect">
+            <a:avLst/>
+          </a:prstGeom>
+          <a:solidFill>
+            <a:srgbClr val="FFD000"/>
+          </a:solidFill>
+          <a:ln>
+            <a:noFill/>
+          </a:ln>
+        </p:spPr>
+        <p:style>
+          <a:lnRef idx="1">
+            <a:schemeClr val="accent1"/>
+          </a:lnRef>
+          <a:fillRef idx="3">
+            <a:schemeClr val="accent1"/>
+          </a:fillRef>
+          <a:effectRef idx="2">
+            <a:schemeClr val="accent1"/>
+          </a:effectRef>
+          <a:fontRef idx="minor">
+            <a:schemeClr val="lt1"/>
+          </a:fontRef>
+        </p:style>
+        <p:txBody>
+          <a:bodyPr rtlCol="0" anchor="ctr"/>
+          <a:lstStyle/>
+          <a:p>
+            <a:pPr algn="ctr"/>
+          </a:p>
+        </p:txBody>
+      </p:sp>
+      <p:sp>
+        <p:nvSpPr>
+          <p:cNvPr id="4" name="TextBox 3"/>
+          <p:cNvSpPr txBox="1"/>
+          <p:nvPr/>
+        </p:nvSpPr>
+        <p:spPr>
+          <a:xfrm>
+            <a:off x="457200" y="164592"/>
+            <a:ext cx="11277295" cy="502920"/>
+          </a:xfrm>
+          <a:prstGeom prst="rect">
+            <a:avLst/>
+          </a:prstGeom>
+          <a:noFill/>
+        </p:spPr>
+        <p:txBody>
+          <a:bodyPr wrap="square">
+            <a:spAutoFit/>
+          </a:bodyPr>
+          <a:lstStyle/>
+          <a:p>
+            <a:r>
+              <a:rPr sz="2600" b="1" i="0">
+                <a:solidFill>
+                  <a:srgbClr val="FFFFFF"/>
+                </a:solidFill>
+                <a:latin typeface="Calibri"/>
+              </a:rPr>
+              <a:t>Taller PI — por que importa</a:t>
+            </a:r>
+          </a:p>
+        </p:txBody>
+      </p:sp>
+      <p:sp>
+        <p:nvSpPr>
+          <p:cNvPr id="5" name="TextBox 4"/>
+          <p:cNvSpPr txBox="1"/>
+          <p:nvPr/>
+        </p:nvSpPr>
+        <p:spPr>
+          <a:xfrm>
+            <a:off x="457200" y="1170432"/>
+            <a:ext cx="11277295" cy="5230368"/>
+          </a:xfrm>
+          <a:prstGeom prst="rect">
+            <a:avLst/>
+          </a:prstGeom>
+          <a:noFill/>
+        </p:spPr>
+        <p:txBody>
+          <a:bodyPr wrap="square">
+            <a:spAutoFit/>
+          </a:bodyPr>
+          <a:lstStyle/>
+          <a:p>
+            <a:pPr>
+              <a:spcAft>
+                <a:spcPts val="800"/>
+              </a:spcAft>
+            </a:pPr>
+            <a:r>
+              <a:rPr sz="2000" b="0" i="0">
+                <a:solidFill>
+                  <a:srgbClr val="333333"/>
+                </a:solidFill>
+                <a:latin typeface="Calibri"/>
+              </a:rPr>
+              <a:t>–   </a:t>
+            </a:r>
+            <a:r>
+              <a:rPr sz="2000" b="1" i="0">
+                <a:solidFill>
+                  <a:srgbClr val="333333"/>
+                </a:solidFill>
+                <a:latin typeface="Calibri"/>
+              </a:rPr>
+              <a:t>Por que importa al PI:</a:t>
+            </a:r>
+            <a:r>
+              <a:rPr sz="2000" b="0" i="0">
+                <a:solidFill>
+                  <a:srgbClr val="333333"/>
+                </a:solidFill>
+                <a:latin typeface="Calibri"/>
+              </a:rPr>
+              <a:t> hoy se convierte el monton de artefactos de VetCare en un solo paquete defendible, y se ensaya la unica ocasion en que el equipo tiene que demostrar que entiende lo que entrego.</a:t>
+            </a:r>
+          </a:p>
+          <a:p>
+            <a:pPr>
+              <a:spcAft>
+                <a:spcPts val="800"/>
+              </a:spcAft>
+            </a:pPr>
+            <a:r>
+              <a:rPr sz="2000" b="0" i="0">
+                <a:solidFill>
+                  <a:srgbClr val="333333"/>
+                </a:solidFill>
+                <a:latin typeface="Calibri"/>
+              </a:rPr>
+              <a:t>–   No hay tema nuevo: todo el trabajo es de consolidacion, coherencia y argumentacion sobre lo ya producido.</a:t>
+            </a:r>
+          </a:p>
+          <a:p>
+            <a:pPr>
+              <a:spcAft>
+                <a:spcPts val="800"/>
+              </a:spcAft>
+            </a:pPr>
+            <a:r>
+              <a:rPr sz="2000" b="0" i="0">
+                <a:solidFill>
+                  <a:srgbClr val="333333"/>
+                </a:solidFill>
+                <a:latin typeface="Calibri"/>
+              </a:rPr>
+              <a:t>–   Las inconsistencias que se detecten hoy son baratas de arreglar; las mismas inconsistencias detectadas por el jurado o por el equipo de Programacion II salen carisimas.</a:t>
+            </a:r>
+          </a:p>
+        </p:txBody>
+      </p:sp>
+      <p:sp>
+        <p:nvSpPr>
+          <p:cNvPr id="6" name="TextBox 5"/>
+          <p:cNvSpPr txBox="1"/>
+          <p:nvPr/>
+        </p:nvSpPr>
+        <p:spPr>
+          <a:xfrm>
+            <a:off x="11185855" y="6473952"/>
+            <a:ext cx="640080" cy="274320"/>
+          </a:xfrm>
+          <a:prstGeom prst="rect">
+            <a:avLst/>
+          </a:prstGeom>
+          <a:noFill/>
+        </p:spPr>
+        <p:txBody>
+          <a:bodyPr wrap="square">
+            <a:spAutoFit/>
+          </a:bodyPr>
+          <a:lstStyle/>
+          <a:p>
+            <a:pPr algn="r"/>
+            <a:r>
+              <a:rPr sz="1100" b="0" i="0">
+                <a:solidFill>
+                  <a:srgbClr val="666666"/>
+                </a:solidFill>
+                <a:latin typeface="Calibri"/>
+              </a:rPr>
+              <a:t>14</a:t>
+            </a:r>
+          </a:p>
+        </p:txBody>
+      </p:sp>
+    </p:spTree>
+  </p:cSld>
+  <p:clrMapOvr>
+    <a:masterClrMapping/>
+  </p:clrMapOvr>
+</p:sld>
+</file>
+
+<file path=ppt/slides/slide15.xml><?xml version="1.0" encoding="utf-8"?>
+<p:sld xmlns:a="http://schemas.openxmlformats.org/drawingml/2006/main" xmlns:p="http://schemas.openxmlformats.org/presentationml/2006/main" xmlns:r="http://schemas.openxmlformats.org/officeDocument/2006/relationships">
+  <p:cSld>
+    <p:bg>
+      <p:bgPr>
+        <a:solidFill>
+          <a:srgbClr val="FFFFFF"/>
+        </a:solidFill>
+        <a:effectLst/>
+      </p:bgPr>
+    </p:bg>
+    <p:spTree>
+      <p:nvGrpSpPr>
+        <p:cNvPr id="1" name=""/>
+        <p:cNvGrpSpPr/>
+        <p:nvPr/>
+      </p:nvGrpSpPr>
+      <p:grpSpPr/>
+      <p:sp>
+        <p:nvSpPr>
+          <p:cNvPr id="2" name="Rectangle 1"/>
+          <p:cNvSpPr/>
+          <p:nvPr/>
+        </p:nvSpPr>
+        <p:spPr>
+          <a:xfrm>
+            <a:off x="0" y="0"/>
+            <a:ext cx="12191695" cy="960120"/>
+          </a:xfrm>
+          <a:prstGeom prst="rect">
+            <a:avLst/>
+          </a:prstGeom>
+          <a:solidFill>
+            <a:srgbClr val="095292"/>
+          </a:solidFill>
+          <a:ln>
+            <a:noFill/>
+          </a:ln>
+        </p:spPr>
+        <p:style>
+          <a:lnRef idx="1">
+            <a:schemeClr val="accent1"/>
+          </a:lnRef>
+          <a:fillRef idx="3">
+            <a:schemeClr val="accent1"/>
+          </a:fillRef>
+          <a:effectRef idx="2">
+            <a:schemeClr val="accent1"/>
+          </a:effectRef>
+          <a:fontRef idx="minor">
+            <a:schemeClr val="lt1"/>
+          </a:fontRef>
+        </p:style>
+        <p:txBody>
+          <a:bodyPr rtlCol="0" anchor="ctr"/>
+          <a:lstStyle/>
+          <a:p>
+            <a:pPr algn="ctr"/>
+          </a:p>
+        </p:txBody>
+      </p:sp>
+      <p:sp>
+        <p:nvSpPr>
+          <p:cNvPr id="3" name="Rectangle 2"/>
+          <p:cNvSpPr/>
+          <p:nvPr/>
+        </p:nvSpPr>
+        <p:spPr>
+          <a:xfrm>
+            <a:off x="0" y="960120"/>
+            <a:ext cx="12191695" cy="41148"/>
+          </a:xfrm>
+          <a:prstGeom prst="rect">
+            <a:avLst/>
+          </a:prstGeom>
+          <a:solidFill>
+            <a:srgbClr val="FFD000"/>
+          </a:solidFill>
+          <a:ln>
+            <a:noFill/>
+          </a:ln>
+        </p:spPr>
+        <p:style>
+          <a:lnRef idx="1">
+            <a:schemeClr val="accent1"/>
+          </a:lnRef>
+          <a:fillRef idx="3">
+            <a:schemeClr val="accent1"/>
+          </a:fillRef>
+          <a:effectRef idx="2">
+            <a:schemeClr val="accent1"/>
+          </a:effectRef>
+          <a:fontRef idx="minor">
+            <a:schemeClr val="lt1"/>
+          </a:fontRef>
+        </p:style>
+        <p:txBody>
+          <a:bodyPr rtlCol="0" anchor="ctr"/>
+          <a:lstStyle/>
+          <a:p>
+            <a:pPr algn="ctr"/>
+          </a:p>
+        </p:txBody>
+      </p:sp>
+      <p:sp>
+        <p:nvSpPr>
+          <p:cNvPr id="4" name="TextBox 3"/>
+          <p:cNvSpPr txBox="1"/>
+          <p:nvPr/>
+        </p:nvSpPr>
+        <p:spPr>
+          <a:xfrm>
+            <a:off x="457200" y="164592"/>
+            <a:ext cx="11277295" cy="502920"/>
+          </a:xfrm>
+          <a:prstGeom prst="rect">
+            <a:avLst/>
+          </a:prstGeom>
+          <a:noFill/>
+        </p:spPr>
+        <p:txBody>
+          <a:bodyPr wrap="square">
+            <a:spAutoFit/>
+          </a:bodyPr>
+          <a:lstStyle/>
+          <a:p>
+            <a:r>
+              <a:rPr sz="2600" b="1" i="0">
+                <a:solidFill>
+                  <a:srgbClr val="FFFFFF"/>
+                </a:solidFill>
+                <a:latin typeface="Calibri"/>
+              </a:rPr>
+              <a:t>Taller PI — punto de partida</a:t>
+            </a:r>
+          </a:p>
+        </p:txBody>
+      </p:sp>
+      <p:sp>
+        <p:nvSpPr>
+          <p:cNvPr id="5" name="TextBox 4"/>
+          <p:cNvSpPr txBox="1"/>
+          <p:nvPr/>
+        </p:nvSpPr>
+        <p:spPr>
+          <a:xfrm>
+            <a:off x="457200" y="1170432"/>
+            <a:ext cx="11277295" cy="5230368"/>
+          </a:xfrm>
+          <a:prstGeom prst="rect">
+            <a:avLst/>
+          </a:prstGeom>
+          <a:noFill/>
+        </p:spPr>
+        <p:txBody>
+          <a:bodyPr wrap="square">
+            <a:spAutoFit/>
+          </a:bodyPr>
+          <a:lstStyle/>
+          <a:p>
+            <a:pPr>
+              <a:spcAft>
+                <a:spcPts val="800"/>
+              </a:spcAft>
+            </a:pPr>
+            <a:r>
+              <a:rPr sz="2000" b="0" i="0">
+                <a:solidFill>
+                  <a:srgbClr val="333333"/>
+                </a:solidFill>
+                <a:latin typeface="Calibri"/>
+              </a:rPr>
+              <a:t>–   El equipo tiene todos los artefactos de VetCare producidos, pero dispersos en varios archivos y con pequeñas contradicciones entre ellos.</a:t>
+            </a:r>
+          </a:p>
+          <a:p>
+            <a:pPr>
+              <a:spcAft>
+                <a:spcPts val="800"/>
+              </a:spcAft>
+            </a:pPr>
+            <a:r>
+              <a:rPr sz="2000" b="0" i="0">
+                <a:solidFill>
+                  <a:srgbClr val="333333"/>
+                </a:solidFill>
+                <a:latin typeface="Calibri"/>
+              </a:rPr>
+              <a:t>–   Nadie ha dicho todavia en voz alta la historia completa del proyecto de principio a fin, y el reparto de quien expone que no esta definido.</a:t>
+            </a:r>
+          </a:p>
+          <a:p>
+            <a:pPr>
+              <a:spcAft>
+                <a:spcPts val="800"/>
+              </a:spcAft>
+            </a:pPr>
+            <a:r>
+              <a:rPr sz="2000" b="0" i="0">
+                <a:solidFill>
+                  <a:srgbClr val="333333"/>
+                </a:solidFill>
+                <a:latin typeface="Calibri"/>
+              </a:rPr>
+              <a:t>–   El prototipo navegable existe y funciona, pero solo lo ha manejado la persona que lo dibujo.</a:t>
+            </a:r>
+          </a:p>
+        </p:txBody>
+      </p:sp>
+      <p:sp>
+        <p:nvSpPr>
+          <p:cNvPr id="6" name="TextBox 5"/>
+          <p:cNvSpPr txBox="1"/>
+          <p:nvPr/>
+        </p:nvSpPr>
+        <p:spPr>
+          <a:xfrm>
+            <a:off x="11185855" y="6473952"/>
+            <a:ext cx="640080" cy="274320"/>
+          </a:xfrm>
+          <a:prstGeom prst="rect">
+            <a:avLst/>
+          </a:prstGeom>
+          <a:noFill/>
+        </p:spPr>
+        <p:txBody>
+          <a:bodyPr wrap="square">
+            <a:spAutoFit/>
+          </a:bodyPr>
+          <a:lstStyle/>
+          <a:p>
+            <a:pPr algn="r"/>
+            <a:r>
+              <a:rPr sz="1100" b="0" i="0">
+                <a:solidFill>
+                  <a:srgbClr val="666666"/>
+                </a:solidFill>
+                <a:latin typeface="Calibri"/>
+              </a:rPr>
+              <a:t>15</a:t>
+            </a:r>
+          </a:p>
+        </p:txBody>
+      </p:sp>
+    </p:spTree>
+  </p:cSld>
+  <p:clrMapOvr>
+    <a:masterClrMapping/>
+  </p:clrMapOvr>
+</p:sld>
+</file>
+
+<file path=ppt/slides/slide16.xml><?xml version="1.0" encoding="utf-8"?>
+<p:sld xmlns:a="http://schemas.openxmlformats.org/drawingml/2006/main" xmlns:p="http://schemas.openxmlformats.org/presentationml/2006/main" xmlns:r="http://schemas.openxmlformats.org/officeDocument/2006/relationships">
+  <p:cSld>
+    <p:bg>
+      <p:bgPr>
+        <a:solidFill>
+          <a:srgbClr val="FFFFFF"/>
+        </a:solidFill>
+        <a:effectLst/>
+      </p:bgPr>
+    </p:bg>
+    <p:spTree>
+      <p:nvGrpSpPr>
+        <p:cNvPr id="1" name=""/>
+        <p:cNvGrpSpPr/>
+        <p:nvPr/>
+      </p:nvGrpSpPr>
+      <p:grpSpPr/>
+      <p:sp>
+        <p:nvSpPr>
+          <p:cNvPr id="2" name="Rectangle 1"/>
+          <p:cNvSpPr/>
+          <p:nvPr/>
+        </p:nvSpPr>
+        <p:spPr>
+          <a:xfrm>
+            <a:off x="0" y="0"/>
+            <a:ext cx="12191695" cy="960120"/>
+          </a:xfrm>
+          <a:prstGeom prst="rect">
+            <a:avLst/>
+          </a:prstGeom>
+          <a:solidFill>
+            <a:srgbClr val="095292"/>
+          </a:solidFill>
+          <a:ln>
+            <a:noFill/>
+          </a:ln>
+        </p:spPr>
+        <p:style>
+          <a:lnRef idx="1">
+            <a:schemeClr val="accent1"/>
+          </a:lnRef>
+          <a:fillRef idx="3">
+            <a:schemeClr val="accent1"/>
+          </a:fillRef>
+          <a:effectRef idx="2">
+            <a:schemeClr val="accent1"/>
+          </a:effectRef>
+          <a:fontRef idx="minor">
+            <a:schemeClr val="lt1"/>
+          </a:fontRef>
+        </p:style>
+        <p:txBody>
+          <a:bodyPr rtlCol="0" anchor="ctr"/>
+          <a:lstStyle/>
+          <a:p>
+            <a:pPr algn="ctr"/>
+          </a:p>
+        </p:txBody>
+      </p:sp>
+      <p:sp>
+        <p:nvSpPr>
+          <p:cNvPr id="3" name="Rectangle 2"/>
+          <p:cNvSpPr/>
+          <p:nvPr/>
+        </p:nvSpPr>
+        <p:spPr>
+          <a:xfrm>
+            <a:off x="0" y="960120"/>
+            <a:ext cx="12191695" cy="41148"/>
+          </a:xfrm>
+          <a:prstGeom prst="rect">
+            <a:avLst/>
+          </a:prstGeom>
+          <a:solidFill>
+            <a:srgbClr val="FFD000"/>
+          </a:solidFill>
+          <a:ln>
+            <a:noFill/>
+          </a:ln>
+        </p:spPr>
+        <p:style>
+          <a:lnRef idx="1">
+            <a:schemeClr val="accent1"/>
+          </a:lnRef>
+          <a:fillRef idx="3">
+            <a:schemeClr val="accent1"/>
+          </a:fillRef>
+          <a:effectRef idx="2">
+            <a:schemeClr val="accent1"/>
+          </a:effectRef>
+          <a:fontRef idx="minor">
+            <a:schemeClr val="lt1"/>
+          </a:fontRef>
+        </p:style>
+        <p:txBody>
+          <a:bodyPr rtlCol="0" anchor="ctr"/>
+          <a:lstStyle/>
+          <a:p>
+            <a:pPr algn="ctr"/>
+          </a:p>
+        </p:txBody>
+      </p:sp>
+      <p:sp>
+        <p:nvSpPr>
+          <p:cNvPr id="4" name="TextBox 3"/>
+          <p:cNvSpPr txBox="1"/>
+          <p:nvPr/>
+        </p:nvSpPr>
+        <p:spPr>
+          <a:xfrm>
+            <a:off x="457200" y="164592"/>
+            <a:ext cx="11277295" cy="502920"/>
+          </a:xfrm>
+          <a:prstGeom prst="rect">
+            <a:avLst/>
+          </a:prstGeom>
+          <a:noFill/>
+        </p:spPr>
+        <p:txBody>
+          <a:bodyPr wrap="square">
+            <a:spAutoFit/>
+          </a:bodyPr>
+          <a:lstStyle/>
+          <a:p>
+            <a:r>
+              <a:rPr sz="2600" b="1" i="0">
+                <a:solidFill>
+                  <a:srgbClr val="FFFFFF"/>
+                </a:solidFill>
+                <a:latin typeface="Calibri"/>
+              </a:rPr>
+              <a:t>Taller PI — pasos guiados</a:t>
+            </a:r>
+          </a:p>
+        </p:txBody>
+      </p:sp>
+      <p:sp>
+        <p:nvSpPr>
+          <p:cNvPr id="5" name="Rounded Rectangle 4"/>
+          <p:cNvSpPr/>
+          <p:nvPr/>
+        </p:nvSpPr>
+        <p:spPr>
+          <a:xfrm>
+            <a:off x="457200" y="1234440"/>
+            <a:ext cx="11277295" cy="950976"/>
+          </a:xfrm>
+          <a:prstGeom prst="roundRect">
+            <a:avLst>
+              <a:gd name="adj" fmla="val 12000"/>
+            </a:avLst>
+          </a:prstGeom>
+          <a:solidFill>
+            <a:srgbClr val="F2F2F2"/>
+          </a:solidFill>
+          <a:ln>
+            <a:noFill/>
+          </a:ln>
+        </p:spPr>
+        <p:style>
+          <a:lnRef idx="1">
+            <a:schemeClr val="accent1"/>
+          </a:lnRef>
+          <a:fillRef idx="3">
+            <a:schemeClr val="accent1"/>
+          </a:fillRef>
+          <a:effectRef idx="2">
+            <a:schemeClr val="accent1"/>
+          </a:effectRef>
+          <a:fontRef idx="minor">
+            <a:schemeClr val="lt1"/>
+          </a:fontRef>
+        </p:style>
+        <p:txBody>
+          <a:bodyPr rtlCol="0" anchor="ctr"/>
+          <a:lstStyle/>
+          <a:p>
+            <a:pPr algn="ctr"/>
+          </a:p>
+        </p:txBody>
+      </p:sp>
+      <p:sp>
+        <p:nvSpPr>
+          <p:cNvPr id="6" name="Rounded Rectangle 5"/>
+          <p:cNvSpPr/>
+          <p:nvPr/>
+        </p:nvSpPr>
+        <p:spPr>
+          <a:xfrm>
+            <a:off x="594360" y="1490472"/>
+            <a:ext cx="438912" cy="438912"/>
+          </a:xfrm>
+          <a:prstGeom prst="roundRect">
+            <a:avLst>
+              <a:gd name="adj" fmla="val 12000"/>
+            </a:avLst>
+          </a:prstGeom>
+          <a:solidFill>
+            <a:srgbClr val="095292"/>
+          </a:solidFill>
+          <a:ln>
+            <a:noFill/>
+          </a:ln>
+        </p:spPr>
+        <p:style>
+          <a:lnRef idx="1">
+            <a:schemeClr val="accent1"/>
+          </a:lnRef>
+          <a:fillRef idx="3">
+            <a:schemeClr val="accent1"/>
+          </a:fillRef>
+          <a:effectRef idx="2">
+            <a:schemeClr val="accent1"/>
+          </a:effectRef>
+          <a:fontRef idx="minor">
+            <a:schemeClr val="lt1"/>
+          </a:fontRef>
+        </p:style>
+        <p:txBody>
+          <a:bodyPr rtlCol="0" anchor="ctr"/>
+          <a:lstStyle/>
+          <a:p>
+            <a:pPr algn="ctr"/>
+          </a:p>
+        </p:txBody>
+      </p:sp>
+      <p:sp>
+        <p:nvSpPr>
+          <p:cNvPr id="7" name="TextBox 6"/>
+          <p:cNvSpPr txBox="1"/>
+          <p:nvPr/>
+        </p:nvSpPr>
+        <p:spPr>
+          <a:xfrm>
+            <a:off x="594360" y="1490472"/>
+            <a:ext cx="438912" cy="438912"/>
+          </a:xfrm>
+          <a:prstGeom prst="rect">
+            <a:avLst/>
+          </a:prstGeom>
+          <a:noFill/>
+        </p:spPr>
+        <p:txBody>
+          <a:bodyPr wrap="square" anchor="ctr"/>
+          <a:lstStyle/>
+          <a:p>
+            <a:pPr algn="ctr"/>
+            <a:r>
+              <a:rPr sz="1600" b="1" i="0">
+                <a:solidFill>
+                  <a:srgbClr val="FFFFFF"/>
+                </a:solidFill>
+                <a:latin typeface="Calibri"/>
+              </a:rPr>
+              <a:t>1</a:t>
+            </a:r>
+          </a:p>
+        </p:txBody>
+      </p:sp>
+      <p:sp>
+        <p:nvSpPr>
+          <p:cNvPr id="8" name="TextBox 7"/>
+          <p:cNvSpPr txBox="1"/>
+          <p:nvPr/>
+        </p:nvSpPr>
+        <p:spPr>
+          <a:xfrm>
+            <a:off x="1188720" y="1325880"/>
+            <a:ext cx="10271455" cy="786384"/>
+          </a:xfrm>
+          <a:prstGeom prst="rect">
+            <a:avLst/>
+          </a:prstGeom>
+          <a:noFill/>
+        </p:spPr>
+        <p:txBody>
+          <a:bodyPr wrap="square" anchor="ctr"/>
+          <a:lstStyle/>
+          <a:p>
+            <a:r>
+              <a:rPr sz="1100" b="1" i="0">
+                <a:solidFill>
+                  <a:srgbClr val="095292"/>
+                </a:solidFill>
+                <a:latin typeface="Calibri"/>
+              </a:rPr>
+              <a:t>Paso 1. Arme en Google Docs el guion cronometrado de doce minutos con las cinco secciones obligatorias en orden problema, requisitos, modelo, interfaz y decisiones, asignando a cada bloque su rango de minutos exacto y la evidencia que se muestra en pantalla en ese bloque; ningun bloque puede quedar sin rango de minutos ni sin evidencia asociada. Si el docente autorizo equipo, escriba ademas el nombre del responsable de cada bloque y reparta de modo que ningun integrante quede con menos de dos minutos.</a:t>
+            </a:r>
+          </a:p>
+        </p:txBody>
+      </p:sp>
+      <p:sp>
+        <p:nvSpPr>
+          <p:cNvPr id="9" name="Rounded Rectangle 8"/>
+          <p:cNvSpPr/>
+          <p:nvPr/>
+        </p:nvSpPr>
+        <p:spPr>
+          <a:xfrm>
+            <a:off x="457200" y="2276856"/>
+            <a:ext cx="11277295" cy="950976"/>
+          </a:xfrm>
+          <a:prstGeom prst="roundRect">
+            <a:avLst>
+              <a:gd name="adj" fmla="val 12000"/>
+            </a:avLst>
+          </a:prstGeom>
+          <a:solidFill>
+            <a:srgbClr val="E8F4FA"/>
+          </a:solidFill>
+          <a:ln>
+            <a:noFill/>
+          </a:ln>
+        </p:spPr>
+        <p:style>
+          <a:lnRef idx="1">
+            <a:schemeClr val="accent1"/>
+          </a:lnRef>
+          <a:fillRef idx="3">
+            <a:schemeClr val="accent1"/>
+          </a:fillRef>
+          <a:effectRef idx="2">
+            <a:schemeClr val="accent1"/>
+          </a:effectRef>
+          <a:fontRef idx="minor">
+            <a:schemeClr val="lt1"/>
+          </a:fontRef>
+        </p:style>
+        <p:txBody>
+          <a:bodyPr rtlCol="0" anchor="ctr"/>
+          <a:lstStyle/>
+          <a:p>
+            <a:pPr algn="ctr"/>
+          </a:p>
+        </p:txBody>
+      </p:sp>
+      <p:sp>
+        <p:nvSpPr>
+          <p:cNvPr id="10" name="Rounded Rectangle 9"/>
+          <p:cNvSpPr/>
+          <p:nvPr/>
+        </p:nvSpPr>
+        <p:spPr>
+          <a:xfrm>
+            <a:off x="594360" y="2532888"/>
+            <a:ext cx="438912" cy="438912"/>
+          </a:xfrm>
+          <a:prstGeom prst="roundRect">
+            <a:avLst>
+              <a:gd name="adj" fmla="val 12000"/>
+            </a:avLst>
+          </a:prstGeom>
+          <a:solidFill>
+            <a:srgbClr val="095292"/>
+          </a:solidFill>
+          <a:ln>
+            <a:noFill/>
+          </a:ln>
+        </p:spPr>
+        <p:style>
+          <a:lnRef idx="1">
+            <a:schemeClr val="accent1"/>
+          </a:lnRef>
+          <a:fillRef idx="3">
+            <a:schemeClr val="accent1"/>
+          </a:fillRef>
+          <a:effectRef idx="2">
+            <a:schemeClr val="accent1"/>
+          </a:effectRef>
+          <a:fontRef idx="minor">
+            <a:schemeClr val="lt1"/>
+          </a:fontRef>
+        </p:style>
+        <p:txBody>
+          <a:bodyPr rtlCol="0" anchor="ctr"/>
+          <a:lstStyle/>
+          <a:p>
+            <a:pPr algn="ctr"/>
+          </a:p>
+        </p:txBody>
+      </p:sp>
+      <p:sp>
+        <p:nvSpPr>
+          <p:cNvPr id="11" name="TextBox 10"/>
+          <p:cNvSpPr txBox="1"/>
+          <p:nvPr/>
+        </p:nvSpPr>
+        <p:spPr>
+          <a:xfrm>
+            <a:off x="594360" y="2532888"/>
+            <a:ext cx="438912" cy="438912"/>
+          </a:xfrm>
+          <a:prstGeom prst="rect">
+            <a:avLst/>
+          </a:prstGeom>
+          <a:noFill/>
+        </p:spPr>
+        <p:txBody>
+          <a:bodyPr wrap="square" anchor="ctr"/>
+          <a:lstStyle/>
+          <a:p>
+            <a:pPr algn="ctr"/>
+            <a:r>
+              <a:rPr sz="1600" b="1" i="0">
+                <a:solidFill>
+                  <a:srgbClr val="FFFFFF"/>
+                </a:solidFill>
+                <a:latin typeface="Calibri"/>
+              </a:rPr>
+              <a:t>2</a:t>
+            </a:r>
+          </a:p>
+        </p:txBody>
+      </p:sp>
+      <p:sp>
+        <p:nvSpPr>
+          <p:cNvPr id="12" name="TextBox 11"/>
+          <p:cNvSpPr txBox="1"/>
+          <p:nvPr/>
+        </p:nvSpPr>
+        <p:spPr>
+          <a:xfrm>
+            <a:off x="1188720" y="2368296"/>
+            <a:ext cx="10271455" cy="786384"/>
+          </a:xfrm>
+          <a:prstGeom prst="rect">
+            <a:avLst/>
+          </a:prstGeom>
+          <a:noFill/>
+        </p:spPr>
+        <p:txBody>
+          <a:bodyPr wrap="square" anchor="ctr"/>
+          <a:lstStyle/>
+          <a:p>
+            <a:r>
+              <a:rPr sz="1400" b="1" i="0">
+                <a:solidFill>
+                  <a:srgbClr val="095292"/>
+                </a:solidFill>
+                <a:latin typeface="Calibri"/>
+              </a:rPr>
+              <a:t>Paso 2. Llenen la tabla de tres decisiones de diseño de VetCare con las cuatro columnas decision, alternativa descartada, criterio y consecuencia asumida; una de las tres decisiones debe ser sobre el modelo de clases y otra sobre un requisito no funcional.</a:t>
+            </a:r>
+          </a:p>
+        </p:txBody>
+      </p:sp>
+      <p:sp>
+        <p:nvSpPr>
+          <p:cNvPr id="13" name="Rounded Rectangle 12"/>
+          <p:cNvSpPr/>
+          <p:nvPr/>
+        </p:nvSpPr>
+        <p:spPr>
+          <a:xfrm>
+            <a:off x="457200" y="3319272"/>
+            <a:ext cx="11277295" cy="950976"/>
+          </a:xfrm>
+          <a:prstGeom prst="roundRect">
+            <a:avLst>
+              <a:gd name="adj" fmla="val 12000"/>
+            </a:avLst>
+          </a:prstGeom>
+          <a:solidFill>
+            <a:srgbClr val="F2F2F2"/>
+          </a:solidFill>
+          <a:ln>
+            <a:noFill/>
+          </a:ln>
+        </p:spPr>
+        <p:style>
+          <a:lnRef idx="1">
+            <a:schemeClr val="accent1"/>
+          </a:lnRef>
+          <a:fillRef idx="3">
+            <a:schemeClr val="accent1"/>
+          </a:fillRef>
+          <a:effectRef idx="2">
+            <a:schemeClr val="accent1"/>
+          </a:effectRef>
+          <a:fontRef idx="minor">
+            <a:schemeClr val="lt1"/>
+          </a:fontRef>
+        </p:style>
+        <p:txBody>
+          <a:bodyPr rtlCol="0" anchor="ctr"/>
+          <a:lstStyle/>
+          <a:p>
+            <a:pPr algn="ctr"/>
+          </a:p>
+        </p:txBody>
+      </p:sp>
+      <p:sp>
+        <p:nvSpPr>
+          <p:cNvPr id="14" name="Rounded Rectangle 13"/>
+          <p:cNvSpPr/>
+          <p:nvPr/>
+        </p:nvSpPr>
+        <p:spPr>
+          <a:xfrm>
+            <a:off x="594360" y="3575304"/>
+            <a:ext cx="438912" cy="438912"/>
+          </a:xfrm>
+          <a:prstGeom prst="roundRect">
+            <a:avLst>
+              <a:gd name="adj" fmla="val 12000"/>
+            </a:avLst>
+          </a:prstGeom>
+          <a:solidFill>
+            <a:srgbClr val="095292"/>
+          </a:solidFill>
+          <a:ln>
+            <a:noFill/>
+          </a:ln>
+        </p:spPr>
+        <p:style>
+          <a:lnRef idx="1">
+            <a:schemeClr val="accent1"/>
+          </a:lnRef>
+          <a:fillRef idx="3">
+            <a:schemeClr val="accent1"/>
+          </a:fillRef>
+          <a:effectRef idx="2">
+            <a:schemeClr val="accent1"/>
+          </a:effectRef>
+          <a:fontRef idx="minor">
+            <a:schemeClr val="lt1"/>
+          </a:fontRef>
+        </p:style>
+        <p:txBody>
+          <a:bodyPr rtlCol="0" anchor="ctr"/>
+          <a:lstStyle/>
+          <a:p>
+            <a:pPr algn="ctr"/>
+          </a:p>
+        </p:txBody>
+      </p:sp>
+      <p:sp>
+        <p:nvSpPr>
+          <p:cNvPr id="15" name="TextBox 14"/>
+          <p:cNvSpPr txBox="1"/>
+          <p:nvPr/>
+        </p:nvSpPr>
+        <p:spPr>
+          <a:xfrm>
+            <a:off x="594360" y="3575304"/>
+            <a:ext cx="438912" cy="438912"/>
+          </a:xfrm>
+          <a:prstGeom prst="rect">
+            <a:avLst/>
+          </a:prstGeom>
+          <a:noFill/>
+        </p:spPr>
+        <p:txBody>
+          <a:bodyPr wrap="square" anchor="ctr"/>
+          <a:lstStyle/>
+          <a:p>
+            <a:pPr algn="ctr"/>
+            <a:r>
+              <a:rPr sz="1600" b="1" i="0">
+                <a:solidFill>
+                  <a:srgbClr val="FFFFFF"/>
+                </a:solidFill>
+                <a:latin typeface="Calibri"/>
+              </a:rPr>
+              <a:t>3</a:t>
+            </a:r>
+          </a:p>
+        </p:txBody>
+      </p:sp>
+      <p:sp>
+        <p:nvSpPr>
+          <p:cNvPr id="16" name="TextBox 15"/>
+          <p:cNvSpPr txBox="1"/>
+          <p:nvPr/>
+        </p:nvSpPr>
+        <p:spPr>
+          <a:xfrm>
+            <a:off x="1188720" y="3410712"/>
+            <a:ext cx="10271455" cy="786384"/>
+          </a:xfrm>
+          <a:prstGeom prst="rect">
+            <a:avLst/>
+          </a:prstGeom>
+          <a:noFill/>
+        </p:spPr>
+        <p:txBody>
+          <a:bodyPr wrap="square" anchor="ctr"/>
+          <a:lstStyle/>
+          <a:p>
+            <a:r>
+              <a:rPr sz="1400" b="1" i="0">
+                <a:solidFill>
+                  <a:srgbClr val="095292"/>
+                </a:solidFill>
+                <a:latin typeface="Calibri"/>
+              </a:rPr>
+              <a:t>Paso 3. Construyan el banco de diez preguntas del jurado con su respuesta en maximo dos frases, incluyendo obligatoriamente que pasa si dos recepcionistas registran la misma mascota, como se mide su RNF de tiempo de respuesta y que quedo fuera del alcance.</a:t>
+            </a:r>
+          </a:p>
+        </p:txBody>
+      </p:sp>
+      <p:sp>
+        <p:nvSpPr>
+          <p:cNvPr id="17" name="Rounded Rectangle 16"/>
+          <p:cNvSpPr/>
+          <p:nvPr/>
+        </p:nvSpPr>
+        <p:spPr>
+          <a:xfrm>
+            <a:off x="457200" y="4361688"/>
+            <a:ext cx="11277295" cy="950976"/>
+          </a:xfrm>
+          <a:prstGeom prst="roundRect">
+            <a:avLst>
+              <a:gd name="adj" fmla="val 12000"/>
+            </a:avLst>
+          </a:prstGeom>
+          <a:solidFill>
+            <a:srgbClr val="E8F4FA"/>
+          </a:solidFill>
+          <a:ln>
+            <a:noFill/>
+          </a:ln>
+        </p:spPr>
+        <p:style>
+          <a:lnRef idx="1">
+            <a:schemeClr val="accent1"/>
+          </a:lnRef>
+          <a:fillRef idx="3">
+            <a:schemeClr val="accent1"/>
+          </a:fillRef>
+          <a:effectRef idx="2">
+            <a:schemeClr val="accent1"/>
+          </a:effectRef>
+          <a:fontRef idx="minor">
+            <a:schemeClr val="lt1"/>
+          </a:fontRef>
+        </p:style>
+        <p:txBody>
+          <a:bodyPr rtlCol="0" anchor="ctr"/>
+          <a:lstStyle/>
+          <a:p>
+            <a:pPr algn="ctr"/>
+          </a:p>
+        </p:txBody>
+      </p:sp>
+      <p:sp>
+        <p:nvSpPr>
+          <p:cNvPr id="18" name="Rounded Rectangle 17"/>
+          <p:cNvSpPr/>
+          <p:nvPr/>
+        </p:nvSpPr>
+        <p:spPr>
+          <a:xfrm>
+            <a:off x="594360" y="4617720"/>
+            <a:ext cx="438912" cy="438912"/>
+          </a:xfrm>
+          <a:prstGeom prst="roundRect">
+            <a:avLst>
+              <a:gd name="adj" fmla="val 12000"/>
+            </a:avLst>
+          </a:prstGeom>
+          <a:solidFill>
+            <a:srgbClr val="095292"/>
+          </a:solidFill>
+          <a:ln>
+            <a:noFill/>
+          </a:ln>
+        </p:spPr>
+        <p:style>
+          <a:lnRef idx="1">
+            <a:schemeClr val="accent1"/>
+          </a:lnRef>
+          <a:fillRef idx="3">
+            <a:schemeClr val="accent1"/>
+          </a:fillRef>
+          <a:effectRef idx="2">
+            <a:schemeClr val="accent1"/>
+          </a:effectRef>
+          <a:fontRef idx="minor">
+            <a:schemeClr val="lt1"/>
+          </a:fontRef>
+        </p:style>
+        <p:txBody>
+          <a:bodyPr rtlCol="0" anchor="ctr"/>
+          <a:lstStyle/>
+          <a:p>
+            <a:pPr algn="ctr"/>
+          </a:p>
+        </p:txBody>
+      </p:sp>
+      <p:sp>
+        <p:nvSpPr>
+          <p:cNvPr id="19" name="TextBox 18"/>
+          <p:cNvSpPr txBox="1"/>
+          <p:nvPr/>
+        </p:nvSpPr>
+        <p:spPr>
+          <a:xfrm>
+            <a:off x="594360" y="4617720"/>
+            <a:ext cx="438912" cy="438912"/>
+          </a:xfrm>
+          <a:prstGeom prst="rect">
+            <a:avLst/>
+          </a:prstGeom>
+          <a:noFill/>
+        </p:spPr>
+        <p:txBody>
+          <a:bodyPr wrap="square" anchor="ctr"/>
+          <a:lstStyle/>
+          <a:p>
+            <a:pPr algn="ctr"/>
+            <a:r>
+              <a:rPr sz="1600" b="1" i="0">
+                <a:solidFill>
+                  <a:srgbClr val="FFFFFF"/>
+                </a:solidFill>
+                <a:latin typeface="Calibri"/>
+              </a:rPr>
+              <a:t>4</a:t>
+            </a:r>
+          </a:p>
+        </p:txBody>
+      </p:sp>
+      <p:sp>
+        <p:nvSpPr>
+          <p:cNvPr id="20" name="TextBox 19"/>
+          <p:cNvSpPr txBox="1"/>
+          <p:nvPr/>
+        </p:nvSpPr>
+        <p:spPr>
+          <a:xfrm>
+            <a:off x="1188720" y="4453128"/>
+            <a:ext cx="10271455" cy="786384"/>
+          </a:xfrm>
+          <a:prstGeom prst="rect">
+            <a:avLst/>
+          </a:prstGeom>
+          <a:noFill/>
+        </p:spPr>
+        <p:txBody>
+          <a:bodyPr wrap="square" anchor="ctr"/>
+          <a:lstStyle/>
+          <a:p>
+            <a:r>
+              <a:rPr sz="1400" b="1" i="0">
+                <a:solidFill>
+                  <a:srgbClr val="095292"/>
+                </a:solidFill>
+                <a:latin typeface="Calibri"/>
+              </a:rPr>
+              <a:t>Paso 4. Haga un ensayo cronometrado de pie, con el prototipo abierto, y registre el tiempo real de cada bloque; recorte lo que se paso y anote los dos puntos donde se enredo al hablar (si trabaja en equipo, donde se enredo la transicion entre un expositor y el siguiente).</a:t>
+            </a:r>
+          </a:p>
+        </p:txBody>
+      </p:sp>
+      <p:sp>
+        <p:nvSpPr>
+          <p:cNvPr id="21" name="Rounded Rectangle 20"/>
+          <p:cNvSpPr/>
+          <p:nvPr/>
+        </p:nvSpPr>
+        <p:spPr>
+          <a:xfrm>
+            <a:off x="457200" y="5404104"/>
+            <a:ext cx="11277295" cy="950976"/>
+          </a:xfrm>
+          <a:prstGeom prst="roundRect">
+            <a:avLst>
+              <a:gd name="adj" fmla="val 12000"/>
+            </a:avLst>
+          </a:prstGeom>
+          <a:solidFill>
+            <a:srgbClr val="F2F2F2"/>
+          </a:solidFill>
+          <a:ln>
+            <a:noFill/>
+          </a:ln>
+        </p:spPr>
+        <p:style>
+          <a:lnRef idx="1">
+            <a:schemeClr val="accent1"/>
+          </a:lnRef>
+          <a:fillRef idx="3">
+            <a:schemeClr val="accent1"/>
+          </a:fillRef>
+          <a:effectRef idx="2">
+            <a:schemeClr val="accent1"/>
+          </a:effectRef>
+          <a:fontRef idx="minor">
+            <a:schemeClr val="lt1"/>
+          </a:fontRef>
+        </p:style>
+        <p:txBody>
+          <a:bodyPr rtlCol="0" anchor="ctr"/>
+          <a:lstStyle/>
+          <a:p>
+            <a:pPr algn="ctr"/>
+          </a:p>
+        </p:txBody>
+      </p:sp>
+      <p:sp>
+        <p:nvSpPr>
+          <p:cNvPr id="22" name="Rounded Rectangle 21"/>
+          <p:cNvSpPr/>
+          <p:nvPr/>
+        </p:nvSpPr>
+        <p:spPr>
+          <a:xfrm>
+            <a:off x="594360" y="5660136"/>
+            <a:ext cx="438912" cy="438912"/>
+          </a:xfrm>
+          <a:prstGeom prst="roundRect">
+            <a:avLst>
+              <a:gd name="adj" fmla="val 12000"/>
+            </a:avLst>
+          </a:prstGeom>
+          <a:solidFill>
+            <a:srgbClr val="095292"/>
+          </a:solidFill>
+          <a:ln>
+            <a:noFill/>
+          </a:ln>
+        </p:spPr>
+        <p:style>
+          <a:lnRef idx="1">
+            <a:schemeClr val="accent1"/>
+          </a:lnRef>
+          <a:fillRef idx="3">
+            <a:schemeClr val="accent1"/>
+          </a:fillRef>
+          <a:effectRef idx="2">
+            <a:schemeClr val="accent1"/>
+          </a:effectRef>
+          <a:fontRef idx="minor">
+            <a:schemeClr val="lt1"/>
+          </a:fontRef>
+        </p:style>
+        <p:txBody>
+          <a:bodyPr rtlCol="0" anchor="ctr"/>
+          <a:lstStyle/>
+          <a:p>
+            <a:pPr algn="ctr"/>
+          </a:p>
+        </p:txBody>
+      </p:sp>
+      <p:sp>
+        <p:nvSpPr>
+          <p:cNvPr id="23" name="TextBox 22"/>
+          <p:cNvSpPr txBox="1"/>
+          <p:nvPr/>
+        </p:nvSpPr>
+        <p:spPr>
+          <a:xfrm>
+            <a:off x="594360" y="5660136"/>
+            <a:ext cx="438912" cy="438912"/>
+          </a:xfrm>
+          <a:prstGeom prst="rect">
+            <a:avLst/>
+          </a:prstGeom>
+          <a:noFill/>
+        </p:spPr>
+        <p:txBody>
+          <a:bodyPr wrap="square" anchor="ctr"/>
+          <a:lstStyle/>
+          <a:p>
+            <a:pPr algn="ctr"/>
+            <a:r>
+              <a:rPr sz="1600" b="1" i="0">
+                <a:solidFill>
+                  <a:srgbClr val="FFFFFF"/>
+                </a:solidFill>
+                <a:latin typeface="Calibri"/>
+              </a:rPr>
+              <a:t>5</a:t>
+            </a:r>
+          </a:p>
+        </p:txBody>
+      </p:sp>
+      <p:sp>
+        <p:nvSpPr>
+          <p:cNvPr id="24" name="TextBox 23"/>
+          <p:cNvSpPr txBox="1"/>
+          <p:nvPr/>
+        </p:nvSpPr>
+        <p:spPr>
+          <a:xfrm>
+            <a:off x="1188720" y="5495544"/>
+            <a:ext cx="10271455" cy="786384"/>
+          </a:xfrm>
+          <a:prstGeom prst="rect">
+            <a:avLst/>
+          </a:prstGeom>
+          <a:noFill/>
+        </p:spPr>
+        <p:txBody>
+          <a:bodyPr wrap="square" anchor="ctr"/>
+          <a:lstStyle/>
+          <a:p>
+            <a:r>
+              <a:rPr sz="1400" b="1" i="0">
+                <a:solidFill>
+                  <a:srgbClr val="095292"/>
+                </a:solidFill>
+                <a:latin typeface="Calibri"/>
+              </a:rPr>
+              <a:t>Paso 5. Consoliden el documento final armando el indice completo desde problema hasta trazabilidad, verifiquen que los nombres de las clases, los campos del diccionario y los campos de las pantallas coinciden exactamente, y corrijan al menos una inconsistencia encontrada dejando constancia de cual era.</a:t>
+            </a:r>
+          </a:p>
+        </p:txBody>
+      </p:sp>
+      <p:sp>
+        <p:nvSpPr>
+          <p:cNvPr id="25" name="TextBox 24"/>
+          <p:cNvSpPr txBox="1"/>
+          <p:nvPr/>
+        </p:nvSpPr>
+        <p:spPr>
+          <a:xfrm>
+            <a:off x="11185855" y="6473952"/>
+            <a:ext cx="640080" cy="274320"/>
+          </a:xfrm>
+          <a:prstGeom prst="rect">
+            <a:avLst/>
+          </a:prstGeom>
+          <a:noFill/>
+        </p:spPr>
+        <p:txBody>
+          <a:bodyPr wrap="square">
+            <a:spAutoFit/>
+          </a:bodyPr>
+          <a:lstStyle/>
+          <a:p>
+            <a:pPr algn="r"/>
+            <a:r>
+              <a:rPr sz="1100" b="0" i="0">
+                <a:solidFill>
+                  <a:srgbClr val="666666"/>
+                </a:solidFill>
+                <a:latin typeface="Calibri"/>
+              </a:rPr>
+              <a:t>16</a:t>
+            </a:r>
+          </a:p>
+        </p:txBody>
+      </p:sp>
+    </p:spTree>
+  </p:cSld>
+  <p:clrMapOvr>
+    <a:masterClrMapping/>
+  </p:clrMapOvr>
+</p:sld>
+</file>
+
+<file path=ppt/slides/slide17.xml><?xml version="1.0" encoding="utf-8"?>
+<p:sld xmlns:a="http://schemas.openxmlformats.org/drawingml/2006/main" xmlns:p="http://schemas.openxmlformats.org/presentationml/2006/main" xmlns:r="http://schemas.openxmlformats.org/officeDocument/2006/relationships">
+  <p:cSld>
+    <p:bg>
+      <p:bgPr>
+        <a:solidFill>
+          <a:srgbClr val="FFFFFF"/>
+        </a:solidFill>
+        <a:effectLst/>
+      </p:bgPr>
+    </p:bg>
+    <p:spTree>
+      <p:nvGrpSpPr>
+        <p:cNvPr id="1" name=""/>
+        <p:cNvGrpSpPr/>
+        <p:nvPr/>
+      </p:nvGrpSpPr>
+      <p:grpSpPr/>
+      <p:sp>
+        <p:nvSpPr>
+          <p:cNvPr id="2" name="Rectangle 1"/>
+          <p:cNvSpPr/>
+          <p:nvPr/>
+        </p:nvSpPr>
+        <p:spPr>
+          <a:xfrm>
+            <a:off x="0" y="0"/>
+            <a:ext cx="12191695" cy="960120"/>
+          </a:xfrm>
+          <a:prstGeom prst="rect">
+            <a:avLst/>
+          </a:prstGeom>
+          <a:solidFill>
+            <a:srgbClr val="095292"/>
+          </a:solidFill>
+          <a:ln>
+            <a:noFill/>
+          </a:ln>
+        </p:spPr>
+        <p:style>
+          <a:lnRef idx="1">
+            <a:schemeClr val="accent1"/>
+          </a:lnRef>
+          <a:fillRef idx="3">
+            <a:schemeClr val="accent1"/>
+          </a:fillRef>
+          <a:effectRef idx="2">
+            <a:schemeClr val="accent1"/>
+          </a:effectRef>
+          <a:fontRef idx="minor">
+            <a:schemeClr val="lt1"/>
+          </a:fontRef>
+        </p:style>
+        <p:txBody>
+          <a:bodyPr rtlCol="0" anchor="ctr"/>
+          <a:lstStyle/>
+          <a:p>
+            <a:pPr algn="ctr"/>
+          </a:p>
+        </p:txBody>
+      </p:sp>
+      <p:sp>
+        <p:nvSpPr>
+          <p:cNvPr id="3" name="Rectangle 2"/>
+          <p:cNvSpPr/>
+          <p:nvPr/>
+        </p:nvSpPr>
+        <p:spPr>
+          <a:xfrm>
+            <a:off x="0" y="960120"/>
+            <a:ext cx="12191695" cy="41148"/>
+          </a:xfrm>
+          <a:prstGeom prst="rect">
+            <a:avLst/>
+          </a:prstGeom>
+          <a:solidFill>
+            <a:srgbClr val="FFD000"/>
+          </a:solidFill>
+          <a:ln>
+            <a:noFill/>
+          </a:ln>
+        </p:spPr>
+        <p:style>
+          <a:lnRef idx="1">
+            <a:schemeClr val="accent1"/>
+          </a:lnRef>
+          <a:fillRef idx="3">
+            <a:schemeClr val="accent1"/>
+          </a:fillRef>
+          <a:effectRef idx="2">
+            <a:schemeClr val="accent1"/>
+          </a:effectRef>
+          <a:fontRef idx="minor">
+            <a:schemeClr val="lt1"/>
+          </a:fontRef>
+        </p:style>
+        <p:txBody>
+          <a:bodyPr rtlCol="0" anchor="ctr"/>
+          <a:lstStyle/>
+          <a:p>
+            <a:pPr algn="ctr"/>
+          </a:p>
+        </p:txBody>
+      </p:sp>
+      <p:sp>
+        <p:nvSpPr>
+          <p:cNvPr id="4" name="TextBox 3"/>
+          <p:cNvSpPr txBox="1"/>
+          <p:nvPr/>
+        </p:nvSpPr>
+        <p:spPr>
+          <a:xfrm>
+            <a:off x="457200" y="164592"/>
+            <a:ext cx="11277295" cy="502920"/>
+          </a:xfrm>
+          <a:prstGeom prst="rect">
+            <a:avLst/>
+          </a:prstGeom>
+          <a:noFill/>
+        </p:spPr>
+        <p:txBody>
+          <a:bodyPr wrap="square">
+            <a:spAutoFit/>
+          </a:bodyPr>
+          <a:lstStyle/>
+          <a:p>
+            <a:r>
+              <a:rPr sz="2600" b="1" i="0">
+                <a:solidFill>
+                  <a:srgbClr val="FFFFFF"/>
+                </a:solidFill>
+                <a:latin typeface="Calibri"/>
+              </a:rPr>
+              <a:t>Antes de entregar — autochequeo</a:t>
+            </a:r>
+          </a:p>
+        </p:txBody>
+      </p:sp>
+      <p:sp>
+        <p:nvSpPr>
+          <p:cNvPr id="5" name="Rounded Rectangle 4"/>
+          <p:cNvSpPr/>
+          <p:nvPr/>
+        </p:nvSpPr>
+        <p:spPr>
+          <a:xfrm>
+            <a:off x="457200" y="1261872"/>
+            <a:ext cx="11277295" cy="566928"/>
+          </a:xfrm>
+          <a:prstGeom prst="roundRect">
+            <a:avLst>
+              <a:gd name="adj" fmla="val 12000"/>
+            </a:avLst>
+          </a:prstGeom>
+          <a:solidFill>
+            <a:srgbClr val="F2F2F2"/>
+          </a:solidFill>
+          <a:ln>
+            <a:noFill/>
+          </a:ln>
+        </p:spPr>
+        <p:style>
+          <a:lnRef idx="1">
+            <a:schemeClr val="accent1"/>
+          </a:lnRef>
+          <a:fillRef idx="3">
+            <a:schemeClr val="accent1"/>
+          </a:fillRef>
+          <a:effectRef idx="2">
+            <a:schemeClr val="accent1"/>
+          </a:effectRef>
+          <a:fontRef idx="minor">
+            <a:schemeClr val="lt1"/>
+          </a:fontRef>
+        </p:style>
+        <p:txBody>
+          <a:bodyPr rtlCol="0" anchor="ctr"/>
+          <a:lstStyle/>
+          <a:p>
+            <a:pPr algn="ctr"/>
+          </a:p>
+        </p:txBody>
+      </p:sp>
+      <p:sp>
+        <p:nvSpPr>
+          <p:cNvPr id="6" name="Rectangle 5"/>
+          <p:cNvSpPr/>
+          <p:nvPr/>
+        </p:nvSpPr>
+        <p:spPr>
+          <a:xfrm>
+            <a:off x="640080" y="1408175"/>
+            <a:ext cx="274320" cy="274320"/>
+          </a:xfrm>
+          <a:prstGeom prst="rect">
+            <a:avLst/>
+          </a:prstGeom>
+          <a:solidFill>
+            <a:srgbClr val="FFFFFF"/>
+          </a:solidFill>
+          <a:ln>
+            <a:solidFill>
+              <a:srgbClr val="333333"/>
+            </a:solidFill>
+          </a:ln>
+        </p:spPr>
+        <p:style>
+          <a:lnRef idx="1">
+            <a:schemeClr val="accent1"/>
+          </a:lnRef>
+          <a:fillRef idx="3">
+            <a:schemeClr val="accent1"/>
+          </a:fillRef>
+          <a:effectRef idx="2">
+            <a:schemeClr val="accent1"/>
+          </a:effectRef>
+          <a:fontRef idx="minor">
+            <a:schemeClr val="lt1"/>
+          </a:fontRef>
+        </p:style>
+        <p:txBody>
+          <a:bodyPr rtlCol="0" anchor="ctr"/>
+          <a:lstStyle/>
+          <a:p>
+            <a:pPr algn="ctr"/>
+          </a:p>
+        </p:txBody>
+      </p:sp>
+      <p:sp>
+        <p:nvSpPr>
+          <p:cNvPr id="7" name="Rectangle 6"/>
+          <p:cNvSpPr/>
+          <p:nvPr/>
+        </p:nvSpPr>
+        <p:spPr>
+          <a:xfrm>
+            <a:off x="640080" y="1408175"/>
+            <a:ext cx="73152" cy="274320"/>
           </a:xfrm>
           <a:prstGeom prst="rect">
             <a:avLst/>
@@ -6182,40 +7691,16 @@
           </a:p>
         </p:txBody>
       </p:sp>
-      <p:pic>
-        <p:nvPicPr>
-          <p:cNvPr id="3" name="Picture 2" descr="logo_uniajc_color.png"/>
-          <p:cNvPicPr>
-            <a:picLocks noChangeAspect="1"/>
-          </p:cNvPicPr>
-          <p:nvPr/>
-        </p:nvPicPr>
-        <p:blipFill>
-          <a:blip r:embed="rId2"/>
-          <a:stretch>
-            <a:fillRect/>
-          </a:stretch>
-        </p:blipFill>
-        <p:spPr>
-          <a:xfrm>
-            <a:off x="10271455" y="5998464"/>
-            <a:ext cx="1463040" cy="643233"/>
-          </a:xfrm>
-          <a:prstGeom prst="rect">
-            <a:avLst/>
-          </a:prstGeom>
-        </p:spPr>
-      </p:pic>
-      <p:sp>
-        <p:nvSpPr>
-          <p:cNvPr id="4" name="TextBox 3"/>
+      <p:sp>
+        <p:nvSpPr>
+          <p:cNvPr id="8" name="TextBox 7"/>
           <p:cNvSpPr txBox="1"/>
           <p:nvPr/>
         </p:nvSpPr>
         <p:spPr>
           <a:xfrm>
-            <a:off x="457200" y="1737360"/>
-            <a:ext cx="11277295" cy="1097280"/>
+            <a:off x="1097280" y="1353312"/>
+            <a:ext cx="10362895" cy="402336"/>
           </a:xfrm>
           <a:prstGeom prst="rect">
             <a:avLst/>
@@ -6226,29 +7711,358 @@
           <a:bodyPr wrap="square" anchor="ctr"/>
           <a:lstStyle/>
           <a:p>
+            <a:r>
+              <a:rPr sz="1500" b="0" i="0">
+                <a:solidFill>
+                  <a:srgbClr val="333333"/>
+                </a:solidFill>
+                <a:latin typeface="Calibri"/>
+              </a:rPr>
+              <a:t>Si el jurado le pregunta por una parte que no alcanzo a mostrar, puede responderla sin buscar ayuda (y si hay equipo autorizado, cualquier integrante puede responder por cualquier bloque).</a:t>
+            </a:r>
+          </a:p>
+        </p:txBody>
+      </p:sp>
+      <p:sp>
+        <p:nvSpPr>
+          <p:cNvPr id="9" name="Rounded Rectangle 8"/>
+          <p:cNvSpPr/>
+          <p:nvPr/>
+        </p:nvSpPr>
+        <p:spPr>
+          <a:xfrm>
+            <a:off x="457200" y="1938528"/>
+            <a:ext cx="11277295" cy="566928"/>
+          </a:xfrm>
+          <a:prstGeom prst="roundRect">
+            <a:avLst>
+              <a:gd name="adj" fmla="val 12000"/>
+            </a:avLst>
+          </a:prstGeom>
+          <a:solidFill>
+            <a:srgbClr val="F2F2F2"/>
+          </a:solidFill>
+          <a:ln>
+            <a:noFill/>
+          </a:ln>
+        </p:spPr>
+        <p:style>
+          <a:lnRef idx="1">
+            <a:schemeClr val="accent1"/>
+          </a:lnRef>
+          <a:fillRef idx="3">
+            <a:schemeClr val="accent1"/>
+          </a:fillRef>
+          <a:effectRef idx="2">
+            <a:schemeClr val="accent1"/>
+          </a:effectRef>
+          <a:fontRef idx="minor">
+            <a:schemeClr val="lt1"/>
+          </a:fontRef>
+        </p:style>
+        <p:txBody>
+          <a:bodyPr rtlCol="0" anchor="ctr"/>
+          <a:lstStyle/>
+          <a:p>
             <a:pPr algn="ctr"/>
-            <a:r>
-              <a:rPr sz="3400" b="1" i="0">
-                <a:solidFill>
-                  <a:srgbClr val="095292"/>
-                </a:solidFill>
-                <a:latin typeface="Calibri"/>
-              </a:rPr>
-              <a:t>Clase 14 · VetCare avanza</a:t>
-            </a:r>
-          </a:p>
-        </p:txBody>
-      </p:sp>
-      <p:sp>
-        <p:nvSpPr>
-          <p:cNvPr id="5" name="TextBox 4"/>
+          </a:p>
+        </p:txBody>
+      </p:sp>
+      <p:sp>
+        <p:nvSpPr>
+          <p:cNvPr id="10" name="Rectangle 9"/>
+          <p:cNvSpPr/>
+          <p:nvPr/>
+        </p:nvSpPr>
+        <p:spPr>
+          <a:xfrm>
+            <a:off x="640080" y="2084832"/>
+            <a:ext cx="274320" cy="274320"/>
+          </a:xfrm>
+          <a:prstGeom prst="rect">
+            <a:avLst/>
+          </a:prstGeom>
+          <a:solidFill>
+            <a:srgbClr val="FFFFFF"/>
+          </a:solidFill>
+          <a:ln>
+            <a:solidFill>
+              <a:srgbClr val="333333"/>
+            </a:solidFill>
+          </a:ln>
+        </p:spPr>
+        <p:style>
+          <a:lnRef idx="1">
+            <a:schemeClr val="accent1"/>
+          </a:lnRef>
+          <a:fillRef idx="3">
+            <a:schemeClr val="accent1"/>
+          </a:fillRef>
+          <a:effectRef idx="2">
+            <a:schemeClr val="accent1"/>
+          </a:effectRef>
+          <a:fontRef idx="minor">
+            <a:schemeClr val="lt1"/>
+          </a:fontRef>
+        </p:style>
+        <p:txBody>
+          <a:bodyPr rtlCol="0" anchor="ctr"/>
+          <a:lstStyle/>
+          <a:p>
+            <a:pPr algn="ctr"/>
+          </a:p>
+        </p:txBody>
+      </p:sp>
+      <p:sp>
+        <p:nvSpPr>
+          <p:cNvPr id="11" name="Rectangle 10"/>
+          <p:cNvSpPr/>
+          <p:nvPr/>
+        </p:nvSpPr>
+        <p:spPr>
+          <a:xfrm>
+            <a:off x="640080" y="2084832"/>
+            <a:ext cx="73152" cy="274320"/>
+          </a:xfrm>
+          <a:prstGeom prst="rect">
+            <a:avLst/>
+          </a:prstGeom>
+          <a:solidFill>
+            <a:srgbClr val="269CCB"/>
+          </a:solidFill>
+          <a:ln>
+            <a:noFill/>
+          </a:ln>
+        </p:spPr>
+        <p:style>
+          <a:lnRef idx="1">
+            <a:schemeClr val="accent1"/>
+          </a:lnRef>
+          <a:fillRef idx="3">
+            <a:schemeClr val="accent1"/>
+          </a:fillRef>
+          <a:effectRef idx="2">
+            <a:schemeClr val="accent1"/>
+          </a:effectRef>
+          <a:fontRef idx="minor">
+            <a:schemeClr val="lt1"/>
+          </a:fontRef>
+        </p:style>
+        <p:txBody>
+          <a:bodyPr rtlCol="0" anchor="ctr"/>
+          <a:lstStyle/>
+          <a:p>
+            <a:pPr algn="ctr"/>
+          </a:p>
+        </p:txBody>
+      </p:sp>
+      <p:sp>
+        <p:nvSpPr>
+          <p:cNvPr id="12" name="TextBox 11"/>
           <p:cNvSpPr txBox="1"/>
           <p:nvPr/>
         </p:nvSpPr>
         <p:spPr>
           <a:xfrm>
-            <a:off x="457200" y="3017520"/>
-            <a:ext cx="11277295" cy="1645920"/>
+            <a:off x="1097280" y="2029968"/>
+            <a:ext cx="10362895" cy="402336"/>
+          </a:xfrm>
+          <a:prstGeom prst="rect">
+            <a:avLst/>
+          </a:prstGeom>
+          <a:noFill/>
+        </p:spPr>
+        <p:txBody>
+          <a:bodyPr wrap="square" anchor="ctr"/>
+          <a:lstStyle/>
+          <a:p>
+            <a:r>
+              <a:rPr sz="1500" b="0" i="0">
+                <a:solidFill>
+                  <a:srgbClr val="333333"/>
+                </a:solidFill>
+                <a:latin typeface="Calibri"/>
+              </a:rPr>
+              <a:t>De sus tres decisiones de diseño, cual podria haberse tomado al reves sin que el proyecto se cayera, y que perderia la clinica si se hubiera tomado asi.</a:t>
+            </a:r>
+          </a:p>
+        </p:txBody>
+      </p:sp>
+      <p:sp>
+        <p:nvSpPr>
+          <p:cNvPr id="13" name="Rounded Rectangle 12"/>
+          <p:cNvSpPr/>
+          <p:nvPr/>
+        </p:nvSpPr>
+        <p:spPr>
+          <a:xfrm>
+            <a:off x="457200" y="2615184"/>
+            <a:ext cx="11277295" cy="566928"/>
+          </a:xfrm>
+          <a:prstGeom prst="roundRect">
+            <a:avLst>
+              <a:gd name="adj" fmla="val 12000"/>
+            </a:avLst>
+          </a:prstGeom>
+          <a:solidFill>
+            <a:srgbClr val="F2F2F2"/>
+          </a:solidFill>
+          <a:ln>
+            <a:noFill/>
+          </a:ln>
+        </p:spPr>
+        <p:style>
+          <a:lnRef idx="1">
+            <a:schemeClr val="accent1"/>
+          </a:lnRef>
+          <a:fillRef idx="3">
+            <a:schemeClr val="accent1"/>
+          </a:fillRef>
+          <a:effectRef idx="2">
+            <a:schemeClr val="accent1"/>
+          </a:effectRef>
+          <a:fontRef idx="minor">
+            <a:schemeClr val="lt1"/>
+          </a:fontRef>
+        </p:style>
+        <p:txBody>
+          <a:bodyPr rtlCol="0" anchor="ctr"/>
+          <a:lstStyle/>
+          <a:p>
+            <a:pPr algn="ctr"/>
+          </a:p>
+        </p:txBody>
+      </p:sp>
+      <p:sp>
+        <p:nvSpPr>
+          <p:cNvPr id="14" name="Rectangle 13"/>
+          <p:cNvSpPr/>
+          <p:nvPr/>
+        </p:nvSpPr>
+        <p:spPr>
+          <a:xfrm>
+            <a:off x="640080" y="2761488"/>
+            <a:ext cx="274320" cy="274320"/>
+          </a:xfrm>
+          <a:prstGeom prst="rect">
+            <a:avLst/>
+          </a:prstGeom>
+          <a:solidFill>
+            <a:srgbClr val="FFFFFF"/>
+          </a:solidFill>
+          <a:ln>
+            <a:solidFill>
+              <a:srgbClr val="333333"/>
+            </a:solidFill>
+          </a:ln>
+        </p:spPr>
+        <p:style>
+          <a:lnRef idx="1">
+            <a:schemeClr val="accent1"/>
+          </a:lnRef>
+          <a:fillRef idx="3">
+            <a:schemeClr val="accent1"/>
+          </a:fillRef>
+          <a:effectRef idx="2">
+            <a:schemeClr val="accent1"/>
+          </a:effectRef>
+          <a:fontRef idx="minor">
+            <a:schemeClr val="lt1"/>
+          </a:fontRef>
+        </p:style>
+        <p:txBody>
+          <a:bodyPr rtlCol="0" anchor="ctr"/>
+          <a:lstStyle/>
+          <a:p>
+            <a:pPr algn="ctr"/>
+          </a:p>
+        </p:txBody>
+      </p:sp>
+      <p:sp>
+        <p:nvSpPr>
+          <p:cNvPr id="15" name="Rectangle 14"/>
+          <p:cNvSpPr/>
+          <p:nvPr/>
+        </p:nvSpPr>
+        <p:spPr>
+          <a:xfrm>
+            <a:off x="640080" y="2761488"/>
+            <a:ext cx="73152" cy="274320"/>
+          </a:xfrm>
+          <a:prstGeom prst="rect">
+            <a:avLst/>
+          </a:prstGeom>
+          <a:solidFill>
+            <a:srgbClr val="269CCB"/>
+          </a:solidFill>
+          <a:ln>
+            <a:noFill/>
+          </a:ln>
+        </p:spPr>
+        <p:style>
+          <a:lnRef idx="1">
+            <a:schemeClr val="accent1"/>
+          </a:lnRef>
+          <a:fillRef idx="3">
+            <a:schemeClr val="accent1"/>
+          </a:fillRef>
+          <a:effectRef idx="2">
+            <a:schemeClr val="accent1"/>
+          </a:effectRef>
+          <a:fontRef idx="minor">
+            <a:schemeClr val="lt1"/>
+          </a:fontRef>
+        </p:style>
+        <p:txBody>
+          <a:bodyPr rtlCol="0" anchor="ctr"/>
+          <a:lstStyle/>
+          <a:p>
+            <a:pPr algn="ctr"/>
+          </a:p>
+        </p:txBody>
+      </p:sp>
+      <p:sp>
+        <p:nvSpPr>
+          <p:cNvPr id="16" name="TextBox 15"/>
+          <p:cNvSpPr txBox="1"/>
+          <p:nvPr/>
+        </p:nvSpPr>
+        <p:spPr>
+          <a:xfrm>
+            <a:off x="1097280" y="2706624"/>
+            <a:ext cx="10362895" cy="402336"/>
+          </a:xfrm>
+          <a:prstGeom prst="rect">
+            <a:avLst/>
+          </a:prstGeom>
+          <a:noFill/>
+        </p:spPr>
+        <p:txBody>
+          <a:bodyPr wrap="square" anchor="ctr"/>
+          <a:lstStyle/>
+          <a:p>
+            <a:r>
+              <a:rPr sz="1500" b="0" i="0">
+                <a:solidFill>
+                  <a:srgbClr val="333333"/>
+                </a:solidFill>
+                <a:latin typeface="Calibri"/>
+              </a:rPr>
+              <a:t>Si el internet falla justo antes de mostrar el prototipo, que hace el equipo en los siguientes quince segundos para no perder el bloque de interfaz.</a:t>
+            </a:r>
+          </a:p>
+        </p:txBody>
+      </p:sp>
+      <p:sp>
+        <p:nvSpPr>
+          <p:cNvPr id="17" name="TextBox 16"/>
+          <p:cNvSpPr txBox="1"/>
+          <p:nvPr/>
+        </p:nvSpPr>
+        <p:spPr>
+          <a:xfrm>
+            <a:off x="11185855" y="6473952"/>
+            <a:ext cx="640080" cy="274320"/>
           </a:xfrm>
           <a:prstGeom prst="rect">
             <a:avLst/>
@@ -6261,65 +8075,141 @@
           </a:bodyPr>
           <a:lstStyle/>
           <a:p>
-            <a:pPr algn="ctr">
-              <a:spcAft>
-                <a:spcPts val="600"/>
-              </a:spcAft>
-            </a:pPr>
-            <a:r>
-              <a:rPr sz="1600" b="0" i="0">
-                <a:solidFill>
-                  <a:srgbClr val="333333"/>
-                </a:solidFill>
-                <a:latin typeface="Calibri"/>
-              </a:rPr>
-              <a:t>Queda armado el guion cronometrado de sustentacion de VetCare y consolidado el documento final de diseño en una sola pieza coherente.</a:t>
-            </a:r>
-          </a:p>
-          <a:p>
-            <a:pPr algn="ctr">
-              <a:spcAft>
-                <a:spcPts val="600"/>
-              </a:spcAft>
-            </a:pPr>
-            <a:r>
-              <a:rPr sz="1600" b="0" i="0">
-                <a:solidFill>
-                  <a:srgbClr val="333333"/>
-                </a:solidFill>
-                <a:latin typeface="Calibri"/>
-              </a:rPr>
-              <a:t>Entregable: Un documento en Google Docs con el guion minuto a minuto repartido en bloques con tiempos y evidencia (con responsable nominal solo si el docente autorizo equipo), la tabla de tres decisiones de diseño defendidas y el banco de diez preguntas con su respuesta, mas el indice del documento final consolidado, subido a la plataforma del curso.</a:t>
-            </a:r>
-          </a:p>
-          <a:p>
-            <a:pPr algn="ctr">
-              <a:spcAft>
-                <a:spcPts val="600"/>
-              </a:spcAft>
-            </a:pPr>
-            <a:r>
-              <a:rPr sz="1600" b="0" i="0">
-                <a:solidFill>
-                  <a:srgbClr val="333333"/>
-                </a:solidFill>
-                <a:latin typeface="Calibri"/>
-              </a:rPr>
-              <a:t>Siguiente clase: continuamos el hilo del PI</a:t>
-            </a:r>
-          </a:p>
-        </p:txBody>
-      </p:sp>
-      <p:sp>
-        <p:nvSpPr>
-          <p:cNvPr id="6" name="TextBox 5"/>
+            <a:pPr algn="r"/>
+            <a:r>
+              <a:rPr sz="1100" b="0" i="0">
+                <a:solidFill>
+                  <a:srgbClr val="666666"/>
+                </a:solidFill>
+                <a:latin typeface="Calibri"/>
+              </a:rPr>
+              <a:t>17</a:t>
+            </a:r>
+          </a:p>
+        </p:txBody>
+      </p:sp>
+    </p:spTree>
+  </p:cSld>
+  <p:clrMapOvr>
+    <a:masterClrMapping/>
+  </p:clrMapOvr>
+</p:sld>
+</file>
+
+<file path=ppt/slides/slide18.xml><?xml version="1.0" encoding="utf-8"?>
+<p:sld xmlns:a="http://schemas.openxmlformats.org/drawingml/2006/main" xmlns:p="http://schemas.openxmlformats.org/presentationml/2006/main" xmlns:r="http://schemas.openxmlformats.org/officeDocument/2006/relationships">
+  <p:cSld>
+    <p:bg>
+      <p:bgPr>
+        <a:solidFill>
+          <a:srgbClr val="FFFFFF"/>
+        </a:solidFill>
+        <a:effectLst/>
+      </p:bgPr>
+    </p:bg>
+    <p:spTree>
+      <p:nvGrpSpPr>
+        <p:cNvPr id="1" name=""/>
+        <p:cNvGrpSpPr/>
+        <p:nvPr/>
+      </p:nvGrpSpPr>
+      <p:grpSpPr/>
+      <p:sp>
+        <p:nvSpPr>
+          <p:cNvPr id="2" name="Rectangle 1"/>
+          <p:cNvSpPr/>
+          <p:nvPr/>
+        </p:nvSpPr>
+        <p:spPr>
+          <a:xfrm>
+            <a:off x="0" y="0"/>
+            <a:ext cx="12191695" cy="960120"/>
+          </a:xfrm>
+          <a:prstGeom prst="rect">
+            <a:avLst/>
+          </a:prstGeom>
+          <a:solidFill>
+            <a:srgbClr val="095292"/>
+          </a:solidFill>
+          <a:ln>
+            <a:noFill/>
+          </a:ln>
+        </p:spPr>
+        <p:style>
+          <a:lnRef idx="1">
+            <a:schemeClr val="accent1"/>
+          </a:lnRef>
+          <a:fillRef idx="3">
+            <a:schemeClr val="accent1"/>
+          </a:fillRef>
+          <a:effectRef idx="2">
+            <a:schemeClr val="accent1"/>
+          </a:effectRef>
+          <a:fontRef idx="minor">
+            <a:schemeClr val="lt1"/>
+          </a:fontRef>
+        </p:style>
+        <p:txBody>
+          <a:bodyPr rtlCol="0" anchor="ctr"/>
+          <a:lstStyle/>
+          <a:p>
+            <a:pPr algn="ctr"/>
+          </a:p>
+        </p:txBody>
+      </p:sp>
+      <p:sp>
+        <p:nvSpPr>
+          <p:cNvPr id="3" name="Rectangle 2"/>
+          <p:cNvSpPr/>
+          <p:nvPr/>
+        </p:nvSpPr>
+        <p:spPr>
+          <a:xfrm>
+            <a:off x="0" y="960120"/>
+            <a:ext cx="12191695" cy="41148"/>
+          </a:xfrm>
+          <a:prstGeom prst="rect">
+            <a:avLst/>
+          </a:prstGeom>
+          <a:solidFill>
+            <a:srgbClr val="FFD000"/>
+          </a:solidFill>
+          <a:ln>
+            <a:noFill/>
+          </a:ln>
+        </p:spPr>
+        <p:style>
+          <a:lnRef idx="1">
+            <a:schemeClr val="accent1"/>
+          </a:lnRef>
+          <a:fillRef idx="3">
+            <a:schemeClr val="accent1"/>
+          </a:fillRef>
+          <a:effectRef idx="2">
+            <a:schemeClr val="accent1"/>
+          </a:effectRef>
+          <a:fontRef idx="minor">
+            <a:schemeClr val="lt1"/>
+          </a:fontRef>
+        </p:style>
+        <p:txBody>
+          <a:bodyPr rtlCol="0" anchor="ctr"/>
+          <a:lstStyle/>
+          <a:p>
+            <a:pPr algn="ctr"/>
+          </a:p>
+        </p:txBody>
+      </p:sp>
+      <p:sp>
+        <p:nvSpPr>
+          <p:cNvPr id="4" name="TextBox 3"/>
           <p:cNvSpPr txBox="1"/>
           <p:nvPr/>
         </p:nvSpPr>
         <p:spPr>
           <a:xfrm>
-            <a:off x="457200" y="4754880"/>
-            <a:ext cx="11277295" cy="640080"/>
+            <a:off x="457200" y="164592"/>
+            <a:ext cx="11277295" cy="502920"/>
           </a:xfrm>
           <a:prstGeom prst="rect">
             <a:avLst/>
@@ -6332,15 +8222,871 @@
           </a:bodyPr>
           <a:lstStyle/>
           <a:p>
+            <a:r>
+              <a:rPr sz="2600" b="1" i="0">
+                <a:solidFill>
+                  <a:srgbClr val="FFFFFF"/>
+                </a:solidFill>
+                <a:latin typeface="Calibri"/>
+              </a:rPr>
+              <a:t>Criterios de exito / entregable</a:t>
+            </a:r>
+          </a:p>
+        </p:txBody>
+      </p:sp>
+      <p:sp>
+        <p:nvSpPr>
+          <p:cNvPr id="5" name="TextBox 4"/>
+          <p:cNvSpPr txBox="1"/>
+          <p:nvPr/>
+        </p:nvSpPr>
+        <p:spPr>
+          <a:xfrm>
+            <a:off x="457200" y="1170432"/>
+            <a:ext cx="11277295" cy="5230368"/>
+          </a:xfrm>
+          <a:prstGeom prst="rect">
+            <a:avLst/>
+          </a:prstGeom>
+          <a:noFill/>
+        </p:spPr>
+        <p:txBody>
+          <a:bodyPr wrap="square">
+            <a:spAutoFit/>
+          </a:bodyPr>
+          <a:lstStyle/>
+          <a:p>
+            <a:pPr>
+              <a:spcAft>
+                <a:spcPts val="800"/>
+              </a:spcAft>
+            </a:pPr>
+            <a:r>
+              <a:rPr sz="2000" b="0" i="0">
+                <a:solidFill>
+                  <a:srgbClr val="333333"/>
+                </a:solidFill>
+                <a:latin typeface="Calibri"/>
+              </a:rPr>
+              <a:t>–   </a:t>
+            </a:r>
+            <a:r>
+              <a:rPr sz="2000" b="1" i="0">
+                <a:solidFill>
+                  <a:srgbClr val="333333"/>
+                </a:solidFill>
+                <a:latin typeface="Calibri"/>
+              </a:rPr>
+              <a:t>Entregable:</a:t>
+            </a:r>
+            <a:r>
+              <a:rPr sz="2000" b="0" i="0">
+                <a:solidFill>
+                  <a:srgbClr val="333333"/>
+                </a:solidFill>
+                <a:latin typeface="Calibri"/>
+              </a:rPr>
+              <a:t> Un documento en Google Docs con el guion minuto a minuto repartido en bloques con tiempos y evidencia (con responsable nominal solo si el docente autorizo equipo), la tabla de tres decisiones de diseño defendidas y el banco de diez preguntas con su respuesta, mas el indice del documento final consolidado, subido a la plataforma del curso.</a:t>
+            </a:r>
+          </a:p>
+          <a:p>
+            <a:pPr>
+              <a:spcAft>
+                <a:spcPts val="800"/>
+              </a:spcAft>
+            </a:pPr>
+            <a:r>
+              <a:rPr sz="2000" b="0" i="0">
+                <a:solidFill>
+                  <a:srgbClr val="333333"/>
+                </a:solidFill>
+                <a:latin typeface="Calibri"/>
+              </a:rPr>
+              <a:t>–   </a:t>
+            </a:r>
+            <a:r>
+              <a:rPr sz="2000" b="1" i="0">
+                <a:solidFill>
+                  <a:srgbClr val="333333"/>
+                </a:solidFill>
+                <a:latin typeface="Calibri"/>
+              </a:rPr>
+              <a:t>Exito:</a:t>
+            </a:r>
+            <a:r>
+              <a:rPr sz="2000" b="0" i="0">
+                <a:solidFill>
+                  <a:srgbClr val="333333"/>
+                </a:solidFill>
+                <a:latin typeface="Calibri"/>
+              </a:rPr>
+              <a:t> El guion tiene las cinco secciones en el orden problema, requisitos, modelo, interfaz y decisiones, con minutos asignados que suman doce, cada bloque con su evidencia en pantalla y, si el docente autorizo equipo, todos los integrantes hablando al menos dos minutos.</a:t>
+            </a:r>
+          </a:p>
+          <a:p>
+            <a:pPr>
+              <a:spcAft>
+                <a:spcPts val="800"/>
+              </a:spcAft>
+            </a:pPr>
+            <a:r>
+              <a:rPr sz="2000" b="0" i="0">
+                <a:solidFill>
+                  <a:srgbClr val="333333"/>
+                </a:solidFill>
+                <a:latin typeface="Calibri"/>
+              </a:rPr>
+              <a:t>–   </a:t>
+            </a:r>
+            <a:r>
+              <a:rPr sz="2000" b="1" i="0">
+                <a:solidFill>
+                  <a:srgbClr val="333333"/>
+                </a:solidFill>
+                <a:latin typeface="Calibri"/>
+              </a:rPr>
+              <a:t>Exito:</a:t>
+            </a:r>
+            <a:r>
+              <a:rPr sz="2000" b="0" i="0">
+                <a:solidFill>
+                  <a:srgbClr val="333333"/>
+                </a:solidFill>
+                <a:latin typeface="Calibri"/>
+              </a:rPr>
+              <a:t> Las tres decisiones de diseño estan escritas con las cuatro columnas completas, incluida la consecuencia asumida, y ninguna se justifica por gusto o por costumbre.</a:t>
+            </a:r>
+          </a:p>
+          <a:p>
+            <a:pPr>
+              <a:spcAft>
+                <a:spcPts val="800"/>
+              </a:spcAft>
+            </a:pPr>
+            <a:r>
+              <a:rPr sz="2000" b="0" i="0">
+                <a:solidFill>
+                  <a:srgbClr val="333333"/>
+                </a:solidFill>
+                <a:latin typeface="Calibri"/>
+              </a:rPr>
+              <a:t>–   </a:t>
+            </a:r>
+            <a:r>
+              <a:rPr sz="2000" b="1" i="0">
+                <a:solidFill>
+                  <a:srgbClr val="333333"/>
+                </a:solidFill>
+                <a:latin typeface="Calibri"/>
+              </a:rPr>
+              <a:t>Exito:</a:t>
+            </a:r>
+            <a:r>
+              <a:rPr sz="2000" b="0" i="0">
+                <a:solidFill>
+                  <a:srgbClr val="333333"/>
+                </a:solidFill>
+                <a:latin typeface="Calibri"/>
+              </a:rPr>
+              <a:t> El banco tiene diez preguntas con respuesta de maximo dos frases y contempla al menos un caso de concurrencia, uno de medicion de RNF y uno de alcance excluido.</a:t>
+            </a:r>
+          </a:p>
+          <a:p>
+            <a:pPr>
+              <a:spcAft>
+                <a:spcPts val="800"/>
+              </a:spcAft>
+            </a:pPr>
+            <a:r>
+              <a:rPr sz="2000" b="0" i="0">
+                <a:solidFill>
+                  <a:srgbClr val="333333"/>
+                </a:solidFill>
+                <a:latin typeface="Calibri"/>
+              </a:rPr>
+              <a:t>–   </a:t>
+            </a:r>
+            <a:r>
+              <a:rPr sz="2000" b="1" i="0">
+                <a:solidFill>
+                  <a:srgbClr val="333333"/>
+                </a:solidFill>
+                <a:latin typeface="Calibri"/>
+              </a:rPr>
+              <a:t>Exito:</a:t>
+            </a:r>
+            <a:r>
+              <a:rPr sz="2000" b="0" i="0">
+                <a:solidFill>
+                  <a:srgbClr val="333333"/>
+                </a:solidFill>
+                <a:latin typeface="Calibri"/>
+              </a:rPr>
+              <a:t> El documento final consolidado tiene indice, version y al menos una inconsistencia entre artefactos detectada y corregida, dejando registro de cual era.</a:t>
+            </a:r>
+          </a:p>
+          <a:p>
+            <a:pPr>
+              <a:spcAft>
+                <a:spcPts val="800"/>
+              </a:spcAft>
+            </a:pPr>
+            <a:r>
+              <a:rPr sz="2000" b="0" i="0">
+                <a:solidFill>
+                  <a:srgbClr val="333333"/>
+                </a:solidFill>
+                <a:latin typeface="Calibri"/>
+              </a:rPr>
+              <a:t>–   </a:t>
+            </a:r>
+            <a:r>
+              <a:rPr sz="2000" b="1" i="0">
+                <a:solidFill>
+                  <a:srgbClr val="333333"/>
+                </a:solidFill>
+                <a:latin typeface="Calibri"/>
+              </a:rPr>
+              <a:t>Entrega en la plataforma del curso</a:t>
+            </a:r>
+            <a:r>
+              <a:rPr sz="2000" b="0" i="0">
+                <a:solidFill>
+                  <a:srgbClr val="333333"/>
+                </a:solidFill>
+                <a:latin typeface="Calibri"/>
+              </a:rPr>
+              <a:t> — en la fecha que indique el docente.</a:t>
+            </a:r>
+          </a:p>
+        </p:txBody>
+      </p:sp>
+      <p:sp>
+        <p:nvSpPr>
+          <p:cNvPr id="6" name="TextBox 5"/>
+          <p:cNvSpPr txBox="1"/>
+          <p:nvPr/>
+        </p:nvSpPr>
+        <p:spPr>
+          <a:xfrm>
+            <a:off x="11185855" y="6473952"/>
+            <a:ext cx="640080" cy="274320"/>
+          </a:xfrm>
+          <a:prstGeom prst="rect">
+            <a:avLst/>
+          </a:prstGeom>
+          <a:noFill/>
+        </p:spPr>
+        <p:txBody>
+          <a:bodyPr wrap="square">
+            <a:spAutoFit/>
+          </a:bodyPr>
+          <a:lstStyle/>
+          <a:p>
+            <a:pPr algn="r"/>
+            <a:r>
+              <a:rPr sz="1100" b="0" i="0">
+                <a:solidFill>
+                  <a:srgbClr val="666666"/>
+                </a:solidFill>
+                <a:latin typeface="Calibri"/>
+              </a:rPr>
+              <a:t>18</a:t>
+            </a:r>
+          </a:p>
+        </p:txBody>
+      </p:sp>
+    </p:spTree>
+  </p:cSld>
+  <p:clrMapOvr>
+    <a:masterClrMapping/>
+  </p:clrMapOvr>
+</p:sld>
+</file>
+
+<file path=ppt/slides/slide19.xml><?xml version="1.0" encoding="utf-8"?>
+<p:sld xmlns:a="http://schemas.openxmlformats.org/drawingml/2006/main" xmlns:p="http://schemas.openxmlformats.org/presentationml/2006/main" xmlns:r="http://schemas.openxmlformats.org/officeDocument/2006/relationships">
+  <p:cSld>
+    <p:bg>
+      <p:bgPr>
+        <a:solidFill>
+          <a:srgbClr val="FFFFFF"/>
+        </a:solidFill>
+        <a:effectLst/>
+      </p:bgPr>
+    </p:bg>
+    <p:spTree>
+      <p:nvGrpSpPr>
+        <p:cNvPr id="1" name=""/>
+        <p:cNvGrpSpPr/>
+        <p:nvPr/>
+      </p:nvGrpSpPr>
+      <p:grpSpPr/>
+      <p:sp>
+        <p:nvSpPr>
+          <p:cNvPr id="2" name="Rectangle 1"/>
+          <p:cNvSpPr/>
+          <p:nvPr/>
+        </p:nvSpPr>
+        <p:spPr>
+          <a:xfrm>
+            <a:off x="0" y="0"/>
+            <a:ext cx="12191695" cy="960120"/>
+          </a:xfrm>
+          <a:prstGeom prst="rect">
+            <a:avLst/>
+          </a:prstGeom>
+          <a:solidFill>
+            <a:srgbClr val="095292"/>
+          </a:solidFill>
+          <a:ln>
+            <a:noFill/>
+          </a:ln>
+        </p:spPr>
+        <p:style>
+          <a:lnRef idx="1">
+            <a:schemeClr val="accent1"/>
+          </a:lnRef>
+          <a:fillRef idx="3">
+            <a:schemeClr val="accent1"/>
+          </a:fillRef>
+          <a:effectRef idx="2">
+            <a:schemeClr val="accent1"/>
+          </a:effectRef>
+          <a:fontRef idx="minor">
+            <a:schemeClr val="lt1"/>
+          </a:fontRef>
+        </p:style>
+        <p:txBody>
+          <a:bodyPr rtlCol="0" anchor="ctr"/>
+          <a:lstStyle/>
+          <a:p>
             <a:pPr algn="ctr"/>
-            <a:r>
-              <a:rPr sz="2000" b="1" i="0">
+          </a:p>
+        </p:txBody>
+      </p:sp>
+      <p:sp>
+        <p:nvSpPr>
+          <p:cNvPr id="3" name="Rectangle 2"/>
+          <p:cNvSpPr/>
+          <p:nvPr/>
+        </p:nvSpPr>
+        <p:spPr>
+          <a:xfrm>
+            <a:off x="0" y="960120"/>
+            <a:ext cx="12191695" cy="41148"/>
+          </a:xfrm>
+          <a:prstGeom prst="rect">
+            <a:avLst/>
+          </a:prstGeom>
+          <a:solidFill>
+            <a:srgbClr val="FFD000"/>
+          </a:solidFill>
+          <a:ln>
+            <a:noFill/>
+          </a:ln>
+        </p:spPr>
+        <p:style>
+          <a:lnRef idx="1">
+            <a:schemeClr val="accent1"/>
+          </a:lnRef>
+          <a:fillRef idx="3">
+            <a:schemeClr val="accent1"/>
+          </a:fillRef>
+          <a:effectRef idx="2">
+            <a:schemeClr val="accent1"/>
+          </a:effectRef>
+          <a:fontRef idx="minor">
+            <a:schemeClr val="lt1"/>
+          </a:fontRef>
+        </p:style>
+        <p:txBody>
+          <a:bodyPr rtlCol="0" anchor="ctr"/>
+          <a:lstStyle/>
+          <a:p>
+            <a:pPr algn="ctr"/>
+          </a:p>
+        </p:txBody>
+      </p:sp>
+      <p:sp>
+        <p:nvSpPr>
+          <p:cNvPr id="4" name="TextBox 3"/>
+          <p:cNvSpPr txBox="1"/>
+          <p:nvPr/>
+        </p:nvSpPr>
+        <p:spPr>
+          <a:xfrm>
+            <a:off x="457200" y="164592"/>
+            <a:ext cx="11277295" cy="502920"/>
+          </a:xfrm>
+          <a:prstGeom prst="rect">
+            <a:avLst/>
+          </a:prstGeom>
+          <a:noFill/>
+        </p:spPr>
+        <p:txBody>
+          <a:bodyPr wrap="square">
+            <a:spAutoFit/>
+          </a:bodyPr>
+          <a:lstStyle/>
+          <a:p>
+            <a:r>
+              <a:rPr sz="2600" b="1" i="0">
+                <a:solidFill>
+                  <a:srgbClr val="FFFFFF"/>
+                </a:solidFill>
+                <a:latin typeface="Calibri"/>
+              </a:rPr>
+              <a:t>Para el PI esta semana</a:t>
+            </a:r>
+          </a:p>
+        </p:txBody>
+      </p:sp>
+      <p:sp>
+        <p:nvSpPr>
+          <p:cNvPr id="5" name="Rounded Rectangle 4"/>
+          <p:cNvSpPr/>
+          <p:nvPr/>
+        </p:nvSpPr>
+        <p:spPr>
+          <a:xfrm>
+            <a:off x="457200" y="1261872"/>
+            <a:ext cx="11277295" cy="1051560"/>
+          </a:xfrm>
+          <a:prstGeom prst="roundRect">
+            <a:avLst>
+              <a:gd name="adj" fmla="val 12000"/>
+            </a:avLst>
+          </a:prstGeom>
+          <a:solidFill>
+            <a:srgbClr val="E8F4FA"/>
+          </a:solidFill>
+          <a:ln>
+            <a:noFill/>
+          </a:ln>
+        </p:spPr>
+        <p:style>
+          <a:lnRef idx="1">
+            <a:schemeClr val="accent1"/>
+          </a:lnRef>
+          <a:fillRef idx="3">
+            <a:schemeClr val="accent1"/>
+          </a:fillRef>
+          <a:effectRef idx="2">
+            <a:schemeClr val="accent1"/>
+          </a:effectRef>
+          <a:fontRef idx="minor">
+            <a:schemeClr val="lt1"/>
+          </a:fontRef>
+        </p:style>
+        <p:txBody>
+          <a:bodyPr rtlCol="0" anchor="ctr"/>
+          <a:lstStyle/>
+          <a:p>
+            <a:pPr algn="ctr"/>
+          </a:p>
+        </p:txBody>
+      </p:sp>
+      <p:sp>
+        <p:nvSpPr>
+          <p:cNvPr id="6" name="Rectangle 5"/>
+          <p:cNvSpPr/>
+          <p:nvPr/>
+        </p:nvSpPr>
+        <p:spPr>
+          <a:xfrm>
+            <a:off x="457200" y="1261872"/>
+            <a:ext cx="128016" cy="1051560"/>
+          </a:xfrm>
+          <a:prstGeom prst="rect">
+            <a:avLst/>
+          </a:prstGeom>
+          <a:solidFill>
+            <a:srgbClr val="269CCB"/>
+          </a:solidFill>
+          <a:ln>
+            <a:noFill/>
+          </a:ln>
+        </p:spPr>
+        <p:style>
+          <a:lnRef idx="1">
+            <a:schemeClr val="accent1"/>
+          </a:lnRef>
+          <a:fillRef idx="3">
+            <a:schemeClr val="accent1"/>
+          </a:fillRef>
+          <a:effectRef idx="2">
+            <a:schemeClr val="accent1"/>
+          </a:effectRef>
+          <a:fontRef idx="minor">
+            <a:schemeClr val="lt1"/>
+          </a:fontRef>
+        </p:style>
+        <p:txBody>
+          <a:bodyPr rtlCol="0" anchor="ctr"/>
+          <a:lstStyle/>
+          <a:p>
+            <a:pPr algn="ctr"/>
+          </a:p>
+        </p:txBody>
+      </p:sp>
+      <p:sp>
+        <p:nvSpPr>
+          <p:cNvPr id="7" name="TextBox 6"/>
+          <p:cNvSpPr txBox="1"/>
+          <p:nvPr/>
+        </p:nvSpPr>
+        <p:spPr>
+          <a:xfrm>
+            <a:off x="777240" y="1399031"/>
+            <a:ext cx="10774375" cy="822959"/>
+          </a:xfrm>
+          <a:prstGeom prst="rect">
+            <a:avLst/>
+          </a:prstGeom>
+          <a:noFill/>
+        </p:spPr>
+        <p:txBody>
+          <a:bodyPr wrap="square">
+            <a:spAutoFit/>
+          </a:bodyPr>
+          <a:lstStyle/>
+          <a:p>
+            <a:r>
+              <a:rPr sz="1200" b="1" i="0">
                 <a:solidFill>
                   <a:srgbClr val="269CCB"/>
                 </a:solidFill>
                 <a:latin typeface="Calibri"/>
               </a:rPr>
-              <a:t>Teoria al servicio del proyecto</a:t>
+              <a:t>Info</a:t>
+            </a:r>
+          </a:p>
+          <a:p>
+            <a:pPr>
+              <a:spcBef>
+                <a:spcPts val="400"/>
+              </a:spcBef>
+            </a:pPr>
+            <a:r>
+              <a:rPr sz="1400" b="0" i="0">
+                <a:solidFill>
+                  <a:srgbClr val="333333"/>
+                </a:solidFill>
+                <a:latin typeface="Calibri"/>
+              </a:rPr>
+              <a:t>Hito: Queda armado el guion cronometrado de sustentacion de VetCare y consolidado el documento final de diseño en una sola pieza coherente.</a:t>
+            </a:r>
+          </a:p>
+        </p:txBody>
+      </p:sp>
+      <p:sp>
+        <p:nvSpPr>
+          <p:cNvPr id="8" name="Rounded Rectangle 7"/>
+          <p:cNvSpPr/>
+          <p:nvPr/>
+        </p:nvSpPr>
+        <p:spPr>
+          <a:xfrm>
+            <a:off x="457200" y="2478024"/>
+            <a:ext cx="11277295" cy="1051560"/>
+          </a:xfrm>
+          <a:prstGeom prst="roundRect">
+            <a:avLst>
+              <a:gd name="adj" fmla="val 12000"/>
+            </a:avLst>
+          </a:prstGeom>
+          <a:solidFill>
+            <a:srgbClr val="FFF8E1"/>
+          </a:solidFill>
+          <a:ln>
+            <a:noFill/>
+          </a:ln>
+        </p:spPr>
+        <p:style>
+          <a:lnRef idx="1">
+            <a:schemeClr val="accent1"/>
+          </a:lnRef>
+          <a:fillRef idx="3">
+            <a:schemeClr val="accent1"/>
+          </a:fillRef>
+          <a:effectRef idx="2">
+            <a:schemeClr val="accent1"/>
+          </a:effectRef>
+          <a:fontRef idx="minor">
+            <a:schemeClr val="lt1"/>
+          </a:fontRef>
+        </p:style>
+        <p:txBody>
+          <a:bodyPr rtlCol="0" anchor="ctr"/>
+          <a:lstStyle/>
+          <a:p>
+            <a:pPr algn="ctr"/>
+          </a:p>
+        </p:txBody>
+      </p:sp>
+      <p:sp>
+        <p:nvSpPr>
+          <p:cNvPr id="9" name="Rectangle 8"/>
+          <p:cNvSpPr/>
+          <p:nvPr/>
+        </p:nvSpPr>
+        <p:spPr>
+          <a:xfrm>
+            <a:off x="457200" y="2478024"/>
+            <a:ext cx="128016" cy="1051560"/>
+          </a:xfrm>
+          <a:prstGeom prst="rect">
+            <a:avLst/>
+          </a:prstGeom>
+          <a:solidFill>
+            <a:srgbClr val="FFD000"/>
+          </a:solidFill>
+          <a:ln>
+            <a:noFill/>
+          </a:ln>
+        </p:spPr>
+        <p:style>
+          <a:lnRef idx="1">
+            <a:schemeClr val="accent1"/>
+          </a:lnRef>
+          <a:fillRef idx="3">
+            <a:schemeClr val="accent1"/>
+          </a:fillRef>
+          <a:effectRef idx="2">
+            <a:schemeClr val="accent1"/>
+          </a:effectRef>
+          <a:fontRef idx="minor">
+            <a:schemeClr val="lt1"/>
+          </a:fontRef>
+        </p:style>
+        <p:txBody>
+          <a:bodyPr rtlCol="0" anchor="ctr"/>
+          <a:lstStyle/>
+          <a:p>
+            <a:pPr algn="ctr"/>
+          </a:p>
+        </p:txBody>
+      </p:sp>
+      <p:sp>
+        <p:nvSpPr>
+          <p:cNvPr id="10" name="TextBox 9"/>
+          <p:cNvSpPr txBox="1"/>
+          <p:nvPr/>
+        </p:nvSpPr>
+        <p:spPr>
+          <a:xfrm>
+            <a:off x="777240" y="2615184"/>
+            <a:ext cx="10774375" cy="822959"/>
+          </a:xfrm>
+          <a:prstGeom prst="rect">
+            <a:avLst/>
+          </a:prstGeom>
+          <a:noFill/>
+        </p:spPr>
+        <p:txBody>
+          <a:bodyPr wrap="square">
+            <a:spAutoFit/>
+          </a:bodyPr>
+          <a:lstStyle/>
+          <a:p>
+            <a:r>
+              <a:rPr sz="1200" b="1" i="0">
+                <a:solidFill>
+                  <a:srgbClr val="FFD000"/>
+                </a:solidFill>
+                <a:latin typeface="Calibri"/>
+              </a:rPr>
+              <a:t>Aclaración</a:t>
+            </a:r>
+          </a:p>
+          <a:p>
+            <a:pPr>
+              <a:spcBef>
+                <a:spcPts val="400"/>
+              </a:spcBef>
+            </a:pPr>
+            <a:r>
+              <a:rPr sz="1400" b="0" i="0">
+                <a:solidFill>
+                  <a:srgbClr val="333333"/>
+                </a:solidFill>
+                <a:latin typeface="Calibri"/>
+              </a:rPr>
+              <a:t>Enunciado completo: Clases/Proyecto Integrador/ (VetCare).</a:t>
+            </a:r>
+          </a:p>
+        </p:txBody>
+      </p:sp>
+      <p:sp>
+        <p:nvSpPr>
+          <p:cNvPr id="11" name="Rounded Rectangle 10"/>
+          <p:cNvSpPr/>
+          <p:nvPr/>
+        </p:nvSpPr>
+        <p:spPr>
+          <a:xfrm>
+            <a:off x="457200" y="3694176"/>
+            <a:ext cx="11277295" cy="1051560"/>
+          </a:xfrm>
+          <a:prstGeom prst="roundRect">
+            <a:avLst>
+              <a:gd name="adj" fmla="val 12000"/>
+            </a:avLst>
+          </a:prstGeom>
+          <a:solidFill>
+            <a:srgbClr val="FBE4E4"/>
+          </a:solidFill>
+          <a:ln>
+            <a:noFill/>
+          </a:ln>
+        </p:spPr>
+        <p:style>
+          <a:lnRef idx="1">
+            <a:schemeClr val="accent1"/>
+          </a:lnRef>
+          <a:fillRef idx="3">
+            <a:schemeClr val="accent1"/>
+          </a:fillRef>
+          <a:effectRef idx="2">
+            <a:schemeClr val="accent1"/>
+          </a:effectRef>
+          <a:fontRef idx="minor">
+            <a:schemeClr val="lt1"/>
+          </a:fontRef>
+        </p:style>
+        <p:txBody>
+          <a:bodyPr rtlCol="0" anchor="ctr"/>
+          <a:lstStyle/>
+          <a:p>
+            <a:pPr algn="ctr"/>
+          </a:p>
+        </p:txBody>
+      </p:sp>
+      <p:sp>
+        <p:nvSpPr>
+          <p:cNvPr id="12" name="Rectangle 11"/>
+          <p:cNvSpPr/>
+          <p:nvPr/>
+        </p:nvSpPr>
+        <p:spPr>
+          <a:xfrm>
+            <a:off x="457200" y="3694176"/>
+            <a:ext cx="128016" cy="1051560"/>
+          </a:xfrm>
+          <a:prstGeom prst="rect">
+            <a:avLst/>
+          </a:prstGeom>
+          <a:solidFill>
+            <a:srgbClr val="A02030"/>
+          </a:solidFill>
+          <a:ln>
+            <a:noFill/>
+          </a:ln>
+        </p:spPr>
+        <p:style>
+          <a:lnRef idx="1">
+            <a:schemeClr val="accent1"/>
+          </a:lnRef>
+          <a:fillRef idx="3">
+            <a:schemeClr val="accent1"/>
+          </a:fillRef>
+          <a:effectRef idx="2">
+            <a:schemeClr val="accent1"/>
+          </a:effectRef>
+          <a:fontRef idx="minor">
+            <a:schemeClr val="lt1"/>
+          </a:fontRef>
+        </p:style>
+        <p:txBody>
+          <a:bodyPr rtlCol="0" anchor="ctr"/>
+          <a:lstStyle/>
+          <a:p>
+            <a:pPr algn="ctr"/>
+          </a:p>
+        </p:txBody>
+      </p:sp>
+      <p:sp>
+        <p:nvSpPr>
+          <p:cNvPr id="13" name="TextBox 12"/>
+          <p:cNvSpPr txBox="1"/>
+          <p:nvPr/>
+        </p:nvSpPr>
+        <p:spPr>
+          <a:xfrm>
+            <a:off x="777240" y="3831336"/>
+            <a:ext cx="10774375" cy="822959"/>
+          </a:xfrm>
+          <a:prstGeom prst="rect">
+            <a:avLst/>
+          </a:prstGeom>
+          <a:noFill/>
+        </p:spPr>
+        <p:txBody>
+          <a:bodyPr wrap="square">
+            <a:spAutoFit/>
+          </a:bodyPr>
+          <a:lstStyle/>
+          <a:p>
+            <a:r>
+              <a:rPr sz="1200" b="1" i="0">
+                <a:solidFill>
+                  <a:srgbClr val="A02030"/>
+                </a:solidFill>
+                <a:latin typeface="Calibri"/>
+              </a:rPr>
+              <a:t>Atención</a:t>
+            </a:r>
+          </a:p>
+          <a:p>
+            <a:pPr>
+              <a:spcBef>
+                <a:spcPts val="400"/>
+              </a:spcBef>
+            </a:pPr>
+            <a:r>
+              <a:rPr sz="1400" b="0" i="0">
+                <a:solidFill>
+                  <a:srgbClr val="333333"/>
+                </a:solidFill>
+                <a:latin typeface="Calibri"/>
+              </a:rPr>
+              <a:t>Entrega del taller, si el docente lo asigna · en la fecha que indique el docente.</a:t>
+            </a:r>
+          </a:p>
+        </p:txBody>
+      </p:sp>
+      <p:sp>
+        <p:nvSpPr>
+          <p:cNvPr id="14" name="TextBox 13"/>
+          <p:cNvSpPr txBox="1"/>
+          <p:nvPr/>
+        </p:nvSpPr>
+        <p:spPr>
+          <a:xfrm>
+            <a:off x="11185855" y="6473952"/>
+            <a:ext cx="640080" cy="274320"/>
+          </a:xfrm>
+          <a:prstGeom prst="rect">
+            <a:avLst/>
+          </a:prstGeom>
+          <a:noFill/>
+        </p:spPr>
+        <p:txBody>
+          <a:bodyPr wrap="square">
+            <a:spAutoFit/>
+          </a:bodyPr>
+          <a:lstStyle/>
+          <a:p>
+            <a:pPr algn="r"/>
+            <a:r>
+              <a:rPr sz="1100" b="0" i="0">
+                <a:solidFill>
+                  <a:srgbClr val="666666"/>
+                </a:solidFill>
+                <a:latin typeface="Calibri"/>
+              </a:rPr>
+              <a:t>19</a:t>
             </a:r>
           </a:p>
         </p:txBody>
@@ -6684,6 +9430,238 @@
 </p:sld>
 </file>
 
+<file path=ppt/slides/slide20.xml><?xml version="1.0" encoding="utf-8"?>
+<p:sld xmlns:a="http://schemas.openxmlformats.org/drawingml/2006/main" xmlns:p="http://schemas.openxmlformats.org/presentationml/2006/main" xmlns:r="http://schemas.openxmlformats.org/officeDocument/2006/relationships">
+  <p:cSld>
+    <p:bg>
+      <p:bgPr>
+        <a:solidFill>
+          <a:srgbClr val="FFFFFF"/>
+        </a:solidFill>
+        <a:effectLst/>
+      </p:bgPr>
+    </p:bg>
+    <p:spTree>
+      <p:nvGrpSpPr>
+        <p:cNvPr id="1" name=""/>
+        <p:cNvGrpSpPr/>
+        <p:nvPr/>
+      </p:nvGrpSpPr>
+      <p:grpSpPr/>
+      <p:sp>
+        <p:nvSpPr>
+          <p:cNvPr id="2" name="Rectangle 1"/>
+          <p:cNvSpPr/>
+          <p:nvPr/>
+        </p:nvSpPr>
+        <p:spPr>
+          <a:xfrm>
+            <a:off x="0" y="0"/>
+            <a:ext cx="12191695" cy="164592"/>
+          </a:xfrm>
+          <a:prstGeom prst="rect">
+            <a:avLst/>
+          </a:prstGeom>
+          <a:solidFill>
+            <a:srgbClr val="269CCB"/>
+          </a:solidFill>
+          <a:ln>
+            <a:noFill/>
+          </a:ln>
+        </p:spPr>
+        <p:style>
+          <a:lnRef idx="1">
+            <a:schemeClr val="accent1"/>
+          </a:lnRef>
+          <a:fillRef idx="3">
+            <a:schemeClr val="accent1"/>
+          </a:fillRef>
+          <a:effectRef idx="2">
+            <a:schemeClr val="accent1"/>
+          </a:effectRef>
+          <a:fontRef idx="minor">
+            <a:schemeClr val="lt1"/>
+          </a:fontRef>
+        </p:style>
+        <p:txBody>
+          <a:bodyPr rtlCol="0" anchor="ctr"/>
+          <a:lstStyle/>
+          <a:p>
+            <a:pPr algn="ctr"/>
+          </a:p>
+        </p:txBody>
+      </p:sp>
+      <p:pic>
+        <p:nvPicPr>
+          <p:cNvPr id="3" name="Picture 2" descr="logo_uniajc_color.png"/>
+          <p:cNvPicPr>
+            <a:picLocks noChangeAspect="1"/>
+          </p:cNvPicPr>
+          <p:nvPr/>
+        </p:nvPicPr>
+        <p:blipFill>
+          <a:blip r:embed="rId2"/>
+          <a:stretch>
+            <a:fillRect/>
+          </a:stretch>
+        </p:blipFill>
+        <p:spPr>
+          <a:xfrm>
+            <a:off x="10271455" y="5998464"/>
+            <a:ext cx="1463040" cy="643233"/>
+          </a:xfrm>
+          <a:prstGeom prst="rect">
+            <a:avLst/>
+          </a:prstGeom>
+        </p:spPr>
+      </p:pic>
+      <p:sp>
+        <p:nvSpPr>
+          <p:cNvPr id="4" name="TextBox 3"/>
+          <p:cNvSpPr txBox="1"/>
+          <p:nvPr/>
+        </p:nvSpPr>
+        <p:spPr>
+          <a:xfrm>
+            <a:off x="457200" y="1737360"/>
+            <a:ext cx="11277295" cy="1097280"/>
+          </a:xfrm>
+          <a:prstGeom prst="rect">
+            <a:avLst/>
+          </a:prstGeom>
+          <a:noFill/>
+        </p:spPr>
+        <p:txBody>
+          <a:bodyPr wrap="square" anchor="ctr"/>
+          <a:lstStyle/>
+          <a:p>
+            <a:pPr algn="ctr"/>
+            <a:r>
+              <a:rPr sz="3400" b="1" i="0">
+                <a:solidFill>
+                  <a:srgbClr val="095292"/>
+                </a:solidFill>
+                <a:latin typeface="Calibri"/>
+              </a:rPr>
+              <a:t>Clase 14 · VetCare avanza</a:t>
+            </a:r>
+          </a:p>
+        </p:txBody>
+      </p:sp>
+      <p:sp>
+        <p:nvSpPr>
+          <p:cNvPr id="5" name="TextBox 4"/>
+          <p:cNvSpPr txBox="1"/>
+          <p:nvPr/>
+        </p:nvSpPr>
+        <p:spPr>
+          <a:xfrm>
+            <a:off x="457200" y="3017520"/>
+            <a:ext cx="11277295" cy="1645920"/>
+          </a:xfrm>
+          <a:prstGeom prst="rect">
+            <a:avLst/>
+          </a:prstGeom>
+          <a:noFill/>
+        </p:spPr>
+        <p:txBody>
+          <a:bodyPr wrap="square">
+            <a:spAutoFit/>
+          </a:bodyPr>
+          <a:lstStyle/>
+          <a:p>
+            <a:pPr algn="ctr">
+              <a:spcAft>
+                <a:spcPts val="600"/>
+              </a:spcAft>
+            </a:pPr>
+            <a:r>
+              <a:rPr sz="1600" b="0" i="0">
+                <a:solidFill>
+                  <a:srgbClr val="333333"/>
+                </a:solidFill>
+                <a:latin typeface="Calibri"/>
+              </a:rPr>
+              <a:t>Queda armado el guion cronometrado de sustentacion de VetCare y consolidado el documento final de diseño en una sola pieza coherente.</a:t>
+            </a:r>
+          </a:p>
+          <a:p>
+            <a:pPr algn="ctr">
+              <a:spcAft>
+                <a:spcPts val="600"/>
+              </a:spcAft>
+            </a:pPr>
+            <a:r>
+              <a:rPr sz="1600" b="0" i="0">
+                <a:solidFill>
+                  <a:srgbClr val="333333"/>
+                </a:solidFill>
+                <a:latin typeface="Calibri"/>
+              </a:rPr>
+              <a:t>Entregable: Un documento en Google Docs con el guion minuto a minuto repartido en bloques con tiempos y evidencia (con responsable nominal solo si el docente autorizo equipo), la tabla de tres decisiones de diseño defendidas y el banco de diez preguntas con su respuesta, mas el indice del documento final consolidado, subido a la plataforma del curso.</a:t>
+            </a:r>
+          </a:p>
+          <a:p>
+            <a:pPr algn="ctr">
+              <a:spcAft>
+                <a:spcPts val="600"/>
+              </a:spcAft>
+            </a:pPr>
+            <a:r>
+              <a:rPr sz="1600" b="0" i="0">
+                <a:solidFill>
+                  <a:srgbClr val="333333"/>
+                </a:solidFill>
+                <a:latin typeface="Calibri"/>
+              </a:rPr>
+              <a:t>Siguiente clase: continuamos el hilo del PI</a:t>
+            </a:r>
+          </a:p>
+        </p:txBody>
+      </p:sp>
+      <p:sp>
+        <p:nvSpPr>
+          <p:cNvPr id="6" name="TextBox 5"/>
+          <p:cNvSpPr txBox="1"/>
+          <p:nvPr/>
+        </p:nvSpPr>
+        <p:spPr>
+          <a:xfrm>
+            <a:off x="457200" y="4754880"/>
+            <a:ext cx="11277295" cy="640080"/>
+          </a:xfrm>
+          <a:prstGeom prst="rect">
+            <a:avLst/>
+          </a:prstGeom>
+          <a:noFill/>
+        </p:spPr>
+        <p:txBody>
+          <a:bodyPr wrap="square">
+            <a:spAutoFit/>
+          </a:bodyPr>
+          <a:lstStyle/>
+          <a:p>
+            <a:pPr algn="ctr"/>
+            <a:r>
+              <a:rPr sz="2000" b="1" i="0">
+                <a:solidFill>
+                  <a:srgbClr val="269CCB"/>
+                </a:solidFill>
+                <a:latin typeface="Calibri"/>
+              </a:rPr>
+              <a:t>Teoria al servicio del proyecto</a:t>
+            </a:r>
+          </a:p>
+        </p:txBody>
+      </p:sp>
+    </p:spTree>
+  </p:cSld>
+  <p:clrMapOvr>
+    <a:masterClrMapping/>
+  </p:clrMapOvr>
+</p:sld>
+</file>
+
 <file path=ppt/slides/slide3.xml><?xml version="1.0" encoding="utf-8"?>
 <p:sld xmlns:a="http://schemas.openxmlformats.org/drawingml/2006/main" xmlns:p="http://schemas.openxmlformats.org/presentationml/2006/main" xmlns:r="http://schemas.openxmlformats.org/officeDocument/2006/relationships">
   <p:cSld>
@@ -7669,7 +10647,7 @@
                 </a:solidFill>
                 <a:latin typeface="Calibri"/>
               </a:rPr>
-              <a:t>Teoria Core</a:t>
+              <a:t>Sustentar un paquete de diseño no es leer diapositivas ni narrar lo que...</a:t>
             </a:r>
           </a:p>
         </p:txBody>
@@ -7708,7 +10686,7 @@
                 </a:solidFill>
                 <a:latin typeface="Calibri"/>
               </a:rPr>
-              <a:t>–   Sustentar un paquete de diseño no es leer diapositivas ni narrar lo que el equipo hizo cada semana: es demostrar…</a:t>
+              <a:t>–   Sustentar un paquete de diseño no es leer diapositivas ni narrar lo que el equipo hizo cada semana: es demostrar que las decisiones tomadas son defendibles.</a:t>
             </a:r>
           </a:p>
           <a:p>
@@ -7724,7 +10702,7 @@
                 </a:solidFill>
                 <a:latin typeface="Calibri"/>
               </a:rPr>
-              <a:t>–   El orden de la sustentacion no es libre, es un embudo y tiene una razon logica</a:t>
+              <a:t>–   El jurado, sea el docente o un cliente simulado de la clinica Huellitas, no esta evaluando cuanto trabajaron sino tres cosas concretas: si el diseño resuelve el problema declarado, si las piezas son coherentes entre si y si el equipo entiende lo que entrego.</a:t>
             </a:r>
           </a:p>
           <a:p>
@@ -7740,7 +10718,7 @@
                 </a:solidFill>
                 <a:latin typeface="Calibri"/>
               </a:rPr>
-              <a:t>–   Defender una decision de diseño tiene una estructura fija que conviene memorizar: decision, alternativas…</a:t>
+              <a:t>–   Por eso una sustentacion es un argumento con evidencia, no un recuento cronologico.</a:t>
             </a:r>
           </a:p>
           <a:p>
@@ -7756,7 +10734,7 @@
                 </a:solidFill>
                 <a:latin typeface="Calibri"/>
               </a:rPr>
-              <a:t>–   Las preguntas del jurado son bastante predecibles y por eso se preparan</a:t>
+              <a:t>–   La diferencia se nota en la primera frase: quien dice hicimos casos de uso, luego clases, luego pantallas, esta narrando; quien dice Huellitas pierde fichas y tarda ocho minutos en encontrar un historial</a:t>
             </a:r>
           </a:p>
           <a:p>
@@ -7772,7 +10750,39 @@
                 </a:solidFill>
                 <a:latin typeface="Calibri"/>
               </a:rPr>
-              <a:t>–   El reparto del guion en bloques con tiempos es criterio de evaluacion, no un detalle logistico</a:t>
+              <a:t>–   Y este paquete de diseño ataca esos tres problemas asi, esta sustentando.</a:t>
+            </a:r>
+          </a:p>
+          <a:p>
+            <a:pPr>
+              <a:spcAft>
+                <a:spcPts val="800"/>
+              </a:spcAft>
+            </a:pPr>
+            <a:r>
+              <a:rPr sz="2000" b="0" i="0">
+                <a:solidFill>
+                  <a:srgbClr val="333333"/>
+                </a:solidFill>
+                <a:latin typeface="Calibri"/>
+              </a:rPr>
+              <a:t>–   En VetCare la evidencia esta toda disponible: la tabla de RF y RNF, los diagramas UML, el diccionario de datos y el prototipo navegable.</a:t>
+            </a:r>
+          </a:p>
+          <a:p>
+            <a:pPr>
+              <a:spcAft>
+                <a:spcPts val="800"/>
+              </a:spcAft>
+            </a:pPr>
+            <a:r>
+              <a:rPr sz="2000" b="0" i="0">
+                <a:solidFill>
+                  <a:srgbClr val="333333"/>
+                </a:solidFill>
+                <a:latin typeface="Calibri"/>
+              </a:rPr>
+              <a:t>–   El trabajo de hoy es ordenar esa evidencia para que cuente una sola historia.</a:t>
             </a:r>
           </a:p>
         </p:txBody>
@@ -7953,141 +10963,21 @@
                 </a:solidFill>
                 <a:latin typeface="Calibri"/>
               </a:rPr>
-              <a:t>Guion de sustentacion VetCare: doce minutos cronometrados y quien dice que</a:t>
-            </a:r>
-          </a:p>
-        </p:txBody>
-      </p:sp>
-      <p:sp>
-        <p:nvSpPr>
-          <p:cNvPr id="5" name="Rounded Rectangle 4"/>
-          <p:cNvSpPr/>
-          <p:nvPr/>
-        </p:nvSpPr>
-        <p:spPr>
-          <a:xfrm>
-            <a:off x="457200" y="1261872"/>
-            <a:ext cx="11277295" cy="4773168"/>
-          </a:xfrm>
-          <a:prstGeom prst="roundRect">
-            <a:avLst>
-              <a:gd name="adj" fmla="val 12000"/>
-            </a:avLst>
-          </a:prstGeom>
-          <a:solidFill>
-            <a:srgbClr val="1E2A38"/>
-          </a:solidFill>
-          <a:ln>
-            <a:noFill/>
-          </a:ln>
-        </p:spPr>
-        <p:style>
-          <a:lnRef idx="1">
-            <a:schemeClr val="accent1"/>
-          </a:lnRef>
-          <a:fillRef idx="3">
-            <a:schemeClr val="accent1"/>
-          </a:fillRef>
-          <a:effectRef idx="2">
-            <a:schemeClr val="accent1"/>
-          </a:effectRef>
-          <a:fontRef idx="minor">
-            <a:schemeClr val="lt1"/>
-          </a:fontRef>
-        </p:style>
-        <p:txBody>
-          <a:bodyPr rtlCol="0" anchor="ctr"/>
-          <a:lstStyle/>
-          <a:p>
-            <a:pPr algn="ctr"/>
-          </a:p>
-        </p:txBody>
-      </p:sp>
-      <p:sp>
-        <p:nvSpPr>
-          <p:cNvPr id="6" name="Rectangle 5"/>
-          <p:cNvSpPr/>
-          <p:nvPr/>
-        </p:nvSpPr>
-        <p:spPr>
-          <a:xfrm>
-            <a:off x="457200" y="1261872"/>
-            <a:ext cx="11277295" cy="320040"/>
-          </a:xfrm>
-          <a:prstGeom prst="rect">
-            <a:avLst/>
-          </a:prstGeom>
-          <a:solidFill>
-            <a:srgbClr val="095292"/>
-          </a:solidFill>
-          <a:ln>
-            <a:noFill/>
-          </a:ln>
-        </p:spPr>
-        <p:style>
-          <a:lnRef idx="1">
-            <a:schemeClr val="accent1"/>
-          </a:lnRef>
-          <a:fillRef idx="3">
-            <a:schemeClr val="accent1"/>
-          </a:fillRef>
-          <a:effectRef idx="2">
-            <a:schemeClr val="accent1"/>
-          </a:effectRef>
-          <a:fontRef idx="minor">
-            <a:schemeClr val="lt1"/>
-          </a:fontRef>
-        </p:style>
-        <p:txBody>
-          <a:bodyPr rtlCol="0" anchor="ctr"/>
-          <a:lstStyle/>
-          <a:p>
-            <a:pPr algn="ctr"/>
-          </a:p>
-        </p:txBody>
-      </p:sp>
-      <p:sp>
-        <p:nvSpPr>
-          <p:cNvPr id="7" name="TextBox 6"/>
+              <a:t>El orden de la sustentacion no es libre, es un embudo y tiene una razon...</a:t>
+            </a:r>
+          </a:p>
+        </p:txBody>
+      </p:sp>
+      <p:sp>
+        <p:nvSpPr>
+          <p:cNvPr id="5" name="TextBox 4"/>
           <p:cNvSpPr txBox="1"/>
           <p:nvPr/>
         </p:nvSpPr>
         <p:spPr>
           <a:xfrm>
-            <a:off x="685800" y="1307592"/>
-            <a:ext cx="10820095" cy="256032"/>
-          </a:xfrm>
-          <a:prstGeom prst="rect">
-            <a:avLst/>
-          </a:prstGeom>
-          <a:noFill/>
-        </p:spPr>
-        <p:txBody>
-          <a:bodyPr wrap="square" anchor="ctr"/>
-          <a:lstStyle/>
-          <a:p>
-            <a:r>
-              <a:rPr sz="1000" b="1" i="0">
-                <a:solidFill>
-                  <a:srgbClr val="269CCB"/>
-                </a:solidFill>
-                <a:latin typeface="Calibri"/>
-              </a:rPr>
-              <a:t>● ● ●</a:t>
-            </a:r>
-          </a:p>
-        </p:txBody>
-      </p:sp>
-      <p:sp>
-        <p:nvSpPr>
-          <p:cNvPr id="8" name="TextBox 7"/>
-          <p:cNvSpPr txBox="1"/>
-          <p:nvPr/>
-        </p:nvSpPr>
-        <p:spPr>
-          <a:xfrm>
-            <a:off x="777240" y="1719072"/>
-            <a:ext cx="10637215" cy="4133087"/>
+            <a:off x="457200" y="1170432"/>
+            <a:ext cx="11277295" cy="5230368"/>
           </a:xfrm>
           <a:prstGeom prst="rect">
             <a:avLst/>
@@ -8102,235 +10992,136 @@
           <a:p>
             <a:pPr>
               <a:spcAft>
-                <a:spcPts val="400"/>
+                <a:spcPts val="800"/>
               </a:spcAft>
             </a:pPr>
             <a:r>
-              <a:rPr sz="1400" b="0" i="0">
-                <a:solidFill>
-                  <a:srgbClr val="FFFFFF"/>
-                </a:solidFill>
-                <a:latin typeface="Calibri"/>
-              </a:rPr>
-              <a:t>00:00-01:30 | PROBLEMA    | Huellitas: fichas extraviadas, 8 min por historial, cero metricas</a:t>
+              <a:rPr sz="2000" b="0" i="0">
+                <a:solidFill>
+                  <a:srgbClr val="333333"/>
+                </a:solidFill>
+                <a:latin typeface="Calibri"/>
+              </a:rPr>
+              <a:t>–   El orden de la sustentacion no es libre, es un embudo y tiene una razon logica.</a:t>
             </a:r>
           </a:p>
           <a:p>
             <a:pPr>
               <a:spcAft>
-                <a:spcPts val="400"/>
+                <a:spcPts val="800"/>
               </a:spcAft>
             </a:pPr>
             <a:r>
-              <a:rPr sz="1400" b="0" i="0">
-                <a:solidFill>
-                  <a:srgbClr val="FFFFFF"/>
-                </a:solidFill>
-                <a:latin typeface="Calibri"/>
-              </a:rPr>
-              <a:t>01:30-03:00 | ALCANCE     | Lo que si entra y lo que quedo por fuera, con la razon</a:t>
+              <a:rPr sz="2000" b="0" i="0">
+                <a:solidFill>
+                  <a:srgbClr val="333333"/>
+                </a:solidFill>
+                <a:latin typeface="Calibri"/>
+              </a:rPr>
+              <a:t>–   Primero el problema, porque nada de lo que sigue tiene sentido si el jurado no sabe que duele en Huellitas.</a:t>
             </a:r>
           </a:p>
           <a:p>
             <a:pPr>
               <a:spcAft>
-                <a:spcPts val="400"/>
+                <a:spcPts val="800"/>
               </a:spcAft>
             </a:pPr>
             <a:r>
-              <a:rPr sz="1400" b="0" i="0">
-                <a:solidFill>
-                  <a:srgbClr val="FFFFFF"/>
-                </a:solidFill>
-                <a:latin typeface="Calibri"/>
-              </a:rPr>
-              <a:t>03:00-05:00 | REQUISITOS  | Solo los 3 RF criticos y 2 RNF medibles; el resto en el documento</a:t>
+              <a:rPr sz="2000" b="0" i="0">
+                <a:solidFill>
+                  <a:srgbClr val="333333"/>
+                </a:solidFill>
+                <a:latin typeface="Calibri"/>
+              </a:rPr>
+              <a:t>–   Segundo los requisitos, porque son la promesa concreta: que va a hacer el sistema y con que restricciones.</a:t>
             </a:r>
           </a:p>
           <a:p>
             <a:pPr>
               <a:spcAft>
-                <a:spcPts val="400"/>
+                <a:spcPts val="800"/>
               </a:spcAft>
             </a:pPr>
             <a:r>
-              <a:rPr sz="1400" b="0" i="0">
-                <a:solidFill>
-                  <a:srgbClr val="FFFFFF"/>
-                </a:solidFill>
-                <a:latin typeface="Calibri"/>
-              </a:rPr>
-              <a:t>05:00-07:00 | MODELO      | Casos de uso y clases: Mascota, Dueño, Historia_Clinica, Cita</a:t>
+              <a:rPr sz="2000" b="0" i="0">
+                <a:solidFill>
+                  <a:srgbClr val="333333"/>
+                </a:solidFill>
+                <a:latin typeface="Calibri"/>
+              </a:rPr>
+              <a:t>–   Tercero el modelo, casos de uso y clases, porque muestra como se organiza la solucion.</a:t>
             </a:r>
           </a:p>
           <a:p>
             <a:pPr>
               <a:spcAft>
-                <a:spcPts val="400"/>
+                <a:spcPts val="800"/>
               </a:spcAft>
             </a:pPr>
             <a:r>
-              <a:rPr sz="1400" b="0" i="0">
-                <a:solidFill>
-                  <a:srgbClr val="FFFFFF"/>
-                </a:solidFill>
-                <a:latin typeface="Calibri"/>
-              </a:rPr>
-              <a:t>07:00-09:00 | INTERFAZ    | Prototipo en vivo: registrar mascota -&gt; confirmacion -&gt; buscar</a:t>
+              <a:rPr sz="2000" b="0" i="0">
+                <a:solidFill>
+                  <a:srgbClr val="333333"/>
+                </a:solidFill>
+                <a:latin typeface="Calibri"/>
+              </a:rPr>
+              <a:t>–   Cuarto la interfaz, porque es donde el jurado por fin ve y toca.</a:t>
             </a:r>
           </a:p>
           <a:p>
             <a:pPr>
               <a:spcAft>
-                <a:spcPts val="400"/>
+                <a:spcPts val="800"/>
               </a:spcAft>
             </a:pPr>
             <a:r>
-              <a:rPr sz="1400" b="0" i="0">
-                <a:solidFill>
-                  <a:srgbClr val="FFFFFF"/>
-                </a:solidFill>
-                <a:latin typeface="Calibri"/>
-              </a:rPr>
-              <a:t>09:00-11:00 | DECISIONES  | 3 decisiones con alternativa descartada, criterio y consecuencia</a:t>
+              <a:rPr sz="2000" b="0" i="0">
+                <a:solidFill>
+                  <a:srgbClr val="333333"/>
+                </a:solidFill>
+                <a:latin typeface="Calibri"/>
+              </a:rPr>
+              <a:t>–   Y quinto las decisiones, que es la parte que separa a un equipo que entendio de uno que copio plantillas.</a:t>
             </a:r>
           </a:p>
           <a:p>
             <a:pPr>
               <a:spcAft>
-                <a:spcPts val="400"/>
+                <a:spcPts val="800"/>
               </a:spcAft>
             </a:pPr>
             <a:r>
-              <a:rPr sz="1400" b="0" i="0">
-                <a:solidFill>
-                  <a:srgbClr val="FFFFFF"/>
-                </a:solidFill>
-                <a:latin typeface="Calibri"/>
-              </a:rPr>
-              <a:t>11:00-11:30 | RIESGOS     | Que queda abierto y que recibe Programacion II</a:t>
+              <a:rPr sz="2000" b="0" i="0">
+                <a:solidFill>
+                  <a:srgbClr val="333333"/>
+                </a:solidFill>
+                <a:latin typeface="Calibri"/>
+              </a:rPr>
+              <a:t>–   Invertir ese orden es el error mas comun: los equipos empiezan mostrando pantallas bonitas, el jurado pregunta que problema resuelve eso y ahi la sustentacion se desarma.</a:t>
             </a:r>
           </a:p>
           <a:p>
             <a:pPr>
               <a:spcAft>
-                <a:spcPts val="400"/>
+                <a:spcPts val="800"/>
               </a:spcAft>
             </a:pPr>
             <a:r>
-              <a:rPr sz="1400" b="0" i="0">
-                <a:solidFill>
-                  <a:srgbClr val="FFFFFF"/>
-                </a:solidFill>
-                <a:latin typeface="Calibri"/>
-              </a:rPr>
-              <a:t>11:30-12:00 | CIERRE      | Una frase de valor para la clinica, no un resumen</a:t>
-            </a:r>
-          </a:p>
-          <a:p>
-            <a:pPr>
-              <a:spcAft>
-                <a:spcPts val="400"/>
-              </a:spcAft>
-            </a:pPr>
-            <a:r>
-              <a:rPr sz="1400" b="0" i="0">
-                <a:solidFill>
-                  <a:srgbClr val="FFFFFF"/>
-                </a:solidFill>
-                <a:latin typeface="Calibri"/>
-              </a:rPr>
-              <a:t>--- Reparto: todos hablan minimo 2 minutos y todos responden minimo 1 pregunta</a:t>
-            </a:r>
-          </a:p>
-          <a:p>
-            <a:pPr>
-              <a:spcAft>
-                <a:spcPts val="400"/>
-              </a:spcAft>
-            </a:pPr>
-            <a:r>
-              <a:rPr sz="1400" b="0" i="0">
-                <a:solidFill>
-                  <a:srgbClr val="FFFFFF"/>
-                </a:solidFill>
-                <a:latin typeface="Calibri"/>
-              </a:rPr>
-              <a:t>--- Regla: nadie lee la diapositiva; la diapositiva es el plano, la voz es el argumento</a:t>
-            </a:r>
-          </a:p>
-          <a:p>
-            <a:pPr>
-              <a:spcAft>
-                <a:spcPts val="400"/>
-              </a:spcAft>
-            </a:pPr>
-            <a:r>
-              <a:rPr sz="1400" b="0" i="0">
-                <a:solidFill>
-                  <a:srgbClr val="FFFFFF"/>
-                </a:solidFill>
-                <a:latin typeface="Calibri"/>
-              </a:rPr>
-              <a:t>--- Cada pantalla proyectada debe poder señalar el RF que la origina</a:t>
-            </a:r>
-          </a:p>
-          <a:p>
-            <a:pPr>
-              <a:spcAft>
-                <a:spcPts val="400"/>
-              </a:spcAft>
-            </a:pPr>
-            <a:r>
-              <a:rPr sz="1400" b="0" i="0">
-                <a:solidFill>
-                  <a:srgbClr val="FFFFFF"/>
-                </a:solidFill>
-                <a:latin typeface="Calibri"/>
-              </a:rPr>
-              <a:t>--- Plan B: capturas del prototipo, PDF descargado y diagramas exportados a imagen</a:t>
-            </a:r>
-          </a:p>
-        </p:txBody>
-      </p:sp>
-      <p:sp>
-        <p:nvSpPr>
-          <p:cNvPr id="9" name="TextBox 8"/>
-          <p:cNvSpPr txBox="1"/>
-          <p:nvPr/>
-        </p:nvSpPr>
-        <p:spPr>
-          <a:xfrm>
-            <a:off x="457200" y="6080760"/>
-            <a:ext cx="11277295" cy="320040"/>
-          </a:xfrm>
-          <a:prstGeom prst="rect">
-            <a:avLst/>
-          </a:prstGeom>
-          <a:noFill/>
-        </p:spPr>
-        <p:txBody>
-          <a:bodyPr wrap="square">
-            <a:spAutoFit/>
-          </a:bodyPr>
-          <a:lstStyle/>
-          <a:p>
-            <a:pPr algn="ctr"/>
-            <a:r>
-              <a:rPr sz="1200" b="0" i="1">
-                <a:solidFill>
-                  <a:srgbClr val="666666"/>
-                </a:solidFill>
-                <a:latin typeface="Calibri"/>
-              </a:rPr>
-              <a:t>Un paquete de diseño no se narra en orden cronologico: se defiende en orden de embudo, del dolor a la decision.</a:t>
-            </a:r>
-          </a:p>
-        </p:txBody>
-      </p:sp>
-      <p:sp>
-        <p:nvSpPr>
-          <p:cNvPr id="10" name="TextBox 9"/>
+              <a:rPr sz="2000" b="0" i="0">
+                <a:solidFill>
+                  <a:srgbClr val="333333"/>
+                </a:solidFill>
+                <a:latin typeface="Calibri"/>
+              </a:rPr>
+              <a:t>–   Para VetCare doce minutos alcanzan de sobra si se respetan las proporciones: uno y medio para el problema, tres para requisitos, dos para modelo, dos para interfaz en vivo, dos para decisiones y el resto para riesgos y cierre.</a:t>
+            </a:r>
+          </a:p>
+        </p:txBody>
+      </p:sp>
+      <p:sp>
+        <p:nvSpPr>
+          <p:cNvPr id="6" name="TextBox 5"/>
           <p:cNvSpPr txBox="1"/>
           <p:nvPr/>
         </p:nvSpPr>
@@ -8504,7 +11295,7 @@
                 </a:solidFill>
                 <a:latin typeface="Calibri"/>
               </a:rPr>
-              <a:t>Demo del dia</a:t>
+              <a:t>Defender una decision de diseño tiene una estructura fija que conviene... (1/2)</a:t>
             </a:r>
           </a:p>
         </p:txBody>
@@ -8543,25 +11334,7 @@
                 </a:solidFill>
                 <a:latin typeface="Calibri"/>
               </a:rPr>
-              <a:t>–   </a:t>
-            </a:r>
-            <a:r>
-              <a:rPr sz="2000" b="1" i="0">
-                <a:solidFill>
-                  <a:srgbClr val="333333"/>
-                </a:solidFill>
-                <a:latin typeface="Calibri"/>
-              </a:rPr>
-              <a:t>Herramienta:</a:t>
-            </a:r>
-            <a:r>
-              <a:rPr sz="2000" b="0" i="0">
-                <a:solidFill>
-                  <a:srgbClr val="333333"/>
-                </a:solidFill>
-                <a:latin typeface="Calibri"/>
-              </a:rPr>
-              <a:t> Google Docs · draw.io · Figma o Penpot</a:t>
+              <a:t>–   Defender una decision de diseño tiene una estructura fija que conviene memorizar: decision, alternativas consideradas, criterio de eleccion y consecuencia asumida.</a:t>
             </a:r>
           </a:p>
           <a:p>
@@ -8577,25 +11350,7 @@
                 </a:solidFill>
                 <a:latin typeface="Calibri"/>
               </a:rPr>
-              <a:t>–   </a:t>
-            </a:r>
-            <a:r>
-              <a:rPr sz="2000" b="1" i="0">
-                <a:solidFill>
-                  <a:srgbClr val="333333"/>
-                </a:solidFill>
-                <a:latin typeface="Calibri"/>
-              </a:rPr>
-              <a:t>Demo:</a:t>
-            </a:r>
-            <a:r>
-              <a:rPr sz="2000" b="0" i="0">
-                <a:solidFill>
-                  <a:srgbClr val="333333"/>
-                </a:solidFill>
-                <a:latin typeface="Calibri"/>
-              </a:rPr>
-              <a:t> El docente proyecta una sustentacion mal hecha y una bien hecha del mismo paquete VetCare, y luego arma en vivo la tabla de decisiones para justificar por que Historia_Clinica es una clase aparte de Mascota.</a:t>
+              <a:t>–   No basta decir que se hizo, hay que decir contra que se comparo y por que gano.</a:t>
             </a:r>
           </a:p>
           <a:p>
@@ -8611,7 +11366,39 @@
                 </a:solidFill>
                 <a:latin typeface="Calibri"/>
               </a:rPr>
-              <a:t>–   Mismo dominio VetCare — no otro ejemplo. Aqui se diseña, no se programa.</a:t>
+              <a:t>–   Ejemplo concreto de VetCare: decidimos separar Historia_Clinica de Mascota como clases distintas; la alternativa era guardar diagnosticos y tratamientos como campos dentro de Mascota</a:t>
+            </a:r>
+          </a:p>
+          <a:p>
+            <a:pPr>
+              <a:spcAft>
+                <a:spcPts val="800"/>
+              </a:spcAft>
+            </a:pPr>
+            <a:r>
+              <a:rPr sz="2000" b="0" i="0">
+                <a:solidFill>
+                  <a:srgbClr val="333333"/>
+                </a:solidFill>
+                <a:latin typeface="Calibri"/>
+              </a:rPr>
+              <a:t>–   El criterio fue que una mascota tiene muchas consultas a lo largo de su vida y una relacion uno a muchos no cabe en campos fijos</a:t>
+            </a:r>
+          </a:p>
+          <a:p>
+            <a:pPr>
+              <a:spcAft>
+                <a:spcPts val="800"/>
+              </a:spcAft>
+            </a:pPr>
+            <a:r>
+              <a:rPr sz="2000" b="0" i="0">
+                <a:solidFill>
+                  <a:srgbClr val="333333"/>
+                </a:solidFill>
+                <a:latin typeface="Calibri"/>
+              </a:rPr>
+              <a:t>–   La consecuencia es que hay una entidad mas y una consulta adicional al mostrar la ficha, lo cual se acepta porque el RNF de busqueda menor a tres segundos se sostiene con un indice.</a:t>
             </a:r>
           </a:p>
         </p:txBody>
@@ -8686,7 +11473,7 @@
         <p:spPr>
           <a:xfrm>
             <a:off x="0" y="0"/>
-            <a:ext cx="12191695" cy="1170432"/>
+            <a:ext cx="12191695" cy="960120"/>
           </a:xfrm>
           <a:prstGeom prst="rect">
             <a:avLst/>
@@ -8728,7 +11515,7 @@
         </p:nvSpPr>
         <p:spPr>
           <a:xfrm>
-            <a:off x="0" y="1170432"/>
+            <a:off x="0" y="960120"/>
             <a:ext cx="12191695" cy="41148"/>
           </a:xfrm>
           <a:prstGeom prst="rect">
@@ -8772,7 +11559,7 @@
         <p:spPr>
           <a:xfrm>
             <a:off x="457200" y="164592"/>
-            <a:ext cx="11277295" cy="384048"/>
+            <a:ext cx="11277295" cy="502920"/>
           </a:xfrm>
           <a:prstGeom prst="rect">
             <a:avLst/>
@@ -8792,7 +11579,7 @@
                 </a:solidFill>
                 <a:latin typeface="Calibri"/>
               </a:rPr>
-              <a:t>Herramientas de hoy</a:t>
+              <a:t>Defender una decision de diseño tiene una estructura fija que conviene... (2/2)</a:t>
             </a:r>
           </a:p>
         </p:txBody>
@@ -8805,8 +11592,8 @@
         </p:nvSpPr>
         <p:spPr>
           <a:xfrm>
-            <a:off x="457200" y="566928"/>
-            <a:ext cx="11277295" cy="411480"/>
+            <a:off x="457200" y="1170432"/>
+            <a:ext cx="11277295" cy="5230368"/>
           </a:xfrm>
           <a:prstGeom prst="rect">
             <a:avLst/>
@@ -8819,1149 +11606,58 @@
           </a:bodyPr>
           <a:lstStyle/>
           <a:p>
-            <a:r>
-              <a:rPr sz="1400" b="0" i="0">
-                <a:solidFill>
-                  <a:srgbClr val="B8D8EE"/>
-                </a:solidFill>
-                <a:latin typeface="Calibri"/>
-              </a:rPr>
-              <a:t>Gratis · funcionan en el navegador</a:t>
-            </a:r>
-          </a:p>
-        </p:txBody>
-      </p:sp>
-      <p:sp>
-        <p:nvSpPr>
-          <p:cNvPr id="6" name="Rounded Rectangle 5"/>
-          <p:cNvSpPr/>
-          <p:nvPr/>
-        </p:nvSpPr>
-        <p:spPr>
-          <a:xfrm>
-            <a:off x="457200" y="1591056"/>
-            <a:ext cx="3624986" cy="2299716"/>
-          </a:xfrm>
-          <a:prstGeom prst="roundRect">
-            <a:avLst>
-              <a:gd name="adj" fmla="val 12000"/>
-            </a:avLst>
-          </a:prstGeom>
-          <a:solidFill>
-            <a:srgbClr val="F2F2F2"/>
-          </a:solidFill>
-          <a:ln>
-            <a:noFill/>
-          </a:ln>
-        </p:spPr>
-        <p:style>
-          <a:lnRef idx="1">
-            <a:schemeClr val="accent1"/>
-          </a:lnRef>
-          <a:fillRef idx="3">
-            <a:schemeClr val="accent1"/>
-          </a:fillRef>
-          <a:effectRef idx="2">
-            <a:schemeClr val="accent1"/>
-          </a:effectRef>
-          <a:fontRef idx="minor">
-            <a:schemeClr val="lt1"/>
-          </a:fontRef>
-        </p:style>
-        <p:txBody>
-          <a:bodyPr rtlCol="0" anchor="ctr"/>
-          <a:lstStyle/>
-          <a:p>
-            <a:pPr algn="ctr"/>
-          </a:p>
-        </p:txBody>
-      </p:sp>
-      <p:sp>
-        <p:nvSpPr>
-          <p:cNvPr id="7" name="Rectangle 6"/>
-          <p:cNvSpPr/>
-          <p:nvPr/>
-        </p:nvSpPr>
-        <p:spPr>
-          <a:xfrm>
-            <a:off x="457200" y="1591056"/>
-            <a:ext cx="3624986" cy="64008"/>
-          </a:xfrm>
-          <a:prstGeom prst="rect">
-            <a:avLst/>
-          </a:prstGeom>
-          <a:solidFill>
-            <a:srgbClr val="095292"/>
-          </a:solidFill>
-          <a:ln>
-            <a:noFill/>
-          </a:ln>
-        </p:spPr>
-        <p:style>
-          <a:lnRef idx="1">
-            <a:schemeClr val="accent1"/>
-          </a:lnRef>
-          <a:fillRef idx="3">
-            <a:schemeClr val="accent1"/>
-          </a:fillRef>
-          <a:effectRef idx="2">
-            <a:schemeClr val="accent1"/>
-          </a:effectRef>
-          <a:fontRef idx="minor">
-            <a:schemeClr val="lt1"/>
-          </a:fontRef>
-        </p:style>
-        <p:txBody>
-          <a:bodyPr rtlCol="0" anchor="ctr"/>
-          <a:lstStyle/>
-          <a:p>
-            <a:pPr algn="ctr"/>
-          </a:p>
-        </p:txBody>
-      </p:sp>
-      <p:sp>
-        <p:nvSpPr>
-          <p:cNvPr id="8" name="Rectangle 7"/>
-          <p:cNvSpPr/>
-          <p:nvPr/>
-        </p:nvSpPr>
-        <p:spPr>
-          <a:xfrm>
-            <a:off x="457200" y="1655064"/>
-            <a:ext cx="3624986" cy="27432"/>
-          </a:xfrm>
-          <a:prstGeom prst="rect">
-            <a:avLst/>
-          </a:prstGeom>
-          <a:solidFill>
-            <a:srgbClr val="FFD000"/>
-          </a:solidFill>
-          <a:ln>
-            <a:noFill/>
-          </a:ln>
-        </p:spPr>
-        <p:style>
-          <a:lnRef idx="1">
-            <a:schemeClr val="accent1"/>
-          </a:lnRef>
-          <a:fillRef idx="3">
-            <a:schemeClr val="accent1"/>
-          </a:fillRef>
-          <a:effectRef idx="2">
-            <a:schemeClr val="accent1"/>
-          </a:effectRef>
-          <a:fontRef idx="minor">
-            <a:schemeClr val="lt1"/>
-          </a:fontRef>
-        </p:style>
-        <p:txBody>
-          <a:bodyPr rtlCol="0" anchor="ctr"/>
-          <a:lstStyle/>
-          <a:p>
-            <a:pPr algn="ctr"/>
-          </a:p>
-        </p:txBody>
-      </p:sp>
-      <p:pic>
-        <p:nvPicPr>
-          <p:cNvPr id="9" name="Picture 8" descr="drawio.png"/>
-          <p:cNvPicPr>
-            <a:picLocks noChangeAspect="1"/>
-          </p:cNvPicPr>
-          <p:nvPr/>
-        </p:nvPicPr>
-        <p:blipFill>
-          <a:blip r:embed="rId2"/>
-          <a:stretch>
-            <a:fillRect/>
-          </a:stretch>
-        </p:blipFill>
-        <p:spPr>
-          <a:xfrm>
-            <a:off x="1659331" y="1847087"/>
-            <a:ext cx="1220724" cy="1220724"/>
-          </a:xfrm>
-          <a:prstGeom prst="rect">
-            <a:avLst/>
-          </a:prstGeom>
-        </p:spPr>
-      </p:pic>
-      <p:sp>
-        <p:nvSpPr>
-          <p:cNvPr id="10" name="TextBox 9"/>
-          <p:cNvSpPr txBox="1"/>
-          <p:nvPr/>
-        </p:nvSpPr>
-        <p:spPr>
-          <a:xfrm>
-            <a:off x="530352" y="3159251"/>
-            <a:ext cx="3478682" cy="621792"/>
-          </a:xfrm>
-          <a:prstGeom prst="rect">
-            <a:avLst/>
-          </a:prstGeom>
-          <a:noFill/>
-        </p:spPr>
-        <p:txBody>
-          <a:bodyPr wrap="square" anchor="t"/>
-          <a:lstStyle/>
-          <a:p>
-            <a:pPr algn="ctr"/>
-            <a:r>
-              <a:rPr sz="1300" b="1" i="0">
-                <a:solidFill>
-                  <a:srgbClr val="095292"/>
-                </a:solidFill>
-                <a:latin typeface="Calibri"/>
-              </a:rPr>
-              <a:t>Draw.Io</a:t>
-            </a:r>
-          </a:p>
-          <a:p>
-            <a:pPr algn="ctr">
-              <a:spcBef>
-                <a:spcPts val="200"/>
-              </a:spcBef>
+            <a:pPr>
+              <a:spcAft>
+                <a:spcPts val="800"/>
+              </a:spcAft>
             </a:pPr>
             <a:r>
-              <a:rPr sz="1000" b="0" i="0">
-                <a:solidFill>
-                  <a:srgbClr val="666666"/>
-                </a:solidFill>
-                <a:latin typeface="Calibri"/>
-              </a:rPr>
-              <a:t>Diagramas UML y de contexto</a:t>
-            </a:r>
-          </a:p>
-        </p:txBody>
-      </p:sp>
-      <p:sp>
-        <p:nvSpPr>
-          <p:cNvPr id="11" name="Rounded Rectangle 10"/>
-          <p:cNvSpPr/>
-          <p:nvPr/>
-        </p:nvSpPr>
-        <p:spPr>
-          <a:xfrm>
-            <a:off x="4283354" y="1591056"/>
-            <a:ext cx="3624986" cy="2299716"/>
-          </a:xfrm>
-          <a:prstGeom prst="roundRect">
-            <a:avLst>
-              <a:gd name="adj" fmla="val 12000"/>
-            </a:avLst>
-          </a:prstGeom>
-          <a:solidFill>
-            <a:srgbClr val="F2F2F2"/>
-          </a:solidFill>
-          <a:ln>
-            <a:noFill/>
-          </a:ln>
-        </p:spPr>
-        <p:style>
-          <a:lnRef idx="1">
-            <a:schemeClr val="accent1"/>
-          </a:lnRef>
-          <a:fillRef idx="3">
-            <a:schemeClr val="accent1"/>
-          </a:fillRef>
-          <a:effectRef idx="2">
-            <a:schemeClr val="accent1"/>
-          </a:effectRef>
-          <a:fontRef idx="minor">
-            <a:schemeClr val="lt1"/>
-          </a:fontRef>
-        </p:style>
-        <p:txBody>
-          <a:bodyPr rtlCol="0" anchor="ctr"/>
-          <a:lstStyle/>
-          <a:p>
-            <a:pPr algn="ctr"/>
-          </a:p>
-        </p:txBody>
-      </p:sp>
-      <p:sp>
-        <p:nvSpPr>
-          <p:cNvPr id="12" name="Rectangle 11"/>
-          <p:cNvSpPr/>
-          <p:nvPr/>
-        </p:nvSpPr>
-        <p:spPr>
-          <a:xfrm>
-            <a:off x="4283354" y="1591056"/>
-            <a:ext cx="3624986" cy="64008"/>
-          </a:xfrm>
-          <a:prstGeom prst="rect">
-            <a:avLst/>
-          </a:prstGeom>
-          <a:solidFill>
-            <a:srgbClr val="095292"/>
-          </a:solidFill>
-          <a:ln>
-            <a:noFill/>
-          </a:ln>
-        </p:spPr>
-        <p:style>
-          <a:lnRef idx="1">
-            <a:schemeClr val="accent1"/>
-          </a:lnRef>
-          <a:fillRef idx="3">
-            <a:schemeClr val="accent1"/>
-          </a:fillRef>
-          <a:effectRef idx="2">
-            <a:schemeClr val="accent1"/>
-          </a:effectRef>
-          <a:fontRef idx="minor">
-            <a:schemeClr val="lt1"/>
-          </a:fontRef>
-        </p:style>
-        <p:txBody>
-          <a:bodyPr rtlCol="0" anchor="ctr"/>
-          <a:lstStyle/>
-          <a:p>
-            <a:pPr algn="ctr"/>
-          </a:p>
-        </p:txBody>
-      </p:sp>
-      <p:sp>
-        <p:nvSpPr>
-          <p:cNvPr id="13" name="Rectangle 12"/>
-          <p:cNvSpPr/>
-          <p:nvPr/>
-        </p:nvSpPr>
-        <p:spPr>
-          <a:xfrm>
-            <a:off x="4283354" y="1655064"/>
-            <a:ext cx="3624986" cy="27432"/>
-          </a:xfrm>
-          <a:prstGeom prst="rect">
-            <a:avLst/>
-          </a:prstGeom>
-          <a:solidFill>
-            <a:srgbClr val="FFD000"/>
-          </a:solidFill>
-          <a:ln>
-            <a:noFill/>
-          </a:ln>
-        </p:spPr>
-        <p:style>
-          <a:lnRef idx="1">
-            <a:schemeClr val="accent1"/>
-          </a:lnRef>
-          <a:fillRef idx="3">
-            <a:schemeClr val="accent1"/>
-          </a:fillRef>
-          <a:effectRef idx="2">
-            <a:schemeClr val="accent1"/>
-          </a:effectRef>
-          <a:fontRef idx="minor">
-            <a:schemeClr val="lt1"/>
-          </a:fontRef>
-        </p:style>
-        <p:txBody>
-          <a:bodyPr rtlCol="0" anchor="ctr"/>
-          <a:lstStyle/>
-          <a:p>
-            <a:pPr algn="ctr"/>
-          </a:p>
-        </p:txBody>
-      </p:sp>
-      <p:pic>
-        <p:nvPicPr>
-          <p:cNvPr id="14" name="Picture 13" descr="google_docs.png"/>
-          <p:cNvPicPr>
-            <a:picLocks noChangeAspect="1"/>
-          </p:cNvPicPr>
-          <p:nvPr/>
-        </p:nvPicPr>
-        <p:blipFill>
-          <a:blip r:embed="rId3"/>
-          <a:stretch>
-            <a:fillRect/>
-          </a:stretch>
-        </p:blipFill>
-        <p:spPr>
-          <a:xfrm>
-            <a:off x="5485485" y="1847087"/>
-            <a:ext cx="1220724" cy="1220724"/>
-          </a:xfrm>
-          <a:prstGeom prst="rect">
-            <a:avLst/>
-          </a:prstGeom>
-        </p:spPr>
-      </p:pic>
-      <p:sp>
-        <p:nvSpPr>
-          <p:cNvPr id="15" name="TextBox 14"/>
-          <p:cNvSpPr txBox="1"/>
-          <p:nvPr/>
-        </p:nvSpPr>
-        <p:spPr>
-          <a:xfrm>
-            <a:off x="4356506" y="3159251"/>
-            <a:ext cx="3478682" cy="621792"/>
-          </a:xfrm>
-          <a:prstGeom prst="rect">
-            <a:avLst/>
-          </a:prstGeom>
-          <a:noFill/>
-        </p:spPr>
-        <p:txBody>
-          <a:bodyPr wrap="square" anchor="t"/>
-          <a:lstStyle/>
-          <a:p>
-            <a:pPr algn="ctr"/>
-            <a:r>
-              <a:rPr sz="1300" b="1" i="0">
-                <a:solidFill>
-                  <a:srgbClr val="095292"/>
-                </a:solidFill>
-                <a:latin typeface="Calibri"/>
-              </a:rPr>
-              <a:t>google docs</a:t>
-            </a:r>
-          </a:p>
-          <a:p>
-            <a:pPr algn="ctr">
-              <a:spcBef>
-                <a:spcPts val="200"/>
-              </a:spcBef>
+              <a:rPr sz="2000" b="0" i="0">
+                <a:solidFill>
+                  <a:srgbClr val="333333"/>
+                </a:solidFill>
+                <a:latin typeface="Calibri"/>
+              </a:rPr>
+              <a:t>–   Otro ejemplo: decidimos que la fecha de nacimiento sea opcional; la alternativa era hacerla obligatoria</a:t>
+            </a:r>
+          </a:p>
+          <a:p>
+            <a:pPr>
+              <a:spcAft>
+                <a:spcPts val="800"/>
+              </a:spcAft>
             </a:pPr>
             <a:r>
-              <a:rPr sz="1000" b="0" i="0">
-                <a:solidFill>
-                  <a:srgbClr val="666666"/>
-                </a:solidFill>
-                <a:latin typeface="Calibri"/>
-              </a:rPr>
-              <a:t>Documentos del paquete de diseño</a:t>
-            </a:r>
-          </a:p>
-        </p:txBody>
-      </p:sp>
-      <p:sp>
-        <p:nvSpPr>
-          <p:cNvPr id="16" name="Rounded Rectangle 15"/>
-          <p:cNvSpPr/>
-          <p:nvPr/>
-        </p:nvSpPr>
-        <p:spPr>
-          <a:xfrm>
-            <a:off x="8109508" y="1591056"/>
-            <a:ext cx="3624986" cy="2299716"/>
-          </a:xfrm>
-          <a:prstGeom prst="roundRect">
-            <a:avLst>
-              <a:gd name="adj" fmla="val 12000"/>
-            </a:avLst>
-          </a:prstGeom>
-          <a:solidFill>
-            <a:srgbClr val="F2F2F2"/>
-          </a:solidFill>
-          <a:ln>
-            <a:noFill/>
-          </a:ln>
-        </p:spPr>
-        <p:style>
-          <a:lnRef idx="1">
-            <a:schemeClr val="accent1"/>
-          </a:lnRef>
-          <a:fillRef idx="3">
-            <a:schemeClr val="accent1"/>
-          </a:fillRef>
-          <a:effectRef idx="2">
-            <a:schemeClr val="accent1"/>
-          </a:effectRef>
-          <a:fontRef idx="minor">
-            <a:schemeClr val="lt1"/>
-          </a:fontRef>
-        </p:style>
-        <p:txBody>
-          <a:bodyPr rtlCol="0" anchor="ctr"/>
-          <a:lstStyle/>
-          <a:p>
-            <a:pPr algn="ctr"/>
-          </a:p>
-        </p:txBody>
-      </p:sp>
-      <p:sp>
-        <p:nvSpPr>
-          <p:cNvPr id="17" name="Rectangle 16"/>
-          <p:cNvSpPr/>
-          <p:nvPr/>
-        </p:nvSpPr>
-        <p:spPr>
-          <a:xfrm>
-            <a:off x="8109508" y="1591056"/>
-            <a:ext cx="3624986" cy="64008"/>
-          </a:xfrm>
-          <a:prstGeom prst="rect">
-            <a:avLst/>
-          </a:prstGeom>
-          <a:solidFill>
-            <a:srgbClr val="095292"/>
-          </a:solidFill>
-          <a:ln>
-            <a:noFill/>
-          </a:ln>
-        </p:spPr>
-        <p:style>
-          <a:lnRef idx="1">
-            <a:schemeClr val="accent1"/>
-          </a:lnRef>
-          <a:fillRef idx="3">
-            <a:schemeClr val="accent1"/>
-          </a:fillRef>
-          <a:effectRef idx="2">
-            <a:schemeClr val="accent1"/>
-          </a:effectRef>
-          <a:fontRef idx="minor">
-            <a:schemeClr val="lt1"/>
-          </a:fontRef>
-        </p:style>
-        <p:txBody>
-          <a:bodyPr rtlCol="0" anchor="ctr"/>
-          <a:lstStyle/>
-          <a:p>
-            <a:pPr algn="ctr"/>
-          </a:p>
-        </p:txBody>
-      </p:sp>
-      <p:sp>
-        <p:nvSpPr>
-          <p:cNvPr id="18" name="Rectangle 17"/>
-          <p:cNvSpPr/>
-          <p:nvPr/>
-        </p:nvSpPr>
-        <p:spPr>
-          <a:xfrm>
-            <a:off x="8109508" y="1655064"/>
-            <a:ext cx="3624986" cy="27432"/>
-          </a:xfrm>
-          <a:prstGeom prst="rect">
-            <a:avLst/>
-          </a:prstGeom>
-          <a:solidFill>
-            <a:srgbClr val="FFD000"/>
-          </a:solidFill>
-          <a:ln>
-            <a:noFill/>
-          </a:ln>
-        </p:spPr>
-        <p:style>
-          <a:lnRef idx="1">
-            <a:schemeClr val="accent1"/>
-          </a:lnRef>
-          <a:fillRef idx="3">
-            <a:schemeClr val="accent1"/>
-          </a:fillRef>
-          <a:effectRef idx="2">
-            <a:schemeClr val="accent1"/>
-          </a:effectRef>
-          <a:fontRef idx="minor">
-            <a:schemeClr val="lt1"/>
-          </a:fontRef>
-        </p:style>
-        <p:txBody>
-          <a:bodyPr rtlCol="0" anchor="ctr"/>
-          <a:lstStyle/>
-          <a:p>
-            <a:pPr algn="ctr"/>
-          </a:p>
-        </p:txBody>
-      </p:sp>
-      <p:sp>
-        <p:nvSpPr>
-          <p:cNvPr id="19" name="Rounded Rectangle 18"/>
-          <p:cNvSpPr/>
-          <p:nvPr/>
-        </p:nvSpPr>
-        <p:spPr>
-          <a:xfrm>
-            <a:off x="9311640" y="1847087"/>
-            <a:ext cx="1220724" cy="1220724"/>
-          </a:xfrm>
-          <a:prstGeom prst="roundRect">
-            <a:avLst>
-              <a:gd name="adj" fmla="val 12000"/>
-            </a:avLst>
-          </a:prstGeom>
-          <a:solidFill>
-            <a:srgbClr val="E8F4FA"/>
-          </a:solidFill>
-          <a:ln>
-            <a:noFill/>
-          </a:ln>
-        </p:spPr>
-        <p:style>
-          <a:lnRef idx="1">
-            <a:schemeClr val="accent1"/>
-          </a:lnRef>
-          <a:fillRef idx="3">
-            <a:schemeClr val="accent1"/>
-          </a:fillRef>
-          <a:effectRef idx="2">
-            <a:schemeClr val="accent1"/>
-          </a:effectRef>
-          <a:fontRef idx="minor">
-            <a:schemeClr val="lt1"/>
-          </a:fontRef>
-        </p:style>
-        <p:txBody>
-          <a:bodyPr rtlCol="0" anchor="ctr"/>
-          <a:lstStyle/>
-          <a:p>
-            <a:pPr algn="ctr"/>
-          </a:p>
-        </p:txBody>
-      </p:sp>
-      <p:sp>
-        <p:nvSpPr>
-          <p:cNvPr id="20" name="TextBox 19"/>
-          <p:cNvSpPr txBox="1"/>
-          <p:nvPr/>
-        </p:nvSpPr>
-        <p:spPr>
-          <a:xfrm>
-            <a:off x="9311640" y="1847087"/>
-            <a:ext cx="1220724" cy="1220724"/>
-          </a:xfrm>
-          <a:prstGeom prst="rect">
-            <a:avLst/>
-          </a:prstGeom>
-          <a:noFill/>
-        </p:spPr>
-        <p:txBody>
-          <a:bodyPr wrap="square" anchor="ctr"/>
-          <a:lstStyle/>
-          <a:p>
-            <a:pPr algn="ctr"/>
-            <a:r>
-              <a:rPr sz="1600" b="1" i="0">
-                <a:solidFill>
-                  <a:srgbClr val="095292"/>
-                </a:solidFill>
-                <a:latin typeface="Calibri"/>
-              </a:rPr>
-              <a:t>F</a:t>
-            </a:r>
-          </a:p>
-        </p:txBody>
-      </p:sp>
-      <p:sp>
-        <p:nvSpPr>
-          <p:cNvPr id="21" name="TextBox 20"/>
-          <p:cNvSpPr txBox="1"/>
-          <p:nvPr/>
-        </p:nvSpPr>
-        <p:spPr>
-          <a:xfrm>
-            <a:off x="8182660" y="3159251"/>
-            <a:ext cx="3478682" cy="621792"/>
-          </a:xfrm>
-          <a:prstGeom prst="rect">
-            <a:avLst/>
-          </a:prstGeom>
-          <a:noFill/>
-        </p:spPr>
-        <p:txBody>
-          <a:bodyPr wrap="square" anchor="t"/>
-          <a:lstStyle/>
-          <a:p>
-            <a:pPr algn="ctr"/>
-            <a:r>
-              <a:rPr sz="1300" b="1" i="0">
-                <a:solidFill>
-                  <a:srgbClr val="095292"/>
-                </a:solidFill>
-                <a:latin typeface="Calibri"/>
-              </a:rPr>
-              <a:t>Figma</a:t>
-            </a:r>
-          </a:p>
-          <a:p>
-            <a:pPr algn="ctr">
-              <a:spcBef>
-                <a:spcPts val="200"/>
-              </a:spcBef>
+              <a:rPr sz="2000" b="0" i="0">
+                <a:solidFill>
+                  <a:srgbClr val="333333"/>
+                </a:solidFill>
+                <a:latin typeface="Calibri"/>
+              </a:rPr>
+              <a:t>–   El criterio fue que en Huellitas muchos dueños de mascotas rescatadas no la conocen y un campo obligatorio los llevaria a inventar datos; la consecuencia es que la edad se muestra como aproximada cuando el dato falta.</a:t>
+            </a:r>
+          </a:p>
+          <a:p>
+            <a:pPr>
+              <a:spcAft>
+                <a:spcPts val="800"/>
+              </a:spcAft>
             </a:pPr>
             <a:r>
-              <a:rPr sz="1000" b="0" i="0">
-                <a:solidFill>
-                  <a:srgbClr val="666666"/>
-                </a:solidFill>
-                <a:latin typeface="Calibri"/>
-              </a:rPr>
-              <a:t>Wireframes y prototipo navegable</a:t>
-            </a:r>
-          </a:p>
-        </p:txBody>
-      </p:sp>
-      <p:sp>
-        <p:nvSpPr>
-          <p:cNvPr id="22" name="Rounded Rectangle 21"/>
-          <p:cNvSpPr/>
-          <p:nvPr/>
-        </p:nvSpPr>
-        <p:spPr>
-          <a:xfrm>
-            <a:off x="2370277" y="4055364"/>
-            <a:ext cx="3624986" cy="2299716"/>
-          </a:xfrm>
-          <a:prstGeom prst="roundRect">
-            <a:avLst>
-              <a:gd name="adj" fmla="val 12000"/>
-            </a:avLst>
-          </a:prstGeom>
-          <a:solidFill>
-            <a:srgbClr val="F2F2F2"/>
-          </a:solidFill>
-          <a:ln>
-            <a:noFill/>
-          </a:ln>
-        </p:spPr>
-        <p:style>
-          <a:lnRef idx="1">
-            <a:schemeClr val="accent1"/>
-          </a:lnRef>
-          <a:fillRef idx="3">
-            <a:schemeClr val="accent1"/>
-          </a:fillRef>
-          <a:effectRef idx="2">
-            <a:schemeClr val="accent1"/>
-          </a:effectRef>
-          <a:fontRef idx="minor">
-            <a:schemeClr val="lt1"/>
-          </a:fontRef>
-        </p:style>
-        <p:txBody>
-          <a:bodyPr rtlCol="0" anchor="ctr"/>
-          <a:lstStyle/>
-          <a:p>
-            <a:pPr algn="ctr"/>
-          </a:p>
-        </p:txBody>
-      </p:sp>
-      <p:sp>
-        <p:nvSpPr>
-          <p:cNvPr id="23" name="Rectangle 22"/>
-          <p:cNvSpPr/>
-          <p:nvPr/>
-        </p:nvSpPr>
-        <p:spPr>
-          <a:xfrm>
-            <a:off x="2370277" y="4055364"/>
-            <a:ext cx="3624986" cy="64008"/>
-          </a:xfrm>
-          <a:prstGeom prst="rect">
-            <a:avLst/>
-          </a:prstGeom>
-          <a:solidFill>
-            <a:srgbClr val="095292"/>
-          </a:solidFill>
-          <a:ln>
-            <a:noFill/>
-          </a:ln>
-        </p:spPr>
-        <p:style>
-          <a:lnRef idx="1">
-            <a:schemeClr val="accent1"/>
-          </a:lnRef>
-          <a:fillRef idx="3">
-            <a:schemeClr val="accent1"/>
-          </a:fillRef>
-          <a:effectRef idx="2">
-            <a:schemeClr val="accent1"/>
-          </a:effectRef>
-          <a:fontRef idx="minor">
-            <a:schemeClr val="lt1"/>
-          </a:fontRef>
-        </p:style>
-        <p:txBody>
-          <a:bodyPr rtlCol="0" anchor="ctr"/>
-          <a:lstStyle/>
-          <a:p>
-            <a:pPr algn="ctr"/>
-          </a:p>
-        </p:txBody>
-      </p:sp>
-      <p:sp>
-        <p:nvSpPr>
-          <p:cNvPr id="24" name="Rectangle 23"/>
-          <p:cNvSpPr/>
-          <p:nvPr/>
-        </p:nvSpPr>
-        <p:spPr>
-          <a:xfrm>
-            <a:off x="2370277" y="4119372"/>
-            <a:ext cx="3624986" cy="27432"/>
-          </a:xfrm>
-          <a:prstGeom prst="rect">
-            <a:avLst/>
-          </a:prstGeom>
-          <a:solidFill>
-            <a:srgbClr val="FFD000"/>
-          </a:solidFill>
-          <a:ln>
-            <a:noFill/>
-          </a:ln>
-        </p:spPr>
-        <p:style>
-          <a:lnRef idx="1">
-            <a:schemeClr val="accent1"/>
-          </a:lnRef>
-          <a:fillRef idx="3">
-            <a:schemeClr val="accent1"/>
-          </a:fillRef>
-          <a:effectRef idx="2">
-            <a:schemeClr val="accent1"/>
-          </a:effectRef>
-          <a:fontRef idx="minor">
-            <a:schemeClr val="lt1"/>
-          </a:fontRef>
-        </p:style>
-        <p:txBody>
-          <a:bodyPr rtlCol="0" anchor="ctr"/>
-          <a:lstStyle/>
-          <a:p>
-            <a:pPr algn="ctr"/>
-          </a:p>
-        </p:txBody>
-      </p:sp>
-      <p:sp>
-        <p:nvSpPr>
-          <p:cNvPr id="25" name="Rounded Rectangle 24"/>
-          <p:cNvSpPr/>
-          <p:nvPr/>
-        </p:nvSpPr>
-        <p:spPr>
-          <a:xfrm>
-            <a:off x="3572408" y="4311396"/>
-            <a:ext cx="1220724" cy="1220724"/>
-          </a:xfrm>
-          <a:prstGeom prst="roundRect">
-            <a:avLst>
-              <a:gd name="adj" fmla="val 12000"/>
-            </a:avLst>
-          </a:prstGeom>
-          <a:solidFill>
-            <a:srgbClr val="E8F4FA"/>
-          </a:solidFill>
-          <a:ln>
-            <a:noFill/>
-          </a:ln>
-        </p:spPr>
-        <p:style>
-          <a:lnRef idx="1">
-            <a:schemeClr val="accent1"/>
-          </a:lnRef>
-          <a:fillRef idx="3">
-            <a:schemeClr val="accent1"/>
-          </a:fillRef>
-          <a:effectRef idx="2">
-            <a:schemeClr val="accent1"/>
-          </a:effectRef>
-          <a:fontRef idx="minor">
-            <a:schemeClr val="lt1"/>
-          </a:fontRef>
-        </p:style>
-        <p:txBody>
-          <a:bodyPr rtlCol="0" anchor="ctr"/>
-          <a:lstStyle/>
-          <a:p>
-            <a:pPr algn="ctr"/>
-          </a:p>
-        </p:txBody>
-      </p:sp>
-      <p:sp>
-        <p:nvSpPr>
-          <p:cNvPr id="26" name="TextBox 25"/>
-          <p:cNvSpPr txBox="1"/>
-          <p:nvPr/>
-        </p:nvSpPr>
-        <p:spPr>
-          <a:xfrm>
-            <a:off x="3572408" y="4311396"/>
-            <a:ext cx="1220724" cy="1220724"/>
-          </a:xfrm>
-          <a:prstGeom prst="rect">
-            <a:avLst/>
-          </a:prstGeom>
-          <a:noFill/>
-        </p:spPr>
-        <p:txBody>
-          <a:bodyPr wrap="square" anchor="ctr"/>
-          <a:lstStyle/>
-          <a:p>
-            <a:pPr algn="ctr"/>
-            <a:r>
-              <a:rPr sz="1600" b="1" i="0">
-                <a:solidFill>
-                  <a:srgbClr val="095292"/>
-                </a:solidFill>
-                <a:latin typeface="Calibri"/>
-              </a:rPr>
-              <a:t>P</a:t>
-            </a:r>
-          </a:p>
-        </p:txBody>
-      </p:sp>
-      <p:sp>
-        <p:nvSpPr>
-          <p:cNvPr id="27" name="TextBox 26"/>
-          <p:cNvSpPr txBox="1"/>
-          <p:nvPr/>
-        </p:nvSpPr>
-        <p:spPr>
-          <a:xfrm>
-            <a:off x="2443429" y="5623560"/>
-            <a:ext cx="3478682" cy="621792"/>
-          </a:xfrm>
-          <a:prstGeom prst="rect">
-            <a:avLst/>
-          </a:prstGeom>
-          <a:noFill/>
-        </p:spPr>
-        <p:txBody>
-          <a:bodyPr wrap="square" anchor="t"/>
-          <a:lstStyle/>
-          <a:p>
-            <a:pPr algn="ctr"/>
-            <a:r>
-              <a:rPr sz="1300" b="1" i="0">
-                <a:solidFill>
-                  <a:srgbClr val="095292"/>
-                </a:solidFill>
-                <a:latin typeface="Calibri"/>
-              </a:rPr>
-              <a:t>Penpot</a:t>
-            </a:r>
-          </a:p>
-          <a:p>
-            <a:pPr algn="ctr">
-              <a:spcBef>
-                <a:spcPts val="200"/>
-              </a:spcBef>
-            </a:pPr>
-            <a:r>
-              <a:rPr sz="1000" b="0" i="0">
-                <a:solidFill>
-                  <a:srgbClr val="666666"/>
-                </a:solidFill>
-                <a:latin typeface="Calibri"/>
-              </a:rPr>
-              <a:t>Alternativa libre a Figma</a:t>
-            </a:r>
-          </a:p>
-        </p:txBody>
-      </p:sp>
-      <p:sp>
-        <p:nvSpPr>
-          <p:cNvPr id="28" name="Rounded Rectangle 27"/>
-          <p:cNvSpPr/>
-          <p:nvPr/>
-        </p:nvSpPr>
-        <p:spPr>
-          <a:xfrm>
-            <a:off x="6196431" y="4055364"/>
-            <a:ext cx="3624986" cy="2299716"/>
-          </a:xfrm>
-          <a:prstGeom prst="roundRect">
-            <a:avLst>
-              <a:gd name="adj" fmla="val 12000"/>
-            </a:avLst>
-          </a:prstGeom>
-          <a:solidFill>
-            <a:srgbClr val="F2F2F2"/>
-          </a:solidFill>
-          <a:ln>
-            <a:noFill/>
-          </a:ln>
-        </p:spPr>
-        <p:style>
-          <a:lnRef idx="1">
-            <a:schemeClr val="accent1"/>
-          </a:lnRef>
-          <a:fillRef idx="3">
-            <a:schemeClr val="accent1"/>
-          </a:fillRef>
-          <a:effectRef idx="2">
-            <a:schemeClr val="accent1"/>
-          </a:effectRef>
-          <a:fontRef idx="minor">
-            <a:schemeClr val="lt1"/>
-          </a:fontRef>
-        </p:style>
-        <p:txBody>
-          <a:bodyPr rtlCol="0" anchor="ctr"/>
-          <a:lstStyle/>
-          <a:p>
-            <a:pPr algn="ctr"/>
-          </a:p>
-        </p:txBody>
-      </p:sp>
-      <p:sp>
-        <p:nvSpPr>
-          <p:cNvPr id="29" name="Rectangle 28"/>
-          <p:cNvSpPr/>
-          <p:nvPr/>
-        </p:nvSpPr>
-        <p:spPr>
-          <a:xfrm>
-            <a:off x="6196431" y="4055364"/>
-            <a:ext cx="3624986" cy="64008"/>
-          </a:xfrm>
-          <a:prstGeom prst="rect">
-            <a:avLst/>
-          </a:prstGeom>
-          <a:solidFill>
-            <a:srgbClr val="095292"/>
-          </a:solidFill>
-          <a:ln>
-            <a:noFill/>
-          </a:ln>
-        </p:spPr>
-        <p:style>
-          <a:lnRef idx="1">
-            <a:schemeClr val="accent1"/>
-          </a:lnRef>
-          <a:fillRef idx="3">
-            <a:schemeClr val="accent1"/>
-          </a:fillRef>
-          <a:effectRef idx="2">
-            <a:schemeClr val="accent1"/>
-          </a:effectRef>
-          <a:fontRef idx="minor">
-            <a:schemeClr val="lt1"/>
-          </a:fontRef>
-        </p:style>
-        <p:txBody>
-          <a:bodyPr rtlCol="0" anchor="ctr"/>
-          <a:lstStyle/>
-          <a:p>
-            <a:pPr algn="ctr"/>
-          </a:p>
-        </p:txBody>
-      </p:sp>
-      <p:sp>
-        <p:nvSpPr>
-          <p:cNvPr id="30" name="Rectangle 29"/>
-          <p:cNvSpPr/>
-          <p:nvPr/>
-        </p:nvSpPr>
-        <p:spPr>
-          <a:xfrm>
-            <a:off x="6196431" y="4119372"/>
-            <a:ext cx="3624986" cy="27432"/>
-          </a:xfrm>
-          <a:prstGeom prst="rect">
-            <a:avLst/>
-          </a:prstGeom>
-          <a:solidFill>
-            <a:srgbClr val="FFD000"/>
-          </a:solidFill>
-          <a:ln>
-            <a:noFill/>
-          </a:ln>
-        </p:spPr>
-        <p:style>
-          <a:lnRef idx="1">
-            <a:schemeClr val="accent1"/>
-          </a:lnRef>
-          <a:fillRef idx="3">
-            <a:schemeClr val="accent1"/>
-          </a:fillRef>
-          <a:effectRef idx="2">
-            <a:schemeClr val="accent1"/>
-          </a:effectRef>
-          <a:fontRef idx="minor">
-            <a:schemeClr val="lt1"/>
-          </a:fontRef>
-        </p:style>
-        <p:txBody>
-          <a:bodyPr rtlCol="0" anchor="ctr"/>
-          <a:lstStyle/>
-          <a:p>
-            <a:pPr algn="ctr"/>
-          </a:p>
-        </p:txBody>
-      </p:sp>
-      <p:pic>
-        <p:nvPicPr>
-          <p:cNvPr id="31" name="Picture 30" descr="examlab.png"/>
-          <p:cNvPicPr>
-            <a:picLocks noChangeAspect="1"/>
-          </p:cNvPicPr>
-          <p:nvPr/>
-        </p:nvPicPr>
-        <p:blipFill>
-          <a:blip r:embed="rId4"/>
-          <a:stretch>
-            <a:fillRect/>
-          </a:stretch>
-        </p:blipFill>
-        <p:spPr>
-          <a:xfrm>
-            <a:off x="7398562" y="4311396"/>
-            <a:ext cx="1220724" cy="1220724"/>
-          </a:xfrm>
-          <a:prstGeom prst="rect">
-            <a:avLst/>
-          </a:prstGeom>
-        </p:spPr>
-      </p:pic>
-      <p:sp>
-        <p:nvSpPr>
-          <p:cNvPr id="32" name="TextBox 31"/>
-          <p:cNvSpPr txBox="1"/>
-          <p:nvPr/>
-        </p:nvSpPr>
-        <p:spPr>
-          <a:xfrm>
-            <a:off x="6269583" y="5623560"/>
-            <a:ext cx="3478682" cy="621792"/>
-          </a:xfrm>
-          <a:prstGeom prst="rect">
-            <a:avLst/>
-          </a:prstGeom>
-          <a:noFill/>
-        </p:spPr>
-        <p:txBody>
-          <a:bodyPr wrap="square" anchor="t"/>
-          <a:lstStyle/>
-          <a:p>
-            <a:pPr algn="ctr"/>
-            <a:r>
-              <a:rPr sz="1300" b="1" i="0">
-                <a:solidFill>
-                  <a:srgbClr val="095292"/>
-                </a:solidFill>
-                <a:latin typeface="Calibri"/>
-              </a:rPr>
-              <a:t>la plataforma del curso</a:t>
-            </a:r>
-          </a:p>
-          <a:p>
-            <a:pPr algn="ctr">
-              <a:spcBef>
-                <a:spcPts val="200"/>
-              </a:spcBef>
-            </a:pPr>
-            <a:r>
-              <a:rPr sz="1000" b="0" i="0">
-                <a:solidFill>
-                  <a:srgbClr val="666666"/>
-                </a:solidFill>
-                <a:latin typeface="Calibri"/>
-              </a:rPr>
-              <a:t>Entrega del taller · en la fecha que indique el docente</a:t>
-            </a:r>
-          </a:p>
-        </p:txBody>
-      </p:sp>
-      <p:sp>
-        <p:nvSpPr>
-          <p:cNvPr id="33" name="TextBox 32"/>
+              <a:rPr sz="2000" b="0" i="0">
+                <a:solidFill>
+                  <a:srgbClr val="333333"/>
+                </a:solidFill>
+                <a:latin typeface="Calibri"/>
+              </a:rPr>
+              <a:t>–   Una decision defendida asi resiste cualquier pregunta, porque el jurado ya sabe que el equipo penso en la alternativa.</a:t>
+            </a:r>
+          </a:p>
+        </p:txBody>
+      </p:sp>
+      <p:sp>
+        <p:nvSpPr>
+          <p:cNvPr id="6" name="TextBox 5"/>
           <p:cNvSpPr txBox="1"/>
           <p:nvPr/>
         </p:nvSpPr>
@@ -10135,7 +11831,7 @@
                 </a:solidFill>
                 <a:latin typeface="Calibri"/>
               </a:rPr>
-              <a:t>Taller PI — por que importa</a:t>
+              <a:t>Las preguntas del jurado son bastante predecibles y por eso se preparan</a:t>
             </a:r>
           </a:p>
         </p:txBody>
@@ -10174,25 +11870,7 @@
                 </a:solidFill>
                 <a:latin typeface="Calibri"/>
               </a:rPr>
-              <a:t>–   </a:t>
-            </a:r>
-            <a:r>
-              <a:rPr sz="2000" b="1" i="0">
-                <a:solidFill>
-                  <a:srgbClr val="333333"/>
-                </a:solidFill>
-                <a:latin typeface="Calibri"/>
-              </a:rPr>
-              <a:t>Por que importa al PI:</a:t>
-            </a:r>
-            <a:r>
-              <a:rPr sz="2000" b="0" i="0">
-                <a:solidFill>
-                  <a:srgbClr val="333333"/>
-                </a:solidFill>
-                <a:latin typeface="Calibri"/>
-              </a:rPr>
-              <a:t> hoy se convierte el monton de artefactos de VetCare en un solo paquete defendible, y se ensaya la unica ocasion en que el equipo tiene que demostrar que entiende lo que entrego.</a:t>
+              <a:t>–   Las preguntas del jurado son bastante predecibles y por eso se preparan.</a:t>
             </a:r>
           </a:p>
           <a:p>
@@ -10208,7 +11886,7 @@
                 </a:solidFill>
                 <a:latin typeface="Calibri"/>
               </a:rPr>
-              <a:t>–   No hay tema nuevo: todo el trabajo es de consolidacion, coherencia y argumentacion sobre lo ya producido.</a:t>
+              <a:t>–   Las mas frecuentes en un proyecto como VetCare son: como sabe usted que este requisito es realmente necesario; que pasa si dos recepcionistas registran la misma mascota al mismo tiempo; por que esta clase existe y no es un atributo de otra</a:t>
             </a:r>
           </a:p>
           <a:p>
@@ -10224,7 +11902,71 @@
                 </a:solidFill>
                 <a:latin typeface="Calibri"/>
               </a:rPr>
-              <a:t>–   Las inconsistencias que se detecten hoy son baratas de arreglar; las mismas inconsistencias detectadas por el jurado o por el equipo de Programacion II salen carisimas.</a:t>
+              <a:t>–   Como se cumple el requisito no funcional que usted escribio y como se mediria; que pasa si el sistema se cae a mitad de un registro; que dejaron por fuera del alcance y por que; y quien de ustedes hizo esta parte.</a:t>
+            </a:r>
+          </a:p>
+          <a:p>
+            <a:pPr>
+              <a:spcAft>
+                <a:spcPts val="800"/>
+              </a:spcAft>
+            </a:pPr>
+            <a:r>
+              <a:rPr sz="2000" b="0" i="0">
+                <a:solidFill>
+                  <a:srgbClr val="333333"/>
+                </a:solidFill>
+                <a:latin typeface="Calibri"/>
+              </a:rPr>
+              <a:t>–   Hay que preparar la respuesta de cada una en dos frases, sin discursos.</a:t>
+            </a:r>
+          </a:p>
+          <a:p>
+            <a:pPr>
+              <a:spcAft>
+                <a:spcPts val="800"/>
+              </a:spcAft>
+            </a:pPr>
+            <a:r>
+              <a:rPr sz="2000" b="0" i="0">
+                <a:solidFill>
+                  <a:srgbClr val="333333"/>
+                </a:solidFill>
+                <a:latin typeface="Calibri"/>
+              </a:rPr>
+              <a:t>–   Y hay una regla de oro para cuando no se sabe: no se inventa.</a:t>
+            </a:r>
+          </a:p>
+          <a:p>
+            <a:pPr>
+              <a:spcAft>
+                <a:spcPts val="800"/>
+              </a:spcAft>
+            </a:pPr>
+            <a:r>
+              <a:rPr sz="2000" b="0" i="0">
+                <a:solidFill>
+                  <a:srgbClr val="333333"/>
+                </a:solidFill>
+                <a:latin typeface="Calibri"/>
+              </a:rPr>
+              <a:t>–   La respuesta correcta es reconocer el vacio y proponer como se resolveria, por ejemplo no lo modelamos, lo registramos como riesgo abierto y se resolveria agregando una validacion de unicidad por dueño mas nombre en el diccionario de datos.</a:t>
+            </a:r>
+          </a:p>
+          <a:p>
+            <a:pPr>
+              <a:spcAft>
+                <a:spcPts val="800"/>
+              </a:spcAft>
+            </a:pPr>
+            <a:r>
+              <a:rPr sz="2000" b="0" i="0">
+                <a:solidFill>
+                  <a:srgbClr val="333333"/>
+                </a:solidFill>
+                <a:latin typeface="Calibri"/>
+              </a:rPr>
+              <a:t>–   Un jurado castiga mucho mas la improvisacion detectada que la honestidad tecnica.</a:t>
             </a:r>
           </a:p>
         </p:txBody>
@@ -10405,7 +12147,7 @@
                 </a:solidFill>
                 <a:latin typeface="Calibri"/>
               </a:rPr>
-              <a:t>Taller PI — punto de partida</a:t>
+              <a:t>El reparto del guion en bloques con tiempos es criterio de evaluacion... (1/2)</a:t>
             </a:r>
           </a:p>
         </p:txBody>
@@ -10444,7 +12186,7 @@
                 </a:solidFill>
                 <a:latin typeface="Calibri"/>
               </a:rPr>
-              <a:t>–   El equipo tiene todos los artefactos de VetCare producidos, pero dispersos en varios archivos y con pequeñas contradicciones entre ellos.</a:t>
+              <a:t>–   El reparto del guion en bloques con tiempos es criterio de evaluacion, no un detalle logistico.</a:t>
             </a:r>
           </a:p>
           <a:p>
@@ -10460,7 +12202,7 @@
                 </a:solidFill>
                 <a:latin typeface="Calibri"/>
               </a:rPr>
-              <a:t>–   Nadie ha dicho todavia en voz alta la historia completa del proyecto de principio a fin, y el reparto de quien expone que no esta definido.</a:t>
+              <a:t>–   La sustentacion es individual por defecto: el estudiante expone los cinco bloques y responde por todos, y lo que se califica es que cada bloque tenga su rango de minutos y su evidencia en pantalla, no quien lo dice.</a:t>
             </a:r>
           </a:p>
           <a:p>
@@ -10476,7 +12218,23 @@
                 </a:solidFill>
                 <a:latin typeface="Calibri"/>
               </a:rPr>
-              <a:t>–   El prototipo navegable existe y funciona, pero solo lo ha manejado la persona que lo dibujo.</a:t>
+              <a:t>–   El orden que funciona para VetCare es: abrir con problema y alcance, seguir con requisitos y trazabilidad, luego los modelos UML, despues el prototipo en vivo y cerrar con decisiones, riesgos y siguiente paso hacia Programacion II.</a:t>
+            </a:r>
+          </a:p>
+          <a:p>
+            <a:pPr>
+              <a:spcAft>
+                <a:spcPts val="800"/>
+              </a:spcAft>
+            </a:pPr>
+            <a:r>
+              <a:rPr sz="2000" b="0" i="0">
+                <a:solidFill>
+                  <a:srgbClr val="333333"/>
+                </a:solidFill>
+                <a:latin typeface="Calibri"/>
+              </a:rPr>
+              <a:t>–   Si el docente autorizo equipo de 2 o 3, se agrega el nombre del responsable a cada bloque, todos los integrantes deben hablar al menos dos minutos y ninguno puede hablar solo de lo suyo: cada persona domina una pieza pero debe conocer el todo</a:t>
             </a:r>
           </a:p>
         </p:txBody>

--- a/Seminario de Sistemas/Clases/Clase 14 - Preparacion de la sustentacion y cierre/Presentacion.pptx
+++ b/Seminario de Sistemas/Clases/Clase 14 - Preparacion de la sustentacion y cierre/Presentacion.pptx
@@ -25,6 +25,7 @@
     <p:sldId id="273" r:id="rId24"/>
     <p:sldId id="274" r:id="rId25"/>
     <p:sldId id="275" r:id="rId26"/>
+    <p:sldId id="276" r:id="rId27"/>
   </p:sldIdLst>
   <p:sldSz cx="12191695" cy="6858000" type="screen4x3"/>
   <p:notesSz cx="6858000" cy="9144000"/>
@@ -3625,7 +3626,7 @@
                 </a:solidFill>
                 <a:latin typeface="Calibri"/>
               </a:rPr>
-              <a:t>El reparto del guion en bloques con tiempos es criterio de evaluacion... (2/2)</a:t>
+              <a:t>El reparto del guion en bloques con tiempos es criterio de evaluacion... (1/2)</a:t>
             </a:r>
           </a:p>
         </p:txBody>
@@ -3664,7 +3665,7 @@
                 </a:solidFill>
                 <a:latin typeface="Calibri"/>
               </a:rPr>
-              <a:t>–   Porque el jurado tiene derecho a preguntarle a cualquiera sobre cualquier parte.</a:t>
+              <a:t>–   El reparto del guion en bloques con tiempos es criterio de evaluacion, no un detalle logistico.</a:t>
             </a:r>
           </a:p>
           <a:p>
@@ -3680,7 +3681,7 @@
                 </a:solidFill>
                 <a:latin typeface="Calibri"/>
               </a:rPr>
-              <a:t>–   Se ensaya cronometrado al menos dos veces, en voz alta y de pie, porque el tiempo estimado leyendo en silencio siempre es la mitad del real.</a:t>
+              <a:t>–   La sustentacion es individual por defecto: el estudiante expone los cinco bloques y responde por todos, y lo que se califica es que cada bloque tenga su rango de minutos y su evidencia en pantalla, no quien lo dice.</a:t>
             </a:r>
           </a:p>
           <a:p>
@@ -3696,7 +3697,7 @@
                 </a:solidFill>
                 <a:latin typeface="Calibri"/>
               </a:rPr>
-              <a:t>–   Ademas se prepara el plan B tecnico: capturas del prototipo por si falla el internet, el documento en PDF descargado y los diagramas exportados a imagen.</a:t>
+              <a:t>–   El orden que funciona para VetCare es: abrir con problema y alcance, seguir con requisitos y trazabilidad, luego los modelos UML, despues el prototipo en vivo y cerrar con decisiones, riesgos y siguiente paso hacia Programacion II.</a:t>
             </a:r>
           </a:p>
           <a:p>
@@ -3712,7 +3713,7 @@
                 </a:solidFill>
                 <a:latin typeface="Calibri"/>
               </a:rPr>
-              <a:t>–   Y algo que parece obvio pero se olvida siempre: quien maneja el prototipo debe haberlo recorrido antes haciendo clic en cosas que no estaban en el guion, porque el jurado va a hacer exactamente eso.</a:t>
+              <a:t>–   Si el docente autorizo equipo de 2 o 3, se agrega el nombre del responsable a cada bloque, todos los integrantes deben hablar al menos dos minutos y ninguno puede hablar solo de lo suyo: cada persona domina una pieza pero debe conocer el todo</a:t>
             </a:r>
           </a:p>
         </p:txBody>
@@ -3893,141 +3894,21 @@
                 </a:solidFill>
                 <a:latin typeface="Calibri"/>
               </a:rPr>
-              <a:t>Guion de sustentacion VetCare: doce minutos cronometrados y quien dice que</a:t>
-            </a:r>
-          </a:p>
-        </p:txBody>
-      </p:sp>
-      <p:sp>
-        <p:nvSpPr>
-          <p:cNvPr id="5" name="Rounded Rectangle 4"/>
-          <p:cNvSpPr/>
-          <p:nvPr/>
-        </p:nvSpPr>
-        <p:spPr>
-          <a:xfrm>
-            <a:off x="457200" y="1261872"/>
-            <a:ext cx="11277295" cy="4773168"/>
-          </a:xfrm>
-          <a:prstGeom prst="roundRect">
-            <a:avLst>
-              <a:gd name="adj" fmla="val 12000"/>
-            </a:avLst>
-          </a:prstGeom>
-          <a:solidFill>
-            <a:srgbClr val="1E2A38"/>
-          </a:solidFill>
-          <a:ln>
-            <a:noFill/>
-          </a:ln>
-        </p:spPr>
-        <p:style>
-          <a:lnRef idx="1">
-            <a:schemeClr val="accent1"/>
-          </a:lnRef>
-          <a:fillRef idx="3">
-            <a:schemeClr val="accent1"/>
-          </a:fillRef>
-          <a:effectRef idx="2">
-            <a:schemeClr val="accent1"/>
-          </a:effectRef>
-          <a:fontRef idx="minor">
-            <a:schemeClr val="lt1"/>
-          </a:fontRef>
-        </p:style>
-        <p:txBody>
-          <a:bodyPr rtlCol="0" anchor="ctr"/>
-          <a:lstStyle/>
-          <a:p>
-            <a:pPr algn="ctr"/>
-          </a:p>
-        </p:txBody>
-      </p:sp>
-      <p:sp>
-        <p:nvSpPr>
-          <p:cNvPr id="6" name="Rectangle 5"/>
-          <p:cNvSpPr/>
-          <p:nvPr/>
-        </p:nvSpPr>
-        <p:spPr>
-          <a:xfrm>
-            <a:off x="457200" y="1261872"/>
-            <a:ext cx="11277295" cy="320040"/>
-          </a:xfrm>
-          <a:prstGeom prst="rect">
-            <a:avLst/>
-          </a:prstGeom>
-          <a:solidFill>
-            <a:srgbClr val="095292"/>
-          </a:solidFill>
-          <a:ln>
-            <a:noFill/>
-          </a:ln>
-        </p:spPr>
-        <p:style>
-          <a:lnRef idx="1">
-            <a:schemeClr val="accent1"/>
-          </a:lnRef>
-          <a:fillRef idx="3">
-            <a:schemeClr val="accent1"/>
-          </a:fillRef>
-          <a:effectRef idx="2">
-            <a:schemeClr val="accent1"/>
-          </a:effectRef>
-          <a:fontRef idx="minor">
-            <a:schemeClr val="lt1"/>
-          </a:fontRef>
-        </p:style>
-        <p:txBody>
-          <a:bodyPr rtlCol="0" anchor="ctr"/>
-          <a:lstStyle/>
-          <a:p>
-            <a:pPr algn="ctr"/>
-          </a:p>
-        </p:txBody>
-      </p:sp>
-      <p:sp>
-        <p:nvSpPr>
-          <p:cNvPr id="7" name="TextBox 6"/>
+              <a:t>El reparto del guion en bloques con tiempos es criterio de evaluacion... (2/2)</a:t>
+            </a:r>
+          </a:p>
+        </p:txBody>
+      </p:sp>
+      <p:sp>
+        <p:nvSpPr>
+          <p:cNvPr id="5" name="TextBox 4"/>
           <p:cNvSpPr txBox="1"/>
           <p:nvPr/>
         </p:nvSpPr>
         <p:spPr>
           <a:xfrm>
-            <a:off x="685800" y="1307592"/>
-            <a:ext cx="10820095" cy="256032"/>
-          </a:xfrm>
-          <a:prstGeom prst="rect">
-            <a:avLst/>
-          </a:prstGeom>
-          <a:noFill/>
-        </p:spPr>
-        <p:txBody>
-          <a:bodyPr wrap="square" anchor="ctr"/>
-          <a:lstStyle/>
-          <a:p>
-            <a:r>
-              <a:rPr sz="1000" b="1" i="0">
-                <a:solidFill>
-                  <a:srgbClr val="269CCB"/>
-                </a:solidFill>
-                <a:latin typeface="Calibri"/>
-              </a:rPr>
-              <a:t>● ● ●</a:t>
-            </a:r>
-          </a:p>
-        </p:txBody>
-      </p:sp>
-      <p:sp>
-        <p:nvSpPr>
-          <p:cNvPr id="8" name="TextBox 7"/>
-          <p:cNvSpPr txBox="1"/>
-          <p:nvPr/>
-        </p:nvSpPr>
-        <p:spPr>
-          <a:xfrm>
-            <a:off x="777240" y="1719072"/>
-            <a:ext cx="10637215" cy="4133087"/>
+            <a:off x="457200" y="1170432"/>
+            <a:ext cx="11277295" cy="5230368"/>
           </a:xfrm>
           <a:prstGeom prst="rect">
             <a:avLst/>
@@ -4042,235 +3923,72 @@
           <a:p>
             <a:pPr>
               <a:spcAft>
-                <a:spcPts val="400"/>
+                <a:spcPts val="800"/>
               </a:spcAft>
             </a:pPr>
             <a:r>
-              <a:rPr sz="1400" b="0" i="0">
-                <a:solidFill>
-                  <a:srgbClr val="FFFFFF"/>
-                </a:solidFill>
-                <a:latin typeface="Calibri"/>
-              </a:rPr>
-              <a:t>00:00-01:30 | PROBLEMA    | Huellitas: fichas extraviadas, 8 min por historial, cero metricas</a:t>
+              <a:rPr sz="2000" b="0" i="0">
+                <a:solidFill>
+                  <a:srgbClr val="333333"/>
+                </a:solidFill>
+                <a:latin typeface="Calibri"/>
+              </a:rPr>
+              <a:t>–   Porque el jurado tiene derecho a preguntarle a cualquiera sobre cualquier parte.</a:t>
             </a:r>
           </a:p>
           <a:p>
             <a:pPr>
               <a:spcAft>
-                <a:spcPts val="400"/>
+                <a:spcPts val="800"/>
               </a:spcAft>
             </a:pPr>
             <a:r>
-              <a:rPr sz="1400" b="0" i="0">
-                <a:solidFill>
-                  <a:srgbClr val="FFFFFF"/>
-                </a:solidFill>
-                <a:latin typeface="Calibri"/>
-              </a:rPr>
-              <a:t>01:30-03:00 | ALCANCE     | Lo que si entra y lo que quedo por fuera, con la razon</a:t>
+              <a:rPr sz="2000" b="0" i="0">
+                <a:solidFill>
+                  <a:srgbClr val="333333"/>
+                </a:solidFill>
+                <a:latin typeface="Calibri"/>
+              </a:rPr>
+              <a:t>–   Se ensaya cronometrado al menos dos veces, en voz alta y de pie, porque el tiempo estimado leyendo en silencio siempre es la mitad del real.</a:t>
             </a:r>
           </a:p>
           <a:p>
             <a:pPr>
               <a:spcAft>
-                <a:spcPts val="400"/>
+                <a:spcPts val="800"/>
               </a:spcAft>
             </a:pPr>
             <a:r>
-              <a:rPr sz="1400" b="0" i="0">
-                <a:solidFill>
-                  <a:srgbClr val="FFFFFF"/>
-                </a:solidFill>
-                <a:latin typeface="Calibri"/>
-              </a:rPr>
-              <a:t>03:00-05:00 | REQUISITOS  | Solo los 3 RF criticos y 2 RNF medibles; el resto en el documento</a:t>
+              <a:rPr sz="2000" b="0" i="0">
+                <a:solidFill>
+                  <a:srgbClr val="333333"/>
+                </a:solidFill>
+                <a:latin typeface="Calibri"/>
+              </a:rPr>
+              <a:t>–   Ademas se prepara el plan B tecnico: capturas del prototipo por si falla el internet, el documento en PDF descargado y los diagramas exportados a imagen.</a:t>
             </a:r>
           </a:p>
           <a:p>
             <a:pPr>
               <a:spcAft>
-                <a:spcPts val="400"/>
+                <a:spcPts val="800"/>
               </a:spcAft>
             </a:pPr>
             <a:r>
-              <a:rPr sz="1400" b="0" i="0">
-                <a:solidFill>
-                  <a:srgbClr val="FFFFFF"/>
-                </a:solidFill>
-                <a:latin typeface="Calibri"/>
-              </a:rPr>
-              <a:t>05:00-07:00 | MODELO      | Casos de uso y clases: Mascota, Dueño, Historia_Clinica, Cita</a:t>
-            </a:r>
-          </a:p>
-          <a:p>
-            <a:pPr>
-              <a:spcAft>
-                <a:spcPts val="400"/>
-              </a:spcAft>
-            </a:pPr>
-            <a:r>
-              <a:rPr sz="1400" b="0" i="0">
-                <a:solidFill>
-                  <a:srgbClr val="FFFFFF"/>
-                </a:solidFill>
-                <a:latin typeface="Calibri"/>
-              </a:rPr>
-              <a:t>07:00-09:00 | INTERFAZ    | Prototipo en vivo: registrar mascota -&gt; confirmacion -&gt; buscar</a:t>
-            </a:r>
-          </a:p>
-          <a:p>
-            <a:pPr>
-              <a:spcAft>
-                <a:spcPts val="400"/>
-              </a:spcAft>
-            </a:pPr>
-            <a:r>
-              <a:rPr sz="1400" b="0" i="0">
-                <a:solidFill>
-                  <a:srgbClr val="FFFFFF"/>
-                </a:solidFill>
-                <a:latin typeface="Calibri"/>
-              </a:rPr>
-              <a:t>09:00-11:00 | DECISIONES  | 3 decisiones con alternativa descartada, criterio y consecuencia</a:t>
-            </a:r>
-          </a:p>
-          <a:p>
-            <a:pPr>
-              <a:spcAft>
-                <a:spcPts val="400"/>
-              </a:spcAft>
-            </a:pPr>
-            <a:r>
-              <a:rPr sz="1400" b="0" i="0">
-                <a:solidFill>
-                  <a:srgbClr val="FFFFFF"/>
-                </a:solidFill>
-                <a:latin typeface="Calibri"/>
-              </a:rPr>
-              <a:t>11:00-11:30 | RIESGOS     | Que queda abierto y que recibe Programacion II</a:t>
-            </a:r>
-          </a:p>
-          <a:p>
-            <a:pPr>
-              <a:spcAft>
-                <a:spcPts val="400"/>
-              </a:spcAft>
-            </a:pPr>
-            <a:r>
-              <a:rPr sz="1400" b="0" i="0">
-                <a:solidFill>
-                  <a:srgbClr val="FFFFFF"/>
-                </a:solidFill>
-                <a:latin typeface="Calibri"/>
-              </a:rPr>
-              <a:t>11:30-12:00 | CIERRE      | Una frase de valor para la clinica, no un resumen</a:t>
-            </a:r>
-          </a:p>
-          <a:p>
-            <a:pPr>
-              <a:spcAft>
-                <a:spcPts val="400"/>
-              </a:spcAft>
-            </a:pPr>
-            <a:r>
-              <a:rPr sz="1400" b="0" i="0">
-                <a:solidFill>
-                  <a:srgbClr val="FFFFFF"/>
-                </a:solidFill>
-                <a:latin typeface="Calibri"/>
-              </a:rPr>
-              <a:t>--- Reparto: todos hablan minimo 2 minutos y todos responden minimo 1 pregunta</a:t>
-            </a:r>
-          </a:p>
-          <a:p>
-            <a:pPr>
-              <a:spcAft>
-                <a:spcPts val="400"/>
-              </a:spcAft>
-            </a:pPr>
-            <a:r>
-              <a:rPr sz="1400" b="0" i="0">
-                <a:solidFill>
-                  <a:srgbClr val="FFFFFF"/>
-                </a:solidFill>
-                <a:latin typeface="Calibri"/>
-              </a:rPr>
-              <a:t>--- Regla: nadie lee la diapositiva; la diapositiva es el plano, la voz es el argumento</a:t>
-            </a:r>
-          </a:p>
-          <a:p>
-            <a:pPr>
-              <a:spcAft>
-                <a:spcPts val="400"/>
-              </a:spcAft>
-            </a:pPr>
-            <a:r>
-              <a:rPr sz="1400" b="0" i="0">
-                <a:solidFill>
-                  <a:srgbClr val="FFFFFF"/>
-                </a:solidFill>
-                <a:latin typeface="Calibri"/>
-              </a:rPr>
-              <a:t>--- Cada pantalla proyectada debe poder señalar el RF que la origina</a:t>
-            </a:r>
-          </a:p>
-          <a:p>
-            <a:pPr>
-              <a:spcAft>
-                <a:spcPts val="400"/>
-              </a:spcAft>
-            </a:pPr>
-            <a:r>
-              <a:rPr sz="1400" b="0" i="0">
-                <a:solidFill>
-                  <a:srgbClr val="FFFFFF"/>
-                </a:solidFill>
-                <a:latin typeface="Calibri"/>
-              </a:rPr>
-              <a:t>--- Plan B: capturas del prototipo, PDF descargado y diagramas exportados a imagen</a:t>
-            </a:r>
-          </a:p>
-        </p:txBody>
-      </p:sp>
-      <p:sp>
-        <p:nvSpPr>
-          <p:cNvPr id="9" name="TextBox 8"/>
-          <p:cNvSpPr txBox="1"/>
-          <p:nvPr/>
-        </p:nvSpPr>
-        <p:spPr>
-          <a:xfrm>
-            <a:off x="457200" y="6080760"/>
-            <a:ext cx="11277295" cy="320040"/>
-          </a:xfrm>
-          <a:prstGeom prst="rect">
-            <a:avLst/>
-          </a:prstGeom>
-          <a:noFill/>
-        </p:spPr>
-        <p:txBody>
-          <a:bodyPr wrap="square">
-            <a:spAutoFit/>
-          </a:bodyPr>
-          <a:lstStyle/>
-          <a:p>
-            <a:pPr algn="ctr"/>
-            <a:r>
-              <a:rPr sz="1200" b="0" i="1">
-                <a:solidFill>
-                  <a:srgbClr val="666666"/>
-                </a:solidFill>
-                <a:latin typeface="Calibri"/>
-              </a:rPr>
-              <a:t>Un paquete de diseño no se narra en orden cronologico: se defiende en orden de embudo, del dolor a la decision.</a:t>
-            </a:r>
-          </a:p>
-        </p:txBody>
-      </p:sp>
-      <p:sp>
-        <p:nvSpPr>
-          <p:cNvPr id="10" name="TextBox 9"/>
+              <a:rPr sz="2000" b="0" i="0">
+                <a:solidFill>
+                  <a:srgbClr val="333333"/>
+                </a:solidFill>
+                <a:latin typeface="Calibri"/>
+              </a:rPr>
+              <a:t>–   Y algo que parece obvio pero se olvida siempre: quien maneja el prototipo debe haberlo recorrido antes haciendo clic en cosas que no estaban en el guion, porque el jurado va a hacer exactamente eso.</a:t>
+            </a:r>
+          </a:p>
+        </p:txBody>
+      </p:sp>
+      <p:sp>
+        <p:nvSpPr>
+          <p:cNvPr id="6" name="TextBox 5"/>
           <p:cNvSpPr txBox="1"/>
           <p:nvPr/>
         </p:nvSpPr>
@@ -4444,21 +4162,141 @@
                 </a:solidFill>
                 <a:latin typeface="Calibri"/>
               </a:rPr>
-              <a:t>Demo del dia</a:t>
-            </a:r>
-          </a:p>
-        </p:txBody>
-      </p:sp>
-      <p:sp>
-        <p:nvSpPr>
-          <p:cNvPr id="5" name="TextBox 4"/>
+              <a:t>Guion de sustentacion VetCare: doce minutos cronometrados y quien dice que</a:t>
+            </a:r>
+          </a:p>
+        </p:txBody>
+      </p:sp>
+      <p:sp>
+        <p:nvSpPr>
+          <p:cNvPr id="5" name="Rounded Rectangle 4"/>
+          <p:cNvSpPr/>
+          <p:nvPr/>
+        </p:nvSpPr>
+        <p:spPr>
+          <a:xfrm>
+            <a:off x="457200" y="1261872"/>
+            <a:ext cx="11277295" cy="4773168"/>
+          </a:xfrm>
+          <a:prstGeom prst="roundRect">
+            <a:avLst>
+              <a:gd name="adj" fmla="val 12000"/>
+            </a:avLst>
+          </a:prstGeom>
+          <a:solidFill>
+            <a:srgbClr val="1E2A38"/>
+          </a:solidFill>
+          <a:ln>
+            <a:noFill/>
+          </a:ln>
+        </p:spPr>
+        <p:style>
+          <a:lnRef idx="1">
+            <a:schemeClr val="accent1"/>
+          </a:lnRef>
+          <a:fillRef idx="3">
+            <a:schemeClr val="accent1"/>
+          </a:fillRef>
+          <a:effectRef idx="2">
+            <a:schemeClr val="accent1"/>
+          </a:effectRef>
+          <a:fontRef idx="minor">
+            <a:schemeClr val="lt1"/>
+          </a:fontRef>
+        </p:style>
+        <p:txBody>
+          <a:bodyPr rtlCol="0" anchor="ctr"/>
+          <a:lstStyle/>
+          <a:p>
+            <a:pPr algn="ctr"/>
+          </a:p>
+        </p:txBody>
+      </p:sp>
+      <p:sp>
+        <p:nvSpPr>
+          <p:cNvPr id="6" name="Rectangle 5"/>
+          <p:cNvSpPr/>
+          <p:nvPr/>
+        </p:nvSpPr>
+        <p:spPr>
+          <a:xfrm>
+            <a:off x="457200" y="1261872"/>
+            <a:ext cx="11277295" cy="320040"/>
+          </a:xfrm>
+          <a:prstGeom prst="rect">
+            <a:avLst/>
+          </a:prstGeom>
+          <a:solidFill>
+            <a:srgbClr val="095292"/>
+          </a:solidFill>
+          <a:ln>
+            <a:noFill/>
+          </a:ln>
+        </p:spPr>
+        <p:style>
+          <a:lnRef idx="1">
+            <a:schemeClr val="accent1"/>
+          </a:lnRef>
+          <a:fillRef idx="3">
+            <a:schemeClr val="accent1"/>
+          </a:fillRef>
+          <a:effectRef idx="2">
+            <a:schemeClr val="accent1"/>
+          </a:effectRef>
+          <a:fontRef idx="minor">
+            <a:schemeClr val="lt1"/>
+          </a:fontRef>
+        </p:style>
+        <p:txBody>
+          <a:bodyPr rtlCol="0" anchor="ctr"/>
+          <a:lstStyle/>
+          <a:p>
+            <a:pPr algn="ctr"/>
+          </a:p>
+        </p:txBody>
+      </p:sp>
+      <p:sp>
+        <p:nvSpPr>
+          <p:cNvPr id="7" name="TextBox 6"/>
           <p:cNvSpPr txBox="1"/>
           <p:nvPr/>
         </p:nvSpPr>
         <p:spPr>
           <a:xfrm>
-            <a:off x="457200" y="1170432"/>
-            <a:ext cx="11277295" cy="5230368"/>
+            <a:off x="685800" y="1307592"/>
+            <a:ext cx="10820095" cy="256032"/>
+          </a:xfrm>
+          <a:prstGeom prst="rect">
+            <a:avLst/>
+          </a:prstGeom>
+          <a:noFill/>
+        </p:spPr>
+        <p:txBody>
+          <a:bodyPr wrap="square" anchor="ctr"/>
+          <a:lstStyle/>
+          <a:p>
+            <a:r>
+              <a:rPr sz="1000" b="1" i="0">
+                <a:solidFill>
+                  <a:srgbClr val="269CCB"/>
+                </a:solidFill>
+                <a:latin typeface="Calibri"/>
+              </a:rPr>
+              <a:t>● ● ●</a:t>
+            </a:r>
+          </a:p>
+        </p:txBody>
+      </p:sp>
+      <p:sp>
+        <p:nvSpPr>
+          <p:cNvPr id="8" name="TextBox 7"/>
+          <p:cNvSpPr txBox="1"/>
+          <p:nvPr/>
+        </p:nvSpPr>
+        <p:spPr>
+          <a:xfrm>
+            <a:off x="777240" y="1719072"/>
+            <a:ext cx="10637215" cy="4133087"/>
           </a:xfrm>
           <a:prstGeom prst="rect">
             <a:avLst/>
@@ -4473,92 +4311,235 @@
           <a:p>
             <a:pPr>
               <a:spcAft>
-                <a:spcPts val="800"/>
+                <a:spcPts val="400"/>
               </a:spcAft>
             </a:pPr>
             <a:r>
-              <a:rPr sz="2000" b="0" i="0">
-                <a:solidFill>
-                  <a:srgbClr val="333333"/>
-                </a:solidFill>
-                <a:latin typeface="Calibri"/>
-              </a:rPr>
-              <a:t>–   </a:t>
-            </a:r>
-            <a:r>
-              <a:rPr sz="2000" b="1" i="0">
-                <a:solidFill>
-                  <a:srgbClr val="333333"/>
-                </a:solidFill>
-                <a:latin typeface="Calibri"/>
-              </a:rPr>
-              <a:t>Herramienta:</a:t>
-            </a:r>
-            <a:r>
-              <a:rPr sz="2000" b="0" i="0">
-                <a:solidFill>
-                  <a:srgbClr val="333333"/>
-                </a:solidFill>
-                <a:latin typeface="Calibri"/>
-              </a:rPr>
-              <a:t> Google Docs · draw.io · Figma o Penpot</a:t>
+              <a:rPr sz="1400" b="0" i="0">
+                <a:solidFill>
+                  <a:srgbClr val="FFFFFF"/>
+                </a:solidFill>
+                <a:latin typeface="Calibri"/>
+              </a:rPr>
+              <a:t>00:00-01:30 | PROBLEMA    | Huellitas: fichas extraviadas, 8 min por historial, cero metricas</a:t>
             </a:r>
           </a:p>
           <a:p>
             <a:pPr>
               <a:spcAft>
-                <a:spcPts val="800"/>
+                <a:spcPts val="400"/>
               </a:spcAft>
             </a:pPr>
             <a:r>
-              <a:rPr sz="2000" b="0" i="0">
-                <a:solidFill>
-                  <a:srgbClr val="333333"/>
-                </a:solidFill>
-                <a:latin typeface="Calibri"/>
-              </a:rPr>
-              <a:t>–   </a:t>
-            </a:r>
-            <a:r>
-              <a:rPr sz="2000" b="1" i="0">
-                <a:solidFill>
-                  <a:srgbClr val="333333"/>
-                </a:solidFill>
-                <a:latin typeface="Calibri"/>
-              </a:rPr>
-              <a:t>Demo:</a:t>
-            </a:r>
-            <a:r>
-              <a:rPr sz="2000" b="0" i="0">
-                <a:solidFill>
-                  <a:srgbClr val="333333"/>
-                </a:solidFill>
-                <a:latin typeface="Calibri"/>
-              </a:rPr>
-              <a:t> El docente proyecta una sustentacion mal hecha y una bien hecha del mismo paquete VetCare, y luego arma en vivo la tabla de decisiones para justificar por que Historia_Clinica es una clase aparte de Mascota.</a:t>
+              <a:rPr sz="1400" b="0" i="0">
+                <a:solidFill>
+                  <a:srgbClr val="FFFFFF"/>
+                </a:solidFill>
+                <a:latin typeface="Calibri"/>
+              </a:rPr>
+              <a:t>01:30-03:00 | ALCANCE     | Lo que si entra y lo que quedo por fuera, con la razon</a:t>
             </a:r>
           </a:p>
           <a:p>
             <a:pPr>
               <a:spcAft>
-                <a:spcPts val="800"/>
+                <a:spcPts val="400"/>
               </a:spcAft>
             </a:pPr>
             <a:r>
-              <a:rPr sz="2000" b="0" i="0">
-                <a:solidFill>
-                  <a:srgbClr val="333333"/>
-                </a:solidFill>
-                <a:latin typeface="Calibri"/>
-              </a:rPr>
-              <a:t>–   Mismo dominio VetCare — no otro ejemplo. Aqui se diseña, no se programa.</a:t>
-            </a:r>
-          </a:p>
-        </p:txBody>
-      </p:sp>
-      <p:sp>
-        <p:nvSpPr>
-          <p:cNvPr id="6" name="TextBox 5"/>
+              <a:rPr sz="1400" b="0" i="0">
+                <a:solidFill>
+                  <a:srgbClr val="FFFFFF"/>
+                </a:solidFill>
+                <a:latin typeface="Calibri"/>
+              </a:rPr>
+              <a:t>03:00-05:00 | REQUISITOS  | Solo los 3 RF criticos y 2 RNF medibles; el resto en el documento</a:t>
+            </a:r>
+          </a:p>
+          <a:p>
+            <a:pPr>
+              <a:spcAft>
+                <a:spcPts val="400"/>
+              </a:spcAft>
+            </a:pPr>
+            <a:r>
+              <a:rPr sz="1400" b="0" i="0">
+                <a:solidFill>
+                  <a:srgbClr val="FFFFFF"/>
+                </a:solidFill>
+                <a:latin typeface="Calibri"/>
+              </a:rPr>
+              <a:t>05:00-07:00 | MODELO      | Casos de uso y clases: Mascota, Dueño, Historia_Clinica, Cita</a:t>
+            </a:r>
+          </a:p>
+          <a:p>
+            <a:pPr>
+              <a:spcAft>
+                <a:spcPts val="400"/>
+              </a:spcAft>
+            </a:pPr>
+            <a:r>
+              <a:rPr sz="1400" b="0" i="0">
+                <a:solidFill>
+                  <a:srgbClr val="FFFFFF"/>
+                </a:solidFill>
+                <a:latin typeface="Calibri"/>
+              </a:rPr>
+              <a:t>07:00-09:00 | INTERFAZ    | Prototipo en vivo: registrar mascota -&gt; confirmacion -&gt; buscar</a:t>
+            </a:r>
+          </a:p>
+          <a:p>
+            <a:pPr>
+              <a:spcAft>
+                <a:spcPts val="400"/>
+              </a:spcAft>
+            </a:pPr>
+            <a:r>
+              <a:rPr sz="1400" b="0" i="0">
+                <a:solidFill>
+                  <a:srgbClr val="FFFFFF"/>
+                </a:solidFill>
+                <a:latin typeface="Calibri"/>
+              </a:rPr>
+              <a:t>09:00-11:00 | DECISIONES  | 3 decisiones con alternativa descartada, criterio y consecuencia</a:t>
+            </a:r>
+          </a:p>
+          <a:p>
+            <a:pPr>
+              <a:spcAft>
+                <a:spcPts val="400"/>
+              </a:spcAft>
+            </a:pPr>
+            <a:r>
+              <a:rPr sz="1400" b="0" i="0">
+                <a:solidFill>
+                  <a:srgbClr val="FFFFFF"/>
+                </a:solidFill>
+                <a:latin typeface="Calibri"/>
+              </a:rPr>
+              <a:t>11:00-11:30 | RIESGOS     | Que queda abierto y que recibe Programacion II</a:t>
+            </a:r>
+          </a:p>
+          <a:p>
+            <a:pPr>
+              <a:spcAft>
+                <a:spcPts val="400"/>
+              </a:spcAft>
+            </a:pPr>
+            <a:r>
+              <a:rPr sz="1400" b="0" i="0">
+                <a:solidFill>
+                  <a:srgbClr val="FFFFFF"/>
+                </a:solidFill>
+                <a:latin typeface="Calibri"/>
+              </a:rPr>
+              <a:t>11:30-12:00 | CIERRE      | Una frase de valor para la clinica, no un resumen</a:t>
+            </a:r>
+          </a:p>
+          <a:p>
+            <a:pPr>
+              <a:spcAft>
+                <a:spcPts val="400"/>
+              </a:spcAft>
+            </a:pPr>
+            <a:r>
+              <a:rPr sz="1400" b="0" i="0">
+                <a:solidFill>
+                  <a:srgbClr val="FFFFFF"/>
+                </a:solidFill>
+                <a:latin typeface="Calibri"/>
+              </a:rPr>
+              <a:t>--- Reparto: todos hablan minimo 2 minutos y todos responden minimo 1 pregunta</a:t>
+            </a:r>
+          </a:p>
+          <a:p>
+            <a:pPr>
+              <a:spcAft>
+                <a:spcPts val="400"/>
+              </a:spcAft>
+            </a:pPr>
+            <a:r>
+              <a:rPr sz="1400" b="0" i="0">
+                <a:solidFill>
+                  <a:srgbClr val="FFFFFF"/>
+                </a:solidFill>
+                <a:latin typeface="Calibri"/>
+              </a:rPr>
+              <a:t>--- Regla: nadie lee la diapositiva; la diapositiva es el plano, la voz es el argumento</a:t>
+            </a:r>
+          </a:p>
+          <a:p>
+            <a:pPr>
+              <a:spcAft>
+                <a:spcPts val="400"/>
+              </a:spcAft>
+            </a:pPr>
+            <a:r>
+              <a:rPr sz="1400" b="0" i="0">
+                <a:solidFill>
+                  <a:srgbClr val="FFFFFF"/>
+                </a:solidFill>
+                <a:latin typeface="Calibri"/>
+              </a:rPr>
+              <a:t>--- Cada pantalla proyectada debe poder señalar el RF que la origina</a:t>
+            </a:r>
+          </a:p>
+          <a:p>
+            <a:pPr>
+              <a:spcAft>
+                <a:spcPts val="400"/>
+              </a:spcAft>
+            </a:pPr>
+            <a:r>
+              <a:rPr sz="1400" b="0" i="0">
+                <a:solidFill>
+                  <a:srgbClr val="FFFFFF"/>
+                </a:solidFill>
+                <a:latin typeface="Calibri"/>
+              </a:rPr>
+              <a:t>--- Plan B: capturas del prototipo, PDF descargado y diagramas exportados a imagen</a:t>
+            </a:r>
+          </a:p>
+        </p:txBody>
+      </p:sp>
+      <p:sp>
+        <p:nvSpPr>
+          <p:cNvPr id="9" name="TextBox 8"/>
+          <p:cNvSpPr txBox="1"/>
+          <p:nvPr/>
+        </p:nvSpPr>
+        <p:spPr>
+          <a:xfrm>
+            <a:off x="457200" y="6080760"/>
+            <a:ext cx="11277295" cy="320040"/>
+          </a:xfrm>
+          <a:prstGeom prst="rect">
+            <a:avLst/>
+          </a:prstGeom>
+          <a:noFill/>
+        </p:spPr>
+        <p:txBody>
+          <a:bodyPr wrap="square">
+            <a:spAutoFit/>
+          </a:bodyPr>
+          <a:lstStyle/>
+          <a:p>
+            <a:pPr algn="ctr"/>
+            <a:r>
+              <a:rPr sz="1200" b="0" i="1">
+                <a:solidFill>
+                  <a:srgbClr val="666666"/>
+                </a:solidFill>
+                <a:latin typeface="Calibri"/>
+              </a:rPr>
+              <a:t>Un paquete de diseño no se narra en orden cronologico: se defiende en orden de embudo, del dolor a la decision.</a:t>
+            </a:r>
+          </a:p>
+        </p:txBody>
+      </p:sp>
+      <p:sp>
+        <p:nvSpPr>
+          <p:cNvPr id="10" name="TextBox 9"/>
           <p:cNvSpPr txBox="1"/>
           <p:nvPr/>
         </p:nvSpPr>
@@ -4626,7 +4607,7 @@
         <p:spPr>
           <a:xfrm>
             <a:off x="0" y="0"/>
-            <a:ext cx="12191695" cy="1170432"/>
+            <a:ext cx="12191695" cy="960120"/>
           </a:xfrm>
           <a:prstGeom prst="rect">
             <a:avLst/>
@@ -4668,7 +4649,7 @@
         </p:nvSpPr>
         <p:spPr>
           <a:xfrm>
-            <a:off x="0" y="1170432"/>
+            <a:off x="0" y="960120"/>
             <a:ext cx="12191695" cy="41148"/>
           </a:xfrm>
           <a:prstGeom prst="rect">
@@ -4712,7 +4693,7 @@
         <p:spPr>
           <a:xfrm>
             <a:off x="457200" y="164592"/>
-            <a:ext cx="11277295" cy="384048"/>
+            <a:ext cx="11277295" cy="502920"/>
           </a:xfrm>
           <a:prstGeom prst="rect">
             <a:avLst/>
@@ -4732,7 +4713,7 @@
                 </a:solidFill>
                 <a:latin typeface="Calibri"/>
               </a:rPr>
-              <a:t>Herramientas de hoy</a:t>
+              <a:t>Demo del dia</a:t>
             </a:r>
           </a:p>
         </p:txBody>
@@ -4745,8 +4726,8 @@
         </p:nvSpPr>
         <p:spPr>
           <a:xfrm>
-            <a:off x="457200" y="566928"/>
-            <a:ext cx="11277295" cy="411480"/>
+            <a:off x="457200" y="1170432"/>
+            <a:ext cx="11277295" cy="5230368"/>
           </a:xfrm>
           <a:prstGeom prst="rect">
             <a:avLst/>
@@ -4759,1149 +4740,94 @@
           </a:bodyPr>
           <a:lstStyle/>
           <a:p>
-            <a:r>
-              <a:rPr sz="1400" b="0" i="0">
-                <a:solidFill>
-                  <a:srgbClr val="B8D8EE"/>
-                </a:solidFill>
-                <a:latin typeface="Calibri"/>
-              </a:rPr>
-              <a:t>Gratis · funcionan en el navegador</a:t>
-            </a:r>
-          </a:p>
-        </p:txBody>
-      </p:sp>
-      <p:sp>
-        <p:nvSpPr>
-          <p:cNvPr id="6" name="Rounded Rectangle 5"/>
-          <p:cNvSpPr/>
-          <p:nvPr/>
-        </p:nvSpPr>
-        <p:spPr>
-          <a:xfrm>
-            <a:off x="457200" y="1591056"/>
-            <a:ext cx="3624986" cy="2299716"/>
-          </a:xfrm>
-          <a:prstGeom prst="roundRect">
-            <a:avLst>
-              <a:gd name="adj" fmla="val 12000"/>
-            </a:avLst>
-          </a:prstGeom>
-          <a:solidFill>
-            <a:srgbClr val="F2F2F2"/>
-          </a:solidFill>
-          <a:ln>
-            <a:noFill/>
-          </a:ln>
-        </p:spPr>
-        <p:style>
-          <a:lnRef idx="1">
-            <a:schemeClr val="accent1"/>
-          </a:lnRef>
-          <a:fillRef idx="3">
-            <a:schemeClr val="accent1"/>
-          </a:fillRef>
-          <a:effectRef idx="2">
-            <a:schemeClr val="accent1"/>
-          </a:effectRef>
-          <a:fontRef idx="minor">
-            <a:schemeClr val="lt1"/>
-          </a:fontRef>
-        </p:style>
-        <p:txBody>
-          <a:bodyPr rtlCol="0" anchor="ctr"/>
-          <a:lstStyle/>
-          <a:p>
-            <a:pPr algn="ctr"/>
-          </a:p>
-        </p:txBody>
-      </p:sp>
-      <p:sp>
-        <p:nvSpPr>
-          <p:cNvPr id="7" name="Rectangle 6"/>
-          <p:cNvSpPr/>
-          <p:nvPr/>
-        </p:nvSpPr>
-        <p:spPr>
-          <a:xfrm>
-            <a:off x="457200" y="1591056"/>
-            <a:ext cx="3624986" cy="64008"/>
-          </a:xfrm>
-          <a:prstGeom prst="rect">
-            <a:avLst/>
-          </a:prstGeom>
-          <a:solidFill>
-            <a:srgbClr val="095292"/>
-          </a:solidFill>
-          <a:ln>
-            <a:noFill/>
-          </a:ln>
-        </p:spPr>
-        <p:style>
-          <a:lnRef idx="1">
-            <a:schemeClr val="accent1"/>
-          </a:lnRef>
-          <a:fillRef idx="3">
-            <a:schemeClr val="accent1"/>
-          </a:fillRef>
-          <a:effectRef idx="2">
-            <a:schemeClr val="accent1"/>
-          </a:effectRef>
-          <a:fontRef idx="minor">
-            <a:schemeClr val="lt1"/>
-          </a:fontRef>
-        </p:style>
-        <p:txBody>
-          <a:bodyPr rtlCol="0" anchor="ctr"/>
-          <a:lstStyle/>
-          <a:p>
-            <a:pPr algn="ctr"/>
-          </a:p>
-        </p:txBody>
-      </p:sp>
-      <p:sp>
-        <p:nvSpPr>
-          <p:cNvPr id="8" name="Rectangle 7"/>
-          <p:cNvSpPr/>
-          <p:nvPr/>
-        </p:nvSpPr>
-        <p:spPr>
-          <a:xfrm>
-            <a:off x="457200" y="1655064"/>
-            <a:ext cx="3624986" cy="27432"/>
-          </a:xfrm>
-          <a:prstGeom prst="rect">
-            <a:avLst/>
-          </a:prstGeom>
-          <a:solidFill>
-            <a:srgbClr val="FFD000"/>
-          </a:solidFill>
-          <a:ln>
-            <a:noFill/>
-          </a:ln>
-        </p:spPr>
-        <p:style>
-          <a:lnRef idx="1">
-            <a:schemeClr val="accent1"/>
-          </a:lnRef>
-          <a:fillRef idx="3">
-            <a:schemeClr val="accent1"/>
-          </a:fillRef>
-          <a:effectRef idx="2">
-            <a:schemeClr val="accent1"/>
-          </a:effectRef>
-          <a:fontRef idx="minor">
-            <a:schemeClr val="lt1"/>
-          </a:fontRef>
-        </p:style>
-        <p:txBody>
-          <a:bodyPr rtlCol="0" anchor="ctr"/>
-          <a:lstStyle/>
-          <a:p>
-            <a:pPr algn="ctr"/>
-          </a:p>
-        </p:txBody>
-      </p:sp>
-      <p:pic>
-        <p:nvPicPr>
-          <p:cNvPr id="9" name="Picture 8" descr="drawio.png"/>
-          <p:cNvPicPr>
-            <a:picLocks noChangeAspect="1"/>
-          </p:cNvPicPr>
-          <p:nvPr/>
-        </p:nvPicPr>
-        <p:blipFill>
-          <a:blip r:embed="rId2"/>
-          <a:stretch>
-            <a:fillRect/>
-          </a:stretch>
-        </p:blipFill>
-        <p:spPr>
-          <a:xfrm>
-            <a:off x="1659331" y="1847087"/>
-            <a:ext cx="1220724" cy="1220724"/>
-          </a:xfrm>
-          <a:prstGeom prst="rect">
-            <a:avLst/>
-          </a:prstGeom>
-        </p:spPr>
-      </p:pic>
-      <p:sp>
-        <p:nvSpPr>
-          <p:cNvPr id="10" name="TextBox 9"/>
-          <p:cNvSpPr txBox="1"/>
-          <p:nvPr/>
-        </p:nvSpPr>
-        <p:spPr>
-          <a:xfrm>
-            <a:off x="530352" y="3159251"/>
-            <a:ext cx="3478682" cy="621792"/>
-          </a:xfrm>
-          <a:prstGeom prst="rect">
-            <a:avLst/>
-          </a:prstGeom>
-          <a:noFill/>
-        </p:spPr>
-        <p:txBody>
-          <a:bodyPr wrap="square" anchor="t"/>
-          <a:lstStyle/>
-          <a:p>
-            <a:pPr algn="ctr"/>
-            <a:r>
-              <a:rPr sz="1300" b="1" i="0">
-                <a:solidFill>
-                  <a:srgbClr val="095292"/>
-                </a:solidFill>
-                <a:latin typeface="Calibri"/>
-              </a:rPr>
-              <a:t>Draw.Io</a:t>
-            </a:r>
-          </a:p>
-          <a:p>
-            <a:pPr algn="ctr">
-              <a:spcBef>
-                <a:spcPts val="200"/>
-              </a:spcBef>
+            <a:pPr>
+              <a:spcAft>
+                <a:spcPts val="800"/>
+              </a:spcAft>
             </a:pPr>
             <a:r>
-              <a:rPr sz="1000" b="0" i="0">
-                <a:solidFill>
-                  <a:srgbClr val="666666"/>
-                </a:solidFill>
-                <a:latin typeface="Calibri"/>
-              </a:rPr>
-              <a:t>Diagramas UML y de contexto</a:t>
-            </a:r>
-          </a:p>
-        </p:txBody>
-      </p:sp>
-      <p:sp>
-        <p:nvSpPr>
-          <p:cNvPr id="11" name="Rounded Rectangle 10"/>
-          <p:cNvSpPr/>
-          <p:nvPr/>
-        </p:nvSpPr>
-        <p:spPr>
-          <a:xfrm>
-            <a:off x="4283354" y="1591056"/>
-            <a:ext cx="3624986" cy="2299716"/>
-          </a:xfrm>
-          <a:prstGeom prst="roundRect">
-            <a:avLst>
-              <a:gd name="adj" fmla="val 12000"/>
-            </a:avLst>
-          </a:prstGeom>
-          <a:solidFill>
-            <a:srgbClr val="F2F2F2"/>
-          </a:solidFill>
-          <a:ln>
-            <a:noFill/>
-          </a:ln>
-        </p:spPr>
-        <p:style>
-          <a:lnRef idx="1">
-            <a:schemeClr val="accent1"/>
-          </a:lnRef>
-          <a:fillRef idx="3">
-            <a:schemeClr val="accent1"/>
-          </a:fillRef>
-          <a:effectRef idx="2">
-            <a:schemeClr val="accent1"/>
-          </a:effectRef>
-          <a:fontRef idx="minor">
-            <a:schemeClr val="lt1"/>
-          </a:fontRef>
-        </p:style>
-        <p:txBody>
-          <a:bodyPr rtlCol="0" anchor="ctr"/>
-          <a:lstStyle/>
-          <a:p>
-            <a:pPr algn="ctr"/>
-          </a:p>
-        </p:txBody>
-      </p:sp>
-      <p:sp>
-        <p:nvSpPr>
-          <p:cNvPr id="12" name="Rectangle 11"/>
-          <p:cNvSpPr/>
-          <p:nvPr/>
-        </p:nvSpPr>
-        <p:spPr>
-          <a:xfrm>
-            <a:off x="4283354" y="1591056"/>
-            <a:ext cx="3624986" cy="64008"/>
-          </a:xfrm>
-          <a:prstGeom prst="rect">
-            <a:avLst/>
-          </a:prstGeom>
-          <a:solidFill>
-            <a:srgbClr val="095292"/>
-          </a:solidFill>
-          <a:ln>
-            <a:noFill/>
-          </a:ln>
-        </p:spPr>
-        <p:style>
-          <a:lnRef idx="1">
-            <a:schemeClr val="accent1"/>
-          </a:lnRef>
-          <a:fillRef idx="3">
-            <a:schemeClr val="accent1"/>
-          </a:fillRef>
-          <a:effectRef idx="2">
-            <a:schemeClr val="accent1"/>
-          </a:effectRef>
-          <a:fontRef idx="minor">
-            <a:schemeClr val="lt1"/>
-          </a:fontRef>
-        </p:style>
-        <p:txBody>
-          <a:bodyPr rtlCol="0" anchor="ctr"/>
-          <a:lstStyle/>
-          <a:p>
-            <a:pPr algn="ctr"/>
-          </a:p>
-        </p:txBody>
-      </p:sp>
-      <p:sp>
-        <p:nvSpPr>
-          <p:cNvPr id="13" name="Rectangle 12"/>
-          <p:cNvSpPr/>
-          <p:nvPr/>
-        </p:nvSpPr>
-        <p:spPr>
-          <a:xfrm>
-            <a:off x="4283354" y="1655064"/>
-            <a:ext cx="3624986" cy="27432"/>
-          </a:xfrm>
-          <a:prstGeom prst="rect">
-            <a:avLst/>
-          </a:prstGeom>
-          <a:solidFill>
-            <a:srgbClr val="FFD000"/>
-          </a:solidFill>
-          <a:ln>
-            <a:noFill/>
-          </a:ln>
-        </p:spPr>
-        <p:style>
-          <a:lnRef idx="1">
-            <a:schemeClr val="accent1"/>
-          </a:lnRef>
-          <a:fillRef idx="3">
-            <a:schemeClr val="accent1"/>
-          </a:fillRef>
-          <a:effectRef idx="2">
-            <a:schemeClr val="accent1"/>
-          </a:effectRef>
-          <a:fontRef idx="minor">
-            <a:schemeClr val="lt1"/>
-          </a:fontRef>
-        </p:style>
-        <p:txBody>
-          <a:bodyPr rtlCol="0" anchor="ctr"/>
-          <a:lstStyle/>
-          <a:p>
-            <a:pPr algn="ctr"/>
-          </a:p>
-        </p:txBody>
-      </p:sp>
-      <p:pic>
-        <p:nvPicPr>
-          <p:cNvPr id="14" name="Picture 13" descr="google_docs.png"/>
-          <p:cNvPicPr>
-            <a:picLocks noChangeAspect="1"/>
-          </p:cNvPicPr>
-          <p:nvPr/>
-        </p:nvPicPr>
-        <p:blipFill>
-          <a:blip r:embed="rId3"/>
-          <a:stretch>
-            <a:fillRect/>
-          </a:stretch>
-        </p:blipFill>
-        <p:spPr>
-          <a:xfrm>
-            <a:off x="5485485" y="1847087"/>
-            <a:ext cx="1220724" cy="1220724"/>
-          </a:xfrm>
-          <a:prstGeom prst="rect">
-            <a:avLst/>
-          </a:prstGeom>
-        </p:spPr>
-      </p:pic>
-      <p:sp>
-        <p:nvSpPr>
-          <p:cNvPr id="15" name="TextBox 14"/>
-          <p:cNvSpPr txBox="1"/>
-          <p:nvPr/>
-        </p:nvSpPr>
-        <p:spPr>
-          <a:xfrm>
-            <a:off x="4356506" y="3159251"/>
-            <a:ext cx="3478682" cy="621792"/>
-          </a:xfrm>
-          <a:prstGeom prst="rect">
-            <a:avLst/>
-          </a:prstGeom>
-          <a:noFill/>
-        </p:spPr>
-        <p:txBody>
-          <a:bodyPr wrap="square" anchor="t"/>
-          <a:lstStyle/>
-          <a:p>
-            <a:pPr algn="ctr"/>
-            <a:r>
-              <a:rPr sz="1300" b="1" i="0">
-                <a:solidFill>
-                  <a:srgbClr val="095292"/>
-                </a:solidFill>
-                <a:latin typeface="Calibri"/>
-              </a:rPr>
-              <a:t>google docs</a:t>
-            </a:r>
-          </a:p>
-          <a:p>
-            <a:pPr algn="ctr">
-              <a:spcBef>
-                <a:spcPts val="200"/>
-              </a:spcBef>
+              <a:rPr sz="2000" b="0" i="0">
+                <a:solidFill>
+                  <a:srgbClr val="333333"/>
+                </a:solidFill>
+                <a:latin typeface="Calibri"/>
+              </a:rPr>
+              <a:t>–   </a:t>
+            </a:r>
+            <a:r>
+              <a:rPr sz="2000" b="1" i="0">
+                <a:solidFill>
+                  <a:srgbClr val="333333"/>
+                </a:solidFill>
+                <a:latin typeface="Calibri"/>
+              </a:rPr>
+              <a:t>Herramienta:</a:t>
+            </a:r>
+            <a:r>
+              <a:rPr sz="2000" b="0" i="0">
+                <a:solidFill>
+                  <a:srgbClr val="333333"/>
+                </a:solidFill>
+                <a:latin typeface="Calibri"/>
+              </a:rPr>
+              <a:t> Google Docs · draw.io · Figma o Penpot</a:t>
+            </a:r>
+          </a:p>
+          <a:p>
+            <a:pPr>
+              <a:spcAft>
+                <a:spcPts val="800"/>
+              </a:spcAft>
             </a:pPr>
             <a:r>
-              <a:rPr sz="1000" b="0" i="0">
-                <a:solidFill>
-                  <a:srgbClr val="666666"/>
-                </a:solidFill>
-                <a:latin typeface="Calibri"/>
-              </a:rPr>
-              <a:t>Documentos del paquete de diseño</a:t>
-            </a:r>
-          </a:p>
-        </p:txBody>
-      </p:sp>
-      <p:sp>
-        <p:nvSpPr>
-          <p:cNvPr id="16" name="Rounded Rectangle 15"/>
-          <p:cNvSpPr/>
-          <p:nvPr/>
-        </p:nvSpPr>
-        <p:spPr>
-          <a:xfrm>
-            <a:off x="8109508" y="1591056"/>
-            <a:ext cx="3624986" cy="2299716"/>
-          </a:xfrm>
-          <a:prstGeom prst="roundRect">
-            <a:avLst>
-              <a:gd name="adj" fmla="val 12000"/>
-            </a:avLst>
-          </a:prstGeom>
-          <a:solidFill>
-            <a:srgbClr val="F2F2F2"/>
-          </a:solidFill>
-          <a:ln>
-            <a:noFill/>
-          </a:ln>
-        </p:spPr>
-        <p:style>
-          <a:lnRef idx="1">
-            <a:schemeClr val="accent1"/>
-          </a:lnRef>
-          <a:fillRef idx="3">
-            <a:schemeClr val="accent1"/>
-          </a:fillRef>
-          <a:effectRef idx="2">
-            <a:schemeClr val="accent1"/>
-          </a:effectRef>
-          <a:fontRef idx="minor">
-            <a:schemeClr val="lt1"/>
-          </a:fontRef>
-        </p:style>
-        <p:txBody>
-          <a:bodyPr rtlCol="0" anchor="ctr"/>
-          <a:lstStyle/>
-          <a:p>
-            <a:pPr algn="ctr"/>
-          </a:p>
-        </p:txBody>
-      </p:sp>
-      <p:sp>
-        <p:nvSpPr>
-          <p:cNvPr id="17" name="Rectangle 16"/>
-          <p:cNvSpPr/>
-          <p:nvPr/>
-        </p:nvSpPr>
-        <p:spPr>
-          <a:xfrm>
-            <a:off x="8109508" y="1591056"/>
-            <a:ext cx="3624986" cy="64008"/>
-          </a:xfrm>
-          <a:prstGeom prst="rect">
-            <a:avLst/>
-          </a:prstGeom>
-          <a:solidFill>
-            <a:srgbClr val="095292"/>
-          </a:solidFill>
-          <a:ln>
-            <a:noFill/>
-          </a:ln>
-        </p:spPr>
-        <p:style>
-          <a:lnRef idx="1">
-            <a:schemeClr val="accent1"/>
-          </a:lnRef>
-          <a:fillRef idx="3">
-            <a:schemeClr val="accent1"/>
-          </a:fillRef>
-          <a:effectRef idx="2">
-            <a:schemeClr val="accent1"/>
-          </a:effectRef>
-          <a:fontRef idx="minor">
-            <a:schemeClr val="lt1"/>
-          </a:fontRef>
-        </p:style>
-        <p:txBody>
-          <a:bodyPr rtlCol="0" anchor="ctr"/>
-          <a:lstStyle/>
-          <a:p>
-            <a:pPr algn="ctr"/>
-          </a:p>
-        </p:txBody>
-      </p:sp>
-      <p:sp>
-        <p:nvSpPr>
-          <p:cNvPr id="18" name="Rectangle 17"/>
-          <p:cNvSpPr/>
-          <p:nvPr/>
-        </p:nvSpPr>
-        <p:spPr>
-          <a:xfrm>
-            <a:off x="8109508" y="1655064"/>
-            <a:ext cx="3624986" cy="27432"/>
-          </a:xfrm>
-          <a:prstGeom prst="rect">
-            <a:avLst/>
-          </a:prstGeom>
-          <a:solidFill>
-            <a:srgbClr val="FFD000"/>
-          </a:solidFill>
-          <a:ln>
-            <a:noFill/>
-          </a:ln>
-        </p:spPr>
-        <p:style>
-          <a:lnRef idx="1">
-            <a:schemeClr val="accent1"/>
-          </a:lnRef>
-          <a:fillRef idx="3">
-            <a:schemeClr val="accent1"/>
-          </a:fillRef>
-          <a:effectRef idx="2">
-            <a:schemeClr val="accent1"/>
-          </a:effectRef>
-          <a:fontRef idx="minor">
-            <a:schemeClr val="lt1"/>
-          </a:fontRef>
-        </p:style>
-        <p:txBody>
-          <a:bodyPr rtlCol="0" anchor="ctr"/>
-          <a:lstStyle/>
-          <a:p>
-            <a:pPr algn="ctr"/>
-          </a:p>
-        </p:txBody>
-      </p:sp>
-      <p:sp>
-        <p:nvSpPr>
-          <p:cNvPr id="19" name="Rounded Rectangle 18"/>
-          <p:cNvSpPr/>
-          <p:nvPr/>
-        </p:nvSpPr>
-        <p:spPr>
-          <a:xfrm>
-            <a:off x="9311640" y="1847087"/>
-            <a:ext cx="1220724" cy="1220724"/>
-          </a:xfrm>
-          <a:prstGeom prst="roundRect">
-            <a:avLst>
-              <a:gd name="adj" fmla="val 12000"/>
-            </a:avLst>
-          </a:prstGeom>
-          <a:solidFill>
-            <a:srgbClr val="E8F4FA"/>
-          </a:solidFill>
-          <a:ln>
-            <a:noFill/>
-          </a:ln>
-        </p:spPr>
-        <p:style>
-          <a:lnRef idx="1">
-            <a:schemeClr val="accent1"/>
-          </a:lnRef>
-          <a:fillRef idx="3">
-            <a:schemeClr val="accent1"/>
-          </a:fillRef>
-          <a:effectRef idx="2">
-            <a:schemeClr val="accent1"/>
-          </a:effectRef>
-          <a:fontRef idx="minor">
-            <a:schemeClr val="lt1"/>
-          </a:fontRef>
-        </p:style>
-        <p:txBody>
-          <a:bodyPr rtlCol="0" anchor="ctr"/>
-          <a:lstStyle/>
-          <a:p>
-            <a:pPr algn="ctr"/>
-          </a:p>
-        </p:txBody>
-      </p:sp>
-      <p:sp>
-        <p:nvSpPr>
-          <p:cNvPr id="20" name="TextBox 19"/>
-          <p:cNvSpPr txBox="1"/>
-          <p:nvPr/>
-        </p:nvSpPr>
-        <p:spPr>
-          <a:xfrm>
-            <a:off x="9311640" y="1847087"/>
-            <a:ext cx="1220724" cy="1220724"/>
-          </a:xfrm>
-          <a:prstGeom prst="rect">
-            <a:avLst/>
-          </a:prstGeom>
-          <a:noFill/>
-        </p:spPr>
-        <p:txBody>
-          <a:bodyPr wrap="square" anchor="ctr"/>
-          <a:lstStyle/>
-          <a:p>
-            <a:pPr algn="ctr"/>
-            <a:r>
-              <a:rPr sz="1600" b="1" i="0">
-                <a:solidFill>
-                  <a:srgbClr val="095292"/>
-                </a:solidFill>
-                <a:latin typeface="Calibri"/>
-              </a:rPr>
-              <a:t>F</a:t>
-            </a:r>
-          </a:p>
-        </p:txBody>
-      </p:sp>
-      <p:sp>
-        <p:nvSpPr>
-          <p:cNvPr id="21" name="TextBox 20"/>
-          <p:cNvSpPr txBox="1"/>
-          <p:nvPr/>
-        </p:nvSpPr>
-        <p:spPr>
-          <a:xfrm>
-            <a:off x="8182660" y="3159251"/>
-            <a:ext cx="3478682" cy="621792"/>
-          </a:xfrm>
-          <a:prstGeom prst="rect">
-            <a:avLst/>
-          </a:prstGeom>
-          <a:noFill/>
-        </p:spPr>
-        <p:txBody>
-          <a:bodyPr wrap="square" anchor="t"/>
-          <a:lstStyle/>
-          <a:p>
-            <a:pPr algn="ctr"/>
-            <a:r>
-              <a:rPr sz="1300" b="1" i="0">
-                <a:solidFill>
-                  <a:srgbClr val="095292"/>
-                </a:solidFill>
-                <a:latin typeface="Calibri"/>
-              </a:rPr>
-              <a:t>Figma</a:t>
-            </a:r>
-          </a:p>
-          <a:p>
-            <a:pPr algn="ctr">
-              <a:spcBef>
-                <a:spcPts val="200"/>
-              </a:spcBef>
+              <a:rPr sz="2000" b="0" i="0">
+                <a:solidFill>
+                  <a:srgbClr val="333333"/>
+                </a:solidFill>
+                <a:latin typeface="Calibri"/>
+              </a:rPr>
+              <a:t>–   </a:t>
+            </a:r>
+            <a:r>
+              <a:rPr sz="2000" b="1" i="0">
+                <a:solidFill>
+                  <a:srgbClr val="333333"/>
+                </a:solidFill>
+                <a:latin typeface="Calibri"/>
+              </a:rPr>
+              <a:t>Demo:</a:t>
+            </a:r>
+            <a:r>
+              <a:rPr sz="2000" b="0" i="0">
+                <a:solidFill>
+                  <a:srgbClr val="333333"/>
+                </a:solidFill>
+                <a:latin typeface="Calibri"/>
+              </a:rPr>
+              <a:t> El docente proyecta una sustentacion mal hecha y una bien hecha del mismo paquete VetCare, y luego arma en vivo la tabla de decisiones para justificar por que Historia_Clinica es una clase aparte de Mascota.</a:t>
+            </a:r>
+          </a:p>
+          <a:p>
+            <a:pPr>
+              <a:spcAft>
+                <a:spcPts val="800"/>
+              </a:spcAft>
             </a:pPr>
             <a:r>
-              <a:rPr sz="1000" b="0" i="0">
-                <a:solidFill>
-                  <a:srgbClr val="666666"/>
-                </a:solidFill>
-                <a:latin typeface="Calibri"/>
-              </a:rPr>
-              <a:t>Wireframes y prototipo navegable</a:t>
-            </a:r>
-          </a:p>
-        </p:txBody>
-      </p:sp>
-      <p:sp>
-        <p:nvSpPr>
-          <p:cNvPr id="22" name="Rounded Rectangle 21"/>
-          <p:cNvSpPr/>
-          <p:nvPr/>
-        </p:nvSpPr>
-        <p:spPr>
-          <a:xfrm>
-            <a:off x="2370277" y="4055364"/>
-            <a:ext cx="3624986" cy="2299716"/>
-          </a:xfrm>
-          <a:prstGeom prst="roundRect">
-            <a:avLst>
-              <a:gd name="adj" fmla="val 12000"/>
-            </a:avLst>
-          </a:prstGeom>
-          <a:solidFill>
-            <a:srgbClr val="F2F2F2"/>
-          </a:solidFill>
-          <a:ln>
-            <a:noFill/>
-          </a:ln>
-        </p:spPr>
-        <p:style>
-          <a:lnRef idx="1">
-            <a:schemeClr val="accent1"/>
-          </a:lnRef>
-          <a:fillRef idx="3">
-            <a:schemeClr val="accent1"/>
-          </a:fillRef>
-          <a:effectRef idx="2">
-            <a:schemeClr val="accent1"/>
-          </a:effectRef>
-          <a:fontRef idx="minor">
-            <a:schemeClr val="lt1"/>
-          </a:fontRef>
-        </p:style>
-        <p:txBody>
-          <a:bodyPr rtlCol="0" anchor="ctr"/>
-          <a:lstStyle/>
-          <a:p>
-            <a:pPr algn="ctr"/>
-          </a:p>
-        </p:txBody>
-      </p:sp>
-      <p:sp>
-        <p:nvSpPr>
-          <p:cNvPr id="23" name="Rectangle 22"/>
-          <p:cNvSpPr/>
-          <p:nvPr/>
-        </p:nvSpPr>
-        <p:spPr>
-          <a:xfrm>
-            <a:off x="2370277" y="4055364"/>
-            <a:ext cx="3624986" cy="64008"/>
-          </a:xfrm>
-          <a:prstGeom prst="rect">
-            <a:avLst/>
-          </a:prstGeom>
-          <a:solidFill>
-            <a:srgbClr val="095292"/>
-          </a:solidFill>
-          <a:ln>
-            <a:noFill/>
-          </a:ln>
-        </p:spPr>
-        <p:style>
-          <a:lnRef idx="1">
-            <a:schemeClr val="accent1"/>
-          </a:lnRef>
-          <a:fillRef idx="3">
-            <a:schemeClr val="accent1"/>
-          </a:fillRef>
-          <a:effectRef idx="2">
-            <a:schemeClr val="accent1"/>
-          </a:effectRef>
-          <a:fontRef idx="minor">
-            <a:schemeClr val="lt1"/>
-          </a:fontRef>
-        </p:style>
-        <p:txBody>
-          <a:bodyPr rtlCol="0" anchor="ctr"/>
-          <a:lstStyle/>
-          <a:p>
-            <a:pPr algn="ctr"/>
-          </a:p>
-        </p:txBody>
-      </p:sp>
-      <p:sp>
-        <p:nvSpPr>
-          <p:cNvPr id="24" name="Rectangle 23"/>
-          <p:cNvSpPr/>
-          <p:nvPr/>
-        </p:nvSpPr>
-        <p:spPr>
-          <a:xfrm>
-            <a:off x="2370277" y="4119372"/>
-            <a:ext cx="3624986" cy="27432"/>
-          </a:xfrm>
-          <a:prstGeom prst="rect">
-            <a:avLst/>
-          </a:prstGeom>
-          <a:solidFill>
-            <a:srgbClr val="FFD000"/>
-          </a:solidFill>
-          <a:ln>
-            <a:noFill/>
-          </a:ln>
-        </p:spPr>
-        <p:style>
-          <a:lnRef idx="1">
-            <a:schemeClr val="accent1"/>
-          </a:lnRef>
-          <a:fillRef idx="3">
-            <a:schemeClr val="accent1"/>
-          </a:fillRef>
-          <a:effectRef idx="2">
-            <a:schemeClr val="accent1"/>
-          </a:effectRef>
-          <a:fontRef idx="minor">
-            <a:schemeClr val="lt1"/>
-          </a:fontRef>
-        </p:style>
-        <p:txBody>
-          <a:bodyPr rtlCol="0" anchor="ctr"/>
-          <a:lstStyle/>
-          <a:p>
-            <a:pPr algn="ctr"/>
-          </a:p>
-        </p:txBody>
-      </p:sp>
-      <p:sp>
-        <p:nvSpPr>
-          <p:cNvPr id="25" name="Rounded Rectangle 24"/>
-          <p:cNvSpPr/>
-          <p:nvPr/>
-        </p:nvSpPr>
-        <p:spPr>
-          <a:xfrm>
-            <a:off x="3572408" y="4311396"/>
-            <a:ext cx="1220724" cy="1220724"/>
-          </a:xfrm>
-          <a:prstGeom prst="roundRect">
-            <a:avLst>
-              <a:gd name="adj" fmla="val 12000"/>
-            </a:avLst>
-          </a:prstGeom>
-          <a:solidFill>
-            <a:srgbClr val="E8F4FA"/>
-          </a:solidFill>
-          <a:ln>
-            <a:noFill/>
-          </a:ln>
-        </p:spPr>
-        <p:style>
-          <a:lnRef idx="1">
-            <a:schemeClr val="accent1"/>
-          </a:lnRef>
-          <a:fillRef idx="3">
-            <a:schemeClr val="accent1"/>
-          </a:fillRef>
-          <a:effectRef idx="2">
-            <a:schemeClr val="accent1"/>
-          </a:effectRef>
-          <a:fontRef idx="minor">
-            <a:schemeClr val="lt1"/>
-          </a:fontRef>
-        </p:style>
-        <p:txBody>
-          <a:bodyPr rtlCol="0" anchor="ctr"/>
-          <a:lstStyle/>
-          <a:p>
-            <a:pPr algn="ctr"/>
-          </a:p>
-        </p:txBody>
-      </p:sp>
-      <p:sp>
-        <p:nvSpPr>
-          <p:cNvPr id="26" name="TextBox 25"/>
-          <p:cNvSpPr txBox="1"/>
-          <p:nvPr/>
-        </p:nvSpPr>
-        <p:spPr>
-          <a:xfrm>
-            <a:off x="3572408" y="4311396"/>
-            <a:ext cx="1220724" cy="1220724"/>
-          </a:xfrm>
-          <a:prstGeom prst="rect">
-            <a:avLst/>
-          </a:prstGeom>
-          <a:noFill/>
-        </p:spPr>
-        <p:txBody>
-          <a:bodyPr wrap="square" anchor="ctr"/>
-          <a:lstStyle/>
-          <a:p>
-            <a:pPr algn="ctr"/>
-            <a:r>
-              <a:rPr sz="1600" b="1" i="0">
-                <a:solidFill>
-                  <a:srgbClr val="095292"/>
-                </a:solidFill>
-                <a:latin typeface="Calibri"/>
-              </a:rPr>
-              <a:t>P</a:t>
-            </a:r>
-          </a:p>
-        </p:txBody>
-      </p:sp>
-      <p:sp>
-        <p:nvSpPr>
-          <p:cNvPr id="27" name="TextBox 26"/>
-          <p:cNvSpPr txBox="1"/>
-          <p:nvPr/>
-        </p:nvSpPr>
-        <p:spPr>
-          <a:xfrm>
-            <a:off x="2443429" y="5623560"/>
-            <a:ext cx="3478682" cy="621792"/>
-          </a:xfrm>
-          <a:prstGeom prst="rect">
-            <a:avLst/>
-          </a:prstGeom>
-          <a:noFill/>
-        </p:spPr>
-        <p:txBody>
-          <a:bodyPr wrap="square" anchor="t"/>
-          <a:lstStyle/>
-          <a:p>
-            <a:pPr algn="ctr"/>
-            <a:r>
-              <a:rPr sz="1300" b="1" i="0">
-                <a:solidFill>
-                  <a:srgbClr val="095292"/>
-                </a:solidFill>
-                <a:latin typeface="Calibri"/>
-              </a:rPr>
-              <a:t>Penpot</a:t>
-            </a:r>
-          </a:p>
-          <a:p>
-            <a:pPr algn="ctr">
-              <a:spcBef>
-                <a:spcPts val="200"/>
-              </a:spcBef>
-            </a:pPr>
-            <a:r>
-              <a:rPr sz="1000" b="0" i="0">
-                <a:solidFill>
-                  <a:srgbClr val="666666"/>
-                </a:solidFill>
-                <a:latin typeface="Calibri"/>
-              </a:rPr>
-              <a:t>Alternativa libre a Figma</a:t>
-            </a:r>
-          </a:p>
-        </p:txBody>
-      </p:sp>
-      <p:sp>
-        <p:nvSpPr>
-          <p:cNvPr id="28" name="Rounded Rectangle 27"/>
-          <p:cNvSpPr/>
-          <p:nvPr/>
-        </p:nvSpPr>
-        <p:spPr>
-          <a:xfrm>
-            <a:off x="6196431" y="4055364"/>
-            <a:ext cx="3624986" cy="2299716"/>
-          </a:xfrm>
-          <a:prstGeom prst="roundRect">
-            <a:avLst>
-              <a:gd name="adj" fmla="val 12000"/>
-            </a:avLst>
-          </a:prstGeom>
-          <a:solidFill>
-            <a:srgbClr val="F2F2F2"/>
-          </a:solidFill>
-          <a:ln>
-            <a:noFill/>
-          </a:ln>
-        </p:spPr>
-        <p:style>
-          <a:lnRef idx="1">
-            <a:schemeClr val="accent1"/>
-          </a:lnRef>
-          <a:fillRef idx="3">
-            <a:schemeClr val="accent1"/>
-          </a:fillRef>
-          <a:effectRef idx="2">
-            <a:schemeClr val="accent1"/>
-          </a:effectRef>
-          <a:fontRef idx="minor">
-            <a:schemeClr val="lt1"/>
-          </a:fontRef>
-        </p:style>
-        <p:txBody>
-          <a:bodyPr rtlCol="0" anchor="ctr"/>
-          <a:lstStyle/>
-          <a:p>
-            <a:pPr algn="ctr"/>
-          </a:p>
-        </p:txBody>
-      </p:sp>
-      <p:sp>
-        <p:nvSpPr>
-          <p:cNvPr id="29" name="Rectangle 28"/>
-          <p:cNvSpPr/>
-          <p:nvPr/>
-        </p:nvSpPr>
-        <p:spPr>
-          <a:xfrm>
-            <a:off x="6196431" y="4055364"/>
-            <a:ext cx="3624986" cy="64008"/>
-          </a:xfrm>
-          <a:prstGeom prst="rect">
-            <a:avLst/>
-          </a:prstGeom>
-          <a:solidFill>
-            <a:srgbClr val="095292"/>
-          </a:solidFill>
-          <a:ln>
-            <a:noFill/>
-          </a:ln>
-        </p:spPr>
-        <p:style>
-          <a:lnRef idx="1">
-            <a:schemeClr val="accent1"/>
-          </a:lnRef>
-          <a:fillRef idx="3">
-            <a:schemeClr val="accent1"/>
-          </a:fillRef>
-          <a:effectRef idx="2">
-            <a:schemeClr val="accent1"/>
-          </a:effectRef>
-          <a:fontRef idx="minor">
-            <a:schemeClr val="lt1"/>
-          </a:fontRef>
-        </p:style>
-        <p:txBody>
-          <a:bodyPr rtlCol="0" anchor="ctr"/>
-          <a:lstStyle/>
-          <a:p>
-            <a:pPr algn="ctr"/>
-          </a:p>
-        </p:txBody>
-      </p:sp>
-      <p:sp>
-        <p:nvSpPr>
-          <p:cNvPr id="30" name="Rectangle 29"/>
-          <p:cNvSpPr/>
-          <p:nvPr/>
-        </p:nvSpPr>
-        <p:spPr>
-          <a:xfrm>
-            <a:off x="6196431" y="4119372"/>
-            <a:ext cx="3624986" cy="27432"/>
-          </a:xfrm>
-          <a:prstGeom prst="rect">
-            <a:avLst/>
-          </a:prstGeom>
-          <a:solidFill>
-            <a:srgbClr val="FFD000"/>
-          </a:solidFill>
-          <a:ln>
-            <a:noFill/>
-          </a:ln>
-        </p:spPr>
-        <p:style>
-          <a:lnRef idx="1">
-            <a:schemeClr val="accent1"/>
-          </a:lnRef>
-          <a:fillRef idx="3">
-            <a:schemeClr val="accent1"/>
-          </a:fillRef>
-          <a:effectRef idx="2">
-            <a:schemeClr val="accent1"/>
-          </a:effectRef>
-          <a:fontRef idx="minor">
-            <a:schemeClr val="lt1"/>
-          </a:fontRef>
-        </p:style>
-        <p:txBody>
-          <a:bodyPr rtlCol="0" anchor="ctr"/>
-          <a:lstStyle/>
-          <a:p>
-            <a:pPr algn="ctr"/>
-          </a:p>
-        </p:txBody>
-      </p:sp>
-      <p:pic>
-        <p:nvPicPr>
-          <p:cNvPr id="31" name="Picture 30" descr="examlab.png"/>
-          <p:cNvPicPr>
-            <a:picLocks noChangeAspect="1"/>
-          </p:cNvPicPr>
-          <p:nvPr/>
-        </p:nvPicPr>
-        <p:blipFill>
-          <a:blip r:embed="rId4"/>
-          <a:stretch>
-            <a:fillRect/>
-          </a:stretch>
-        </p:blipFill>
-        <p:spPr>
-          <a:xfrm>
-            <a:off x="7398562" y="4311396"/>
-            <a:ext cx="1220724" cy="1220724"/>
-          </a:xfrm>
-          <a:prstGeom prst="rect">
-            <a:avLst/>
-          </a:prstGeom>
-        </p:spPr>
-      </p:pic>
-      <p:sp>
-        <p:nvSpPr>
-          <p:cNvPr id="32" name="TextBox 31"/>
-          <p:cNvSpPr txBox="1"/>
-          <p:nvPr/>
-        </p:nvSpPr>
-        <p:spPr>
-          <a:xfrm>
-            <a:off x="6269583" y="5623560"/>
-            <a:ext cx="3478682" cy="621792"/>
-          </a:xfrm>
-          <a:prstGeom prst="rect">
-            <a:avLst/>
-          </a:prstGeom>
-          <a:noFill/>
-        </p:spPr>
-        <p:txBody>
-          <a:bodyPr wrap="square" anchor="t"/>
-          <a:lstStyle/>
-          <a:p>
-            <a:pPr algn="ctr"/>
-            <a:r>
-              <a:rPr sz="1300" b="1" i="0">
-                <a:solidFill>
-                  <a:srgbClr val="095292"/>
-                </a:solidFill>
-                <a:latin typeface="Calibri"/>
-              </a:rPr>
-              <a:t>la plataforma del curso</a:t>
-            </a:r>
-          </a:p>
-          <a:p>
-            <a:pPr algn="ctr">
-              <a:spcBef>
-                <a:spcPts val="200"/>
-              </a:spcBef>
-            </a:pPr>
-            <a:r>
-              <a:rPr sz="1000" b="0" i="0">
-                <a:solidFill>
-                  <a:srgbClr val="666666"/>
-                </a:solidFill>
-                <a:latin typeface="Calibri"/>
-              </a:rPr>
-              <a:t>Entrega del taller · en la fecha que indique el docente</a:t>
-            </a:r>
-          </a:p>
-        </p:txBody>
-      </p:sp>
-      <p:sp>
-        <p:nvSpPr>
-          <p:cNvPr id="33" name="TextBox 32"/>
+              <a:rPr sz="2000" b="0" i="0">
+                <a:solidFill>
+                  <a:srgbClr val="333333"/>
+                </a:solidFill>
+                <a:latin typeface="Calibri"/>
+              </a:rPr>
+              <a:t>–   Mismo dominio VetCare — no otro ejemplo. Aqui se diseña, no se programa.</a:t>
+            </a:r>
+          </a:p>
+        </p:txBody>
+      </p:sp>
+      <p:sp>
+        <p:nvSpPr>
+          <p:cNvPr id="6" name="TextBox 5"/>
           <p:cNvSpPr txBox="1"/>
           <p:nvPr/>
         </p:nvSpPr>
@@ -5969,7 +4895,7 @@
         <p:spPr>
           <a:xfrm>
             <a:off x="0" y="0"/>
-            <a:ext cx="12191695" cy="960120"/>
+            <a:ext cx="12191695" cy="1170432"/>
           </a:xfrm>
           <a:prstGeom prst="rect">
             <a:avLst/>
@@ -6011,7 +4937,7 @@
         </p:nvSpPr>
         <p:spPr>
           <a:xfrm>
-            <a:off x="0" y="960120"/>
+            <a:off x="0" y="1170432"/>
             <a:ext cx="12191695" cy="41148"/>
           </a:xfrm>
           <a:prstGeom prst="rect">
@@ -6055,7 +4981,7 @@
         <p:spPr>
           <a:xfrm>
             <a:off x="457200" y="164592"/>
-            <a:ext cx="11277295" cy="502920"/>
+            <a:ext cx="11277295" cy="384048"/>
           </a:xfrm>
           <a:prstGeom prst="rect">
             <a:avLst/>
@@ -6075,7 +5001,7 @@
                 </a:solidFill>
                 <a:latin typeface="Calibri"/>
               </a:rPr>
-              <a:t>Taller PI — por que importa</a:t>
+              <a:t>Herramientas de hoy</a:t>
             </a:r>
           </a:p>
         </p:txBody>
@@ -6088,8 +5014,8 @@
         </p:nvSpPr>
         <p:spPr>
           <a:xfrm>
-            <a:off x="457200" y="1170432"/>
-            <a:ext cx="11277295" cy="5230368"/>
+            <a:off x="457200" y="566928"/>
+            <a:ext cx="11277295" cy="411480"/>
           </a:xfrm>
           <a:prstGeom prst="rect">
             <a:avLst/>
@@ -6102,76 +5028,1149 @@
           </a:bodyPr>
           <a:lstStyle/>
           <a:p>
-            <a:pPr>
-              <a:spcAft>
-                <a:spcPts val="800"/>
-              </a:spcAft>
+            <a:r>
+              <a:rPr sz="1400" b="0" i="0">
+                <a:solidFill>
+                  <a:srgbClr val="B8D8EE"/>
+                </a:solidFill>
+                <a:latin typeface="Calibri"/>
+              </a:rPr>
+              <a:t>Gratis · funcionan en el navegador</a:t>
+            </a:r>
+          </a:p>
+        </p:txBody>
+      </p:sp>
+      <p:sp>
+        <p:nvSpPr>
+          <p:cNvPr id="6" name="Rounded Rectangle 5"/>
+          <p:cNvSpPr/>
+          <p:nvPr/>
+        </p:nvSpPr>
+        <p:spPr>
+          <a:xfrm>
+            <a:off x="457200" y="1591056"/>
+            <a:ext cx="3624986" cy="2299716"/>
+          </a:xfrm>
+          <a:prstGeom prst="roundRect">
+            <a:avLst>
+              <a:gd name="adj" fmla="val 12000"/>
+            </a:avLst>
+          </a:prstGeom>
+          <a:solidFill>
+            <a:srgbClr val="F2F2F2"/>
+          </a:solidFill>
+          <a:ln>
+            <a:noFill/>
+          </a:ln>
+        </p:spPr>
+        <p:style>
+          <a:lnRef idx="1">
+            <a:schemeClr val="accent1"/>
+          </a:lnRef>
+          <a:fillRef idx="3">
+            <a:schemeClr val="accent1"/>
+          </a:fillRef>
+          <a:effectRef idx="2">
+            <a:schemeClr val="accent1"/>
+          </a:effectRef>
+          <a:fontRef idx="minor">
+            <a:schemeClr val="lt1"/>
+          </a:fontRef>
+        </p:style>
+        <p:txBody>
+          <a:bodyPr rtlCol="0" anchor="ctr"/>
+          <a:lstStyle/>
+          <a:p>
+            <a:pPr algn="ctr"/>
+          </a:p>
+        </p:txBody>
+      </p:sp>
+      <p:sp>
+        <p:nvSpPr>
+          <p:cNvPr id="7" name="Rectangle 6"/>
+          <p:cNvSpPr/>
+          <p:nvPr/>
+        </p:nvSpPr>
+        <p:spPr>
+          <a:xfrm>
+            <a:off x="457200" y="1591056"/>
+            <a:ext cx="3624986" cy="64008"/>
+          </a:xfrm>
+          <a:prstGeom prst="rect">
+            <a:avLst/>
+          </a:prstGeom>
+          <a:solidFill>
+            <a:srgbClr val="095292"/>
+          </a:solidFill>
+          <a:ln>
+            <a:noFill/>
+          </a:ln>
+        </p:spPr>
+        <p:style>
+          <a:lnRef idx="1">
+            <a:schemeClr val="accent1"/>
+          </a:lnRef>
+          <a:fillRef idx="3">
+            <a:schemeClr val="accent1"/>
+          </a:fillRef>
+          <a:effectRef idx="2">
+            <a:schemeClr val="accent1"/>
+          </a:effectRef>
+          <a:fontRef idx="minor">
+            <a:schemeClr val="lt1"/>
+          </a:fontRef>
+        </p:style>
+        <p:txBody>
+          <a:bodyPr rtlCol="0" anchor="ctr"/>
+          <a:lstStyle/>
+          <a:p>
+            <a:pPr algn="ctr"/>
+          </a:p>
+        </p:txBody>
+      </p:sp>
+      <p:sp>
+        <p:nvSpPr>
+          <p:cNvPr id="8" name="Rectangle 7"/>
+          <p:cNvSpPr/>
+          <p:nvPr/>
+        </p:nvSpPr>
+        <p:spPr>
+          <a:xfrm>
+            <a:off x="457200" y="1655064"/>
+            <a:ext cx="3624986" cy="27432"/>
+          </a:xfrm>
+          <a:prstGeom prst="rect">
+            <a:avLst/>
+          </a:prstGeom>
+          <a:solidFill>
+            <a:srgbClr val="FFD000"/>
+          </a:solidFill>
+          <a:ln>
+            <a:noFill/>
+          </a:ln>
+        </p:spPr>
+        <p:style>
+          <a:lnRef idx="1">
+            <a:schemeClr val="accent1"/>
+          </a:lnRef>
+          <a:fillRef idx="3">
+            <a:schemeClr val="accent1"/>
+          </a:fillRef>
+          <a:effectRef idx="2">
+            <a:schemeClr val="accent1"/>
+          </a:effectRef>
+          <a:fontRef idx="minor">
+            <a:schemeClr val="lt1"/>
+          </a:fontRef>
+        </p:style>
+        <p:txBody>
+          <a:bodyPr rtlCol="0" anchor="ctr"/>
+          <a:lstStyle/>
+          <a:p>
+            <a:pPr algn="ctr"/>
+          </a:p>
+        </p:txBody>
+      </p:sp>
+      <p:pic>
+        <p:nvPicPr>
+          <p:cNvPr id="9" name="Picture 8" descr="drawio.png"/>
+          <p:cNvPicPr>
+            <a:picLocks noChangeAspect="1"/>
+          </p:cNvPicPr>
+          <p:nvPr/>
+        </p:nvPicPr>
+        <p:blipFill>
+          <a:blip r:embed="rId2"/>
+          <a:stretch>
+            <a:fillRect/>
+          </a:stretch>
+        </p:blipFill>
+        <p:spPr>
+          <a:xfrm>
+            <a:off x="1659331" y="1847087"/>
+            <a:ext cx="1220724" cy="1220724"/>
+          </a:xfrm>
+          <a:prstGeom prst="rect">
+            <a:avLst/>
+          </a:prstGeom>
+        </p:spPr>
+      </p:pic>
+      <p:sp>
+        <p:nvSpPr>
+          <p:cNvPr id="10" name="TextBox 9"/>
+          <p:cNvSpPr txBox="1"/>
+          <p:nvPr/>
+        </p:nvSpPr>
+        <p:spPr>
+          <a:xfrm>
+            <a:off x="530352" y="3159251"/>
+            <a:ext cx="3478682" cy="621792"/>
+          </a:xfrm>
+          <a:prstGeom prst="rect">
+            <a:avLst/>
+          </a:prstGeom>
+          <a:noFill/>
+        </p:spPr>
+        <p:txBody>
+          <a:bodyPr wrap="square" anchor="t"/>
+          <a:lstStyle/>
+          <a:p>
+            <a:pPr algn="ctr"/>
+            <a:r>
+              <a:rPr sz="1300" b="1" i="0">
+                <a:solidFill>
+                  <a:srgbClr val="095292"/>
+                </a:solidFill>
+                <a:latin typeface="Calibri"/>
+              </a:rPr>
+              <a:t>Draw.Io</a:t>
+            </a:r>
+          </a:p>
+          <a:p>
+            <a:pPr algn="ctr">
+              <a:spcBef>
+                <a:spcPts val="200"/>
+              </a:spcBef>
             </a:pPr>
             <a:r>
-              <a:rPr sz="2000" b="0" i="0">
-                <a:solidFill>
-                  <a:srgbClr val="333333"/>
-                </a:solidFill>
-                <a:latin typeface="Calibri"/>
-              </a:rPr>
-              <a:t>–   </a:t>
-            </a:r>
-            <a:r>
-              <a:rPr sz="2000" b="1" i="0">
-                <a:solidFill>
-                  <a:srgbClr val="333333"/>
-                </a:solidFill>
-                <a:latin typeface="Calibri"/>
-              </a:rPr>
-              <a:t>Por que importa al PI:</a:t>
-            </a:r>
-            <a:r>
-              <a:rPr sz="2000" b="0" i="0">
-                <a:solidFill>
-                  <a:srgbClr val="333333"/>
-                </a:solidFill>
-                <a:latin typeface="Calibri"/>
-              </a:rPr>
-              <a:t> hoy se convierte el monton de artefactos de VetCare en un solo paquete defendible, y se ensaya la unica ocasion en que el equipo tiene que demostrar que entiende lo que entrego.</a:t>
-            </a:r>
-          </a:p>
-          <a:p>
-            <a:pPr>
-              <a:spcAft>
-                <a:spcPts val="800"/>
-              </a:spcAft>
+              <a:rPr sz="1000" b="0" i="0">
+                <a:solidFill>
+                  <a:srgbClr val="666666"/>
+                </a:solidFill>
+                <a:latin typeface="Calibri"/>
+              </a:rPr>
+              <a:t>Diagramas UML y de contexto</a:t>
+            </a:r>
+          </a:p>
+        </p:txBody>
+      </p:sp>
+      <p:sp>
+        <p:nvSpPr>
+          <p:cNvPr id="11" name="Rounded Rectangle 10"/>
+          <p:cNvSpPr/>
+          <p:nvPr/>
+        </p:nvSpPr>
+        <p:spPr>
+          <a:xfrm>
+            <a:off x="4283354" y="1591056"/>
+            <a:ext cx="3624986" cy="2299716"/>
+          </a:xfrm>
+          <a:prstGeom prst="roundRect">
+            <a:avLst>
+              <a:gd name="adj" fmla="val 12000"/>
+            </a:avLst>
+          </a:prstGeom>
+          <a:solidFill>
+            <a:srgbClr val="F2F2F2"/>
+          </a:solidFill>
+          <a:ln>
+            <a:noFill/>
+          </a:ln>
+        </p:spPr>
+        <p:style>
+          <a:lnRef idx="1">
+            <a:schemeClr val="accent1"/>
+          </a:lnRef>
+          <a:fillRef idx="3">
+            <a:schemeClr val="accent1"/>
+          </a:fillRef>
+          <a:effectRef idx="2">
+            <a:schemeClr val="accent1"/>
+          </a:effectRef>
+          <a:fontRef idx="minor">
+            <a:schemeClr val="lt1"/>
+          </a:fontRef>
+        </p:style>
+        <p:txBody>
+          <a:bodyPr rtlCol="0" anchor="ctr"/>
+          <a:lstStyle/>
+          <a:p>
+            <a:pPr algn="ctr"/>
+          </a:p>
+        </p:txBody>
+      </p:sp>
+      <p:sp>
+        <p:nvSpPr>
+          <p:cNvPr id="12" name="Rectangle 11"/>
+          <p:cNvSpPr/>
+          <p:nvPr/>
+        </p:nvSpPr>
+        <p:spPr>
+          <a:xfrm>
+            <a:off x="4283354" y="1591056"/>
+            <a:ext cx="3624986" cy="64008"/>
+          </a:xfrm>
+          <a:prstGeom prst="rect">
+            <a:avLst/>
+          </a:prstGeom>
+          <a:solidFill>
+            <a:srgbClr val="095292"/>
+          </a:solidFill>
+          <a:ln>
+            <a:noFill/>
+          </a:ln>
+        </p:spPr>
+        <p:style>
+          <a:lnRef idx="1">
+            <a:schemeClr val="accent1"/>
+          </a:lnRef>
+          <a:fillRef idx="3">
+            <a:schemeClr val="accent1"/>
+          </a:fillRef>
+          <a:effectRef idx="2">
+            <a:schemeClr val="accent1"/>
+          </a:effectRef>
+          <a:fontRef idx="minor">
+            <a:schemeClr val="lt1"/>
+          </a:fontRef>
+        </p:style>
+        <p:txBody>
+          <a:bodyPr rtlCol="0" anchor="ctr"/>
+          <a:lstStyle/>
+          <a:p>
+            <a:pPr algn="ctr"/>
+          </a:p>
+        </p:txBody>
+      </p:sp>
+      <p:sp>
+        <p:nvSpPr>
+          <p:cNvPr id="13" name="Rectangle 12"/>
+          <p:cNvSpPr/>
+          <p:nvPr/>
+        </p:nvSpPr>
+        <p:spPr>
+          <a:xfrm>
+            <a:off x="4283354" y="1655064"/>
+            <a:ext cx="3624986" cy="27432"/>
+          </a:xfrm>
+          <a:prstGeom prst="rect">
+            <a:avLst/>
+          </a:prstGeom>
+          <a:solidFill>
+            <a:srgbClr val="FFD000"/>
+          </a:solidFill>
+          <a:ln>
+            <a:noFill/>
+          </a:ln>
+        </p:spPr>
+        <p:style>
+          <a:lnRef idx="1">
+            <a:schemeClr val="accent1"/>
+          </a:lnRef>
+          <a:fillRef idx="3">
+            <a:schemeClr val="accent1"/>
+          </a:fillRef>
+          <a:effectRef idx="2">
+            <a:schemeClr val="accent1"/>
+          </a:effectRef>
+          <a:fontRef idx="minor">
+            <a:schemeClr val="lt1"/>
+          </a:fontRef>
+        </p:style>
+        <p:txBody>
+          <a:bodyPr rtlCol="0" anchor="ctr"/>
+          <a:lstStyle/>
+          <a:p>
+            <a:pPr algn="ctr"/>
+          </a:p>
+        </p:txBody>
+      </p:sp>
+      <p:pic>
+        <p:nvPicPr>
+          <p:cNvPr id="14" name="Picture 13" descr="google_docs.png"/>
+          <p:cNvPicPr>
+            <a:picLocks noChangeAspect="1"/>
+          </p:cNvPicPr>
+          <p:nvPr/>
+        </p:nvPicPr>
+        <p:blipFill>
+          <a:blip r:embed="rId3"/>
+          <a:stretch>
+            <a:fillRect/>
+          </a:stretch>
+        </p:blipFill>
+        <p:spPr>
+          <a:xfrm>
+            <a:off x="5485485" y="1847087"/>
+            <a:ext cx="1220724" cy="1220724"/>
+          </a:xfrm>
+          <a:prstGeom prst="rect">
+            <a:avLst/>
+          </a:prstGeom>
+        </p:spPr>
+      </p:pic>
+      <p:sp>
+        <p:nvSpPr>
+          <p:cNvPr id="15" name="TextBox 14"/>
+          <p:cNvSpPr txBox="1"/>
+          <p:nvPr/>
+        </p:nvSpPr>
+        <p:spPr>
+          <a:xfrm>
+            <a:off x="4356506" y="3159251"/>
+            <a:ext cx="3478682" cy="621792"/>
+          </a:xfrm>
+          <a:prstGeom prst="rect">
+            <a:avLst/>
+          </a:prstGeom>
+          <a:noFill/>
+        </p:spPr>
+        <p:txBody>
+          <a:bodyPr wrap="square" anchor="t"/>
+          <a:lstStyle/>
+          <a:p>
+            <a:pPr algn="ctr"/>
+            <a:r>
+              <a:rPr sz="1300" b="1" i="0">
+                <a:solidFill>
+                  <a:srgbClr val="095292"/>
+                </a:solidFill>
+                <a:latin typeface="Calibri"/>
+              </a:rPr>
+              <a:t>google docs</a:t>
+            </a:r>
+          </a:p>
+          <a:p>
+            <a:pPr algn="ctr">
+              <a:spcBef>
+                <a:spcPts val="200"/>
+              </a:spcBef>
             </a:pPr>
             <a:r>
-              <a:rPr sz="2000" b="0" i="0">
-                <a:solidFill>
-                  <a:srgbClr val="333333"/>
-                </a:solidFill>
-                <a:latin typeface="Calibri"/>
-              </a:rPr>
-              <a:t>–   No hay tema nuevo: todo el trabajo es de consolidacion, coherencia y argumentacion sobre lo ya producido.</a:t>
-            </a:r>
-          </a:p>
-          <a:p>
-            <a:pPr>
-              <a:spcAft>
-                <a:spcPts val="800"/>
-              </a:spcAft>
+              <a:rPr sz="1000" b="0" i="0">
+                <a:solidFill>
+                  <a:srgbClr val="666666"/>
+                </a:solidFill>
+                <a:latin typeface="Calibri"/>
+              </a:rPr>
+              <a:t>Documentos del paquete de diseño</a:t>
+            </a:r>
+          </a:p>
+        </p:txBody>
+      </p:sp>
+      <p:sp>
+        <p:nvSpPr>
+          <p:cNvPr id="16" name="Rounded Rectangle 15"/>
+          <p:cNvSpPr/>
+          <p:nvPr/>
+        </p:nvSpPr>
+        <p:spPr>
+          <a:xfrm>
+            <a:off x="8109508" y="1591056"/>
+            <a:ext cx="3624986" cy="2299716"/>
+          </a:xfrm>
+          <a:prstGeom prst="roundRect">
+            <a:avLst>
+              <a:gd name="adj" fmla="val 12000"/>
+            </a:avLst>
+          </a:prstGeom>
+          <a:solidFill>
+            <a:srgbClr val="F2F2F2"/>
+          </a:solidFill>
+          <a:ln>
+            <a:noFill/>
+          </a:ln>
+        </p:spPr>
+        <p:style>
+          <a:lnRef idx="1">
+            <a:schemeClr val="accent1"/>
+          </a:lnRef>
+          <a:fillRef idx="3">
+            <a:schemeClr val="accent1"/>
+          </a:fillRef>
+          <a:effectRef idx="2">
+            <a:schemeClr val="accent1"/>
+          </a:effectRef>
+          <a:fontRef idx="minor">
+            <a:schemeClr val="lt1"/>
+          </a:fontRef>
+        </p:style>
+        <p:txBody>
+          <a:bodyPr rtlCol="0" anchor="ctr"/>
+          <a:lstStyle/>
+          <a:p>
+            <a:pPr algn="ctr"/>
+          </a:p>
+        </p:txBody>
+      </p:sp>
+      <p:sp>
+        <p:nvSpPr>
+          <p:cNvPr id="17" name="Rectangle 16"/>
+          <p:cNvSpPr/>
+          <p:nvPr/>
+        </p:nvSpPr>
+        <p:spPr>
+          <a:xfrm>
+            <a:off x="8109508" y="1591056"/>
+            <a:ext cx="3624986" cy="64008"/>
+          </a:xfrm>
+          <a:prstGeom prst="rect">
+            <a:avLst/>
+          </a:prstGeom>
+          <a:solidFill>
+            <a:srgbClr val="095292"/>
+          </a:solidFill>
+          <a:ln>
+            <a:noFill/>
+          </a:ln>
+        </p:spPr>
+        <p:style>
+          <a:lnRef idx="1">
+            <a:schemeClr val="accent1"/>
+          </a:lnRef>
+          <a:fillRef idx="3">
+            <a:schemeClr val="accent1"/>
+          </a:fillRef>
+          <a:effectRef idx="2">
+            <a:schemeClr val="accent1"/>
+          </a:effectRef>
+          <a:fontRef idx="minor">
+            <a:schemeClr val="lt1"/>
+          </a:fontRef>
+        </p:style>
+        <p:txBody>
+          <a:bodyPr rtlCol="0" anchor="ctr"/>
+          <a:lstStyle/>
+          <a:p>
+            <a:pPr algn="ctr"/>
+          </a:p>
+        </p:txBody>
+      </p:sp>
+      <p:sp>
+        <p:nvSpPr>
+          <p:cNvPr id="18" name="Rectangle 17"/>
+          <p:cNvSpPr/>
+          <p:nvPr/>
+        </p:nvSpPr>
+        <p:spPr>
+          <a:xfrm>
+            <a:off x="8109508" y="1655064"/>
+            <a:ext cx="3624986" cy="27432"/>
+          </a:xfrm>
+          <a:prstGeom prst="rect">
+            <a:avLst/>
+          </a:prstGeom>
+          <a:solidFill>
+            <a:srgbClr val="FFD000"/>
+          </a:solidFill>
+          <a:ln>
+            <a:noFill/>
+          </a:ln>
+        </p:spPr>
+        <p:style>
+          <a:lnRef idx="1">
+            <a:schemeClr val="accent1"/>
+          </a:lnRef>
+          <a:fillRef idx="3">
+            <a:schemeClr val="accent1"/>
+          </a:fillRef>
+          <a:effectRef idx="2">
+            <a:schemeClr val="accent1"/>
+          </a:effectRef>
+          <a:fontRef idx="minor">
+            <a:schemeClr val="lt1"/>
+          </a:fontRef>
+        </p:style>
+        <p:txBody>
+          <a:bodyPr rtlCol="0" anchor="ctr"/>
+          <a:lstStyle/>
+          <a:p>
+            <a:pPr algn="ctr"/>
+          </a:p>
+        </p:txBody>
+      </p:sp>
+      <p:sp>
+        <p:nvSpPr>
+          <p:cNvPr id="19" name="Rounded Rectangle 18"/>
+          <p:cNvSpPr/>
+          <p:nvPr/>
+        </p:nvSpPr>
+        <p:spPr>
+          <a:xfrm>
+            <a:off x="9311640" y="1847087"/>
+            <a:ext cx="1220724" cy="1220724"/>
+          </a:xfrm>
+          <a:prstGeom prst="roundRect">
+            <a:avLst>
+              <a:gd name="adj" fmla="val 12000"/>
+            </a:avLst>
+          </a:prstGeom>
+          <a:solidFill>
+            <a:srgbClr val="E8F4FA"/>
+          </a:solidFill>
+          <a:ln>
+            <a:noFill/>
+          </a:ln>
+        </p:spPr>
+        <p:style>
+          <a:lnRef idx="1">
+            <a:schemeClr val="accent1"/>
+          </a:lnRef>
+          <a:fillRef idx="3">
+            <a:schemeClr val="accent1"/>
+          </a:fillRef>
+          <a:effectRef idx="2">
+            <a:schemeClr val="accent1"/>
+          </a:effectRef>
+          <a:fontRef idx="minor">
+            <a:schemeClr val="lt1"/>
+          </a:fontRef>
+        </p:style>
+        <p:txBody>
+          <a:bodyPr rtlCol="0" anchor="ctr"/>
+          <a:lstStyle/>
+          <a:p>
+            <a:pPr algn="ctr"/>
+          </a:p>
+        </p:txBody>
+      </p:sp>
+      <p:sp>
+        <p:nvSpPr>
+          <p:cNvPr id="20" name="TextBox 19"/>
+          <p:cNvSpPr txBox="1"/>
+          <p:nvPr/>
+        </p:nvSpPr>
+        <p:spPr>
+          <a:xfrm>
+            <a:off x="9311640" y="1847087"/>
+            <a:ext cx="1220724" cy="1220724"/>
+          </a:xfrm>
+          <a:prstGeom prst="rect">
+            <a:avLst/>
+          </a:prstGeom>
+          <a:noFill/>
+        </p:spPr>
+        <p:txBody>
+          <a:bodyPr wrap="square" anchor="ctr"/>
+          <a:lstStyle/>
+          <a:p>
+            <a:pPr algn="ctr"/>
+            <a:r>
+              <a:rPr sz="1600" b="1" i="0">
+                <a:solidFill>
+                  <a:srgbClr val="095292"/>
+                </a:solidFill>
+                <a:latin typeface="Calibri"/>
+              </a:rPr>
+              <a:t>F</a:t>
+            </a:r>
+          </a:p>
+        </p:txBody>
+      </p:sp>
+      <p:sp>
+        <p:nvSpPr>
+          <p:cNvPr id="21" name="TextBox 20"/>
+          <p:cNvSpPr txBox="1"/>
+          <p:nvPr/>
+        </p:nvSpPr>
+        <p:spPr>
+          <a:xfrm>
+            <a:off x="8182660" y="3159251"/>
+            <a:ext cx="3478682" cy="621792"/>
+          </a:xfrm>
+          <a:prstGeom prst="rect">
+            <a:avLst/>
+          </a:prstGeom>
+          <a:noFill/>
+        </p:spPr>
+        <p:txBody>
+          <a:bodyPr wrap="square" anchor="t"/>
+          <a:lstStyle/>
+          <a:p>
+            <a:pPr algn="ctr"/>
+            <a:r>
+              <a:rPr sz="1300" b="1" i="0">
+                <a:solidFill>
+                  <a:srgbClr val="095292"/>
+                </a:solidFill>
+                <a:latin typeface="Calibri"/>
+              </a:rPr>
+              <a:t>Figma</a:t>
+            </a:r>
+          </a:p>
+          <a:p>
+            <a:pPr algn="ctr">
+              <a:spcBef>
+                <a:spcPts val="200"/>
+              </a:spcBef>
             </a:pPr>
             <a:r>
-              <a:rPr sz="2000" b="0" i="0">
-                <a:solidFill>
-                  <a:srgbClr val="333333"/>
-                </a:solidFill>
-                <a:latin typeface="Calibri"/>
-              </a:rPr>
-              <a:t>–   Las inconsistencias que se detecten hoy son baratas de arreglar; las mismas inconsistencias detectadas por el jurado o por el equipo de Programacion II salen carisimas.</a:t>
-            </a:r>
-          </a:p>
-        </p:txBody>
-      </p:sp>
-      <p:sp>
-        <p:nvSpPr>
-          <p:cNvPr id="6" name="TextBox 5"/>
+              <a:rPr sz="1000" b="0" i="0">
+                <a:solidFill>
+                  <a:srgbClr val="666666"/>
+                </a:solidFill>
+                <a:latin typeface="Calibri"/>
+              </a:rPr>
+              <a:t>Wireframes y prototipo navegable</a:t>
+            </a:r>
+          </a:p>
+        </p:txBody>
+      </p:sp>
+      <p:sp>
+        <p:nvSpPr>
+          <p:cNvPr id="22" name="Rounded Rectangle 21"/>
+          <p:cNvSpPr/>
+          <p:nvPr/>
+        </p:nvSpPr>
+        <p:spPr>
+          <a:xfrm>
+            <a:off x="2370277" y="4055364"/>
+            <a:ext cx="3624986" cy="2299716"/>
+          </a:xfrm>
+          <a:prstGeom prst="roundRect">
+            <a:avLst>
+              <a:gd name="adj" fmla="val 12000"/>
+            </a:avLst>
+          </a:prstGeom>
+          <a:solidFill>
+            <a:srgbClr val="F2F2F2"/>
+          </a:solidFill>
+          <a:ln>
+            <a:noFill/>
+          </a:ln>
+        </p:spPr>
+        <p:style>
+          <a:lnRef idx="1">
+            <a:schemeClr val="accent1"/>
+          </a:lnRef>
+          <a:fillRef idx="3">
+            <a:schemeClr val="accent1"/>
+          </a:fillRef>
+          <a:effectRef idx="2">
+            <a:schemeClr val="accent1"/>
+          </a:effectRef>
+          <a:fontRef idx="minor">
+            <a:schemeClr val="lt1"/>
+          </a:fontRef>
+        </p:style>
+        <p:txBody>
+          <a:bodyPr rtlCol="0" anchor="ctr"/>
+          <a:lstStyle/>
+          <a:p>
+            <a:pPr algn="ctr"/>
+          </a:p>
+        </p:txBody>
+      </p:sp>
+      <p:sp>
+        <p:nvSpPr>
+          <p:cNvPr id="23" name="Rectangle 22"/>
+          <p:cNvSpPr/>
+          <p:nvPr/>
+        </p:nvSpPr>
+        <p:spPr>
+          <a:xfrm>
+            <a:off x="2370277" y="4055364"/>
+            <a:ext cx="3624986" cy="64008"/>
+          </a:xfrm>
+          <a:prstGeom prst="rect">
+            <a:avLst/>
+          </a:prstGeom>
+          <a:solidFill>
+            <a:srgbClr val="095292"/>
+          </a:solidFill>
+          <a:ln>
+            <a:noFill/>
+          </a:ln>
+        </p:spPr>
+        <p:style>
+          <a:lnRef idx="1">
+            <a:schemeClr val="accent1"/>
+          </a:lnRef>
+          <a:fillRef idx="3">
+            <a:schemeClr val="accent1"/>
+          </a:fillRef>
+          <a:effectRef idx="2">
+            <a:schemeClr val="accent1"/>
+          </a:effectRef>
+          <a:fontRef idx="minor">
+            <a:schemeClr val="lt1"/>
+          </a:fontRef>
+        </p:style>
+        <p:txBody>
+          <a:bodyPr rtlCol="0" anchor="ctr"/>
+          <a:lstStyle/>
+          <a:p>
+            <a:pPr algn="ctr"/>
+          </a:p>
+        </p:txBody>
+      </p:sp>
+      <p:sp>
+        <p:nvSpPr>
+          <p:cNvPr id="24" name="Rectangle 23"/>
+          <p:cNvSpPr/>
+          <p:nvPr/>
+        </p:nvSpPr>
+        <p:spPr>
+          <a:xfrm>
+            <a:off x="2370277" y="4119372"/>
+            <a:ext cx="3624986" cy="27432"/>
+          </a:xfrm>
+          <a:prstGeom prst="rect">
+            <a:avLst/>
+          </a:prstGeom>
+          <a:solidFill>
+            <a:srgbClr val="FFD000"/>
+          </a:solidFill>
+          <a:ln>
+            <a:noFill/>
+          </a:ln>
+        </p:spPr>
+        <p:style>
+          <a:lnRef idx="1">
+            <a:schemeClr val="accent1"/>
+          </a:lnRef>
+          <a:fillRef idx="3">
+            <a:schemeClr val="accent1"/>
+          </a:fillRef>
+          <a:effectRef idx="2">
+            <a:schemeClr val="accent1"/>
+          </a:effectRef>
+          <a:fontRef idx="minor">
+            <a:schemeClr val="lt1"/>
+          </a:fontRef>
+        </p:style>
+        <p:txBody>
+          <a:bodyPr rtlCol="0" anchor="ctr"/>
+          <a:lstStyle/>
+          <a:p>
+            <a:pPr algn="ctr"/>
+          </a:p>
+        </p:txBody>
+      </p:sp>
+      <p:sp>
+        <p:nvSpPr>
+          <p:cNvPr id="25" name="Rounded Rectangle 24"/>
+          <p:cNvSpPr/>
+          <p:nvPr/>
+        </p:nvSpPr>
+        <p:spPr>
+          <a:xfrm>
+            <a:off x="3572408" y="4311396"/>
+            <a:ext cx="1220724" cy="1220724"/>
+          </a:xfrm>
+          <a:prstGeom prst="roundRect">
+            <a:avLst>
+              <a:gd name="adj" fmla="val 12000"/>
+            </a:avLst>
+          </a:prstGeom>
+          <a:solidFill>
+            <a:srgbClr val="E8F4FA"/>
+          </a:solidFill>
+          <a:ln>
+            <a:noFill/>
+          </a:ln>
+        </p:spPr>
+        <p:style>
+          <a:lnRef idx="1">
+            <a:schemeClr val="accent1"/>
+          </a:lnRef>
+          <a:fillRef idx="3">
+            <a:schemeClr val="accent1"/>
+          </a:fillRef>
+          <a:effectRef idx="2">
+            <a:schemeClr val="accent1"/>
+          </a:effectRef>
+          <a:fontRef idx="minor">
+            <a:schemeClr val="lt1"/>
+          </a:fontRef>
+        </p:style>
+        <p:txBody>
+          <a:bodyPr rtlCol="0" anchor="ctr"/>
+          <a:lstStyle/>
+          <a:p>
+            <a:pPr algn="ctr"/>
+          </a:p>
+        </p:txBody>
+      </p:sp>
+      <p:sp>
+        <p:nvSpPr>
+          <p:cNvPr id="26" name="TextBox 25"/>
+          <p:cNvSpPr txBox="1"/>
+          <p:nvPr/>
+        </p:nvSpPr>
+        <p:spPr>
+          <a:xfrm>
+            <a:off x="3572408" y="4311396"/>
+            <a:ext cx="1220724" cy="1220724"/>
+          </a:xfrm>
+          <a:prstGeom prst="rect">
+            <a:avLst/>
+          </a:prstGeom>
+          <a:noFill/>
+        </p:spPr>
+        <p:txBody>
+          <a:bodyPr wrap="square" anchor="ctr"/>
+          <a:lstStyle/>
+          <a:p>
+            <a:pPr algn="ctr"/>
+            <a:r>
+              <a:rPr sz="1600" b="1" i="0">
+                <a:solidFill>
+                  <a:srgbClr val="095292"/>
+                </a:solidFill>
+                <a:latin typeface="Calibri"/>
+              </a:rPr>
+              <a:t>P</a:t>
+            </a:r>
+          </a:p>
+        </p:txBody>
+      </p:sp>
+      <p:sp>
+        <p:nvSpPr>
+          <p:cNvPr id="27" name="TextBox 26"/>
+          <p:cNvSpPr txBox="1"/>
+          <p:nvPr/>
+        </p:nvSpPr>
+        <p:spPr>
+          <a:xfrm>
+            <a:off x="2443429" y="5623560"/>
+            <a:ext cx="3478682" cy="621792"/>
+          </a:xfrm>
+          <a:prstGeom prst="rect">
+            <a:avLst/>
+          </a:prstGeom>
+          <a:noFill/>
+        </p:spPr>
+        <p:txBody>
+          <a:bodyPr wrap="square" anchor="t"/>
+          <a:lstStyle/>
+          <a:p>
+            <a:pPr algn="ctr"/>
+            <a:r>
+              <a:rPr sz="1300" b="1" i="0">
+                <a:solidFill>
+                  <a:srgbClr val="095292"/>
+                </a:solidFill>
+                <a:latin typeface="Calibri"/>
+              </a:rPr>
+              <a:t>Penpot</a:t>
+            </a:r>
+          </a:p>
+          <a:p>
+            <a:pPr algn="ctr">
+              <a:spcBef>
+                <a:spcPts val="200"/>
+              </a:spcBef>
+            </a:pPr>
+            <a:r>
+              <a:rPr sz="1000" b="0" i="0">
+                <a:solidFill>
+                  <a:srgbClr val="666666"/>
+                </a:solidFill>
+                <a:latin typeface="Calibri"/>
+              </a:rPr>
+              <a:t>Alternativa libre a Figma</a:t>
+            </a:r>
+          </a:p>
+        </p:txBody>
+      </p:sp>
+      <p:sp>
+        <p:nvSpPr>
+          <p:cNvPr id="28" name="Rounded Rectangle 27"/>
+          <p:cNvSpPr/>
+          <p:nvPr/>
+        </p:nvSpPr>
+        <p:spPr>
+          <a:xfrm>
+            <a:off x="6196431" y="4055364"/>
+            <a:ext cx="3624986" cy="2299716"/>
+          </a:xfrm>
+          <a:prstGeom prst="roundRect">
+            <a:avLst>
+              <a:gd name="adj" fmla="val 12000"/>
+            </a:avLst>
+          </a:prstGeom>
+          <a:solidFill>
+            <a:srgbClr val="F2F2F2"/>
+          </a:solidFill>
+          <a:ln>
+            <a:noFill/>
+          </a:ln>
+        </p:spPr>
+        <p:style>
+          <a:lnRef idx="1">
+            <a:schemeClr val="accent1"/>
+          </a:lnRef>
+          <a:fillRef idx="3">
+            <a:schemeClr val="accent1"/>
+          </a:fillRef>
+          <a:effectRef idx="2">
+            <a:schemeClr val="accent1"/>
+          </a:effectRef>
+          <a:fontRef idx="minor">
+            <a:schemeClr val="lt1"/>
+          </a:fontRef>
+        </p:style>
+        <p:txBody>
+          <a:bodyPr rtlCol="0" anchor="ctr"/>
+          <a:lstStyle/>
+          <a:p>
+            <a:pPr algn="ctr"/>
+          </a:p>
+        </p:txBody>
+      </p:sp>
+      <p:sp>
+        <p:nvSpPr>
+          <p:cNvPr id="29" name="Rectangle 28"/>
+          <p:cNvSpPr/>
+          <p:nvPr/>
+        </p:nvSpPr>
+        <p:spPr>
+          <a:xfrm>
+            <a:off x="6196431" y="4055364"/>
+            <a:ext cx="3624986" cy="64008"/>
+          </a:xfrm>
+          <a:prstGeom prst="rect">
+            <a:avLst/>
+          </a:prstGeom>
+          <a:solidFill>
+            <a:srgbClr val="095292"/>
+          </a:solidFill>
+          <a:ln>
+            <a:noFill/>
+          </a:ln>
+        </p:spPr>
+        <p:style>
+          <a:lnRef idx="1">
+            <a:schemeClr val="accent1"/>
+          </a:lnRef>
+          <a:fillRef idx="3">
+            <a:schemeClr val="accent1"/>
+          </a:fillRef>
+          <a:effectRef idx="2">
+            <a:schemeClr val="accent1"/>
+          </a:effectRef>
+          <a:fontRef idx="minor">
+            <a:schemeClr val="lt1"/>
+          </a:fontRef>
+        </p:style>
+        <p:txBody>
+          <a:bodyPr rtlCol="0" anchor="ctr"/>
+          <a:lstStyle/>
+          <a:p>
+            <a:pPr algn="ctr"/>
+          </a:p>
+        </p:txBody>
+      </p:sp>
+      <p:sp>
+        <p:nvSpPr>
+          <p:cNvPr id="30" name="Rectangle 29"/>
+          <p:cNvSpPr/>
+          <p:nvPr/>
+        </p:nvSpPr>
+        <p:spPr>
+          <a:xfrm>
+            <a:off x="6196431" y="4119372"/>
+            <a:ext cx="3624986" cy="27432"/>
+          </a:xfrm>
+          <a:prstGeom prst="rect">
+            <a:avLst/>
+          </a:prstGeom>
+          <a:solidFill>
+            <a:srgbClr val="FFD000"/>
+          </a:solidFill>
+          <a:ln>
+            <a:noFill/>
+          </a:ln>
+        </p:spPr>
+        <p:style>
+          <a:lnRef idx="1">
+            <a:schemeClr val="accent1"/>
+          </a:lnRef>
+          <a:fillRef idx="3">
+            <a:schemeClr val="accent1"/>
+          </a:fillRef>
+          <a:effectRef idx="2">
+            <a:schemeClr val="accent1"/>
+          </a:effectRef>
+          <a:fontRef idx="minor">
+            <a:schemeClr val="lt1"/>
+          </a:fontRef>
+        </p:style>
+        <p:txBody>
+          <a:bodyPr rtlCol="0" anchor="ctr"/>
+          <a:lstStyle/>
+          <a:p>
+            <a:pPr algn="ctr"/>
+          </a:p>
+        </p:txBody>
+      </p:sp>
+      <p:pic>
+        <p:nvPicPr>
+          <p:cNvPr id="31" name="Picture 30" descr="examlab.png"/>
+          <p:cNvPicPr>
+            <a:picLocks noChangeAspect="1"/>
+          </p:cNvPicPr>
+          <p:nvPr/>
+        </p:nvPicPr>
+        <p:blipFill>
+          <a:blip r:embed="rId4"/>
+          <a:stretch>
+            <a:fillRect/>
+          </a:stretch>
+        </p:blipFill>
+        <p:spPr>
+          <a:xfrm>
+            <a:off x="7398562" y="4311396"/>
+            <a:ext cx="1220724" cy="1220724"/>
+          </a:xfrm>
+          <a:prstGeom prst="rect">
+            <a:avLst/>
+          </a:prstGeom>
+        </p:spPr>
+      </p:pic>
+      <p:sp>
+        <p:nvSpPr>
+          <p:cNvPr id="32" name="TextBox 31"/>
+          <p:cNvSpPr txBox="1"/>
+          <p:nvPr/>
+        </p:nvSpPr>
+        <p:spPr>
+          <a:xfrm>
+            <a:off x="6269583" y="5623560"/>
+            <a:ext cx="3478682" cy="621792"/>
+          </a:xfrm>
+          <a:prstGeom prst="rect">
+            <a:avLst/>
+          </a:prstGeom>
+          <a:noFill/>
+        </p:spPr>
+        <p:txBody>
+          <a:bodyPr wrap="square" anchor="t"/>
+          <a:lstStyle/>
+          <a:p>
+            <a:pPr algn="ctr"/>
+            <a:r>
+              <a:rPr sz="1300" b="1" i="0">
+                <a:solidFill>
+                  <a:srgbClr val="095292"/>
+                </a:solidFill>
+                <a:latin typeface="Calibri"/>
+              </a:rPr>
+              <a:t>la plataforma del curso</a:t>
+            </a:r>
+          </a:p>
+          <a:p>
+            <a:pPr algn="ctr">
+              <a:spcBef>
+                <a:spcPts val="200"/>
+              </a:spcBef>
+            </a:pPr>
+            <a:r>
+              <a:rPr sz="1000" b="0" i="0">
+                <a:solidFill>
+                  <a:srgbClr val="666666"/>
+                </a:solidFill>
+                <a:latin typeface="Calibri"/>
+              </a:rPr>
+              <a:t>Entrega del taller · en la fecha que indique el docente</a:t>
+            </a:r>
+          </a:p>
+        </p:txBody>
+      </p:sp>
+      <p:sp>
+        <p:nvSpPr>
+          <p:cNvPr id="33" name="TextBox 32"/>
           <p:cNvSpPr txBox="1"/>
           <p:nvPr/>
         </p:nvSpPr>
@@ -6345,7 +6344,7 @@
                 </a:solidFill>
                 <a:latin typeface="Calibri"/>
               </a:rPr>
-              <a:t>Taller PI — punto de partida</a:t>
+              <a:t>Taller PI — por que importa</a:t>
             </a:r>
           </a:p>
         </p:txBody>
@@ -6384,7 +6383,25 @@
                 </a:solidFill>
                 <a:latin typeface="Calibri"/>
               </a:rPr>
-              <a:t>–   El equipo tiene todos los artefactos de VetCare producidos, pero dispersos en varios archivos y con pequeñas contradicciones entre ellos.</a:t>
+              <a:t>–   </a:t>
+            </a:r>
+            <a:r>
+              <a:rPr sz="2000" b="1" i="0">
+                <a:solidFill>
+                  <a:srgbClr val="333333"/>
+                </a:solidFill>
+                <a:latin typeface="Calibri"/>
+              </a:rPr>
+              <a:t>Por que importa al PI:</a:t>
+            </a:r>
+            <a:r>
+              <a:rPr sz="2000" b="0" i="0">
+                <a:solidFill>
+                  <a:srgbClr val="333333"/>
+                </a:solidFill>
+                <a:latin typeface="Calibri"/>
+              </a:rPr>
+              <a:t> hoy se convierte el monton de artefactos de VetCare en un solo paquete defendible, y se ensaya la unica ocasion en que el equipo tiene que demostrar que entiende lo que entrego.</a:t>
             </a:r>
           </a:p>
           <a:p>
@@ -6400,7 +6417,7 @@
                 </a:solidFill>
                 <a:latin typeface="Calibri"/>
               </a:rPr>
-              <a:t>–   Nadie ha dicho todavia en voz alta la historia completa del proyecto de principio a fin, y el reparto de quien expone que no esta definido.</a:t>
+              <a:t>–   No hay tema nuevo: todo el trabajo es de consolidacion, coherencia y argumentacion sobre lo ya producido.</a:t>
             </a:r>
           </a:p>
           <a:p>
@@ -6416,7 +6433,7 @@
                 </a:solidFill>
                 <a:latin typeface="Calibri"/>
               </a:rPr>
-              <a:t>–   El prototipo navegable existe y funciona, pero solo lo ha manejado la persona que lo dibujo.</a:t>
+              <a:t>–   Las inconsistencias que se detecten hoy son baratas de arreglar; las mismas inconsistencias detectadas por el jurado o por el equipo de Programacion II salen carisimas.</a:t>
             </a:r>
           </a:p>
         </p:txBody>
@@ -6597,111 +6614,21 @@
                 </a:solidFill>
                 <a:latin typeface="Calibri"/>
               </a:rPr>
-              <a:t>Taller PI — pasos guiados</a:t>
-            </a:r>
-          </a:p>
-        </p:txBody>
-      </p:sp>
-      <p:sp>
-        <p:nvSpPr>
-          <p:cNvPr id="5" name="Rounded Rectangle 4"/>
-          <p:cNvSpPr/>
-          <p:nvPr/>
-        </p:nvSpPr>
-        <p:spPr>
-          <a:xfrm>
-            <a:off x="457200" y="1234440"/>
-            <a:ext cx="11277295" cy="950976"/>
-          </a:xfrm>
-          <a:prstGeom prst="roundRect">
-            <a:avLst>
-              <a:gd name="adj" fmla="val 12000"/>
-            </a:avLst>
-          </a:prstGeom>
-          <a:solidFill>
-            <a:srgbClr val="F2F2F2"/>
-          </a:solidFill>
-          <a:ln>
-            <a:noFill/>
-          </a:ln>
-        </p:spPr>
-        <p:style>
-          <a:lnRef idx="1">
-            <a:schemeClr val="accent1"/>
-          </a:lnRef>
-          <a:fillRef idx="3">
-            <a:schemeClr val="accent1"/>
-          </a:fillRef>
-          <a:effectRef idx="2">
-            <a:schemeClr val="accent1"/>
-          </a:effectRef>
-          <a:fontRef idx="minor">
-            <a:schemeClr val="lt1"/>
-          </a:fontRef>
-        </p:style>
-        <p:txBody>
-          <a:bodyPr rtlCol="0" anchor="ctr"/>
-          <a:lstStyle/>
-          <a:p>
-            <a:pPr algn="ctr"/>
-          </a:p>
-        </p:txBody>
-      </p:sp>
-      <p:sp>
-        <p:nvSpPr>
-          <p:cNvPr id="6" name="Rounded Rectangle 5"/>
-          <p:cNvSpPr/>
-          <p:nvPr/>
-        </p:nvSpPr>
-        <p:spPr>
-          <a:xfrm>
-            <a:off x="594360" y="1490472"/>
-            <a:ext cx="438912" cy="438912"/>
-          </a:xfrm>
-          <a:prstGeom prst="roundRect">
-            <a:avLst>
-              <a:gd name="adj" fmla="val 12000"/>
-            </a:avLst>
-          </a:prstGeom>
-          <a:solidFill>
-            <a:srgbClr val="095292"/>
-          </a:solidFill>
-          <a:ln>
-            <a:noFill/>
-          </a:ln>
-        </p:spPr>
-        <p:style>
-          <a:lnRef idx="1">
-            <a:schemeClr val="accent1"/>
-          </a:lnRef>
-          <a:fillRef idx="3">
-            <a:schemeClr val="accent1"/>
-          </a:fillRef>
-          <a:effectRef idx="2">
-            <a:schemeClr val="accent1"/>
-          </a:effectRef>
-          <a:fontRef idx="minor">
-            <a:schemeClr val="lt1"/>
-          </a:fontRef>
-        </p:style>
-        <p:txBody>
-          <a:bodyPr rtlCol="0" anchor="ctr"/>
-          <a:lstStyle/>
-          <a:p>
-            <a:pPr algn="ctr"/>
-          </a:p>
-        </p:txBody>
-      </p:sp>
-      <p:sp>
-        <p:nvSpPr>
-          <p:cNvPr id="7" name="TextBox 6"/>
+              <a:t>Taller PI — punto de partida</a:t>
+            </a:r>
+          </a:p>
+        </p:txBody>
+      </p:sp>
+      <p:sp>
+        <p:nvSpPr>
+          <p:cNvPr id="5" name="TextBox 4"/>
           <p:cNvSpPr txBox="1"/>
           <p:nvPr/>
         </p:nvSpPr>
         <p:spPr>
           <a:xfrm>
-            <a:off x="594360" y="1490472"/>
-            <a:ext cx="438912" cy="438912"/>
+            <a:off x="457200" y="1170432"/>
+            <a:ext cx="11277295" cy="5230368"/>
           </a:xfrm>
           <a:prstGeom prst="rect">
             <a:avLst/>
@@ -6709,677 +6636,63 @@
           <a:noFill/>
         </p:spPr>
         <p:txBody>
-          <a:bodyPr wrap="square" anchor="ctr"/>
-          <a:lstStyle/>
-          <a:p>
-            <a:pPr algn="ctr"/>
-            <a:r>
-              <a:rPr sz="1600" b="1" i="0">
-                <a:solidFill>
-                  <a:srgbClr val="FFFFFF"/>
-                </a:solidFill>
-                <a:latin typeface="Calibri"/>
-              </a:rPr>
-              <a:t>1</a:t>
-            </a:r>
-          </a:p>
-        </p:txBody>
-      </p:sp>
-      <p:sp>
-        <p:nvSpPr>
-          <p:cNvPr id="8" name="TextBox 7"/>
-          <p:cNvSpPr txBox="1"/>
-          <p:nvPr/>
-        </p:nvSpPr>
-        <p:spPr>
-          <a:xfrm>
-            <a:off x="1188720" y="1325880"/>
-            <a:ext cx="10271455" cy="786384"/>
-          </a:xfrm>
-          <a:prstGeom prst="rect">
-            <a:avLst/>
-          </a:prstGeom>
-          <a:noFill/>
-        </p:spPr>
-        <p:txBody>
-          <a:bodyPr wrap="square" anchor="ctr"/>
-          <a:lstStyle/>
-          <a:p>
-            <a:r>
-              <a:rPr sz="1100" b="1" i="0">
-                <a:solidFill>
-                  <a:srgbClr val="095292"/>
-                </a:solidFill>
-                <a:latin typeface="Calibri"/>
-              </a:rPr>
-              <a:t>Paso 1. Arme en Google Docs el guion cronometrado de doce minutos con las cinco secciones obligatorias en orden problema, requisitos, modelo, interfaz y decisiones, asignando a cada bloque su rango de minutos exacto y la evidencia que se muestra en pantalla en ese bloque; ningun bloque puede quedar sin rango de minutos ni sin evidencia asociada. Si el docente autorizo equipo, escriba ademas el nombre del responsable de cada bloque y reparta de modo que ningun integrante quede con menos de dos minutos.</a:t>
-            </a:r>
-          </a:p>
-        </p:txBody>
-      </p:sp>
-      <p:sp>
-        <p:nvSpPr>
-          <p:cNvPr id="9" name="Rounded Rectangle 8"/>
-          <p:cNvSpPr/>
-          <p:nvPr/>
-        </p:nvSpPr>
-        <p:spPr>
-          <a:xfrm>
-            <a:off x="457200" y="2276856"/>
-            <a:ext cx="11277295" cy="950976"/>
-          </a:xfrm>
-          <a:prstGeom prst="roundRect">
-            <a:avLst>
-              <a:gd name="adj" fmla="val 12000"/>
-            </a:avLst>
-          </a:prstGeom>
-          <a:solidFill>
-            <a:srgbClr val="E8F4FA"/>
-          </a:solidFill>
-          <a:ln>
-            <a:noFill/>
-          </a:ln>
-        </p:spPr>
-        <p:style>
-          <a:lnRef idx="1">
-            <a:schemeClr val="accent1"/>
-          </a:lnRef>
-          <a:fillRef idx="3">
-            <a:schemeClr val="accent1"/>
-          </a:fillRef>
-          <a:effectRef idx="2">
-            <a:schemeClr val="accent1"/>
-          </a:effectRef>
-          <a:fontRef idx="minor">
-            <a:schemeClr val="lt1"/>
-          </a:fontRef>
-        </p:style>
-        <p:txBody>
-          <a:bodyPr rtlCol="0" anchor="ctr"/>
-          <a:lstStyle/>
-          <a:p>
-            <a:pPr algn="ctr"/>
-          </a:p>
-        </p:txBody>
-      </p:sp>
-      <p:sp>
-        <p:nvSpPr>
-          <p:cNvPr id="10" name="Rounded Rectangle 9"/>
-          <p:cNvSpPr/>
-          <p:nvPr/>
-        </p:nvSpPr>
-        <p:spPr>
-          <a:xfrm>
-            <a:off x="594360" y="2532888"/>
-            <a:ext cx="438912" cy="438912"/>
-          </a:xfrm>
-          <a:prstGeom prst="roundRect">
-            <a:avLst>
-              <a:gd name="adj" fmla="val 12000"/>
-            </a:avLst>
-          </a:prstGeom>
-          <a:solidFill>
-            <a:srgbClr val="095292"/>
-          </a:solidFill>
-          <a:ln>
-            <a:noFill/>
-          </a:ln>
-        </p:spPr>
-        <p:style>
-          <a:lnRef idx="1">
-            <a:schemeClr val="accent1"/>
-          </a:lnRef>
-          <a:fillRef idx="3">
-            <a:schemeClr val="accent1"/>
-          </a:fillRef>
-          <a:effectRef idx="2">
-            <a:schemeClr val="accent1"/>
-          </a:effectRef>
-          <a:fontRef idx="minor">
-            <a:schemeClr val="lt1"/>
-          </a:fontRef>
-        </p:style>
-        <p:txBody>
-          <a:bodyPr rtlCol="0" anchor="ctr"/>
-          <a:lstStyle/>
-          <a:p>
-            <a:pPr algn="ctr"/>
-          </a:p>
-        </p:txBody>
-      </p:sp>
-      <p:sp>
-        <p:nvSpPr>
-          <p:cNvPr id="11" name="TextBox 10"/>
-          <p:cNvSpPr txBox="1"/>
-          <p:nvPr/>
-        </p:nvSpPr>
-        <p:spPr>
-          <a:xfrm>
-            <a:off x="594360" y="2532888"/>
-            <a:ext cx="438912" cy="438912"/>
-          </a:xfrm>
-          <a:prstGeom prst="rect">
-            <a:avLst/>
-          </a:prstGeom>
-          <a:noFill/>
-        </p:spPr>
-        <p:txBody>
-          <a:bodyPr wrap="square" anchor="ctr"/>
-          <a:lstStyle/>
-          <a:p>
-            <a:pPr algn="ctr"/>
-            <a:r>
-              <a:rPr sz="1600" b="1" i="0">
-                <a:solidFill>
-                  <a:srgbClr val="FFFFFF"/>
-                </a:solidFill>
-                <a:latin typeface="Calibri"/>
-              </a:rPr>
-              <a:t>2</a:t>
-            </a:r>
-          </a:p>
-        </p:txBody>
-      </p:sp>
-      <p:sp>
-        <p:nvSpPr>
-          <p:cNvPr id="12" name="TextBox 11"/>
-          <p:cNvSpPr txBox="1"/>
-          <p:nvPr/>
-        </p:nvSpPr>
-        <p:spPr>
-          <a:xfrm>
-            <a:off x="1188720" y="2368296"/>
-            <a:ext cx="10271455" cy="786384"/>
-          </a:xfrm>
-          <a:prstGeom prst="rect">
-            <a:avLst/>
-          </a:prstGeom>
-          <a:noFill/>
-        </p:spPr>
-        <p:txBody>
-          <a:bodyPr wrap="square" anchor="ctr"/>
-          <a:lstStyle/>
-          <a:p>
-            <a:r>
-              <a:rPr sz="1400" b="1" i="0">
-                <a:solidFill>
-                  <a:srgbClr val="095292"/>
-                </a:solidFill>
-                <a:latin typeface="Calibri"/>
-              </a:rPr>
-              <a:t>Paso 2. Llenen la tabla de tres decisiones de diseño de VetCare con las cuatro columnas decision, alternativa descartada, criterio y consecuencia asumida; una de las tres decisiones debe ser sobre el modelo de clases y otra sobre un requisito no funcional.</a:t>
-            </a:r>
-          </a:p>
-        </p:txBody>
-      </p:sp>
-      <p:sp>
-        <p:nvSpPr>
-          <p:cNvPr id="13" name="Rounded Rectangle 12"/>
-          <p:cNvSpPr/>
-          <p:nvPr/>
-        </p:nvSpPr>
-        <p:spPr>
-          <a:xfrm>
-            <a:off x="457200" y="3319272"/>
-            <a:ext cx="11277295" cy="950976"/>
-          </a:xfrm>
-          <a:prstGeom prst="roundRect">
-            <a:avLst>
-              <a:gd name="adj" fmla="val 12000"/>
-            </a:avLst>
-          </a:prstGeom>
-          <a:solidFill>
-            <a:srgbClr val="F2F2F2"/>
-          </a:solidFill>
-          <a:ln>
-            <a:noFill/>
-          </a:ln>
-        </p:spPr>
-        <p:style>
-          <a:lnRef idx="1">
-            <a:schemeClr val="accent1"/>
-          </a:lnRef>
-          <a:fillRef idx="3">
-            <a:schemeClr val="accent1"/>
-          </a:fillRef>
-          <a:effectRef idx="2">
-            <a:schemeClr val="accent1"/>
-          </a:effectRef>
-          <a:fontRef idx="minor">
-            <a:schemeClr val="lt1"/>
-          </a:fontRef>
-        </p:style>
-        <p:txBody>
-          <a:bodyPr rtlCol="0" anchor="ctr"/>
-          <a:lstStyle/>
-          <a:p>
-            <a:pPr algn="ctr"/>
-          </a:p>
-        </p:txBody>
-      </p:sp>
-      <p:sp>
-        <p:nvSpPr>
-          <p:cNvPr id="14" name="Rounded Rectangle 13"/>
-          <p:cNvSpPr/>
-          <p:nvPr/>
-        </p:nvSpPr>
-        <p:spPr>
-          <a:xfrm>
-            <a:off x="594360" y="3575304"/>
-            <a:ext cx="438912" cy="438912"/>
-          </a:xfrm>
-          <a:prstGeom prst="roundRect">
-            <a:avLst>
-              <a:gd name="adj" fmla="val 12000"/>
-            </a:avLst>
-          </a:prstGeom>
-          <a:solidFill>
-            <a:srgbClr val="095292"/>
-          </a:solidFill>
-          <a:ln>
-            <a:noFill/>
-          </a:ln>
-        </p:spPr>
-        <p:style>
-          <a:lnRef idx="1">
-            <a:schemeClr val="accent1"/>
-          </a:lnRef>
-          <a:fillRef idx="3">
-            <a:schemeClr val="accent1"/>
-          </a:fillRef>
-          <a:effectRef idx="2">
-            <a:schemeClr val="accent1"/>
-          </a:effectRef>
-          <a:fontRef idx="minor">
-            <a:schemeClr val="lt1"/>
-          </a:fontRef>
-        </p:style>
-        <p:txBody>
-          <a:bodyPr rtlCol="0" anchor="ctr"/>
-          <a:lstStyle/>
-          <a:p>
-            <a:pPr algn="ctr"/>
-          </a:p>
-        </p:txBody>
-      </p:sp>
-      <p:sp>
-        <p:nvSpPr>
-          <p:cNvPr id="15" name="TextBox 14"/>
-          <p:cNvSpPr txBox="1"/>
-          <p:nvPr/>
-        </p:nvSpPr>
-        <p:spPr>
-          <a:xfrm>
-            <a:off x="594360" y="3575304"/>
-            <a:ext cx="438912" cy="438912"/>
-          </a:xfrm>
-          <a:prstGeom prst="rect">
-            <a:avLst/>
-          </a:prstGeom>
-          <a:noFill/>
-        </p:spPr>
-        <p:txBody>
-          <a:bodyPr wrap="square" anchor="ctr"/>
-          <a:lstStyle/>
-          <a:p>
-            <a:pPr algn="ctr"/>
-            <a:r>
-              <a:rPr sz="1600" b="1" i="0">
-                <a:solidFill>
-                  <a:srgbClr val="FFFFFF"/>
-                </a:solidFill>
-                <a:latin typeface="Calibri"/>
-              </a:rPr>
-              <a:t>3</a:t>
-            </a:r>
-          </a:p>
-        </p:txBody>
-      </p:sp>
-      <p:sp>
-        <p:nvSpPr>
-          <p:cNvPr id="16" name="TextBox 15"/>
-          <p:cNvSpPr txBox="1"/>
-          <p:nvPr/>
-        </p:nvSpPr>
-        <p:spPr>
-          <a:xfrm>
-            <a:off x="1188720" y="3410712"/>
-            <a:ext cx="10271455" cy="786384"/>
-          </a:xfrm>
-          <a:prstGeom prst="rect">
-            <a:avLst/>
-          </a:prstGeom>
-          <a:noFill/>
-        </p:spPr>
-        <p:txBody>
-          <a:bodyPr wrap="square" anchor="ctr"/>
-          <a:lstStyle/>
-          <a:p>
-            <a:r>
-              <a:rPr sz="1400" b="1" i="0">
-                <a:solidFill>
-                  <a:srgbClr val="095292"/>
-                </a:solidFill>
-                <a:latin typeface="Calibri"/>
-              </a:rPr>
-              <a:t>Paso 3. Construyan el banco de diez preguntas del jurado con su respuesta en maximo dos frases, incluyendo obligatoriamente que pasa si dos recepcionistas registran la misma mascota, como se mide su RNF de tiempo de respuesta y que quedo fuera del alcance.</a:t>
-            </a:r>
-          </a:p>
-        </p:txBody>
-      </p:sp>
-      <p:sp>
-        <p:nvSpPr>
-          <p:cNvPr id="17" name="Rounded Rectangle 16"/>
-          <p:cNvSpPr/>
-          <p:nvPr/>
-        </p:nvSpPr>
-        <p:spPr>
-          <a:xfrm>
-            <a:off x="457200" y="4361688"/>
-            <a:ext cx="11277295" cy="950976"/>
-          </a:xfrm>
-          <a:prstGeom prst="roundRect">
-            <a:avLst>
-              <a:gd name="adj" fmla="val 12000"/>
-            </a:avLst>
-          </a:prstGeom>
-          <a:solidFill>
-            <a:srgbClr val="E8F4FA"/>
-          </a:solidFill>
-          <a:ln>
-            <a:noFill/>
-          </a:ln>
-        </p:spPr>
-        <p:style>
-          <a:lnRef idx="1">
-            <a:schemeClr val="accent1"/>
-          </a:lnRef>
-          <a:fillRef idx="3">
-            <a:schemeClr val="accent1"/>
-          </a:fillRef>
-          <a:effectRef idx="2">
-            <a:schemeClr val="accent1"/>
-          </a:effectRef>
-          <a:fontRef idx="minor">
-            <a:schemeClr val="lt1"/>
-          </a:fontRef>
-        </p:style>
-        <p:txBody>
-          <a:bodyPr rtlCol="0" anchor="ctr"/>
-          <a:lstStyle/>
-          <a:p>
-            <a:pPr algn="ctr"/>
-          </a:p>
-        </p:txBody>
-      </p:sp>
-      <p:sp>
-        <p:nvSpPr>
-          <p:cNvPr id="18" name="Rounded Rectangle 17"/>
-          <p:cNvSpPr/>
-          <p:nvPr/>
-        </p:nvSpPr>
-        <p:spPr>
-          <a:xfrm>
-            <a:off x="594360" y="4617720"/>
-            <a:ext cx="438912" cy="438912"/>
-          </a:xfrm>
-          <a:prstGeom prst="roundRect">
-            <a:avLst>
-              <a:gd name="adj" fmla="val 12000"/>
-            </a:avLst>
-          </a:prstGeom>
-          <a:solidFill>
-            <a:srgbClr val="095292"/>
-          </a:solidFill>
-          <a:ln>
-            <a:noFill/>
-          </a:ln>
-        </p:spPr>
-        <p:style>
-          <a:lnRef idx="1">
-            <a:schemeClr val="accent1"/>
-          </a:lnRef>
-          <a:fillRef idx="3">
-            <a:schemeClr val="accent1"/>
-          </a:fillRef>
-          <a:effectRef idx="2">
-            <a:schemeClr val="accent1"/>
-          </a:effectRef>
-          <a:fontRef idx="minor">
-            <a:schemeClr val="lt1"/>
-          </a:fontRef>
-        </p:style>
-        <p:txBody>
-          <a:bodyPr rtlCol="0" anchor="ctr"/>
-          <a:lstStyle/>
-          <a:p>
-            <a:pPr algn="ctr"/>
-          </a:p>
-        </p:txBody>
-      </p:sp>
-      <p:sp>
-        <p:nvSpPr>
-          <p:cNvPr id="19" name="TextBox 18"/>
-          <p:cNvSpPr txBox="1"/>
-          <p:nvPr/>
-        </p:nvSpPr>
-        <p:spPr>
-          <a:xfrm>
-            <a:off x="594360" y="4617720"/>
-            <a:ext cx="438912" cy="438912"/>
-          </a:xfrm>
-          <a:prstGeom prst="rect">
-            <a:avLst/>
-          </a:prstGeom>
-          <a:noFill/>
-        </p:spPr>
-        <p:txBody>
-          <a:bodyPr wrap="square" anchor="ctr"/>
-          <a:lstStyle/>
-          <a:p>
-            <a:pPr algn="ctr"/>
-            <a:r>
-              <a:rPr sz="1600" b="1" i="0">
-                <a:solidFill>
-                  <a:srgbClr val="FFFFFF"/>
-                </a:solidFill>
-                <a:latin typeface="Calibri"/>
-              </a:rPr>
-              <a:t>4</a:t>
-            </a:r>
-          </a:p>
-        </p:txBody>
-      </p:sp>
-      <p:sp>
-        <p:nvSpPr>
-          <p:cNvPr id="20" name="TextBox 19"/>
-          <p:cNvSpPr txBox="1"/>
-          <p:nvPr/>
-        </p:nvSpPr>
-        <p:spPr>
-          <a:xfrm>
-            <a:off x="1188720" y="4453128"/>
-            <a:ext cx="10271455" cy="786384"/>
-          </a:xfrm>
-          <a:prstGeom prst="rect">
-            <a:avLst/>
-          </a:prstGeom>
-          <a:noFill/>
-        </p:spPr>
-        <p:txBody>
-          <a:bodyPr wrap="square" anchor="ctr"/>
-          <a:lstStyle/>
-          <a:p>
-            <a:r>
-              <a:rPr sz="1400" b="1" i="0">
-                <a:solidFill>
-                  <a:srgbClr val="095292"/>
-                </a:solidFill>
-                <a:latin typeface="Calibri"/>
-              </a:rPr>
-              <a:t>Paso 4. Haga un ensayo cronometrado de pie, con el prototipo abierto, y registre el tiempo real de cada bloque; recorte lo que se paso y anote los dos puntos donde se enredo al hablar (si trabaja en equipo, donde se enredo la transicion entre un expositor y el siguiente).</a:t>
-            </a:r>
-          </a:p>
-        </p:txBody>
-      </p:sp>
-      <p:sp>
-        <p:nvSpPr>
-          <p:cNvPr id="21" name="Rounded Rectangle 20"/>
-          <p:cNvSpPr/>
-          <p:nvPr/>
-        </p:nvSpPr>
-        <p:spPr>
-          <a:xfrm>
-            <a:off x="457200" y="5404104"/>
-            <a:ext cx="11277295" cy="950976"/>
-          </a:xfrm>
-          <a:prstGeom prst="roundRect">
-            <a:avLst>
-              <a:gd name="adj" fmla="val 12000"/>
-            </a:avLst>
-          </a:prstGeom>
-          <a:solidFill>
-            <a:srgbClr val="F2F2F2"/>
-          </a:solidFill>
-          <a:ln>
-            <a:noFill/>
-          </a:ln>
-        </p:spPr>
-        <p:style>
-          <a:lnRef idx="1">
-            <a:schemeClr val="accent1"/>
-          </a:lnRef>
-          <a:fillRef idx="3">
-            <a:schemeClr val="accent1"/>
-          </a:fillRef>
-          <a:effectRef idx="2">
-            <a:schemeClr val="accent1"/>
-          </a:effectRef>
-          <a:fontRef idx="minor">
-            <a:schemeClr val="lt1"/>
-          </a:fontRef>
-        </p:style>
-        <p:txBody>
-          <a:bodyPr rtlCol="0" anchor="ctr"/>
-          <a:lstStyle/>
-          <a:p>
-            <a:pPr algn="ctr"/>
-          </a:p>
-        </p:txBody>
-      </p:sp>
-      <p:sp>
-        <p:nvSpPr>
-          <p:cNvPr id="22" name="Rounded Rectangle 21"/>
-          <p:cNvSpPr/>
-          <p:nvPr/>
-        </p:nvSpPr>
-        <p:spPr>
-          <a:xfrm>
-            <a:off x="594360" y="5660136"/>
-            <a:ext cx="438912" cy="438912"/>
-          </a:xfrm>
-          <a:prstGeom prst="roundRect">
-            <a:avLst>
-              <a:gd name="adj" fmla="val 12000"/>
-            </a:avLst>
-          </a:prstGeom>
-          <a:solidFill>
-            <a:srgbClr val="095292"/>
-          </a:solidFill>
-          <a:ln>
-            <a:noFill/>
-          </a:ln>
-        </p:spPr>
-        <p:style>
-          <a:lnRef idx="1">
-            <a:schemeClr val="accent1"/>
-          </a:lnRef>
-          <a:fillRef idx="3">
-            <a:schemeClr val="accent1"/>
-          </a:fillRef>
-          <a:effectRef idx="2">
-            <a:schemeClr val="accent1"/>
-          </a:effectRef>
-          <a:fontRef idx="minor">
-            <a:schemeClr val="lt1"/>
-          </a:fontRef>
-        </p:style>
-        <p:txBody>
-          <a:bodyPr rtlCol="0" anchor="ctr"/>
-          <a:lstStyle/>
-          <a:p>
-            <a:pPr algn="ctr"/>
-          </a:p>
-        </p:txBody>
-      </p:sp>
-      <p:sp>
-        <p:nvSpPr>
-          <p:cNvPr id="23" name="TextBox 22"/>
-          <p:cNvSpPr txBox="1"/>
-          <p:nvPr/>
-        </p:nvSpPr>
-        <p:spPr>
-          <a:xfrm>
-            <a:off x="594360" y="5660136"/>
-            <a:ext cx="438912" cy="438912"/>
-          </a:xfrm>
-          <a:prstGeom prst="rect">
-            <a:avLst/>
-          </a:prstGeom>
-          <a:noFill/>
-        </p:spPr>
-        <p:txBody>
-          <a:bodyPr wrap="square" anchor="ctr"/>
-          <a:lstStyle/>
-          <a:p>
-            <a:pPr algn="ctr"/>
-            <a:r>
-              <a:rPr sz="1600" b="1" i="0">
-                <a:solidFill>
-                  <a:srgbClr val="FFFFFF"/>
-                </a:solidFill>
-                <a:latin typeface="Calibri"/>
-              </a:rPr>
-              <a:t>5</a:t>
-            </a:r>
-          </a:p>
-        </p:txBody>
-      </p:sp>
-      <p:sp>
-        <p:nvSpPr>
-          <p:cNvPr id="24" name="TextBox 23"/>
-          <p:cNvSpPr txBox="1"/>
-          <p:nvPr/>
-        </p:nvSpPr>
-        <p:spPr>
-          <a:xfrm>
-            <a:off x="1188720" y="5495544"/>
-            <a:ext cx="10271455" cy="786384"/>
-          </a:xfrm>
-          <a:prstGeom prst="rect">
-            <a:avLst/>
-          </a:prstGeom>
-          <a:noFill/>
-        </p:spPr>
-        <p:txBody>
-          <a:bodyPr wrap="square" anchor="ctr"/>
-          <a:lstStyle/>
-          <a:p>
-            <a:r>
-              <a:rPr sz="1400" b="1" i="0">
-                <a:solidFill>
-                  <a:srgbClr val="095292"/>
-                </a:solidFill>
-                <a:latin typeface="Calibri"/>
-              </a:rPr>
-              <a:t>Paso 5. Consoliden el documento final armando el indice completo desde problema hasta trazabilidad, verifiquen que los nombres de las clases, los campos del diccionario y los campos de las pantallas coinciden exactamente, y corrijan al menos una inconsistencia encontrada dejando constancia de cual era.</a:t>
-            </a:r>
-          </a:p>
-        </p:txBody>
-      </p:sp>
-      <p:sp>
-        <p:nvSpPr>
-          <p:cNvPr id="25" name="TextBox 24"/>
+          <a:bodyPr wrap="square">
+            <a:spAutoFit/>
+          </a:bodyPr>
+          <a:lstStyle/>
+          <a:p>
+            <a:pPr>
+              <a:spcAft>
+                <a:spcPts val="800"/>
+              </a:spcAft>
+            </a:pPr>
+            <a:r>
+              <a:rPr sz="2000" b="0" i="0">
+                <a:solidFill>
+                  <a:srgbClr val="333333"/>
+                </a:solidFill>
+                <a:latin typeface="Calibri"/>
+              </a:rPr>
+              <a:t>–   El equipo tiene todos los artefactos de VetCare producidos, pero dispersos en varios archivos y con pequeñas contradicciones entre ellos.</a:t>
+            </a:r>
+          </a:p>
+          <a:p>
+            <a:pPr>
+              <a:spcAft>
+                <a:spcPts val="800"/>
+              </a:spcAft>
+            </a:pPr>
+            <a:r>
+              <a:rPr sz="2000" b="0" i="0">
+                <a:solidFill>
+                  <a:srgbClr val="333333"/>
+                </a:solidFill>
+                <a:latin typeface="Calibri"/>
+              </a:rPr>
+              <a:t>–   Nadie ha dicho todavia en voz alta la historia completa del proyecto de principio a fin, y el reparto de quien expone que no esta definido.</a:t>
+            </a:r>
+          </a:p>
+          <a:p>
+            <a:pPr>
+              <a:spcAft>
+                <a:spcPts val="800"/>
+              </a:spcAft>
+            </a:pPr>
+            <a:r>
+              <a:rPr sz="2000" b="0" i="0">
+                <a:solidFill>
+                  <a:srgbClr val="333333"/>
+                </a:solidFill>
+                <a:latin typeface="Calibri"/>
+              </a:rPr>
+              <a:t>–   El prototipo navegable existe y funciona, pero solo lo ha manejado la persona que lo dibujo.</a:t>
+            </a:r>
+          </a:p>
+        </p:txBody>
+      </p:sp>
+      <p:sp>
+        <p:nvSpPr>
+          <p:cNvPr id="6" name="TextBox 5"/>
           <p:cNvSpPr txBox="1"/>
           <p:nvPr/>
         </p:nvSpPr>
@@ -7553,7 +6866,7 @@
                 </a:solidFill>
                 <a:latin typeface="Calibri"/>
               </a:rPr>
-              <a:t>Antes de entregar — autochequeo</a:t>
+              <a:t>Taller PI — pasos guiados</a:t>
             </a:r>
           </a:p>
         </p:txBody>
@@ -7566,8 +6879,8 @@
         </p:nvSpPr>
         <p:spPr>
           <a:xfrm>
-            <a:off x="457200" y="1261872"/>
-            <a:ext cx="11277295" cy="566928"/>
+            <a:off x="457200" y="1234440"/>
+            <a:ext cx="11277295" cy="950976"/>
           </a:xfrm>
           <a:prstGeom prst="roundRect">
             <a:avLst>
@@ -7605,25 +6918,25 @@
       </p:sp>
       <p:sp>
         <p:nvSpPr>
-          <p:cNvPr id="6" name="Rectangle 5"/>
+          <p:cNvPr id="6" name="Rounded Rectangle 5"/>
           <p:cNvSpPr/>
           <p:nvPr/>
         </p:nvSpPr>
         <p:spPr>
           <a:xfrm>
-            <a:off x="640080" y="1408175"/>
-            <a:ext cx="274320" cy="274320"/>
-          </a:xfrm>
-          <a:prstGeom prst="rect">
-            <a:avLst/>
+            <a:off x="594360" y="1490472"/>
+            <a:ext cx="438912" cy="438912"/>
+          </a:xfrm>
+          <a:prstGeom prst="roundRect">
+            <a:avLst>
+              <a:gd name="adj" fmla="val 12000"/>
+            </a:avLst>
           </a:prstGeom>
           <a:solidFill>
-            <a:srgbClr val="FFFFFF"/>
+            <a:srgbClr val="095292"/>
           </a:solidFill>
           <a:ln>
-            <a:solidFill>
-              <a:srgbClr val="333333"/>
-            </a:solidFill>
+            <a:noFill/>
           </a:ln>
         </p:spPr>
         <p:style>
@@ -7650,20 +6963,87 @@
       </p:sp>
       <p:sp>
         <p:nvSpPr>
-          <p:cNvPr id="7" name="Rectangle 6"/>
+          <p:cNvPr id="7" name="TextBox 6"/>
+          <p:cNvSpPr txBox="1"/>
+          <p:nvPr/>
+        </p:nvSpPr>
+        <p:spPr>
+          <a:xfrm>
+            <a:off x="594360" y="1490472"/>
+            <a:ext cx="438912" cy="438912"/>
+          </a:xfrm>
+          <a:prstGeom prst="rect">
+            <a:avLst/>
+          </a:prstGeom>
+          <a:noFill/>
+        </p:spPr>
+        <p:txBody>
+          <a:bodyPr wrap="square" anchor="ctr"/>
+          <a:lstStyle/>
+          <a:p>
+            <a:pPr algn="ctr"/>
+            <a:r>
+              <a:rPr sz="1600" b="1" i="0">
+                <a:solidFill>
+                  <a:srgbClr val="FFFFFF"/>
+                </a:solidFill>
+                <a:latin typeface="Calibri"/>
+              </a:rPr>
+              <a:t>1</a:t>
+            </a:r>
+          </a:p>
+        </p:txBody>
+      </p:sp>
+      <p:sp>
+        <p:nvSpPr>
+          <p:cNvPr id="8" name="TextBox 7"/>
+          <p:cNvSpPr txBox="1"/>
+          <p:nvPr/>
+        </p:nvSpPr>
+        <p:spPr>
+          <a:xfrm>
+            <a:off x="1188720" y="1325880"/>
+            <a:ext cx="10271455" cy="786384"/>
+          </a:xfrm>
+          <a:prstGeom prst="rect">
+            <a:avLst/>
+          </a:prstGeom>
+          <a:noFill/>
+        </p:spPr>
+        <p:txBody>
+          <a:bodyPr wrap="square" anchor="ctr"/>
+          <a:lstStyle/>
+          <a:p>
+            <a:r>
+              <a:rPr sz="1100" b="1" i="0">
+                <a:solidFill>
+                  <a:srgbClr val="095292"/>
+                </a:solidFill>
+                <a:latin typeface="Calibri"/>
+              </a:rPr>
+              <a:t>Paso 1. Arme en Google Docs el guion cronometrado de doce minutos con las cinco secciones obligatorias en orden problema, requisitos, modelo, interfaz y decisiones, asignando a cada bloque su rango de minutos exacto y la evidencia que se muestra en pantalla en ese bloque; ningun bloque puede quedar sin rango de minutos ni sin evidencia asociada. Si el docente autorizo equipo, escriba ademas el nombre del responsable de cada bloque y reparta de modo que ningun integrante quede con menos de dos minutos.</a:t>
+            </a:r>
+          </a:p>
+        </p:txBody>
+      </p:sp>
+      <p:sp>
+        <p:nvSpPr>
+          <p:cNvPr id="9" name="Rounded Rectangle 8"/>
           <p:cNvSpPr/>
           <p:nvPr/>
         </p:nvSpPr>
         <p:spPr>
           <a:xfrm>
-            <a:off x="640080" y="1408175"/>
-            <a:ext cx="73152" cy="274320"/>
-          </a:xfrm>
-          <a:prstGeom prst="rect">
-            <a:avLst/>
+            <a:off x="457200" y="2276856"/>
+            <a:ext cx="11277295" cy="950976"/>
+          </a:xfrm>
+          <a:prstGeom prst="roundRect">
+            <a:avLst>
+              <a:gd name="adj" fmla="val 12000"/>
+            </a:avLst>
           </a:prstGeom>
           <a:solidFill>
-            <a:srgbClr val="269CCB"/>
+            <a:srgbClr val="E8F4FA"/>
           </a:solidFill>
           <a:ln>
             <a:noFill/>
@@ -7693,14 +7073,59 @@
       </p:sp>
       <p:sp>
         <p:nvSpPr>
-          <p:cNvPr id="8" name="TextBox 7"/>
+          <p:cNvPr id="10" name="Rounded Rectangle 9"/>
+          <p:cNvSpPr/>
+          <p:nvPr/>
+        </p:nvSpPr>
+        <p:spPr>
+          <a:xfrm>
+            <a:off x="594360" y="2532888"/>
+            <a:ext cx="438912" cy="438912"/>
+          </a:xfrm>
+          <a:prstGeom prst="roundRect">
+            <a:avLst>
+              <a:gd name="adj" fmla="val 12000"/>
+            </a:avLst>
+          </a:prstGeom>
+          <a:solidFill>
+            <a:srgbClr val="095292"/>
+          </a:solidFill>
+          <a:ln>
+            <a:noFill/>
+          </a:ln>
+        </p:spPr>
+        <p:style>
+          <a:lnRef idx="1">
+            <a:schemeClr val="accent1"/>
+          </a:lnRef>
+          <a:fillRef idx="3">
+            <a:schemeClr val="accent1"/>
+          </a:fillRef>
+          <a:effectRef idx="2">
+            <a:schemeClr val="accent1"/>
+          </a:effectRef>
+          <a:fontRef idx="minor">
+            <a:schemeClr val="lt1"/>
+          </a:fontRef>
+        </p:style>
+        <p:txBody>
+          <a:bodyPr rtlCol="0" anchor="ctr"/>
+          <a:lstStyle/>
+          <a:p>
+            <a:pPr algn="ctr"/>
+          </a:p>
+        </p:txBody>
+      </p:sp>
+      <p:sp>
+        <p:nvSpPr>
+          <p:cNvPr id="11" name="TextBox 10"/>
           <p:cNvSpPr txBox="1"/>
           <p:nvPr/>
         </p:nvSpPr>
         <p:spPr>
           <a:xfrm>
-            <a:off x="1097280" y="1353312"/>
-            <a:ext cx="10362895" cy="402336"/>
+            <a:off x="594360" y="2532888"/>
+            <a:ext cx="438912" cy="438912"/>
           </a:xfrm>
           <a:prstGeom prst="rect">
             <a:avLst/>
@@ -7711,28 +7136,61 @@
           <a:bodyPr wrap="square" anchor="ctr"/>
           <a:lstStyle/>
           <a:p>
-            <a:r>
-              <a:rPr sz="1500" b="0" i="0">
-                <a:solidFill>
-                  <a:srgbClr val="333333"/>
-                </a:solidFill>
-                <a:latin typeface="Calibri"/>
-              </a:rPr>
-              <a:t>Si el jurado le pregunta por una parte que no alcanzo a mostrar, puede responderla sin buscar ayuda (y si hay equipo autorizado, cualquier integrante puede responder por cualquier bloque).</a:t>
-            </a:r>
-          </a:p>
-        </p:txBody>
-      </p:sp>
-      <p:sp>
-        <p:nvSpPr>
-          <p:cNvPr id="9" name="Rounded Rectangle 8"/>
+            <a:pPr algn="ctr"/>
+            <a:r>
+              <a:rPr sz="1600" b="1" i="0">
+                <a:solidFill>
+                  <a:srgbClr val="FFFFFF"/>
+                </a:solidFill>
+                <a:latin typeface="Calibri"/>
+              </a:rPr>
+              <a:t>2</a:t>
+            </a:r>
+          </a:p>
+        </p:txBody>
+      </p:sp>
+      <p:sp>
+        <p:nvSpPr>
+          <p:cNvPr id="12" name="TextBox 11"/>
+          <p:cNvSpPr txBox="1"/>
+          <p:nvPr/>
+        </p:nvSpPr>
+        <p:spPr>
+          <a:xfrm>
+            <a:off x="1188720" y="2368296"/>
+            <a:ext cx="10271455" cy="786384"/>
+          </a:xfrm>
+          <a:prstGeom prst="rect">
+            <a:avLst/>
+          </a:prstGeom>
+          <a:noFill/>
+        </p:spPr>
+        <p:txBody>
+          <a:bodyPr wrap="square" anchor="ctr"/>
+          <a:lstStyle/>
+          <a:p>
+            <a:r>
+              <a:rPr sz="1400" b="1" i="0">
+                <a:solidFill>
+                  <a:srgbClr val="095292"/>
+                </a:solidFill>
+                <a:latin typeface="Calibri"/>
+              </a:rPr>
+              <a:t>Paso 2. Llenen la tabla de tres decisiones de diseño de VetCare con las cuatro columnas decision, alternativa descartada, criterio y consecuencia asumida; una de las tres decisiones debe ser sobre el modelo de clases y otra sobre un requisito no funcional.</a:t>
+            </a:r>
+          </a:p>
+        </p:txBody>
+      </p:sp>
+      <p:sp>
+        <p:nvSpPr>
+          <p:cNvPr id="13" name="Rounded Rectangle 12"/>
           <p:cNvSpPr/>
           <p:nvPr/>
         </p:nvSpPr>
         <p:spPr>
           <a:xfrm>
-            <a:off x="457200" y="1938528"/>
-            <a:ext cx="11277295" cy="566928"/>
+            <a:off x="457200" y="3319272"/>
+            <a:ext cx="11277295" cy="950976"/>
           </a:xfrm>
           <a:prstGeom prst="roundRect">
             <a:avLst>
@@ -7770,25 +7228,25 @@
       </p:sp>
       <p:sp>
         <p:nvSpPr>
-          <p:cNvPr id="10" name="Rectangle 9"/>
+          <p:cNvPr id="14" name="Rounded Rectangle 13"/>
           <p:cNvSpPr/>
           <p:nvPr/>
         </p:nvSpPr>
         <p:spPr>
           <a:xfrm>
-            <a:off x="640080" y="2084832"/>
-            <a:ext cx="274320" cy="274320"/>
-          </a:xfrm>
-          <a:prstGeom prst="rect">
-            <a:avLst/>
+            <a:off x="594360" y="3575304"/>
+            <a:ext cx="438912" cy="438912"/>
+          </a:xfrm>
+          <a:prstGeom prst="roundRect">
+            <a:avLst>
+              <a:gd name="adj" fmla="val 12000"/>
+            </a:avLst>
           </a:prstGeom>
           <a:solidFill>
-            <a:srgbClr val="FFFFFF"/>
+            <a:srgbClr val="095292"/>
           </a:solidFill>
           <a:ln>
-            <a:solidFill>
-              <a:srgbClr val="333333"/>
-            </a:solidFill>
+            <a:noFill/>
           </a:ln>
         </p:spPr>
         <p:style>
@@ -7815,20 +7273,87 @@
       </p:sp>
       <p:sp>
         <p:nvSpPr>
-          <p:cNvPr id="11" name="Rectangle 10"/>
+          <p:cNvPr id="15" name="TextBox 14"/>
+          <p:cNvSpPr txBox="1"/>
+          <p:nvPr/>
+        </p:nvSpPr>
+        <p:spPr>
+          <a:xfrm>
+            <a:off x="594360" y="3575304"/>
+            <a:ext cx="438912" cy="438912"/>
+          </a:xfrm>
+          <a:prstGeom prst="rect">
+            <a:avLst/>
+          </a:prstGeom>
+          <a:noFill/>
+        </p:spPr>
+        <p:txBody>
+          <a:bodyPr wrap="square" anchor="ctr"/>
+          <a:lstStyle/>
+          <a:p>
+            <a:pPr algn="ctr"/>
+            <a:r>
+              <a:rPr sz="1600" b="1" i="0">
+                <a:solidFill>
+                  <a:srgbClr val="FFFFFF"/>
+                </a:solidFill>
+                <a:latin typeface="Calibri"/>
+              </a:rPr>
+              <a:t>3</a:t>
+            </a:r>
+          </a:p>
+        </p:txBody>
+      </p:sp>
+      <p:sp>
+        <p:nvSpPr>
+          <p:cNvPr id="16" name="TextBox 15"/>
+          <p:cNvSpPr txBox="1"/>
+          <p:nvPr/>
+        </p:nvSpPr>
+        <p:spPr>
+          <a:xfrm>
+            <a:off x="1188720" y="3410712"/>
+            <a:ext cx="10271455" cy="786384"/>
+          </a:xfrm>
+          <a:prstGeom prst="rect">
+            <a:avLst/>
+          </a:prstGeom>
+          <a:noFill/>
+        </p:spPr>
+        <p:txBody>
+          <a:bodyPr wrap="square" anchor="ctr"/>
+          <a:lstStyle/>
+          <a:p>
+            <a:r>
+              <a:rPr sz="1400" b="1" i="0">
+                <a:solidFill>
+                  <a:srgbClr val="095292"/>
+                </a:solidFill>
+                <a:latin typeface="Calibri"/>
+              </a:rPr>
+              <a:t>Paso 3. Construyan el banco de diez preguntas del jurado con su respuesta en maximo dos frases, incluyendo obligatoriamente que pasa si dos recepcionistas registran la misma mascota, como se mide su RNF de tiempo de respuesta y que quedo fuera del alcance.</a:t>
+            </a:r>
+          </a:p>
+        </p:txBody>
+      </p:sp>
+      <p:sp>
+        <p:nvSpPr>
+          <p:cNvPr id="17" name="Rounded Rectangle 16"/>
           <p:cNvSpPr/>
           <p:nvPr/>
         </p:nvSpPr>
         <p:spPr>
           <a:xfrm>
-            <a:off x="640080" y="2084832"/>
-            <a:ext cx="73152" cy="274320"/>
-          </a:xfrm>
-          <a:prstGeom prst="rect">
-            <a:avLst/>
+            <a:off x="457200" y="4361688"/>
+            <a:ext cx="11277295" cy="950976"/>
+          </a:xfrm>
+          <a:prstGeom prst="roundRect">
+            <a:avLst>
+              <a:gd name="adj" fmla="val 12000"/>
+            </a:avLst>
           </a:prstGeom>
           <a:solidFill>
-            <a:srgbClr val="269CCB"/>
+            <a:srgbClr val="E8F4FA"/>
           </a:solidFill>
           <a:ln>
             <a:noFill/>
@@ -7858,14 +7383,59 @@
       </p:sp>
       <p:sp>
         <p:nvSpPr>
-          <p:cNvPr id="12" name="TextBox 11"/>
+          <p:cNvPr id="18" name="Rounded Rectangle 17"/>
+          <p:cNvSpPr/>
+          <p:nvPr/>
+        </p:nvSpPr>
+        <p:spPr>
+          <a:xfrm>
+            <a:off x="594360" y="4617720"/>
+            <a:ext cx="438912" cy="438912"/>
+          </a:xfrm>
+          <a:prstGeom prst="roundRect">
+            <a:avLst>
+              <a:gd name="adj" fmla="val 12000"/>
+            </a:avLst>
+          </a:prstGeom>
+          <a:solidFill>
+            <a:srgbClr val="095292"/>
+          </a:solidFill>
+          <a:ln>
+            <a:noFill/>
+          </a:ln>
+        </p:spPr>
+        <p:style>
+          <a:lnRef idx="1">
+            <a:schemeClr val="accent1"/>
+          </a:lnRef>
+          <a:fillRef idx="3">
+            <a:schemeClr val="accent1"/>
+          </a:fillRef>
+          <a:effectRef idx="2">
+            <a:schemeClr val="accent1"/>
+          </a:effectRef>
+          <a:fontRef idx="minor">
+            <a:schemeClr val="lt1"/>
+          </a:fontRef>
+        </p:style>
+        <p:txBody>
+          <a:bodyPr rtlCol="0" anchor="ctr"/>
+          <a:lstStyle/>
+          <a:p>
+            <a:pPr algn="ctr"/>
+          </a:p>
+        </p:txBody>
+      </p:sp>
+      <p:sp>
+        <p:nvSpPr>
+          <p:cNvPr id="19" name="TextBox 18"/>
           <p:cNvSpPr txBox="1"/>
           <p:nvPr/>
         </p:nvSpPr>
         <p:spPr>
           <a:xfrm>
-            <a:off x="1097280" y="2029968"/>
-            <a:ext cx="10362895" cy="402336"/>
+            <a:off x="594360" y="4617720"/>
+            <a:ext cx="438912" cy="438912"/>
           </a:xfrm>
           <a:prstGeom prst="rect">
             <a:avLst/>
@@ -7876,28 +7446,61 @@
           <a:bodyPr wrap="square" anchor="ctr"/>
           <a:lstStyle/>
           <a:p>
-            <a:r>
-              <a:rPr sz="1500" b="0" i="0">
-                <a:solidFill>
-                  <a:srgbClr val="333333"/>
-                </a:solidFill>
-                <a:latin typeface="Calibri"/>
-              </a:rPr>
-              <a:t>De sus tres decisiones de diseño, cual podria haberse tomado al reves sin que el proyecto se cayera, y que perderia la clinica si se hubiera tomado asi.</a:t>
-            </a:r>
-          </a:p>
-        </p:txBody>
-      </p:sp>
-      <p:sp>
-        <p:nvSpPr>
-          <p:cNvPr id="13" name="Rounded Rectangle 12"/>
+            <a:pPr algn="ctr"/>
+            <a:r>
+              <a:rPr sz="1600" b="1" i="0">
+                <a:solidFill>
+                  <a:srgbClr val="FFFFFF"/>
+                </a:solidFill>
+                <a:latin typeface="Calibri"/>
+              </a:rPr>
+              <a:t>4</a:t>
+            </a:r>
+          </a:p>
+        </p:txBody>
+      </p:sp>
+      <p:sp>
+        <p:nvSpPr>
+          <p:cNvPr id="20" name="TextBox 19"/>
+          <p:cNvSpPr txBox="1"/>
+          <p:nvPr/>
+        </p:nvSpPr>
+        <p:spPr>
+          <a:xfrm>
+            <a:off x="1188720" y="4453128"/>
+            <a:ext cx="10271455" cy="786384"/>
+          </a:xfrm>
+          <a:prstGeom prst="rect">
+            <a:avLst/>
+          </a:prstGeom>
+          <a:noFill/>
+        </p:spPr>
+        <p:txBody>
+          <a:bodyPr wrap="square" anchor="ctr"/>
+          <a:lstStyle/>
+          <a:p>
+            <a:r>
+              <a:rPr sz="1400" b="1" i="0">
+                <a:solidFill>
+                  <a:srgbClr val="095292"/>
+                </a:solidFill>
+                <a:latin typeface="Calibri"/>
+              </a:rPr>
+              <a:t>Paso 4. Haga un ensayo cronometrado de pie, con el prototipo abierto, y registre el tiempo real de cada bloque; recorte lo que se paso y anote los dos puntos donde se enredo al hablar (si trabaja en equipo, donde se enredo la transicion entre un expositor y el siguiente).</a:t>
+            </a:r>
+          </a:p>
+        </p:txBody>
+      </p:sp>
+      <p:sp>
+        <p:nvSpPr>
+          <p:cNvPr id="21" name="Rounded Rectangle 20"/>
           <p:cNvSpPr/>
           <p:nvPr/>
         </p:nvSpPr>
         <p:spPr>
           <a:xfrm>
-            <a:off x="457200" y="2615184"/>
-            <a:ext cx="11277295" cy="566928"/>
+            <a:off x="457200" y="5404104"/>
+            <a:ext cx="11277295" cy="950976"/>
           </a:xfrm>
           <a:prstGeom prst="roundRect">
             <a:avLst>
@@ -7935,25 +7538,25 @@
       </p:sp>
       <p:sp>
         <p:nvSpPr>
-          <p:cNvPr id="14" name="Rectangle 13"/>
+          <p:cNvPr id="22" name="Rounded Rectangle 21"/>
           <p:cNvSpPr/>
           <p:nvPr/>
         </p:nvSpPr>
         <p:spPr>
           <a:xfrm>
-            <a:off x="640080" y="2761488"/>
-            <a:ext cx="274320" cy="274320"/>
-          </a:xfrm>
-          <a:prstGeom prst="rect">
-            <a:avLst/>
+            <a:off x="594360" y="5660136"/>
+            <a:ext cx="438912" cy="438912"/>
+          </a:xfrm>
+          <a:prstGeom prst="roundRect">
+            <a:avLst>
+              <a:gd name="adj" fmla="val 12000"/>
+            </a:avLst>
           </a:prstGeom>
           <a:solidFill>
-            <a:srgbClr val="FFFFFF"/>
+            <a:srgbClr val="095292"/>
           </a:solidFill>
           <a:ln>
-            <a:solidFill>
-              <a:srgbClr val="333333"/>
-            </a:solidFill>
+            <a:noFill/>
           </a:ln>
         </p:spPr>
         <p:style>
@@ -7980,57 +7583,47 @@
       </p:sp>
       <p:sp>
         <p:nvSpPr>
-          <p:cNvPr id="15" name="Rectangle 14"/>
-          <p:cNvSpPr/>
-          <p:nvPr/>
-        </p:nvSpPr>
-        <p:spPr>
-          <a:xfrm>
-            <a:off x="640080" y="2761488"/>
-            <a:ext cx="73152" cy="274320"/>
-          </a:xfrm>
-          <a:prstGeom prst="rect">
-            <a:avLst/>
-          </a:prstGeom>
-          <a:solidFill>
-            <a:srgbClr val="269CCB"/>
-          </a:solidFill>
-          <a:ln>
-            <a:noFill/>
-          </a:ln>
-        </p:spPr>
-        <p:style>
-          <a:lnRef idx="1">
-            <a:schemeClr val="accent1"/>
-          </a:lnRef>
-          <a:fillRef idx="3">
-            <a:schemeClr val="accent1"/>
-          </a:fillRef>
-          <a:effectRef idx="2">
-            <a:schemeClr val="accent1"/>
-          </a:effectRef>
-          <a:fontRef idx="minor">
-            <a:schemeClr val="lt1"/>
-          </a:fontRef>
-        </p:style>
-        <p:txBody>
-          <a:bodyPr rtlCol="0" anchor="ctr"/>
+          <p:cNvPr id="23" name="TextBox 22"/>
+          <p:cNvSpPr txBox="1"/>
+          <p:nvPr/>
+        </p:nvSpPr>
+        <p:spPr>
+          <a:xfrm>
+            <a:off x="594360" y="5660136"/>
+            <a:ext cx="438912" cy="438912"/>
+          </a:xfrm>
+          <a:prstGeom prst="rect">
+            <a:avLst/>
+          </a:prstGeom>
+          <a:noFill/>
+        </p:spPr>
+        <p:txBody>
+          <a:bodyPr wrap="square" anchor="ctr"/>
           <a:lstStyle/>
           <a:p>
             <a:pPr algn="ctr"/>
-          </a:p>
-        </p:txBody>
-      </p:sp>
-      <p:sp>
-        <p:nvSpPr>
-          <p:cNvPr id="16" name="TextBox 15"/>
+            <a:r>
+              <a:rPr sz="1600" b="1" i="0">
+                <a:solidFill>
+                  <a:srgbClr val="FFFFFF"/>
+                </a:solidFill>
+                <a:latin typeface="Calibri"/>
+              </a:rPr>
+              <a:t>5</a:t>
+            </a:r>
+          </a:p>
+        </p:txBody>
+      </p:sp>
+      <p:sp>
+        <p:nvSpPr>
+          <p:cNvPr id="24" name="TextBox 23"/>
           <p:cNvSpPr txBox="1"/>
           <p:nvPr/>
         </p:nvSpPr>
         <p:spPr>
           <a:xfrm>
-            <a:off x="1097280" y="2706624"/>
-            <a:ext cx="10362895" cy="402336"/>
+            <a:off x="1188720" y="5495544"/>
+            <a:ext cx="10271455" cy="786384"/>
           </a:xfrm>
           <a:prstGeom prst="rect">
             <a:avLst/>
@@ -8042,20 +7635,20 @@
           <a:lstStyle/>
           <a:p>
             <a:r>
-              <a:rPr sz="1500" b="0" i="0">
-                <a:solidFill>
-                  <a:srgbClr val="333333"/>
-                </a:solidFill>
-                <a:latin typeface="Calibri"/>
-              </a:rPr>
-              <a:t>Si el internet falla justo antes de mostrar el prototipo, que hace el equipo en los siguientes quince segundos para no perder el bloque de interfaz.</a:t>
-            </a:r>
-          </a:p>
-        </p:txBody>
-      </p:sp>
-      <p:sp>
-        <p:nvSpPr>
-          <p:cNvPr id="17" name="TextBox 16"/>
+              <a:rPr sz="1400" b="1" i="0">
+                <a:solidFill>
+                  <a:srgbClr val="095292"/>
+                </a:solidFill>
+                <a:latin typeface="Calibri"/>
+              </a:rPr>
+              <a:t>Paso 5. Consoliden el documento final armando el indice completo desde problema hasta trazabilidad, verifiquen que los nombres de las clases, los campos del diccionario y los campos de las pantallas coinciden exactamente, y corrijan al menos una inconsistencia encontrada dejando constancia de cual era.</a:t>
+            </a:r>
+          </a:p>
+        </p:txBody>
+      </p:sp>
+      <p:sp>
+        <p:nvSpPr>
+          <p:cNvPr id="25" name="TextBox 24"/>
           <p:cNvSpPr txBox="1"/>
           <p:nvPr/>
         </p:nvSpPr>
@@ -8229,21 +7822,154 @@
                 </a:solidFill>
                 <a:latin typeface="Calibri"/>
               </a:rPr>
-              <a:t>Criterios de exito / entregable</a:t>
-            </a:r>
-          </a:p>
-        </p:txBody>
-      </p:sp>
-      <p:sp>
-        <p:nvSpPr>
-          <p:cNvPr id="5" name="TextBox 4"/>
+              <a:t>Antes de entregar — autochequeo</a:t>
+            </a:r>
+          </a:p>
+        </p:txBody>
+      </p:sp>
+      <p:sp>
+        <p:nvSpPr>
+          <p:cNvPr id="5" name="Rounded Rectangle 4"/>
+          <p:cNvSpPr/>
+          <p:nvPr/>
+        </p:nvSpPr>
+        <p:spPr>
+          <a:xfrm>
+            <a:off x="457200" y="1261872"/>
+            <a:ext cx="11277295" cy="566928"/>
+          </a:xfrm>
+          <a:prstGeom prst="roundRect">
+            <a:avLst>
+              <a:gd name="adj" fmla="val 12000"/>
+            </a:avLst>
+          </a:prstGeom>
+          <a:solidFill>
+            <a:srgbClr val="F2F2F2"/>
+          </a:solidFill>
+          <a:ln>
+            <a:noFill/>
+          </a:ln>
+        </p:spPr>
+        <p:style>
+          <a:lnRef idx="1">
+            <a:schemeClr val="accent1"/>
+          </a:lnRef>
+          <a:fillRef idx="3">
+            <a:schemeClr val="accent1"/>
+          </a:fillRef>
+          <a:effectRef idx="2">
+            <a:schemeClr val="accent1"/>
+          </a:effectRef>
+          <a:fontRef idx="minor">
+            <a:schemeClr val="lt1"/>
+          </a:fontRef>
+        </p:style>
+        <p:txBody>
+          <a:bodyPr rtlCol="0" anchor="ctr"/>
+          <a:lstStyle/>
+          <a:p>
+            <a:pPr algn="ctr"/>
+          </a:p>
+        </p:txBody>
+      </p:sp>
+      <p:sp>
+        <p:nvSpPr>
+          <p:cNvPr id="6" name="Rectangle 5"/>
+          <p:cNvSpPr/>
+          <p:nvPr/>
+        </p:nvSpPr>
+        <p:spPr>
+          <a:xfrm>
+            <a:off x="640080" y="1408175"/>
+            <a:ext cx="274320" cy="274320"/>
+          </a:xfrm>
+          <a:prstGeom prst="rect">
+            <a:avLst/>
+          </a:prstGeom>
+          <a:solidFill>
+            <a:srgbClr val="FFFFFF"/>
+          </a:solidFill>
+          <a:ln>
+            <a:solidFill>
+              <a:srgbClr val="333333"/>
+            </a:solidFill>
+          </a:ln>
+        </p:spPr>
+        <p:style>
+          <a:lnRef idx="1">
+            <a:schemeClr val="accent1"/>
+          </a:lnRef>
+          <a:fillRef idx="3">
+            <a:schemeClr val="accent1"/>
+          </a:fillRef>
+          <a:effectRef idx="2">
+            <a:schemeClr val="accent1"/>
+          </a:effectRef>
+          <a:fontRef idx="minor">
+            <a:schemeClr val="lt1"/>
+          </a:fontRef>
+        </p:style>
+        <p:txBody>
+          <a:bodyPr rtlCol="0" anchor="ctr"/>
+          <a:lstStyle/>
+          <a:p>
+            <a:pPr algn="ctr"/>
+          </a:p>
+        </p:txBody>
+      </p:sp>
+      <p:sp>
+        <p:nvSpPr>
+          <p:cNvPr id="7" name="Rectangle 6"/>
+          <p:cNvSpPr/>
+          <p:nvPr/>
+        </p:nvSpPr>
+        <p:spPr>
+          <a:xfrm>
+            <a:off x="640080" y="1408175"/>
+            <a:ext cx="73152" cy="274320"/>
+          </a:xfrm>
+          <a:prstGeom prst="rect">
+            <a:avLst/>
+          </a:prstGeom>
+          <a:solidFill>
+            <a:srgbClr val="269CCB"/>
+          </a:solidFill>
+          <a:ln>
+            <a:noFill/>
+          </a:ln>
+        </p:spPr>
+        <p:style>
+          <a:lnRef idx="1">
+            <a:schemeClr val="accent1"/>
+          </a:lnRef>
+          <a:fillRef idx="3">
+            <a:schemeClr val="accent1"/>
+          </a:fillRef>
+          <a:effectRef idx="2">
+            <a:schemeClr val="accent1"/>
+          </a:effectRef>
+          <a:fontRef idx="minor">
+            <a:schemeClr val="lt1"/>
+          </a:fontRef>
+        </p:style>
+        <p:txBody>
+          <a:bodyPr rtlCol="0" anchor="ctr"/>
+          <a:lstStyle/>
+          <a:p>
+            <a:pPr algn="ctr"/>
+          </a:p>
+        </p:txBody>
+      </p:sp>
+      <p:sp>
+        <p:nvSpPr>
+          <p:cNvPr id="8" name="TextBox 7"/>
           <p:cNvSpPr txBox="1"/>
           <p:nvPr/>
         </p:nvSpPr>
         <p:spPr>
           <a:xfrm>
-            <a:off x="457200" y="1170432"/>
-            <a:ext cx="11277295" cy="5230368"/>
+            <a:off x="1097280" y="1353312"/>
+            <a:ext cx="10362895" cy="402336"/>
           </a:xfrm>
           <a:prstGeom prst="rect">
             <a:avLst/>
@@ -8251,219 +7977,354 @@
           <a:noFill/>
         </p:spPr>
         <p:txBody>
-          <a:bodyPr wrap="square">
-            <a:spAutoFit/>
-          </a:bodyPr>
-          <a:lstStyle/>
-          <a:p>
-            <a:pPr>
-              <a:spcAft>
-                <a:spcPts val="800"/>
-              </a:spcAft>
-            </a:pPr>
-            <a:r>
-              <a:rPr sz="2000" b="0" i="0">
+          <a:bodyPr wrap="square" anchor="ctr"/>
+          <a:lstStyle/>
+          <a:p>
+            <a:r>
+              <a:rPr sz="1500" b="0" i="0">
                 <a:solidFill>
                   <a:srgbClr val="333333"/>
                 </a:solidFill>
                 <a:latin typeface="Calibri"/>
               </a:rPr>
-              <a:t>–   </a:t>
-            </a:r>
-            <a:r>
-              <a:rPr sz="2000" b="1" i="0">
+              <a:t>Si el jurado le pregunta por una parte que no alcanzo a mostrar, puede responderla sin buscar ayuda (y si hay equipo autorizado, cualquier integrante puede responder por cualquier bloque).</a:t>
+            </a:r>
+          </a:p>
+        </p:txBody>
+      </p:sp>
+      <p:sp>
+        <p:nvSpPr>
+          <p:cNvPr id="9" name="Rounded Rectangle 8"/>
+          <p:cNvSpPr/>
+          <p:nvPr/>
+        </p:nvSpPr>
+        <p:spPr>
+          <a:xfrm>
+            <a:off x="457200" y="1938528"/>
+            <a:ext cx="11277295" cy="566928"/>
+          </a:xfrm>
+          <a:prstGeom prst="roundRect">
+            <a:avLst>
+              <a:gd name="adj" fmla="val 12000"/>
+            </a:avLst>
+          </a:prstGeom>
+          <a:solidFill>
+            <a:srgbClr val="F2F2F2"/>
+          </a:solidFill>
+          <a:ln>
+            <a:noFill/>
+          </a:ln>
+        </p:spPr>
+        <p:style>
+          <a:lnRef idx="1">
+            <a:schemeClr val="accent1"/>
+          </a:lnRef>
+          <a:fillRef idx="3">
+            <a:schemeClr val="accent1"/>
+          </a:fillRef>
+          <a:effectRef idx="2">
+            <a:schemeClr val="accent1"/>
+          </a:effectRef>
+          <a:fontRef idx="minor">
+            <a:schemeClr val="lt1"/>
+          </a:fontRef>
+        </p:style>
+        <p:txBody>
+          <a:bodyPr rtlCol="0" anchor="ctr"/>
+          <a:lstStyle/>
+          <a:p>
+            <a:pPr algn="ctr"/>
+          </a:p>
+        </p:txBody>
+      </p:sp>
+      <p:sp>
+        <p:nvSpPr>
+          <p:cNvPr id="10" name="Rectangle 9"/>
+          <p:cNvSpPr/>
+          <p:nvPr/>
+        </p:nvSpPr>
+        <p:spPr>
+          <a:xfrm>
+            <a:off x="640080" y="2084832"/>
+            <a:ext cx="274320" cy="274320"/>
+          </a:xfrm>
+          <a:prstGeom prst="rect">
+            <a:avLst/>
+          </a:prstGeom>
+          <a:solidFill>
+            <a:srgbClr val="FFFFFF"/>
+          </a:solidFill>
+          <a:ln>
+            <a:solidFill>
+              <a:srgbClr val="333333"/>
+            </a:solidFill>
+          </a:ln>
+        </p:spPr>
+        <p:style>
+          <a:lnRef idx="1">
+            <a:schemeClr val="accent1"/>
+          </a:lnRef>
+          <a:fillRef idx="3">
+            <a:schemeClr val="accent1"/>
+          </a:fillRef>
+          <a:effectRef idx="2">
+            <a:schemeClr val="accent1"/>
+          </a:effectRef>
+          <a:fontRef idx="minor">
+            <a:schemeClr val="lt1"/>
+          </a:fontRef>
+        </p:style>
+        <p:txBody>
+          <a:bodyPr rtlCol="0" anchor="ctr"/>
+          <a:lstStyle/>
+          <a:p>
+            <a:pPr algn="ctr"/>
+          </a:p>
+        </p:txBody>
+      </p:sp>
+      <p:sp>
+        <p:nvSpPr>
+          <p:cNvPr id="11" name="Rectangle 10"/>
+          <p:cNvSpPr/>
+          <p:nvPr/>
+        </p:nvSpPr>
+        <p:spPr>
+          <a:xfrm>
+            <a:off x="640080" y="2084832"/>
+            <a:ext cx="73152" cy="274320"/>
+          </a:xfrm>
+          <a:prstGeom prst="rect">
+            <a:avLst/>
+          </a:prstGeom>
+          <a:solidFill>
+            <a:srgbClr val="269CCB"/>
+          </a:solidFill>
+          <a:ln>
+            <a:noFill/>
+          </a:ln>
+        </p:spPr>
+        <p:style>
+          <a:lnRef idx="1">
+            <a:schemeClr val="accent1"/>
+          </a:lnRef>
+          <a:fillRef idx="3">
+            <a:schemeClr val="accent1"/>
+          </a:fillRef>
+          <a:effectRef idx="2">
+            <a:schemeClr val="accent1"/>
+          </a:effectRef>
+          <a:fontRef idx="minor">
+            <a:schemeClr val="lt1"/>
+          </a:fontRef>
+        </p:style>
+        <p:txBody>
+          <a:bodyPr rtlCol="0" anchor="ctr"/>
+          <a:lstStyle/>
+          <a:p>
+            <a:pPr algn="ctr"/>
+          </a:p>
+        </p:txBody>
+      </p:sp>
+      <p:sp>
+        <p:nvSpPr>
+          <p:cNvPr id="12" name="TextBox 11"/>
+          <p:cNvSpPr txBox="1"/>
+          <p:nvPr/>
+        </p:nvSpPr>
+        <p:spPr>
+          <a:xfrm>
+            <a:off x="1097280" y="2029968"/>
+            <a:ext cx="10362895" cy="402336"/>
+          </a:xfrm>
+          <a:prstGeom prst="rect">
+            <a:avLst/>
+          </a:prstGeom>
+          <a:noFill/>
+        </p:spPr>
+        <p:txBody>
+          <a:bodyPr wrap="square" anchor="ctr"/>
+          <a:lstStyle/>
+          <a:p>
+            <a:r>
+              <a:rPr sz="1500" b="0" i="0">
                 <a:solidFill>
                   <a:srgbClr val="333333"/>
                 </a:solidFill>
                 <a:latin typeface="Calibri"/>
               </a:rPr>
-              <a:t>Entregable:</a:t>
-            </a:r>
-            <a:r>
-              <a:rPr sz="2000" b="0" i="0">
+              <a:t>De sus tres decisiones de diseño, cual podria haberse tomado al reves sin que el proyecto se cayera, y que perderia la clinica si se hubiera tomado asi.</a:t>
+            </a:r>
+          </a:p>
+        </p:txBody>
+      </p:sp>
+      <p:sp>
+        <p:nvSpPr>
+          <p:cNvPr id="13" name="Rounded Rectangle 12"/>
+          <p:cNvSpPr/>
+          <p:nvPr/>
+        </p:nvSpPr>
+        <p:spPr>
+          <a:xfrm>
+            <a:off x="457200" y="2615184"/>
+            <a:ext cx="11277295" cy="566928"/>
+          </a:xfrm>
+          <a:prstGeom prst="roundRect">
+            <a:avLst>
+              <a:gd name="adj" fmla="val 12000"/>
+            </a:avLst>
+          </a:prstGeom>
+          <a:solidFill>
+            <a:srgbClr val="F2F2F2"/>
+          </a:solidFill>
+          <a:ln>
+            <a:noFill/>
+          </a:ln>
+        </p:spPr>
+        <p:style>
+          <a:lnRef idx="1">
+            <a:schemeClr val="accent1"/>
+          </a:lnRef>
+          <a:fillRef idx="3">
+            <a:schemeClr val="accent1"/>
+          </a:fillRef>
+          <a:effectRef idx="2">
+            <a:schemeClr val="accent1"/>
+          </a:effectRef>
+          <a:fontRef idx="minor">
+            <a:schemeClr val="lt1"/>
+          </a:fontRef>
+        </p:style>
+        <p:txBody>
+          <a:bodyPr rtlCol="0" anchor="ctr"/>
+          <a:lstStyle/>
+          <a:p>
+            <a:pPr algn="ctr"/>
+          </a:p>
+        </p:txBody>
+      </p:sp>
+      <p:sp>
+        <p:nvSpPr>
+          <p:cNvPr id="14" name="Rectangle 13"/>
+          <p:cNvSpPr/>
+          <p:nvPr/>
+        </p:nvSpPr>
+        <p:spPr>
+          <a:xfrm>
+            <a:off x="640080" y="2761488"/>
+            <a:ext cx="274320" cy="274320"/>
+          </a:xfrm>
+          <a:prstGeom prst="rect">
+            <a:avLst/>
+          </a:prstGeom>
+          <a:solidFill>
+            <a:srgbClr val="FFFFFF"/>
+          </a:solidFill>
+          <a:ln>
+            <a:solidFill>
+              <a:srgbClr val="333333"/>
+            </a:solidFill>
+          </a:ln>
+        </p:spPr>
+        <p:style>
+          <a:lnRef idx="1">
+            <a:schemeClr val="accent1"/>
+          </a:lnRef>
+          <a:fillRef idx="3">
+            <a:schemeClr val="accent1"/>
+          </a:fillRef>
+          <a:effectRef idx="2">
+            <a:schemeClr val="accent1"/>
+          </a:effectRef>
+          <a:fontRef idx="minor">
+            <a:schemeClr val="lt1"/>
+          </a:fontRef>
+        </p:style>
+        <p:txBody>
+          <a:bodyPr rtlCol="0" anchor="ctr"/>
+          <a:lstStyle/>
+          <a:p>
+            <a:pPr algn="ctr"/>
+          </a:p>
+        </p:txBody>
+      </p:sp>
+      <p:sp>
+        <p:nvSpPr>
+          <p:cNvPr id="15" name="Rectangle 14"/>
+          <p:cNvSpPr/>
+          <p:nvPr/>
+        </p:nvSpPr>
+        <p:spPr>
+          <a:xfrm>
+            <a:off x="640080" y="2761488"/>
+            <a:ext cx="73152" cy="274320"/>
+          </a:xfrm>
+          <a:prstGeom prst="rect">
+            <a:avLst/>
+          </a:prstGeom>
+          <a:solidFill>
+            <a:srgbClr val="269CCB"/>
+          </a:solidFill>
+          <a:ln>
+            <a:noFill/>
+          </a:ln>
+        </p:spPr>
+        <p:style>
+          <a:lnRef idx="1">
+            <a:schemeClr val="accent1"/>
+          </a:lnRef>
+          <a:fillRef idx="3">
+            <a:schemeClr val="accent1"/>
+          </a:fillRef>
+          <a:effectRef idx="2">
+            <a:schemeClr val="accent1"/>
+          </a:effectRef>
+          <a:fontRef idx="minor">
+            <a:schemeClr val="lt1"/>
+          </a:fontRef>
+        </p:style>
+        <p:txBody>
+          <a:bodyPr rtlCol="0" anchor="ctr"/>
+          <a:lstStyle/>
+          <a:p>
+            <a:pPr algn="ctr"/>
+          </a:p>
+        </p:txBody>
+      </p:sp>
+      <p:sp>
+        <p:nvSpPr>
+          <p:cNvPr id="16" name="TextBox 15"/>
+          <p:cNvSpPr txBox="1"/>
+          <p:nvPr/>
+        </p:nvSpPr>
+        <p:spPr>
+          <a:xfrm>
+            <a:off x="1097280" y="2706624"/>
+            <a:ext cx="10362895" cy="402336"/>
+          </a:xfrm>
+          <a:prstGeom prst="rect">
+            <a:avLst/>
+          </a:prstGeom>
+          <a:noFill/>
+        </p:spPr>
+        <p:txBody>
+          <a:bodyPr wrap="square" anchor="ctr"/>
+          <a:lstStyle/>
+          <a:p>
+            <a:r>
+              <a:rPr sz="1500" b="0" i="0">
                 <a:solidFill>
                   <a:srgbClr val="333333"/>
                 </a:solidFill>
                 <a:latin typeface="Calibri"/>
               </a:rPr>
-              <a:t> Un documento en Google Docs con el guion minuto a minuto repartido en bloques con tiempos y evidencia (con responsable nominal solo si el docente autorizo equipo), la tabla de tres decisiones de diseño defendidas y el banco de diez preguntas con su respuesta, mas el indice del documento final consolidado, subido a la plataforma del curso.</a:t>
-            </a:r>
-          </a:p>
-          <a:p>
-            <a:pPr>
-              <a:spcAft>
-                <a:spcPts val="800"/>
-              </a:spcAft>
-            </a:pPr>
-            <a:r>
-              <a:rPr sz="2000" b="0" i="0">
-                <a:solidFill>
-                  <a:srgbClr val="333333"/>
-                </a:solidFill>
-                <a:latin typeface="Calibri"/>
-              </a:rPr>
-              <a:t>–   </a:t>
-            </a:r>
-            <a:r>
-              <a:rPr sz="2000" b="1" i="0">
-                <a:solidFill>
-                  <a:srgbClr val="333333"/>
-                </a:solidFill>
-                <a:latin typeface="Calibri"/>
-              </a:rPr>
-              <a:t>Exito:</a:t>
-            </a:r>
-            <a:r>
-              <a:rPr sz="2000" b="0" i="0">
-                <a:solidFill>
-                  <a:srgbClr val="333333"/>
-                </a:solidFill>
-                <a:latin typeface="Calibri"/>
-              </a:rPr>
-              <a:t> El guion tiene las cinco secciones en el orden problema, requisitos, modelo, interfaz y decisiones, con minutos asignados que suman doce, cada bloque con su evidencia en pantalla y, si el docente autorizo equipo, todos los integrantes hablando al menos dos minutos.</a:t>
-            </a:r>
-          </a:p>
-          <a:p>
-            <a:pPr>
-              <a:spcAft>
-                <a:spcPts val="800"/>
-              </a:spcAft>
-            </a:pPr>
-            <a:r>
-              <a:rPr sz="2000" b="0" i="0">
-                <a:solidFill>
-                  <a:srgbClr val="333333"/>
-                </a:solidFill>
-                <a:latin typeface="Calibri"/>
-              </a:rPr>
-              <a:t>–   </a:t>
-            </a:r>
-            <a:r>
-              <a:rPr sz="2000" b="1" i="0">
-                <a:solidFill>
-                  <a:srgbClr val="333333"/>
-                </a:solidFill>
-                <a:latin typeface="Calibri"/>
-              </a:rPr>
-              <a:t>Exito:</a:t>
-            </a:r>
-            <a:r>
-              <a:rPr sz="2000" b="0" i="0">
-                <a:solidFill>
-                  <a:srgbClr val="333333"/>
-                </a:solidFill>
-                <a:latin typeface="Calibri"/>
-              </a:rPr>
-              <a:t> Las tres decisiones de diseño estan escritas con las cuatro columnas completas, incluida la consecuencia asumida, y ninguna se justifica por gusto o por costumbre.</a:t>
-            </a:r>
-          </a:p>
-          <a:p>
-            <a:pPr>
-              <a:spcAft>
-                <a:spcPts val="800"/>
-              </a:spcAft>
-            </a:pPr>
-            <a:r>
-              <a:rPr sz="2000" b="0" i="0">
-                <a:solidFill>
-                  <a:srgbClr val="333333"/>
-                </a:solidFill>
-                <a:latin typeface="Calibri"/>
-              </a:rPr>
-              <a:t>–   </a:t>
-            </a:r>
-            <a:r>
-              <a:rPr sz="2000" b="1" i="0">
-                <a:solidFill>
-                  <a:srgbClr val="333333"/>
-                </a:solidFill>
-                <a:latin typeface="Calibri"/>
-              </a:rPr>
-              <a:t>Exito:</a:t>
-            </a:r>
-            <a:r>
-              <a:rPr sz="2000" b="0" i="0">
-                <a:solidFill>
-                  <a:srgbClr val="333333"/>
-                </a:solidFill>
-                <a:latin typeface="Calibri"/>
-              </a:rPr>
-              <a:t> El banco tiene diez preguntas con respuesta de maximo dos frases y contempla al menos un caso de concurrencia, uno de medicion de RNF y uno de alcance excluido.</a:t>
-            </a:r>
-          </a:p>
-          <a:p>
-            <a:pPr>
-              <a:spcAft>
-                <a:spcPts val="800"/>
-              </a:spcAft>
-            </a:pPr>
-            <a:r>
-              <a:rPr sz="2000" b="0" i="0">
-                <a:solidFill>
-                  <a:srgbClr val="333333"/>
-                </a:solidFill>
-                <a:latin typeface="Calibri"/>
-              </a:rPr>
-              <a:t>–   </a:t>
-            </a:r>
-            <a:r>
-              <a:rPr sz="2000" b="1" i="0">
-                <a:solidFill>
-                  <a:srgbClr val="333333"/>
-                </a:solidFill>
-                <a:latin typeface="Calibri"/>
-              </a:rPr>
-              <a:t>Exito:</a:t>
-            </a:r>
-            <a:r>
-              <a:rPr sz="2000" b="0" i="0">
-                <a:solidFill>
-                  <a:srgbClr val="333333"/>
-                </a:solidFill>
-                <a:latin typeface="Calibri"/>
-              </a:rPr>
-              <a:t> El documento final consolidado tiene indice, version y al menos una inconsistencia entre artefactos detectada y corregida, dejando registro de cual era.</a:t>
-            </a:r>
-          </a:p>
-          <a:p>
-            <a:pPr>
-              <a:spcAft>
-                <a:spcPts val="800"/>
-              </a:spcAft>
-            </a:pPr>
-            <a:r>
-              <a:rPr sz="2000" b="0" i="0">
-                <a:solidFill>
-                  <a:srgbClr val="333333"/>
-                </a:solidFill>
-                <a:latin typeface="Calibri"/>
-              </a:rPr>
-              <a:t>–   </a:t>
-            </a:r>
-            <a:r>
-              <a:rPr sz="2000" b="1" i="0">
-                <a:solidFill>
-                  <a:srgbClr val="333333"/>
-                </a:solidFill>
-                <a:latin typeface="Calibri"/>
-              </a:rPr>
-              <a:t>Entrega en la plataforma del curso</a:t>
-            </a:r>
-            <a:r>
-              <a:rPr sz="2000" b="0" i="0">
-                <a:solidFill>
-                  <a:srgbClr val="333333"/>
-                </a:solidFill>
-                <a:latin typeface="Calibri"/>
-              </a:rPr>
-              <a:t> — en la fecha que indique el docente.</a:t>
-            </a:r>
-          </a:p>
-        </p:txBody>
-      </p:sp>
-      <p:sp>
-        <p:nvSpPr>
-          <p:cNvPr id="6" name="TextBox 5"/>
+              <a:t>Si el internet falla justo antes de mostrar el prototipo, que hace el equipo en los siguientes quince segundos para no perder el bloque de interfaz.</a:t>
+            </a:r>
+          </a:p>
+        </p:txBody>
+      </p:sp>
+      <p:sp>
+        <p:nvSpPr>
+          <p:cNvPr id="17" name="TextBox 16"/>
           <p:cNvSpPr txBox="1"/>
           <p:nvPr/>
         </p:nvSpPr>
@@ -8637,109 +8498,21 @@
                 </a:solidFill>
                 <a:latin typeface="Calibri"/>
               </a:rPr>
-              <a:t>Para el PI esta semana</a:t>
-            </a:r>
-          </a:p>
-        </p:txBody>
-      </p:sp>
-      <p:sp>
-        <p:nvSpPr>
-          <p:cNvPr id="5" name="Rounded Rectangle 4"/>
-          <p:cNvSpPr/>
-          <p:nvPr/>
-        </p:nvSpPr>
-        <p:spPr>
-          <a:xfrm>
-            <a:off x="457200" y="1261872"/>
-            <a:ext cx="11277295" cy="1051560"/>
-          </a:xfrm>
-          <a:prstGeom prst="roundRect">
-            <a:avLst>
-              <a:gd name="adj" fmla="val 12000"/>
-            </a:avLst>
-          </a:prstGeom>
-          <a:solidFill>
-            <a:srgbClr val="E8F4FA"/>
-          </a:solidFill>
-          <a:ln>
-            <a:noFill/>
-          </a:ln>
-        </p:spPr>
-        <p:style>
-          <a:lnRef idx="1">
-            <a:schemeClr val="accent1"/>
-          </a:lnRef>
-          <a:fillRef idx="3">
-            <a:schemeClr val="accent1"/>
-          </a:fillRef>
-          <a:effectRef idx="2">
-            <a:schemeClr val="accent1"/>
-          </a:effectRef>
-          <a:fontRef idx="minor">
-            <a:schemeClr val="lt1"/>
-          </a:fontRef>
-        </p:style>
-        <p:txBody>
-          <a:bodyPr rtlCol="0" anchor="ctr"/>
-          <a:lstStyle/>
-          <a:p>
-            <a:pPr algn="ctr"/>
-          </a:p>
-        </p:txBody>
-      </p:sp>
-      <p:sp>
-        <p:nvSpPr>
-          <p:cNvPr id="6" name="Rectangle 5"/>
-          <p:cNvSpPr/>
-          <p:nvPr/>
-        </p:nvSpPr>
-        <p:spPr>
-          <a:xfrm>
-            <a:off x="457200" y="1261872"/>
-            <a:ext cx="128016" cy="1051560"/>
-          </a:xfrm>
-          <a:prstGeom prst="rect">
-            <a:avLst/>
-          </a:prstGeom>
-          <a:solidFill>
-            <a:srgbClr val="269CCB"/>
-          </a:solidFill>
-          <a:ln>
-            <a:noFill/>
-          </a:ln>
-        </p:spPr>
-        <p:style>
-          <a:lnRef idx="1">
-            <a:schemeClr val="accent1"/>
-          </a:lnRef>
-          <a:fillRef idx="3">
-            <a:schemeClr val="accent1"/>
-          </a:fillRef>
-          <a:effectRef idx="2">
-            <a:schemeClr val="accent1"/>
-          </a:effectRef>
-          <a:fontRef idx="minor">
-            <a:schemeClr val="lt1"/>
-          </a:fontRef>
-        </p:style>
-        <p:txBody>
-          <a:bodyPr rtlCol="0" anchor="ctr"/>
-          <a:lstStyle/>
-          <a:p>
-            <a:pPr algn="ctr"/>
-          </a:p>
-        </p:txBody>
-      </p:sp>
-      <p:sp>
-        <p:nvSpPr>
-          <p:cNvPr id="7" name="TextBox 6"/>
+              <a:t>Criterios de exito / entregable</a:t>
+            </a:r>
+          </a:p>
+        </p:txBody>
+      </p:sp>
+      <p:sp>
+        <p:nvSpPr>
+          <p:cNvPr id="5" name="TextBox 4"/>
           <p:cNvSpPr txBox="1"/>
           <p:nvPr/>
         </p:nvSpPr>
         <p:spPr>
           <a:xfrm>
-            <a:off x="777240" y="1399031"/>
-            <a:ext cx="10774375" cy="822959"/>
+            <a:off x="457200" y="1170432"/>
+            <a:ext cx="11277295" cy="5230368"/>
           </a:xfrm>
           <a:prstGeom prst="rect">
             <a:avLst/>
@@ -8752,313 +8525,214 @@
           </a:bodyPr>
           <a:lstStyle/>
           <a:p>
-            <a:r>
-              <a:rPr sz="1200" b="1" i="0">
-                <a:solidFill>
-                  <a:srgbClr val="269CCB"/>
-                </a:solidFill>
-                <a:latin typeface="Calibri"/>
-              </a:rPr>
-              <a:t>Info</a:t>
-            </a:r>
-          </a:p>
-          <a:p>
             <a:pPr>
-              <a:spcBef>
-                <a:spcPts val="400"/>
-              </a:spcBef>
+              <a:spcAft>
+                <a:spcPts val="800"/>
+              </a:spcAft>
             </a:pPr>
             <a:r>
-              <a:rPr sz="1400" b="0" i="0">
+              <a:rPr sz="2000" b="0" i="0">
                 <a:solidFill>
                   <a:srgbClr val="333333"/>
                 </a:solidFill>
                 <a:latin typeface="Calibri"/>
               </a:rPr>
-              <a:t>Hito: Queda armado el guion cronometrado de sustentacion de VetCare y consolidado el documento final de diseño en una sola pieza coherente.</a:t>
-            </a:r>
-          </a:p>
-        </p:txBody>
-      </p:sp>
-      <p:sp>
-        <p:nvSpPr>
-          <p:cNvPr id="8" name="Rounded Rectangle 7"/>
-          <p:cNvSpPr/>
-          <p:nvPr/>
-        </p:nvSpPr>
-        <p:spPr>
-          <a:xfrm>
-            <a:off x="457200" y="2478024"/>
-            <a:ext cx="11277295" cy="1051560"/>
-          </a:xfrm>
-          <a:prstGeom prst="roundRect">
-            <a:avLst>
-              <a:gd name="adj" fmla="val 12000"/>
-            </a:avLst>
-          </a:prstGeom>
-          <a:solidFill>
-            <a:srgbClr val="FFF8E1"/>
-          </a:solidFill>
-          <a:ln>
-            <a:noFill/>
-          </a:ln>
-        </p:spPr>
-        <p:style>
-          <a:lnRef idx="1">
-            <a:schemeClr val="accent1"/>
-          </a:lnRef>
-          <a:fillRef idx="3">
-            <a:schemeClr val="accent1"/>
-          </a:fillRef>
-          <a:effectRef idx="2">
-            <a:schemeClr val="accent1"/>
-          </a:effectRef>
-          <a:fontRef idx="minor">
-            <a:schemeClr val="lt1"/>
-          </a:fontRef>
-        </p:style>
-        <p:txBody>
-          <a:bodyPr rtlCol="0" anchor="ctr"/>
-          <a:lstStyle/>
-          <a:p>
-            <a:pPr algn="ctr"/>
-          </a:p>
-        </p:txBody>
-      </p:sp>
-      <p:sp>
-        <p:nvSpPr>
-          <p:cNvPr id="9" name="Rectangle 8"/>
-          <p:cNvSpPr/>
-          <p:nvPr/>
-        </p:nvSpPr>
-        <p:spPr>
-          <a:xfrm>
-            <a:off x="457200" y="2478024"/>
-            <a:ext cx="128016" cy="1051560"/>
-          </a:xfrm>
-          <a:prstGeom prst="rect">
-            <a:avLst/>
-          </a:prstGeom>
-          <a:solidFill>
-            <a:srgbClr val="FFD000"/>
-          </a:solidFill>
-          <a:ln>
-            <a:noFill/>
-          </a:ln>
-        </p:spPr>
-        <p:style>
-          <a:lnRef idx="1">
-            <a:schemeClr val="accent1"/>
-          </a:lnRef>
-          <a:fillRef idx="3">
-            <a:schemeClr val="accent1"/>
-          </a:fillRef>
-          <a:effectRef idx="2">
-            <a:schemeClr val="accent1"/>
-          </a:effectRef>
-          <a:fontRef idx="minor">
-            <a:schemeClr val="lt1"/>
-          </a:fontRef>
-        </p:style>
-        <p:txBody>
-          <a:bodyPr rtlCol="0" anchor="ctr"/>
-          <a:lstStyle/>
-          <a:p>
-            <a:pPr algn="ctr"/>
-          </a:p>
-        </p:txBody>
-      </p:sp>
-      <p:sp>
-        <p:nvSpPr>
-          <p:cNvPr id="10" name="TextBox 9"/>
-          <p:cNvSpPr txBox="1"/>
-          <p:nvPr/>
-        </p:nvSpPr>
-        <p:spPr>
-          <a:xfrm>
-            <a:off x="777240" y="2615184"/>
-            <a:ext cx="10774375" cy="822959"/>
-          </a:xfrm>
-          <a:prstGeom prst="rect">
-            <a:avLst/>
-          </a:prstGeom>
-          <a:noFill/>
-        </p:spPr>
-        <p:txBody>
-          <a:bodyPr wrap="square">
-            <a:spAutoFit/>
-          </a:bodyPr>
-          <a:lstStyle/>
-          <a:p>
-            <a:r>
-              <a:rPr sz="1200" b="1" i="0">
-                <a:solidFill>
-                  <a:srgbClr val="FFD000"/>
-                </a:solidFill>
-                <a:latin typeface="Calibri"/>
-              </a:rPr>
-              <a:t>Aclaración</a:t>
+              <a:t>–   </a:t>
+            </a:r>
+            <a:r>
+              <a:rPr sz="2000" b="1" i="0">
+                <a:solidFill>
+                  <a:srgbClr val="333333"/>
+                </a:solidFill>
+                <a:latin typeface="Calibri"/>
+              </a:rPr>
+              <a:t>Entregable:</a:t>
+            </a:r>
+            <a:r>
+              <a:rPr sz="2000" b="0" i="0">
+                <a:solidFill>
+                  <a:srgbClr val="333333"/>
+                </a:solidFill>
+                <a:latin typeface="Calibri"/>
+              </a:rPr>
+              <a:t> Un documento en Google Docs con el guion minuto a minuto repartido en bloques con tiempos y evidencia (con responsable nominal solo si el docente autorizo equipo), la tabla de tres decisiones de diseño defendidas y el banco de diez preguntas con su respuesta, mas el indice del documento final consolidado, subido a la plataforma del curso.</a:t>
             </a:r>
           </a:p>
           <a:p>
             <a:pPr>
-              <a:spcBef>
-                <a:spcPts val="400"/>
-              </a:spcBef>
+              <a:spcAft>
+                <a:spcPts val="800"/>
+              </a:spcAft>
             </a:pPr>
             <a:r>
-              <a:rPr sz="1400" b="0" i="0">
+              <a:rPr sz="2000" b="0" i="0">
                 <a:solidFill>
                   <a:srgbClr val="333333"/>
                 </a:solidFill>
                 <a:latin typeface="Calibri"/>
               </a:rPr>
-              <a:t>Enunciado completo: Clases/Proyecto Integrador/ (VetCare).</a:t>
-            </a:r>
-          </a:p>
-        </p:txBody>
-      </p:sp>
-      <p:sp>
-        <p:nvSpPr>
-          <p:cNvPr id="11" name="Rounded Rectangle 10"/>
-          <p:cNvSpPr/>
-          <p:nvPr/>
-        </p:nvSpPr>
-        <p:spPr>
-          <a:xfrm>
-            <a:off x="457200" y="3694176"/>
-            <a:ext cx="11277295" cy="1051560"/>
-          </a:xfrm>
-          <a:prstGeom prst="roundRect">
-            <a:avLst>
-              <a:gd name="adj" fmla="val 12000"/>
-            </a:avLst>
-          </a:prstGeom>
-          <a:solidFill>
-            <a:srgbClr val="FBE4E4"/>
-          </a:solidFill>
-          <a:ln>
-            <a:noFill/>
-          </a:ln>
-        </p:spPr>
-        <p:style>
-          <a:lnRef idx="1">
-            <a:schemeClr val="accent1"/>
-          </a:lnRef>
-          <a:fillRef idx="3">
-            <a:schemeClr val="accent1"/>
-          </a:fillRef>
-          <a:effectRef idx="2">
-            <a:schemeClr val="accent1"/>
-          </a:effectRef>
-          <a:fontRef idx="minor">
-            <a:schemeClr val="lt1"/>
-          </a:fontRef>
-        </p:style>
-        <p:txBody>
-          <a:bodyPr rtlCol="0" anchor="ctr"/>
-          <a:lstStyle/>
-          <a:p>
-            <a:pPr algn="ctr"/>
-          </a:p>
-        </p:txBody>
-      </p:sp>
-      <p:sp>
-        <p:nvSpPr>
-          <p:cNvPr id="12" name="Rectangle 11"/>
-          <p:cNvSpPr/>
-          <p:nvPr/>
-        </p:nvSpPr>
-        <p:spPr>
-          <a:xfrm>
-            <a:off x="457200" y="3694176"/>
-            <a:ext cx="128016" cy="1051560"/>
-          </a:xfrm>
-          <a:prstGeom prst="rect">
-            <a:avLst/>
-          </a:prstGeom>
-          <a:solidFill>
-            <a:srgbClr val="A02030"/>
-          </a:solidFill>
-          <a:ln>
-            <a:noFill/>
-          </a:ln>
-        </p:spPr>
-        <p:style>
-          <a:lnRef idx="1">
-            <a:schemeClr val="accent1"/>
-          </a:lnRef>
-          <a:fillRef idx="3">
-            <a:schemeClr val="accent1"/>
-          </a:fillRef>
-          <a:effectRef idx="2">
-            <a:schemeClr val="accent1"/>
-          </a:effectRef>
-          <a:fontRef idx="minor">
-            <a:schemeClr val="lt1"/>
-          </a:fontRef>
-        </p:style>
-        <p:txBody>
-          <a:bodyPr rtlCol="0" anchor="ctr"/>
-          <a:lstStyle/>
-          <a:p>
-            <a:pPr algn="ctr"/>
-          </a:p>
-        </p:txBody>
-      </p:sp>
-      <p:sp>
-        <p:nvSpPr>
-          <p:cNvPr id="13" name="TextBox 12"/>
-          <p:cNvSpPr txBox="1"/>
-          <p:nvPr/>
-        </p:nvSpPr>
-        <p:spPr>
-          <a:xfrm>
-            <a:off x="777240" y="3831336"/>
-            <a:ext cx="10774375" cy="822959"/>
-          </a:xfrm>
-          <a:prstGeom prst="rect">
-            <a:avLst/>
-          </a:prstGeom>
-          <a:noFill/>
-        </p:spPr>
-        <p:txBody>
-          <a:bodyPr wrap="square">
-            <a:spAutoFit/>
-          </a:bodyPr>
-          <a:lstStyle/>
-          <a:p>
-            <a:r>
-              <a:rPr sz="1200" b="1" i="0">
-                <a:solidFill>
-                  <a:srgbClr val="A02030"/>
-                </a:solidFill>
-                <a:latin typeface="Calibri"/>
-              </a:rPr>
-              <a:t>Atención</a:t>
+              <a:t>–   </a:t>
+            </a:r>
+            <a:r>
+              <a:rPr sz="2000" b="1" i="0">
+                <a:solidFill>
+                  <a:srgbClr val="333333"/>
+                </a:solidFill>
+                <a:latin typeface="Calibri"/>
+              </a:rPr>
+              <a:t>Exito:</a:t>
+            </a:r>
+            <a:r>
+              <a:rPr sz="2000" b="0" i="0">
+                <a:solidFill>
+                  <a:srgbClr val="333333"/>
+                </a:solidFill>
+                <a:latin typeface="Calibri"/>
+              </a:rPr>
+              <a:t> El guion tiene las cinco secciones en el orden problema, requisitos, modelo, interfaz y decisiones, con minutos asignados que suman doce, cada bloque con su evidencia en pantalla y, si el docente autorizo equipo, todos los integrantes hablando al menos dos minutos.</a:t>
             </a:r>
           </a:p>
           <a:p>
             <a:pPr>
-              <a:spcBef>
-                <a:spcPts val="400"/>
-              </a:spcBef>
+              <a:spcAft>
+                <a:spcPts val="800"/>
+              </a:spcAft>
             </a:pPr>
             <a:r>
-              <a:rPr sz="1400" b="0" i="0">
+              <a:rPr sz="2000" b="0" i="0">
                 <a:solidFill>
                   <a:srgbClr val="333333"/>
                 </a:solidFill>
                 <a:latin typeface="Calibri"/>
               </a:rPr>
-              <a:t>Entrega del taller, si el docente lo asigna · en la fecha que indique el docente.</a:t>
-            </a:r>
-          </a:p>
-        </p:txBody>
-      </p:sp>
-      <p:sp>
-        <p:nvSpPr>
-          <p:cNvPr id="14" name="TextBox 13"/>
+              <a:t>–   </a:t>
+            </a:r>
+            <a:r>
+              <a:rPr sz="2000" b="1" i="0">
+                <a:solidFill>
+                  <a:srgbClr val="333333"/>
+                </a:solidFill>
+                <a:latin typeface="Calibri"/>
+              </a:rPr>
+              <a:t>Exito:</a:t>
+            </a:r>
+            <a:r>
+              <a:rPr sz="2000" b="0" i="0">
+                <a:solidFill>
+                  <a:srgbClr val="333333"/>
+                </a:solidFill>
+                <a:latin typeface="Calibri"/>
+              </a:rPr>
+              <a:t> Las tres decisiones de diseño estan escritas con las cuatro columnas completas, incluida la consecuencia asumida, y ninguna se justifica por gusto o por costumbre.</a:t>
+            </a:r>
+          </a:p>
+          <a:p>
+            <a:pPr>
+              <a:spcAft>
+                <a:spcPts val="800"/>
+              </a:spcAft>
+            </a:pPr>
+            <a:r>
+              <a:rPr sz="2000" b="0" i="0">
+                <a:solidFill>
+                  <a:srgbClr val="333333"/>
+                </a:solidFill>
+                <a:latin typeface="Calibri"/>
+              </a:rPr>
+              <a:t>–   </a:t>
+            </a:r>
+            <a:r>
+              <a:rPr sz="2000" b="1" i="0">
+                <a:solidFill>
+                  <a:srgbClr val="333333"/>
+                </a:solidFill>
+                <a:latin typeface="Calibri"/>
+              </a:rPr>
+              <a:t>Exito:</a:t>
+            </a:r>
+            <a:r>
+              <a:rPr sz="2000" b="0" i="0">
+                <a:solidFill>
+                  <a:srgbClr val="333333"/>
+                </a:solidFill>
+                <a:latin typeface="Calibri"/>
+              </a:rPr>
+              <a:t> El banco tiene diez preguntas con respuesta de maximo dos frases y contempla al menos un caso de concurrencia, uno de medicion de RNF y uno de alcance excluido.</a:t>
+            </a:r>
+          </a:p>
+          <a:p>
+            <a:pPr>
+              <a:spcAft>
+                <a:spcPts val="800"/>
+              </a:spcAft>
+            </a:pPr>
+            <a:r>
+              <a:rPr sz="2000" b="0" i="0">
+                <a:solidFill>
+                  <a:srgbClr val="333333"/>
+                </a:solidFill>
+                <a:latin typeface="Calibri"/>
+              </a:rPr>
+              <a:t>–   </a:t>
+            </a:r>
+            <a:r>
+              <a:rPr sz="2000" b="1" i="0">
+                <a:solidFill>
+                  <a:srgbClr val="333333"/>
+                </a:solidFill>
+                <a:latin typeface="Calibri"/>
+              </a:rPr>
+              <a:t>Exito:</a:t>
+            </a:r>
+            <a:r>
+              <a:rPr sz="2000" b="0" i="0">
+                <a:solidFill>
+                  <a:srgbClr val="333333"/>
+                </a:solidFill>
+                <a:latin typeface="Calibri"/>
+              </a:rPr>
+              <a:t> El documento final consolidado tiene indice, version y al menos una inconsistencia entre artefactos detectada y corregida, dejando registro de cual era.</a:t>
+            </a:r>
+          </a:p>
+          <a:p>
+            <a:pPr>
+              <a:spcAft>
+                <a:spcPts val="800"/>
+              </a:spcAft>
+            </a:pPr>
+            <a:r>
+              <a:rPr sz="2000" b="0" i="0">
+                <a:solidFill>
+                  <a:srgbClr val="333333"/>
+                </a:solidFill>
+                <a:latin typeface="Calibri"/>
+              </a:rPr>
+              <a:t>–   </a:t>
+            </a:r>
+            <a:r>
+              <a:rPr sz="2000" b="1" i="0">
+                <a:solidFill>
+                  <a:srgbClr val="333333"/>
+                </a:solidFill>
+                <a:latin typeface="Calibri"/>
+              </a:rPr>
+              <a:t>Entrega en la plataforma del curso</a:t>
+            </a:r>
+            <a:r>
+              <a:rPr sz="2000" b="0" i="0">
+                <a:solidFill>
+                  <a:srgbClr val="333333"/>
+                </a:solidFill>
+                <a:latin typeface="Calibri"/>
+              </a:rPr>
+              <a:t> — en la fecha que indique el docente.</a:t>
+            </a:r>
+          </a:p>
+        </p:txBody>
+      </p:sp>
+      <p:sp>
+        <p:nvSpPr>
+          <p:cNvPr id="6" name="TextBox 5"/>
           <p:cNvSpPr txBox="1"/>
           <p:nvPr/>
         </p:nvSpPr>
@@ -9457,6 +9131,601 @@
         <p:spPr>
           <a:xfrm>
             <a:off x="0" y="0"/>
+            <a:ext cx="12191695" cy="960120"/>
+          </a:xfrm>
+          <a:prstGeom prst="rect">
+            <a:avLst/>
+          </a:prstGeom>
+          <a:solidFill>
+            <a:srgbClr val="095292"/>
+          </a:solidFill>
+          <a:ln>
+            <a:noFill/>
+          </a:ln>
+        </p:spPr>
+        <p:style>
+          <a:lnRef idx="1">
+            <a:schemeClr val="accent1"/>
+          </a:lnRef>
+          <a:fillRef idx="3">
+            <a:schemeClr val="accent1"/>
+          </a:fillRef>
+          <a:effectRef idx="2">
+            <a:schemeClr val="accent1"/>
+          </a:effectRef>
+          <a:fontRef idx="minor">
+            <a:schemeClr val="lt1"/>
+          </a:fontRef>
+        </p:style>
+        <p:txBody>
+          <a:bodyPr rtlCol="0" anchor="ctr"/>
+          <a:lstStyle/>
+          <a:p>
+            <a:pPr algn="ctr"/>
+          </a:p>
+        </p:txBody>
+      </p:sp>
+      <p:sp>
+        <p:nvSpPr>
+          <p:cNvPr id="3" name="Rectangle 2"/>
+          <p:cNvSpPr/>
+          <p:nvPr/>
+        </p:nvSpPr>
+        <p:spPr>
+          <a:xfrm>
+            <a:off x="0" y="960120"/>
+            <a:ext cx="12191695" cy="41148"/>
+          </a:xfrm>
+          <a:prstGeom prst="rect">
+            <a:avLst/>
+          </a:prstGeom>
+          <a:solidFill>
+            <a:srgbClr val="FFD000"/>
+          </a:solidFill>
+          <a:ln>
+            <a:noFill/>
+          </a:ln>
+        </p:spPr>
+        <p:style>
+          <a:lnRef idx="1">
+            <a:schemeClr val="accent1"/>
+          </a:lnRef>
+          <a:fillRef idx="3">
+            <a:schemeClr val="accent1"/>
+          </a:fillRef>
+          <a:effectRef idx="2">
+            <a:schemeClr val="accent1"/>
+          </a:effectRef>
+          <a:fontRef idx="minor">
+            <a:schemeClr val="lt1"/>
+          </a:fontRef>
+        </p:style>
+        <p:txBody>
+          <a:bodyPr rtlCol="0" anchor="ctr"/>
+          <a:lstStyle/>
+          <a:p>
+            <a:pPr algn="ctr"/>
+          </a:p>
+        </p:txBody>
+      </p:sp>
+      <p:sp>
+        <p:nvSpPr>
+          <p:cNvPr id="4" name="TextBox 3"/>
+          <p:cNvSpPr txBox="1"/>
+          <p:nvPr/>
+        </p:nvSpPr>
+        <p:spPr>
+          <a:xfrm>
+            <a:off x="457200" y="164592"/>
+            <a:ext cx="11277295" cy="502920"/>
+          </a:xfrm>
+          <a:prstGeom prst="rect">
+            <a:avLst/>
+          </a:prstGeom>
+          <a:noFill/>
+        </p:spPr>
+        <p:txBody>
+          <a:bodyPr wrap="square">
+            <a:spAutoFit/>
+          </a:bodyPr>
+          <a:lstStyle/>
+          <a:p>
+            <a:r>
+              <a:rPr sz="2600" b="1" i="0">
+                <a:solidFill>
+                  <a:srgbClr val="FFFFFF"/>
+                </a:solidFill>
+                <a:latin typeface="Calibri"/>
+              </a:rPr>
+              <a:t>Para el PI esta semana</a:t>
+            </a:r>
+          </a:p>
+        </p:txBody>
+      </p:sp>
+      <p:sp>
+        <p:nvSpPr>
+          <p:cNvPr id="5" name="Rounded Rectangle 4"/>
+          <p:cNvSpPr/>
+          <p:nvPr/>
+        </p:nvSpPr>
+        <p:spPr>
+          <a:xfrm>
+            <a:off x="457200" y="1261872"/>
+            <a:ext cx="11277295" cy="1051560"/>
+          </a:xfrm>
+          <a:prstGeom prst="roundRect">
+            <a:avLst>
+              <a:gd name="adj" fmla="val 12000"/>
+            </a:avLst>
+          </a:prstGeom>
+          <a:solidFill>
+            <a:srgbClr val="E8F4FA"/>
+          </a:solidFill>
+          <a:ln>
+            <a:noFill/>
+          </a:ln>
+        </p:spPr>
+        <p:style>
+          <a:lnRef idx="1">
+            <a:schemeClr val="accent1"/>
+          </a:lnRef>
+          <a:fillRef idx="3">
+            <a:schemeClr val="accent1"/>
+          </a:fillRef>
+          <a:effectRef idx="2">
+            <a:schemeClr val="accent1"/>
+          </a:effectRef>
+          <a:fontRef idx="minor">
+            <a:schemeClr val="lt1"/>
+          </a:fontRef>
+        </p:style>
+        <p:txBody>
+          <a:bodyPr rtlCol="0" anchor="ctr"/>
+          <a:lstStyle/>
+          <a:p>
+            <a:pPr algn="ctr"/>
+          </a:p>
+        </p:txBody>
+      </p:sp>
+      <p:sp>
+        <p:nvSpPr>
+          <p:cNvPr id="6" name="Rectangle 5"/>
+          <p:cNvSpPr/>
+          <p:nvPr/>
+        </p:nvSpPr>
+        <p:spPr>
+          <a:xfrm>
+            <a:off x="457200" y="1261872"/>
+            <a:ext cx="128016" cy="1051560"/>
+          </a:xfrm>
+          <a:prstGeom prst="rect">
+            <a:avLst/>
+          </a:prstGeom>
+          <a:solidFill>
+            <a:srgbClr val="269CCB"/>
+          </a:solidFill>
+          <a:ln>
+            <a:noFill/>
+          </a:ln>
+        </p:spPr>
+        <p:style>
+          <a:lnRef idx="1">
+            <a:schemeClr val="accent1"/>
+          </a:lnRef>
+          <a:fillRef idx="3">
+            <a:schemeClr val="accent1"/>
+          </a:fillRef>
+          <a:effectRef idx="2">
+            <a:schemeClr val="accent1"/>
+          </a:effectRef>
+          <a:fontRef idx="minor">
+            <a:schemeClr val="lt1"/>
+          </a:fontRef>
+        </p:style>
+        <p:txBody>
+          <a:bodyPr rtlCol="0" anchor="ctr"/>
+          <a:lstStyle/>
+          <a:p>
+            <a:pPr algn="ctr"/>
+          </a:p>
+        </p:txBody>
+      </p:sp>
+      <p:sp>
+        <p:nvSpPr>
+          <p:cNvPr id="7" name="TextBox 6"/>
+          <p:cNvSpPr txBox="1"/>
+          <p:nvPr/>
+        </p:nvSpPr>
+        <p:spPr>
+          <a:xfrm>
+            <a:off x="777240" y="1399031"/>
+            <a:ext cx="10774375" cy="822959"/>
+          </a:xfrm>
+          <a:prstGeom prst="rect">
+            <a:avLst/>
+          </a:prstGeom>
+          <a:noFill/>
+        </p:spPr>
+        <p:txBody>
+          <a:bodyPr wrap="square">
+            <a:spAutoFit/>
+          </a:bodyPr>
+          <a:lstStyle/>
+          <a:p>
+            <a:r>
+              <a:rPr sz="1200" b="1" i="0">
+                <a:solidFill>
+                  <a:srgbClr val="269CCB"/>
+                </a:solidFill>
+                <a:latin typeface="Calibri"/>
+              </a:rPr>
+              <a:t>Info</a:t>
+            </a:r>
+          </a:p>
+          <a:p>
+            <a:pPr>
+              <a:spcBef>
+                <a:spcPts val="400"/>
+              </a:spcBef>
+            </a:pPr>
+            <a:r>
+              <a:rPr sz="1400" b="0" i="0">
+                <a:solidFill>
+                  <a:srgbClr val="333333"/>
+                </a:solidFill>
+                <a:latin typeface="Calibri"/>
+              </a:rPr>
+              <a:t>Hito: Queda armado el guion cronometrado de sustentacion de VetCare y consolidado el documento final de diseño en una sola pieza coherente.</a:t>
+            </a:r>
+          </a:p>
+        </p:txBody>
+      </p:sp>
+      <p:sp>
+        <p:nvSpPr>
+          <p:cNvPr id="8" name="Rounded Rectangle 7"/>
+          <p:cNvSpPr/>
+          <p:nvPr/>
+        </p:nvSpPr>
+        <p:spPr>
+          <a:xfrm>
+            <a:off x="457200" y="2478024"/>
+            <a:ext cx="11277295" cy="1051560"/>
+          </a:xfrm>
+          <a:prstGeom prst="roundRect">
+            <a:avLst>
+              <a:gd name="adj" fmla="val 12000"/>
+            </a:avLst>
+          </a:prstGeom>
+          <a:solidFill>
+            <a:srgbClr val="FFF8E1"/>
+          </a:solidFill>
+          <a:ln>
+            <a:noFill/>
+          </a:ln>
+        </p:spPr>
+        <p:style>
+          <a:lnRef idx="1">
+            <a:schemeClr val="accent1"/>
+          </a:lnRef>
+          <a:fillRef idx="3">
+            <a:schemeClr val="accent1"/>
+          </a:fillRef>
+          <a:effectRef idx="2">
+            <a:schemeClr val="accent1"/>
+          </a:effectRef>
+          <a:fontRef idx="minor">
+            <a:schemeClr val="lt1"/>
+          </a:fontRef>
+        </p:style>
+        <p:txBody>
+          <a:bodyPr rtlCol="0" anchor="ctr"/>
+          <a:lstStyle/>
+          <a:p>
+            <a:pPr algn="ctr"/>
+          </a:p>
+        </p:txBody>
+      </p:sp>
+      <p:sp>
+        <p:nvSpPr>
+          <p:cNvPr id="9" name="Rectangle 8"/>
+          <p:cNvSpPr/>
+          <p:nvPr/>
+        </p:nvSpPr>
+        <p:spPr>
+          <a:xfrm>
+            <a:off x="457200" y="2478024"/>
+            <a:ext cx="128016" cy="1051560"/>
+          </a:xfrm>
+          <a:prstGeom prst="rect">
+            <a:avLst/>
+          </a:prstGeom>
+          <a:solidFill>
+            <a:srgbClr val="FFD000"/>
+          </a:solidFill>
+          <a:ln>
+            <a:noFill/>
+          </a:ln>
+        </p:spPr>
+        <p:style>
+          <a:lnRef idx="1">
+            <a:schemeClr val="accent1"/>
+          </a:lnRef>
+          <a:fillRef idx="3">
+            <a:schemeClr val="accent1"/>
+          </a:fillRef>
+          <a:effectRef idx="2">
+            <a:schemeClr val="accent1"/>
+          </a:effectRef>
+          <a:fontRef idx="minor">
+            <a:schemeClr val="lt1"/>
+          </a:fontRef>
+        </p:style>
+        <p:txBody>
+          <a:bodyPr rtlCol="0" anchor="ctr"/>
+          <a:lstStyle/>
+          <a:p>
+            <a:pPr algn="ctr"/>
+          </a:p>
+        </p:txBody>
+      </p:sp>
+      <p:sp>
+        <p:nvSpPr>
+          <p:cNvPr id="10" name="TextBox 9"/>
+          <p:cNvSpPr txBox="1"/>
+          <p:nvPr/>
+        </p:nvSpPr>
+        <p:spPr>
+          <a:xfrm>
+            <a:off x="777240" y="2615184"/>
+            <a:ext cx="10774375" cy="822959"/>
+          </a:xfrm>
+          <a:prstGeom prst="rect">
+            <a:avLst/>
+          </a:prstGeom>
+          <a:noFill/>
+        </p:spPr>
+        <p:txBody>
+          <a:bodyPr wrap="square">
+            <a:spAutoFit/>
+          </a:bodyPr>
+          <a:lstStyle/>
+          <a:p>
+            <a:r>
+              <a:rPr sz="1200" b="1" i="0">
+                <a:solidFill>
+                  <a:srgbClr val="FFD000"/>
+                </a:solidFill>
+                <a:latin typeface="Calibri"/>
+              </a:rPr>
+              <a:t>Aclaración</a:t>
+            </a:r>
+          </a:p>
+          <a:p>
+            <a:pPr>
+              <a:spcBef>
+                <a:spcPts val="400"/>
+              </a:spcBef>
+            </a:pPr>
+            <a:r>
+              <a:rPr sz="1400" b="0" i="0">
+                <a:solidFill>
+                  <a:srgbClr val="333333"/>
+                </a:solidFill>
+                <a:latin typeface="Calibri"/>
+              </a:rPr>
+              <a:t>Enunciado completo: Clases/Proyecto Integrador/ (VetCare).</a:t>
+            </a:r>
+          </a:p>
+        </p:txBody>
+      </p:sp>
+      <p:sp>
+        <p:nvSpPr>
+          <p:cNvPr id="11" name="Rounded Rectangle 10"/>
+          <p:cNvSpPr/>
+          <p:nvPr/>
+        </p:nvSpPr>
+        <p:spPr>
+          <a:xfrm>
+            <a:off x="457200" y="3694176"/>
+            <a:ext cx="11277295" cy="1051560"/>
+          </a:xfrm>
+          <a:prstGeom prst="roundRect">
+            <a:avLst>
+              <a:gd name="adj" fmla="val 12000"/>
+            </a:avLst>
+          </a:prstGeom>
+          <a:solidFill>
+            <a:srgbClr val="FBE4E4"/>
+          </a:solidFill>
+          <a:ln>
+            <a:noFill/>
+          </a:ln>
+        </p:spPr>
+        <p:style>
+          <a:lnRef idx="1">
+            <a:schemeClr val="accent1"/>
+          </a:lnRef>
+          <a:fillRef idx="3">
+            <a:schemeClr val="accent1"/>
+          </a:fillRef>
+          <a:effectRef idx="2">
+            <a:schemeClr val="accent1"/>
+          </a:effectRef>
+          <a:fontRef idx="minor">
+            <a:schemeClr val="lt1"/>
+          </a:fontRef>
+        </p:style>
+        <p:txBody>
+          <a:bodyPr rtlCol="0" anchor="ctr"/>
+          <a:lstStyle/>
+          <a:p>
+            <a:pPr algn="ctr"/>
+          </a:p>
+        </p:txBody>
+      </p:sp>
+      <p:sp>
+        <p:nvSpPr>
+          <p:cNvPr id="12" name="Rectangle 11"/>
+          <p:cNvSpPr/>
+          <p:nvPr/>
+        </p:nvSpPr>
+        <p:spPr>
+          <a:xfrm>
+            <a:off x="457200" y="3694176"/>
+            <a:ext cx="128016" cy="1051560"/>
+          </a:xfrm>
+          <a:prstGeom prst="rect">
+            <a:avLst/>
+          </a:prstGeom>
+          <a:solidFill>
+            <a:srgbClr val="A02030"/>
+          </a:solidFill>
+          <a:ln>
+            <a:noFill/>
+          </a:ln>
+        </p:spPr>
+        <p:style>
+          <a:lnRef idx="1">
+            <a:schemeClr val="accent1"/>
+          </a:lnRef>
+          <a:fillRef idx="3">
+            <a:schemeClr val="accent1"/>
+          </a:fillRef>
+          <a:effectRef idx="2">
+            <a:schemeClr val="accent1"/>
+          </a:effectRef>
+          <a:fontRef idx="minor">
+            <a:schemeClr val="lt1"/>
+          </a:fontRef>
+        </p:style>
+        <p:txBody>
+          <a:bodyPr rtlCol="0" anchor="ctr"/>
+          <a:lstStyle/>
+          <a:p>
+            <a:pPr algn="ctr"/>
+          </a:p>
+        </p:txBody>
+      </p:sp>
+      <p:sp>
+        <p:nvSpPr>
+          <p:cNvPr id="13" name="TextBox 12"/>
+          <p:cNvSpPr txBox="1"/>
+          <p:nvPr/>
+        </p:nvSpPr>
+        <p:spPr>
+          <a:xfrm>
+            <a:off x="777240" y="3831336"/>
+            <a:ext cx="10774375" cy="822959"/>
+          </a:xfrm>
+          <a:prstGeom prst="rect">
+            <a:avLst/>
+          </a:prstGeom>
+          <a:noFill/>
+        </p:spPr>
+        <p:txBody>
+          <a:bodyPr wrap="square">
+            <a:spAutoFit/>
+          </a:bodyPr>
+          <a:lstStyle/>
+          <a:p>
+            <a:r>
+              <a:rPr sz="1200" b="1" i="0">
+                <a:solidFill>
+                  <a:srgbClr val="A02030"/>
+                </a:solidFill>
+                <a:latin typeface="Calibri"/>
+              </a:rPr>
+              <a:t>Atención</a:t>
+            </a:r>
+          </a:p>
+          <a:p>
+            <a:pPr>
+              <a:spcBef>
+                <a:spcPts val="400"/>
+              </a:spcBef>
+            </a:pPr>
+            <a:r>
+              <a:rPr sz="1400" b="0" i="0">
+                <a:solidFill>
+                  <a:srgbClr val="333333"/>
+                </a:solidFill>
+                <a:latin typeface="Calibri"/>
+              </a:rPr>
+              <a:t>Entrega del taller, si el docente lo asigna · en la fecha que indique el docente.</a:t>
+            </a:r>
+          </a:p>
+        </p:txBody>
+      </p:sp>
+      <p:sp>
+        <p:nvSpPr>
+          <p:cNvPr id="14" name="TextBox 13"/>
+          <p:cNvSpPr txBox="1"/>
+          <p:nvPr/>
+        </p:nvSpPr>
+        <p:spPr>
+          <a:xfrm>
+            <a:off x="11185855" y="6473952"/>
+            <a:ext cx="640080" cy="274320"/>
+          </a:xfrm>
+          <a:prstGeom prst="rect">
+            <a:avLst/>
+          </a:prstGeom>
+          <a:noFill/>
+        </p:spPr>
+        <p:txBody>
+          <a:bodyPr wrap="square">
+            <a:spAutoFit/>
+          </a:bodyPr>
+          <a:lstStyle/>
+          <a:p>
+            <a:pPr algn="r"/>
+            <a:r>
+              <a:rPr sz="1100" b="0" i="0">
+                <a:solidFill>
+                  <a:srgbClr val="666666"/>
+                </a:solidFill>
+                <a:latin typeface="Calibri"/>
+              </a:rPr>
+              <a:t>20</a:t>
+            </a:r>
+          </a:p>
+        </p:txBody>
+      </p:sp>
+    </p:spTree>
+  </p:cSld>
+  <p:clrMapOvr>
+    <a:masterClrMapping/>
+  </p:clrMapOvr>
+</p:sld>
+</file>
+
+<file path=ppt/slides/slide21.xml><?xml version="1.0" encoding="utf-8"?>
+<p:sld xmlns:a="http://schemas.openxmlformats.org/drawingml/2006/main" xmlns:p="http://schemas.openxmlformats.org/presentationml/2006/main" xmlns:r="http://schemas.openxmlformats.org/officeDocument/2006/relationships">
+  <p:cSld>
+    <p:bg>
+      <p:bgPr>
+        <a:solidFill>
+          <a:srgbClr val="FFFFFF"/>
+        </a:solidFill>
+        <a:effectLst/>
+      </p:bgPr>
+    </p:bg>
+    <p:spTree>
+      <p:nvGrpSpPr>
+        <p:cNvPr id="1" name=""/>
+        <p:cNvGrpSpPr/>
+        <p:nvPr/>
+      </p:nvGrpSpPr>
+      <p:grpSpPr/>
+      <p:sp>
+        <p:nvSpPr>
+          <p:cNvPr id="2" name="Rectangle 1"/>
+          <p:cNvSpPr/>
+          <p:nvPr/>
+        </p:nvSpPr>
+        <p:spPr>
+          <a:xfrm>
+            <a:off x="0" y="0"/>
             <a:ext cx="12191695" cy="164592"/>
           </a:xfrm>
           <a:prstGeom prst="rect">
@@ -10647,7 +10916,7 @@
                 </a:solidFill>
                 <a:latin typeface="Calibri"/>
               </a:rPr>
-              <a:t>Sustentar un paquete de diseño no es leer diapositivas ni narrar lo que...</a:t>
+              <a:t>Sustentar un paquete de diseño no es leer diapositivas ni narrar lo que... (1/2)</a:t>
             </a:r>
           </a:p>
         </p:txBody>
@@ -10718,71 +10987,7 @@
                 </a:solidFill>
                 <a:latin typeface="Calibri"/>
               </a:rPr>
-              <a:t>–   Por eso una sustentacion es un argumento con evidencia, no un recuento cronologico.</a:t>
-            </a:r>
-          </a:p>
-          <a:p>
-            <a:pPr>
-              <a:spcAft>
-                <a:spcPts val="800"/>
-              </a:spcAft>
-            </a:pPr>
-            <a:r>
-              <a:rPr sz="2000" b="0" i="0">
-                <a:solidFill>
-                  <a:srgbClr val="333333"/>
-                </a:solidFill>
-                <a:latin typeface="Calibri"/>
-              </a:rPr>
               <a:t>–   La diferencia se nota en la primera frase: quien dice hicimos casos de uso, luego clases, luego pantallas, esta narrando; quien dice Huellitas pierde fichas y tarda ocho minutos en encontrar un historial</a:t>
-            </a:r>
-          </a:p>
-          <a:p>
-            <a:pPr>
-              <a:spcAft>
-                <a:spcPts val="800"/>
-              </a:spcAft>
-            </a:pPr>
-            <a:r>
-              <a:rPr sz="2000" b="0" i="0">
-                <a:solidFill>
-                  <a:srgbClr val="333333"/>
-                </a:solidFill>
-                <a:latin typeface="Calibri"/>
-              </a:rPr>
-              <a:t>–   Y este paquete de diseño ataca esos tres problemas asi, esta sustentando.</a:t>
-            </a:r>
-          </a:p>
-          <a:p>
-            <a:pPr>
-              <a:spcAft>
-                <a:spcPts val="800"/>
-              </a:spcAft>
-            </a:pPr>
-            <a:r>
-              <a:rPr sz="2000" b="0" i="0">
-                <a:solidFill>
-                  <a:srgbClr val="333333"/>
-                </a:solidFill>
-                <a:latin typeface="Calibri"/>
-              </a:rPr>
-              <a:t>–   En VetCare la evidencia esta toda disponible: la tabla de RF y RNF, los diagramas UML, el diccionario de datos y el prototipo navegable.</a:t>
-            </a:r>
-          </a:p>
-          <a:p>
-            <a:pPr>
-              <a:spcAft>
-                <a:spcPts val="800"/>
-              </a:spcAft>
-            </a:pPr>
-            <a:r>
-              <a:rPr sz="2000" b="0" i="0">
-                <a:solidFill>
-                  <a:srgbClr val="333333"/>
-                </a:solidFill>
-                <a:latin typeface="Calibri"/>
-              </a:rPr>
-              <a:t>–   El trabajo de hoy es ordenar esa evidencia para que cuente una sola historia.</a:t>
             </a:r>
           </a:p>
         </p:txBody>
@@ -10963,7 +11168,7 @@
                 </a:solidFill>
                 <a:latin typeface="Calibri"/>
               </a:rPr>
-              <a:t>El orden de la sustentacion no es libre, es un embudo y tiene una razon...</a:t>
+              <a:t>Sustentar un paquete de diseño no es leer diapositivas ni narrar lo que... (2/2)</a:t>
             </a:r>
           </a:p>
         </p:txBody>
@@ -11002,7 +11207,7 @@
                 </a:solidFill>
                 <a:latin typeface="Calibri"/>
               </a:rPr>
-              <a:t>–   El orden de la sustentacion no es libre, es un embudo y tiene una razon logica.</a:t>
+              <a:t>–   Y este paquete de diseño ataca esos tres problemas asi, esta sustentando.</a:t>
             </a:r>
           </a:p>
           <a:p>
@@ -11018,7 +11223,7 @@
                 </a:solidFill>
                 <a:latin typeface="Calibri"/>
               </a:rPr>
-              <a:t>–   Primero el problema, porque nada de lo que sigue tiene sentido si el jurado no sabe que duele en Huellitas.</a:t>
+              <a:t>–   En VetCare la evidencia esta toda disponible: la tabla de RF y RNF, los diagramas UML, el diccionario de datos y el prototipo navegable.</a:t>
             </a:r>
           </a:p>
           <a:p>
@@ -11034,87 +11239,7 @@
                 </a:solidFill>
                 <a:latin typeface="Calibri"/>
               </a:rPr>
-              <a:t>–   Segundo los requisitos, porque son la promesa concreta: que va a hacer el sistema y con que restricciones.</a:t>
-            </a:r>
-          </a:p>
-          <a:p>
-            <a:pPr>
-              <a:spcAft>
-                <a:spcPts val="800"/>
-              </a:spcAft>
-            </a:pPr>
-            <a:r>
-              <a:rPr sz="2000" b="0" i="0">
-                <a:solidFill>
-                  <a:srgbClr val="333333"/>
-                </a:solidFill>
-                <a:latin typeface="Calibri"/>
-              </a:rPr>
-              <a:t>–   Tercero el modelo, casos de uso y clases, porque muestra como se organiza la solucion.</a:t>
-            </a:r>
-          </a:p>
-          <a:p>
-            <a:pPr>
-              <a:spcAft>
-                <a:spcPts val="800"/>
-              </a:spcAft>
-            </a:pPr>
-            <a:r>
-              <a:rPr sz="2000" b="0" i="0">
-                <a:solidFill>
-                  <a:srgbClr val="333333"/>
-                </a:solidFill>
-                <a:latin typeface="Calibri"/>
-              </a:rPr>
-              <a:t>–   Cuarto la interfaz, porque es donde el jurado por fin ve y toca.</a:t>
-            </a:r>
-          </a:p>
-          <a:p>
-            <a:pPr>
-              <a:spcAft>
-                <a:spcPts val="800"/>
-              </a:spcAft>
-            </a:pPr>
-            <a:r>
-              <a:rPr sz="2000" b="0" i="0">
-                <a:solidFill>
-                  <a:srgbClr val="333333"/>
-                </a:solidFill>
-                <a:latin typeface="Calibri"/>
-              </a:rPr>
-              <a:t>–   Y quinto las decisiones, que es la parte que separa a un equipo que entendio de uno que copio plantillas.</a:t>
-            </a:r>
-          </a:p>
-          <a:p>
-            <a:pPr>
-              <a:spcAft>
-                <a:spcPts val="800"/>
-              </a:spcAft>
-            </a:pPr>
-            <a:r>
-              <a:rPr sz="2000" b="0" i="0">
-                <a:solidFill>
-                  <a:srgbClr val="333333"/>
-                </a:solidFill>
-                <a:latin typeface="Calibri"/>
-              </a:rPr>
-              <a:t>–   Invertir ese orden es el error mas comun: los equipos empiezan mostrando pantallas bonitas, el jurado pregunta que problema resuelve eso y ahi la sustentacion se desarma.</a:t>
-            </a:r>
-          </a:p>
-          <a:p>
-            <a:pPr>
-              <a:spcAft>
-                <a:spcPts val="800"/>
-              </a:spcAft>
-            </a:pPr>
-            <a:r>
-              <a:rPr sz="2000" b="0" i="0">
-                <a:solidFill>
-                  <a:srgbClr val="333333"/>
-                </a:solidFill>
-                <a:latin typeface="Calibri"/>
-              </a:rPr>
-              <a:t>–   Para VetCare doce minutos alcanzan de sobra si se respetan las proporciones: uno y medio para el problema, tres para requisitos, dos para modelo, dos para interfaz en vivo, dos para decisiones y el resto para riesgos y cierre.</a:t>
+              <a:t>–   El trabajo de hoy es ordenar esa evidencia para que cuente una sola historia.</a:t>
             </a:r>
           </a:p>
         </p:txBody>
@@ -11295,7 +11420,7 @@
                 </a:solidFill>
                 <a:latin typeface="Calibri"/>
               </a:rPr>
-              <a:t>Defender una decision de diseño tiene una estructura fija que conviene... (1/2)</a:t>
+              <a:t>El orden de la sustentacion no es libre, es un embudo y tiene una razon...</a:t>
             </a:r>
           </a:p>
         </p:txBody>
@@ -11334,7 +11459,7 @@
                 </a:solidFill>
                 <a:latin typeface="Calibri"/>
               </a:rPr>
-              <a:t>–   Defender una decision de diseño tiene una estructura fija que conviene memorizar: decision, alternativas consideradas, criterio de eleccion y consecuencia asumida.</a:t>
+              <a:t>–   El orden de la sustentacion no es libre, es un embudo y tiene una razon logica.</a:t>
             </a:r>
           </a:p>
           <a:p>
@@ -11350,7 +11475,7 @@
                 </a:solidFill>
                 <a:latin typeface="Calibri"/>
               </a:rPr>
-              <a:t>–   No basta decir que se hizo, hay que decir contra que se comparo y por que gano.</a:t>
+              <a:t>–   Segundo los requisitos, porque son la promesa concreta: que va a hacer el sistema y con que restricciones.</a:t>
             </a:r>
           </a:p>
           <a:p>
@@ -11366,7 +11491,7 @@
                 </a:solidFill>
                 <a:latin typeface="Calibri"/>
               </a:rPr>
-              <a:t>–   Ejemplo concreto de VetCare: decidimos separar Historia_Clinica de Mascota como clases distintas; la alternativa era guardar diagnosticos y tratamientos como campos dentro de Mascota</a:t>
+              <a:t>–   Cuarto la interfaz, porque es donde el jurado por fin ve y toca.</a:t>
             </a:r>
           </a:p>
           <a:p>
@@ -11382,7 +11507,7 @@
                 </a:solidFill>
                 <a:latin typeface="Calibri"/>
               </a:rPr>
-              <a:t>–   El criterio fue que una mascota tiene muchas consultas a lo largo de su vida y una relacion uno a muchos no cabe en campos fijos</a:t>
+              <a:t>–   Y quinto las decisiones, que es la parte que separa a un equipo que entendio de uno que copio plantillas.</a:t>
             </a:r>
           </a:p>
           <a:p>
@@ -11398,7 +11523,23 @@
                 </a:solidFill>
                 <a:latin typeface="Calibri"/>
               </a:rPr>
-              <a:t>–   La consecuencia es que hay una entidad mas y una consulta adicional al mostrar la ficha, lo cual se acepta porque el RNF de busqueda menor a tres segundos se sostiene con un indice.</a:t>
+              <a:t>–   Invertir ese orden es el error mas comun: los equipos empiezan mostrando pantallas bonitas, el jurado pregunta que problema resuelve eso y ahi la sustentacion se desarma.</a:t>
+            </a:r>
+          </a:p>
+          <a:p>
+            <a:pPr>
+              <a:spcAft>
+                <a:spcPts val="800"/>
+              </a:spcAft>
+            </a:pPr>
+            <a:r>
+              <a:rPr sz="2000" b="0" i="0">
+                <a:solidFill>
+                  <a:srgbClr val="333333"/>
+                </a:solidFill>
+                <a:latin typeface="Calibri"/>
+              </a:rPr>
+              <a:t>–   Para VetCare doce minutos alcanzan de sobra si se respetan las proporciones: uno y medio para el problema, tres para requisitos, dos para modelo, dos para interfaz en vivo, dos para decisiones y el resto para riesgos y cierre.</a:t>
             </a:r>
           </a:p>
         </p:txBody>
@@ -11579,7 +11720,7 @@
                 </a:solidFill>
                 <a:latin typeface="Calibri"/>
               </a:rPr>
-              <a:t>Defender una decision de diseño tiene una estructura fija que conviene... (2/2)</a:t>
+              <a:t>Defender una decision de diseño tiene una estructura fija que conviene... (1/2)</a:t>
             </a:r>
           </a:p>
         </p:txBody>
@@ -11618,7 +11759,7 @@
                 </a:solidFill>
                 <a:latin typeface="Calibri"/>
               </a:rPr>
-              <a:t>–   Otro ejemplo: decidimos que la fecha de nacimiento sea opcional; la alternativa era hacerla obligatoria</a:t>
+              <a:t>–   Defender una decision de diseño tiene una estructura fija que conviene memorizar: decision, alternativas consideradas, criterio de eleccion y consecuencia asumida.</a:t>
             </a:r>
           </a:p>
           <a:p>
@@ -11634,7 +11775,7 @@
                 </a:solidFill>
                 <a:latin typeface="Calibri"/>
               </a:rPr>
-              <a:t>–   El criterio fue que en Huellitas muchos dueños de mascotas rescatadas no la conocen y un campo obligatorio los llevaria a inventar datos; la consecuencia es que la edad se muestra como aproximada cuando el dato falta.</a:t>
+              <a:t>–   No basta decir que se hizo, hay que decir contra que se comparo y por que gano.</a:t>
             </a:r>
           </a:p>
           <a:p>
@@ -11650,7 +11791,23 @@
                 </a:solidFill>
                 <a:latin typeface="Calibri"/>
               </a:rPr>
-              <a:t>–   Una decision defendida asi resiste cualquier pregunta, porque el jurado ya sabe que el equipo penso en la alternativa.</a:t>
+              <a:t>–   Ejemplo concreto de VetCare: decidimos separar Historia_Clinica de Mascota como clases distintas; la alternativa era guardar diagnosticos y tratamientos como campos dentro de Mascota</a:t>
+            </a:r>
+          </a:p>
+          <a:p>
+            <a:pPr>
+              <a:spcAft>
+                <a:spcPts val="800"/>
+              </a:spcAft>
+            </a:pPr>
+            <a:r>
+              <a:rPr sz="2000" b="0" i="0">
+                <a:solidFill>
+                  <a:srgbClr val="333333"/>
+                </a:solidFill>
+                <a:latin typeface="Calibri"/>
+              </a:rPr>
+              <a:t>–   El criterio fue que una mascota tiene muchas consultas a lo largo de su vida y una relacion uno a muchos no cabe en campos fijos</a:t>
             </a:r>
           </a:p>
         </p:txBody>
@@ -11831,7 +11988,7 @@
                 </a:solidFill>
                 <a:latin typeface="Calibri"/>
               </a:rPr>
-              <a:t>Las preguntas del jurado son bastante predecibles y por eso se preparan</a:t>
+              <a:t>Defender una decision de diseño tiene una estructura fija que conviene... (2/2)</a:t>
             </a:r>
           </a:p>
         </p:txBody>
@@ -11870,7 +12027,7 @@
                 </a:solidFill>
                 <a:latin typeface="Calibri"/>
               </a:rPr>
-              <a:t>–   Las preguntas del jurado son bastante predecibles y por eso se preparan.</a:t>
+              <a:t>–   La consecuencia es que hay una entidad mas y una consulta adicional al mostrar la ficha, lo cual se acepta porque el RNF de busqueda menor a tres segundos se sostiene con un indice.</a:t>
             </a:r>
           </a:p>
           <a:p>
@@ -11886,7 +12043,7 @@
                 </a:solidFill>
                 <a:latin typeface="Calibri"/>
               </a:rPr>
-              <a:t>–   Las mas frecuentes en un proyecto como VetCare son: como sabe usted que este requisito es realmente necesario; que pasa si dos recepcionistas registran la misma mascota al mismo tiempo; por que esta clase existe y no es un atributo de otra</a:t>
+              <a:t>–   Otro ejemplo: decidimos que la fecha de nacimiento sea opcional; la alternativa era hacerla obligatoria</a:t>
             </a:r>
           </a:p>
           <a:p>
@@ -11902,71 +12059,7 @@
                 </a:solidFill>
                 <a:latin typeface="Calibri"/>
               </a:rPr>
-              <a:t>–   Como se cumple el requisito no funcional que usted escribio y como se mediria; que pasa si el sistema se cae a mitad de un registro; que dejaron por fuera del alcance y por que; y quien de ustedes hizo esta parte.</a:t>
-            </a:r>
-          </a:p>
-          <a:p>
-            <a:pPr>
-              <a:spcAft>
-                <a:spcPts val="800"/>
-              </a:spcAft>
-            </a:pPr>
-            <a:r>
-              <a:rPr sz="2000" b="0" i="0">
-                <a:solidFill>
-                  <a:srgbClr val="333333"/>
-                </a:solidFill>
-                <a:latin typeface="Calibri"/>
-              </a:rPr>
-              <a:t>–   Hay que preparar la respuesta de cada una en dos frases, sin discursos.</a:t>
-            </a:r>
-          </a:p>
-          <a:p>
-            <a:pPr>
-              <a:spcAft>
-                <a:spcPts val="800"/>
-              </a:spcAft>
-            </a:pPr>
-            <a:r>
-              <a:rPr sz="2000" b="0" i="0">
-                <a:solidFill>
-                  <a:srgbClr val="333333"/>
-                </a:solidFill>
-                <a:latin typeface="Calibri"/>
-              </a:rPr>
-              <a:t>–   Y hay una regla de oro para cuando no se sabe: no se inventa.</a:t>
-            </a:r>
-          </a:p>
-          <a:p>
-            <a:pPr>
-              <a:spcAft>
-                <a:spcPts val="800"/>
-              </a:spcAft>
-            </a:pPr>
-            <a:r>
-              <a:rPr sz="2000" b="0" i="0">
-                <a:solidFill>
-                  <a:srgbClr val="333333"/>
-                </a:solidFill>
-                <a:latin typeface="Calibri"/>
-              </a:rPr>
-              <a:t>–   La respuesta correcta es reconocer el vacio y proponer como se resolveria, por ejemplo no lo modelamos, lo registramos como riesgo abierto y se resolveria agregando una validacion de unicidad por dueño mas nombre en el diccionario de datos.</a:t>
-            </a:r>
-          </a:p>
-          <a:p>
-            <a:pPr>
-              <a:spcAft>
-                <a:spcPts val="800"/>
-              </a:spcAft>
-            </a:pPr>
-            <a:r>
-              <a:rPr sz="2000" b="0" i="0">
-                <a:solidFill>
-                  <a:srgbClr val="333333"/>
-                </a:solidFill>
-                <a:latin typeface="Calibri"/>
-              </a:rPr>
-              <a:t>–   Un jurado castiga mucho mas la improvisacion detectada que la honestidad tecnica.</a:t>
+              <a:t>–   El criterio fue que en Huellitas muchos dueños de mascotas rescatadas no la conocen y un campo obligatorio los llevaria a inventar datos; la consecuencia es que la edad se muestra como aproximada cuando el dato falta.</a:t>
             </a:r>
           </a:p>
         </p:txBody>
@@ -12147,7 +12240,7 @@
                 </a:solidFill>
                 <a:latin typeface="Calibri"/>
               </a:rPr>
-              <a:t>El reparto del guion en bloques con tiempos es criterio de evaluacion... (1/2)</a:t>
+              <a:t>Las preguntas del jurado son bastante predecibles y por eso se preparan</a:t>
             </a:r>
           </a:p>
         </p:txBody>
@@ -12186,7 +12279,7 @@
                 </a:solidFill>
                 <a:latin typeface="Calibri"/>
               </a:rPr>
-              <a:t>–   El reparto del guion en bloques con tiempos es criterio de evaluacion, no un detalle logistico.</a:t>
+              <a:t>–   Las preguntas del jurado son bastante predecibles y por eso se preparan.</a:t>
             </a:r>
           </a:p>
           <a:p>
@@ -12202,7 +12295,7 @@
                 </a:solidFill>
                 <a:latin typeface="Calibri"/>
               </a:rPr>
-              <a:t>–   La sustentacion es individual por defecto: el estudiante expone los cinco bloques y responde por todos, y lo que se califica es que cada bloque tenga su rango de minutos y su evidencia en pantalla, no quien lo dice.</a:t>
+              <a:t>–   Las mas frecuentes en un proyecto como VetCare son: como sabe usted que este requisito es realmente necesario; que pasa si dos recepcionistas registran la misma mascota al mismo tiempo; por que esta clase existe y no es un atributo de otra</a:t>
             </a:r>
           </a:p>
           <a:p>
@@ -12218,7 +12311,7 @@
                 </a:solidFill>
                 <a:latin typeface="Calibri"/>
               </a:rPr>
-              <a:t>–   El orden que funciona para VetCare es: abrir con problema y alcance, seguir con requisitos y trazabilidad, luego los modelos UML, despues el prototipo en vivo y cerrar con decisiones, riesgos y siguiente paso hacia Programacion II.</a:t>
+              <a:t>–   Como se cumple el requisito no funcional que usted escribio y como se mediria; que pasa si el sistema se cae a mitad de un registro; que dejaron por fuera del alcance y por que; y quien de ustedes hizo esta parte.</a:t>
             </a:r>
           </a:p>
           <a:p>
@@ -12234,7 +12327,23 @@
                 </a:solidFill>
                 <a:latin typeface="Calibri"/>
               </a:rPr>
-              <a:t>–   Si el docente autorizo equipo de 2 o 3, se agrega el nombre del responsable a cada bloque, todos los integrantes deben hablar al menos dos minutos y ninguno puede hablar solo de lo suyo: cada persona domina una pieza pero debe conocer el todo</a:t>
+              <a:t>–   Hay que preparar la respuesta de cada una en dos frases, sin discursos.</a:t>
+            </a:r>
+          </a:p>
+          <a:p>
+            <a:pPr>
+              <a:spcAft>
+                <a:spcPts val="800"/>
+              </a:spcAft>
+            </a:pPr>
+            <a:r>
+              <a:rPr sz="2000" b="0" i="0">
+                <a:solidFill>
+                  <a:srgbClr val="333333"/>
+                </a:solidFill>
+                <a:latin typeface="Calibri"/>
+              </a:rPr>
+              <a:t>–   Y hay una regla de oro para cuando no se sabe: no se inventa.</a:t>
             </a:r>
           </a:p>
         </p:txBody>

--- a/Seminario de Sistemas/Clases/Clase 14 - Preparacion de la sustentacion y cierre/Presentacion.pptx
+++ b/Seminario de Sistemas/Clases/Clase 14 - Preparacion de la sustentacion y cierre/Presentacion.pptx
@@ -26,6 +26,7 @@
     <p:sldId id="274" r:id="rId25"/>
     <p:sldId id="275" r:id="rId26"/>
     <p:sldId id="276" r:id="rId27"/>
+    <p:sldId id="277" r:id="rId28"/>
   </p:sldIdLst>
   <p:sldSz cx="12191695" cy="6858000" type="screen4x3"/>
   <p:notesSz cx="6858000" cy="9144000"/>
@@ -4162,7 +4163,7 @@
                 </a:solidFill>
                 <a:latin typeface="Calibri"/>
               </a:rPr>
-              <a:t>Guion de sustentacion VetCare: doce minutos cronometrados y quien dice que</a:t>
+              <a:t>El guion cronometrado de la sustentacion</a:t>
             </a:r>
           </a:p>
         </p:txBody>
@@ -4176,7 +4177,7 @@
         <p:spPr>
           <a:xfrm>
             <a:off x="457200" y="1261872"/>
-            <a:ext cx="11277295" cy="4773168"/>
+            <a:ext cx="11277295" cy="5093208"/>
           </a:xfrm>
           <a:prstGeom prst="roundRect">
             <a:avLst>
@@ -4296,7 +4297,7 @@
         <p:spPr>
           <a:xfrm>
             <a:off x="777240" y="1719072"/>
-            <a:ext cx="10637215" cy="4133087"/>
+            <a:ext cx="10637215" cy="4453128"/>
           </a:xfrm>
           <a:prstGeom prst="rect">
             <a:avLst/>
@@ -4321,7 +4322,7 @@
                 </a:solidFill>
                 <a:latin typeface="Calibri"/>
               </a:rPr>
-              <a:t>00:00-01:30 | PROBLEMA    | Huellitas: fichas extraviadas, 8 min por historial, cero metricas</a:t>
+              <a:t>gantt</a:t>
             </a:r>
           </a:p>
           <a:p>
@@ -4337,7 +4338,7 @@
                 </a:solidFill>
                 <a:latin typeface="Calibri"/>
               </a:rPr>
-              <a:t>01:30-03:00 | ALCANCE     | Lo que si entra y lo que quedo por fuera, con la razon</a:t>
+              <a:t>  title Sustentacion VetCare - 15 minutos</a:t>
             </a:r>
           </a:p>
           <a:p>
@@ -4353,7 +4354,7 @@
                 </a:solidFill>
                 <a:latin typeface="Calibri"/>
               </a:rPr>
-              <a:t>03:00-05:00 | REQUISITOS  | Solo los 3 RF criticos y 2 RNF medibles; el resto en el documento</a:t>
+              <a:t>  dateFormat mm:ss</a:t>
             </a:r>
           </a:p>
           <a:p>
@@ -4369,7 +4370,7 @@
                 </a:solidFill>
                 <a:latin typeface="Calibri"/>
               </a:rPr>
-              <a:t>05:00-07:00 | MODELO      | Casos de uso y clases: Mascota, Dueño, Historia_Clinica, Cita</a:t>
+              <a:t>  axisFormat %M:%S</a:t>
             </a:r>
           </a:p>
           <a:p>
@@ -4385,7 +4386,7 @@
                 </a:solidFill>
                 <a:latin typeface="Calibri"/>
               </a:rPr>
-              <a:t>07:00-09:00 | INTERFAZ    | Prototipo en vivo: registrar mascota -&gt; confirmacion -&gt; buscar</a:t>
+              <a:t/>
             </a:r>
           </a:p>
           <a:p>
@@ -4401,7 +4402,7 @@
                 </a:solidFill>
                 <a:latin typeface="Calibri"/>
               </a:rPr>
-              <a:t>09:00-11:00 | DECISIONES  | 3 decisiones con alternativa descartada, criterio y consecuencia</a:t>
+              <a:t>  section Guion</a:t>
             </a:r>
           </a:p>
           <a:p>
@@ -4417,7 +4418,7 @@
                 </a:solidFill>
                 <a:latin typeface="Calibri"/>
               </a:rPr>
-              <a:t>11:00-11:30 | RIESGOS     | Que queda abierto y que recibe Programacion II</a:t>
+              <a:t>  Problema y dominio        :00:00, 2m</a:t>
             </a:r>
           </a:p>
           <a:p>
@@ -4433,7 +4434,7 @@
                 </a:solidFill>
                 <a:latin typeface="Calibri"/>
               </a:rPr>
-              <a:t>11:30-12:00 | CIERRE      | Una frase de valor para la clinica, no un resumen</a:t>
+              <a:t>  Requisitos y alcance      :after a1, 2m</a:t>
             </a:r>
           </a:p>
           <a:p>
@@ -4449,7 +4450,7 @@
                 </a:solidFill>
                 <a:latin typeface="Calibri"/>
               </a:rPr>
-              <a:t>--- Reparto: todos hablan minimo 2 minutos y todos responden minimo 1 pregunta</a:t>
+              <a:t>  Modelo de dominio         :3m</a:t>
             </a:r>
           </a:p>
           <a:p>
@@ -4465,7 +4466,7 @@
                 </a:solidFill>
                 <a:latin typeface="Calibri"/>
               </a:rPr>
-              <a:t>--- Regla: nadie lee la diapositiva; la diapositiva es el plano, la voz es el argumento</a:t>
+              <a:t>  Casos de uso y secuencia  :3m</a:t>
             </a:r>
           </a:p>
           <a:p>
@@ -4481,7 +4482,7 @@
                 </a:solidFill>
                 <a:latin typeface="Calibri"/>
               </a:rPr>
-              <a:t>--- Cada pantalla proyectada debe poder señalar el RF que la origina</a:t>
+              <a:t>  Prototipo y navegacion    :2m</a:t>
             </a:r>
           </a:p>
           <a:p>
@@ -4497,7 +4498,71 @@
                 </a:solidFill>
                 <a:latin typeface="Calibri"/>
               </a:rPr>
-              <a:t>--- Plan B: capturas del prototipo, PDF descargado y diagramas exportados a imagen</a:t>
+              <a:t>  Decisiones defendidas     :2m</a:t>
+            </a:r>
+          </a:p>
+          <a:p>
+            <a:pPr>
+              <a:spcAft>
+                <a:spcPts val="400"/>
+              </a:spcAft>
+            </a:pPr>
+            <a:r>
+              <a:rPr sz="1400" b="0" i="0">
+                <a:solidFill>
+                  <a:srgbClr val="FFFFFF"/>
+                </a:solidFill>
+                <a:latin typeface="Calibri"/>
+              </a:rPr>
+              <a:t>  Cierre                    :1m</a:t>
+            </a:r>
+          </a:p>
+          <a:p>
+            <a:pPr>
+              <a:spcAft>
+                <a:spcPts val="400"/>
+              </a:spcAft>
+            </a:pPr>
+            <a:r>
+              <a:rPr sz="1400" b="0" i="0">
+                <a:solidFill>
+                  <a:srgbClr val="FFFFFF"/>
+                </a:solidFill>
+                <a:latin typeface="Calibri"/>
+              </a:rPr>
+              <a:t/>
+            </a:r>
+          </a:p>
+          <a:p>
+            <a:pPr>
+              <a:spcAft>
+                <a:spcPts val="400"/>
+              </a:spcAft>
+            </a:pPr>
+            <a:r>
+              <a:rPr sz="1400" b="0" i="0">
+                <a:solidFill>
+                  <a:srgbClr val="FFFFFF"/>
+                </a:solidFill>
+                <a:latin typeface="Calibri"/>
+              </a:rPr>
+              <a:t>%% Si el guion no esta cronometrado, el bloque de decisiones —que es el</a:t>
+            </a:r>
+          </a:p>
+          <a:p>
+            <a:pPr>
+              <a:spcAft>
+                <a:spcPts val="400"/>
+              </a:spcAft>
+            </a:pPr>
+            <a:r>
+              <a:rPr sz="1400" b="0" i="0">
+                <a:solidFill>
+                  <a:srgbClr val="FFFFFF"/>
+                </a:solidFill>
+                <a:latin typeface="Calibri"/>
+              </a:rPr>
+              <a:t>%% que el jurado califica— se queda sin tiempo. Siempre.</a:t>
             </a:r>
           </a:p>
         </p:txBody>
@@ -4505,41 +4570,6 @@
       <p:sp>
         <p:nvSpPr>
           <p:cNvPr id="9" name="TextBox 8"/>
-          <p:cNvSpPr txBox="1"/>
-          <p:nvPr/>
-        </p:nvSpPr>
-        <p:spPr>
-          <a:xfrm>
-            <a:off x="457200" y="6080760"/>
-            <a:ext cx="11277295" cy="320040"/>
-          </a:xfrm>
-          <a:prstGeom prst="rect">
-            <a:avLst/>
-          </a:prstGeom>
-          <a:noFill/>
-        </p:spPr>
-        <p:txBody>
-          <a:bodyPr wrap="square">
-            <a:spAutoFit/>
-          </a:bodyPr>
-          <a:lstStyle/>
-          <a:p>
-            <a:pPr algn="ctr"/>
-            <a:r>
-              <a:rPr sz="1200" b="0" i="1">
-                <a:solidFill>
-                  <a:srgbClr val="666666"/>
-                </a:solidFill>
-                <a:latin typeface="Calibri"/>
-              </a:rPr>
-              <a:t>Un paquete de diseño no se narra en orden cronologico: se defiende en orden de embudo, del dolor a la decision.</a:t>
-            </a:r>
-          </a:p>
-        </p:txBody>
-      </p:sp>
-      <p:sp>
-        <p:nvSpPr>
-          <p:cNvPr id="10" name="TextBox 9"/>
           <p:cNvSpPr txBox="1"/>
           <p:nvPr/>
         </p:nvSpPr>
@@ -4713,21 +4743,141 @@
                 </a:solidFill>
                 <a:latin typeface="Calibri"/>
               </a:rPr>
-              <a:t>Demo del dia</a:t>
-            </a:r>
-          </a:p>
-        </p:txBody>
-      </p:sp>
-      <p:sp>
-        <p:nvSpPr>
-          <p:cNvPr id="5" name="TextBox 4"/>
+              <a:t>Guion de sustentacion VetCare: doce minutos cronometrados y quien dice que</a:t>
+            </a:r>
+          </a:p>
+        </p:txBody>
+      </p:sp>
+      <p:sp>
+        <p:nvSpPr>
+          <p:cNvPr id="5" name="Rounded Rectangle 4"/>
+          <p:cNvSpPr/>
+          <p:nvPr/>
+        </p:nvSpPr>
+        <p:spPr>
+          <a:xfrm>
+            <a:off x="457200" y="1261872"/>
+            <a:ext cx="11277295" cy="4773168"/>
+          </a:xfrm>
+          <a:prstGeom prst="roundRect">
+            <a:avLst>
+              <a:gd name="adj" fmla="val 12000"/>
+            </a:avLst>
+          </a:prstGeom>
+          <a:solidFill>
+            <a:srgbClr val="1E2A38"/>
+          </a:solidFill>
+          <a:ln>
+            <a:noFill/>
+          </a:ln>
+        </p:spPr>
+        <p:style>
+          <a:lnRef idx="1">
+            <a:schemeClr val="accent1"/>
+          </a:lnRef>
+          <a:fillRef idx="3">
+            <a:schemeClr val="accent1"/>
+          </a:fillRef>
+          <a:effectRef idx="2">
+            <a:schemeClr val="accent1"/>
+          </a:effectRef>
+          <a:fontRef idx="minor">
+            <a:schemeClr val="lt1"/>
+          </a:fontRef>
+        </p:style>
+        <p:txBody>
+          <a:bodyPr rtlCol="0" anchor="ctr"/>
+          <a:lstStyle/>
+          <a:p>
+            <a:pPr algn="ctr"/>
+          </a:p>
+        </p:txBody>
+      </p:sp>
+      <p:sp>
+        <p:nvSpPr>
+          <p:cNvPr id="6" name="Rectangle 5"/>
+          <p:cNvSpPr/>
+          <p:nvPr/>
+        </p:nvSpPr>
+        <p:spPr>
+          <a:xfrm>
+            <a:off x="457200" y="1261872"/>
+            <a:ext cx="11277295" cy="320040"/>
+          </a:xfrm>
+          <a:prstGeom prst="rect">
+            <a:avLst/>
+          </a:prstGeom>
+          <a:solidFill>
+            <a:srgbClr val="095292"/>
+          </a:solidFill>
+          <a:ln>
+            <a:noFill/>
+          </a:ln>
+        </p:spPr>
+        <p:style>
+          <a:lnRef idx="1">
+            <a:schemeClr val="accent1"/>
+          </a:lnRef>
+          <a:fillRef idx="3">
+            <a:schemeClr val="accent1"/>
+          </a:fillRef>
+          <a:effectRef idx="2">
+            <a:schemeClr val="accent1"/>
+          </a:effectRef>
+          <a:fontRef idx="minor">
+            <a:schemeClr val="lt1"/>
+          </a:fontRef>
+        </p:style>
+        <p:txBody>
+          <a:bodyPr rtlCol="0" anchor="ctr"/>
+          <a:lstStyle/>
+          <a:p>
+            <a:pPr algn="ctr"/>
+          </a:p>
+        </p:txBody>
+      </p:sp>
+      <p:sp>
+        <p:nvSpPr>
+          <p:cNvPr id="7" name="TextBox 6"/>
           <p:cNvSpPr txBox="1"/>
           <p:nvPr/>
         </p:nvSpPr>
         <p:spPr>
           <a:xfrm>
-            <a:off x="457200" y="1170432"/>
-            <a:ext cx="11277295" cy="5230368"/>
+            <a:off x="685800" y="1307592"/>
+            <a:ext cx="10820095" cy="256032"/>
+          </a:xfrm>
+          <a:prstGeom prst="rect">
+            <a:avLst/>
+          </a:prstGeom>
+          <a:noFill/>
+        </p:spPr>
+        <p:txBody>
+          <a:bodyPr wrap="square" anchor="ctr"/>
+          <a:lstStyle/>
+          <a:p>
+            <a:r>
+              <a:rPr sz="1000" b="1" i="0">
+                <a:solidFill>
+                  <a:srgbClr val="269CCB"/>
+                </a:solidFill>
+                <a:latin typeface="Calibri"/>
+              </a:rPr>
+              <a:t>● ● ●</a:t>
+            </a:r>
+          </a:p>
+        </p:txBody>
+      </p:sp>
+      <p:sp>
+        <p:nvSpPr>
+          <p:cNvPr id="8" name="TextBox 7"/>
+          <p:cNvSpPr txBox="1"/>
+          <p:nvPr/>
+        </p:nvSpPr>
+        <p:spPr>
+          <a:xfrm>
+            <a:off x="777240" y="1719072"/>
+            <a:ext cx="10637215" cy="4133087"/>
           </a:xfrm>
           <a:prstGeom prst="rect">
             <a:avLst/>
@@ -4742,92 +4892,235 @@
           <a:p>
             <a:pPr>
               <a:spcAft>
-                <a:spcPts val="800"/>
+                <a:spcPts val="400"/>
               </a:spcAft>
             </a:pPr>
             <a:r>
-              <a:rPr sz="2000" b="0" i="0">
-                <a:solidFill>
-                  <a:srgbClr val="333333"/>
-                </a:solidFill>
-                <a:latin typeface="Calibri"/>
-              </a:rPr>
-              <a:t>–   </a:t>
-            </a:r>
-            <a:r>
-              <a:rPr sz="2000" b="1" i="0">
-                <a:solidFill>
-                  <a:srgbClr val="333333"/>
-                </a:solidFill>
-                <a:latin typeface="Calibri"/>
-              </a:rPr>
-              <a:t>Herramienta:</a:t>
-            </a:r>
-            <a:r>
-              <a:rPr sz="2000" b="0" i="0">
-                <a:solidFill>
-                  <a:srgbClr val="333333"/>
-                </a:solidFill>
-                <a:latin typeface="Calibri"/>
-              </a:rPr>
-              <a:t> Google Docs · draw.io · Figma o Penpot</a:t>
+              <a:rPr sz="1400" b="0" i="0">
+                <a:solidFill>
+                  <a:srgbClr val="FFFFFF"/>
+                </a:solidFill>
+                <a:latin typeface="Calibri"/>
+              </a:rPr>
+              <a:t>00:00-01:30 | PROBLEMA    | Huellitas: fichas extraviadas, 8 min por historial, cero metricas</a:t>
             </a:r>
           </a:p>
           <a:p>
             <a:pPr>
               <a:spcAft>
-                <a:spcPts val="800"/>
+                <a:spcPts val="400"/>
               </a:spcAft>
             </a:pPr>
             <a:r>
-              <a:rPr sz="2000" b="0" i="0">
-                <a:solidFill>
-                  <a:srgbClr val="333333"/>
-                </a:solidFill>
-                <a:latin typeface="Calibri"/>
-              </a:rPr>
-              <a:t>–   </a:t>
-            </a:r>
-            <a:r>
-              <a:rPr sz="2000" b="1" i="0">
-                <a:solidFill>
-                  <a:srgbClr val="333333"/>
-                </a:solidFill>
-                <a:latin typeface="Calibri"/>
-              </a:rPr>
-              <a:t>Demo:</a:t>
-            </a:r>
-            <a:r>
-              <a:rPr sz="2000" b="0" i="0">
-                <a:solidFill>
-                  <a:srgbClr val="333333"/>
-                </a:solidFill>
-                <a:latin typeface="Calibri"/>
-              </a:rPr>
-              <a:t> El docente proyecta una sustentacion mal hecha y una bien hecha del mismo paquete VetCare, y luego arma en vivo la tabla de decisiones para justificar por que Historia_Clinica es una clase aparte de Mascota.</a:t>
+              <a:rPr sz="1400" b="0" i="0">
+                <a:solidFill>
+                  <a:srgbClr val="FFFFFF"/>
+                </a:solidFill>
+                <a:latin typeface="Calibri"/>
+              </a:rPr>
+              <a:t>01:30-03:00 | ALCANCE     | Lo que si entra y lo que quedo por fuera, con la razon</a:t>
             </a:r>
           </a:p>
           <a:p>
             <a:pPr>
               <a:spcAft>
-                <a:spcPts val="800"/>
+                <a:spcPts val="400"/>
               </a:spcAft>
             </a:pPr>
             <a:r>
-              <a:rPr sz="2000" b="0" i="0">
-                <a:solidFill>
-                  <a:srgbClr val="333333"/>
-                </a:solidFill>
-                <a:latin typeface="Calibri"/>
-              </a:rPr>
-              <a:t>–   Mismo dominio VetCare — no otro ejemplo. Aqui se diseña, no se programa.</a:t>
-            </a:r>
-          </a:p>
-        </p:txBody>
-      </p:sp>
-      <p:sp>
-        <p:nvSpPr>
-          <p:cNvPr id="6" name="TextBox 5"/>
+              <a:rPr sz="1400" b="0" i="0">
+                <a:solidFill>
+                  <a:srgbClr val="FFFFFF"/>
+                </a:solidFill>
+                <a:latin typeface="Calibri"/>
+              </a:rPr>
+              <a:t>03:00-05:00 | REQUISITOS  | Solo los 3 RF criticos y 2 RNF medibles; el resto en el documento</a:t>
+            </a:r>
+          </a:p>
+          <a:p>
+            <a:pPr>
+              <a:spcAft>
+                <a:spcPts val="400"/>
+              </a:spcAft>
+            </a:pPr>
+            <a:r>
+              <a:rPr sz="1400" b="0" i="0">
+                <a:solidFill>
+                  <a:srgbClr val="FFFFFF"/>
+                </a:solidFill>
+                <a:latin typeface="Calibri"/>
+              </a:rPr>
+              <a:t>05:00-07:00 | MODELO      | Casos de uso y clases: Mascota, Dueño, Historia_Clinica, Cita</a:t>
+            </a:r>
+          </a:p>
+          <a:p>
+            <a:pPr>
+              <a:spcAft>
+                <a:spcPts val="400"/>
+              </a:spcAft>
+            </a:pPr>
+            <a:r>
+              <a:rPr sz="1400" b="0" i="0">
+                <a:solidFill>
+                  <a:srgbClr val="FFFFFF"/>
+                </a:solidFill>
+                <a:latin typeface="Calibri"/>
+              </a:rPr>
+              <a:t>07:00-09:00 | INTERFAZ    | Prototipo en vivo: registrar mascota -&gt; confirmacion -&gt; buscar</a:t>
+            </a:r>
+          </a:p>
+          <a:p>
+            <a:pPr>
+              <a:spcAft>
+                <a:spcPts val="400"/>
+              </a:spcAft>
+            </a:pPr>
+            <a:r>
+              <a:rPr sz="1400" b="0" i="0">
+                <a:solidFill>
+                  <a:srgbClr val="FFFFFF"/>
+                </a:solidFill>
+                <a:latin typeface="Calibri"/>
+              </a:rPr>
+              <a:t>09:00-11:00 | DECISIONES  | 3 decisiones con alternativa descartada, criterio y consecuencia</a:t>
+            </a:r>
+          </a:p>
+          <a:p>
+            <a:pPr>
+              <a:spcAft>
+                <a:spcPts val="400"/>
+              </a:spcAft>
+            </a:pPr>
+            <a:r>
+              <a:rPr sz="1400" b="0" i="0">
+                <a:solidFill>
+                  <a:srgbClr val="FFFFFF"/>
+                </a:solidFill>
+                <a:latin typeface="Calibri"/>
+              </a:rPr>
+              <a:t>11:00-11:30 | RIESGOS     | Que queda abierto y que recibe Programacion II</a:t>
+            </a:r>
+          </a:p>
+          <a:p>
+            <a:pPr>
+              <a:spcAft>
+                <a:spcPts val="400"/>
+              </a:spcAft>
+            </a:pPr>
+            <a:r>
+              <a:rPr sz="1400" b="0" i="0">
+                <a:solidFill>
+                  <a:srgbClr val="FFFFFF"/>
+                </a:solidFill>
+                <a:latin typeface="Calibri"/>
+              </a:rPr>
+              <a:t>11:30-12:00 | CIERRE      | Una frase de valor para la clinica, no un resumen</a:t>
+            </a:r>
+          </a:p>
+          <a:p>
+            <a:pPr>
+              <a:spcAft>
+                <a:spcPts val="400"/>
+              </a:spcAft>
+            </a:pPr>
+            <a:r>
+              <a:rPr sz="1400" b="0" i="0">
+                <a:solidFill>
+                  <a:srgbClr val="FFFFFF"/>
+                </a:solidFill>
+                <a:latin typeface="Calibri"/>
+              </a:rPr>
+              <a:t>--- Reparto: todos hablan minimo 2 minutos y todos responden minimo 1 pregunta</a:t>
+            </a:r>
+          </a:p>
+          <a:p>
+            <a:pPr>
+              <a:spcAft>
+                <a:spcPts val="400"/>
+              </a:spcAft>
+            </a:pPr>
+            <a:r>
+              <a:rPr sz="1400" b="0" i="0">
+                <a:solidFill>
+                  <a:srgbClr val="FFFFFF"/>
+                </a:solidFill>
+                <a:latin typeface="Calibri"/>
+              </a:rPr>
+              <a:t>--- Regla: nadie lee la diapositiva; la diapositiva es el plano, la voz es el argumento</a:t>
+            </a:r>
+          </a:p>
+          <a:p>
+            <a:pPr>
+              <a:spcAft>
+                <a:spcPts val="400"/>
+              </a:spcAft>
+            </a:pPr>
+            <a:r>
+              <a:rPr sz="1400" b="0" i="0">
+                <a:solidFill>
+                  <a:srgbClr val="FFFFFF"/>
+                </a:solidFill>
+                <a:latin typeface="Calibri"/>
+              </a:rPr>
+              <a:t>--- Cada pantalla proyectada debe poder señalar el RF que la origina</a:t>
+            </a:r>
+          </a:p>
+          <a:p>
+            <a:pPr>
+              <a:spcAft>
+                <a:spcPts val="400"/>
+              </a:spcAft>
+            </a:pPr>
+            <a:r>
+              <a:rPr sz="1400" b="0" i="0">
+                <a:solidFill>
+                  <a:srgbClr val="FFFFFF"/>
+                </a:solidFill>
+                <a:latin typeface="Calibri"/>
+              </a:rPr>
+              <a:t>--- Plan B: capturas del prototipo, PDF descargado y diagramas exportados a imagen</a:t>
+            </a:r>
+          </a:p>
+        </p:txBody>
+      </p:sp>
+      <p:sp>
+        <p:nvSpPr>
+          <p:cNvPr id="9" name="TextBox 8"/>
+          <p:cNvSpPr txBox="1"/>
+          <p:nvPr/>
+        </p:nvSpPr>
+        <p:spPr>
+          <a:xfrm>
+            <a:off x="457200" y="6080760"/>
+            <a:ext cx="11277295" cy="320040"/>
+          </a:xfrm>
+          <a:prstGeom prst="rect">
+            <a:avLst/>
+          </a:prstGeom>
+          <a:noFill/>
+        </p:spPr>
+        <p:txBody>
+          <a:bodyPr wrap="square">
+            <a:spAutoFit/>
+          </a:bodyPr>
+          <a:lstStyle/>
+          <a:p>
+            <a:pPr algn="ctr"/>
+            <a:r>
+              <a:rPr sz="1200" b="0" i="1">
+                <a:solidFill>
+                  <a:srgbClr val="666666"/>
+                </a:solidFill>
+                <a:latin typeface="Calibri"/>
+              </a:rPr>
+              <a:t>Un paquete de diseño no se narra en orden cronologico: se defiende en orden de embudo, del dolor a la decision.</a:t>
+            </a:r>
+          </a:p>
+        </p:txBody>
+      </p:sp>
+      <p:sp>
+        <p:nvSpPr>
+          <p:cNvPr id="10" name="TextBox 9"/>
           <p:cNvSpPr txBox="1"/>
           <p:nvPr/>
         </p:nvSpPr>
@@ -4895,7 +5188,7 @@
         <p:spPr>
           <a:xfrm>
             <a:off x="0" y="0"/>
-            <a:ext cx="12191695" cy="1170432"/>
+            <a:ext cx="12191695" cy="960120"/>
           </a:xfrm>
           <a:prstGeom prst="rect">
             <a:avLst/>
@@ -4937,7 +5230,7 @@
         </p:nvSpPr>
         <p:spPr>
           <a:xfrm>
-            <a:off x="0" y="1170432"/>
+            <a:off x="0" y="960120"/>
             <a:ext cx="12191695" cy="41148"/>
           </a:xfrm>
           <a:prstGeom prst="rect">
@@ -4981,7 +5274,7 @@
         <p:spPr>
           <a:xfrm>
             <a:off x="457200" y="164592"/>
-            <a:ext cx="11277295" cy="384048"/>
+            <a:ext cx="11277295" cy="502920"/>
           </a:xfrm>
           <a:prstGeom prst="rect">
             <a:avLst/>
@@ -5001,7 +5294,7 @@
                 </a:solidFill>
                 <a:latin typeface="Calibri"/>
               </a:rPr>
-              <a:t>Herramientas de hoy</a:t>
+              <a:t>Demo del dia</a:t>
             </a:r>
           </a:p>
         </p:txBody>
@@ -5014,8 +5307,8 @@
         </p:nvSpPr>
         <p:spPr>
           <a:xfrm>
-            <a:off x="457200" y="566928"/>
-            <a:ext cx="11277295" cy="411480"/>
+            <a:off x="457200" y="1170432"/>
+            <a:ext cx="11277295" cy="5230368"/>
           </a:xfrm>
           <a:prstGeom prst="rect">
             <a:avLst/>
@@ -5028,1149 +5321,94 @@
           </a:bodyPr>
           <a:lstStyle/>
           <a:p>
-            <a:r>
-              <a:rPr sz="1400" b="0" i="0">
-                <a:solidFill>
-                  <a:srgbClr val="B8D8EE"/>
-                </a:solidFill>
-                <a:latin typeface="Calibri"/>
-              </a:rPr>
-              <a:t>Gratis · funcionan en el navegador</a:t>
-            </a:r>
-          </a:p>
-        </p:txBody>
-      </p:sp>
-      <p:sp>
-        <p:nvSpPr>
-          <p:cNvPr id="6" name="Rounded Rectangle 5"/>
-          <p:cNvSpPr/>
-          <p:nvPr/>
-        </p:nvSpPr>
-        <p:spPr>
-          <a:xfrm>
-            <a:off x="457200" y="1591056"/>
-            <a:ext cx="3624986" cy="2299716"/>
-          </a:xfrm>
-          <a:prstGeom prst="roundRect">
-            <a:avLst>
-              <a:gd name="adj" fmla="val 12000"/>
-            </a:avLst>
-          </a:prstGeom>
-          <a:solidFill>
-            <a:srgbClr val="F2F2F2"/>
-          </a:solidFill>
-          <a:ln>
-            <a:noFill/>
-          </a:ln>
-        </p:spPr>
-        <p:style>
-          <a:lnRef idx="1">
-            <a:schemeClr val="accent1"/>
-          </a:lnRef>
-          <a:fillRef idx="3">
-            <a:schemeClr val="accent1"/>
-          </a:fillRef>
-          <a:effectRef idx="2">
-            <a:schemeClr val="accent1"/>
-          </a:effectRef>
-          <a:fontRef idx="minor">
-            <a:schemeClr val="lt1"/>
-          </a:fontRef>
-        </p:style>
-        <p:txBody>
-          <a:bodyPr rtlCol="0" anchor="ctr"/>
-          <a:lstStyle/>
-          <a:p>
-            <a:pPr algn="ctr"/>
-          </a:p>
-        </p:txBody>
-      </p:sp>
-      <p:sp>
-        <p:nvSpPr>
-          <p:cNvPr id="7" name="Rectangle 6"/>
-          <p:cNvSpPr/>
-          <p:nvPr/>
-        </p:nvSpPr>
-        <p:spPr>
-          <a:xfrm>
-            <a:off x="457200" y="1591056"/>
-            <a:ext cx="3624986" cy="64008"/>
-          </a:xfrm>
-          <a:prstGeom prst="rect">
-            <a:avLst/>
-          </a:prstGeom>
-          <a:solidFill>
-            <a:srgbClr val="095292"/>
-          </a:solidFill>
-          <a:ln>
-            <a:noFill/>
-          </a:ln>
-        </p:spPr>
-        <p:style>
-          <a:lnRef idx="1">
-            <a:schemeClr val="accent1"/>
-          </a:lnRef>
-          <a:fillRef idx="3">
-            <a:schemeClr val="accent1"/>
-          </a:fillRef>
-          <a:effectRef idx="2">
-            <a:schemeClr val="accent1"/>
-          </a:effectRef>
-          <a:fontRef idx="minor">
-            <a:schemeClr val="lt1"/>
-          </a:fontRef>
-        </p:style>
-        <p:txBody>
-          <a:bodyPr rtlCol="0" anchor="ctr"/>
-          <a:lstStyle/>
-          <a:p>
-            <a:pPr algn="ctr"/>
-          </a:p>
-        </p:txBody>
-      </p:sp>
-      <p:sp>
-        <p:nvSpPr>
-          <p:cNvPr id="8" name="Rectangle 7"/>
-          <p:cNvSpPr/>
-          <p:nvPr/>
-        </p:nvSpPr>
-        <p:spPr>
-          <a:xfrm>
-            <a:off x="457200" y="1655064"/>
-            <a:ext cx="3624986" cy="27432"/>
-          </a:xfrm>
-          <a:prstGeom prst="rect">
-            <a:avLst/>
-          </a:prstGeom>
-          <a:solidFill>
-            <a:srgbClr val="FFD000"/>
-          </a:solidFill>
-          <a:ln>
-            <a:noFill/>
-          </a:ln>
-        </p:spPr>
-        <p:style>
-          <a:lnRef idx="1">
-            <a:schemeClr val="accent1"/>
-          </a:lnRef>
-          <a:fillRef idx="3">
-            <a:schemeClr val="accent1"/>
-          </a:fillRef>
-          <a:effectRef idx="2">
-            <a:schemeClr val="accent1"/>
-          </a:effectRef>
-          <a:fontRef idx="minor">
-            <a:schemeClr val="lt1"/>
-          </a:fontRef>
-        </p:style>
-        <p:txBody>
-          <a:bodyPr rtlCol="0" anchor="ctr"/>
-          <a:lstStyle/>
-          <a:p>
-            <a:pPr algn="ctr"/>
-          </a:p>
-        </p:txBody>
-      </p:sp>
-      <p:pic>
-        <p:nvPicPr>
-          <p:cNvPr id="9" name="Picture 8" descr="drawio.png"/>
-          <p:cNvPicPr>
-            <a:picLocks noChangeAspect="1"/>
-          </p:cNvPicPr>
-          <p:nvPr/>
-        </p:nvPicPr>
-        <p:blipFill>
-          <a:blip r:embed="rId2"/>
-          <a:stretch>
-            <a:fillRect/>
-          </a:stretch>
-        </p:blipFill>
-        <p:spPr>
-          <a:xfrm>
-            <a:off x="1659331" y="1847087"/>
-            <a:ext cx="1220724" cy="1220724"/>
-          </a:xfrm>
-          <a:prstGeom prst="rect">
-            <a:avLst/>
-          </a:prstGeom>
-        </p:spPr>
-      </p:pic>
-      <p:sp>
-        <p:nvSpPr>
-          <p:cNvPr id="10" name="TextBox 9"/>
-          <p:cNvSpPr txBox="1"/>
-          <p:nvPr/>
-        </p:nvSpPr>
-        <p:spPr>
-          <a:xfrm>
-            <a:off x="530352" y="3159251"/>
-            <a:ext cx="3478682" cy="621792"/>
-          </a:xfrm>
-          <a:prstGeom prst="rect">
-            <a:avLst/>
-          </a:prstGeom>
-          <a:noFill/>
-        </p:spPr>
-        <p:txBody>
-          <a:bodyPr wrap="square" anchor="t"/>
-          <a:lstStyle/>
-          <a:p>
-            <a:pPr algn="ctr"/>
-            <a:r>
-              <a:rPr sz="1300" b="1" i="0">
-                <a:solidFill>
-                  <a:srgbClr val="095292"/>
-                </a:solidFill>
-                <a:latin typeface="Calibri"/>
-              </a:rPr>
-              <a:t>Draw.Io</a:t>
-            </a:r>
-          </a:p>
-          <a:p>
-            <a:pPr algn="ctr">
-              <a:spcBef>
-                <a:spcPts val="200"/>
-              </a:spcBef>
+            <a:pPr>
+              <a:spcAft>
+                <a:spcPts val="800"/>
+              </a:spcAft>
             </a:pPr>
             <a:r>
-              <a:rPr sz="1000" b="0" i="0">
-                <a:solidFill>
-                  <a:srgbClr val="666666"/>
-                </a:solidFill>
-                <a:latin typeface="Calibri"/>
-              </a:rPr>
-              <a:t>Diagramas UML y de contexto</a:t>
-            </a:r>
-          </a:p>
-        </p:txBody>
-      </p:sp>
-      <p:sp>
-        <p:nvSpPr>
-          <p:cNvPr id="11" name="Rounded Rectangle 10"/>
-          <p:cNvSpPr/>
-          <p:nvPr/>
-        </p:nvSpPr>
-        <p:spPr>
-          <a:xfrm>
-            <a:off x="4283354" y="1591056"/>
-            <a:ext cx="3624986" cy="2299716"/>
-          </a:xfrm>
-          <a:prstGeom prst="roundRect">
-            <a:avLst>
-              <a:gd name="adj" fmla="val 12000"/>
-            </a:avLst>
-          </a:prstGeom>
-          <a:solidFill>
-            <a:srgbClr val="F2F2F2"/>
-          </a:solidFill>
-          <a:ln>
-            <a:noFill/>
-          </a:ln>
-        </p:spPr>
-        <p:style>
-          <a:lnRef idx="1">
-            <a:schemeClr val="accent1"/>
-          </a:lnRef>
-          <a:fillRef idx="3">
-            <a:schemeClr val="accent1"/>
-          </a:fillRef>
-          <a:effectRef idx="2">
-            <a:schemeClr val="accent1"/>
-          </a:effectRef>
-          <a:fontRef idx="minor">
-            <a:schemeClr val="lt1"/>
-          </a:fontRef>
-        </p:style>
-        <p:txBody>
-          <a:bodyPr rtlCol="0" anchor="ctr"/>
-          <a:lstStyle/>
-          <a:p>
-            <a:pPr algn="ctr"/>
-          </a:p>
-        </p:txBody>
-      </p:sp>
-      <p:sp>
-        <p:nvSpPr>
-          <p:cNvPr id="12" name="Rectangle 11"/>
-          <p:cNvSpPr/>
-          <p:nvPr/>
-        </p:nvSpPr>
-        <p:spPr>
-          <a:xfrm>
-            <a:off x="4283354" y="1591056"/>
-            <a:ext cx="3624986" cy="64008"/>
-          </a:xfrm>
-          <a:prstGeom prst="rect">
-            <a:avLst/>
-          </a:prstGeom>
-          <a:solidFill>
-            <a:srgbClr val="095292"/>
-          </a:solidFill>
-          <a:ln>
-            <a:noFill/>
-          </a:ln>
-        </p:spPr>
-        <p:style>
-          <a:lnRef idx="1">
-            <a:schemeClr val="accent1"/>
-          </a:lnRef>
-          <a:fillRef idx="3">
-            <a:schemeClr val="accent1"/>
-          </a:fillRef>
-          <a:effectRef idx="2">
-            <a:schemeClr val="accent1"/>
-          </a:effectRef>
-          <a:fontRef idx="minor">
-            <a:schemeClr val="lt1"/>
-          </a:fontRef>
-        </p:style>
-        <p:txBody>
-          <a:bodyPr rtlCol="0" anchor="ctr"/>
-          <a:lstStyle/>
-          <a:p>
-            <a:pPr algn="ctr"/>
-          </a:p>
-        </p:txBody>
-      </p:sp>
-      <p:sp>
-        <p:nvSpPr>
-          <p:cNvPr id="13" name="Rectangle 12"/>
-          <p:cNvSpPr/>
-          <p:nvPr/>
-        </p:nvSpPr>
-        <p:spPr>
-          <a:xfrm>
-            <a:off x="4283354" y="1655064"/>
-            <a:ext cx="3624986" cy="27432"/>
-          </a:xfrm>
-          <a:prstGeom prst="rect">
-            <a:avLst/>
-          </a:prstGeom>
-          <a:solidFill>
-            <a:srgbClr val="FFD000"/>
-          </a:solidFill>
-          <a:ln>
-            <a:noFill/>
-          </a:ln>
-        </p:spPr>
-        <p:style>
-          <a:lnRef idx="1">
-            <a:schemeClr val="accent1"/>
-          </a:lnRef>
-          <a:fillRef idx="3">
-            <a:schemeClr val="accent1"/>
-          </a:fillRef>
-          <a:effectRef idx="2">
-            <a:schemeClr val="accent1"/>
-          </a:effectRef>
-          <a:fontRef idx="minor">
-            <a:schemeClr val="lt1"/>
-          </a:fontRef>
-        </p:style>
-        <p:txBody>
-          <a:bodyPr rtlCol="0" anchor="ctr"/>
-          <a:lstStyle/>
-          <a:p>
-            <a:pPr algn="ctr"/>
-          </a:p>
-        </p:txBody>
-      </p:sp>
-      <p:pic>
-        <p:nvPicPr>
-          <p:cNvPr id="14" name="Picture 13" descr="google_docs.png"/>
-          <p:cNvPicPr>
-            <a:picLocks noChangeAspect="1"/>
-          </p:cNvPicPr>
-          <p:nvPr/>
-        </p:nvPicPr>
-        <p:blipFill>
-          <a:blip r:embed="rId3"/>
-          <a:stretch>
-            <a:fillRect/>
-          </a:stretch>
-        </p:blipFill>
-        <p:spPr>
-          <a:xfrm>
-            <a:off x="5485485" y="1847087"/>
-            <a:ext cx="1220724" cy="1220724"/>
-          </a:xfrm>
-          <a:prstGeom prst="rect">
-            <a:avLst/>
-          </a:prstGeom>
-        </p:spPr>
-      </p:pic>
-      <p:sp>
-        <p:nvSpPr>
-          <p:cNvPr id="15" name="TextBox 14"/>
-          <p:cNvSpPr txBox="1"/>
-          <p:nvPr/>
-        </p:nvSpPr>
-        <p:spPr>
-          <a:xfrm>
-            <a:off x="4356506" y="3159251"/>
-            <a:ext cx="3478682" cy="621792"/>
-          </a:xfrm>
-          <a:prstGeom prst="rect">
-            <a:avLst/>
-          </a:prstGeom>
-          <a:noFill/>
-        </p:spPr>
-        <p:txBody>
-          <a:bodyPr wrap="square" anchor="t"/>
-          <a:lstStyle/>
-          <a:p>
-            <a:pPr algn="ctr"/>
-            <a:r>
-              <a:rPr sz="1300" b="1" i="0">
-                <a:solidFill>
-                  <a:srgbClr val="095292"/>
-                </a:solidFill>
-                <a:latin typeface="Calibri"/>
-              </a:rPr>
-              <a:t>google docs</a:t>
-            </a:r>
-          </a:p>
-          <a:p>
-            <a:pPr algn="ctr">
-              <a:spcBef>
-                <a:spcPts val="200"/>
-              </a:spcBef>
+              <a:rPr sz="2000" b="0" i="0">
+                <a:solidFill>
+                  <a:srgbClr val="333333"/>
+                </a:solidFill>
+                <a:latin typeface="Calibri"/>
+              </a:rPr>
+              <a:t>–   </a:t>
+            </a:r>
+            <a:r>
+              <a:rPr sz="2000" b="1" i="0">
+                <a:solidFill>
+                  <a:srgbClr val="333333"/>
+                </a:solidFill>
+                <a:latin typeface="Calibri"/>
+              </a:rPr>
+              <a:t>Herramienta:</a:t>
+            </a:r>
+            <a:r>
+              <a:rPr sz="2000" b="0" i="0">
+                <a:solidFill>
+                  <a:srgbClr val="333333"/>
+                </a:solidFill>
+                <a:latin typeface="Calibri"/>
+              </a:rPr>
+              <a:t> Google Docs · draw.io · Figma o Penpot</a:t>
+            </a:r>
+          </a:p>
+          <a:p>
+            <a:pPr>
+              <a:spcAft>
+                <a:spcPts val="800"/>
+              </a:spcAft>
             </a:pPr>
             <a:r>
-              <a:rPr sz="1000" b="0" i="0">
-                <a:solidFill>
-                  <a:srgbClr val="666666"/>
-                </a:solidFill>
-                <a:latin typeface="Calibri"/>
-              </a:rPr>
-              <a:t>Documentos del paquete de diseño</a:t>
-            </a:r>
-          </a:p>
-        </p:txBody>
-      </p:sp>
-      <p:sp>
-        <p:nvSpPr>
-          <p:cNvPr id="16" name="Rounded Rectangle 15"/>
-          <p:cNvSpPr/>
-          <p:nvPr/>
-        </p:nvSpPr>
-        <p:spPr>
-          <a:xfrm>
-            <a:off x="8109508" y="1591056"/>
-            <a:ext cx="3624986" cy="2299716"/>
-          </a:xfrm>
-          <a:prstGeom prst="roundRect">
-            <a:avLst>
-              <a:gd name="adj" fmla="val 12000"/>
-            </a:avLst>
-          </a:prstGeom>
-          <a:solidFill>
-            <a:srgbClr val="F2F2F2"/>
-          </a:solidFill>
-          <a:ln>
-            <a:noFill/>
-          </a:ln>
-        </p:spPr>
-        <p:style>
-          <a:lnRef idx="1">
-            <a:schemeClr val="accent1"/>
-          </a:lnRef>
-          <a:fillRef idx="3">
-            <a:schemeClr val="accent1"/>
-          </a:fillRef>
-          <a:effectRef idx="2">
-            <a:schemeClr val="accent1"/>
-          </a:effectRef>
-          <a:fontRef idx="minor">
-            <a:schemeClr val="lt1"/>
-          </a:fontRef>
-        </p:style>
-        <p:txBody>
-          <a:bodyPr rtlCol="0" anchor="ctr"/>
-          <a:lstStyle/>
-          <a:p>
-            <a:pPr algn="ctr"/>
-          </a:p>
-        </p:txBody>
-      </p:sp>
-      <p:sp>
-        <p:nvSpPr>
-          <p:cNvPr id="17" name="Rectangle 16"/>
-          <p:cNvSpPr/>
-          <p:nvPr/>
-        </p:nvSpPr>
-        <p:spPr>
-          <a:xfrm>
-            <a:off x="8109508" y="1591056"/>
-            <a:ext cx="3624986" cy="64008"/>
-          </a:xfrm>
-          <a:prstGeom prst="rect">
-            <a:avLst/>
-          </a:prstGeom>
-          <a:solidFill>
-            <a:srgbClr val="095292"/>
-          </a:solidFill>
-          <a:ln>
-            <a:noFill/>
-          </a:ln>
-        </p:spPr>
-        <p:style>
-          <a:lnRef idx="1">
-            <a:schemeClr val="accent1"/>
-          </a:lnRef>
-          <a:fillRef idx="3">
-            <a:schemeClr val="accent1"/>
-          </a:fillRef>
-          <a:effectRef idx="2">
-            <a:schemeClr val="accent1"/>
-          </a:effectRef>
-          <a:fontRef idx="minor">
-            <a:schemeClr val="lt1"/>
-          </a:fontRef>
-        </p:style>
-        <p:txBody>
-          <a:bodyPr rtlCol="0" anchor="ctr"/>
-          <a:lstStyle/>
-          <a:p>
-            <a:pPr algn="ctr"/>
-          </a:p>
-        </p:txBody>
-      </p:sp>
-      <p:sp>
-        <p:nvSpPr>
-          <p:cNvPr id="18" name="Rectangle 17"/>
-          <p:cNvSpPr/>
-          <p:nvPr/>
-        </p:nvSpPr>
-        <p:spPr>
-          <a:xfrm>
-            <a:off x="8109508" y="1655064"/>
-            <a:ext cx="3624986" cy="27432"/>
-          </a:xfrm>
-          <a:prstGeom prst="rect">
-            <a:avLst/>
-          </a:prstGeom>
-          <a:solidFill>
-            <a:srgbClr val="FFD000"/>
-          </a:solidFill>
-          <a:ln>
-            <a:noFill/>
-          </a:ln>
-        </p:spPr>
-        <p:style>
-          <a:lnRef idx="1">
-            <a:schemeClr val="accent1"/>
-          </a:lnRef>
-          <a:fillRef idx="3">
-            <a:schemeClr val="accent1"/>
-          </a:fillRef>
-          <a:effectRef idx="2">
-            <a:schemeClr val="accent1"/>
-          </a:effectRef>
-          <a:fontRef idx="minor">
-            <a:schemeClr val="lt1"/>
-          </a:fontRef>
-        </p:style>
-        <p:txBody>
-          <a:bodyPr rtlCol="0" anchor="ctr"/>
-          <a:lstStyle/>
-          <a:p>
-            <a:pPr algn="ctr"/>
-          </a:p>
-        </p:txBody>
-      </p:sp>
-      <p:sp>
-        <p:nvSpPr>
-          <p:cNvPr id="19" name="Rounded Rectangle 18"/>
-          <p:cNvSpPr/>
-          <p:nvPr/>
-        </p:nvSpPr>
-        <p:spPr>
-          <a:xfrm>
-            <a:off x="9311640" y="1847087"/>
-            <a:ext cx="1220724" cy="1220724"/>
-          </a:xfrm>
-          <a:prstGeom prst="roundRect">
-            <a:avLst>
-              <a:gd name="adj" fmla="val 12000"/>
-            </a:avLst>
-          </a:prstGeom>
-          <a:solidFill>
-            <a:srgbClr val="E8F4FA"/>
-          </a:solidFill>
-          <a:ln>
-            <a:noFill/>
-          </a:ln>
-        </p:spPr>
-        <p:style>
-          <a:lnRef idx="1">
-            <a:schemeClr val="accent1"/>
-          </a:lnRef>
-          <a:fillRef idx="3">
-            <a:schemeClr val="accent1"/>
-          </a:fillRef>
-          <a:effectRef idx="2">
-            <a:schemeClr val="accent1"/>
-          </a:effectRef>
-          <a:fontRef idx="minor">
-            <a:schemeClr val="lt1"/>
-          </a:fontRef>
-        </p:style>
-        <p:txBody>
-          <a:bodyPr rtlCol="0" anchor="ctr"/>
-          <a:lstStyle/>
-          <a:p>
-            <a:pPr algn="ctr"/>
-          </a:p>
-        </p:txBody>
-      </p:sp>
-      <p:sp>
-        <p:nvSpPr>
-          <p:cNvPr id="20" name="TextBox 19"/>
-          <p:cNvSpPr txBox="1"/>
-          <p:nvPr/>
-        </p:nvSpPr>
-        <p:spPr>
-          <a:xfrm>
-            <a:off x="9311640" y="1847087"/>
-            <a:ext cx="1220724" cy="1220724"/>
-          </a:xfrm>
-          <a:prstGeom prst="rect">
-            <a:avLst/>
-          </a:prstGeom>
-          <a:noFill/>
-        </p:spPr>
-        <p:txBody>
-          <a:bodyPr wrap="square" anchor="ctr"/>
-          <a:lstStyle/>
-          <a:p>
-            <a:pPr algn="ctr"/>
-            <a:r>
-              <a:rPr sz="1600" b="1" i="0">
-                <a:solidFill>
-                  <a:srgbClr val="095292"/>
-                </a:solidFill>
-                <a:latin typeface="Calibri"/>
-              </a:rPr>
-              <a:t>F</a:t>
-            </a:r>
-          </a:p>
-        </p:txBody>
-      </p:sp>
-      <p:sp>
-        <p:nvSpPr>
-          <p:cNvPr id="21" name="TextBox 20"/>
-          <p:cNvSpPr txBox="1"/>
-          <p:nvPr/>
-        </p:nvSpPr>
-        <p:spPr>
-          <a:xfrm>
-            <a:off x="8182660" y="3159251"/>
-            <a:ext cx="3478682" cy="621792"/>
-          </a:xfrm>
-          <a:prstGeom prst="rect">
-            <a:avLst/>
-          </a:prstGeom>
-          <a:noFill/>
-        </p:spPr>
-        <p:txBody>
-          <a:bodyPr wrap="square" anchor="t"/>
-          <a:lstStyle/>
-          <a:p>
-            <a:pPr algn="ctr"/>
-            <a:r>
-              <a:rPr sz="1300" b="1" i="0">
-                <a:solidFill>
-                  <a:srgbClr val="095292"/>
-                </a:solidFill>
-                <a:latin typeface="Calibri"/>
-              </a:rPr>
-              <a:t>Figma</a:t>
-            </a:r>
-          </a:p>
-          <a:p>
-            <a:pPr algn="ctr">
-              <a:spcBef>
-                <a:spcPts val="200"/>
-              </a:spcBef>
+              <a:rPr sz="2000" b="0" i="0">
+                <a:solidFill>
+                  <a:srgbClr val="333333"/>
+                </a:solidFill>
+                <a:latin typeface="Calibri"/>
+              </a:rPr>
+              <a:t>–   </a:t>
+            </a:r>
+            <a:r>
+              <a:rPr sz="2000" b="1" i="0">
+                <a:solidFill>
+                  <a:srgbClr val="333333"/>
+                </a:solidFill>
+                <a:latin typeface="Calibri"/>
+              </a:rPr>
+              <a:t>Demo:</a:t>
+            </a:r>
+            <a:r>
+              <a:rPr sz="2000" b="0" i="0">
+                <a:solidFill>
+                  <a:srgbClr val="333333"/>
+                </a:solidFill>
+                <a:latin typeface="Calibri"/>
+              </a:rPr>
+              <a:t> El docente proyecta una sustentacion mal hecha y una bien hecha del mismo paquete VetCare, y luego arma en vivo la tabla de decisiones para justificar por que Historia_Clinica es una clase aparte de Mascota.</a:t>
+            </a:r>
+          </a:p>
+          <a:p>
+            <a:pPr>
+              <a:spcAft>
+                <a:spcPts val="800"/>
+              </a:spcAft>
             </a:pPr>
             <a:r>
-              <a:rPr sz="1000" b="0" i="0">
-                <a:solidFill>
-                  <a:srgbClr val="666666"/>
-                </a:solidFill>
-                <a:latin typeface="Calibri"/>
-              </a:rPr>
-              <a:t>Wireframes y prototipo navegable</a:t>
-            </a:r>
-          </a:p>
-        </p:txBody>
-      </p:sp>
-      <p:sp>
-        <p:nvSpPr>
-          <p:cNvPr id="22" name="Rounded Rectangle 21"/>
-          <p:cNvSpPr/>
-          <p:nvPr/>
-        </p:nvSpPr>
-        <p:spPr>
-          <a:xfrm>
-            <a:off x="2370277" y="4055364"/>
-            <a:ext cx="3624986" cy="2299716"/>
-          </a:xfrm>
-          <a:prstGeom prst="roundRect">
-            <a:avLst>
-              <a:gd name="adj" fmla="val 12000"/>
-            </a:avLst>
-          </a:prstGeom>
-          <a:solidFill>
-            <a:srgbClr val="F2F2F2"/>
-          </a:solidFill>
-          <a:ln>
-            <a:noFill/>
-          </a:ln>
-        </p:spPr>
-        <p:style>
-          <a:lnRef idx="1">
-            <a:schemeClr val="accent1"/>
-          </a:lnRef>
-          <a:fillRef idx="3">
-            <a:schemeClr val="accent1"/>
-          </a:fillRef>
-          <a:effectRef idx="2">
-            <a:schemeClr val="accent1"/>
-          </a:effectRef>
-          <a:fontRef idx="minor">
-            <a:schemeClr val="lt1"/>
-          </a:fontRef>
-        </p:style>
-        <p:txBody>
-          <a:bodyPr rtlCol="0" anchor="ctr"/>
-          <a:lstStyle/>
-          <a:p>
-            <a:pPr algn="ctr"/>
-          </a:p>
-        </p:txBody>
-      </p:sp>
-      <p:sp>
-        <p:nvSpPr>
-          <p:cNvPr id="23" name="Rectangle 22"/>
-          <p:cNvSpPr/>
-          <p:nvPr/>
-        </p:nvSpPr>
-        <p:spPr>
-          <a:xfrm>
-            <a:off x="2370277" y="4055364"/>
-            <a:ext cx="3624986" cy="64008"/>
-          </a:xfrm>
-          <a:prstGeom prst="rect">
-            <a:avLst/>
-          </a:prstGeom>
-          <a:solidFill>
-            <a:srgbClr val="095292"/>
-          </a:solidFill>
-          <a:ln>
-            <a:noFill/>
-          </a:ln>
-        </p:spPr>
-        <p:style>
-          <a:lnRef idx="1">
-            <a:schemeClr val="accent1"/>
-          </a:lnRef>
-          <a:fillRef idx="3">
-            <a:schemeClr val="accent1"/>
-          </a:fillRef>
-          <a:effectRef idx="2">
-            <a:schemeClr val="accent1"/>
-          </a:effectRef>
-          <a:fontRef idx="minor">
-            <a:schemeClr val="lt1"/>
-          </a:fontRef>
-        </p:style>
-        <p:txBody>
-          <a:bodyPr rtlCol="0" anchor="ctr"/>
-          <a:lstStyle/>
-          <a:p>
-            <a:pPr algn="ctr"/>
-          </a:p>
-        </p:txBody>
-      </p:sp>
-      <p:sp>
-        <p:nvSpPr>
-          <p:cNvPr id="24" name="Rectangle 23"/>
-          <p:cNvSpPr/>
-          <p:nvPr/>
-        </p:nvSpPr>
-        <p:spPr>
-          <a:xfrm>
-            <a:off x="2370277" y="4119372"/>
-            <a:ext cx="3624986" cy="27432"/>
-          </a:xfrm>
-          <a:prstGeom prst="rect">
-            <a:avLst/>
-          </a:prstGeom>
-          <a:solidFill>
-            <a:srgbClr val="FFD000"/>
-          </a:solidFill>
-          <a:ln>
-            <a:noFill/>
-          </a:ln>
-        </p:spPr>
-        <p:style>
-          <a:lnRef idx="1">
-            <a:schemeClr val="accent1"/>
-          </a:lnRef>
-          <a:fillRef idx="3">
-            <a:schemeClr val="accent1"/>
-          </a:fillRef>
-          <a:effectRef idx="2">
-            <a:schemeClr val="accent1"/>
-          </a:effectRef>
-          <a:fontRef idx="minor">
-            <a:schemeClr val="lt1"/>
-          </a:fontRef>
-        </p:style>
-        <p:txBody>
-          <a:bodyPr rtlCol="0" anchor="ctr"/>
-          <a:lstStyle/>
-          <a:p>
-            <a:pPr algn="ctr"/>
-          </a:p>
-        </p:txBody>
-      </p:sp>
-      <p:sp>
-        <p:nvSpPr>
-          <p:cNvPr id="25" name="Rounded Rectangle 24"/>
-          <p:cNvSpPr/>
-          <p:nvPr/>
-        </p:nvSpPr>
-        <p:spPr>
-          <a:xfrm>
-            <a:off x="3572408" y="4311396"/>
-            <a:ext cx="1220724" cy="1220724"/>
-          </a:xfrm>
-          <a:prstGeom prst="roundRect">
-            <a:avLst>
-              <a:gd name="adj" fmla="val 12000"/>
-            </a:avLst>
-          </a:prstGeom>
-          <a:solidFill>
-            <a:srgbClr val="E8F4FA"/>
-          </a:solidFill>
-          <a:ln>
-            <a:noFill/>
-          </a:ln>
-        </p:spPr>
-        <p:style>
-          <a:lnRef idx="1">
-            <a:schemeClr val="accent1"/>
-          </a:lnRef>
-          <a:fillRef idx="3">
-            <a:schemeClr val="accent1"/>
-          </a:fillRef>
-          <a:effectRef idx="2">
-            <a:schemeClr val="accent1"/>
-          </a:effectRef>
-          <a:fontRef idx="minor">
-            <a:schemeClr val="lt1"/>
-          </a:fontRef>
-        </p:style>
-        <p:txBody>
-          <a:bodyPr rtlCol="0" anchor="ctr"/>
-          <a:lstStyle/>
-          <a:p>
-            <a:pPr algn="ctr"/>
-          </a:p>
-        </p:txBody>
-      </p:sp>
-      <p:sp>
-        <p:nvSpPr>
-          <p:cNvPr id="26" name="TextBox 25"/>
-          <p:cNvSpPr txBox="1"/>
-          <p:nvPr/>
-        </p:nvSpPr>
-        <p:spPr>
-          <a:xfrm>
-            <a:off x="3572408" y="4311396"/>
-            <a:ext cx="1220724" cy="1220724"/>
-          </a:xfrm>
-          <a:prstGeom prst="rect">
-            <a:avLst/>
-          </a:prstGeom>
-          <a:noFill/>
-        </p:spPr>
-        <p:txBody>
-          <a:bodyPr wrap="square" anchor="ctr"/>
-          <a:lstStyle/>
-          <a:p>
-            <a:pPr algn="ctr"/>
-            <a:r>
-              <a:rPr sz="1600" b="1" i="0">
-                <a:solidFill>
-                  <a:srgbClr val="095292"/>
-                </a:solidFill>
-                <a:latin typeface="Calibri"/>
-              </a:rPr>
-              <a:t>P</a:t>
-            </a:r>
-          </a:p>
-        </p:txBody>
-      </p:sp>
-      <p:sp>
-        <p:nvSpPr>
-          <p:cNvPr id="27" name="TextBox 26"/>
-          <p:cNvSpPr txBox="1"/>
-          <p:nvPr/>
-        </p:nvSpPr>
-        <p:spPr>
-          <a:xfrm>
-            <a:off x="2443429" y="5623560"/>
-            <a:ext cx="3478682" cy="621792"/>
-          </a:xfrm>
-          <a:prstGeom prst="rect">
-            <a:avLst/>
-          </a:prstGeom>
-          <a:noFill/>
-        </p:spPr>
-        <p:txBody>
-          <a:bodyPr wrap="square" anchor="t"/>
-          <a:lstStyle/>
-          <a:p>
-            <a:pPr algn="ctr"/>
-            <a:r>
-              <a:rPr sz="1300" b="1" i="0">
-                <a:solidFill>
-                  <a:srgbClr val="095292"/>
-                </a:solidFill>
-                <a:latin typeface="Calibri"/>
-              </a:rPr>
-              <a:t>Penpot</a:t>
-            </a:r>
-          </a:p>
-          <a:p>
-            <a:pPr algn="ctr">
-              <a:spcBef>
-                <a:spcPts val="200"/>
-              </a:spcBef>
-            </a:pPr>
-            <a:r>
-              <a:rPr sz="1000" b="0" i="0">
-                <a:solidFill>
-                  <a:srgbClr val="666666"/>
-                </a:solidFill>
-                <a:latin typeface="Calibri"/>
-              </a:rPr>
-              <a:t>Alternativa libre a Figma</a:t>
-            </a:r>
-          </a:p>
-        </p:txBody>
-      </p:sp>
-      <p:sp>
-        <p:nvSpPr>
-          <p:cNvPr id="28" name="Rounded Rectangle 27"/>
-          <p:cNvSpPr/>
-          <p:nvPr/>
-        </p:nvSpPr>
-        <p:spPr>
-          <a:xfrm>
-            <a:off x="6196431" y="4055364"/>
-            <a:ext cx="3624986" cy="2299716"/>
-          </a:xfrm>
-          <a:prstGeom prst="roundRect">
-            <a:avLst>
-              <a:gd name="adj" fmla="val 12000"/>
-            </a:avLst>
-          </a:prstGeom>
-          <a:solidFill>
-            <a:srgbClr val="F2F2F2"/>
-          </a:solidFill>
-          <a:ln>
-            <a:noFill/>
-          </a:ln>
-        </p:spPr>
-        <p:style>
-          <a:lnRef idx="1">
-            <a:schemeClr val="accent1"/>
-          </a:lnRef>
-          <a:fillRef idx="3">
-            <a:schemeClr val="accent1"/>
-          </a:fillRef>
-          <a:effectRef idx="2">
-            <a:schemeClr val="accent1"/>
-          </a:effectRef>
-          <a:fontRef idx="minor">
-            <a:schemeClr val="lt1"/>
-          </a:fontRef>
-        </p:style>
-        <p:txBody>
-          <a:bodyPr rtlCol="0" anchor="ctr"/>
-          <a:lstStyle/>
-          <a:p>
-            <a:pPr algn="ctr"/>
-          </a:p>
-        </p:txBody>
-      </p:sp>
-      <p:sp>
-        <p:nvSpPr>
-          <p:cNvPr id="29" name="Rectangle 28"/>
-          <p:cNvSpPr/>
-          <p:nvPr/>
-        </p:nvSpPr>
-        <p:spPr>
-          <a:xfrm>
-            <a:off x="6196431" y="4055364"/>
-            <a:ext cx="3624986" cy="64008"/>
-          </a:xfrm>
-          <a:prstGeom prst="rect">
-            <a:avLst/>
-          </a:prstGeom>
-          <a:solidFill>
-            <a:srgbClr val="095292"/>
-          </a:solidFill>
-          <a:ln>
-            <a:noFill/>
-          </a:ln>
-        </p:spPr>
-        <p:style>
-          <a:lnRef idx="1">
-            <a:schemeClr val="accent1"/>
-          </a:lnRef>
-          <a:fillRef idx="3">
-            <a:schemeClr val="accent1"/>
-          </a:fillRef>
-          <a:effectRef idx="2">
-            <a:schemeClr val="accent1"/>
-          </a:effectRef>
-          <a:fontRef idx="minor">
-            <a:schemeClr val="lt1"/>
-          </a:fontRef>
-        </p:style>
-        <p:txBody>
-          <a:bodyPr rtlCol="0" anchor="ctr"/>
-          <a:lstStyle/>
-          <a:p>
-            <a:pPr algn="ctr"/>
-          </a:p>
-        </p:txBody>
-      </p:sp>
-      <p:sp>
-        <p:nvSpPr>
-          <p:cNvPr id="30" name="Rectangle 29"/>
-          <p:cNvSpPr/>
-          <p:nvPr/>
-        </p:nvSpPr>
-        <p:spPr>
-          <a:xfrm>
-            <a:off x="6196431" y="4119372"/>
-            <a:ext cx="3624986" cy="27432"/>
-          </a:xfrm>
-          <a:prstGeom prst="rect">
-            <a:avLst/>
-          </a:prstGeom>
-          <a:solidFill>
-            <a:srgbClr val="FFD000"/>
-          </a:solidFill>
-          <a:ln>
-            <a:noFill/>
-          </a:ln>
-        </p:spPr>
-        <p:style>
-          <a:lnRef idx="1">
-            <a:schemeClr val="accent1"/>
-          </a:lnRef>
-          <a:fillRef idx="3">
-            <a:schemeClr val="accent1"/>
-          </a:fillRef>
-          <a:effectRef idx="2">
-            <a:schemeClr val="accent1"/>
-          </a:effectRef>
-          <a:fontRef idx="minor">
-            <a:schemeClr val="lt1"/>
-          </a:fontRef>
-        </p:style>
-        <p:txBody>
-          <a:bodyPr rtlCol="0" anchor="ctr"/>
-          <a:lstStyle/>
-          <a:p>
-            <a:pPr algn="ctr"/>
-          </a:p>
-        </p:txBody>
-      </p:sp>
-      <p:pic>
-        <p:nvPicPr>
-          <p:cNvPr id="31" name="Picture 30" descr="examlab.png"/>
-          <p:cNvPicPr>
-            <a:picLocks noChangeAspect="1"/>
-          </p:cNvPicPr>
-          <p:nvPr/>
-        </p:nvPicPr>
-        <p:blipFill>
-          <a:blip r:embed="rId4"/>
-          <a:stretch>
-            <a:fillRect/>
-          </a:stretch>
-        </p:blipFill>
-        <p:spPr>
-          <a:xfrm>
-            <a:off x="7398562" y="4311396"/>
-            <a:ext cx="1220724" cy="1220724"/>
-          </a:xfrm>
-          <a:prstGeom prst="rect">
-            <a:avLst/>
-          </a:prstGeom>
-        </p:spPr>
-      </p:pic>
-      <p:sp>
-        <p:nvSpPr>
-          <p:cNvPr id="32" name="TextBox 31"/>
-          <p:cNvSpPr txBox="1"/>
-          <p:nvPr/>
-        </p:nvSpPr>
-        <p:spPr>
-          <a:xfrm>
-            <a:off x="6269583" y="5623560"/>
-            <a:ext cx="3478682" cy="621792"/>
-          </a:xfrm>
-          <a:prstGeom prst="rect">
-            <a:avLst/>
-          </a:prstGeom>
-          <a:noFill/>
-        </p:spPr>
-        <p:txBody>
-          <a:bodyPr wrap="square" anchor="t"/>
-          <a:lstStyle/>
-          <a:p>
-            <a:pPr algn="ctr"/>
-            <a:r>
-              <a:rPr sz="1300" b="1" i="0">
-                <a:solidFill>
-                  <a:srgbClr val="095292"/>
-                </a:solidFill>
-                <a:latin typeface="Calibri"/>
-              </a:rPr>
-              <a:t>la plataforma del curso</a:t>
-            </a:r>
-          </a:p>
-          <a:p>
-            <a:pPr algn="ctr">
-              <a:spcBef>
-                <a:spcPts val="200"/>
-              </a:spcBef>
-            </a:pPr>
-            <a:r>
-              <a:rPr sz="1000" b="0" i="0">
-                <a:solidFill>
-                  <a:srgbClr val="666666"/>
-                </a:solidFill>
-                <a:latin typeface="Calibri"/>
-              </a:rPr>
-              <a:t>Entrega del taller · en la fecha que indique el docente</a:t>
-            </a:r>
-          </a:p>
-        </p:txBody>
-      </p:sp>
-      <p:sp>
-        <p:nvSpPr>
-          <p:cNvPr id="33" name="TextBox 32"/>
+              <a:rPr sz="2000" b="0" i="0">
+                <a:solidFill>
+                  <a:srgbClr val="333333"/>
+                </a:solidFill>
+                <a:latin typeface="Calibri"/>
+              </a:rPr>
+              <a:t>–   Mismo dominio VetCare — no otro ejemplo. Aqui se diseña, no se programa.</a:t>
+            </a:r>
+          </a:p>
+        </p:txBody>
+      </p:sp>
+      <p:sp>
+        <p:nvSpPr>
+          <p:cNvPr id="6" name="TextBox 5"/>
           <p:cNvSpPr txBox="1"/>
           <p:nvPr/>
         </p:nvSpPr>
@@ -6238,7 +5476,7 @@
         <p:spPr>
           <a:xfrm>
             <a:off x="0" y="0"/>
-            <a:ext cx="12191695" cy="960120"/>
+            <a:ext cx="12191695" cy="1170432"/>
           </a:xfrm>
           <a:prstGeom prst="rect">
             <a:avLst/>
@@ -6280,7 +5518,7 @@
         </p:nvSpPr>
         <p:spPr>
           <a:xfrm>
-            <a:off x="0" y="960120"/>
+            <a:off x="0" y="1170432"/>
             <a:ext cx="12191695" cy="41148"/>
           </a:xfrm>
           <a:prstGeom prst="rect">
@@ -6324,7 +5562,7 @@
         <p:spPr>
           <a:xfrm>
             <a:off x="457200" y="164592"/>
-            <a:ext cx="11277295" cy="502920"/>
+            <a:ext cx="11277295" cy="384048"/>
           </a:xfrm>
           <a:prstGeom prst="rect">
             <a:avLst/>
@@ -6344,7 +5582,7 @@
                 </a:solidFill>
                 <a:latin typeface="Calibri"/>
               </a:rPr>
-              <a:t>Taller PI — por que importa</a:t>
+              <a:t>Herramientas de hoy</a:t>
             </a:r>
           </a:p>
         </p:txBody>
@@ -6357,8 +5595,8 @@
         </p:nvSpPr>
         <p:spPr>
           <a:xfrm>
-            <a:off x="457200" y="1170432"/>
-            <a:ext cx="11277295" cy="5230368"/>
+            <a:off x="457200" y="566928"/>
+            <a:ext cx="11277295" cy="411480"/>
           </a:xfrm>
           <a:prstGeom prst="rect">
             <a:avLst/>
@@ -6371,76 +5609,1149 @@
           </a:bodyPr>
           <a:lstStyle/>
           <a:p>
-            <a:pPr>
-              <a:spcAft>
-                <a:spcPts val="800"/>
-              </a:spcAft>
+            <a:r>
+              <a:rPr sz="1400" b="0" i="0">
+                <a:solidFill>
+                  <a:srgbClr val="B8D8EE"/>
+                </a:solidFill>
+                <a:latin typeface="Calibri"/>
+              </a:rPr>
+              <a:t>Gratis · funcionan en el navegador</a:t>
+            </a:r>
+          </a:p>
+        </p:txBody>
+      </p:sp>
+      <p:sp>
+        <p:nvSpPr>
+          <p:cNvPr id="6" name="Rounded Rectangle 5"/>
+          <p:cNvSpPr/>
+          <p:nvPr/>
+        </p:nvSpPr>
+        <p:spPr>
+          <a:xfrm>
+            <a:off x="457200" y="1591056"/>
+            <a:ext cx="3624986" cy="2299716"/>
+          </a:xfrm>
+          <a:prstGeom prst="roundRect">
+            <a:avLst>
+              <a:gd name="adj" fmla="val 12000"/>
+            </a:avLst>
+          </a:prstGeom>
+          <a:solidFill>
+            <a:srgbClr val="F2F2F2"/>
+          </a:solidFill>
+          <a:ln>
+            <a:noFill/>
+          </a:ln>
+        </p:spPr>
+        <p:style>
+          <a:lnRef idx="1">
+            <a:schemeClr val="accent1"/>
+          </a:lnRef>
+          <a:fillRef idx="3">
+            <a:schemeClr val="accent1"/>
+          </a:fillRef>
+          <a:effectRef idx="2">
+            <a:schemeClr val="accent1"/>
+          </a:effectRef>
+          <a:fontRef idx="minor">
+            <a:schemeClr val="lt1"/>
+          </a:fontRef>
+        </p:style>
+        <p:txBody>
+          <a:bodyPr rtlCol="0" anchor="ctr"/>
+          <a:lstStyle/>
+          <a:p>
+            <a:pPr algn="ctr"/>
+          </a:p>
+        </p:txBody>
+      </p:sp>
+      <p:sp>
+        <p:nvSpPr>
+          <p:cNvPr id="7" name="Rectangle 6"/>
+          <p:cNvSpPr/>
+          <p:nvPr/>
+        </p:nvSpPr>
+        <p:spPr>
+          <a:xfrm>
+            <a:off x="457200" y="1591056"/>
+            <a:ext cx="3624986" cy="64008"/>
+          </a:xfrm>
+          <a:prstGeom prst="rect">
+            <a:avLst/>
+          </a:prstGeom>
+          <a:solidFill>
+            <a:srgbClr val="095292"/>
+          </a:solidFill>
+          <a:ln>
+            <a:noFill/>
+          </a:ln>
+        </p:spPr>
+        <p:style>
+          <a:lnRef idx="1">
+            <a:schemeClr val="accent1"/>
+          </a:lnRef>
+          <a:fillRef idx="3">
+            <a:schemeClr val="accent1"/>
+          </a:fillRef>
+          <a:effectRef idx="2">
+            <a:schemeClr val="accent1"/>
+          </a:effectRef>
+          <a:fontRef idx="minor">
+            <a:schemeClr val="lt1"/>
+          </a:fontRef>
+        </p:style>
+        <p:txBody>
+          <a:bodyPr rtlCol="0" anchor="ctr"/>
+          <a:lstStyle/>
+          <a:p>
+            <a:pPr algn="ctr"/>
+          </a:p>
+        </p:txBody>
+      </p:sp>
+      <p:sp>
+        <p:nvSpPr>
+          <p:cNvPr id="8" name="Rectangle 7"/>
+          <p:cNvSpPr/>
+          <p:nvPr/>
+        </p:nvSpPr>
+        <p:spPr>
+          <a:xfrm>
+            <a:off x="457200" y="1655064"/>
+            <a:ext cx="3624986" cy="27432"/>
+          </a:xfrm>
+          <a:prstGeom prst="rect">
+            <a:avLst/>
+          </a:prstGeom>
+          <a:solidFill>
+            <a:srgbClr val="FFD000"/>
+          </a:solidFill>
+          <a:ln>
+            <a:noFill/>
+          </a:ln>
+        </p:spPr>
+        <p:style>
+          <a:lnRef idx="1">
+            <a:schemeClr val="accent1"/>
+          </a:lnRef>
+          <a:fillRef idx="3">
+            <a:schemeClr val="accent1"/>
+          </a:fillRef>
+          <a:effectRef idx="2">
+            <a:schemeClr val="accent1"/>
+          </a:effectRef>
+          <a:fontRef idx="minor">
+            <a:schemeClr val="lt1"/>
+          </a:fontRef>
+        </p:style>
+        <p:txBody>
+          <a:bodyPr rtlCol="0" anchor="ctr"/>
+          <a:lstStyle/>
+          <a:p>
+            <a:pPr algn="ctr"/>
+          </a:p>
+        </p:txBody>
+      </p:sp>
+      <p:pic>
+        <p:nvPicPr>
+          <p:cNvPr id="9" name="Picture 8" descr="drawio.png"/>
+          <p:cNvPicPr>
+            <a:picLocks noChangeAspect="1"/>
+          </p:cNvPicPr>
+          <p:nvPr/>
+        </p:nvPicPr>
+        <p:blipFill>
+          <a:blip r:embed="rId2"/>
+          <a:stretch>
+            <a:fillRect/>
+          </a:stretch>
+        </p:blipFill>
+        <p:spPr>
+          <a:xfrm>
+            <a:off x="1659331" y="1847087"/>
+            <a:ext cx="1220724" cy="1220724"/>
+          </a:xfrm>
+          <a:prstGeom prst="rect">
+            <a:avLst/>
+          </a:prstGeom>
+        </p:spPr>
+      </p:pic>
+      <p:sp>
+        <p:nvSpPr>
+          <p:cNvPr id="10" name="TextBox 9"/>
+          <p:cNvSpPr txBox="1"/>
+          <p:nvPr/>
+        </p:nvSpPr>
+        <p:spPr>
+          <a:xfrm>
+            <a:off x="530352" y="3159251"/>
+            <a:ext cx="3478682" cy="621792"/>
+          </a:xfrm>
+          <a:prstGeom prst="rect">
+            <a:avLst/>
+          </a:prstGeom>
+          <a:noFill/>
+        </p:spPr>
+        <p:txBody>
+          <a:bodyPr wrap="square" anchor="t"/>
+          <a:lstStyle/>
+          <a:p>
+            <a:pPr algn="ctr"/>
+            <a:r>
+              <a:rPr sz="1300" b="1" i="0">
+                <a:solidFill>
+                  <a:srgbClr val="095292"/>
+                </a:solidFill>
+                <a:latin typeface="Calibri"/>
+              </a:rPr>
+              <a:t>Draw.Io</a:t>
+            </a:r>
+          </a:p>
+          <a:p>
+            <a:pPr algn="ctr">
+              <a:spcBef>
+                <a:spcPts val="200"/>
+              </a:spcBef>
             </a:pPr>
             <a:r>
-              <a:rPr sz="2000" b="0" i="0">
-                <a:solidFill>
-                  <a:srgbClr val="333333"/>
-                </a:solidFill>
-                <a:latin typeface="Calibri"/>
-              </a:rPr>
-              <a:t>–   </a:t>
-            </a:r>
-            <a:r>
-              <a:rPr sz="2000" b="1" i="0">
-                <a:solidFill>
-                  <a:srgbClr val="333333"/>
-                </a:solidFill>
-                <a:latin typeface="Calibri"/>
-              </a:rPr>
-              <a:t>Por que importa al PI:</a:t>
-            </a:r>
-            <a:r>
-              <a:rPr sz="2000" b="0" i="0">
-                <a:solidFill>
-                  <a:srgbClr val="333333"/>
-                </a:solidFill>
-                <a:latin typeface="Calibri"/>
-              </a:rPr>
-              <a:t> hoy se convierte el monton de artefactos de VetCare en un solo paquete defendible, y se ensaya la unica ocasion en que el equipo tiene que demostrar que entiende lo que entrego.</a:t>
-            </a:r>
-          </a:p>
-          <a:p>
-            <a:pPr>
-              <a:spcAft>
-                <a:spcPts val="800"/>
-              </a:spcAft>
+              <a:rPr sz="1000" b="0" i="0">
+                <a:solidFill>
+                  <a:srgbClr val="666666"/>
+                </a:solidFill>
+                <a:latin typeface="Calibri"/>
+              </a:rPr>
+              <a:t>Diagramas UML y de contexto</a:t>
+            </a:r>
+          </a:p>
+        </p:txBody>
+      </p:sp>
+      <p:sp>
+        <p:nvSpPr>
+          <p:cNvPr id="11" name="Rounded Rectangle 10"/>
+          <p:cNvSpPr/>
+          <p:nvPr/>
+        </p:nvSpPr>
+        <p:spPr>
+          <a:xfrm>
+            <a:off x="4283354" y="1591056"/>
+            <a:ext cx="3624986" cy="2299716"/>
+          </a:xfrm>
+          <a:prstGeom prst="roundRect">
+            <a:avLst>
+              <a:gd name="adj" fmla="val 12000"/>
+            </a:avLst>
+          </a:prstGeom>
+          <a:solidFill>
+            <a:srgbClr val="F2F2F2"/>
+          </a:solidFill>
+          <a:ln>
+            <a:noFill/>
+          </a:ln>
+        </p:spPr>
+        <p:style>
+          <a:lnRef idx="1">
+            <a:schemeClr val="accent1"/>
+          </a:lnRef>
+          <a:fillRef idx="3">
+            <a:schemeClr val="accent1"/>
+          </a:fillRef>
+          <a:effectRef idx="2">
+            <a:schemeClr val="accent1"/>
+          </a:effectRef>
+          <a:fontRef idx="minor">
+            <a:schemeClr val="lt1"/>
+          </a:fontRef>
+        </p:style>
+        <p:txBody>
+          <a:bodyPr rtlCol="0" anchor="ctr"/>
+          <a:lstStyle/>
+          <a:p>
+            <a:pPr algn="ctr"/>
+          </a:p>
+        </p:txBody>
+      </p:sp>
+      <p:sp>
+        <p:nvSpPr>
+          <p:cNvPr id="12" name="Rectangle 11"/>
+          <p:cNvSpPr/>
+          <p:nvPr/>
+        </p:nvSpPr>
+        <p:spPr>
+          <a:xfrm>
+            <a:off x="4283354" y="1591056"/>
+            <a:ext cx="3624986" cy="64008"/>
+          </a:xfrm>
+          <a:prstGeom prst="rect">
+            <a:avLst/>
+          </a:prstGeom>
+          <a:solidFill>
+            <a:srgbClr val="095292"/>
+          </a:solidFill>
+          <a:ln>
+            <a:noFill/>
+          </a:ln>
+        </p:spPr>
+        <p:style>
+          <a:lnRef idx="1">
+            <a:schemeClr val="accent1"/>
+          </a:lnRef>
+          <a:fillRef idx="3">
+            <a:schemeClr val="accent1"/>
+          </a:fillRef>
+          <a:effectRef idx="2">
+            <a:schemeClr val="accent1"/>
+          </a:effectRef>
+          <a:fontRef idx="minor">
+            <a:schemeClr val="lt1"/>
+          </a:fontRef>
+        </p:style>
+        <p:txBody>
+          <a:bodyPr rtlCol="0" anchor="ctr"/>
+          <a:lstStyle/>
+          <a:p>
+            <a:pPr algn="ctr"/>
+          </a:p>
+        </p:txBody>
+      </p:sp>
+      <p:sp>
+        <p:nvSpPr>
+          <p:cNvPr id="13" name="Rectangle 12"/>
+          <p:cNvSpPr/>
+          <p:nvPr/>
+        </p:nvSpPr>
+        <p:spPr>
+          <a:xfrm>
+            <a:off x="4283354" y="1655064"/>
+            <a:ext cx="3624986" cy="27432"/>
+          </a:xfrm>
+          <a:prstGeom prst="rect">
+            <a:avLst/>
+          </a:prstGeom>
+          <a:solidFill>
+            <a:srgbClr val="FFD000"/>
+          </a:solidFill>
+          <a:ln>
+            <a:noFill/>
+          </a:ln>
+        </p:spPr>
+        <p:style>
+          <a:lnRef idx="1">
+            <a:schemeClr val="accent1"/>
+          </a:lnRef>
+          <a:fillRef idx="3">
+            <a:schemeClr val="accent1"/>
+          </a:fillRef>
+          <a:effectRef idx="2">
+            <a:schemeClr val="accent1"/>
+          </a:effectRef>
+          <a:fontRef idx="minor">
+            <a:schemeClr val="lt1"/>
+          </a:fontRef>
+        </p:style>
+        <p:txBody>
+          <a:bodyPr rtlCol="0" anchor="ctr"/>
+          <a:lstStyle/>
+          <a:p>
+            <a:pPr algn="ctr"/>
+          </a:p>
+        </p:txBody>
+      </p:sp>
+      <p:pic>
+        <p:nvPicPr>
+          <p:cNvPr id="14" name="Picture 13" descr="google_docs.png"/>
+          <p:cNvPicPr>
+            <a:picLocks noChangeAspect="1"/>
+          </p:cNvPicPr>
+          <p:nvPr/>
+        </p:nvPicPr>
+        <p:blipFill>
+          <a:blip r:embed="rId3"/>
+          <a:stretch>
+            <a:fillRect/>
+          </a:stretch>
+        </p:blipFill>
+        <p:spPr>
+          <a:xfrm>
+            <a:off x="5485485" y="1847087"/>
+            <a:ext cx="1220724" cy="1220724"/>
+          </a:xfrm>
+          <a:prstGeom prst="rect">
+            <a:avLst/>
+          </a:prstGeom>
+        </p:spPr>
+      </p:pic>
+      <p:sp>
+        <p:nvSpPr>
+          <p:cNvPr id="15" name="TextBox 14"/>
+          <p:cNvSpPr txBox="1"/>
+          <p:nvPr/>
+        </p:nvSpPr>
+        <p:spPr>
+          <a:xfrm>
+            <a:off x="4356506" y="3159251"/>
+            <a:ext cx="3478682" cy="621792"/>
+          </a:xfrm>
+          <a:prstGeom prst="rect">
+            <a:avLst/>
+          </a:prstGeom>
+          <a:noFill/>
+        </p:spPr>
+        <p:txBody>
+          <a:bodyPr wrap="square" anchor="t"/>
+          <a:lstStyle/>
+          <a:p>
+            <a:pPr algn="ctr"/>
+            <a:r>
+              <a:rPr sz="1300" b="1" i="0">
+                <a:solidFill>
+                  <a:srgbClr val="095292"/>
+                </a:solidFill>
+                <a:latin typeface="Calibri"/>
+              </a:rPr>
+              <a:t>google docs</a:t>
+            </a:r>
+          </a:p>
+          <a:p>
+            <a:pPr algn="ctr">
+              <a:spcBef>
+                <a:spcPts val="200"/>
+              </a:spcBef>
             </a:pPr>
             <a:r>
-              <a:rPr sz="2000" b="0" i="0">
-                <a:solidFill>
-                  <a:srgbClr val="333333"/>
-                </a:solidFill>
-                <a:latin typeface="Calibri"/>
-              </a:rPr>
-              <a:t>–   No hay tema nuevo: todo el trabajo es de consolidacion, coherencia y argumentacion sobre lo ya producido.</a:t>
-            </a:r>
-          </a:p>
-          <a:p>
-            <a:pPr>
-              <a:spcAft>
-                <a:spcPts val="800"/>
-              </a:spcAft>
+              <a:rPr sz="1000" b="0" i="0">
+                <a:solidFill>
+                  <a:srgbClr val="666666"/>
+                </a:solidFill>
+                <a:latin typeface="Calibri"/>
+              </a:rPr>
+              <a:t>Documentos del paquete de diseño</a:t>
+            </a:r>
+          </a:p>
+        </p:txBody>
+      </p:sp>
+      <p:sp>
+        <p:nvSpPr>
+          <p:cNvPr id="16" name="Rounded Rectangle 15"/>
+          <p:cNvSpPr/>
+          <p:nvPr/>
+        </p:nvSpPr>
+        <p:spPr>
+          <a:xfrm>
+            <a:off x="8109508" y="1591056"/>
+            <a:ext cx="3624986" cy="2299716"/>
+          </a:xfrm>
+          <a:prstGeom prst="roundRect">
+            <a:avLst>
+              <a:gd name="adj" fmla="val 12000"/>
+            </a:avLst>
+          </a:prstGeom>
+          <a:solidFill>
+            <a:srgbClr val="F2F2F2"/>
+          </a:solidFill>
+          <a:ln>
+            <a:noFill/>
+          </a:ln>
+        </p:spPr>
+        <p:style>
+          <a:lnRef idx="1">
+            <a:schemeClr val="accent1"/>
+          </a:lnRef>
+          <a:fillRef idx="3">
+            <a:schemeClr val="accent1"/>
+          </a:fillRef>
+          <a:effectRef idx="2">
+            <a:schemeClr val="accent1"/>
+          </a:effectRef>
+          <a:fontRef idx="minor">
+            <a:schemeClr val="lt1"/>
+          </a:fontRef>
+        </p:style>
+        <p:txBody>
+          <a:bodyPr rtlCol="0" anchor="ctr"/>
+          <a:lstStyle/>
+          <a:p>
+            <a:pPr algn="ctr"/>
+          </a:p>
+        </p:txBody>
+      </p:sp>
+      <p:sp>
+        <p:nvSpPr>
+          <p:cNvPr id="17" name="Rectangle 16"/>
+          <p:cNvSpPr/>
+          <p:nvPr/>
+        </p:nvSpPr>
+        <p:spPr>
+          <a:xfrm>
+            <a:off x="8109508" y="1591056"/>
+            <a:ext cx="3624986" cy="64008"/>
+          </a:xfrm>
+          <a:prstGeom prst="rect">
+            <a:avLst/>
+          </a:prstGeom>
+          <a:solidFill>
+            <a:srgbClr val="095292"/>
+          </a:solidFill>
+          <a:ln>
+            <a:noFill/>
+          </a:ln>
+        </p:spPr>
+        <p:style>
+          <a:lnRef idx="1">
+            <a:schemeClr val="accent1"/>
+          </a:lnRef>
+          <a:fillRef idx="3">
+            <a:schemeClr val="accent1"/>
+          </a:fillRef>
+          <a:effectRef idx="2">
+            <a:schemeClr val="accent1"/>
+          </a:effectRef>
+          <a:fontRef idx="minor">
+            <a:schemeClr val="lt1"/>
+          </a:fontRef>
+        </p:style>
+        <p:txBody>
+          <a:bodyPr rtlCol="0" anchor="ctr"/>
+          <a:lstStyle/>
+          <a:p>
+            <a:pPr algn="ctr"/>
+          </a:p>
+        </p:txBody>
+      </p:sp>
+      <p:sp>
+        <p:nvSpPr>
+          <p:cNvPr id="18" name="Rectangle 17"/>
+          <p:cNvSpPr/>
+          <p:nvPr/>
+        </p:nvSpPr>
+        <p:spPr>
+          <a:xfrm>
+            <a:off x="8109508" y="1655064"/>
+            <a:ext cx="3624986" cy="27432"/>
+          </a:xfrm>
+          <a:prstGeom prst="rect">
+            <a:avLst/>
+          </a:prstGeom>
+          <a:solidFill>
+            <a:srgbClr val="FFD000"/>
+          </a:solidFill>
+          <a:ln>
+            <a:noFill/>
+          </a:ln>
+        </p:spPr>
+        <p:style>
+          <a:lnRef idx="1">
+            <a:schemeClr val="accent1"/>
+          </a:lnRef>
+          <a:fillRef idx="3">
+            <a:schemeClr val="accent1"/>
+          </a:fillRef>
+          <a:effectRef idx="2">
+            <a:schemeClr val="accent1"/>
+          </a:effectRef>
+          <a:fontRef idx="minor">
+            <a:schemeClr val="lt1"/>
+          </a:fontRef>
+        </p:style>
+        <p:txBody>
+          <a:bodyPr rtlCol="0" anchor="ctr"/>
+          <a:lstStyle/>
+          <a:p>
+            <a:pPr algn="ctr"/>
+          </a:p>
+        </p:txBody>
+      </p:sp>
+      <p:sp>
+        <p:nvSpPr>
+          <p:cNvPr id="19" name="Rounded Rectangle 18"/>
+          <p:cNvSpPr/>
+          <p:nvPr/>
+        </p:nvSpPr>
+        <p:spPr>
+          <a:xfrm>
+            <a:off x="9311640" y="1847087"/>
+            <a:ext cx="1220724" cy="1220724"/>
+          </a:xfrm>
+          <a:prstGeom prst="roundRect">
+            <a:avLst>
+              <a:gd name="adj" fmla="val 12000"/>
+            </a:avLst>
+          </a:prstGeom>
+          <a:solidFill>
+            <a:srgbClr val="E8F4FA"/>
+          </a:solidFill>
+          <a:ln>
+            <a:noFill/>
+          </a:ln>
+        </p:spPr>
+        <p:style>
+          <a:lnRef idx="1">
+            <a:schemeClr val="accent1"/>
+          </a:lnRef>
+          <a:fillRef idx="3">
+            <a:schemeClr val="accent1"/>
+          </a:fillRef>
+          <a:effectRef idx="2">
+            <a:schemeClr val="accent1"/>
+          </a:effectRef>
+          <a:fontRef idx="minor">
+            <a:schemeClr val="lt1"/>
+          </a:fontRef>
+        </p:style>
+        <p:txBody>
+          <a:bodyPr rtlCol="0" anchor="ctr"/>
+          <a:lstStyle/>
+          <a:p>
+            <a:pPr algn="ctr"/>
+          </a:p>
+        </p:txBody>
+      </p:sp>
+      <p:sp>
+        <p:nvSpPr>
+          <p:cNvPr id="20" name="TextBox 19"/>
+          <p:cNvSpPr txBox="1"/>
+          <p:nvPr/>
+        </p:nvSpPr>
+        <p:spPr>
+          <a:xfrm>
+            <a:off x="9311640" y="1847087"/>
+            <a:ext cx="1220724" cy="1220724"/>
+          </a:xfrm>
+          <a:prstGeom prst="rect">
+            <a:avLst/>
+          </a:prstGeom>
+          <a:noFill/>
+        </p:spPr>
+        <p:txBody>
+          <a:bodyPr wrap="square" anchor="ctr"/>
+          <a:lstStyle/>
+          <a:p>
+            <a:pPr algn="ctr"/>
+            <a:r>
+              <a:rPr sz="1600" b="1" i="0">
+                <a:solidFill>
+                  <a:srgbClr val="095292"/>
+                </a:solidFill>
+                <a:latin typeface="Calibri"/>
+              </a:rPr>
+              <a:t>F</a:t>
+            </a:r>
+          </a:p>
+        </p:txBody>
+      </p:sp>
+      <p:sp>
+        <p:nvSpPr>
+          <p:cNvPr id="21" name="TextBox 20"/>
+          <p:cNvSpPr txBox="1"/>
+          <p:nvPr/>
+        </p:nvSpPr>
+        <p:spPr>
+          <a:xfrm>
+            <a:off x="8182660" y="3159251"/>
+            <a:ext cx="3478682" cy="621792"/>
+          </a:xfrm>
+          <a:prstGeom prst="rect">
+            <a:avLst/>
+          </a:prstGeom>
+          <a:noFill/>
+        </p:spPr>
+        <p:txBody>
+          <a:bodyPr wrap="square" anchor="t"/>
+          <a:lstStyle/>
+          <a:p>
+            <a:pPr algn="ctr"/>
+            <a:r>
+              <a:rPr sz="1300" b="1" i="0">
+                <a:solidFill>
+                  <a:srgbClr val="095292"/>
+                </a:solidFill>
+                <a:latin typeface="Calibri"/>
+              </a:rPr>
+              <a:t>Figma</a:t>
+            </a:r>
+          </a:p>
+          <a:p>
+            <a:pPr algn="ctr">
+              <a:spcBef>
+                <a:spcPts val="200"/>
+              </a:spcBef>
             </a:pPr>
             <a:r>
-              <a:rPr sz="2000" b="0" i="0">
-                <a:solidFill>
-                  <a:srgbClr val="333333"/>
-                </a:solidFill>
-                <a:latin typeface="Calibri"/>
-              </a:rPr>
-              <a:t>–   Las inconsistencias que se detecten hoy son baratas de arreglar; las mismas inconsistencias detectadas por el jurado o por el equipo de Programacion II salen carisimas.</a:t>
-            </a:r>
-          </a:p>
-        </p:txBody>
-      </p:sp>
-      <p:sp>
-        <p:nvSpPr>
-          <p:cNvPr id="6" name="TextBox 5"/>
+              <a:rPr sz="1000" b="0" i="0">
+                <a:solidFill>
+                  <a:srgbClr val="666666"/>
+                </a:solidFill>
+                <a:latin typeface="Calibri"/>
+              </a:rPr>
+              <a:t>Wireframes y prototipo navegable</a:t>
+            </a:r>
+          </a:p>
+        </p:txBody>
+      </p:sp>
+      <p:sp>
+        <p:nvSpPr>
+          <p:cNvPr id="22" name="Rounded Rectangle 21"/>
+          <p:cNvSpPr/>
+          <p:nvPr/>
+        </p:nvSpPr>
+        <p:spPr>
+          <a:xfrm>
+            <a:off x="2370277" y="4055364"/>
+            <a:ext cx="3624986" cy="2299716"/>
+          </a:xfrm>
+          <a:prstGeom prst="roundRect">
+            <a:avLst>
+              <a:gd name="adj" fmla="val 12000"/>
+            </a:avLst>
+          </a:prstGeom>
+          <a:solidFill>
+            <a:srgbClr val="F2F2F2"/>
+          </a:solidFill>
+          <a:ln>
+            <a:noFill/>
+          </a:ln>
+        </p:spPr>
+        <p:style>
+          <a:lnRef idx="1">
+            <a:schemeClr val="accent1"/>
+          </a:lnRef>
+          <a:fillRef idx="3">
+            <a:schemeClr val="accent1"/>
+          </a:fillRef>
+          <a:effectRef idx="2">
+            <a:schemeClr val="accent1"/>
+          </a:effectRef>
+          <a:fontRef idx="minor">
+            <a:schemeClr val="lt1"/>
+          </a:fontRef>
+        </p:style>
+        <p:txBody>
+          <a:bodyPr rtlCol="0" anchor="ctr"/>
+          <a:lstStyle/>
+          <a:p>
+            <a:pPr algn="ctr"/>
+          </a:p>
+        </p:txBody>
+      </p:sp>
+      <p:sp>
+        <p:nvSpPr>
+          <p:cNvPr id="23" name="Rectangle 22"/>
+          <p:cNvSpPr/>
+          <p:nvPr/>
+        </p:nvSpPr>
+        <p:spPr>
+          <a:xfrm>
+            <a:off x="2370277" y="4055364"/>
+            <a:ext cx="3624986" cy="64008"/>
+          </a:xfrm>
+          <a:prstGeom prst="rect">
+            <a:avLst/>
+          </a:prstGeom>
+          <a:solidFill>
+            <a:srgbClr val="095292"/>
+          </a:solidFill>
+          <a:ln>
+            <a:noFill/>
+          </a:ln>
+        </p:spPr>
+        <p:style>
+          <a:lnRef idx="1">
+            <a:schemeClr val="accent1"/>
+          </a:lnRef>
+          <a:fillRef idx="3">
+            <a:schemeClr val="accent1"/>
+          </a:fillRef>
+          <a:effectRef idx="2">
+            <a:schemeClr val="accent1"/>
+          </a:effectRef>
+          <a:fontRef idx="minor">
+            <a:schemeClr val="lt1"/>
+          </a:fontRef>
+        </p:style>
+        <p:txBody>
+          <a:bodyPr rtlCol="0" anchor="ctr"/>
+          <a:lstStyle/>
+          <a:p>
+            <a:pPr algn="ctr"/>
+          </a:p>
+        </p:txBody>
+      </p:sp>
+      <p:sp>
+        <p:nvSpPr>
+          <p:cNvPr id="24" name="Rectangle 23"/>
+          <p:cNvSpPr/>
+          <p:nvPr/>
+        </p:nvSpPr>
+        <p:spPr>
+          <a:xfrm>
+            <a:off x="2370277" y="4119372"/>
+            <a:ext cx="3624986" cy="27432"/>
+          </a:xfrm>
+          <a:prstGeom prst="rect">
+            <a:avLst/>
+          </a:prstGeom>
+          <a:solidFill>
+            <a:srgbClr val="FFD000"/>
+          </a:solidFill>
+          <a:ln>
+            <a:noFill/>
+          </a:ln>
+        </p:spPr>
+        <p:style>
+          <a:lnRef idx="1">
+            <a:schemeClr val="accent1"/>
+          </a:lnRef>
+          <a:fillRef idx="3">
+            <a:schemeClr val="accent1"/>
+          </a:fillRef>
+          <a:effectRef idx="2">
+            <a:schemeClr val="accent1"/>
+          </a:effectRef>
+          <a:fontRef idx="minor">
+            <a:schemeClr val="lt1"/>
+          </a:fontRef>
+        </p:style>
+        <p:txBody>
+          <a:bodyPr rtlCol="0" anchor="ctr"/>
+          <a:lstStyle/>
+          <a:p>
+            <a:pPr algn="ctr"/>
+          </a:p>
+        </p:txBody>
+      </p:sp>
+      <p:sp>
+        <p:nvSpPr>
+          <p:cNvPr id="25" name="Rounded Rectangle 24"/>
+          <p:cNvSpPr/>
+          <p:nvPr/>
+        </p:nvSpPr>
+        <p:spPr>
+          <a:xfrm>
+            <a:off x="3572408" y="4311396"/>
+            <a:ext cx="1220724" cy="1220724"/>
+          </a:xfrm>
+          <a:prstGeom prst="roundRect">
+            <a:avLst>
+              <a:gd name="adj" fmla="val 12000"/>
+            </a:avLst>
+          </a:prstGeom>
+          <a:solidFill>
+            <a:srgbClr val="E8F4FA"/>
+          </a:solidFill>
+          <a:ln>
+            <a:noFill/>
+          </a:ln>
+        </p:spPr>
+        <p:style>
+          <a:lnRef idx="1">
+            <a:schemeClr val="accent1"/>
+          </a:lnRef>
+          <a:fillRef idx="3">
+            <a:schemeClr val="accent1"/>
+          </a:fillRef>
+          <a:effectRef idx="2">
+            <a:schemeClr val="accent1"/>
+          </a:effectRef>
+          <a:fontRef idx="minor">
+            <a:schemeClr val="lt1"/>
+          </a:fontRef>
+        </p:style>
+        <p:txBody>
+          <a:bodyPr rtlCol="0" anchor="ctr"/>
+          <a:lstStyle/>
+          <a:p>
+            <a:pPr algn="ctr"/>
+          </a:p>
+        </p:txBody>
+      </p:sp>
+      <p:sp>
+        <p:nvSpPr>
+          <p:cNvPr id="26" name="TextBox 25"/>
+          <p:cNvSpPr txBox="1"/>
+          <p:nvPr/>
+        </p:nvSpPr>
+        <p:spPr>
+          <a:xfrm>
+            <a:off x="3572408" y="4311396"/>
+            <a:ext cx="1220724" cy="1220724"/>
+          </a:xfrm>
+          <a:prstGeom prst="rect">
+            <a:avLst/>
+          </a:prstGeom>
+          <a:noFill/>
+        </p:spPr>
+        <p:txBody>
+          <a:bodyPr wrap="square" anchor="ctr"/>
+          <a:lstStyle/>
+          <a:p>
+            <a:pPr algn="ctr"/>
+            <a:r>
+              <a:rPr sz="1600" b="1" i="0">
+                <a:solidFill>
+                  <a:srgbClr val="095292"/>
+                </a:solidFill>
+                <a:latin typeface="Calibri"/>
+              </a:rPr>
+              <a:t>P</a:t>
+            </a:r>
+          </a:p>
+        </p:txBody>
+      </p:sp>
+      <p:sp>
+        <p:nvSpPr>
+          <p:cNvPr id="27" name="TextBox 26"/>
+          <p:cNvSpPr txBox="1"/>
+          <p:nvPr/>
+        </p:nvSpPr>
+        <p:spPr>
+          <a:xfrm>
+            <a:off x="2443429" y="5623560"/>
+            <a:ext cx="3478682" cy="621792"/>
+          </a:xfrm>
+          <a:prstGeom prst="rect">
+            <a:avLst/>
+          </a:prstGeom>
+          <a:noFill/>
+        </p:spPr>
+        <p:txBody>
+          <a:bodyPr wrap="square" anchor="t"/>
+          <a:lstStyle/>
+          <a:p>
+            <a:pPr algn="ctr"/>
+            <a:r>
+              <a:rPr sz="1300" b="1" i="0">
+                <a:solidFill>
+                  <a:srgbClr val="095292"/>
+                </a:solidFill>
+                <a:latin typeface="Calibri"/>
+              </a:rPr>
+              <a:t>Penpot</a:t>
+            </a:r>
+          </a:p>
+          <a:p>
+            <a:pPr algn="ctr">
+              <a:spcBef>
+                <a:spcPts val="200"/>
+              </a:spcBef>
+            </a:pPr>
+            <a:r>
+              <a:rPr sz="1000" b="0" i="0">
+                <a:solidFill>
+                  <a:srgbClr val="666666"/>
+                </a:solidFill>
+                <a:latin typeface="Calibri"/>
+              </a:rPr>
+              <a:t>Alternativa libre a Figma</a:t>
+            </a:r>
+          </a:p>
+        </p:txBody>
+      </p:sp>
+      <p:sp>
+        <p:nvSpPr>
+          <p:cNvPr id="28" name="Rounded Rectangle 27"/>
+          <p:cNvSpPr/>
+          <p:nvPr/>
+        </p:nvSpPr>
+        <p:spPr>
+          <a:xfrm>
+            <a:off x="6196431" y="4055364"/>
+            <a:ext cx="3624986" cy="2299716"/>
+          </a:xfrm>
+          <a:prstGeom prst="roundRect">
+            <a:avLst>
+              <a:gd name="adj" fmla="val 12000"/>
+            </a:avLst>
+          </a:prstGeom>
+          <a:solidFill>
+            <a:srgbClr val="F2F2F2"/>
+          </a:solidFill>
+          <a:ln>
+            <a:noFill/>
+          </a:ln>
+        </p:spPr>
+        <p:style>
+          <a:lnRef idx="1">
+            <a:schemeClr val="accent1"/>
+          </a:lnRef>
+          <a:fillRef idx="3">
+            <a:schemeClr val="accent1"/>
+          </a:fillRef>
+          <a:effectRef idx="2">
+            <a:schemeClr val="accent1"/>
+          </a:effectRef>
+          <a:fontRef idx="minor">
+            <a:schemeClr val="lt1"/>
+          </a:fontRef>
+        </p:style>
+        <p:txBody>
+          <a:bodyPr rtlCol="0" anchor="ctr"/>
+          <a:lstStyle/>
+          <a:p>
+            <a:pPr algn="ctr"/>
+          </a:p>
+        </p:txBody>
+      </p:sp>
+      <p:sp>
+        <p:nvSpPr>
+          <p:cNvPr id="29" name="Rectangle 28"/>
+          <p:cNvSpPr/>
+          <p:nvPr/>
+        </p:nvSpPr>
+        <p:spPr>
+          <a:xfrm>
+            <a:off x="6196431" y="4055364"/>
+            <a:ext cx="3624986" cy="64008"/>
+          </a:xfrm>
+          <a:prstGeom prst="rect">
+            <a:avLst/>
+          </a:prstGeom>
+          <a:solidFill>
+            <a:srgbClr val="095292"/>
+          </a:solidFill>
+          <a:ln>
+            <a:noFill/>
+          </a:ln>
+        </p:spPr>
+        <p:style>
+          <a:lnRef idx="1">
+            <a:schemeClr val="accent1"/>
+          </a:lnRef>
+          <a:fillRef idx="3">
+            <a:schemeClr val="accent1"/>
+          </a:fillRef>
+          <a:effectRef idx="2">
+            <a:schemeClr val="accent1"/>
+          </a:effectRef>
+          <a:fontRef idx="minor">
+            <a:schemeClr val="lt1"/>
+          </a:fontRef>
+        </p:style>
+        <p:txBody>
+          <a:bodyPr rtlCol="0" anchor="ctr"/>
+          <a:lstStyle/>
+          <a:p>
+            <a:pPr algn="ctr"/>
+          </a:p>
+        </p:txBody>
+      </p:sp>
+      <p:sp>
+        <p:nvSpPr>
+          <p:cNvPr id="30" name="Rectangle 29"/>
+          <p:cNvSpPr/>
+          <p:nvPr/>
+        </p:nvSpPr>
+        <p:spPr>
+          <a:xfrm>
+            <a:off x="6196431" y="4119372"/>
+            <a:ext cx="3624986" cy="27432"/>
+          </a:xfrm>
+          <a:prstGeom prst="rect">
+            <a:avLst/>
+          </a:prstGeom>
+          <a:solidFill>
+            <a:srgbClr val="FFD000"/>
+          </a:solidFill>
+          <a:ln>
+            <a:noFill/>
+          </a:ln>
+        </p:spPr>
+        <p:style>
+          <a:lnRef idx="1">
+            <a:schemeClr val="accent1"/>
+          </a:lnRef>
+          <a:fillRef idx="3">
+            <a:schemeClr val="accent1"/>
+          </a:fillRef>
+          <a:effectRef idx="2">
+            <a:schemeClr val="accent1"/>
+          </a:effectRef>
+          <a:fontRef idx="minor">
+            <a:schemeClr val="lt1"/>
+          </a:fontRef>
+        </p:style>
+        <p:txBody>
+          <a:bodyPr rtlCol="0" anchor="ctr"/>
+          <a:lstStyle/>
+          <a:p>
+            <a:pPr algn="ctr"/>
+          </a:p>
+        </p:txBody>
+      </p:sp>
+      <p:pic>
+        <p:nvPicPr>
+          <p:cNvPr id="31" name="Picture 30" descr="examlab.png"/>
+          <p:cNvPicPr>
+            <a:picLocks noChangeAspect="1"/>
+          </p:cNvPicPr>
+          <p:nvPr/>
+        </p:nvPicPr>
+        <p:blipFill>
+          <a:blip r:embed="rId4"/>
+          <a:stretch>
+            <a:fillRect/>
+          </a:stretch>
+        </p:blipFill>
+        <p:spPr>
+          <a:xfrm>
+            <a:off x="7398562" y="4311396"/>
+            <a:ext cx="1220724" cy="1220724"/>
+          </a:xfrm>
+          <a:prstGeom prst="rect">
+            <a:avLst/>
+          </a:prstGeom>
+        </p:spPr>
+      </p:pic>
+      <p:sp>
+        <p:nvSpPr>
+          <p:cNvPr id="32" name="TextBox 31"/>
+          <p:cNvSpPr txBox="1"/>
+          <p:nvPr/>
+        </p:nvSpPr>
+        <p:spPr>
+          <a:xfrm>
+            <a:off x="6269583" y="5623560"/>
+            <a:ext cx="3478682" cy="621792"/>
+          </a:xfrm>
+          <a:prstGeom prst="rect">
+            <a:avLst/>
+          </a:prstGeom>
+          <a:noFill/>
+        </p:spPr>
+        <p:txBody>
+          <a:bodyPr wrap="square" anchor="t"/>
+          <a:lstStyle/>
+          <a:p>
+            <a:pPr algn="ctr"/>
+            <a:r>
+              <a:rPr sz="1300" b="1" i="0">
+                <a:solidFill>
+                  <a:srgbClr val="095292"/>
+                </a:solidFill>
+                <a:latin typeface="Calibri"/>
+              </a:rPr>
+              <a:t>la plataforma del curso</a:t>
+            </a:r>
+          </a:p>
+          <a:p>
+            <a:pPr algn="ctr">
+              <a:spcBef>
+                <a:spcPts val="200"/>
+              </a:spcBef>
+            </a:pPr>
+            <a:r>
+              <a:rPr sz="1000" b="0" i="0">
+                <a:solidFill>
+                  <a:srgbClr val="666666"/>
+                </a:solidFill>
+                <a:latin typeface="Calibri"/>
+              </a:rPr>
+              <a:t>Entrega del taller · en la fecha que indique el docente</a:t>
+            </a:r>
+          </a:p>
+        </p:txBody>
+      </p:sp>
+      <p:sp>
+        <p:nvSpPr>
+          <p:cNvPr id="33" name="TextBox 32"/>
           <p:cNvSpPr txBox="1"/>
           <p:nvPr/>
         </p:nvSpPr>
@@ -6614,7 +6925,7 @@
                 </a:solidFill>
                 <a:latin typeface="Calibri"/>
               </a:rPr>
-              <a:t>Taller PI — punto de partida</a:t>
+              <a:t>Taller PI — por que importa</a:t>
             </a:r>
           </a:p>
         </p:txBody>
@@ -6653,7 +6964,25 @@
                 </a:solidFill>
                 <a:latin typeface="Calibri"/>
               </a:rPr>
-              <a:t>–   El equipo tiene todos los artefactos de VetCare producidos, pero dispersos en varios archivos y con pequeñas contradicciones entre ellos.</a:t>
+              <a:t>–   </a:t>
+            </a:r>
+            <a:r>
+              <a:rPr sz="2000" b="1" i="0">
+                <a:solidFill>
+                  <a:srgbClr val="333333"/>
+                </a:solidFill>
+                <a:latin typeface="Calibri"/>
+              </a:rPr>
+              <a:t>Por que importa al PI:</a:t>
+            </a:r>
+            <a:r>
+              <a:rPr sz="2000" b="0" i="0">
+                <a:solidFill>
+                  <a:srgbClr val="333333"/>
+                </a:solidFill>
+                <a:latin typeface="Calibri"/>
+              </a:rPr>
+              <a:t> hoy se convierte el monton de artefactos de VetCare en un solo paquete defendible, y se ensaya la unica ocasion en que el equipo tiene que demostrar que entiende lo que entrego.</a:t>
             </a:r>
           </a:p>
           <a:p>
@@ -6669,7 +6998,7 @@
                 </a:solidFill>
                 <a:latin typeface="Calibri"/>
               </a:rPr>
-              <a:t>–   Nadie ha dicho todavia en voz alta la historia completa del proyecto de principio a fin, y el reparto de quien expone que no esta definido.</a:t>
+              <a:t>–   No hay tema nuevo: todo el trabajo es de consolidacion, coherencia y argumentacion sobre lo ya producido.</a:t>
             </a:r>
           </a:p>
           <a:p>
@@ -6685,7 +7014,7 @@
                 </a:solidFill>
                 <a:latin typeface="Calibri"/>
               </a:rPr>
-              <a:t>–   El prototipo navegable existe y funciona, pero solo lo ha manejado la persona que lo dibujo.</a:t>
+              <a:t>–   Las inconsistencias que se detecten hoy son baratas de arreglar; las mismas inconsistencias detectadas por el jurado o por el equipo de Programacion II salen carisimas.</a:t>
             </a:r>
           </a:p>
         </p:txBody>
@@ -6866,111 +7195,21 @@
                 </a:solidFill>
                 <a:latin typeface="Calibri"/>
               </a:rPr>
-              <a:t>Taller PI — pasos guiados</a:t>
-            </a:r>
-          </a:p>
-        </p:txBody>
-      </p:sp>
-      <p:sp>
-        <p:nvSpPr>
-          <p:cNvPr id="5" name="Rounded Rectangle 4"/>
-          <p:cNvSpPr/>
-          <p:nvPr/>
-        </p:nvSpPr>
-        <p:spPr>
-          <a:xfrm>
-            <a:off x="457200" y="1234440"/>
-            <a:ext cx="11277295" cy="950976"/>
-          </a:xfrm>
-          <a:prstGeom prst="roundRect">
-            <a:avLst>
-              <a:gd name="adj" fmla="val 12000"/>
-            </a:avLst>
-          </a:prstGeom>
-          <a:solidFill>
-            <a:srgbClr val="F2F2F2"/>
-          </a:solidFill>
-          <a:ln>
-            <a:noFill/>
-          </a:ln>
-        </p:spPr>
-        <p:style>
-          <a:lnRef idx="1">
-            <a:schemeClr val="accent1"/>
-          </a:lnRef>
-          <a:fillRef idx="3">
-            <a:schemeClr val="accent1"/>
-          </a:fillRef>
-          <a:effectRef idx="2">
-            <a:schemeClr val="accent1"/>
-          </a:effectRef>
-          <a:fontRef idx="minor">
-            <a:schemeClr val="lt1"/>
-          </a:fontRef>
-        </p:style>
-        <p:txBody>
-          <a:bodyPr rtlCol="0" anchor="ctr"/>
-          <a:lstStyle/>
-          <a:p>
-            <a:pPr algn="ctr"/>
-          </a:p>
-        </p:txBody>
-      </p:sp>
-      <p:sp>
-        <p:nvSpPr>
-          <p:cNvPr id="6" name="Rounded Rectangle 5"/>
-          <p:cNvSpPr/>
-          <p:nvPr/>
-        </p:nvSpPr>
-        <p:spPr>
-          <a:xfrm>
-            <a:off x="594360" y="1490472"/>
-            <a:ext cx="438912" cy="438912"/>
-          </a:xfrm>
-          <a:prstGeom prst="roundRect">
-            <a:avLst>
-              <a:gd name="adj" fmla="val 12000"/>
-            </a:avLst>
-          </a:prstGeom>
-          <a:solidFill>
-            <a:srgbClr val="095292"/>
-          </a:solidFill>
-          <a:ln>
-            <a:noFill/>
-          </a:ln>
-        </p:spPr>
-        <p:style>
-          <a:lnRef idx="1">
-            <a:schemeClr val="accent1"/>
-          </a:lnRef>
-          <a:fillRef idx="3">
-            <a:schemeClr val="accent1"/>
-          </a:fillRef>
-          <a:effectRef idx="2">
-            <a:schemeClr val="accent1"/>
-          </a:effectRef>
-          <a:fontRef idx="minor">
-            <a:schemeClr val="lt1"/>
-          </a:fontRef>
-        </p:style>
-        <p:txBody>
-          <a:bodyPr rtlCol="0" anchor="ctr"/>
-          <a:lstStyle/>
-          <a:p>
-            <a:pPr algn="ctr"/>
-          </a:p>
-        </p:txBody>
-      </p:sp>
-      <p:sp>
-        <p:nvSpPr>
-          <p:cNvPr id="7" name="TextBox 6"/>
+              <a:t>Taller PI — punto de partida</a:t>
+            </a:r>
+          </a:p>
+        </p:txBody>
+      </p:sp>
+      <p:sp>
+        <p:nvSpPr>
+          <p:cNvPr id="5" name="TextBox 4"/>
           <p:cNvSpPr txBox="1"/>
           <p:nvPr/>
         </p:nvSpPr>
         <p:spPr>
           <a:xfrm>
-            <a:off x="594360" y="1490472"/>
-            <a:ext cx="438912" cy="438912"/>
+            <a:off x="457200" y="1170432"/>
+            <a:ext cx="11277295" cy="5230368"/>
           </a:xfrm>
           <a:prstGeom prst="rect">
             <a:avLst/>
@@ -6978,677 +7217,63 @@
           <a:noFill/>
         </p:spPr>
         <p:txBody>
-          <a:bodyPr wrap="square" anchor="ctr"/>
-          <a:lstStyle/>
-          <a:p>
-            <a:pPr algn="ctr"/>
-            <a:r>
-              <a:rPr sz="1600" b="1" i="0">
-                <a:solidFill>
-                  <a:srgbClr val="FFFFFF"/>
-                </a:solidFill>
-                <a:latin typeface="Calibri"/>
-              </a:rPr>
-              <a:t>1</a:t>
-            </a:r>
-          </a:p>
-        </p:txBody>
-      </p:sp>
-      <p:sp>
-        <p:nvSpPr>
-          <p:cNvPr id="8" name="TextBox 7"/>
-          <p:cNvSpPr txBox="1"/>
-          <p:nvPr/>
-        </p:nvSpPr>
-        <p:spPr>
-          <a:xfrm>
-            <a:off x="1188720" y="1325880"/>
-            <a:ext cx="10271455" cy="786384"/>
-          </a:xfrm>
-          <a:prstGeom prst="rect">
-            <a:avLst/>
-          </a:prstGeom>
-          <a:noFill/>
-        </p:spPr>
-        <p:txBody>
-          <a:bodyPr wrap="square" anchor="ctr"/>
-          <a:lstStyle/>
-          <a:p>
-            <a:r>
-              <a:rPr sz="1100" b="1" i="0">
-                <a:solidFill>
-                  <a:srgbClr val="095292"/>
-                </a:solidFill>
-                <a:latin typeface="Calibri"/>
-              </a:rPr>
-              <a:t>Paso 1. Arme en Google Docs el guion cronometrado de doce minutos con las cinco secciones obligatorias en orden problema, requisitos, modelo, interfaz y decisiones, asignando a cada bloque su rango de minutos exacto y la evidencia que se muestra en pantalla en ese bloque; ningun bloque puede quedar sin rango de minutos ni sin evidencia asociada. Si el docente autorizo equipo, escriba ademas el nombre del responsable de cada bloque y reparta de modo que ningun integrante quede con menos de dos minutos.</a:t>
-            </a:r>
-          </a:p>
-        </p:txBody>
-      </p:sp>
-      <p:sp>
-        <p:nvSpPr>
-          <p:cNvPr id="9" name="Rounded Rectangle 8"/>
-          <p:cNvSpPr/>
-          <p:nvPr/>
-        </p:nvSpPr>
-        <p:spPr>
-          <a:xfrm>
-            <a:off x="457200" y="2276856"/>
-            <a:ext cx="11277295" cy="950976"/>
-          </a:xfrm>
-          <a:prstGeom prst="roundRect">
-            <a:avLst>
-              <a:gd name="adj" fmla="val 12000"/>
-            </a:avLst>
-          </a:prstGeom>
-          <a:solidFill>
-            <a:srgbClr val="E8F4FA"/>
-          </a:solidFill>
-          <a:ln>
-            <a:noFill/>
-          </a:ln>
-        </p:spPr>
-        <p:style>
-          <a:lnRef idx="1">
-            <a:schemeClr val="accent1"/>
-          </a:lnRef>
-          <a:fillRef idx="3">
-            <a:schemeClr val="accent1"/>
-          </a:fillRef>
-          <a:effectRef idx="2">
-            <a:schemeClr val="accent1"/>
-          </a:effectRef>
-          <a:fontRef idx="minor">
-            <a:schemeClr val="lt1"/>
-          </a:fontRef>
-        </p:style>
-        <p:txBody>
-          <a:bodyPr rtlCol="0" anchor="ctr"/>
-          <a:lstStyle/>
-          <a:p>
-            <a:pPr algn="ctr"/>
-          </a:p>
-        </p:txBody>
-      </p:sp>
-      <p:sp>
-        <p:nvSpPr>
-          <p:cNvPr id="10" name="Rounded Rectangle 9"/>
-          <p:cNvSpPr/>
-          <p:nvPr/>
-        </p:nvSpPr>
-        <p:spPr>
-          <a:xfrm>
-            <a:off x="594360" y="2532888"/>
-            <a:ext cx="438912" cy="438912"/>
-          </a:xfrm>
-          <a:prstGeom prst="roundRect">
-            <a:avLst>
-              <a:gd name="adj" fmla="val 12000"/>
-            </a:avLst>
-          </a:prstGeom>
-          <a:solidFill>
-            <a:srgbClr val="095292"/>
-          </a:solidFill>
-          <a:ln>
-            <a:noFill/>
-          </a:ln>
-        </p:spPr>
-        <p:style>
-          <a:lnRef idx="1">
-            <a:schemeClr val="accent1"/>
-          </a:lnRef>
-          <a:fillRef idx="3">
-            <a:schemeClr val="accent1"/>
-          </a:fillRef>
-          <a:effectRef idx="2">
-            <a:schemeClr val="accent1"/>
-          </a:effectRef>
-          <a:fontRef idx="minor">
-            <a:schemeClr val="lt1"/>
-          </a:fontRef>
-        </p:style>
-        <p:txBody>
-          <a:bodyPr rtlCol="0" anchor="ctr"/>
-          <a:lstStyle/>
-          <a:p>
-            <a:pPr algn="ctr"/>
-          </a:p>
-        </p:txBody>
-      </p:sp>
-      <p:sp>
-        <p:nvSpPr>
-          <p:cNvPr id="11" name="TextBox 10"/>
-          <p:cNvSpPr txBox="1"/>
-          <p:nvPr/>
-        </p:nvSpPr>
-        <p:spPr>
-          <a:xfrm>
-            <a:off x="594360" y="2532888"/>
-            <a:ext cx="438912" cy="438912"/>
-          </a:xfrm>
-          <a:prstGeom prst="rect">
-            <a:avLst/>
-          </a:prstGeom>
-          <a:noFill/>
-        </p:spPr>
-        <p:txBody>
-          <a:bodyPr wrap="square" anchor="ctr"/>
-          <a:lstStyle/>
-          <a:p>
-            <a:pPr algn="ctr"/>
-            <a:r>
-              <a:rPr sz="1600" b="1" i="0">
-                <a:solidFill>
-                  <a:srgbClr val="FFFFFF"/>
-                </a:solidFill>
-                <a:latin typeface="Calibri"/>
-              </a:rPr>
-              <a:t>2</a:t>
-            </a:r>
-          </a:p>
-        </p:txBody>
-      </p:sp>
-      <p:sp>
-        <p:nvSpPr>
-          <p:cNvPr id="12" name="TextBox 11"/>
-          <p:cNvSpPr txBox="1"/>
-          <p:nvPr/>
-        </p:nvSpPr>
-        <p:spPr>
-          <a:xfrm>
-            <a:off x="1188720" y="2368296"/>
-            <a:ext cx="10271455" cy="786384"/>
-          </a:xfrm>
-          <a:prstGeom prst="rect">
-            <a:avLst/>
-          </a:prstGeom>
-          <a:noFill/>
-        </p:spPr>
-        <p:txBody>
-          <a:bodyPr wrap="square" anchor="ctr"/>
-          <a:lstStyle/>
-          <a:p>
-            <a:r>
-              <a:rPr sz="1400" b="1" i="0">
-                <a:solidFill>
-                  <a:srgbClr val="095292"/>
-                </a:solidFill>
-                <a:latin typeface="Calibri"/>
-              </a:rPr>
-              <a:t>Paso 2. Llenen la tabla de tres decisiones de diseño de VetCare con las cuatro columnas decision, alternativa descartada, criterio y consecuencia asumida; una de las tres decisiones debe ser sobre el modelo de clases y otra sobre un requisito no funcional.</a:t>
-            </a:r>
-          </a:p>
-        </p:txBody>
-      </p:sp>
-      <p:sp>
-        <p:nvSpPr>
-          <p:cNvPr id="13" name="Rounded Rectangle 12"/>
-          <p:cNvSpPr/>
-          <p:nvPr/>
-        </p:nvSpPr>
-        <p:spPr>
-          <a:xfrm>
-            <a:off x="457200" y="3319272"/>
-            <a:ext cx="11277295" cy="950976"/>
-          </a:xfrm>
-          <a:prstGeom prst="roundRect">
-            <a:avLst>
-              <a:gd name="adj" fmla="val 12000"/>
-            </a:avLst>
-          </a:prstGeom>
-          <a:solidFill>
-            <a:srgbClr val="F2F2F2"/>
-          </a:solidFill>
-          <a:ln>
-            <a:noFill/>
-          </a:ln>
-        </p:spPr>
-        <p:style>
-          <a:lnRef idx="1">
-            <a:schemeClr val="accent1"/>
-          </a:lnRef>
-          <a:fillRef idx="3">
-            <a:schemeClr val="accent1"/>
-          </a:fillRef>
-          <a:effectRef idx="2">
-            <a:schemeClr val="accent1"/>
-          </a:effectRef>
-          <a:fontRef idx="minor">
-            <a:schemeClr val="lt1"/>
-          </a:fontRef>
-        </p:style>
-        <p:txBody>
-          <a:bodyPr rtlCol="0" anchor="ctr"/>
-          <a:lstStyle/>
-          <a:p>
-            <a:pPr algn="ctr"/>
-          </a:p>
-        </p:txBody>
-      </p:sp>
-      <p:sp>
-        <p:nvSpPr>
-          <p:cNvPr id="14" name="Rounded Rectangle 13"/>
-          <p:cNvSpPr/>
-          <p:nvPr/>
-        </p:nvSpPr>
-        <p:spPr>
-          <a:xfrm>
-            <a:off x="594360" y="3575304"/>
-            <a:ext cx="438912" cy="438912"/>
-          </a:xfrm>
-          <a:prstGeom prst="roundRect">
-            <a:avLst>
-              <a:gd name="adj" fmla="val 12000"/>
-            </a:avLst>
-          </a:prstGeom>
-          <a:solidFill>
-            <a:srgbClr val="095292"/>
-          </a:solidFill>
-          <a:ln>
-            <a:noFill/>
-          </a:ln>
-        </p:spPr>
-        <p:style>
-          <a:lnRef idx="1">
-            <a:schemeClr val="accent1"/>
-          </a:lnRef>
-          <a:fillRef idx="3">
-            <a:schemeClr val="accent1"/>
-          </a:fillRef>
-          <a:effectRef idx="2">
-            <a:schemeClr val="accent1"/>
-          </a:effectRef>
-          <a:fontRef idx="minor">
-            <a:schemeClr val="lt1"/>
-          </a:fontRef>
-        </p:style>
-        <p:txBody>
-          <a:bodyPr rtlCol="0" anchor="ctr"/>
-          <a:lstStyle/>
-          <a:p>
-            <a:pPr algn="ctr"/>
-          </a:p>
-        </p:txBody>
-      </p:sp>
-      <p:sp>
-        <p:nvSpPr>
-          <p:cNvPr id="15" name="TextBox 14"/>
-          <p:cNvSpPr txBox="1"/>
-          <p:nvPr/>
-        </p:nvSpPr>
-        <p:spPr>
-          <a:xfrm>
-            <a:off x="594360" y="3575304"/>
-            <a:ext cx="438912" cy="438912"/>
-          </a:xfrm>
-          <a:prstGeom prst="rect">
-            <a:avLst/>
-          </a:prstGeom>
-          <a:noFill/>
-        </p:spPr>
-        <p:txBody>
-          <a:bodyPr wrap="square" anchor="ctr"/>
-          <a:lstStyle/>
-          <a:p>
-            <a:pPr algn="ctr"/>
-            <a:r>
-              <a:rPr sz="1600" b="1" i="0">
-                <a:solidFill>
-                  <a:srgbClr val="FFFFFF"/>
-                </a:solidFill>
-                <a:latin typeface="Calibri"/>
-              </a:rPr>
-              <a:t>3</a:t>
-            </a:r>
-          </a:p>
-        </p:txBody>
-      </p:sp>
-      <p:sp>
-        <p:nvSpPr>
-          <p:cNvPr id="16" name="TextBox 15"/>
-          <p:cNvSpPr txBox="1"/>
-          <p:nvPr/>
-        </p:nvSpPr>
-        <p:spPr>
-          <a:xfrm>
-            <a:off x="1188720" y="3410712"/>
-            <a:ext cx="10271455" cy="786384"/>
-          </a:xfrm>
-          <a:prstGeom prst="rect">
-            <a:avLst/>
-          </a:prstGeom>
-          <a:noFill/>
-        </p:spPr>
-        <p:txBody>
-          <a:bodyPr wrap="square" anchor="ctr"/>
-          <a:lstStyle/>
-          <a:p>
-            <a:r>
-              <a:rPr sz="1400" b="1" i="0">
-                <a:solidFill>
-                  <a:srgbClr val="095292"/>
-                </a:solidFill>
-                <a:latin typeface="Calibri"/>
-              </a:rPr>
-              <a:t>Paso 3. Construyan el banco de diez preguntas del jurado con su respuesta en maximo dos frases, incluyendo obligatoriamente que pasa si dos recepcionistas registran la misma mascota, como se mide su RNF de tiempo de respuesta y que quedo fuera del alcance.</a:t>
-            </a:r>
-          </a:p>
-        </p:txBody>
-      </p:sp>
-      <p:sp>
-        <p:nvSpPr>
-          <p:cNvPr id="17" name="Rounded Rectangle 16"/>
-          <p:cNvSpPr/>
-          <p:nvPr/>
-        </p:nvSpPr>
-        <p:spPr>
-          <a:xfrm>
-            <a:off x="457200" y="4361688"/>
-            <a:ext cx="11277295" cy="950976"/>
-          </a:xfrm>
-          <a:prstGeom prst="roundRect">
-            <a:avLst>
-              <a:gd name="adj" fmla="val 12000"/>
-            </a:avLst>
-          </a:prstGeom>
-          <a:solidFill>
-            <a:srgbClr val="E8F4FA"/>
-          </a:solidFill>
-          <a:ln>
-            <a:noFill/>
-          </a:ln>
-        </p:spPr>
-        <p:style>
-          <a:lnRef idx="1">
-            <a:schemeClr val="accent1"/>
-          </a:lnRef>
-          <a:fillRef idx="3">
-            <a:schemeClr val="accent1"/>
-          </a:fillRef>
-          <a:effectRef idx="2">
-            <a:schemeClr val="accent1"/>
-          </a:effectRef>
-          <a:fontRef idx="minor">
-            <a:schemeClr val="lt1"/>
-          </a:fontRef>
-        </p:style>
-        <p:txBody>
-          <a:bodyPr rtlCol="0" anchor="ctr"/>
-          <a:lstStyle/>
-          <a:p>
-            <a:pPr algn="ctr"/>
-          </a:p>
-        </p:txBody>
-      </p:sp>
-      <p:sp>
-        <p:nvSpPr>
-          <p:cNvPr id="18" name="Rounded Rectangle 17"/>
-          <p:cNvSpPr/>
-          <p:nvPr/>
-        </p:nvSpPr>
-        <p:spPr>
-          <a:xfrm>
-            <a:off x="594360" y="4617720"/>
-            <a:ext cx="438912" cy="438912"/>
-          </a:xfrm>
-          <a:prstGeom prst="roundRect">
-            <a:avLst>
-              <a:gd name="adj" fmla="val 12000"/>
-            </a:avLst>
-          </a:prstGeom>
-          <a:solidFill>
-            <a:srgbClr val="095292"/>
-          </a:solidFill>
-          <a:ln>
-            <a:noFill/>
-          </a:ln>
-        </p:spPr>
-        <p:style>
-          <a:lnRef idx="1">
-            <a:schemeClr val="accent1"/>
-          </a:lnRef>
-          <a:fillRef idx="3">
-            <a:schemeClr val="accent1"/>
-          </a:fillRef>
-          <a:effectRef idx="2">
-            <a:schemeClr val="accent1"/>
-          </a:effectRef>
-          <a:fontRef idx="minor">
-            <a:schemeClr val="lt1"/>
-          </a:fontRef>
-        </p:style>
-        <p:txBody>
-          <a:bodyPr rtlCol="0" anchor="ctr"/>
-          <a:lstStyle/>
-          <a:p>
-            <a:pPr algn="ctr"/>
-          </a:p>
-        </p:txBody>
-      </p:sp>
-      <p:sp>
-        <p:nvSpPr>
-          <p:cNvPr id="19" name="TextBox 18"/>
-          <p:cNvSpPr txBox="1"/>
-          <p:nvPr/>
-        </p:nvSpPr>
-        <p:spPr>
-          <a:xfrm>
-            <a:off x="594360" y="4617720"/>
-            <a:ext cx="438912" cy="438912"/>
-          </a:xfrm>
-          <a:prstGeom prst="rect">
-            <a:avLst/>
-          </a:prstGeom>
-          <a:noFill/>
-        </p:spPr>
-        <p:txBody>
-          <a:bodyPr wrap="square" anchor="ctr"/>
-          <a:lstStyle/>
-          <a:p>
-            <a:pPr algn="ctr"/>
-            <a:r>
-              <a:rPr sz="1600" b="1" i="0">
-                <a:solidFill>
-                  <a:srgbClr val="FFFFFF"/>
-                </a:solidFill>
-                <a:latin typeface="Calibri"/>
-              </a:rPr>
-              <a:t>4</a:t>
-            </a:r>
-          </a:p>
-        </p:txBody>
-      </p:sp>
-      <p:sp>
-        <p:nvSpPr>
-          <p:cNvPr id="20" name="TextBox 19"/>
-          <p:cNvSpPr txBox="1"/>
-          <p:nvPr/>
-        </p:nvSpPr>
-        <p:spPr>
-          <a:xfrm>
-            <a:off x="1188720" y="4453128"/>
-            <a:ext cx="10271455" cy="786384"/>
-          </a:xfrm>
-          <a:prstGeom prst="rect">
-            <a:avLst/>
-          </a:prstGeom>
-          <a:noFill/>
-        </p:spPr>
-        <p:txBody>
-          <a:bodyPr wrap="square" anchor="ctr"/>
-          <a:lstStyle/>
-          <a:p>
-            <a:r>
-              <a:rPr sz="1400" b="1" i="0">
-                <a:solidFill>
-                  <a:srgbClr val="095292"/>
-                </a:solidFill>
-                <a:latin typeface="Calibri"/>
-              </a:rPr>
-              <a:t>Paso 4. Haga un ensayo cronometrado de pie, con el prototipo abierto, y registre el tiempo real de cada bloque; recorte lo que se paso y anote los dos puntos donde se enredo al hablar (si trabaja en equipo, donde se enredo la transicion entre un expositor y el siguiente).</a:t>
-            </a:r>
-          </a:p>
-        </p:txBody>
-      </p:sp>
-      <p:sp>
-        <p:nvSpPr>
-          <p:cNvPr id="21" name="Rounded Rectangle 20"/>
-          <p:cNvSpPr/>
-          <p:nvPr/>
-        </p:nvSpPr>
-        <p:spPr>
-          <a:xfrm>
-            <a:off x="457200" y="5404104"/>
-            <a:ext cx="11277295" cy="950976"/>
-          </a:xfrm>
-          <a:prstGeom prst="roundRect">
-            <a:avLst>
-              <a:gd name="adj" fmla="val 12000"/>
-            </a:avLst>
-          </a:prstGeom>
-          <a:solidFill>
-            <a:srgbClr val="F2F2F2"/>
-          </a:solidFill>
-          <a:ln>
-            <a:noFill/>
-          </a:ln>
-        </p:spPr>
-        <p:style>
-          <a:lnRef idx="1">
-            <a:schemeClr val="accent1"/>
-          </a:lnRef>
-          <a:fillRef idx="3">
-            <a:schemeClr val="accent1"/>
-          </a:fillRef>
-          <a:effectRef idx="2">
-            <a:schemeClr val="accent1"/>
-          </a:effectRef>
-          <a:fontRef idx="minor">
-            <a:schemeClr val="lt1"/>
-          </a:fontRef>
-        </p:style>
-        <p:txBody>
-          <a:bodyPr rtlCol="0" anchor="ctr"/>
-          <a:lstStyle/>
-          <a:p>
-            <a:pPr algn="ctr"/>
-          </a:p>
-        </p:txBody>
-      </p:sp>
-      <p:sp>
-        <p:nvSpPr>
-          <p:cNvPr id="22" name="Rounded Rectangle 21"/>
-          <p:cNvSpPr/>
-          <p:nvPr/>
-        </p:nvSpPr>
-        <p:spPr>
-          <a:xfrm>
-            <a:off x="594360" y="5660136"/>
-            <a:ext cx="438912" cy="438912"/>
-          </a:xfrm>
-          <a:prstGeom prst="roundRect">
-            <a:avLst>
-              <a:gd name="adj" fmla="val 12000"/>
-            </a:avLst>
-          </a:prstGeom>
-          <a:solidFill>
-            <a:srgbClr val="095292"/>
-          </a:solidFill>
-          <a:ln>
-            <a:noFill/>
-          </a:ln>
-        </p:spPr>
-        <p:style>
-          <a:lnRef idx="1">
-            <a:schemeClr val="accent1"/>
-          </a:lnRef>
-          <a:fillRef idx="3">
-            <a:schemeClr val="accent1"/>
-          </a:fillRef>
-          <a:effectRef idx="2">
-            <a:schemeClr val="accent1"/>
-          </a:effectRef>
-          <a:fontRef idx="minor">
-            <a:schemeClr val="lt1"/>
-          </a:fontRef>
-        </p:style>
-        <p:txBody>
-          <a:bodyPr rtlCol="0" anchor="ctr"/>
-          <a:lstStyle/>
-          <a:p>
-            <a:pPr algn="ctr"/>
-          </a:p>
-        </p:txBody>
-      </p:sp>
-      <p:sp>
-        <p:nvSpPr>
-          <p:cNvPr id="23" name="TextBox 22"/>
-          <p:cNvSpPr txBox="1"/>
-          <p:nvPr/>
-        </p:nvSpPr>
-        <p:spPr>
-          <a:xfrm>
-            <a:off x="594360" y="5660136"/>
-            <a:ext cx="438912" cy="438912"/>
-          </a:xfrm>
-          <a:prstGeom prst="rect">
-            <a:avLst/>
-          </a:prstGeom>
-          <a:noFill/>
-        </p:spPr>
-        <p:txBody>
-          <a:bodyPr wrap="square" anchor="ctr"/>
-          <a:lstStyle/>
-          <a:p>
-            <a:pPr algn="ctr"/>
-            <a:r>
-              <a:rPr sz="1600" b="1" i="0">
-                <a:solidFill>
-                  <a:srgbClr val="FFFFFF"/>
-                </a:solidFill>
-                <a:latin typeface="Calibri"/>
-              </a:rPr>
-              <a:t>5</a:t>
-            </a:r>
-          </a:p>
-        </p:txBody>
-      </p:sp>
-      <p:sp>
-        <p:nvSpPr>
-          <p:cNvPr id="24" name="TextBox 23"/>
-          <p:cNvSpPr txBox="1"/>
-          <p:nvPr/>
-        </p:nvSpPr>
-        <p:spPr>
-          <a:xfrm>
-            <a:off x="1188720" y="5495544"/>
-            <a:ext cx="10271455" cy="786384"/>
-          </a:xfrm>
-          <a:prstGeom prst="rect">
-            <a:avLst/>
-          </a:prstGeom>
-          <a:noFill/>
-        </p:spPr>
-        <p:txBody>
-          <a:bodyPr wrap="square" anchor="ctr"/>
-          <a:lstStyle/>
-          <a:p>
-            <a:r>
-              <a:rPr sz="1400" b="1" i="0">
-                <a:solidFill>
-                  <a:srgbClr val="095292"/>
-                </a:solidFill>
-                <a:latin typeface="Calibri"/>
-              </a:rPr>
-              <a:t>Paso 5. Consoliden el documento final armando el indice completo desde problema hasta trazabilidad, verifiquen que los nombres de las clases, los campos del diccionario y los campos de las pantallas coinciden exactamente, y corrijan al menos una inconsistencia encontrada dejando constancia de cual era.</a:t>
-            </a:r>
-          </a:p>
-        </p:txBody>
-      </p:sp>
-      <p:sp>
-        <p:nvSpPr>
-          <p:cNvPr id="25" name="TextBox 24"/>
+          <a:bodyPr wrap="square">
+            <a:spAutoFit/>
+          </a:bodyPr>
+          <a:lstStyle/>
+          <a:p>
+            <a:pPr>
+              <a:spcAft>
+                <a:spcPts val="800"/>
+              </a:spcAft>
+            </a:pPr>
+            <a:r>
+              <a:rPr sz="2000" b="0" i="0">
+                <a:solidFill>
+                  <a:srgbClr val="333333"/>
+                </a:solidFill>
+                <a:latin typeface="Calibri"/>
+              </a:rPr>
+              <a:t>–   El equipo tiene todos los artefactos de VetCare producidos, pero dispersos en varios archivos y con pequeñas contradicciones entre ellos.</a:t>
+            </a:r>
+          </a:p>
+          <a:p>
+            <a:pPr>
+              <a:spcAft>
+                <a:spcPts val="800"/>
+              </a:spcAft>
+            </a:pPr>
+            <a:r>
+              <a:rPr sz="2000" b="0" i="0">
+                <a:solidFill>
+                  <a:srgbClr val="333333"/>
+                </a:solidFill>
+                <a:latin typeface="Calibri"/>
+              </a:rPr>
+              <a:t>–   Nadie ha dicho todavia en voz alta la historia completa del proyecto de principio a fin, y el reparto de quien expone que no esta definido.</a:t>
+            </a:r>
+          </a:p>
+          <a:p>
+            <a:pPr>
+              <a:spcAft>
+                <a:spcPts val="800"/>
+              </a:spcAft>
+            </a:pPr>
+            <a:r>
+              <a:rPr sz="2000" b="0" i="0">
+                <a:solidFill>
+                  <a:srgbClr val="333333"/>
+                </a:solidFill>
+                <a:latin typeface="Calibri"/>
+              </a:rPr>
+              <a:t>–   El prototipo navegable existe y funciona, pero solo lo ha manejado la persona que lo dibujo.</a:t>
+            </a:r>
+          </a:p>
+        </p:txBody>
+      </p:sp>
+      <p:sp>
+        <p:nvSpPr>
+          <p:cNvPr id="6" name="TextBox 5"/>
           <p:cNvSpPr txBox="1"/>
           <p:nvPr/>
         </p:nvSpPr>
@@ -7822,7 +7447,7 @@
                 </a:solidFill>
                 <a:latin typeface="Calibri"/>
               </a:rPr>
-              <a:t>Antes de entregar — autochequeo</a:t>
+              <a:t>Taller PI — pasos guiados</a:t>
             </a:r>
           </a:p>
         </p:txBody>
@@ -7835,8 +7460,8 @@
         </p:nvSpPr>
         <p:spPr>
           <a:xfrm>
-            <a:off x="457200" y="1261872"/>
-            <a:ext cx="11277295" cy="566928"/>
+            <a:off x="457200" y="1234440"/>
+            <a:ext cx="11277295" cy="950976"/>
           </a:xfrm>
           <a:prstGeom prst="roundRect">
             <a:avLst>
@@ -7874,25 +7499,25 @@
       </p:sp>
       <p:sp>
         <p:nvSpPr>
-          <p:cNvPr id="6" name="Rectangle 5"/>
+          <p:cNvPr id="6" name="Rounded Rectangle 5"/>
           <p:cNvSpPr/>
           <p:nvPr/>
         </p:nvSpPr>
         <p:spPr>
           <a:xfrm>
-            <a:off x="640080" y="1408175"/>
-            <a:ext cx="274320" cy="274320"/>
-          </a:xfrm>
-          <a:prstGeom prst="rect">
-            <a:avLst/>
+            <a:off x="594360" y="1490472"/>
+            <a:ext cx="438912" cy="438912"/>
+          </a:xfrm>
+          <a:prstGeom prst="roundRect">
+            <a:avLst>
+              <a:gd name="adj" fmla="val 12000"/>
+            </a:avLst>
           </a:prstGeom>
           <a:solidFill>
-            <a:srgbClr val="FFFFFF"/>
+            <a:srgbClr val="095292"/>
           </a:solidFill>
           <a:ln>
-            <a:solidFill>
-              <a:srgbClr val="333333"/>
-            </a:solidFill>
+            <a:noFill/>
           </a:ln>
         </p:spPr>
         <p:style>
@@ -7919,20 +7544,87 @@
       </p:sp>
       <p:sp>
         <p:nvSpPr>
-          <p:cNvPr id="7" name="Rectangle 6"/>
+          <p:cNvPr id="7" name="TextBox 6"/>
+          <p:cNvSpPr txBox="1"/>
+          <p:nvPr/>
+        </p:nvSpPr>
+        <p:spPr>
+          <a:xfrm>
+            <a:off x="594360" y="1490472"/>
+            <a:ext cx="438912" cy="438912"/>
+          </a:xfrm>
+          <a:prstGeom prst="rect">
+            <a:avLst/>
+          </a:prstGeom>
+          <a:noFill/>
+        </p:spPr>
+        <p:txBody>
+          <a:bodyPr wrap="square" anchor="ctr"/>
+          <a:lstStyle/>
+          <a:p>
+            <a:pPr algn="ctr"/>
+            <a:r>
+              <a:rPr sz="1600" b="1" i="0">
+                <a:solidFill>
+                  <a:srgbClr val="FFFFFF"/>
+                </a:solidFill>
+                <a:latin typeface="Calibri"/>
+              </a:rPr>
+              <a:t>1</a:t>
+            </a:r>
+          </a:p>
+        </p:txBody>
+      </p:sp>
+      <p:sp>
+        <p:nvSpPr>
+          <p:cNvPr id="8" name="TextBox 7"/>
+          <p:cNvSpPr txBox="1"/>
+          <p:nvPr/>
+        </p:nvSpPr>
+        <p:spPr>
+          <a:xfrm>
+            <a:off x="1188720" y="1325880"/>
+            <a:ext cx="10271455" cy="786384"/>
+          </a:xfrm>
+          <a:prstGeom prst="rect">
+            <a:avLst/>
+          </a:prstGeom>
+          <a:noFill/>
+        </p:spPr>
+        <p:txBody>
+          <a:bodyPr wrap="square" anchor="ctr"/>
+          <a:lstStyle/>
+          <a:p>
+            <a:r>
+              <a:rPr sz="1100" b="1" i="0">
+                <a:solidFill>
+                  <a:srgbClr val="095292"/>
+                </a:solidFill>
+                <a:latin typeface="Calibri"/>
+              </a:rPr>
+              <a:t>Paso 1. Arme en Google Docs el guion cronometrado de doce minutos con las cinco secciones obligatorias en orden problema, requisitos, modelo, interfaz y decisiones, asignando a cada bloque su rango de minutos exacto y la evidencia que se muestra en pantalla en ese bloque; ningun bloque puede quedar sin rango de minutos ni sin evidencia asociada. Si el docente autorizo equipo, escriba ademas el nombre del responsable de cada bloque y reparta de modo que ningun integrante quede con menos de dos minutos.</a:t>
+            </a:r>
+          </a:p>
+        </p:txBody>
+      </p:sp>
+      <p:sp>
+        <p:nvSpPr>
+          <p:cNvPr id="9" name="Rounded Rectangle 8"/>
           <p:cNvSpPr/>
           <p:nvPr/>
         </p:nvSpPr>
         <p:spPr>
           <a:xfrm>
-            <a:off x="640080" y="1408175"/>
-            <a:ext cx="73152" cy="274320"/>
-          </a:xfrm>
-          <a:prstGeom prst="rect">
-            <a:avLst/>
+            <a:off x="457200" y="2276856"/>
+            <a:ext cx="11277295" cy="950976"/>
+          </a:xfrm>
+          <a:prstGeom prst="roundRect">
+            <a:avLst>
+              <a:gd name="adj" fmla="val 12000"/>
+            </a:avLst>
           </a:prstGeom>
           <a:solidFill>
-            <a:srgbClr val="269CCB"/>
+            <a:srgbClr val="E8F4FA"/>
           </a:solidFill>
           <a:ln>
             <a:noFill/>
@@ -7962,14 +7654,59 @@
       </p:sp>
       <p:sp>
         <p:nvSpPr>
-          <p:cNvPr id="8" name="TextBox 7"/>
+          <p:cNvPr id="10" name="Rounded Rectangle 9"/>
+          <p:cNvSpPr/>
+          <p:nvPr/>
+        </p:nvSpPr>
+        <p:spPr>
+          <a:xfrm>
+            <a:off x="594360" y="2532888"/>
+            <a:ext cx="438912" cy="438912"/>
+          </a:xfrm>
+          <a:prstGeom prst="roundRect">
+            <a:avLst>
+              <a:gd name="adj" fmla="val 12000"/>
+            </a:avLst>
+          </a:prstGeom>
+          <a:solidFill>
+            <a:srgbClr val="095292"/>
+          </a:solidFill>
+          <a:ln>
+            <a:noFill/>
+          </a:ln>
+        </p:spPr>
+        <p:style>
+          <a:lnRef idx="1">
+            <a:schemeClr val="accent1"/>
+          </a:lnRef>
+          <a:fillRef idx="3">
+            <a:schemeClr val="accent1"/>
+          </a:fillRef>
+          <a:effectRef idx="2">
+            <a:schemeClr val="accent1"/>
+          </a:effectRef>
+          <a:fontRef idx="minor">
+            <a:schemeClr val="lt1"/>
+          </a:fontRef>
+        </p:style>
+        <p:txBody>
+          <a:bodyPr rtlCol="0" anchor="ctr"/>
+          <a:lstStyle/>
+          <a:p>
+            <a:pPr algn="ctr"/>
+          </a:p>
+        </p:txBody>
+      </p:sp>
+      <p:sp>
+        <p:nvSpPr>
+          <p:cNvPr id="11" name="TextBox 10"/>
           <p:cNvSpPr txBox="1"/>
           <p:nvPr/>
         </p:nvSpPr>
         <p:spPr>
           <a:xfrm>
-            <a:off x="1097280" y="1353312"/>
-            <a:ext cx="10362895" cy="402336"/>
+            <a:off x="594360" y="2532888"/>
+            <a:ext cx="438912" cy="438912"/>
           </a:xfrm>
           <a:prstGeom prst="rect">
             <a:avLst/>
@@ -7980,28 +7717,61 @@
           <a:bodyPr wrap="square" anchor="ctr"/>
           <a:lstStyle/>
           <a:p>
-            <a:r>
-              <a:rPr sz="1500" b="0" i="0">
-                <a:solidFill>
-                  <a:srgbClr val="333333"/>
-                </a:solidFill>
-                <a:latin typeface="Calibri"/>
-              </a:rPr>
-              <a:t>Si el jurado le pregunta por una parte que no alcanzo a mostrar, puede responderla sin buscar ayuda (y si hay equipo autorizado, cualquier integrante puede responder por cualquier bloque).</a:t>
-            </a:r>
-          </a:p>
-        </p:txBody>
-      </p:sp>
-      <p:sp>
-        <p:nvSpPr>
-          <p:cNvPr id="9" name="Rounded Rectangle 8"/>
+            <a:pPr algn="ctr"/>
+            <a:r>
+              <a:rPr sz="1600" b="1" i="0">
+                <a:solidFill>
+                  <a:srgbClr val="FFFFFF"/>
+                </a:solidFill>
+                <a:latin typeface="Calibri"/>
+              </a:rPr>
+              <a:t>2</a:t>
+            </a:r>
+          </a:p>
+        </p:txBody>
+      </p:sp>
+      <p:sp>
+        <p:nvSpPr>
+          <p:cNvPr id="12" name="TextBox 11"/>
+          <p:cNvSpPr txBox="1"/>
+          <p:nvPr/>
+        </p:nvSpPr>
+        <p:spPr>
+          <a:xfrm>
+            <a:off x="1188720" y="2368296"/>
+            <a:ext cx="10271455" cy="786384"/>
+          </a:xfrm>
+          <a:prstGeom prst="rect">
+            <a:avLst/>
+          </a:prstGeom>
+          <a:noFill/>
+        </p:spPr>
+        <p:txBody>
+          <a:bodyPr wrap="square" anchor="ctr"/>
+          <a:lstStyle/>
+          <a:p>
+            <a:r>
+              <a:rPr sz="1400" b="1" i="0">
+                <a:solidFill>
+                  <a:srgbClr val="095292"/>
+                </a:solidFill>
+                <a:latin typeface="Calibri"/>
+              </a:rPr>
+              <a:t>Paso 2. Llenen la tabla de tres decisiones de diseño de VetCare con las cuatro columnas decision, alternativa descartada, criterio y consecuencia asumida; una de las tres decisiones debe ser sobre el modelo de clases y otra sobre un requisito no funcional.</a:t>
+            </a:r>
+          </a:p>
+        </p:txBody>
+      </p:sp>
+      <p:sp>
+        <p:nvSpPr>
+          <p:cNvPr id="13" name="Rounded Rectangle 12"/>
           <p:cNvSpPr/>
           <p:nvPr/>
         </p:nvSpPr>
         <p:spPr>
           <a:xfrm>
-            <a:off x="457200" y="1938528"/>
-            <a:ext cx="11277295" cy="566928"/>
+            <a:off x="457200" y="3319272"/>
+            <a:ext cx="11277295" cy="950976"/>
           </a:xfrm>
           <a:prstGeom prst="roundRect">
             <a:avLst>
@@ -8039,25 +7809,25 @@
       </p:sp>
       <p:sp>
         <p:nvSpPr>
-          <p:cNvPr id="10" name="Rectangle 9"/>
+          <p:cNvPr id="14" name="Rounded Rectangle 13"/>
           <p:cNvSpPr/>
           <p:nvPr/>
         </p:nvSpPr>
         <p:spPr>
           <a:xfrm>
-            <a:off x="640080" y="2084832"/>
-            <a:ext cx="274320" cy="274320"/>
-          </a:xfrm>
-          <a:prstGeom prst="rect">
-            <a:avLst/>
+            <a:off x="594360" y="3575304"/>
+            <a:ext cx="438912" cy="438912"/>
+          </a:xfrm>
+          <a:prstGeom prst="roundRect">
+            <a:avLst>
+              <a:gd name="adj" fmla="val 12000"/>
+            </a:avLst>
           </a:prstGeom>
           <a:solidFill>
-            <a:srgbClr val="FFFFFF"/>
+            <a:srgbClr val="095292"/>
           </a:solidFill>
           <a:ln>
-            <a:solidFill>
-              <a:srgbClr val="333333"/>
-            </a:solidFill>
+            <a:noFill/>
           </a:ln>
         </p:spPr>
         <p:style>
@@ -8084,20 +7854,87 @@
       </p:sp>
       <p:sp>
         <p:nvSpPr>
-          <p:cNvPr id="11" name="Rectangle 10"/>
+          <p:cNvPr id="15" name="TextBox 14"/>
+          <p:cNvSpPr txBox="1"/>
+          <p:nvPr/>
+        </p:nvSpPr>
+        <p:spPr>
+          <a:xfrm>
+            <a:off x="594360" y="3575304"/>
+            <a:ext cx="438912" cy="438912"/>
+          </a:xfrm>
+          <a:prstGeom prst="rect">
+            <a:avLst/>
+          </a:prstGeom>
+          <a:noFill/>
+        </p:spPr>
+        <p:txBody>
+          <a:bodyPr wrap="square" anchor="ctr"/>
+          <a:lstStyle/>
+          <a:p>
+            <a:pPr algn="ctr"/>
+            <a:r>
+              <a:rPr sz="1600" b="1" i="0">
+                <a:solidFill>
+                  <a:srgbClr val="FFFFFF"/>
+                </a:solidFill>
+                <a:latin typeface="Calibri"/>
+              </a:rPr>
+              <a:t>3</a:t>
+            </a:r>
+          </a:p>
+        </p:txBody>
+      </p:sp>
+      <p:sp>
+        <p:nvSpPr>
+          <p:cNvPr id="16" name="TextBox 15"/>
+          <p:cNvSpPr txBox="1"/>
+          <p:nvPr/>
+        </p:nvSpPr>
+        <p:spPr>
+          <a:xfrm>
+            <a:off x="1188720" y="3410712"/>
+            <a:ext cx="10271455" cy="786384"/>
+          </a:xfrm>
+          <a:prstGeom prst="rect">
+            <a:avLst/>
+          </a:prstGeom>
+          <a:noFill/>
+        </p:spPr>
+        <p:txBody>
+          <a:bodyPr wrap="square" anchor="ctr"/>
+          <a:lstStyle/>
+          <a:p>
+            <a:r>
+              <a:rPr sz="1400" b="1" i="0">
+                <a:solidFill>
+                  <a:srgbClr val="095292"/>
+                </a:solidFill>
+                <a:latin typeface="Calibri"/>
+              </a:rPr>
+              <a:t>Paso 3. Construyan el banco de diez preguntas del jurado con su respuesta en maximo dos frases, incluyendo obligatoriamente que pasa si dos recepcionistas registran la misma mascota, como se mide su RNF de tiempo de respuesta y que quedo fuera del alcance.</a:t>
+            </a:r>
+          </a:p>
+        </p:txBody>
+      </p:sp>
+      <p:sp>
+        <p:nvSpPr>
+          <p:cNvPr id="17" name="Rounded Rectangle 16"/>
           <p:cNvSpPr/>
           <p:nvPr/>
         </p:nvSpPr>
         <p:spPr>
           <a:xfrm>
-            <a:off x="640080" y="2084832"/>
-            <a:ext cx="73152" cy="274320"/>
-          </a:xfrm>
-          <a:prstGeom prst="rect">
-            <a:avLst/>
+            <a:off x="457200" y="4361688"/>
+            <a:ext cx="11277295" cy="950976"/>
+          </a:xfrm>
+          <a:prstGeom prst="roundRect">
+            <a:avLst>
+              <a:gd name="adj" fmla="val 12000"/>
+            </a:avLst>
           </a:prstGeom>
           <a:solidFill>
-            <a:srgbClr val="269CCB"/>
+            <a:srgbClr val="E8F4FA"/>
           </a:solidFill>
           <a:ln>
             <a:noFill/>
@@ -8127,14 +7964,59 @@
       </p:sp>
       <p:sp>
         <p:nvSpPr>
-          <p:cNvPr id="12" name="TextBox 11"/>
+          <p:cNvPr id="18" name="Rounded Rectangle 17"/>
+          <p:cNvSpPr/>
+          <p:nvPr/>
+        </p:nvSpPr>
+        <p:spPr>
+          <a:xfrm>
+            <a:off x="594360" y="4617720"/>
+            <a:ext cx="438912" cy="438912"/>
+          </a:xfrm>
+          <a:prstGeom prst="roundRect">
+            <a:avLst>
+              <a:gd name="adj" fmla="val 12000"/>
+            </a:avLst>
+          </a:prstGeom>
+          <a:solidFill>
+            <a:srgbClr val="095292"/>
+          </a:solidFill>
+          <a:ln>
+            <a:noFill/>
+          </a:ln>
+        </p:spPr>
+        <p:style>
+          <a:lnRef idx="1">
+            <a:schemeClr val="accent1"/>
+          </a:lnRef>
+          <a:fillRef idx="3">
+            <a:schemeClr val="accent1"/>
+          </a:fillRef>
+          <a:effectRef idx="2">
+            <a:schemeClr val="accent1"/>
+          </a:effectRef>
+          <a:fontRef idx="minor">
+            <a:schemeClr val="lt1"/>
+          </a:fontRef>
+        </p:style>
+        <p:txBody>
+          <a:bodyPr rtlCol="0" anchor="ctr"/>
+          <a:lstStyle/>
+          <a:p>
+            <a:pPr algn="ctr"/>
+          </a:p>
+        </p:txBody>
+      </p:sp>
+      <p:sp>
+        <p:nvSpPr>
+          <p:cNvPr id="19" name="TextBox 18"/>
           <p:cNvSpPr txBox="1"/>
           <p:nvPr/>
         </p:nvSpPr>
         <p:spPr>
           <a:xfrm>
-            <a:off x="1097280" y="2029968"/>
-            <a:ext cx="10362895" cy="402336"/>
+            <a:off x="594360" y="4617720"/>
+            <a:ext cx="438912" cy="438912"/>
           </a:xfrm>
           <a:prstGeom prst="rect">
             <a:avLst/>
@@ -8145,28 +8027,61 @@
           <a:bodyPr wrap="square" anchor="ctr"/>
           <a:lstStyle/>
           <a:p>
-            <a:r>
-              <a:rPr sz="1500" b="0" i="0">
-                <a:solidFill>
-                  <a:srgbClr val="333333"/>
-                </a:solidFill>
-                <a:latin typeface="Calibri"/>
-              </a:rPr>
-              <a:t>De sus tres decisiones de diseño, cual podria haberse tomado al reves sin que el proyecto se cayera, y que perderia la clinica si se hubiera tomado asi.</a:t>
-            </a:r>
-          </a:p>
-        </p:txBody>
-      </p:sp>
-      <p:sp>
-        <p:nvSpPr>
-          <p:cNvPr id="13" name="Rounded Rectangle 12"/>
+            <a:pPr algn="ctr"/>
+            <a:r>
+              <a:rPr sz="1600" b="1" i="0">
+                <a:solidFill>
+                  <a:srgbClr val="FFFFFF"/>
+                </a:solidFill>
+                <a:latin typeface="Calibri"/>
+              </a:rPr>
+              <a:t>4</a:t>
+            </a:r>
+          </a:p>
+        </p:txBody>
+      </p:sp>
+      <p:sp>
+        <p:nvSpPr>
+          <p:cNvPr id="20" name="TextBox 19"/>
+          <p:cNvSpPr txBox="1"/>
+          <p:nvPr/>
+        </p:nvSpPr>
+        <p:spPr>
+          <a:xfrm>
+            <a:off x="1188720" y="4453128"/>
+            <a:ext cx="10271455" cy="786384"/>
+          </a:xfrm>
+          <a:prstGeom prst="rect">
+            <a:avLst/>
+          </a:prstGeom>
+          <a:noFill/>
+        </p:spPr>
+        <p:txBody>
+          <a:bodyPr wrap="square" anchor="ctr"/>
+          <a:lstStyle/>
+          <a:p>
+            <a:r>
+              <a:rPr sz="1400" b="1" i="0">
+                <a:solidFill>
+                  <a:srgbClr val="095292"/>
+                </a:solidFill>
+                <a:latin typeface="Calibri"/>
+              </a:rPr>
+              <a:t>Paso 4. Haga un ensayo cronometrado de pie, con el prototipo abierto, y registre el tiempo real de cada bloque; recorte lo que se paso y anote los dos puntos donde se enredo al hablar (si trabaja en equipo, donde se enredo la transicion entre un expositor y el siguiente).</a:t>
+            </a:r>
+          </a:p>
+        </p:txBody>
+      </p:sp>
+      <p:sp>
+        <p:nvSpPr>
+          <p:cNvPr id="21" name="Rounded Rectangle 20"/>
           <p:cNvSpPr/>
           <p:nvPr/>
         </p:nvSpPr>
         <p:spPr>
           <a:xfrm>
-            <a:off x="457200" y="2615184"/>
-            <a:ext cx="11277295" cy="566928"/>
+            <a:off x="457200" y="5404104"/>
+            <a:ext cx="11277295" cy="950976"/>
           </a:xfrm>
           <a:prstGeom prst="roundRect">
             <a:avLst>
@@ -8204,25 +8119,25 @@
       </p:sp>
       <p:sp>
         <p:nvSpPr>
-          <p:cNvPr id="14" name="Rectangle 13"/>
+          <p:cNvPr id="22" name="Rounded Rectangle 21"/>
           <p:cNvSpPr/>
           <p:nvPr/>
         </p:nvSpPr>
         <p:spPr>
           <a:xfrm>
-            <a:off x="640080" y="2761488"/>
-            <a:ext cx="274320" cy="274320"/>
-          </a:xfrm>
-          <a:prstGeom prst="rect">
-            <a:avLst/>
+            <a:off x="594360" y="5660136"/>
+            <a:ext cx="438912" cy="438912"/>
+          </a:xfrm>
+          <a:prstGeom prst="roundRect">
+            <a:avLst>
+              <a:gd name="adj" fmla="val 12000"/>
+            </a:avLst>
           </a:prstGeom>
           <a:solidFill>
-            <a:srgbClr val="FFFFFF"/>
+            <a:srgbClr val="095292"/>
           </a:solidFill>
           <a:ln>
-            <a:solidFill>
-              <a:srgbClr val="333333"/>
-            </a:solidFill>
+            <a:noFill/>
           </a:ln>
         </p:spPr>
         <p:style>
@@ -8249,57 +8164,47 @@
       </p:sp>
       <p:sp>
         <p:nvSpPr>
-          <p:cNvPr id="15" name="Rectangle 14"/>
-          <p:cNvSpPr/>
-          <p:nvPr/>
-        </p:nvSpPr>
-        <p:spPr>
-          <a:xfrm>
-            <a:off x="640080" y="2761488"/>
-            <a:ext cx="73152" cy="274320"/>
-          </a:xfrm>
-          <a:prstGeom prst="rect">
-            <a:avLst/>
-          </a:prstGeom>
-          <a:solidFill>
-            <a:srgbClr val="269CCB"/>
-          </a:solidFill>
-          <a:ln>
-            <a:noFill/>
-          </a:ln>
-        </p:spPr>
-        <p:style>
-          <a:lnRef idx="1">
-            <a:schemeClr val="accent1"/>
-          </a:lnRef>
-          <a:fillRef idx="3">
-            <a:schemeClr val="accent1"/>
-          </a:fillRef>
-          <a:effectRef idx="2">
-            <a:schemeClr val="accent1"/>
-          </a:effectRef>
-          <a:fontRef idx="minor">
-            <a:schemeClr val="lt1"/>
-          </a:fontRef>
-        </p:style>
-        <p:txBody>
-          <a:bodyPr rtlCol="0" anchor="ctr"/>
+          <p:cNvPr id="23" name="TextBox 22"/>
+          <p:cNvSpPr txBox="1"/>
+          <p:nvPr/>
+        </p:nvSpPr>
+        <p:spPr>
+          <a:xfrm>
+            <a:off x="594360" y="5660136"/>
+            <a:ext cx="438912" cy="438912"/>
+          </a:xfrm>
+          <a:prstGeom prst="rect">
+            <a:avLst/>
+          </a:prstGeom>
+          <a:noFill/>
+        </p:spPr>
+        <p:txBody>
+          <a:bodyPr wrap="square" anchor="ctr"/>
           <a:lstStyle/>
           <a:p>
             <a:pPr algn="ctr"/>
-          </a:p>
-        </p:txBody>
-      </p:sp>
-      <p:sp>
-        <p:nvSpPr>
-          <p:cNvPr id="16" name="TextBox 15"/>
+            <a:r>
+              <a:rPr sz="1600" b="1" i="0">
+                <a:solidFill>
+                  <a:srgbClr val="FFFFFF"/>
+                </a:solidFill>
+                <a:latin typeface="Calibri"/>
+              </a:rPr>
+              <a:t>5</a:t>
+            </a:r>
+          </a:p>
+        </p:txBody>
+      </p:sp>
+      <p:sp>
+        <p:nvSpPr>
+          <p:cNvPr id="24" name="TextBox 23"/>
           <p:cNvSpPr txBox="1"/>
           <p:nvPr/>
         </p:nvSpPr>
         <p:spPr>
           <a:xfrm>
-            <a:off x="1097280" y="2706624"/>
-            <a:ext cx="10362895" cy="402336"/>
+            <a:off x="1188720" y="5495544"/>
+            <a:ext cx="10271455" cy="786384"/>
           </a:xfrm>
           <a:prstGeom prst="rect">
             <a:avLst/>
@@ -8311,20 +8216,20 @@
           <a:lstStyle/>
           <a:p>
             <a:r>
-              <a:rPr sz="1500" b="0" i="0">
-                <a:solidFill>
-                  <a:srgbClr val="333333"/>
-                </a:solidFill>
-                <a:latin typeface="Calibri"/>
-              </a:rPr>
-              <a:t>Si el internet falla justo antes de mostrar el prototipo, que hace el equipo en los siguientes quince segundos para no perder el bloque de interfaz.</a:t>
-            </a:r>
-          </a:p>
-        </p:txBody>
-      </p:sp>
-      <p:sp>
-        <p:nvSpPr>
-          <p:cNvPr id="17" name="TextBox 16"/>
+              <a:rPr sz="1400" b="1" i="0">
+                <a:solidFill>
+                  <a:srgbClr val="095292"/>
+                </a:solidFill>
+                <a:latin typeface="Calibri"/>
+              </a:rPr>
+              <a:t>Paso 5. Consoliden el documento final armando el indice completo desde problema hasta trazabilidad, verifiquen que los nombres de las clases, los campos del diccionario y los campos de las pantallas coinciden exactamente, y corrijan al menos una inconsistencia encontrada dejando constancia de cual era.</a:t>
+            </a:r>
+          </a:p>
+        </p:txBody>
+      </p:sp>
+      <p:sp>
+        <p:nvSpPr>
+          <p:cNvPr id="25" name="TextBox 24"/>
           <p:cNvSpPr txBox="1"/>
           <p:nvPr/>
         </p:nvSpPr>
@@ -8498,21 +8403,154 @@
                 </a:solidFill>
                 <a:latin typeface="Calibri"/>
               </a:rPr>
-              <a:t>Criterios de exito / entregable</a:t>
-            </a:r>
-          </a:p>
-        </p:txBody>
-      </p:sp>
-      <p:sp>
-        <p:nvSpPr>
-          <p:cNvPr id="5" name="TextBox 4"/>
+              <a:t>Antes de entregar — autochequeo</a:t>
+            </a:r>
+          </a:p>
+        </p:txBody>
+      </p:sp>
+      <p:sp>
+        <p:nvSpPr>
+          <p:cNvPr id="5" name="Rounded Rectangle 4"/>
+          <p:cNvSpPr/>
+          <p:nvPr/>
+        </p:nvSpPr>
+        <p:spPr>
+          <a:xfrm>
+            <a:off x="457200" y="1261872"/>
+            <a:ext cx="11277295" cy="566928"/>
+          </a:xfrm>
+          <a:prstGeom prst="roundRect">
+            <a:avLst>
+              <a:gd name="adj" fmla="val 12000"/>
+            </a:avLst>
+          </a:prstGeom>
+          <a:solidFill>
+            <a:srgbClr val="F2F2F2"/>
+          </a:solidFill>
+          <a:ln>
+            <a:noFill/>
+          </a:ln>
+        </p:spPr>
+        <p:style>
+          <a:lnRef idx="1">
+            <a:schemeClr val="accent1"/>
+          </a:lnRef>
+          <a:fillRef idx="3">
+            <a:schemeClr val="accent1"/>
+          </a:fillRef>
+          <a:effectRef idx="2">
+            <a:schemeClr val="accent1"/>
+          </a:effectRef>
+          <a:fontRef idx="minor">
+            <a:schemeClr val="lt1"/>
+          </a:fontRef>
+        </p:style>
+        <p:txBody>
+          <a:bodyPr rtlCol="0" anchor="ctr"/>
+          <a:lstStyle/>
+          <a:p>
+            <a:pPr algn="ctr"/>
+          </a:p>
+        </p:txBody>
+      </p:sp>
+      <p:sp>
+        <p:nvSpPr>
+          <p:cNvPr id="6" name="Rectangle 5"/>
+          <p:cNvSpPr/>
+          <p:nvPr/>
+        </p:nvSpPr>
+        <p:spPr>
+          <a:xfrm>
+            <a:off x="640080" y="1408175"/>
+            <a:ext cx="274320" cy="274320"/>
+          </a:xfrm>
+          <a:prstGeom prst="rect">
+            <a:avLst/>
+          </a:prstGeom>
+          <a:solidFill>
+            <a:srgbClr val="FFFFFF"/>
+          </a:solidFill>
+          <a:ln>
+            <a:solidFill>
+              <a:srgbClr val="333333"/>
+            </a:solidFill>
+          </a:ln>
+        </p:spPr>
+        <p:style>
+          <a:lnRef idx="1">
+            <a:schemeClr val="accent1"/>
+          </a:lnRef>
+          <a:fillRef idx="3">
+            <a:schemeClr val="accent1"/>
+          </a:fillRef>
+          <a:effectRef idx="2">
+            <a:schemeClr val="accent1"/>
+          </a:effectRef>
+          <a:fontRef idx="minor">
+            <a:schemeClr val="lt1"/>
+          </a:fontRef>
+        </p:style>
+        <p:txBody>
+          <a:bodyPr rtlCol="0" anchor="ctr"/>
+          <a:lstStyle/>
+          <a:p>
+            <a:pPr algn="ctr"/>
+          </a:p>
+        </p:txBody>
+      </p:sp>
+      <p:sp>
+        <p:nvSpPr>
+          <p:cNvPr id="7" name="Rectangle 6"/>
+          <p:cNvSpPr/>
+          <p:nvPr/>
+        </p:nvSpPr>
+        <p:spPr>
+          <a:xfrm>
+            <a:off x="640080" y="1408175"/>
+            <a:ext cx="73152" cy="274320"/>
+          </a:xfrm>
+          <a:prstGeom prst="rect">
+            <a:avLst/>
+          </a:prstGeom>
+          <a:solidFill>
+            <a:srgbClr val="269CCB"/>
+          </a:solidFill>
+          <a:ln>
+            <a:noFill/>
+          </a:ln>
+        </p:spPr>
+        <p:style>
+          <a:lnRef idx="1">
+            <a:schemeClr val="accent1"/>
+          </a:lnRef>
+          <a:fillRef idx="3">
+            <a:schemeClr val="accent1"/>
+          </a:fillRef>
+          <a:effectRef idx="2">
+            <a:schemeClr val="accent1"/>
+          </a:effectRef>
+          <a:fontRef idx="minor">
+            <a:schemeClr val="lt1"/>
+          </a:fontRef>
+        </p:style>
+        <p:txBody>
+          <a:bodyPr rtlCol="0" anchor="ctr"/>
+          <a:lstStyle/>
+          <a:p>
+            <a:pPr algn="ctr"/>
+          </a:p>
+        </p:txBody>
+      </p:sp>
+      <p:sp>
+        <p:nvSpPr>
+          <p:cNvPr id="8" name="TextBox 7"/>
           <p:cNvSpPr txBox="1"/>
           <p:nvPr/>
         </p:nvSpPr>
         <p:spPr>
           <a:xfrm>
-            <a:off x="457200" y="1170432"/>
-            <a:ext cx="11277295" cy="5230368"/>
+            <a:off x="1097280" y="1353312"/>
+            <a:ext cx="10362895" cy="402336"/>
           </a:xfrm>
           <a:prstGeom prst="rect">
             <a:avLst/>
@@ -8520,219 +8558,354 @@
           <a:noFill/>
         </p:spPr>
         <p:txBody>
-          <a:bodyPr wrap="square">
-            <a:spAutoFit/>
-          </a:bodyPr>
-          <a:lstStyle/>
-          <a:p>
-            <a:pPr>
-              <a:spcAft>
-                <a:spcPts val="800"/>
-              </a:spcAft>
-            </a:pPr>
-            <a:r>
-              <a:rPr sz="2000" b="0" i="0">
+          <a:bodyPr wrap="square" anchor="ctr"/>
+          <a:lstStyle/>
+          <a:p>
+            <a:r>
+              <a:rPr sz="1500" b="0" i="0">
                 <a:solidFill>
                   <a:srgbClr val="333333"/>
                 </a:solidFill>
                 <a:latin typeface="Calibri"/>
               </a:rPr>
-              <a:t>–   </a:t>
-            </a:r>
-            <a:r>
-              <a:rPr sz="2000" b="1" i="0">
+              <a:t>Si el jurado le pregunta por una parte que no alcanzo a mostrar, puede responderla sin buscar ayuda (y si hay equipo autorizado, cualquier integrante puede responder por cualquier bloque).</a:t>
+            </a:r>
+          </a:p>
+        </p:txBody>
+      </p:sp>
+      <p:sp>
+        <p:nvSpPr>
+          <p:cNvPr id="9" name="Rounded Rectangle 8"/>
+          <p:cNvSpPr/>
+          <p:nvPr/>
+        </p:nvSpPr>
+        <p:spPr>
+          <a:xfrm>
+            <a:off x="457200" y="1938528"/>
+            <a:ext cx="11277295" cy="566928"/>
+          </a:xfrm>
+          <a:prstGeom prst="roundRect">
+            <a:avLst>
+              <a:gd name="adj" fmla="val 12000"/>
+            </a:avLst>
+          </a:prstGeom>
+          <a:solidFill>
+            <a:srgbClr val="F2F2F2"/>
+          </a:solidFill>
+          <a:ln>
+            <a:noFill/>
+          </a:ln>
+        </p:spPr>
+        <p:style>
+          <a:lnRef idx="1">
+            <a:schemeClr val="accent1"/>
+          </a:lnRef>
+          <a:fillRef idx="3">
+            <a:schemeClr val="accent1"/>
+          </a:fillRef>
+          <a:effectRef idx="2">
+            <a:schemeClr val="accent1"/>
+          </a:effectRef>
+          <a:fontRef idx="minor">
+            <a:schemeClr val="lt1"/>
+          </a:fontRef>
+        </p:style>
+        <p:txBody>
+          <a:bodyPr rtlCol="0" anchor="ctr"/>
+          <a:lstStyle/>
+          <a:p>
+            <a:pPr algn="ctr"/>
+          </a:p>
+        </p:txBody>
+      </p:sp>
+      <p:sp>
+        <p:nvSpPr>
+          <p:cNvPr id="10" name="Rectangle 9"/>
+          <p:cNvSpPr/>
+          <p:nvPr/>
+        </p:nvSpPr>
+        <p:spPr>
+          <a:xfrm>
+            <a:off x="640080" y="2084832"/>
+            <a:ext cx="274320" cy="274320"/>
+          </a:xfrm>
+          <a:prstGeom prst="rect">
+            <a:avLst/>
+          </a:prstGeom>
+          <a:solidFill>
+            <a:srgbClr val="FFFFFF"/>
+          </a:solidFill>
+          <a:ln>
+            <a:solidFill>
+              <a:srgbClr val="333333"/>
+            </a:solidFill>
+          </a:ln>
+        </p:spPr>
+        <p:style>
+          <a:lnRef idx="1">
+            <a:schemeClr val="accent1"/>
+          </a:lnRef>
+          <a:fillRef idx="3">
+            <a:schemeClr val="accent1"/>
+          </a:fillRef>
+          <a:effectRef idx="2">
+            <a:schemeClr val="accent1"/>
+          </a:effectRef>
+          <a:fontRef idx="minor">
+            <a:schemeClr val="lt1"/>
+          </a:fontRef>
+        </p:style>
+        <p:txBody>
+          <a:bodyPr rtlCol="0" anchor="ctr"/>
+          <a:lstStyle/>
+          <a:p>
+            <a:pPr algn="ctr"/>
+          </a:p>
+        </p:txBody>
+      </p:sp>
+      <p:sp>
+        <p:nvSpPr>
+          <p:cNvPr id="11" name="Rectangle 10"/>
+          <p:cNvSpPr/>
+          <p:nvPr/>
+        </p:nvSpPr>
+        <p:spPr>
+          <a:xfrm>
+            <a:off x="640080" y="2084832"/>
+            <a:ext cx="73152" cy="274320"/>
+          </a:xfrm>
+          <a:prstGeom prst="rect">
+            <a:avLst/>
+          </a:prstGeom>
+          <a:solidFill>
+            <a:srgbClr val="269CCB"/>
+          </a:solidFill>
+          <a:ln>
+            <a:noFill/>
+          </a:ln>
+        </p:spPr>
+        <p:style>
+          <a:lnRef idx="1">
+            <a:schemeClr val="accent1"/>
+          </a:lnRef>
+          <a:fillRef idx="3">
+            <a:schemeClr val="accent1"/>
+          </a:fillRef>
+          <a:effectRef idx="2">
+            <a:schemeClr val="accent1"/>
+          </a:effectRef>
+          <a:fontRef idx="minor">
+            <a:schemeClr val="lt1"/>
+          </a:fontRef>
+        </p:style>
+        <p:txBody>
+          <a:bodyPr rtlCol="0" anchor="ctr"/>
+          <a:lstStyle/>
+          <a:p>
+            <a:pPr algn="ctr"/>
+          </a:p>
+        </p:txBody>
+      </p:sp>
+      <p:sp>
+        <p:nvSpPr>
+          <p:cNvPr id="12" name="TextBox 11"/>
+          <p:cNvSpPr txBox="1"/>
+          <p:nvPr/>
+        </p:nvSpPr>
+        <p:spPr>
+          <a:xfrm>
+            <a:off x="1097280" y="2029968"/>
+            <a:ext cx="10362895" cy="402336"/>
+          </a:xfrm>
+          <a:prstGeom prst="rect">
+            <a:avLst/>
+          </a:prstGeom>
+          <a:noFill/>
+        </p:spPr>
+        <p:txBody>
+          <a:bodyPr wrap="square" anchor="ctr"/>
+          <a:lstStyle/>
+          <a:p>
+            <a:r>
+              <a:rPr sz="1500" b="0" i="0">
                 <a:solidFill>
                   <a:srgbClr val="333333"/>
                 </a:solidFill>
                 <a:latin typeface="Calibri"/>
               </a:rPr>
-              <a:t>Entregable:</a:t>
-            </a:r>
-            <a:r>
-              <a:rPr sz="2000" b="0" i="0">
+              <a:t>De sus tres decisiones de diseño, cual podria haberse tomado al reves sin que el proyecto se cayera, y que perderia la clinica si se hubiera tomado asi.</a:t>
+            </a:r>
+          </a:p>
+        </p:txBody>
+      </p:sp>
+      <p:sp>
+        <p:nvSpPr>
+          <p:cNvPr id="13" name="Rounded Rectangle 12"/>
+          <p:cNvSpPr/>
+          <p:nvPr/>
+        </p:nvSpPr>
+        <p:spPr>
+          <a:xfrm>
+            <a:off x="457200" y="2615184"/>
+            <a:ext cx="11277295" cy="566928"/>
+          </a:xfrm>
+          <a:prstGeom prst="roundRect">
+            <a:avLst>
+              <a:gd name="adj" fmla="val 12000"/>
+            </a:avLst>
+          </a:prstGeom>
+          <a:solidFill>
+            <a:srgbClr val="F2F2F2"/>
+          </a:solidFill>
+          <a:ln>
+            <a:noFill/>
+          </a:ln>
+        </p:spPr>
+        <p:style>
+          <a:lnRef idx="1">
+            <a:schemeClr val="accent1"/>
+          </a:lnRef>
+          <a:fillRef idx="3">
+            <a:schemeClr val="accent1"/>
+          </a:fillRef>
+          <a:effectRef idx="2">
+            <a:schemeClr val="accent1"/>
+          </a:effectRef>
+          <a:fontRef idx="minor">
+            <a:schemeClr val="lt1"/>
+          </a:fontRef>
+        </p:style>
+        <p:txBody>
+          <a:bodyPr rtlCol="0" anchor="ctr"/>
+          <a:lstStyle/>
+          <a:p>
+            <a:pPr algn="ctr"/>
+          </a:p>
+        </p:txBody>
+      </p:sp>
+      <p:sp>
+        <p:nvSpPr>
+          <p:cNvPr id="14" name="Rectangle 13"/>
+          <p:cNvSpPr/>
+          <p:nvPr/>
+        </p:nvSpPr>
+        <p:spPr>
+          <a:xfrm>
+            <a:off x="640080" y="2761488"/>
+            <a:ext cx="274320" cy="274320"/>
+          </a:xfrm>
+          <a:prstGeom prst="rect">
+            <a:avLst/>
+          </a:prstGeom>
+          <a:solidFill>
+            <a:srgbClr val="FFFFFF"/>
+          </a:solidFill>
+          <a:ln>
+            <a:solidFill>
+              <a:srgbClr val="333333"/>
+            </a:solidFill>
+          </a:ln>
+        </p:spPr>
+        <p:style>
+          <a:lnRef idx="1">
+            <a:schemeClr val="accent1"/>
+          </a:lnRef>
+          <a:fillRef idx="3">
+            <a:schemeClr val="accent1"/>
+          </a:fillRef>
+          <a:effectRef idx="2">
+            <a:schemeClr val="accent1"/>
+          </a:effectRef>
+          <a:fontRef idx="minor">
+            <a:schemeClr val="lt1"/>
+          </a:fontRef>
+        </p:style>
+        <p:txBody>
+          <a:bodyPr rtlCol="0" anchor="ctr"/>
+          <a:lstStyle/>
+          <a:p>
+            <a:pPr algn="ctr"/>
+          </a:p>
+        </p:txBody>
+      </p:sp>
+      <p:sp>
+        <p:nvSpPr>
+          <p:cNvPr id="15" name="Rectangle 14"/>
+          <p:cNvSpPr/>
+          <p:nvPr/>
+        </p:nvSpPr>
+        <p:spPr>
+          <a:xfrm>
+            <a:off x="640080" y="2761488"/>
+            <a:ext cx="73152" cy="274320"/>
+          </a:xfrm>
+          <a:prstGeom prst="rect">
+            <a:avLst/>
+          </a:prstGeom>
+          <a:solidFill>
+            <a:srgbClr val="269CCB"/>
+          </a:solidFill>
+          <a:ln>
+            <a:noFill/>
+          </a:ln>
+        </p:spPr>
+        <p:style>
+          <a:lnRef idx="1">
+            <a:schemeClr val="accent1"/>
+          </a:lnRef>
+          <a:fillRef idx="3">
+            <a:schemeClr val="accent1"/>
+          </a:fillRef>
+          <a:effectRef idx="2">
+            <a:schemeClr val="accent1"/>
+          </a:effectRef>
+          <a:fontRef idx="minor">
+            <a:schemeClr val="lt1"/>
+          </a:fontRef>
+        </p:style>
+        <p:txBody>
+          <a:bodyPr rtlCol="0" anchor="ctr"/>
+          <a:lstStyle/>
+          <a:p>
+            <a:pPr algn="ctr"/>
+          </a:p>
+        </p:txBody>
+      </p:sp>
+      <p:sp>
+        <p:nvSpPr>
+          <p:cNvPr id="16" name="TextBox 15"/>
+          <p:cNvSpPr txBox="1"/>
+          <p:nvPr/>
+        </p:nvSpPr>
+        <p:spPr>
+          <a:xfrm>
+            <a:off x="1097280" y="2706624"/>
+            <a:ext cx="10362895" cy="402336"/>
+          </a:xfrm>
+          <a:prstGeom prst="rect">
+            <a:avLst/>
+          </a:prstGeom>
+          <a:noFill/>
+        </p:spPr>
+        <p:txBody>
+          <a:bodyPr wrap="square" anchor="ctr"/>
+          <a:lstStyle/>
+          <a:p>
+            <a:r>
+              <a:rPr sz="1500" b="0" i="0">
                 <a:solidFill>
                   <a:srgbClr val="333333"/>
                 </a:solidFill>
                 <a:latin typeface="Calibri"/>
               </a:rPr>
-              <a:t> Un documento en Google Docs con el guion minuto a minuto repartido en bloques con tiempos y evidencia (con responsable nominal solo si el docente autorizo equipo), la tabla de tres decisiones de diseño defendidas y el banco de diez preguntas con su respuesta, mas el indice del documento final consolidado, subido a la plataforma del curso.</a:t>
-            </a:r>
-          </a:p>
-          <a:p>
-            <a:pPr>
-              <a:spcAft>
-                <a:spcPts val="800"/>
-              </a:spcAft>
-            </a:pPr>
-            <a:r>
-              <a:rPr sz="2000" b="0" i="0">
-                <a:solidFill>
-                  <a:srgbClr val="333333"/>
-                </a:solidFill>
-                <a:latin typeface="Calibri"/>
-              </a:rPr>
-              <a:t>–   </a:t>
-            </a:r>
-            <a:r>
-              <a:rPr sz="2000" b="1" i="0">
-                <a:solidFill>
-                  <a:srgbClr val="333333"/>
-                </a:solidFill>
-                <a:latin typeface="Calibri"/>
-              </a:rPr>
-              <a:t>Exito:</a:t>
-            </a:r>
-            <a:r>
-              <a:rPr sz="2000" b="0" i="0">
-                <a:solidFill>
-                  <a:srgbClr val="333333"/>
-                </a:solidFill>
-                <a:latin typeface="Calibri"/>
-              </a:rPr>
-              <a:t> El guion tiene las cinco secciones en el orden problema, requisitos, modelo, interfaz y decisiones, con minutos asignados que suman doce, cada bloque con su evidencia en pantalla y, si el docente autorizo equipo, todos los integrantes hablando al menos dos minutos.</a:t>
-            </a:r>
-          </a:p>
-          <a:p>
-            <a:pPr>
-              <a:spcAft>
-                <a:spcPts val="800"/>
-              </a:spcAft>
-            </a:pPr>
-            <a:r>
-              <a:rPr sz="2000" b="0" i="0">
-                <a:solidFill>
-                  <a:srgbClr val="333333"/>
-                </a:solidFill>
-                <a:latin typeface="Calibri"/>
-              </a:rPr>
-              <a:t>–   </a:t>
-            </a:r>
-            <a:r>
-              <a:rPr sz="2000" b="1" i="0">
-                <a:solidFill>
-                  <a:srgbClr val="333333"/>
-                </a:solidFill>
-                <a:latin typeface="Calibri"/>
-              </a:rPr>
-              <a:t>Exito:</a:t>
-            </a:r>
-            <a:r>
-              <a:rPr sz="2000" b="0" i="0">
-                <a:solidFill>
-                  <a:srgbClr val="333333"/>
-                </a:solidFill>
-                <a:latin typeface="Calibri"/>
-              </a:rPr>
-              <a:t> Las tres decisiones de diseño estan escritas con las cuatro columnas completas, incluida la consecuencia asumida, y ninguna se justifica por gusto o por costumbre.</a:t>
-            </a:r>
-          </a:p>
-          <a:p>
-            <a:pPr>
-              <a:spcAft>
-                <a:spcPts val="800"/>
-              </a:spcAft>
-            </a:pPr>
-            <a:r>
-              <a:rPr sz="2000" b="0" i="0">
-                <a:solidFill>
-                  <a:srgbClr val="333333"/>
-                </a:solidFill>
-                <a:latin typeface="Calibri"/>
-              </a:rPr>
-              <a:t>–   </a:t>
-            </a:r>
-            <a:r>
-              <a:rPr sz="2000" b="1" i="0">
-                <a:solidFill>
-                  <a:srgbClr val="333333"/>
-                </a:solidFill>
-                <a:latin typeface="Calibri"/>
-              </a:rPr>
-              <a:t>Exito:</a:t>
-            </a:r>
-            <a:r>
-              <a:rPr sz="2000" b="0" i="0">
-                <a:solidFill>
-                  <a:srgbClr val="333333"/>
-                </a:solidFill>
-                <a:latin typeface="Calibri"/>
-              </a:rPr>
-              <a:t> El banco tiene diez preguntas con respuesta de maximo dos frases y contempla al menos un caso de concurrencia, uno de medicion de RNF y uno de alcance excluido.</a:t>
-            </a:r>
-          </a:p>
-          <a:p>
-            <a:pPr>
-              <a:spcAft>
-                <a:spcPts val="800"/>
-              </a:spcAft>
-            </a:pPr>
-            <a:r>
-              <a:rPr sz="2000" b="0" i="0">
-                <a:solidFill>
-                  <a:srgbClr val="333333"/>
-                </a:solidFill>
-                <a:latin typeface="Calibri"/>
-              </a:rPr>
-              <a:t>–   </a:t>
-            </a:r>
-            <a:r>
-              <a:rPr sz="2000" b="1" i="0">
-                <a:solidFill>
-                  <a:srgbClr val="333333"/>
-                </a:solidFill>
-                <a:latin typeface="Calibri"/>
-              </a:rPr>
-              <a:t>Exito:</a:t>
-            </a:r>
-            <a:r>
-              <a:rPr sz="2000" b="0" i="0">
-                <a:solidFill>
-                  <a:srgbClr val="333333"/>
-                </a:solidFill>
-                <a:latin typeface="Calibri"/>
-              </a:rPr>
-              <a:t> El documento final consolidado tiene indice, version y al menos una inconsistencia entre artefactos detectada y corregida, dejando registro de cual era.</a:t>
-            </a:r>
-          </a:p>
-          <a:p>
-            <a:pPr>
-              <a:spcAft>
-                <a:spcPts val="800"/>
-              </a:spcAft>
-            </a:pPr>
-            <a:r>
-              <a:rPr sz="2000" b="0" i="0">
-                <a:solidFill>
-                  <a:srgbClr val="333333"/>
-                </a:solidFill>
-                <a:latin typeface="Calibri"/>
-              </a:rPr>
-              <a:t>–   </a:t>
-            </a:r>
-            <a:r>
-              <a:rPr sz="2000" b="1" i="0">
-                <a:solidFill>
-                  <a:srgbClr val="333333"/>
-                </a:solidFill>
-                <a:latin typeface="Calibri"/>
-              </a:rPr>
-              <a:t>Entrega en la plataforma del curso</a:t>
-            </a:r>
-            <a:r>
-              <a:rPr sz="2000" b="0" i="0">
-                <a:solidFill>
-                  <a:srgbClr val="333333"/>
-                </a:solidFill>
-                <a:latin typeface="Calibri"/>
-              </a:rPr>
-              <a:t> — en la fecha que indique el docente.</a:t>
-            </a:r>
-          </a:p>
-        </p:txBody>
-      </p:sp>
-      <p:sp>
-        <p:nvSpPr>
-          <p:cNvPr id="6" name="TextBox 5"/>
+              <a:t>Si el internet falla justo antes de mostrar el prototipo, que hace el equipo en los siguientes quince segundos para no perder el bloque de interfaz.</a:t>
+            </a:r>
+          </a:p>
+        </p:txBody>
+      </p:sp>
+      <p:sp>
+        <p:nvSpPr>
+          <p:cNvPr id="17" name="TextBox 16"/>
           <p:cNvSpPr txBox="1"/>
           <p:nvPr/>
         </p:nvSpPr>
@@ -9237,109 +9410,21 @@
                 </a:solidFill>
                 <a:latin typeface="Calibri"/>
               </a:rPr>
-              <a:t>Para el PI esta semana</a:t>
-            </a:r>
-          </a:p>
-        </p:txBody>
-      </p:sp>
-      <p:sp>
-        <p:nvSpPr>
-          <p:cNvPr id="5" name="Rounded Rectangle 4"/>
-          <p:cNvSpPr/>
-          <p:nvPr/>
-        </p:nvSpPr>
-        <p:spPr>
-          <a:xfrm>
-            <a:off x="457200" y="1261872"/>
-            <a:ext cx="11277295" cy="1051560"/>
-          </a:xfrm>
-          <a:prstGeom prst="roundRect">
-            <a:avLst>
-              <a:gd name="adj" fmla="val 12000"/>
-            </a:avLst>
-          </a:prstGeom>
-          <a:solidFill>
-            <a:srgbClr val="E8F4FA"/>
-          </a:solidFill>
-          <a:ln>
-            <a:noFill/>
-          </a:ln>
-        </p:spPr>
-        <p:style>
-          <a:lnRef idx="1">
-            <a:schemeClr val="accent1"/>
-          </a:lnRef>
-          <a:fillRef idx="3">
-            <a:schemeClr val="accent1"/>
-          </a:fillRef>
-          <a:effectRef idx="2">
-            <a:schemeClr val="accent1"/>
-          </a:effectRef>
-          <a:fontRef idx="minor">
-            <a:schemeClr val="lt1"/>
-          </a:fontRef>
-        </p:style>
-        <p:txBody>
-          <a:bodyPr rtlCol="0" anchor="ctr"/>
-          <a:lstStyle/>
-          <a:p>
-            <a:pPr algn="ctr"/>
-          </a:p>
-        </p:txBody>
-      </p:sp>
-      <p:sp>
-        <p:nvSpPr>
-          <p:cNvPr id="6" name="Rectangle 5"/>
-          <p:cNvSpPr/>
-          <p:nvPr/>
-        </p:nvSpPr>
-        <p:spPr>
-          <a:xfrm>
-            <a:off x="457200" y="1261872"/>
-            <a:ext cx="128016" cy="1051560"/>
-          </a:xfrm>
-          <a:prstGeom prst="rect">
-            <a:avLst/>
-          </a:prstGeom>
-          <a:solidFill>
-            <a:srgbClr val="269CCB"/>
-          </a:solidFill>
-          <a:ln>
-            <a:noFill/>
-          </a:ln>
-        </p:spPr>
-        <p:style>
-          <a:lnRef idx="1">
-            <a:schemeClr val="accent1"/>
-          </a:lnRef>
-          <a:fillRef idx="3">
-            <a:schemeClr val="accent1"/>
-          </a:fillRef>
-          <a:effectRef idx="2">
-            <a:schemeClr val="accent1"/>
-          </a:effectRef>
-          <a:fontRef idx="minor">
-            <a:schemeClr val="lt1"/>
-          </a:fontRef>
-        </p:style>
-        <p:txBody>
-          <a:bodyPr rtlCol="0" anchor="ctr"/>
-          <a:lstStyle/>
-          <a:p>
-            <a:pPr algn="ctr"/>
-          </a:p>
-        </p:txBody>
-      </p:sp>
-      <p:sp>
-        <p:nvSpPr>
-          <p:cNvPr id="7" name="TextBox 6"/>
+              <a:t>Criterios de exito / entregable</a:t>
+            </a:r>
+          </a:p>
+        </p:txBody>
+      </p:sp>
+      <p:sp>
+        <p:nvSpPr>
+          <p:cNvPr id="5" name="TextBox 4"/>
           <p:cNvSpPr txBox="1"/>
           <p:nvPr/>
         </p:nvSpPr>
         <p:spPr>
           <a:xfrm>
-            <a:off x="777240" y="1399031"/>
-            <a:ext cx="10774375" cy="822959"/>
+            <a:off x="457200" y="1170432"/>
+            <a:ext cx="11277295" cy="5230368"/>
           </a:xfrm>
           <a:prstGeom prst="rect">
             <a:avLst/>
@@ -9352,313 +9437,214 @@
           </a:bodyPr>
           <a:lstStyle/>
           <a:p>
-            <a:r>
-              <a:rPr sz="1200" b="1" i="0">
-                <a:solidFill>
-                  <a:srgbClr val="269CCB"/>
-                </a:solidFill>
-                <a:latin typeface="Calibri"/>
-              </a:rPr>
-              <a:t>Info</a:t>
-            </a:r>
-          </a:p>
-          <a:p>
             <a:pPr>
-              <a:spcBef>
-                <a:spcPts val="400"/>
-              </a:spcBef>
+              <a:spcAft>
+                <a:spcPts val="800"/>
+              </a:spcAft>
             </a:pPr>
             <a:r>
-              <a:rPr sz="1400" b="0" i="0">
+              <a:rPr sz="2000" b="0" i="0">
                 <a:solidFill>
                   <a:srgbClr val="333333"/>
                 </a:solidFill>
                 <a:latin typeface="Calibri"/>
               </a:rPr>
-              <a:t>Hito: Queda armado el guion cronometrado de sustentacion de VetCare y consolidado el documento final de diseño en una sola pieza coherente.</a:t>
-            </a:r>
-          </a:p>
-        </p:txBody>
-      </p:sp>
-      <p:sp>
-        <p:nvSpPr>
-          <p:cNvPr id="8" name="Rounded Rectangle 7"/>
-          <p:cNvSpPr/>
-          <p:nvPr/>
-        </p:nvSpPr>
-        <p:spPr>
-          <a:xfrm>
-            <a:off x="457200" y="2478024"/>
-            <a:ext cx="11277295" cy="1051560"/>
-          </a:xfrm>
-          <a:prstGeom prst="roundRect">
-            <a:avLst>
-              <a:gd name="adj" fmla="val 12000"/>
-            </a:avLst>
-          </a:prstGeom>
-          <a:solidFill>
-            <a:srgbClr val="FFF8E1"/>
-          </a:solidFill>
-          <a:ln>
-            <a:noFill/>
-          </a:ln>
-        </p:spPr>
-        <p:style>
-          <a:lnRef idx="1">
-            <a:schemeClr val="accent1"/>
-          </a:lnRef>
-          <a:fillRef idx="3">
-            <a:schemeClr val="accent1"/>
-          </a:fillRef>
-          <a:effectRef idx="2">
-            <a:schemeClr val="accent1"/>
-          </a:effectRef>
-          <a:fontRef idx="minor">
-            <a:schemeClr val="lt1"/>
-          </a:fontRef>
-        </p:style>
-        <p:txBody>
-          <a:bodyPr rtlCol="0" anchor="ctr"/>
-          <a:lstStyle/>
-          <a:p>
-            <a:pPr algn="ctr"/>
-          </a:p>
-        </p:txBody>
-      </p:sp>
-      <p:sp>
-        <p:nvSpPr>
-          <p:cNvPr id="9" name="Rectangle 8"/>
-          <p:cNvSpPr/>
-          <p:nvPr/>
-        </p:nvSpPr>
-        <p:spPr>
-          <a:xfrm>
-            <a:off x="457200" y="2478024"/>
-            <a:ext cx="128016" cy="1051560"/>
-          </a:xfrm>
-          <a:prstGeom prst="rect">
-            <a:avLst/>
-          </a:prstGeom>
-          <a:solidFill>
-            <a:srgbClr val="FFD000"/>
-          </a:solidFill>
-          <a:ln>
-            <a:noFill/>
-          </a:ln>
-        </p:spPr>
-        <p:style>
-          <a:lnRef idx="1">
-            <a:schemeClr val="accent1"/>
-          </a:lnRef>
-          <a:fillRef idx="3">
-            <a:schemeClr val="accent1"/>
-          </a:fillRef>
-          <a:effectRef idx="2">
-            <a:schemeClr val="accent1"/>
-          </a:effectRef>
-          <a:fontRef idx="minor">
-            <a:schemeClr val="lt1"/>
-          </a:fontRef>
-        </p:style>
-        <p:txBody>
-          <a:bodyPr rtlCol="0" anchor="ctr"/>
-          <a:lstStyle/>
-          <a:p>
-            <a:pPr algn="ctr"/>
-          </a:p>
-        </p:txBody>
-      </p:sp>
-      <p:sp>
-        <p:nvSpPr>
-          <p:cNvPr id="10" name="TextBox 9"/>
-          <p:cNvSpPr txBox="1"/>
-          <p:nvPr/>
-        </p:nvSpPr>
-        <p:spPr>
-          <a:xfrm>
-            <a:off x="777240" y="2615184"/>
-            <a:ext cx="10774375" cy="822959"/>
-          </a:xfrm>
-          <a:prstGeom prst="rect">
-            <a:avLst/>
-          </a:prstGeom>
-          <a:noFill/>
-        </p:spPr>
-        <p:txBody>
-          <a:bodyPr wrap="square">
-            <a:spAutoFit/>
-          </a:bodyPr>
-          <a:lstStyle/>
-          <a:p>
-            <a:r>
-              <a:rPr sz="1200" b="1" i="0">
-                <a:solidFill>
-                  <a:srgbClr val="FFD000"/>
-                </a:solidFill>
-                <a:latin typeface="Calibri"/>
-              </a:rPr>
-              <a:t>Aclaración</a:t>
+              <a:t>–   </a:t>
+            </a:r>
+            <a:r>
+              <a:rPr sz="2000" b="1" i="0">
+                <a:solidFill>
+                  <a:srgbClr val="333333"/>
+                </a:solidFill>
+                <a:latin typeface="Calibri"/>
+              </a:rPr>
+              <a:t>Entregable:</a:t>
+            </a:r>
+            <a:r>
+              <a:rPr sz="2000" b="0" i="0">
+                <a:solidFill>
+                  <a:srgbClr val="333333"/>
+                </a:solidFill>
+                <a:latin typeface="Calibri"/>
+              </a:rPr>
+              <a:t> Un documento en Google Docs con el guion minuto a minuto repartido en bloques con tiempos y evidencia (con responsable nominal solo si el docente autorizo equipo), la tabla de tres decisiones de diseño defendidas y el banco de diez preguntas con su respuesta, mas el indice del documento final consolidado, subido a la plataforma del curso.</a:t>
             </a:r>
           </a:p>
           <a:p>
             <a:pPr>
-              <a:spcBef>
-                <a:spcPts val="400"/>
-              </a:spcBef>
+              <a:spcAft>
+                <a:spcPts val="800"/>
+              </a:spcAft>
             </a:pPr>
             <a:r>
-              <a:rPr sz="1400" b="0" i="0">
+              <a:rPr sz="2000" b="0" i="0">
                 <a:solidFill>
                   <a:srgbClr val="333333"/>
                 </a:solidFill>
                 <a:latin typeface="Calibri"/>
               </a:rPr>
-              <a:t>Enunciado completo: Clases/Proyecto Integrador/ (VetCare).</a:t>
-            </a:r>
-          </a:p>
-        </p:txBody>
-      </p:sp>
-      <p:sp>
-        <p:nvSpPr>
-          <p:cNvPr id="11" name="Rounded Rectangle 10"/>
-          <p:cNvSpPr/>
-          <p:nvPr/>
-        </p:nvSpPr>
-        <p:spPr>
-          <a:xfrm>
-            <a:off x="457200" y="3694176"/>
-            <a:ext cx="11277295" cy="1051560"/>
-          </a:xfrm>
-          <a:prstGeom prst="roundRect">
-            <a:avLst>
-              <a:gd name="adj" fmla="val 12000"/>
-            </a:avLst>
-          </a:prstGeom>
-          <a:solidFill>
-            <a:srgbClr val="FBE4E4"/>
-          </a:solidFill>
-          <a:ln>
-            <a:noFill/>
-          </a:ln>
-        </p:spPr>
-        <p:style>
-          <a:lnRef idx="1">
-            <a:schemeClr val="accent1"/>
-          </a:lnRef>
-          <a:fillRef idx="3">
-            <a:schemeClr val="accent1"/>
-          </a:fillRef>
-          <a:effectRef idx="2">
-            <a:schemeClr val="accent1"/>
-          </a:effectRef>
-          <a:fontRef idx="minor">
-            <a:schemeClr val="lt1"/>
-          </a:fontRef>
-        </p:style>
-        <p:txBody>
-          <a:bodyPr rtlCol="0" anchor="ctr"/>
-          <a:lstStyle/>
-          <a:p>
-            <a:pPr algn="ctr"/>
-          </a:p>
-        </p:txBody>
-      </p:sp>
-      <p:sp>
-        <p:nvSpPr>
-          <p:cNvPr id="12" name="Rectangle 11"/>
-          <p:cNvSpPr/>
-          <p:nvPr/>
-        </p:nvSpPr>
-        <p:spPr>
-          <a:xfrm>
-            <a:off x="457200" y="3694176"/>
-            <a:ext cx="128016" cy="1051560"/>
-          </a:xfrm>
-          <a:prstGeom prst="rect">
-            <a:avLst/>
-          </a:prstGeom>
-          <a:solidFill>
-            <a:srgbClr val="A02030"/>
-          </a:solidFill>
-          <a:ln>
-            <a:noFill/>
-          </a:ln>
-        </p:spPr>
-        <p:style>
-          <a:lnRef idx="1">
-            <a:schemeClr val="accent1"/>
-          </a:lnRef>
-          <a:fillRef idx="3">
-            <a:schemeClr val="accent1"/>
-          </a:fillRef>
-          <a:effectRef idx="2">
-            <a:schemeClr val="accent1"/>
-          </a:effectRef>
-          <a:fontRef idx="minor">
-            <a:schemeClr val="lt1"/>
-          </a:fontRef>
-        </p:style>
-        <p:txBody>
-          <a:bodyPr rtlCol="0" anchor="ctr"/>
-          <a:lstStyle/>
-          <a:p>
-            <a:pPr algn="ctr"/>
-          </a:p>
-        </p:txBody>
-      </p:sp>
-      <p:sp>
-        <p:nvSpPr>
-          <p:cNvPr id="13" name="TextBox 12"/>
-          <p:cNvSpPr txBox="1"/>
-          <p:nvPr/>
-        </p:nvSpPr>
-        <p:spPr>
-          <a:xfrm>
-            <a:off x="777240" y="3831336"/>
-            <a:ext cx="10774375" cy="822959"/>
-          </a:xfrm>
-          <a:prstGeom prst="rect">
-            <a:avLst/>
-          </a:prstGeom>
-          <a:noFill/>
-        </p:spPr>
-        <p:txBody>
-          <a:bodyPr wrap="square">
-            <a:spAutoFit/>
-          </a:bodyPr>
-          <a:lstStyle/>
-          <a:p>
-            <a:r>
-              <a:rPr sz="1200" b="1" i="0">
-                <a:solidFill>
-                  <a:srgbClr val="A02030"/>
-                </a:solidFill>
-                <a:latin typeface="Calibri"/>
-              </a:rPr>
-              <a:t>Atención</a:t>
+              <a:t>–   </a:t>
+            </a:r>
+            <a:r>
+              <a:rPr sz="2000" b="1" i="0">
+                <a:solidFill>
+                  <a:srgbClr val="333333"/>
+                </a:solidFill>
+                <a:latin typeface="Calibri"/>
+              </a:rPr>
+              <a:t>Exito:</a:t>
+            </a:r>
+            <a:r>
+              <a:rPr sz="2000" b="0" i="0">
+                <a:solidFill>
+                  <a:srgbClr val="333333"/>
+                </a:solidFill>
+                <a:latin typeface="Calibri"/>
+              </a:rPr>
+              <a:t> El guion tiene las cinco secciones en el orden problema, requisitos, modelo, interfaz y decisiones, con minutos asignados que suman doce, cada bloque con su evidencia en pantalla y, si el docente autorizo equipo, todos los integrantes hablando al menos dos minutos.</a:t>
             </a:r>
           </a:p>
           <a:p>
             <a:pPr>
-              <a:spcBef>
-                <a:spcPts val="400"/>
-              </a:spcBef>
+              <a:spcAft>
+                <a:spcPts val="800"/>
+              </a:spcAft>
             </a:pPr>
             <a:r>
-              <a:rPr sz="1400" b="0" i="0">
+              <a:rPr sz="2000" b="0" i="0">
                 <a:solidFill>
                   <a:srgbClr val="333333"/>
                 </a:solidFill>
                 <a:latin typeface="Calibri"/>
               </a:rPr>
-              <a:t>Entrega del taller, si el docente lo asigna · en la fecha que indique el docente.</a:t>
-            </a:r>
-          </a:p>
-        </p:txBody>
-      </p:sp>
-      <p:sp>
-        <p:nvSpPr>
-          <p:cNvPr id="14" name="TextBox 13"/>
+              <a:t>–   </a:t>
+            </a:r>
+            <a:r>
+              <a:rPr sz="2000" b="1" i="0">
+                <a:solidFill>
+                  <a:srgbClr val="333333"/>
+                </a:solidFill>
+                <a:latin typeface="Calibri"/>
+              </a:rPr>
+              <a:t>Exito:</a:t>
+            </a:r>
+            <a:r>
+              <a:rPr sz="2000" b="0" i="0">
+                <a:solidFill>
+                  <a:srgbClr val="333333"/>
+                </a:solidFill>
+                <a:latin typeface="Calibri"/>
+              </a:rPr>
+              <a:t> Las tres decisiones de diseño estan escritas con las cuatro columnas completas, incluida la consecuencia asumida, y ninguna se justifica por gusto o por costumbre.</a:t>
+            </a:r>
+          </a:p>
+          <a:p>
+            <a:pPr>
+              <a:spcAft>
+                <a:spcPts val="800"/>
+              </a:spcAft>
+            </a:pPr>
+            <a:r>
+              <a:rPr sz="2000" b="0" i="0">
+                <a:solidFill>
+                  <a:srgbClr val="333333"/>
+                </a:solidFill>
+                <a:latin typeface="Calibri"/>
+              </a:rPr>
+              <a:t>–   </a:t>
+            </a:r>
+            <a:r>
+              <a:rPr sz="2000" b="1" i="0">
+                <a:solidFill>
+                  <a:srgbClr val="333333"/>
+                </a:solidFill>
+                <a:latin typeface="Calibri"/>
+              </a:rPr>
+              <a:t>Exito:</a:t>
+            </a:r>
+            <a:r>
+              <a:rPr sz="2000" b="0" i="0">
+                <a:solidFill>
+                  <a:srgbClr val="333333"/>
+                </a:solidFill>
+                <a:latin typeface="Calibri"/>
+              </a:rPr>
+              <a:t> El banco tiene diez preguntas con respuesta de maximo dos frases y contempla al menos un caso de concurrencia, uno de medicion de RNF y uno de alcance excluido.</a:t>
+            </a:r>
+          </a:p>
+          <a:p>
+            <a:pPr>
+              <a:spcAft>
+                <a:spcPts val="800"/>
+              </a:spcAft>
+            </a:pPr>
+            <a:r>
+              <a:rPr sz="2000" b="0" i="0">
+                <a:solidFill>
+                  <a:srgbClr val="333333"/>
+                </a:solidFill>
+                <a:latin typeface="Calibri"/>
+              </a:rPr>
+              <a:t>–   </a:t>
+            </a:r>
+            <a:r>
+              <a:rPr sz="2000" b="1" i="0">
+                <a:solidFill>
+                  <a:srgbClr val="333333"/>
+                </a:solidFill>
+                <a:latin typeface="Calibri"/>
+              </a:rPr>
+              <a:t>Exito:</a:t>
+            </a:r>
+            <a:r>
+              <a:rPr sz="2000" b="0" i="0">
+                <a:solidFill>
+                  <a:srgbClr val="333333"/>
+                </a:solidFill>
+                <a:latin typeface="Calibri"/>
+              </a:rPr>
+              <a:t> El documento final consolidado tiene indice, version y al menos una inconsistencia entre artefactos detectada y corregida, dejando registro de cual era.</a:t>
+            </a:r>
+          </a:p>
+          <a:p>
+            <a:pPr>
+              <a:spcAft>
+                <a:spcPts val="800"/>
+              </a:spcAft>
+            </a:pPr>
+            <a:r>
+              <a:rPr sz="2000" b="0" i="0">
+                <a:solidFill>
+                  <a:srgbClr val="333333"/>
+                </a:solidFill>
+                <a:latin typeface="Calibri"/>
+              </a:rPr>
+              <a:t>–   </a:t>
+            </a:r>
+            <a:r>
+              <a:rPr sz="2000" b="1" i="0">
+                <a:solidFill>
+                  <a:srgbClr val="333333"/>
+                </a:solidFill>
+                <a:latin typeface="Calibri"/>
+              </a:rPr>
+              <a:t>Entrega en la plataforma del curso</a:t>
+            </a:r>
+            <a:r>
+              <a:rPr sz="2000" b="0" i="0">
+                <a:solidFill>
+                  <a:srgbClr val="333333"/>
+                </a:solidFill>
+                <a:latin typeface="Calibri"/>
+              </a:rPr>
+              <a:t> — en la fecha que indique el docente.</a:t>
+            </a:r>
+          </a:p>
+        </p:txBody>
+      </p:sp>
+      <p:sp>
+        <p:nvSpPr>
+          <p:cNvPr id="6" name="TextBox 5"/>
           <p:cNvSpPr txBox="1"/>
           <p:nvPr/>
         </p:nvSpPr>
@@ -9700,6 +9686,601 @@
 </file>
 
 <file path=ppt/slides/slide21.xml><?xml version="1.0" encoding="utf-8"?>
+<p:sld xmlns:a="http://schemas.openxmlformats.org/drawingml/2006/main" xmlns:p="http://schemas.openxmlformats.org/presentationml/2006/main" xmlns:r="http://schemas.openxmlformats.org/officeDocument/2006/relationships">
+  <p:cSld>
+    <p:bg>
+      <p:bgPr>
+        <a:solidFill>
+          <a:srgbClr val="FFFFFF"/>
+        </a:solidFill>
+        <a:effectLst/>
+      </p:bgPr>
+    </p:bg>
+    <p:spTree>
+      <p:nvGrpSpPr>
+        <p:cNvPr id="1" name=""/>
+        <p:cNvGrpSpPr/>
+        <p:nvPr/>
+      </p:nvGrpSpPr>
+      <p:grpSpPr/>
+      <p:sp>
+        <p:nvSpPr>
+          <p:cNvPr id="2" name="Rectangle 1"/>
+          <p:cNvSpPr/>
+          <p:nvPr/>
+        </p:nvSpPr>
+        <p:spPr>
+          <a:xfrm>
+            <a:off x="0" y="0"/>
+            <a:ext cx="12191695" cy="960120"/>
+          </a:xfrm>
+          <a:prstGeom prst="rect">
+            <a:avLst/>
+          </a:prstGeom>
+          <a:solidFill>
+            <a:srgbClr val="095292"/>
+          </a:solidFill>
+          <a:ln>
+            <a:noFill/>
+          </a:ln>
+        </p:spPr>
+        <p:style>
+          <a:lnRef idx="1">
+            <a:schemeClr val="accent1"/>
+          </a:lnRef>
+          <a:fillRef idx="3">
+            <a:schemeClr val="accent1"/>
+          </a:fillRef>
+          <a:effectRef idx="2">
+            <a:schemeClr val="accent1"/>
+          </a:effectRef>
+          <a:fontRef idx="minor">
+            <a:schemeClr val="lt1"/>
+          </a:fontRef>
+        </p:style>
+        <p:txBody>
+          <a:bodyPr rtlCol="0" anchor="ctr"/>
+          <a:lstStyle/>
+          <a:p>
+            <a:pPr algn="ctr"/>
+          </a:p>
+        </p:txBody>
+      </p:sp>
+      <p:sp>
+        <p:nvSpPr>
+          <p:cNvPr id="3" name="Rectangle 2"/>
+          <p:cNvSpPr/>
+          <p:nvPr/>
+        </p:nvSpPr>
+        <p:spPr>
+          <a:xfrm>
+            <a:off x="0" y="960120"/>
+            <a:ext cx="12191695" cy="41148"/>
+          </a:xfrm>
+          <a:prstGeom prst="rect">
+            <a:avLst/>
+          </a:prstGeom>
+          <a:solidFill>
+            <a:srgbClr val="FFD000"/>
+          </a:solidFill>
+          <a:ln>
+            <a:noFill/>
+          </a:ln>
+        </p:spPr>
+        <p:style>
+          <a:lnRef idx="1">
+            <a:schemeClr val="accent1"/>
+          </a:lnRef>
+          <a:fillRef idx="3">
+            <a:schemeClr val="accent1"/>
+          </a:fillRef>
+          <a:effectRef idx="2">
+            <a:schemeClr val="accent1"/>
+          </a:effectRef>
+          <a:fontRef idx="minor">
+            <a:schemeClr val="lt1"/>
+          </a:fontRef>
+        </p:style>
+        <p:txBody>
+          <a:bodyPr rtlCol="0" anchor="ctr"/>
+          <a:lstStyle/>
+          <a:p>
+            <a:pPr algn="ctr"/>
+          </a:p>
+        </p:txBody>
+      </p:sp>
+      <p:sp>
+        <p:nvSpPr>
+          <p:cNvPr id="4" name="TextBox 3"/>
+          <p:cNvSpPr txBox="1"/>
+          <p:nvPr/>
+        </p:nvSpPr>
+        <p:spPr>
+          <a:xfrm>
+            <a:off x="457200" y="164592"/>
+            <a:ext cx="11277295" cy="502920"/>
+          </a:xfrm>
+          <a:prstGeom prst="rect">
+            <a:avLst/>
+          </a:prstGeom>
+          <a:noFill/>
+        </p:spPr>
+        <p:txBody>
+          <a:bodyPr wrap="square">
+            <a:spAutoFit/>
+          </a:bodyPr>
+          <a:lstStyle/>
+          <a:p>
+            <a:r>
+              <a:rPr sz="2600" b="1" i="0">
+                <a:solidFill>
+                  <a:srgbClr val="FFFFFF"/>
+                </a:solidFill>
+                <a:latin typeface="Calibri"/>
+              </a:rPr>
+              <a:t>Para el PI esta semana</a:t>
+            </a:r>
+          </a:p>
+        </p:txBody>
+      </p:sp>
+      <p:sp>
+        <p:nvSpPr>
+          <p:cNvPr id="5" name="Rounded Rectangle 4"/>
+          <p:cNvSpPr/>
+          <p:nvPr/>
+        </p:nvSpPr>
+        <p:spPr>
+          <a:xfrm>
+            <a:off x="457200" y="1261872"/>
+            <a:ext cx="11277295" cy="1051560"/>
+          </a:xfrm>
+          <a:prstGeom prst="roundRect">
+            <a:avLst>
+              <a:gd name="adj" fmla="val 12000"/>
+            </a:avLst>
+          </a:prstGeom>
+          <a:solidFill>
+            <a:srgbClr val="E8F4FA"/>
+          </a:solidFill>
+          <a:ln>
+            <a:noFill/>
+          </a:ln>
+        </p:spPr>
+        <p:style>
+          <a:lnRef idx="1">
+            <a:schemeClr val="accent1"/>
+          </a:lnRef>
+          <a:fillRef idx="3">
+            <a:schemeClr val="accent1"/>
+          </a:fillRef>
+          <a:effectRef idx="2">
+            <a:schemeClr val="accent1"/>
+          </a:effectRef>
+          <a:fontRef idx="minor">
+            <a:schemeClr val="lt1"/>
+          </a:fontRef>
+        </p:style>
+        <p:txBody>
+          <a:bodyPr rtlCol="0" anchor="ctr"/>
+          <a:lstStyle/>
+          <a:p>
+            <a:pPr algn="ctr"/>
+          </a:p>
+        </p:txBody>
+      </p:sp>
+      <p:sp>
+        <p:nvSpPr>
+          <p:cNvPr id="6" name="Rectangle 5"/>
+          <p:cNvSpPr/>
+          <p:nvPr/>
+        </p:nvSpPr>
+        <p:spPr>
+          <a:xfrm>
+            <a:off x="457200" y="1261872"/>
+            <a:ext cx="128016" cy="1051560"/>
+          </a:xfrm>
+          <a:prstGeom prst="rect">
+            <a:avLst/>
+          </a:prstGeom>
+          <a:solidFill>
+            <a:srgbClr val="269CCB"/>
+          </a:solidFill>
+          <a:ln>
+            <a:noFill/>
+          </a:ln>
+        </p:spPr>
+        <p:style>
+          <a:lnRef idx="1">
+            <a:schemeClr val="accent1"/>
+          </a:lnRef>
+          <a:fillRef idx="3">
+            <a:schemeClr val="accent1"/>
+          </a:fillRef>
+          <a:effectRef idx="2">
+            <a:schemeClr val="accent1"/>
+          </a:effectRef>
+          <a:fontRef idx="minor">
+            <a:schemeClr val="lt1"/>
+          </a:fontRef>
+        </p:style>
+        <p:txBody>
+          <a:bodyPr rtlCol="0" anchor="ctr"/>
+          <a:lstStyle/>
+          <a:p>
+            <a:pPr algn="ctr"/>
+          </a:p>
+        </p:txBody>
+      </p:sp>
+      <p:sp>
+        <p:nvSpPr>
+          <p:cNvPr id="7" name="TextBox 6"/>
+          <p:cNvSpPr txBox="1"/>
+          <p:nvPr/>
+        </p:nvSpPr>
+        <p:spPr>
+          <a:xfrm>
+            <a:off x="777240" y="1399031"/>
+            <a:ext cx="10774375" cy="822959"/>
+          </a:xfrm>
+          <a:prstGeom prst="rect">
+            <a:avLst/>
+          </a:prstGeom>
+          <a:noFill/>
+        </p:spPr>
+        <p:txBody>
+          <a:bodyPr wrap="square">
+            <a:spAutoFit/>
+          </a:bodyPr>
+          <a:lstStyle/>
+          <a:p>
+            <a:r>
+              <a:rPr sz="1200" b="1" i="0">
+                <a:solidFill>
+                  <a:srgbClr val="269CCB"/>
+                </a:solidFill>
+                <a:latin typeface="Calibri"/>
+              </a:rPr>
+              <a:t>Info</a:t>
+            </a:r>
+          </a:p>
+          <a:p>
+            <a:pPr>
+              <a:spcBef>
+                <a:spcPts val="400"/>
+              </a:spcBef>
+            </a:pPr>
+            <a:r>
+              <a:rPr sz="1400" b="0" i="0">
+                <a:solidFill>
+                  <a:srgbClr val="333333"/>
+                </a:solidFill>
+                <a:latin typeface="Calibri"/>
+              </a:rPr>
+              <a:t>Hito: Queda armado el guion cronometrado de sustentacion de VetCare y consolidado el documento final de diseño en una sola pieza coherente.</a:t>
+            </a:r>
+          </a:p>
+        </p:txBody>
+      </p:sp>
+      <p:sp>
+        <p:nvSpPr>
+          <p:cNvPr id="8" name="Rounded Rectangle 7"/>
+          <p:cNvSpPr/>
+          <p:nvPr/>
+        </p:nvSpPr>
+        <p:spPr>
+          <a:xfrm>
+            <a:off x="457200" y="2478024"/>
+            <a:ext cx="11277295" cy="1051560"/>
+          </a:xfrm>
+          <a:prstGeom prst="roundRect">
+            <a:avLst>
+              <a:gd name="adj" fmla="val 12000"/>
+            </a:avLst>
+          </a:prstGeom>
+          <a:solidFill>
+            <a:srgbClr val="FFF8E1"/>
+          </a:solidFill>
+          <a:ln>
+            <a:noFill/>
+          </a:ln>
+        </p:spPr>
+        <p:style>
+          <a:lnRef idx="1">
+            <a:schemeClr val="accent1"/>
+          </a:lnRef>
+          <a:fillRef idx="3">
+            <a:schemeClr val="accent1"/>
+          </a:fillRef>
+          <a:effectRef idx="2">
+            <a:schemeClr val="accent1"/>
+          </a:effectRef>
+          <a:fontRef idx="minor">
+            <a:schemeClr val="lt1"/>
+          </a:fontRef>
+        </p:style>
+        <p:txBody>
+          <a:bodyPr rtlCol="0" anchor="ctr"/>
+          <a:lstStyle/>
+          <a:p>
+            <a:pPr algn="ctr"/>
+          </a:p>
+        </p:txBody>
+      </p:sp>
+      <p:sp>
+        <p:nvSpPr>
+          <p:cNvPr id="9" name="Rectangle 8"/>
+          <p:cNvSpPr/>
+          <p:nvPr/>
+        </p:nvSpPr>
+        <p:spPr>
+          <a:xfrm>
+            <a:off x="457200" y="2478024"/>
+            <a:ext cx="128016" cy="1051560"/>
+          </a:xfrm>
+          <a:prstGeom prst="rect">
+            <a:avLst/>
+          </a:prstGeom>
+          <a:solidFill>
+            <a:srgbClr val="FFD000"/>
+          </a:solidFill>
+          <a:ln>
+            <a:noFill/>
+          </a:ln>
+        </p:spPr>
+        <p:style>
+          <a:lnRef idx="1">
+            <a:schemeClr val="accent1"/>
+          </a:lnRef>
+          <a:fillRef idx="3">
+            <a:schemeClr val="accent1"/>
+          </a:fillRef>
+          <a:effectRef idx="2">
+            <a:schemeClr val="accent1"/>
+          </a:effectRef>
+          <a:fontRef idx="minor">
+            <a:schemeClr val="lt1"/>
+          </a:fontRef>
+        </p:style>
+        <p:txBody>
+          <a:bodyPr rtlCol="0" anchor="ctr"/>
+          <a:lstStyle/>
+          <a:p>
+            <a:pPr algn="ctr"/>
+          </a:p>
+        </p:txBody>
+      </p:sp>
+      <p:sp>
+        <p:nvSpPr>
+          <p:cNvPr id="10" name="TextBox 9"/>
+          <p:cNvSpPr txBox="1"/>
+          <p:nvPr/>
+        </p:nvSpPr>
+        <p:spPr>
+          <a:xfrm>
+            <a:off x="777240" y="2615184"/>
+            <a:ext cx="10774375" cy="822959"/>
+          </a:xfrm>
+          <a:prstGeom prst="rect">
+            <a:avLst/>
+          </a:prstGeom>
+          <a:noFill/>
+        </p:spPr>
+        <p:txBody>
+          <a:bodyPr wrap="square">
+            <a:spAutoFit/>
+          </a:bodyPr>
+          <a:lstStyle/>
+          <a:p>
+            <a:r>
+              <a:rPr sz="1200" b="1" i="0">
+                <a:solidFill>
+                  <a:srgbClr val="FFD000"/>
+                </a:solidFill>
+                <a:latin typeface="Calibri"/>
+              </a:rPr>
+              <a:t>Aclaración</a:t>
+            </a:r>
+          </a:p>
+          <a:p>
+            <a:pPr>
+              <a:spcBef>
+                <a:spcPts val="400"/>
+              </a:spcBef>
+            </a:pPr>
+            <a:r>
+              <a:rPr sz="1400" b="0" i="0">
+                <a:solidFill>
+                  <a:srgbClr val="333333"/>
+                </a:solidFill>
+                <a:latin typeface="Calibri"/>
+              </a:rPr>
+              <a:t>Enunciado completo: Clases/Proyecto Integrador/ (VetCare).</a:t>
+            </a:r>
+          </a:p>
+        </p:txBody>
+      </p:sp>
+      <p:sp>
+        <p:nvSpPr>
+          <p:cNvPr id="11" name="Rounded Rectangle 10"/>
+          <p:cNvSpPr/>
+          <p:nvPr/>
+        </p:nvSpPr>
+        <p:spPr>
+          <a:xfrm>
+            <a:off x="457200" y="3694176"/>
+            <a:ext cx="11277295" cy="1051560"/>
+          </a:xfrm>
+          <a:prstGeom prst="roundRect">
+            <a:avLst>
+              <a:gd name="adj" fmla="val 12000"/>
+            </a:avLst>
+          </a:prstGeom>
+          <a:solidFill>
+            <a:srgbClr val="FBE4E4"/>
+          </a:solidFill>
+          <a:ln>
+            <a:noFill/>
+          </a:ln>
+        </p:spPr>
+        <p:style>
+          <a:lnRef idx="1">
+            <a:schemeClr val="accent1"/>
+          </a:lnRef>
+          <a:fillRef idx="3">
+            <a:schemeClr val="accent1"/>
+          </a:fillRef>
+          <a:effectRef idx="2">
+            <a:schemeClr val="accent1"/>
+          </a:effectRef>
+          <a:fontRef idx="minor">
+            <a:schemeClr val="lt1"/>
+          </a:fontRef>
+        </p:style>
+        <p:txBody>
+          <a:bodyPr rtlCol="0" anchor="ctr"/>
+          <a:lstStyle/>
+          <a:p>
+            <a:pPr algn="ctr"/>
+          </a:p>
+        </p:txBody>
+      </p:sp>
+      <p:sp>
+        <p:nvSpPr>
+          <p:cNvPr id="12" name="Rectangle 11"/>
+          <p:cNvSpPr/>
+          <p:nvPr/>
+        </p:nvSpPr>
+        <p:spPr>
+          <a:xfrm>
+            <a:off x="457200" y="3694176"/>
+            <a:ext cx="128016" cy="1051560"/>
+          </a:xfrm>
+          <a:prstGeom prst="rect">
+            <a:avLst/>
+          </a:prstGeom>
+          <a:solidFill>
+            <a:srgbClr val="A02030"/>
+          </a:solidFill>
+          <a:ln>
+            <a:noFill/>
+          </a:ln>
+        </p:spPr>
+        <p:style>
+          <a:lnRef idx="1">
+            <a:schemeClr val="accent1"/>
+          </a:lnRef>
+          <a:fillRef idx="3">
+            <a:schemeClr val="accent1"/>
+          </a:fillRef>
+          <a:effectRef idx="2">
+            <a:schemeClr val="accent1"/>
+          </a:effectRef>
+          <a:fontRef idx="minor">
+            <a:schemeClr val="lt1"/>
+          </a:fontRef>
+        </p:style>
+        <p:txBody>
+          <a:bodyPr rtlCol="0" anchor="ctr"/>
+          <a:lstStyle/>
+          <a:p>
+            <a:pPr algn="ctr"/>
+          </a:p>
+        </p:txBody>
+      </p:sp>
+      <p:sp>
+        <p:nvSpPr>
+          <p:cNvPr id="13" name="TextBox 12"/>
+          <p:cNvSpPr txBox="1"/>
+          <p:nvPr/>
+        </p:nvSpPr>
+        <p:spPr>
+          <a:xfrm>
+            <a:off x="777240" y="3831336"/>
+            <a:ext cx="10774375" cy="822959"/>
+          </a:xfrm>
+          <a:prstGeom prst="rect">
+            <a:avLst/>
+          </a:prstGeom>
+          <a:noFill/>
+        </p:spPr>
+        <p:txBody>
+          <a:bodyPr wrap="square">
+            <a:spAutoFit/>
+          </a:bodyPr>
+          <a:lstStyle/>
+          <a:p>
+            <a:r>
+              <a:rPr sz="1200" b="1" i="0">
+                <a:solidFill>
+                  <a:srgbClr val="A02030"/>
+                </a:solidFill>
+                <a:latin typeface="Calibri"/>
+              </a:rPr>
+              <a:t>Atención</a:t>
+            </a:r>
+          </a:p>
+          <a:p>
+            <a:pPr>
+              <a:spcBef>
+                <a:spcPts val="400"/>
+              </a:spcBef>
+            </a:pPr>
+            <a:r>
+              <a:rPr sz="1400" b="0" i="0">
+                <a:solidFill>
+                  <a:srgbClr val="333333"/>
+                </a:solidFill>
+                <a:latin typeface="Calibri"/>
+              </a:rPr>
+              <a:t>Entrega del taller, si el docente lo asigna · en la fecha que indique el docente.</a:t>
+            </a:r>
+          </a:p>
+        </p:txBody>
+      </p:sp>
+      <p:sp>
+        <p:nvSpPr>
+          <p:cNvPr id="14" name="TextBox 13"/>
+          <p:cNvSpPr txBox="1"/>
+          <p:nvPr/>
+        </p:nvSpPr>
+        <p:spPr>
+          <a:xfrm>
+            <a:off x="11185855" y="6473952"/>
+            <a:ext cx="640080" cy="274320"/>
+          </a:xfrm>
+          <a:prstGeom prst="rect">
+            <a:avLst/>
+          </a:prstGeom>
+          <a:noFill/>
+        </p:spPr>
+        <p:txBody>
+          <a:bodyPr wrap="square">
+            <a:spAutoFit/>
+          </a:bodyPr>
+          <a:lstStyle/>
+          <a:p>
+            <a:pPr algn="r"/>
+            <a:r>
+              <a:rPr sz="1100" b="0" i="0">
+                <a:solidFill>
+                  <a:srgbClr val="666666"/>
+                </a:solidFill>
+                <a:latin typeface="Calibri"/>
+              </a:rPr>
+              <a:t>21</a:t>
+            </a:r>
+          </a:p>
+        </p:txBody>
+      </p:sp>
+    </p:spTree>
+  </p:cSld>
+  <p:clrMapOvr>
+    <a:masterClrMapping/>
+  </p:clrMapOvr>
+</p:sld>
+</file>
+
+<file path=ppt/slides/slide22.xml><?xml version="1.0" encoding="utf-8"?>
 <p:sld xmlns:a="http://schemas.openxmlformats.org/drawingml/2006/main" xmlns:p="http://schemas.openxmlformats.org/presentationml/2006/main" xmlns:r="http://schemas.openxmlformats.org/officeDocument/2006/relationships">
   <p:cSld>
     <p:bg>

--- a/Seminario de Sistemas/Clases/Clase 14 - Preparacion de la sustentacion y cierre/Presentacion.pptx
+++ b/Seminario de Sistemas/Clases/Clase 14 - Preparacion de la sustentacion y cierre/Presentacion.pptx
@@ -9,24 +9,17 @@
     <p:sldId id="257" r:id="rId8"/>
     <p:sldId id="258" r:id="rId9"/>
     <p:sldId id="259" r:id="rId10"/>
-    <p:sldId id="260" r:id="rId11"/>
-    <p:sldId id="261" r:id="rId12"/>
-    <p:sldId id="262" r:id="rId13"/>
-    <p:sldId id="263" r:id="rId14"/>
-    <p:sldId id="264" r:id="rId15"/>
-    <p:sldId id="265" r:id="rId16"/>
-    <p:sldId id="266" r:id="rId17"/>
-    <p:sldId id="267" r:id="rId18"/>
-    <p:sldId id="268" r:id="rId19"/>
-    <p:sldId id="269" r:id="rId20"/>
-    <p:sldId id="270" r:id="rId21"/>
-    <p:sldId id="271" r:id="rId22"/>
-    <p:sldId id="272" r:id="rId23"/>
-    <p:sldId id="273" r:id="rId24"/>
-    <p:sldId id="274" r:id="rId25"/>
-    <p:sldId id="275" r:id="rId26"/>
-    <p:sldId id="276" r:id="rId27"/>
-    <p:sldId id="277" r:id="rId28"/>
+    <p:sldId id="260" r:id="rId12"/>
+    <p:sldId id="261" r:id="rId13"/>
+    <p:sldId id="262" r:id="rId14"/>
+    <p:sldId id="263" r:id="rId15"/>
+    <p:sldId id="264" r:id="rId16"/>
+    <p:sldId id="265" r:id="rId17"/>
+    <p:sldId id="266" r:id="rId18"/>
+    <p:sldId id="267" r:id="rId19"/>
+    <p:sldId id="268" r:id="rId20"/>
+    <p:sldId id="269" r:id="rId21"/>
+    <p:sldId id="270" r:id="rId22"/>
   </p:sldIdLst>
   <p:sldSz cx="12191695" cy="6858000" type="screen4x3"/>
   <p:notesSz cx="6858000" cy="9144000"/>
@@ -126,6 +119,648 @@
     </a:lvl9pPr>
   </p:defaultTextStyle>
 </p:presentation>
+</file>
+
+<file path=ppt/notesMasters/notesMaster1.xml><?xml version="1.0" encoding="utf-8"?>
+<p:notesMaster xmlns:a="http://schemas.openxmlformats.org/drawingml/2006/main" xmlns:p="http://schemas.openxmlformats.org/presentationml/2006/main" xmlns:r="http://schemas.openxmlformats.org/officeDocument/2006/relationships">
+  <p:cSld>
+    <p:bg>
+      <p:bgRef idx="1001">
+        <a:schemeClr val="bg1"/>
+      </p:bgRef>
+    </p:bg>
+    <p:spTree>
+      <p:nvGrpSpPr>
+        <p:cNvPr id="1" name=""/>
+        <p:cNvGrpSpPr/>
+        <p:nvPr/>
+      </p:nvGrpSpPr>
+      <p:grpSpPr>
+        <a:xfrm>
+          <a:off x="0" y="0"/>
+          <a:ext cx="0" cy="0"/>
+          <a:chOff x="0" y="0"/>
+          <a:chExt cx="0" cy="0"/>
+        </a:xfrm>
+      </p:grpSpPr>
+      <p:sp>
+        <p:nvSpPr>
+          <p:cNvPr id="2" name="Header Placeholder 1"/>
+          <p:cNvSpPr>
+            <a:spLocks noGrp="1"/>
+          </p:cNvSpPr>
+          <p:nvPr>
+            <p:ph type="hdr" sz="quarter"/>
+          </p:nvPr>
+        </p:nvSpPr>
+        <p:spPr>
+          <a:xfrm>
+            <a:off x="0" y="0"/>
+            <a:ext cx="2971800" cy="457200"/>
+          </a:xfrm>
+          <a:prstGeom prst="rect">
+            <a:avLst/>
+          </a:prstGeom>
+        </p:spPr>
+        <p:txBody>
+          <a:bodyPr vert="horz" lIns="91440" tIns="45720" rIns="91440" bIns="45720" rtlCol="0"/>
+          <a:lstStyle>
+            <a:lvl1pPr algn="l">
+              <a:defRPr sz="1200"/>
+            </a:lvl1pPr>
+          </a:lstStyle>
+          <a:p>
+            <a:endParaRPr lang="en-US"/>
+          </a:p>
+        </p:txBody>
+      </p:sp>
+      <p:sp>
+        <p:nvSpPr>
+          <p:cNvPr id="3" name="Date Placeholder 2"/>
+          <p:cNvSpPr>
+            <a:spLocks noGrp="1"/>
+          </p:cNvSpPr>
+          <p:nvPr>
+            <p:ph type="dt" idx="1"/>
+          </p:nvPr>
+        </p:nvSpPr>
+        <p:spPr>
+          <a:xfrm>
+            <a:off x="3884613" y="0"/>
+            <a:ext cx="2971800" cy="457200"/>
+          </a:xfrm>
+          <a:prstGeom prst="rect">
+            <a:avLst/>
+          </a:prstGeom>
+        </p:spPr>
+        <p:txBody>
+          <a:bodyPr vert="horz" lIns="91440" tIns="45720" rIns="91440" bIns="45720" rtlCol="0"/>
+          <a:lstStyle>
+            <a:lvl1pPr algn="r">
+              <a:defRPr sz="1200"/>
+            </a:lvl1pPr>
+          </a:lstStyle>
+          <a:p>
+            <a:fld id="{0F89C1C7-3DCD-1040-A9CF-14679D8B5DDD}" type="datetimeFigureOut">
+              <a:rPr lang="en-US" smtClean="0"/>
+              <a:t>10/17/16</a:t>
+            </a:fld>
+            <a:endParaRPr lang="en-US"/>
+          </a:p>
+        </p:txBody>
+      </p:sp>
+      <p:sp>
+        <p:nvSpPr>
+          <p:cNvPr id="4" name="Slide Image Placeholder 3"/>
+          <p:cNvSpPr>
+            <a:spLocks noGrp="1" noRot="1" noChangeAspect="1"/>
+          </p:cNvSpPr>
+          <p:nvPr>
+            <p:ph type="sldImg" idx="2"/>
+          </p:nvPr>
+        </p:nvSpPr>
+        <p:spPr>
+          <a:xfrm>
+            <a:off x="1143000" y="685800"/>
+            <a:ext cx="4572000" cy="3429000"/>
+          </a:xfrm>
+          <a:prstGeom prst="rect">
+            <a:avLst/>
+          </a:prstGeom>
+          <a:noFill/>
+          <a:ln w="12700">
+            <a:solidFill>
+              <a:prstClr val="black"/>
+            </a:solidFill>
+          </a:ln>
+        </p:spPr>
+        <p:txBody>
+          <a:bodyPr vert="horz" lIns="91440" tIns="45720" rIns="91440" bIns="45720" rtlCol="0" anchor="ctr"/>
+          <a:lstStyle/>
+          <a:p>
+            <a:endParaRPr lang="en-US"/>
+          </a:p>
+        </p:txBody>
+      </p:sp>
+      <p:sp>
+        <p:nvSpPr>
+          <p:cNvPr id="5" name="Notes Placeholder 4"/>
+          <p:cNvSpPr>
+            <a:spLocks noGrp="1"/>
+          </p:cNvSpPr>
+          <p:nvPr>
+            <p:ph type="body" sz="quarter" idx="3"/>
+          </p:nvPr>
+        </p:nvSpPr>
+        <p:spPr>
+          <a:xfrm>
+            <a:off x="685800" y="4343400"/>
+            <a:ext cx="5486400" cy="4114800"/>
+          </a:xfrm>
+          <a:prstGeom prst="rect">
+            <a:avLst/>
+          </a:prstGeom>
+        </p:spPr>
+        <p:txBody>
+          <a:bodyPr vert="horz" lIns="91440" tIns="45720" rIns="91440" bIns="45720" rtlCol="0"/>
+          <a:lstStyle/>
+          <a:p>
+            <a:pPr lvl="0"/>
+            <a:r>
+              <a:rPr lang="en-US" smtClean="0"/>
+              <a:t>Click to edit Master text styles</a:t>
+            </a:r>
+          </a:p>
+          <a:p>
+            <a:pPr lvl="1"/>
+            <a:r>
+              <a:rPr lang="en-US" smtClean="0"/>
+              <a:t>Second level</a:t>
+            </a:r>
+          </a:p>
+          <a:p>
+            <a:pPr lvl="2"/>
+            <a:r>
+              <a:rPr lang="en-US" smtClean="0"/>
+              <a:t>Third level</a:t>
+            </a:r>
+          </a:p>
+          <a:p>
+            <a:pPr lvl="3"/>
+            <a:r>
+              <a:rPr lang="en-US" smtClean="0"/>
+              <a:t>Fourth level</a:t>
+            </a:r>
+          </a:p>
+          <a:p>
+            <a:pPr lvl="4"/>
+            <a:r>
+              <a:rPr lang="en-US" smtClean="0"/>
+              <a:t>Fifth level</a:t>
+            </a:r>
+            <a:endParaRPr lang="en-US"/>
+          </a:p>
+        </p:txBody>
+      </p:sp>
+      <p:sp>
+        <p:nvSpPr>
+          <p:cNvPr id="6" name="Footer Placeholder 5"/>
+          <p:cNvSpPr>
+            <a:spLocks noGrp="1"/>
+          </p:cNvSpPr>
+          <p:nvPr>
+            <p:ph type="ftr" sz="quarter" idx="4"/>
+          </p:nvPr>
+        </p:nvSpPr>
+        <p:spPr>
+          <a:xfrm>
+            <a:off x="0" y="8685213"/>
+            <a:ext cx="2971800" cy="457200"/>
+          </a:xfrm>
+          <a:prstGeom prst="rect">
+            <a:avLst/>
+          </a:prstGeom>
+        </p:spPr>
+        <p:txBody>
+          <a:bodyPr vert="horz" lIns="91440" tIns="45720" rIns="91440" bIns="45720" rtlCol="0" anchor="b"/>
+          <a:lstStyle>
+            <a:lvl1pPr algn="l">
+              <a:defRPr sz="1200"/>
+            </a:lvl1pPr>
+          </a:lstStyle>
+          <a:p>
+            <a:endParaRPr lang="en-US"/>
+          </a:p>
+        </p:txBody>
+      </p:sp>
+      <p:sp>
+        <p:nvSpPr>
+          <p:cNvPr id="7" name="Slide Number Placeholder 6"/>
+          <p:cNvSpPr>
+            <a:spLocks noGrp="1"/>
+          </p:cNvSpPr>
+          <p:nvPr>
+            <p:ph type="sldNum" sz="quarter" idx="5"/>
+          </p:nvPr>
+        </p:nvSpPr>
+        <p:spPr>
+          <a:xfrm>
+            <a:off x="3884613" y="8685213"/>
+            <a:ext cx="2971800" cy="457200"/>
+          </a:xfrm>
+          <a:prstGeom prst="rect">
+            <a:avLst/>
+          </a:prstGeom>
+        </p:spPr>
+        <p:txBody>
+          <a:bodyPr vert="horz" lIns="91440" tIns="45720" rIns="91440" bIns="45720" rtlCol="0" anchor="b"/>
+          <a:lstStyle>
+            <a:lvl1pPr algn="r">
+              <a:defRPr sz="1200"/>
+            </a:lvl1pPr>
+          </a:lstStyle>
+          <a:p>
+            <a:fld id="{BB5E49A5-4136-284D-997B-48E1D791AD67}" type="slidenum">
+              <a:rPr lang="en-US" smtClean="0"/>
+              <a:t>‹#›</a:t>
+            </a:fld>
+            <a:endParaRPr lang="en-US"/>
+          </a:p>
+        </p:txBody>
+      </p:sp>
+    </p:spTree>
+    <p:extLst>
+      <p:ext uri="{BB962C8B-B14F-4D97-AF65-F5344CB8AC3E}">
+        <p14:creationId xmlns:p14="http://schemas.microsoft.com/office/powerpoint/2010/main" val="2623252185"/>
+      </p:ext>
+    </p:extLst>
+  </p:cSld>
+  <p:clrMap bg1="lt1" tx1="dk1" bg2="lt2" tx2="dk2" accent1="accent1" accent2="accent2" accent3="accent3" accent4="accent4" accent5="accent5" accent6="accent6" hlink="hlink" folHlink="folHlink"/>
+  <p:notesStyle>
+    <a:lvl1pPr marL="0" algn="l" defTabSz="457200" rtl="0" eaLnBrk="1" latinLnBrk="0" hangingPunct="1">
+      <a:defRPr sz="1200" kern="1200">
+        <a:solidFill>
+          <a:schemeClr val="tx1"/>
+        </a:solidFill>
+        <a:latin typeface="+mn-lt"/>
+        <a:ea typeface="+mn-ea"/>
+        <a:cs typeface="+mn-cs"/>
+      </a:defRPr>
+    </a:lvl1pPr>
+    <a:lvl2pPr marL="457200" algn="l" defTabSz="457200" rtl="0" eaLnBrk="1" latinLnBrk="0" hangingPunct="1">
+      <a:defRPr sz="1200" kern="1200">
+        <a:solidFill>
+          <a:schemeClr val="tx1"/>
+        </a:solidFill>
+        <a:latin typeface="+mn-lt"/>
+        <a:ea typeface="+mn-ea"/>
+        <a:cs typeface="+mn-cs"/>
+      </a:defRPr>
+    </a:lvl2pPr>
+    <a:lvl3pPr marL="914400" algn="l" defTabSz="457200" rtl="0" eaLnBrk="1" latinLnBrk="0" hangingPunct="1">
+      <a:defRPr sz="1200" kern="1200">
+        <a:solidFill>
+          <a:schemeClr val="tx1"/>
+        </a:solidFill>
+        <a:latin typeface="+mn-lt"/>
+        <a:ea typeface="+mn-ea"/>
+        <a:cs typeface="+mn-cs"/>
+      </a:defRPr>
+    </a:lvl3pPr>
+    <a:lvl4pPr marL="1371600" algn="l" defTabSz="457200" rtl="0" eaLnBrk="1" latinLnBrk="0" hangingPunct="1">
+      <a:defRPr sz="1200" kern="1200">
+        <a:solidFill>
+          <a:schemeClr val="tx1"/>
+        </a:solidFill>
+        <a:latin typeface="+mn-lt"/>
+        <a:ea typeface="+mn-ea"/>
+        <a:cs typeface="+mn-cs"/>
+      </a:defRPr>
+    </a:lvl4pPr>
+    <a:lvl5pPr marL="1828800" algn="l" defTabSz="457200" rtl="0" eaLnBrk="1" latinLnBrk="0" hangingPunct="1">
+      <a:defRPr sz="1200" kern="1200">
+        <a:solidFill>
+          <a:schemeClr val="tx1"/>
+        </a:solidFill>
+        <a:latin typeface="+mn-lt"/>
+        <a:ea typeface="+mn-ea"/>
+        <a:cs typeface="+mn-cs"/>
+      </a:defRPr>
+    </a:lvl5pPr>
+    <a:lvl6pPr marL="2286000" algn="l" defTabSz="457200" rtl="0" eaLnBrk="1" latinLnBrk="0" hangingPunct="1">
+      <a:defRPr sz="1200" kern="1200">
+        <a:solidFill>
+          <a:schemeClr val="tx1"/>
+        </a:solidFill>
+        <a:latin typeface="+mn-lt"/>
+        <a:ea typeface="+mn-ea"/>
+        <a:cs typeface="+mn-cs"/>
+      </a:defRPr>
+    </a:lvl6pPr>
+    <a:lvl7pPr marL="2743200" algn="l" defTabSz="457200" rtl="0" eaLnBrk="1" latinLnBrk="0" hangingPunct="1">
+      <a:defRPr sz="1200" kern="1200">
+        <a:solidFill>
+          <a:schemeClr val="tx1"/>
+        </a:solidFill>
+        <a:latin typeface="+mn-lt"/>
+        <a:ea typeface="+mn-ea"/>
+        <a:cs typeface="+mn-cs"/>
+      </a:defRPr>
+    </a:lvl7pPr>
+    <a:lvl8pPr marL="3200400" algn="l" defTabSz="457200" rtl="0" eaLnBrk="1" latinLnBrk="0" hangingPunct="1">
+      <a:defRPr sz="1200" kern="1200">
+        <a:solidFill>
+          <a:schemeClr val="tx1"/>
+        </a:solidFill>
+        <a:latin typeface="+mn-lt"/>
+        <a:ea typeface="+mn-ea"/>
+        <a:cs typeface="+mn-cs"/>
+      </a:defRPr>
+    </a:lvl8pPr>
+    <a:lvl9pPr marL="3657600" algn="l" defTabSz="457200" rtl="0" eaLnBrk="1" latinLnBrk="0" hangingPunct="1">
+      <a:defRPr sz="1200" kern="1200">
+        <a:solidFill>
+          <a:schemeClr val="tx1"/>
+        </a:solidFill>
+        <a:latin typeface="+mn-lt"/>
+        <a:ea typeface="+mn-ea"/>
+        <a:cs typeface="+mn-cs"/>
+      </a:defRPr>
+    </a:lvl9pPr>
+  </p:notesStyle>
+</p:notesMaster>
+</file>
+
+<file path=ppt/notesSlides/notesSlide1.xml><?xml version="1.0" encoding="utf-8"?>
+<p:notes xmlns:a="http://schemas.openxmlformats.org/drawingml/2006/main" xmlns:p="http://schemas.openxmlformats.org/presentationml/2006/main" xmlns:r="http://schemas.openxmlformats.org/officeDocument/2006/relationships">
+  <p:cSld>
+    <p:spTree>
+      <p:nvGrpSpPr>
+        <p:cNvPr id="1" name=""/>
+        <p:cNvGrpSpPr/>
+        <p:nvPr/>
+      </p:nvGrpSpPr>
+      <p:grpSpPr>
+        <a:xfrm>
+          <a:off x="0" y="0"/>
+          <a:ext cx="0" cy="0"/>
+          <a:chOff x="0" y="0"/>
+          <a:chExt cx="0" cy="0"/>
+        </a:xfrm>
+      </p:grpSpPr>
+      <p:sp>
+        <p:nvSpPr>
+          <p:cNvPr id="2" name="Slide Image Placeholder 1"/>
+          <p:cNvSpPr>
+            <a:spLocks noGrp="1"/>
+          </p:cNvSpPr>
+          <p:nvPr>
+            <p:ph type="sldImg" idx="2"/>
+          </p:nvPr>
+        </p:nvSpPr>
+        <p:spPr/>
+      </p:sp>
+      <p:sp>
+        <p:nvSpPr>
+          <p:cNvPr id="3" name="Notes Placeholder 2"/>
+          <p:cNvSpPr>
+            <a:spLocks noGrp="1"/>
+          </p:cNvSpPr>
+          <p:nvPr>
+            <p:ph type="body" idx="3" sz="quarter"/>
+          </p:nvPr>
+        </p:nvSpPr>
+        <p:spPr/>
+        <p:txBody>
+          <a:bodyPr/>
+          <a:lstStyle/>
+          <a:p>
+            <a:r>
+              <a:t>Por eso una sustentacion es un argumento con evidencia, no un recuento cronologico.</a:t>
+            </a:r>
+          </a:p>
+        </p:txBody>
+      </p:sp>
+      <p:sp>
+        <p:nvSpPr>
+          <p:cNvPr id="4" name="Slide Number Placeholder 3"/>
+          <p:cNvSpPr>
+            <a:spLocks noGrp="1"/>
+          </p:cNvSpPr>
+          <p:nvPr>
+            <p:ph type="sldNum" idx="5" sz="quarter"/>
+          </p:nvPr>
+        </p:nvSpPr>
+        <p:spPr/>
+      </p:sp>
+    </p:spTree>
+  </p:cSld>
+  <p:clrMapOvr>
+    <a:masterClrMapping/>
+  </p:clrMapOvr>
+</p:notes>
+</file>
+
+<file path=ppt/notesSlides/notesSlide2.xml><?xml version="1.0" encoding="utf-8"?>
+<p:notes xmlns:a="http://schemas.openxmlformats.org/drawingml/2006/main" xmlns:p="http://schemas.openxmlformats.org/presentationml/2006/main" xmlns:r="http://schemas.openxmlformats.org/officeDocument/2006/relationships">
+  <p:cSld>
+    <p:spTree>
+      <p:nvGrpSpPr>
+        <p:cNvPr id="1" name=""/>
+        <p:cNvGrpSpPr/>
+        <p:nvPr/>
+      </p:nvGrpSpPr>
+      <p:grpSpPr>
+        <a:xfrm>
+          <a:off x="0" y="0"/>
+          <a:ext cx="0" cy="0"/>
+          <a:chOff x="0" y="0"/>
+          <a:chExt cx="0" cy="0"/>
+        </a:xfrm>
+      </p:grpSpPr>
+      <p:sp>
+        <p:nvSpPr>
+          <p:cNvPr id="2" name="Slide Image Placeholder 1"/>
+          <p:cNvSpPr>
+            <a:spLocks noGrp="1"/>
+          </p:cNvSpPr>
+          <p:nvPr>
+            <p:ph type="sldImg" idx="2"/>
+          </p:nvPr>
+        </p:nvSpPr>
+        <p:spPr/>
+      </p:sp>
+      <p:sp>
+        <p:nvSpPr>
+          <p:cNvPr id="3" name="Notes Placeholder 2"/>
+          <p:cNvSpPr>
+            <a:spLocks noGrp="1"/>
+          </p:cNvSpPr>
+          <p:nvPr>
+            <p:ph type="body" idx="3" sz="quarter"/>
+          </p:nvPr>
+        </p:nvSpPr>
+        <p:spPr/>
+        <p:txBody>
+          <a:bodyPr/>
+          <a:lstStyle/>
+          <a:p>
+            <a:r>
+              <a:t>Primero el problema, porque nada de lo que sigue tiene sentido si el jurado no sabe que duele en Huellitas.</a:t>
+            </a:r>
+          </a:p>
+          <a:p/>
+          <a:p>
+            <a:r>
+              <a:t>Tercero el modelo, casos de uso y clases, porque muestra como se organiza la solucion.</a:t>
+            </a:r>
+          </a:p>
+        </p:txBody>
+      </p:sp>
+      <p:sp>
+        <p:nvSpPr>
+          <p:cNvPr id="4" name="Slide Number Placeholder 3"/>
+          <p:cNvSpPr>
+            <a:spLocks noGrp="1"/>
+          </p:cNvSpPr>
+          <p:nvPr>
+            <p:ph type="sldNum" idx="5" sz="quarter"/>
+          </p:nvPr>
+        </p:nvSpPr>
+        <p:spPr/>
+      </p:sp>
+    </p:spTree>
+  </p:cSld>
+  <p:clrMapOvr>
+    <a:masterClrMapping/>
+  </p:clrMapOvr>
+</p:notes>
+</file>
+
+<file path=ppt/notesSlides/notesSlide3.xml><?xml version="1.0" encoding="utf-8"?>
+<p:notes xmlns:a="http://schemas.openxmlformats.org/drawingml/2006/main" xmlns:p="http://schemas.openxmlformats.org/presentationml/2006/main" xmlns:r="http://schemas.openxmlformats.org/officeDocument/2006/relationships">
+  <p:cSld>
+    <p:spTree>
+      <p:nvGrpSpPr>
+        <p:cNvPr id="1" name=""/>
+        <p:cNvGrpSpPr/>
+        <p:nvPr/>
+      </p:nvGrpSpPr>
+      <p:grpSpPr>
+        <a:xfrm>
+          <a:off x="0" y="0"/>
+          <a:ext cx="0" cy="0"/>
+          <a:chOff x="0" y="0"/>
+          <a:chExt cx="0" cy="0"/>
+        </a:xfrm>
+      </p:grpSpPr>
+      <p:sp>
+        <p:nvSpPr>
+          <p:cNvPr id="2" name="Slide Image Placeholder 1"/>
+          <p:cNvSpPr>
+            <a:spLocks noGrp="1"/>
+          </p:cNvSpPr>
+          <p:nvPr>
+            <p:ph type="sldImg" idx="2"/>
+          </p:nvPr>
+        </p:nvSpPr>
+        <p:spPr/>
+      </p:sp>
+      <p:sp>
+        <p:nvSpPr>
+          <p:cNvPr id="3" name="Notes Placeholder 2"/>
+          <p:cNvSpPr>
+            <a:spLocks noGrp="1"/>
+          </p:cNvSpPr>
+          <p:nvPr>
+            <p:ph type="body" idx="3" sz="quarter"/>
+          </p:nvPr>
+        </p:nvSpPr>
+        <p:spPr/>
+        <p:txBody>
+          <a:bodyPr/>
+          <a:lstStyle/>
+          <a:p>
+            <a:r>
+              <a:t>Una decision defendida asi resiste cualquier pregunta, porque el jurado ya sabe que el equipo penso en la alternativa.</a:t>
+            </a:r>
+          </a:p>
+        </p:txBody>
+      </p:sp>
+      <p:sp>
+        <p:nvSpPr>
+          <p:cNvPr id="4" name="Slide Number Placeholder 3"/>
+          <p:cNvSpPr>
+            <a:spLocks noGrp="1"/>
+          </p:cNvSpPr>
+          <p:nvPr>
+            <p:ph type="sldNum" idx="5" sz="quarter"/>
+          </p:nvPr>
+        </p:nvSpPr>
+        <p:spPr/>
+      </p:sp>
+    </p:spTree>
+  </p:cSld>
+  <p:clrMapOvr>
+    <a:masterClrMapping/>
+  </p:clrMapOvr>
+</p:notes>
+</file>
+
+<file path=ppt/notesSlides/notesSlide4.xml><?xml version="1.0" encoding="utf-8"?>
+<p:notes xmlns:a="http://schemas.openxmlformats.org/drawingml/2006/main" xmlns:p="http://schemas.openxmlformats.org/presentationml/2006/main" xmlns:r="http://schemas.openxmlformats.org/officeDocument/2006/relationships">
+  <p:cSld>
+    <p:spTree>
+      <p:nvGrpSpPr>
+        <p:cNvPr id="1" name=""/>
+        <p:cNvGrpSpPr/>
+        <p:nvPr/>
+      </p:nvGrpSpPr>
+      <p:grpSpPr>
+        <a:xfrm>
+          <a:off x="0" y="0"/>
+          <a:ext cx="0" cy="0"/>
+          <a:chOff x="0" y="0"/>
+          <a:chExt cx="0" cy="0"/>
+        </a:xfrm>
+      </p:grpSpPr>
+      <p:sp>
+        <p:nvSpPr>
+          <p:cNvPr id="2" name="Slide Image Placeholder 1"/>
+          <p:cNvSpPr>
+            <a:spLocks noGrp="1"/>
+          </p:cNvSpPr>
+          <p:nvPr>
+            <p:ph type="sldImg" idx="2"/>
+          </p:nvPr>
+        </p:nvSpPr>
+        <p:spPr/>
+      </p:sp>
+      <p:sp>
+        <p:nvSpPr>
+          <p:cNvPr id="3" name="Notes Placeholder 2"/>
+          <p:cNvSpPr>
+            <a:spLocks noGrp="1"/>
+          </p:cNvSpPr>
+          <p:nvPr>
+            <p:ph type="body" idx="3" sz="quarter"/>
+          </p:nvPr>
+        </p:nvSpPr>
+        <p:spPr/>
+        <p:txBody>
+          <a:bodyPr/>
+          <a:lstStyle/>
+          <a:p>
+            <a:r>
+              <a:t>La respuesta correcta es reconocer el vacio y proponer como se resolveria, por ejemplo no lo modelamos, lo registramos como riesgo abierto y se resolveria agregando una validacion de unicidad por dueño mas nombre en el diccionario de datos.</a:t>
+            </a:r>
+          </a:p>
+          <a:p/>
+          <a:p>
+            <a:r>
+              <a:t>Un jurado castiga mucho mas la improvisacion detectada que la honestidad tecnica.</a:t>
+            </a:r>
+          </a:p>
+        </p:txBody>
+      </p:sp>
+      <p:sp>
+        <p:nvSpPr>
+          <p:cNvPr id="4" name="Slide Number Placeholder 3"/>
+          <p:cNvSpPr>
+            <a:spLocks noGrp="1"/>
+          </p:cNvSpPr>
+          <p:nvPr>
+            <p:ph type="sldNum" idx="5" sz="quarter"/>
+          </p:nvPr>
+        </p:nvSpPr>
+        <p:spPr/>
+      </p:sp>
+    </p:spTree>
+  </p:cSld>
+  <p:clrMapOvr>
+    <a:masterClrMapping/>
+  </p:clrMapOvr>
+</p:notes>
 </file>
 
 <file path=ppt/slideLayouts/slideLayout1.xml><?xml version="1.0" encoding="utf-8"?>
@@ -5476,13 +6111,13 @@
         <p:spPr>
           <a:xfrm>
             <a:off x="0" y="0"/>
-            <a:ext cx="12191695" cy="1170432"/>
+            <a:ext cx="12191695" cy="164592"/>
           </a:xfrm>
           <a:prstGeom prst="rect">
             <a:avLst/>
           </a:prstGeom>
           <a:solidFill>
-            <a:srgbClr val="095292"/>
+            <a:srgbClr val="269CCB"/>
           </a:solidFill>
           <a:ln>
             <a:noFill/>
@@ -5510,251 +6145,9 @@
           </a:p>
         </p:txBody>
       </p:sp>
-      <p:sp>
-        <p:nvSpPr>
-          <p:cNvPr id="3" name="Rectangle 2"/>
-          <p:cNvSpPr/>
-          <p:nvPr/>
-        </p:nvSpPr>
-        <p:spPr>
-          <a:xfrm>
-            <a:off x="0" y="1170432"/>
-            <a:ext cx="12191695" cy="41148"/>
-          </a:xfrm>
-          <a:prstGeom prst="rect">
-            <a:avLst/>
-          </a:prstGeom>
-          <a:solidFill>
-            <a:srgbClr val="FFD000"/>
-          </a:solidFill>
-          <a:ln>
-            <a:noFill/>
-          </a:ln>
-        </p:spPr>
-        <p:style>
-          <a:lnRef idx="1">
-            <a:schemeClr val="accent1"/>
-          </a:lnRef>
-          <a:fillRef idx="3">
-            <a:schemeClr val="accent1"/>
-          </a:fillRef>
-          <a:effectRef idx="2">
-            <a:schemeClr val="accent1"/>
-          </a:effectRef>
-          <a:fontRef idx="minor">
-            <a:schemeClr val="lt1"/>
-          </a:fontRef>
-        </p:style>
-        <p:txBody>
-          <a:bodyPr rtlCol="0" anchor="ctr"/>
-          <a:lstStyle/>
-          <a:p>
-            <a:pPr algn="ctr"/>
-          </a:p>
-        </p:txBody>
-      </p:sp>
-      <p:sp>
-        <p:nvSpPr>
-          <p:cNvPr id="4" name="TextBox 3"/>
-          <p:cNvSpPr txBox="1"/>
-          <p:nvPr/>
-        </p:nvSpPr>
-        <p:spPr>
-          <a:xfrm>
-            <a:off x="457200" y="164592"/>
-            <a:ext cx="11277295" cy="384048"/>
-          </a:xfrm>
-          <a:prstGeom prst="rect">
-            <a:avLst/>
-          </a:prstGeom>
-          <a:noFill/>
-        </p:spPr>
-        <p:txBody>
-          <a:bodyPr wrap="square">
-            <a:spAutoFit/>
-          </a:bodyPr>
-          <a:lstStyle/>
-          <a:p>
-            <a:r>
-              <a:rPr sz="2600" b="1" i="0">
-                <a:solidFill>
-                  <a:srgbClr val="FFFFFF"/>
-                </a:solidFill>
-                <a:latin typeface="Calibri"/>
-              </a:rPr>
-              <a:t>Herramientas de hoy</a:t>
-            </a:r>
-          </a:p>
-        </p:txBody>
-      </p:sp>
-      <p:sp>
-        <p:nvSpPr>
-          <p:cNvPr id="5" name="TextBox 4"/>
-          <p:cNvSpPr txBox="1"/>
-          <p:nvPr/>
-        </p:nvSpPr>
-        <p:spPr>
-          <a:xfrm>
-            <a:off x="457200" y="566928"/>
-            <a:ext cx="11277295" cy="411480"/>
-          </a:xfrm>
-          <a:prstGeom prst="rect">
-            <a:avLst/>
-          </a:prstGeom>
-          <a:noFill/>
-        </p:spPr>
-        <p:txBody>
-          <a:bodyPr wrap="square">
-            <a:spAutoFit/>
-          </a:bodyPr>
-          <a:lstStyle/>
-          <a:p>
-            <a:r>
-              <a:rPr sz="1400" b="0" i="0">
-                <a:solidFill>
-                  <a:srgbClr val="B8D8EE"/>
-                </a:solidFill>
-                <a:latin typeface="Calibri"/>
-              </a:rPr>
-              <a:t>Gratis · funcionan en el navegador</a:t>
-            </a:r>
-          </a:p>
-        </p:txBody>
-      </p:sp>
-      <p:sp>
-        <p:nvSpPr>
-          <p:cNvPr id="6" name="Rounded Rectangle 5"/>
-          <p:cNvSpPr/>
-          <p:nvPr/>
-        </p:nvSpPr>
-        <p:spPr>
-          <a:xfrm>
-            <a:off x="457200" y="1591056"/>
-            <a:ext cx="3624986" cy="2299716"/>
-          </a:xfrm>
-          <a:prstGeom prst="roundRect">
-            <a:avLst>
-              <a:gd name="adj" fmla="val 12000"/>
-            </a:avLst>
-          </a:prstGeom>
-          <a:solidFill>
-            <a:srgbClr val="F2F2F2"/>
-          </a:solidFill>
-          <a:ln>
-            <a:noFill/>
-          </a:ln>
-        </p:spPr>
-        <p:style>
-          <a:lnRef idx="1">
-            <a:schemeClr val="accent1"/>
-          </a:lnRef>
-          <a:fillRef idx="3">
-            <a:schemeClr val="accent1"/>
-          </a:fillRef>
-          <a:effectRef idx="2">
-            <a:schemeClr val="accent1"/>
-          </a:effectRef>
-          <a:fontRef idx="minor">
-            <a:schemeClr val="lt1"/>
-          </a:fontRef>
-        </p:style>
-        <p:txBody>
-          <a:bodyPr rtlCol="0" anchor="ctr"/>
-          <a:lstStyle/>
-          <a:p>
-            <a:pPr algn="ctr"/>
-          </a:p>
-        </p:txBody>
-      </p:sp>
-      <p:sp>
-        <p:nvSpPr>
-          <p:cNvPr id="7" name="Rectangle 6"/>
-          <p:cNvSpPr/>
-          <p:nvPr/>
-        </p:nvSpPr>
-        <p:spPr>
-          <a:xfrm>
-            <a:off x="457200" y="1591056"/>
-            <a:ext cx="3624986" cy="64008"/>
-          </a:xfrm>
-          <a:prstGeom prst="rect">
-            <a:avLst/>
-          </a:prstGeom>
-          <a:solidFill>
-            <a:srgbClr val="095292"/>
-          </a:solidFill>
-          <a:ln>
-            <a:noFill/>
-          </a:ln>
-        </p:spPr>
-        <p:style>
-          <a:lnRef idx="1">
-            <a:schemeClr val="accent1"/>
-          </a:lnRef>
-          <a:fillRef idx="3">
-            <a:schemeClr val="accent1"/>
-          </a:fillRef>
-          <a:effectRef idx="2">
-            <a:schemeClr val="accent1"/>
-          </a:effectRef>
-          <a:fontRef idx="minor">
-            <a:schemeClr val="lt1"/>
-          </a:fontRef>
-        </p:style>
-        <p:txBody>
-          <a:bodyPr rtlCol="0" anchor="ctr"/>
-          <a:lstStyle/>
-          <a:p>
-            <a:pPr algn="ctr"/>
-          </a:p>
-        </p:txBody>
-      </p:sp>
-      <p:sp>
-        <p:nvSpPr>
-          <p:cNvPr id="8" name="Rectangle 7"/>
-          <p:cNvSpPr/>
-          <p:nvPr/>
-        </p:nvSpPr>
-        <p:spPr>
-          <a:xfrm>
-            <a:off x="457200" y="1655064"/>
-            <a:ext cx="3624986" cy="27432"/>
-          </a:xfrm>
-          <a:prstGeom prst="rect">
-            <a:avLst/>
-          </a:prstGeom>
-          <a:solidFill>
-            <a:srgbClr val="FFD000"/>
-          </a:solidFill>
-          <a:ln>
-            <a:noFill/>
-          </a:ln>
-        </p:spPr>
-        <p:style>
-          <a:lnRef idx="1">
-            <a:schemeClr val="accent1"/>
-          </a:lnRef>
-          <a:fillRef idx="3">
-            <a:schemeClr val="accent1"/>
-          </a:fillRef>
-          <a:effectRef idx="2">
-            <a:schemeClr val="accent1"/>
-          </a:effectRef>
-          <a:fontRef idx="minor">
-            <a:schemeClr val="lt1"/>
-          </a:fontRef>
-        </p:style>
-        <p:txBody>
-          <a:bodyPr rtlCol="0" anchor="ctr"/>
-          <a:lstStyle/>
-          <a:p>
-            <a:pPr algn="ctr"/>
-          </a:p>
-        </p:txBody>
-      </p:sp>
       <p:pic>
         <p:nvPicPr>
-          <p:cNvPr id="9" name="Picture 8" descr="drawio.png"/>
+          <p:cNvPr id="3" name="Picture 2" descr="logo_uniajc_color.png"/>
           <p:cNvPicPr>
             <a:picLocks noChangeAspect="1"/>
           </p:cNvPicPr>
@@ -5768,8 +6161,8 @@
         </p:blipFill>
         <p:spPr>
           <a:xfrm>
-            <a:off x="1659331" y="1847087"/>
-            <a:ext cx="1220724" cy="1220724"/>
+            <a:off x="10271455" y="5998464"/>
+            <a:ext cx="1463040" cy="643233"/>
           </a:xfrm>
           <a:prstGeom prst="rect">
             <a:avLst/>
@@ -5778,14 +6171,14 @@
       </p:pic>
       <p:sp>
         <p:nvSpPr>
-          <p:cNvPr id="10" name="TextBox 9"/>
+          <p:cNvPr id="4" name="TextBox 3"/>
           <p:cNvSpPr txBox="1"/>
           <p:nvPr/>
         </p:nvSpPr>
         <p:spPr>
           <a:xfrm>
-            <a:off x="530352" y="3159251"/>
-            <a:ext cx="3478682" cy="621792"/>
+            <a:off x="457200" y="1737360"/>
+            <a:ext cx="11277295" cy="1097280"/>
           </a:xfrm>
           <a:prstGeom prst="rect">
             <a:avLst/>
@@ -5793,972 +6186,32 @@
           <a:noFill/>
         </p:spPr>
         <p:txBody>
-          <a:bodyPr wrap="square" anchor="t"/>
+          <a:bodyPr wrap="square" anchor="ctr"/>
           <a:lstStyle/>
           <a:p>
             <a:pPr algn="ctr"/>
             <a:r>
-              <a:rPr sz="1300" b="1" i="0">
+              <a:rPr sz="3400" b="1" i="0">
                 <a:solidFill>
                   <a:srgbClr val="095292"/>
                 </a:solidFill>
                 <a:latin typeface="Calibri"/>
               </a:rPr>
-              <a:t>Draw.Io</a:t>
-            </a:r>
-          </a:p>
-          <a:p>
-            <a:pPr algn="ctr">
-              <a:spcBef>
-                <a:spcPts val="200"/>
-              </a:spcBef>
-            </a:pPr>
-            <a:r>
-              <a:rPr sz="1000" b="0" i="0">
-                <a:solidFill>
-                  <a:srgbClr val="666666"/>
-                </a:solidFill>
-                <a:latin typeface="Calibri"/>
-              </a:rPr>
-              <a:t>Diagramas UML y de contexto</a:t>
-            </a:r>
-          </a:p>
-        </p:txBody>
-      </p:sp>
-      <p:sp>
-        <p:nvSpPr>
-          <p:cNvPr id="11" name="Rounded Rectangle 10"/>
-          <p:cNvSpPr/>
-          <p:nvPr/>
-        </p:nvSpPr>
-        <p:spPr>
-          <a:xfrm>
-            <a:off x="4283354" y="1591056"/>
-            <a:ext cx="3624986" cy="2299716"/>
-          </a:xfrm>
-          <a:prstGeom prst="roundRect">
-            <a:avLst>
-              <a:gd name="adj" fmla="val 12000"/>
-            </a:avLst>
-          </a:prstGeom>
-          <a:solidFill>
-            <a:srgbClr val="F2F2F2"/>
-          </a:solidFill>
-          <a:ln>
-            <a:noFill/>
-          </a:ln>
-        </p:spPr>
-        <p:style>
-          <a:lnRef idx="1">
-            <a:schemeClr val="accent1"/>
-          </a:lnRef>
-          <a:fillRef idx="3">
-            <a:schemeClr val="accent1"/>
-          </a:fillRef>
-          <a:effectRef idx="2">
-            <a:schemeClr val="accent1"/>
-          </a:effectRef>
-          <a:fontRef idx="minor">
-            <a:schemeClr val="lt1"/>
-          </a:fontRef>
-        </p:style>
-        <p:txBody>
-          <a:bodyPr rtlCol="0" anchor="ctr"/>
-          <a:lstStyle/>
-          <a:p>
-            <a:pPr algn="ctr"/>
-          </a:p>
-        </p:txBody>
-      </p:sp>
-      <p:sp>
-        <p:nvSpPr>
-          <p:cNvPr id="12" name="Rectangle 11"/>
-          <p:cNvSpPr/>
-          <p:nvPr/>
-        </p:nvSpPr>
-        <p:spPr>
-          <a:xfrm>
-            <a:off x="4283354" y="1591056"/>
-            <a:ext cx="3624986" cy="64008"/>
-          </a:xfrm>
-          <a:prstGeom prst="rect">
-            <a:avLst/>
-          </a:prstGeom>
-          <a:solidFill>
-            <a:srgbClr val="095292"/>
-          </a:solidFill>
-          <a:ln>
-            <a:noFill/>
-          </a:ln>
-        </p:spPr>
-        <p:style>
-          <a:lnRef idx="1">
-            <a:schemeClr val="accent1"/>
-          </a:lnRef>
-          <a:fillRef idx="3">
-            <a:schemeClr val="accent1"/>
-          </a:fillRef>
-          <a:effectRef idx="2">
-            <a:schemeClr val="accent1"/>
-          </a:effectRef>
-          <a:fontRef idx="minor">
-            <a:schemeClr val="lt1"/>
-          </a:fontRef>
-        </p:style>
-        <p:txBody>
-          <a:bodyPr rtlCol="0" anchor="ctr"/>
-          <a:lstStyle/>
-          <a:p>
-            <a:pPr algn="ctr"/>
-          </a:p>
-        </p:txBody>
-      </p:sp>
-      <p:sp>
-        <p:nvSpPr>
-          <p:cNvPr id="13" name="Rectangle 12"/>
-          <p:cNvSpPr/>
-          <p:nvPr/>
-        </p:nvSpPr>
-        <p:spPr>
-          <a:xfrm>
-            <a:off x="4283354" y="1655064"/>
-            <a:ext cx="3624986" cy="27432"/>
-          </a:xfrm>
-          <a:prstGeom prst="rect">
-            <a:avLst/>
-          </a:prstGeom>
-          <a:solidFill>
-            <a:srgbClr val="FFD000"/>
-          </a:solidFill>
-          <a:ln>
-            <a:noFill/>
-          </a:ln>
-        </p:spPr>
-        <p:style>
-          <a:lnRef idx="1">
-            <a:schemeClr val="accent1"/>
-          </a:lnRef>
-          <a:fillRef idx="3">
-            <a:schemeClr val="accent1"/>
-          </a:fillRef>
-          <a:effectRef idx="2">
-            <a:schemeClr val="accent1"/>
-          </a:effectRef>
-          <a:fontRef idx="minor">
-            <a:schemeClr val="lt1"/>
-          </a:fontRef>
-        </p:style>
-        <p:txBody>
-          <a:bodyPr rtlCol="0" anchor="ctr"/>
-          <a:lstStyle/>
-          <a:p>
-            <a:pPr algn="ctr"/>
-          </a:p>
-        </p:txBody>
-      </p:sp>
-      <p:pic>
-        <p:nvPicPr>
-          <p:cNvPr id="14" name="Picture 13" descr="google_docs.png"/>
-          <p:cNvPicPr>
-            <a:picLocks noChangeAspect="1"/>
-          </p:cNvPicPr>
-          <p:nvPr/>
-        </p:nvPicPr>
-        <p:blipFill>
-          <a:blip r:embed="rId3"/>
-          <a:stretch>
-            <a:fillRect/>
-          </a:stretch>
-        </p:blipFill>
-        <p:spPr>
-          <a:xfrm>
-            <a:off x="5485485" y="1847087"/>
-            <a:ext cx="1220724" cy="1220724"/>
-          </a:xfrm>
-          <a:prstGeom prst="rect">
-            <a:avLst/>
-          </a:prstGeom>
-        </p:spPr>
-      </p:pic>
-      <p:sp>
-        <p:nvSpPr>
-          <p:cNvPr id="15" name="TextBox 14"/>
+              <a:t>Clase 14 · Preparacion de la sustentacion y cierre</a:t>
+            </a:r>
+          </a:p>
+        </p:txBody>
+      </p:sp>
+      <p:sp>
+        <p:nvSpPr>
+          <p:cNvPr id="5" name="TextBox 4"/>
           <p:cNvSpPr txBox="1"/>
           <p:nvPr/>
         </p:nvSpPr>
         <p:spPr>
           <a:xfrm>
-            <a:off x="4356506" y="3159251"/>
-            <a:ext cx="3478682" cy="621792"/>
-          </a:xfrm>
-          <a:prstGeom prst="rect">
-            <a:avLst/>
-          </a:prstGeom>
-          <a:noFill/>
-        </p:spPr>
-        <p:txBody>
-          <a:bodyPr wrap="square" anchor="t"/>
-          <a:lstStyle/>
-          <a:p>
-            <a:pPr algn="ctr"/>
-            <a:r>
-              <a:rPr sz="1300" b="1" i="0">
-                <a:solidFill>
-                  <a:srgbClr val="095292"/>
-                </a:solidFill>
-                <a:latin typeface="Calibri"/>
-              </a:rPr>
-              <a:t>google docs</a:t>
-            </a:r>
-          </a:p>
-          <a:p>
-            <a:pPr algn="ctr">
-              <a:spcBef>
-                <a:spcPts val="200"/>
-              </a:spcBef>
-            </a:pPr>
-            <a:r>
-              <a:rPr sz="1000" b="0" i="0">
-                <a:solidFill>
-                  <a:srgbClr val="666666"/>
-                </a:solidFill>
-                <a:latin typeface="Calibri"/>
-              </a:rPr>
-              <a:t>Documentos del paquete de diseño</a:t>
-            </a:r>
-          </a:p>
-        </p:txBody>
-      </p:sp>
-      <p:sp>
-        <p:nvSpPr>
-          <p:cNvPr id="16" name="Rounded Rectangle 15"/>
-          <p:cNvSpPr/>
-          <p:nvPr/>
-        </p:nvSpPr>
-        <p:spPr>
-          <a:xfrm>
-            <a:off x="8109508" y="1591056"/>
-            <a:ext cx="3624986" cy="2299716"/>
-          </a:xfrm>
-          <a:prstGeom prst="roundRect">
-            <a:avLst>
-              <a:gd name="adj" fmla="val 12000"/>
-            </a:avLst>
-          </a:prstGeom>
-          <a:solidFill>
-            <a:srgbClr val="F2F2F2"/>
-          </a:solidFill>
-          <a:ln>
-            <a:noFill/>
-          </a:ln>
-        </p:spPr>
-        <p:style>
-          <a:lnRef idx="1">
-            <a:schemeClr val="accent1"/>
-          </a:lnRef>
-          <a:fillRef idx="3">
-            <a:schemeClr val="accent1"/>
-          </a:fillRef>
-          <a:effectRef idx="2">
-            <a:schemeClr val="accent1"/>
-          </a:effectRef>
-          <a:fontRef idx="minor">
-            <a:schemeClr val="lt1"/>
-          </a:fontRef>
-        </p:style>
-        <p:txBody>
-          <a:bodyPr rtlCol="0" anchor="ctr"/>
-          <a:lstStyle/>
-          <a:p>
-            <a:pPr algn="ctr"/>
-          </a:p>
-        </p:txBody>
-      </p:sp>
-      <p:sp>
-        <p:nvSpPr>
-          <p:cNvPr id="17" name="Rectangle 16"/>
-          <p:cNvSpPr/>
-          <p:nvPr/>
-        </p:nvSpPr>
-        <p:spPr>
-          <a:xfrm>
-            <a:off x="8109508" y="1591056"/>
-            <a:ext cx="3624986" cy="64008"/>
-          </a:xfrm>
-          <a:prstGeom prst="rect">
-            <a:avLst/>
-          </a:prstGeom>
-          <a:solidFill>
-            <a:srgbClr val="095292"/>
-          </a:solidFill>
-          <a:ln>
-            <a:noFill/>
-          </a:ln>
-        </p:spPr>
-        <p:style>
-          <a:lnRef idx="1">
-            <a:schemeClr val="accent1"/>
-          </a:lnRef>
-          <a:fillRef idx="3">
-            <a:schemeClr val="accent1"/>
-          </a:fillRef>
-          <a:effectRef idx="2">
-            <a:schemeClr val="accent1"/>
-          </a:effectRef>
-          <a:fontRef idx="minor">
-            <a:schemeClr val="lt1"/>
-          </a:fontRef>
-        </p:style>
-        <p:txBody>
-          <a:bodyPr rtlCol="0" anchor="ctr"/>
-          <a:lstStyle/>
-          <a:p>
-            <a:pPr algn="ctr"/>
-          </a:p>
-        </p:txBody>
-      </p:sp>
-      <p:sp>
-        <p:nvSpPr>
-          <p:cNvPr id="18" name="Rectangle 17"/>
-          <p:cNvSpPr/>
-          <p:nvPr/>
-        </p:nvSpPr>
-        <p:spPr>
-          <a:xfrm>
-            <a:off x="8109508" y="1655064"/>
-            <a:ext cx="3624986" cy="27432"/>
-          </a:xfrm>
-          <a:prstGeom prst="rect">
-            <a:avLst/>
-          </a:prstGeom>
-          <a:solidFill>
-            <a:srgbClr val="FFD000"/>
-          </a:solidFill>
-          <a:ln>
-            <a:noFill/>
-          </a:ln>
-        </p:spPr>
-        <p:style>
-          <a:lnRef idx="1">
-            <a:schemeClr val="accent1"/>
-          </a:lnRef>
-          <a:fillRef idx="3">
-            <a:schemeClr val="accent1"/>
-          </a:fillRef>
-          <a:effectRef idx="2">
-            <a:schemeClr val="accent1"/>
-          </a:effectRef>
-          <a:fontRef idx="minor">
-            <a:schemeClr val="lt1"/>
-          </a:fontRef>
-        </p:style>
-        <p:txBody>
-          <a:bodyPr rtlCol="0" anchor="ctr"/>
-          <a:lstStyle/>
-          <a:p>
-            <a:pPr algn="ctr"/>
-          </a:p>
-        </p:txBody>
-      </p:sp>
-      <p:sp>
-        <p:nvSpPr>
-          <p:cNvPr id="19" name="Rounded Rectangle 18"/>
-          <p:cNvSpPr/>
-          <p:nvPr/>
-        </p:nvSpPr>
-        <p:spPr>
-          <a:xfrm>
-            <a:off x="9311640" y="1847087"/>
-            <a:ext cx="1220724" cy="1220724"/>
-          </a:xfrm>
-          <a:prstGeom prst="roundRect">
-            <a:avLst>
-              <a:gd name="adj" fmla="val 12000"/>
-            </a:avLst>
-          </a:prstGeom>
-          <a:solidFill>
-            <a:srgbClr val="E8F4FA"/>
-          </a:solidFill>
-          <a:ln>
-            <a:noFill/>
-          </a:ln>
-        </p:spPr>
-        <p:style>
-          <a:lnRef idx="1">
-            <a:schemeClr val="accent1"/>
-          </a:lnRef>
-          <a:fillRef idx="3">
-            <a:schemeClr val="accent1"/>
-          </a:fillRef>
-          <a:effectRef idx="2">
-            <a:schemeClr val="accent1"/>
-          </a:effectRef>
-          <a:fontRef idx="minor">
-            <a:schemeClr val="lt1"/>
-          </a:fontRef>
-        </p:style>
-        <p:txBody>
-          <a:bodyPr rtlCol="0" anchor="ctr"/>
-          <a:lstStyle/>
-          <a:p>
-            <a:pPr algn="ctr"/>
-          </a:p>
-        </p:txBody>
-      </p:sp>
-      <p:sp>
-        <p:nvSpPr>
-          <p:cNvPr id="20" name="TextBox 19"/>
-          <p:cNvSpPr txBox="1"/>
-          <p:nvPr/>
-        </p:nvSpPr>
-        <p:spPr>
-          <a:xfrm>
-            <a:off x="9311640" y="1847087"/>
-            <a:ext cx="1220724" cy="1220724"/>
-          </a:xfrm>
-          <a:prstGeom prst="rect">
-            <a:avLst/>
-          </a:prstGeom>
-          <a:noFill/>
-        </p:spPr>
-        <p:txBody>
-          <a:bodyPr wrap="square" anchor="ctr"/>
-          <a:lstStyle/>
-          <a:p>
-            <a:pPr algn="ctr"/>
-            <a:r>
-              <a:rPr sz="1600" b="1" i="0">
-                <a:solidFill>
-                  <a:srgbClr val="095292"/>
-                </a:solidFill>
-                <a:latin typeface="Calibri"/>
-              </a:rPr>
-              <a:t>F</a:t>
-            </a:r>
-          </a:p>
-        </p:txBody>
-      </p:sp>
-      <p:sp>
-        <p:nvSpPr>
-          <p:cNvPr id="21" name="TextBox 20"/>
-          <p:cNvSpPr txBox="1"/>
-          <p:nvPr/>
-        </p:nvSpPr>
-        <p:spPr>
-          <a:xfrm>
-            <a:off x="8182660" y="3159251"/>
-            <a:ext cx="3478682" cy="621792"/>
-          </a:xfrm>
-          <a:prstGeom prst="rect">
-            <a:avLst/>
-          </a:prstGeom>
-          <a:noFill/>
-        </p:spPr>
-        <p:txBody>
-          <a:bodyPr wrap="square" anchor="t"/>
-          <a:lstStyle/>
-          <a:p>
-            <a:pPr algn="ctr"/>
-            <a:r>
-              <a:rPr sz="1300" b="1" i="0">
-                <a:solidFill>
-                  <a:srgbClr val="095292"/>
-                </a:solidFill>
-                <a:latin typeface="Calibri"/>
-              </a:rPr>
-              <a:t>Figma</a:t>
-            </a:r>
-          </a:p>
-          <a:p>
-            <a:pPr algn="ctr">
-              <a:spcBef>
-                <a:spcPts val="200"/>
-              </a:spcBef>
-            </a:pPr>
-            <a:r>
-              <a:rPr sz="1000" b="0" i="0">
-                <a:solidFill>
-                  <a:srgbClr val="666666"/>
-                </a:solidFill>
-                <a:latin typeface="Calibri"/>
-              </a:rPr>
-              <a:t>Wireframes y prototipo navegable</a:t>
-            </a:r>
-          </a:p>
-        </p:txBody>
-      </p:sp>
-      <p:sp>
-        <p:nvSpPr>
-          <p:cNvPr id="22" name="Rounded Rectangle 21"/>
-          <p:cNvSpPr/>
-          <p:nvPr/>
-        </p:nvSpPr>
-        <p:spPr>
-          <a:xfrm>
-            <a:off x="2370277" y="4055364"/>
-            <a:ext cx="3624986" cy="2299716"/>
-          </a:xfrm>
-          <a:prstGeom prst="roundRect">
-            <a:avLst>
-              <a:gd name="adj" fmla="val 12000"/>
-            </a:avLst>
-          </a:prstGeom>
-          <a:solidFill>
-            <a:srgbClr val="F2F2F2"/>
-          </a:solidFill>
-          <a:ln>
-            <a:noFill/>
-          </a:ln>
-        </p:spPr>
-        <p:style>
-          <a:lnRef idx="1">
-            <a:schemeClr val="accent1"/>
-          </a:lnRef>
-          <a:fillRef idx="3">
-            <a:schemeClr val="accent1"/>
-          </a:fillRef>
-          <a:effectRef idx="2">
-            <a:schemeClr val="accent1"/>
-          </a:effectRef>
-          <a:fontRef idx="minor">
-            <a:schemeClr val="lt1"/>
-          </a:fontRef>
-        </p:style>
-        <p:txBody>
-          <a:bodyPr rtlCol="0" anchor="ctr"/>
-          <a:lstStyle/>
-          <a:p>
-            <a:pPr algn="ctr"/>
-          </a:p>
-        </p:txBody>
-      </p:sp>
-      <p:sp>
-        <p:nvSpPr>
-          <p:cNvPr id="23" name="Rectangle 22"/>
-          <p:cNvSpPr/>
-          <p:nvPr/>
-        </p:nvSpPr>
-        <p:spPr>
-          <a:xfrm>
-            <a:off x="2370277" y="4055364"/>
-            <a:ext cx="3624986" cy="64008"/>
-          </a:xfrm>
-          <a:prstGeom prst="rect">
-            <a:avLst/>
-          </a:prstGeom>
-          <a:solidFill>
-            <a:srgbClr val="095292"/>
-          </a:solidFill>
-          <a:ln>
-            <a:noFill/>
-          </a:ln>
-        </p:spPr>
-        <p:style>
-          <a:lnRef idx="1">
-            <a:schemeClr val="accent1"/>
-          </a:lnRef>
-          <a:fillRef idx="3">
-            <a:schemeClr val="accent1"/>
-          </a:fillRef>
-          <a:effectRef idx="2">
-            <a:schemeClr val="accent1"/>
-          </a:effectRef>
-          <a:fontRef idx="minor">
-            <a:schemeClr val="lt1"/>
-          </a:fontRef>
-        </p:style>
-        <p:txBody>
-          <a:bodyPr rtlCol="0" anchor="ctr"/>
-          <a:lstStyle/>
-          <a:p>
-            <a:pPr algn="ctr"/>
-          </a:p>
-        </p:txBody>
-      </p:sp>
-      <p:sp>
-        <p:nvSpPr>
-          <p:cNvPr id="24" name="Rectangle 23"/>
-          <p:cNvSpPr/>
-          <p:nvPr/>
-        </p:nvSpPr>
-        <p:spPr>
-          <a:xfrm>
-            <a:off x="2370277" y="4119372"/>
-            <a:ext cx="3624986" cy="27432"/>
-          </a:xfrm>
-          <a:prstGeom prst="rect">
-            <a:avLst/>
-          </a:prstGeom>
-          <a:solidFill>
-            <a:srgbClr val="FFD000"/>
-          </a:solidFill>
-          <a:ln>
-            <a:noFill/>
-          </a:ln>
-        </p:spPr>
-        <p:style>
-          <a:lnRef idx="1">
-            <a:schemeClr val="accent1"/>
-          </a:lnRef>
-          <a:fillRef idx="3">
-            <a:schemeClr val="accent1"/>
-          </a:fillRef>
-          <a:effectRef idx="2">
-            <a:schemeClr val="accent1"/>
-          </a:effectRef>
-          <a:fontRef idx="minor">
-            <a:schemeClr val="lt1"/>
-          </a:fontRef>
-        </p:style>
-        <p:txBody>
-          <a:bodyPr rtlCol="0" anchor="ctr"/>
-          <a:lstStyle/>
-          <a:p>
-            <a:pPr algn="ctr"/>
-          </a:p>
-        </p:txBody>
-      </p:sp>
-      <p:sp>
-        <p:nvSpPr>
-          <p:cNvPr id="25" name="Rounded Rectangle 24"/>
-          <p:cNvSpPr/>
-          <p:nvPr/>
-        </p:nvSpPr>
-        <p:spPr>
-          <a:xfrm>
-            <a:off x="3572408" y="4311396"/>
-            <a:ext cx="1220724" cy="1220724"/>
-          </a:xfrm>
-          <a:prstGeom prst="roundRect">
-            <a:avLst>
-              <a:gd name="adj" fmla="val 12000"/>
-            </a:avLst>
-          </a:prstGeom>
-          <a:solidFill>
-            <a:srgbClr val="E8F4FA"/>
-          </a:solidFill>
-          <a:ln>
-            <a:noFill/>
-          </a:ln>
-        </p:spPr>
-        <p:style>
-          <a:lnRef idx="1">
-            <a:schemeClr val="accent1"/>
-          </a:lnRef>
-          <a:fillRef idx="3">
-            <a:schemeClr val="accent1"/>
-          </a:fillRef>
-          <a:effectRef idx="2">
-            <a:schemeClr val="accent1"/>
-          </a:effectRef>
-          <a:fontRef idx="minor">
-            <a:schemeClr val="lt1"/>
-          </a:fontRef>
-        </p:style>
-        <p:txBody>
-          <a:bodyPr rtlCol="0" anchor="ctr"/>
-          <a:lstStyle/>
-          <a:p>
-            <a:pPr algn="ctr"/>
-          </a:p>
-        </p:txBody>
-      </p:sp>
-      <p:sp>
-        <p:nvSpPr>
-          <p:cNvPr id="26" name="TextBox 25"/>
-          <p:cNvSpPr txBox="1"/>
-          <p:nvPr/>
-        </p:nvSpPr>
-        <p:spPr>
-          <a:xfrm>
-            <a:off x="3572408" y="4311396"/>
-            <a:ext cx="1220724" cy="1220724"/>
-          </a:xfrm>
-          <a:prstGeom prst="rect">
-            <a:avLst/>
-          </a:prstGeom>
-          <a:noFill/>
-        </p:spPr>
-        <p:txBody>
-          <a:bodyPr wrap="square" anchor="ctr"/>
-          <a:lstStyle/>
-          <a:p>
-            <a:pPr algn="ctr"/>
-            <a:r>
-              <a:rPr sz="1600" b="1" i="0">
-                <a:solidFill>
-                  <a:srgbClr val="095292"/>
-                </a:solidFill>
-                <a:latin typeface="Calibri"/>
-              </a:rPr>
-              <a:t>P</a:t>
-            </a:r>
-          </a:p>
-        </p:txBody>
-      </p:sp>
-      <p:sp>
-        <p:nvSpPr>
-          <p:cNvPr id="27" name="TextBox 26"/>
-          <p:cNvSpPr txBox="1"/>
-          <p:nvPr/>
-        </p:nvSpPr>
-        <p:spPr>
-          <a:xfrm>
-            <a:off x="2443429" y="5623560"/>
-            <a:ext cx="3478682" cy="621792"/>
-          </a:xfrm>
-          <a:prstGeom prst="rect">
-            <a:avLst/>
-          </a:prstGeom>
-          <a:noFill/>
-        </p:spPr>
-        <p:txBody>
-          <a:bodyPr wrap="square" anchor="t"/>
-          <a:lstStyle/>
-          <a:p>
-            <a:pPr algn="ctr"/>
-            <a:r>
-              <a:rPr sz="1300" b="1" i="0">
-                <a:solidFill>
-                  <a:srgbClr val="095292"/>
-                </a:solidFill>
-                <a:latin typeface="Calibri"/>
-              </a:rPr>
-              <a:t>Penpot</a:t>
-            </a:r>
-          </a:p>
-          <a:p>
-            <a:pPr algn="ctr">
-              <a:spcBef>
-                <a:spcPts val="200"/>
-              </a:spcBef>
-            </a:pPr>
-            <a:r>
-              <a:rPr sz="1000" b="0" i="0">
-                <a:solidFill>
-                  <a:srgbClr val="666666"/>
-                </a:solidFill>
-                <a:latin typeface="Calibri"/>
-              </a:rPr>
-              <a:t>Alternativa libre a Figma</a:t>
-            </a:r>
-          </a:p>
-        </p:txBody>
-      </p:sp>
-      <p:sp>
-        <p:nvSpPr>
-          <p:cNvPr id="28" name="Rounded Rectangle 27"/>
-          <p:cNvSpPr/>
-          <p:nvPr/>
-        </p:nvSpPr>
-        <p:spPr>
-          <a:xfrm>
-            <a:off x="6196431" y="4055364"/>
-            <a:ext cx="3624986" cy="2299716"/>
-          </a:xfrm>
-          <a:prstGeom prst="roundRect">
-            <a:avLst>
-              <a:gd name="adj" fmla="val 12000"/>
-            </a:avLst>
-          </a:prstGeom>
-          <a:solidFill>
-            <a:srgbClr val="F2F2F2"/>
-          </a:solidFill>
-          <a:ln>
-            <a:noFill/>
-          </a:ln>
-        </p:spPr>
-        <p:style>
-          <a:lnRef idx="1">
-            <a:schemeClr val="accent1"/>
-          </a:lnRef>
-          <a:fillRef idx="3">
-            <a:schemeClr val="accent1"/>
-          </a:fillRef>
-          <a:effectRef idx="2">
-            <a:schemeClr val="accent1"/>
-          </a:effectRef>
-          <a:fontRef idx="minor">
-            <a:schemeClr val="lt1"/>
-          </a:fontRef>
-        </p:style>
-        <p:txBody>
-          <a:bodyPr rtlCol="0" anchor="ctr"/>
-          <a:lstStyle/>
-          <a:p>
-            <a:pPr algn="ctr"/>
-          </a:p>
-        </p:txBody>
-      </p:sp>
-      <p:sp>
-        <p:nvSpPr>
-          <p:cNvPr id="29" name="Rectangle 28"/>
-          <p:cNvSpPr/>
-          <p:nvPr/>
-        </p:nvSpPr>
-        <p:spPr>
-          <a:xfrm>
-            <a:off x="6196431" y="4055364"/>
-            <a:ext cx="3624986" cy="64008"/>
-          </a:xfrm>
-          <a:prstGeom prst="rect">
-            <a:avLst/>
-          </a:prstGeom>
-          <a:solidFill>
-            <a:srgbClr val="095292"/>
-          </a:solidFill>
-          <a:ln>
-            <a:noFill/>
-          </a:ln>
-        </p:spPr>
-        <p:style>
-          <a:lnRef idx="1">
-            <a:schemeClr val="accent1"/>
-          </a:lnRef>
-          <a:fillRef idx="3">
-            <a:schemeClr val="accent1"/>
-          </a:fillRef>
-          <a:effectRef idx="2">
-            <a:schemeClr val="accent1"/>
-          </a:effectRef>
-          <a:fontRef idx="minor">
-            <a:schemeClr val="lt1"/>
-          </a:fontRef>
-        </p:style>
-        <p:txBody>
-          <a:bodyPr rtlCol="0" anchor="ctr"/>
-          <a:lstStyle/>
-          <a:p>
-            <a:pPr algn="ctr"/>
-          </a:p>
-        </p:txBody>
-      </p:sp>
-      <p:sp>
-        <p:nvSpPr>
-          <p:cNvPr id="30" name="Rectangle 29"/>
-          <p:cNvSpPr/>
-          <p:nvPr/>
-        </p:nvSpPr>
-        <p:spPr>
-          <a:xfrm>
-            <a:off x="6196431" y="4119372"/>
-            <a:ext cx="3624986" cy="27432"/>
-          </a:xfrm>
-          <a:prstGeom prst="rect">
-            <a:avLst/>
-          </a:prstGeom>
-          <a:solidFill>
-            <a:srgbClr val="FFD000"/>
-          </a:solidFill>
-          <a:ln>
-            <a:noFill/>
-          </a:ln>
-        </p:spPr>
-        <p:style>
-          <a:lnRef idx="1">
-            <a:schemeClr val="accent1"/>
-          </a:lnRef>
-          <a:fillRef idx="3">
-            <a:schemeClr val="accent1"/>
-          </a:fillRef>
-          <a:effectRef idx="2">
-            <a:schemeClr val="accent1"/>
-          </a:effectRef>
-          <a:fontRef idx="minor">
-            <a:schemeClr val="lt1"/>
-          </a:fontRef>
-        </p:style>
-        <p:txBody>
-          <a:bodyPr rtlCol="0" anchor="ctr"/>
-          <a:lstStyle/>
-          <a:p>
-            <a:pPr algn="ctr"/>
-          </a:p>
-        </p:txBody>
-      </p:sp>
-      <p:pic>
-        <p:nvPicPr>
-          <p:cNvPr id="31" name="Picture 30" descr="examlab.png"/>
-          <p:cNvPicPr>
-            <a:picLocks noChangeAspect="1"/>
-          </p:cNvPicPr>
-          <p:nvPr/>
-        </p:nvPicPr>
-        <p:blipFill>
-          <a:blip r:embed="rId4"/>
-          <a:stretch>
-            <a:fillRect/>
-          </a:stretch>
-        </p:blipFill>
-        <p:spPr>
-          <a:xfrm>
-            <a:off x="7398562" y="4311396"/>
-            <a:ext cx="1220724" cy="1220724"/>
-          </a:xfrm>
-          <a:prstGeom prst="rect">
-            <a:avLst/>
-          </a:prstGeom>
-        </p:spPr>
-      </p:pic>
-      <p:sp>
-        <p:nvSpPr>
-          <p:cNvPr id="32" name="TextBox 31"/>
-          <p:cNvSpPr txBox="1"/>
-          <p:nvPr/>
-        </p:nvSpPr>
-        <p:spPr>
-          <a:xfrm>
-            <a:off x="6269583" y="5623560"/>
-            <a:ext cx="3478682" cy="621792"/>
-          </a:xfrm>
-          <a:prstGeom prst="rect">
-            <a:avLst/>
-          </a:prstGeom>
-          <a:noFill/>
-        </p:spPr>
-        <p:txBody>
-          <a:bodyPr wrap="square" anchor="t"/>
-          <a:lstStyle/>
-          <a:p>
-            <a:pPr algn="ctr"/>
-            <a:r>
-              <a:rPr sz="1300" b="1" i="0">
-                <a:solidFill>
-                  <a:srgbClr val="095292"/>
-                </a:solidFill>
-                <a:latin typeface="Calibri"/>
-              </a:rPr>
-              <a:t>la plataforma del curso</a:t>
-            </a:r>
-          </a:p>
-          <a:p>
-            <a:pPr algn="ctr">
-              <a:spcBef>
-                <a:spcPts val="200"/>
-              </a:spcBef>
-            </a:pPr>
-            <a:r>
-              <a:rPr sz="1000" b="0" i="0">
-                <a:solidFill>
-                  <a:srgbClr val="666666"/>
-                </a:solidFill>
-                <a:latin typeface="Calibri"/>
-              </a:rPr>
-              <a:t>Entrega del taller · en la fecha que indique el docente</a:t>
-            </a:r>
-          </a:p>
-        </p:txBody>
-      </p:sp>
-      <p:sp>
-        <p:nvSpPr>
-          <p:cNvPr id="33" name="TextBox 32"/>
-          <p:cNvSpPr txBox="1"/>
-          <p:nvPr/>
-        </p:nvSpPr>
-        <p:spPr>
-          <a:xfrm>
-            <a:off x="11185855" y="6473952"/>
-            <a:ext cx="640080" cy="274320"/>
+            <a:off x="457200" y="3017520"/>
+            <a:ext cx="11277295" cy="1645920"/>
           </a:xfrm>
           <a:prstGeom prst="rect">
             <a:avLst/>
@@ -6771,141 +6224,65 @@
           </a:bodyPr>
           <a:lstStyle/>
           <a:p>
-            <a:pPr algn="r"/>
-            <a:r>
-              <a:rPr sz="1100" b="0" i="0">
-                <a:solidFill>
-                  <a:srgbClr val="666666"/>
-                </a:solidFill>
-                <a:latin typeface="Calibri"/>
-              </a:rPr>
-              <a:t>15</a:t>
-            </a:r>
-          </a:p>
-        </p:txBody>
-      </p:sp>
-    </p:spTree>
-  </p:cSld>
-  <p:clrMapOvr>
-    <a:masterClrMapping/>
-  </p:clrMapOvr>
-</p:sld>
-</file>
-
-<file path=ppt/slides/slide16.xml><?xml version="1.0" encoding="utf-8"?>
-<p:sld xmlns:a="http://schemas.openxmlformats.org/drawingml/2006/main" xmlns:p="http://schemas.openxmlformats.org/presentationml/2006/main" xmlns:r="http://schemas.openxmlformats.org/officeDocument/2006/relationships">
-  <p:cSld>
-    <p:bg>
-      <p:bgPr>
-        <a:solidFill>
-          <a:srgbClr val="FFFFFF"/>
-        </a:solidFill>
-        <a:effectLst/>
-      </p:bgPr>
-    </p:bg>
-    <p:spTree>
-      <p:nvGrpSpPr>
-        <p:cNvPr id="1" name=""/>
-        <p:cNvGrpSpPr/>
-        <p:nvPr/>
-      </p:nvGrpSpPr>
-      <p:grpSpPr/>
-      <p:sp>
-        <p:nvSpPr>
-          <p:cNvPr id="2" name="Rectangle 1"/>
-          <p:cNvSpPr/>
-          <p:nvPr/>
-        </p:nvSpPr>
-        <p:spPr>
-          <a:xfrm>
-            <a:off x="0" y="0"/>
-            <a:ext cx="12191695" cy="960120"/>
-          </a:xfrm>
-          <a:prstGeom prst="rect">
-            <a:avLst/>
-          </a:prstGeom>
-          <a:solidFill>
-            <a:srgbClr val="095292"/>
-          </a:solidFill>
-          <a:ln>
-            <a:noFill/>
-          </a:ln>
-        </p:spPr>
-        <p:style>
-          <a:lnRef idx="1">
-            <a:schemeClr val="accent1"/>
-          </a:lnRef>
-          <a:fillRef idx="3">
-            <a:schemeClr val="accent1"/>
-          </a:fillRef>
-          <a:effectRef idx="2">
-            <a:schemeClr val="accent1"/>
-          </a:effectRef>
-          <a:fontRef idx="minor">
-            <a:schemeClr val="lt1"/>
-          </a:fontRef>
-        </p:style>
-        <p:txBody>
-          <a:bodyPr rtlCol="0" anchor="ctr"/>
-          <a:lstStyle/>
-          <a:p>
-            <a:pPr algn="ctr"/>
-          </a:p>
-        </p:txBody>
-      </p:sp>
-      <p:sp>
-        <p:nvSpPr>
-          <p:cNvPr id="3" name="Rectangle 2"/>
-          <p:cNvSpPr/>
-          <p:nvPr/>
-        </p:nvSpPr>
-        <p:spPr>
-          <a:xfrm>
-            <a:off x="0" y="960120"/>
-            <a:ext cx="12191695" cy="41148"/>
-          </a:xfrm>
-          <a:prstGeom prst="rect">
-            <a:avLst/>
-          </a:prstGeom>
-          <a:solidFill>
-            <a:srgbClr val="FFD000"/>
-          </a:solidFill>
-          <a:ln>
-            <a:noFill/>
-          </a:ln>
-        </p:spPr>
-        <p:style>
-          <a:lnRef idx="1">
-            <a:schemeClr val="accent1"/>
-          </a:lnRef>
-          <a:fillRef idx="3">
-            <a:schemeClr val="accent1"/>
-          </a:fillRef>
-          <a:effectRef idx="2">
-            <a:schemeClr val="accent1"/>
-          </a:effectRef>
-          <a:fontRef idx="minor">
-            <a:schemeClr val="lt1"/>
-          </a:fontRef>
-        </p:style>
-        <p:txBody>
-          <a:bodyPr rtlCol="0" anchor="ctr"/>
-          <a:lstStyle/>
-          <a:p>
-            <a:pPr algn="ctr"/>
-          </a:p>
-        </p:txBody>
-      </p:sp>
-      <p:sp>
-        <p:nvSpPr>
-          <p:cNvPr id="4" name="TextBox 3"/>
+            <a:pPr algn="ctr">
+              <a:spcAft>
+                <a:spcPts val="600"/>
+              </a:spcAft>
+            </a:pPr>
+            <a:r>
+              <a:rPr sz="1600" b="0" i="0">
+                <a:solidFill>
+                  <a:srgbClr val="333333"/>
+                </a:solidFill>
+                <a:latin typeface="Calibri"/>
+              </a:rPr>
+              <a:t>Como se defiende un paquete de planos frente a un jurado</a:t>
+            </a:r>
+          </a:p>
+          <a:p>
+            <a:pPr algn="ctr">
+              <a:spcAft>
+                <a:spcPts val="600"/>
+              </a:spcAft>
+            </a:pPr>
+            <a:r>
+              <a:rPr sz="1600" b="0" i="0">
+                <a:solidFill>
+                  <a:srgbClr val="333333"/>
+                </a:solidFill>
+                <a:latin typeface="Calibri"/>
+              </a:rPr>
+              <a:t>Repasen las laminas de teoria: cada concepto esta completo</a:t>
+            </a:r>
+          </a:p>
+          <a:p>
+            <a:pPr algn="ctr">
+              <a:spcAft>
+                <a:spcPts val="600"/>
+              </a:spcAft>
+            </a:pPr>
+            <a:r>
+              <a:rPr sz="1600" b="0" i="0">
+                <a:solidFill>
+                  <a:srgbClr val="333333"/>
+                </a:solidFill>
+                <a:latin typeface="Calibri"/>
+              </a:rPr>
+              <a:t>Siguiente clase: continuamos con el siguiente tema</a:t>
+            </a:r>
+          </a:p>
+        </p:txBody>
+      </p:sp>
+      <p:sp>
+        <p:nvSpPr>
+          <p:cNvPr id="6" name="TextBox 5"/>
           <p:cNvSpPr txBox="1"/>
           <p:nvPr/>
         </p:nvSpPr>
         <p:spPr>
           <a:xfrm>
-            <a:off x="457200" y="164592"/>
-            <a:ext cx="11277295" cy="502920"/>
+            <a:off x="457200" y="4754880"/>
+            <a:ext cx="11277295" cy="640080"/>
           </a:xfrm>
           <a:prstGeom prst="rect">
             <a:avLst/>
@@ -6918,2022 +6295,15 @@
           </a:bodyPr>
           <a:lstStyle/>
           <a:p>
-            <a:r>
-              <a:rPr sz="2600" b="1" i="0">
-                <a:solidFill>
-                  <a:srgbClr val="FFFFFF"/>
-                </a:solidFill>
-                <a:latin typeface="Calibri"/>
-              </a:rPr>
-              <a:t>Taller PI — por que importa</a:t>
-            </a:r>
-          </a:p>
-        </p:txBody>
-      </p:sp>
-      <p:sp>
-        <p:nvSpPr>
-          <p:cNvPr id="5" name="TextBox 4"/>
-          <p:cNvSpPr txBox="1"/>
-          <p:nvPr/>
-        </p:nvSpPr>
-        <p:spPr>
-          <a:xfrm>
-            <a:off x="457200" y="1170432"/>
-            <a:ext cx="11277295" cy="5230368"/>
-          </a:xfrm>
-          <a:prstGeom prst="rect">
-            <a:avLst/>
-          </a:prstGeom>
-          <a:noFill/>
-        </p:spPr>
-        <p:txBody>
-          <a:bodyPr wrap="square">
-            <a:spAutoFit/>
-          </a:bodyPr>
-          <a:lstStyle/>
-          <a:p>
-            <a:pPr>
-              <a:spcAft>
-                <a:spcPts val="800"/>
-              </a:spcAft>
-            </a:pPr>
-            <a:r>
-              <a:rPr sz="2000" b="0" i="0">
-                <a:solidFill>
-                  <a:srgbClr val="333333"/>
-                </a:solidFill>
-                <a:latin typeface="Calibri"/>
-              </a:rPr>
-              <a:t>–   </a:t>
-            </a:r>
+            <a:pPr algn="ctr"/>
             <a:r>
               <a:rPr sz="2000" b="1" i="0">
                 <a:solidFill>
-                  <a:srgbClr val="333333"/>
-                </a:solidFill>
-                <a:latin typeface="Calibri"/>
-              </a:rPr>
-              <a:t>Por que importa al PI:</a:t>
-            </a:r>
-            <a:r>
-              <a:rPr sz="2000" b="0" i="0">
-                <a:solidFill>
-                  <a:srgbClr val="333333"/>
-                </a:solidFill>
-                <a:latin typeface="Calibri"/>
-              </a:rPr>
-              <a:t> hoy se convierte el monton de artefactos de VetCare en un solo paquete defendible, y se ensaya la unica ocasion en que el equipo tiene que demostrar que entiende lo que entrego.</a:t>
-            </a:r>
-          </a:p>
-          <a:p>
-            <a:pPr>
-              <a:spcAft>
-                <a:spcPts val="800"/>
-              </a:spcAft>
-            </a:pPr>
-            <a:r>
-              <a:rPr sz="2000" b="0" i="0">
-                <a:solidFill>
-                  <a:srgbClr val="333333"/>
-                </a:solidFill>
-                <a:latin typeface="Calibri"/>
-              </a:rPr>
-              <a:t>–   No hay tema nuevo: todo el trabajo es de consolidacion, coherencia y argumentacion sobre lo ya producido.</a:t>
-            </a:r>
-          </a:p>
-          <a:p>
-            <a:pPr>
-              <a:spcAft>
-                <a:spcPts val="800"/>
-              </a:spcAft>
-            </a:pPr>
-            <a:r>
-              <a:rPr sz="2000" b="0" i="0">
-                <a:solidFill>
-                  <a:srgbClr val="333333"/>
-                </a:solidFill>
-                <a:latin typeface="Calibri"/>
-              </a:rPr>
-              <a:t>–   Las inconsistencias que se detecten hoy son baratas de arreglar; las mismas inconsistencias detectadas por el jurado o por el equipo de Programacion II salen carisimas.</a:t>
-            </a:r>
-          </a:p>
-        </p:txBody>
-      </p:sp>
-      <p:sp>
-        <p:nvSpPr>
-          <p:cNvPr id="6" name="TextBox 5"/>
-          <p:cNvSpPr txBox="1"/>
-          <p:nvPr/>
-        </p:nvSpPr>
-        <p:spPr>
-          <a:xfrm>
-            <a:off x="11185855" y="6473952"/>
-            <a:ext cx="640080" cy="274320"/>
-          </a:xfrm>
-          <a:prstGeom prst="rect">
-            <a:avLst/>
-          </a:prstGeom>
-          <a:noFill/>
-        </p:spPr>
-        <p:txBody>
-          <a:bodyPr wrap="square">
-            <a:spAutoFit/>
-          </a:bodyPr>
-          <a:lstStyle/>
-          <a:p>
-            <a:pPr algn="r"/>
-            <a:r>
-              <a:rPr sz="1100" b="0" i="0">
-                <a:solidFill>
-                  <a:srgbClr val="666666"/>
-                </a:solidFill>
-                <a:latin typeface="Calibri"/>
-              </a:rPr>
-              <a:t>16</a:t>
-            </a:r>
-          </a:p>
-        </p:txBody>
-      </p:sp>
-    </p:spTree>
-  </p:cSld>
-  <p:clrMapOvr>
-    <a:masterClrMapping/>
-  </p:clrMapOvr>
-</p:sld>
-</file>
-
-<file path=ppt/slides/slide17.xml><?xml version="1.0" encoding="utf-8"?>
-<p:sld xmlns:a="http://schemas.openxmlformats.org/drawingml/2006/main" xmlns:p="http://schemas.openxmlformats.org/presentationml/2006/main" xmlns:r="http://schemas.openxmlformats.org/officeDocument/2006/relationships">
-  <p:cSld>
-    <p:bg>
-      <p:bgPr>
-        <a:solidFill>
-          <a:srgbClr val="FFFFFF"/>
-        </a:solidFill>
-        <a:effectLst/>
-      </p:bgPr>
-    </p:bg>
-    <p:spTree>
-      <p:nvGrpSpPr>
-        <p:cNvPr id="1" name=""/>
-        <p:cNvGrpSpPr/>
-        <p:nvPr/>
-      </p:nvGrpSpPr>
-      <p:grpSpPr/>
-      <p:sp>
-        <p:nvSpPr>
-          <p:cNvPr id="2" name="Rectangle 1"/>
-          <p:cNvSpPr/>
-          <p:nvPr/>
-        </p:nvSpPr>
-        <p:spPr>
-          <a:xfrm>
-            <a:off x="0" y="0"/>
-            <a:ext cx="12191695" cy="960120"/>
-          </a:xfrm>
-          <a:prstGeom prst="rect">
-            <a:avLst/>
-          </a:prstGeom>
-          <a:solidFill>
-            <a:srgbClr val="095292"/>
-          </a:solidFill>
-          <a:ln>
-            <a:noFill/>
-          </a:ln>
-        </p:spPr>
-        <p:style>
-          <a:lnRef idx="1">
-            <a:schemeClr val="accent1"/>
-          </a:lnRef>
-          <a:fillRef idx="3">
-            <a:schemeClr val="accent1"/>
-          </a:fillRef>
-          <a:effectRef idx="2">
-            <a:schemeClr val="accent1"/>
-          </a:effectRef>
-          <a:fontRef idx="minor">
-            <a:schemeClr val="lt1"/>
-          </a:fontRef>
-        </p:style>
-        <p:txBody>
-          <a:bodyPr rtlCol="0" anchor="ctr"/>
-          <a:lstStyle/>
-          <a:p>
-            <a:pPr algn="ctr"/>
-          </a:p>
-        </p:txBody>
-      </p:sp>
-      <p:sp>
-        <p:nvSpPr>
-          <p:cNvPr id="3" name="Rectangle 2"/>
-          <p:cNvSpPr/>
-          <p:nvPr/>
-        </p:nvSpPr>
-        <p:spPr>
-          <a:xfrm>
-            <a:off x="0" y="960120"/>
-            <a:ext cx="12191695" cy="41148"/>
-          </a:xfrm>
-          <a:prstGeom prst="rect">
-            <a:avLst/>
-          </a:prstGeom>
-          <a:solidFill>
-            <a:srgbClr val="FFD000"/>
-          </a:solidFill>
-          <a:ln>
-            <a:noFill/>
-          </a:ln>
-        </p:spPr>
-        <p:style>
-          <a:lnRef idx="1">
-            <a:schemeClr val="accent1"/>
-          </a:lnRef>
-          <a:fillRef idx="3">
-            <a:schemeClr val="accent1"/>
-          </a:fillRef>
-          <a:effectRef idx="2">
-            <a:schemeClr val="accent1"/>
-          </a:effectRef>
-          <a:fontRef idx="minor">
-            <a:schemeClr val="lt1"/>
-          </a:fontRef>
-        </p:style>
-        <p:txBody>
-          <a:bodyPr rtlCol="0" anchor="ctr"/>
-          <a:lstStyle/>
-          <a:p>
-            <a:pPr algn="ctr"/>
-          </a:p>
-        </p:txBody>
-      </p:sp>
-      <p:sp>
-        <p:nvSpPr>
-          <p:cNvPr id="4" name="TextBox 3"/>
-          <p:cNvSpPr txBox="1"/>
-          <p:nvPr/>
-        </p:nvSpPr>
-        <p:spPr>
-          <a:xfrm>
-            <a:off x="457200" y="164592"/>
-            <a:ext cx="11277295" cy="502920"/>
-          </a:xfrm>
-          <a:prstGeom prst="rect">
-            <a:avLst/>
-          </a:prstGeom>
-          <a:noFill/>
-        </p:spPr>
-        <p:txBody>
-          <a:bodyPr wrap="square">
-            <a:spAutoFit/>
-          </a:bodyPr>
-          <a:lstStyle/>
-          <a:p>
-            <a:r>
-              <a:rPr sz="2600" b="1" i="0">
-                <a:solidFill>
-                  <a:srgbClr val="FFFFFF"/>
-                </a:solidFill>
-                <a:latin typeface="Calibri"/>
-              </a:rPr>
-              <a:t>Taller PI — punto de partida</a:t>
-            </a:r>
-          </a:p>
-        </p:txBody>
-      </p:sp>
-      <p:sp>
-        <p:nvSpPr>
-          <p:cNvPr id="5" name="TextBox 4"/>
-          <p:cNvSpPr txBox="1"/>
-          <p:nvPr/>
-        </p:nvSpPr>
-        <p:spPr>
-          <a:xfrm>
-            <a:off x="457200" y="1170432"/>
-            <a:ext cx="11277295" cy="5230368"/>
-          </a:xfrm>
-          <a:prstGeom prst="rect">
-            <a:avLst/>
-          </a:prstGeom>
-          <a:noFill/>
-        </p:spPr>
-        <p:txBody>
-          <a:bodyPr wrap="square">
-            <a:spAutoFit/>
-          </a:bodyPr>
-          <a:lstStyle/>
-          <a:p>
-            <a:pPr>
-              <a:spcAft>
-                <a:spcPts val="800"/>
-              </a:spcAft>
-            </a:pPr>
-            <a:r>
-              <a:rPr sz="2000" b="0" i="0">
-                <a:solidFill>
-                  <a:srgbClr val="333333"/>
-                </a:solidFill>
-                <a:latin typeface="Calibri"/>
-              </a:rPr>
-              <a:t>–   El equipo tiene todos los artefactos de VetCare producidos, pero dispersos en varios archivos y con pequeñas contradicciones entre ellos.</a:t>
-            </a:r>
-          </a:p>
-          <a:p>
-            <a:pPr>
-              <a:spcAft>
-                <a:spcPts val="800"/>
-              </a:spcAft>
-            </a:pPr>
-            <a:r>
-              <a:rPr sz="2000" b="0" i="0">
-                <a:solidFill>
-                  <a:srgbClr val="333333"/>
-                </a:solidFill>
-                <a:latin typeface="Calibri"/>
-              </a:rPr>
-              <a:t>–   Nadie ha dicho todavia en voz alta la historia completa del proyecto de principio a fin, y el reparto de quien expone que no esta definido.</a:t>
-            </a:r>
-          </a:p>
-          <a:p>
-            <a:pPr>
-              <a:spcAft>
-                <a:spcPts val="800"/>
-              </a:spcAft>
-            </a:pPr>
-            <a:r>
-              <a:rPr sz="2000" b="0" i="0">
-                <a:solidFill>
-                  <a:srgbClr val="333333"/>
-                </a:solidFill>
-                <a:latin typeface="Calibri"/>
-              </a:rPr>
-              <a:t>–   El prototipo navegable existe y funciona, pero solo lo ha manejado la persona que lo dibujo.</a:t>
-            </a:r>
-          </a:p>
-        </p:txBody>
-      </p:sp>
-      <p:sp>
-        <p:nvSpPr>
-          <p:cNvPr id="6" name="TextBox 5"/>
-          <p:cNvSpPr txBox="1"/>
-          <p:nvPr/>
-        </p:nvSpPr>
-        <p:spPr>
-          <a:xfrm>
-            <a:off x="11185855" y="6473952"/>
-            <a:ext cx="640080" cy="274320"/>
-          </a:xfrm>
-          <a:prstGeom prst="rect">
-            <a:avLst/>
-          </a:prstGeom>
-          <a:noFill/>
-        </p:spPr>
-        <p:txBody>
-          <a:bodyPr wrap="square">
-            <a:spAutoFit/>
-          </a:bodyPr>
-          <a:lstStyle/>
-          <a:p>
-            <a:pPr algn="r"/>
-            <a:r>
-              <a:rPr sz="1100" b="0" i="0">
-                <a:solidFill>
-                  <a:srgbClr val="666666"/>
-                </a:solidFill>
-                <a:latin typeface="Calibri"/>
-              </a:rPr>
-              <a:t>17</a:t>
-            </a:r>
-          </a:p>
-        </p:txBody>
-      </p:sp>
-    </p:spTree>
-  </p:cSld>
-  <p:clrMapOvr>
-    <a:masterClrMapping/>
-  </p:clrMapOvr>
-</p:sld>
-</file>
-
-<file path=ppt/slides/slide18.xml><?xml version="1.0" encoding="utf-8"?>
-<p:sld xmlns:a="http://schemas.openxmlformats.org/drawingml/2006/main" xmlns:p="http://schemas.openxmlformats.org/presentationml/2006/main" xmlns:r="http://schemas.openxmlformats.org/officeDocument/2006/relationships">
-  <p:cSld>
-    <p:bg>
-      <p:bgPr>
-        <a:solidFill>
-          <a:srgbClr val="FFFFFF"/>
-        </a:solidFill>
-        <a:effectLst/>
-      </p:bgPr>
-    </p:bg>
-    <p:spTree>
-      <p:nvGrpSpPr>
-        <p:cNvPr id="1" name=""/>
-        <p:cNvGrpSpPr/>
-        <p:nvPr/>
-      </p:nvGrpSpPr>
-      <p:grpSpPr/>
-      <p:sp>
-        <p:nvSpPr>
-          <p:cNvPr id="2" name="Rectangle 1"/>
-          <p:cNvSpPr/>
-          <p:nvPr/>
-        </p:nvSpPr>
-        <p:spPr>
-          <a:xfrm>
-            <a:off x="0" y="0"/>
-            <a:ext cx="12191695" cy="960120"/>
-          </a:xfrm>
-          <a:prstGeom prst="rect">
-            <a:avLst/>
-          </a:prstGeom>
-          <a:solidFill>
-            <a:srgbClr val="095292"/>
-          </a:solidFill>
-          <a:ln>
-            <a:noFill/>
-          </a:ln>
-        </p:spPr>
-        <p:style>
-          <a:lnRef idx="1">
-            <a:schemeClr val="accent1"/>
-          </a:lnRef>
-          <a:fillRef idx="3">
-            <a:schemeClr val="accent1"/>
-          </a:fillRef>
-          <a:effectRef idx="2">
-            <a:schemeClr val="accent1"/>
-          </a:effectRef>
-          <a:fontRef idx="minor">
-            <a:schemeClr val="lt1"/>
-          </a:fontRef>
-        </p:style>
-        <p:txBody>
-          <a:bodyPr rtlCol="0" anchor="ctr"/>
-          <a:lstStyle/>
-          <a:p>
-            <a:pPr algn="ctr"/>
-          </a:p>
-        </p:txBody>
-      </p:sp>
-      <p:sp>
-        <p:nvSpPr>
-          <p:cNvPr id="3" name="Rectangle 2"/>
-          <p:cNvSpPr/>
-          <p:nvPr/>
-        </p:nvSpPr>
-        <p:spPr>
-          <a:xfrm>
-            <a:off x="0" y="960120"/>
-            <a:ext cx="12191695" cy="41148"/>
-          </a:xfrm>
-          <a:prstGeom prst="rect">
-            <a:avLst/>
-          </a:prstGeom>
-          <a:solidFill>
-            <a:srgbClr val="FFD000"/>
-          </a:solidFill>
-          <a:ln>
-            <a:noFill/>
-          </a:ln>
-        </p:spPr>
-        <p:style>
-          <a:lnRef idx="1">
-            <a:schemeClr val="accent1"/>
-          </a:lnRef>
-          <a:fillRef idx="3">
-            <a:schemeClr val="accent1"/>
-          </a:fillRef>
-          <a:effectRef idx="2">
-            <a:schemeClr val="accent1"/>
-          </a:effectRef>
-          <a:fontRef idx="minor">
-            <a:schemeClr val="lt1"/>
-          </a:fontRef>
-        </p:style>
-        <p:txBody>
-          <a:bodyPr rtlCol="0" anchor="ctr"/>
-          <a:lstStyle/>
-          <a:p>
-            <a:pPr algn="ctr"/>
-          </a:p>
-        </p:txBody>
-      </p:sp>
-      <p:sp>
-        <p:nvSpPr>
-          <p:cNvPr id="4" name="TextBox 3"/>
-          <p:cNvSpPr txBox="1"/>
-          <p:nvPr/>
-        </p:nvSpPr>
-        <p:spPr>
-          <a:xfrm>
-            <a:off x="457200" y="164592"/>
-            <a:ext cx="11277295" cy="502920"/>
-          </a:xfrm>
-          <a:prstGeom prst="rect">
-            <a:avLst/>
-          </a:prstGeom>
-          <a:noFill/>
-        </p:spPr>
-        <p:txBody>
-          <a:bodyPr wrap="square">
-            <a:spAutoFit/>
-          </a:bodyPr>
-          <a:lstStyle/>
-          <a:p>
-            <a:r>
-              <a:rPr sz="2600" b="1" i="0">
-                <a:solidFill>
-                  <a:srgbClr val="FFFFFF"/>
-                </a:solidFill>
-                <a:latin typeface="Calibri"/>
-              </a:rPr>
-              <a:t>Taller PI — pasos guiados</a:t>
-            </a:r>
-          </a:p>
-        </p:txBody>
-      </p:sp>
-      <p:sp>
-        <p:nvSpPr>
-          <p:cNvPr id="5" name="Rounded Rectangle 4"/>
-          <p:cNvSpPr/>
-          <p:nvPr/>
-        </p:nvSpPr>
-        <p:spPr>
-          <a:xfrm>
-            <a:off x="457200" y="1234440"/>
-            <a:ext cx="11277295" cy="950976"/>
-          </a:xfrm>
-          <a:prstGeom prst="roundRect">
-            <a:avLst>
-              <a:gd name="adj" fmla="val 12000"/>
-            </a:avLst>
-          </a:prstGeom>
-          <a:solidFill>
-            <a:srgbClr val="F2F2F2"/>
-          </a:solidFill>
-          <a:ln>
-            <a:noFill/>
-          </a:ln>
-        </p:spPr>
-        <p:style>
-          <a:lnRef idx="1">
-            <a:schemeClr val="accent1"/>
-          </a:lnRef>
-          <a:fillRef idx="3">
-            <a:schemeClr val="accent1"/>
-          </a:fillRef>
-          <a:effectRef idx="2">
-            <a:schemeClr val="accent1"/>
-          </a:effectRef>
-          <a:fontRef idx="minor">
-            <a:schemeClr val="lt1"/>
-          </a:fontRef>
-        </p:style>
-        <p:txBody>
-          <a:bodyPr rtlCol="0" anchor="ctr"/>
-          <a:lstStyle/>
-          <a:p>
-            <a:pPr algn="ctr"/>
-          </a:p>
-        </p:txBody>
-      </p:sp>
-      <p:sp>
-        <p:nvSpPr>
-          <p:cNvPr id="6" name="Rounded Rectangle 5"/>
-          <p:cNvSpPr/>
-          <p:nvPr/>
-        </p:nvSpPr>
-        <p:spPr>
-          <a:xfrm>
-            <a:off x="594360" y="1490472"/>
-            <a:ext cx="438912" cy="438912"/>
-          </a:xfrm>
-          <a:prstGeom prst="roundRect">
-            <a:avLst>
-              <a:gd name="adj" fmla="val 12000"/>
-            </a:avLst>
-          </a:prstGeom>
-          <a:solidFill>
-            <a:srgbClr val="095292"/>
-          </a:solidFill>
-          <a:ln>
-            <a:noFill/>
-          </a:ln>
-        </p:spPr>
-        <p:style>
-          <a:lnRef idx="1">
-            <a:schemeClr val="accent1"/>
-          </a:lnRef>
-          <a:fillRef idx="3">
-            <a:schemeClr val="accent1"/>
-          </a:fillRef>
-          <a:effectRef idx="2">
-            <a:schemeClr val="accent1"/>
-          </a:effectRef>
-          <a:fontRef idx="minor">
-            <a:schemeClr val="lt1"/>
-          </a:fontRef>
-        </p:style>
-        <p:txBody>
-          <a:bodyPr rtlCol="0" anchor="ctr"/>
-          <a:lstStyle/>
-          <a:p>
-            <a:pPr algn="ctr"/>
-          </a:p>
-        </p:txBody>
-      </p:sp>
-      <p:sp>
-        <p:nvSpPr>
-          <p:cNvPr id="7" name="TextBox 6"/>
-          <p:cNvSpPr txBox="1"/>
-          <p:nvPr/>
-        </p:nvSpPr>
-        <p:spPr>
-          <a:xfrm>
-            <a:off x="594360" y="1490472"/>
-            <a:ext cx="438912" cy="438912"/>
-          </a:xfrm>
-          <a:prstGeom prst="rect">
-            <a:avLst/>
-          </a:prstGeom>
-          <a:noFill/>
-        </p:spPr>
-        <p:txBody>
-          <a:bodyPr wrap="square" anchor="ctr"/>
-          <a:lstStyle/>
-          <a:p>
-            <a:pPr algn="ctr"/>
-            <a:r>
-              <a:rPr sz="1600" b="1" i="0">
-                <a:solidFill>
-                  <a:srgbClr val="FFFFFF"/>
-                </a:solidFill>
-                <a:latin typeface="Calibri"/>
-              </a:rPr>
-              <a:t>1</a:t>
-            </a:r>
-          </a:p>
-        </p:txBody>
-      </p:sp>
-      <p:sp>
-        <p:nvSpPr>
-          <p:cNvPr id="8" name="TextBox 7"/>
-          <p:cNvSpPr txBox="1"/>
-          <p:nvPr/>
-        </p:nvSpPr>
-        <p:spPr>
-          <a:xfrm>
-            <a:off x="1188720" y="1325880"/>
-            <a:ext cx="10271455" cy="786384"/>
-          </a:xfrm>
-          <a:prstGeom prst="rect">
-            <a:avLst/>
-          </a:prstGeom>
-          <a:noFill/>
-        </p:spPr>
-        <p:txBody>
-          <a:bodyPr wrap="square" anchor="ctr"/>
-          <a:lstStyle/>
-          <a:p>
-            <a:r>
-              <a:rPr sz="1100" b="1" i="0">
-                <a:solidFill>
-                  <a:srgbClr val="095292"/>
-                </a:solidFill>
-                <a:latin typeface="Calibri"/>
-              </a:rPr>
-              <a:t>Paso 1. Arme en Google Docs el guion cronometrado de doce minutos con las cinco secciones obligatorias en orden problema, requisitos, modelo, interfaz y decisiones, asignando a cada bloque su rango de minutos exacto y la evidencia que se muestra en pantalla en ese bloque; ningun bloque puede quedar sin rango de minutos ni sin evidencia asociada. Si el docente autorizo equipo, escriba ademas el nombre del responsable de cada bloque y reparta de modo que ningun integrante quede con menos de dos minutos.</a:t>
-            </a:r>
-          </a:p>
-        </p:txBody>
-      </p:sp>
-      <p:sp>
-        <p:nvSpPr>
-          <p:cNvPr id="9" name="Rounded Rectangle 8"/>
-          <p:cNvSpPr/>
-          <p:nvPr/>
-        </p:nvSpPr>
-        <p:spPr>
-          <a:xfrm>
-            <a:off x="457200" y="2276856"/>
-            <a:ext cx="11277295" cy="950976"/>
-          </a:xfrm>
-          <a:prstGeom prst="roundRect">
-            <a:avLst>
-              <a:gd name="adj" fmla="val 12000"/>
-            </a:avLst>
-          </a:prstGeom>
-          <a:solidFill>
-            <a:srgbClr val="E8F4FA"/>
-          </a:solidFill>
-          <a:ln>
-            <a:noFill/>
-          </a:ln>
-        </p:spPr>
-        <p:style>
-          <a:lnRef idx="1">
-            <a:schemeClr val="accent1"/>
-          </a:lnRef>
-          <a:fillRef idx="3">
-            <a:schemeClr val="accent1"/>
-          </a:fillRef>
-          <a:effectRef idx="2">
-            <a:schemeClr val="accent1"/>
-          </a:effectRef>
-          <a:fontRef idx="minor">
-            <a:schemeClr val="lt1"/>
-          </a:fontRef>
-        </p:style>
-        <p:txBody>
-          <a:bodyPr rtlCol="0" anchor="ctr"/>
-          <a:lstStyle/>
-          <a:p>
-            <a:pPr algn="ctr"/>
-          </a:p>
-        </p:txBody>
-      </p:sp>
-      <p:sp>
-        <p:nvSpPr>
-          <p:cNvPr id="10" name="Rounded Rectangle 9"/>
-          <p:cNvSpPr/>
-          <p:nvPr/>
-        </p:nvSpPr>
-        <p:spPr>
-          <a:xfrm>
-            <a:off x="594360" y="2532888"/>
-            <a:ext cx="438912" cy="438912"/>
-          </a:xfrm>
-          <a:prstGeom prst="roundRect">
-            <a:avLst>
-              <a:gd name="adj" fmla="val 12000"/>
-            </a:avLst>
-          </a:prstGeom>
-          <a:solidFill>
-            <a:srgbClr val="095292"/>
-          </a:solidFill>
-          <a:ln>
-            <a:noFill/>
-          </a:ln>
-        </p:spPr>
-        <p:style>
-          <a:lnRef idx="1">
-            <a:schemeClr val="accent1"/>
-          </a:lnRef>
-          <a:fillRef idx="3">
-            <a:schemeClr val="accent1"/>
-          </a:fillRef>
-          <a:effectRef idx="2">
-            <a:schemeClr val="accent1"/>
-          </a:effectRef>
-          <a:fontRef idx="minor">
-            <a:schemeClr val="lt1"/>
-          </a:fontRef>
-        </p:style>
-        <p:txBody>
-          <a:bodyPr rtlCol="0" anchor="ctr"/>
-          <a:lstStyle/>
-          <a:p>
-            <a:pPr algn="ctr"/>
-          </a:p>
-        </p:txBody>
-      </p:sp>
-      <p:sp>
-        <p:nvSpPr>
-          <p:cNvPr id="11" name="TextBox 10"/>
-          <p:cNvSpPr txBox="1"/>
-          <p:nvPr/>
-        </p:nvSpPr>
-        <p:spPr>
-          <a:xfrm>
-            <a:off x="594360" y="2532888"/>
-            <a:ext cx="438912" cy="438912"/>
-          </a:xfrm>
-          <a:prstGeom prst="rect">
-            <a:avLst/>
-          </a:prstGeom>
-          <a:noFill/>
-        </p:spPr>
-        <p:txBody>
-          <a:bodyPr wrap="square" anchor="ctr"/>
-          <a:lstStyle/>
-          <a:p>
-            <a:pPr algn="ctr"/>
-            <a:r>
-              <a:rPr sz="1600" b="1" i="0">
-                <a:solidFill>
-                  <a:srgbClr val="FFFFFF"/>
-                </a:solidFill>
-                <a:latin typeface="Calibri"/>
-              </a:rPr>
-              <a:t>2</a:t>
-            </a:r>
-          </a:p>
-        </p:txBody>
-      </p:sp>
-      <p:sp>
-        <p:nvSpPr>
-          <p:cNvPr id="12" name="TextBox 11"/>
-          <p:cNvSpPr txBox="1"/>
-          <p:nvPr/>
-        </p:nvSpPr>
-        <p:spPr>
-          <a:xfrm>
-            <a:off x="1188720" y="2368296"/>
-            <a:ext cx="10271455" cy="786384"/>
-          </a:xfrm>
-          <a:prstGeom prst="rect">
-            <a:avLst/>
-          </a:prstGeom>
-          <a:noFill/>
-        </p:spPr>
-        <p:txBody>
-          <a:bodyPr wrap="square" anchor="ctr"/>
-          <a:lstStyle/>
-          <a:p>
-            <a:r>
-              <a:rPr sz="1400" b="1" i="0">
-                <a:solidFill>
-                  <a:srgbClr val="095292"/>
-                </a:solidFill>
-                <a:latin typeface="Calibri"/>
-              </a:rPr>
-              <a:t>Paso 2. Llenen la tabla de tres decisiones de diseño de VetCare con las cuatro columnas decision, alternativa descartada, criterio y consecuencia asumida; una de las tres decisiones debe ser sobre el modelo de clases y otra sobre un requisito no funcional.</a:t>
-            </a:r>
-          </a:p>
-        </p:txBody>
-      </p:sp>
-      <p:sp>
-        <p:nvSpPr>
-          <p:cNvPr id="13" name="Rounded Rectangle 12"/>
-          <p:cNvSpPr/>
-          <p:nvPr/>
-        </p:nvSpPr>
-        <p:spPr>
-          <a:xfrm>
-            <a:off x="457200" y="3319272"/>
-            <a:ext cx="11277295" cy="950976"/>
-          </a:xfrm>
-          <a:prstGeom prst="roundRect">
-            <a:avLst>
-              <a:gd name="adj" fmla="val 12000"/>
-            </a:avLst>
-          </a:prstGeom>
-          <a:solidFill>
-            <a:srgbClr val="F2F2F2"/>
-          </a:solidFill>
-          <a:ln>
-            <a:noFill/>
-          </a:ln>
-        </p:spPr>
-        <p:style>
-          <a:lnRef idx="1">
-            <a:schemeClr val="accent1"/>
-          </a:lnRef>
-          <a:fillRef idx="3">
-            <a:schemeClr val="accent1"/>
-          </a:fillRef>
-          <a:effectRef idx="2">
-            <a:schemeClr val="accent1"/>
-          </a:effectRef>
-          <a:fontRef idx="minor">
-            <a:schemeClr val="lt1"/>
-          </a:fontRef>
-        </p:style>
-        <p:txBody>
-          <a:bodyPr rtlCol="0" anchor="ctr"/>
-          <a:lstStyle/>
-          <a:p>
-            <a:pPr algn="ctr"/>
-          </a:p>
-        </p:txBody>
-      </p:sp>
-      <p:sp>
-        <p:nvSpPr>
-          <p:cNvPr id="14" name="Rounded Rectangle 13"/>
-          <p:cNvSpPr/>
-          <p:nvPr/>
-        </p:nvSpPr>
-        <p:spPr>
-          <a:xfrm>
-            <a:off x="594360" y="3575304"/>
-            <a:ext cx="438912" cy="438912"/>
-          </a:xfrm>
-          <a:prstGeom prst="roundRect">
-            <a:avLst>
-              <a:gd name="adj" fmla="val 12000"/>
-            </a:avLst>
-          </a:prstGeom>
-          <a:solidFill>
-            <a:srgbClr val="095292"/>
-          </a:solidFill>
-          <a:ln>
-            <a:noFill/>
-          </a:ln>
-        </p:spPr>
-        <p:style>
-          <a:lnRef idx="1">
-            <a:schemeClr val="accent1"/>
-          </a:lnRef>
-          <a:fillRef idx="3">
-            <a:schemeClr val="accent1"/>
-          </a:fillRef>
-          <a:effectRef idx="2">
-            <a:schemeClr val="accent1"/>
-          </a:effectRef>
-          <a:fontRef idx="minor">
-            <a:schemeClr val="lt1"/>
-          </a:fontRef>
-        </p:style>
-        <p:txBody>
-          <a:bodyPr rtlCol="0" anchor="ctr"/>
-          <a:lstStyle/>
-          <a:p>
-            <a:pPr algn="ctr"/>
-          </a:p>
-        </p:txBody>
-      </p:sp>
-      <p:sp>
-        <p:nvSpPr>
-          <p:cNvPr id="15" name="TextBox 14"/>
-          <p:cNvSpPr txBox="1"/>
-          <p:nvPr/>
-        </p:nvSpPr>
-        <p:spPr>
-          <a:xfrm>
-            <a:off x="594360" y="3575304"/>
-            <a:ext cx="438912" cy="438912"/>
-          </a:xfrm>
-          <a:prstGeom prst="rect">
-            <a:avLst/>
-          </a:prstGeom>
-          <a:noFill/>
-        </p:spPr>
-        <p:txBody>
-          <a:bodyPr wrap="square" anchor="ctr"/>
-          <a:lstStyle/>
-          <a:p>
-            <a:pPr algn="ctr"/>
-            <a:r>
-              <a:rPr sz="1600" b="1" i="0">
-                <a:solidFill>
-                  <a:srgbClr val="FFFFFF"/>
-                </a:solidFill>
-                <a:latin typeface="Calibri"/>
-              </a:rPr>
-              <a:t>3</a:t>
-            </a:r>
-          </a:p>
-        </p:txBody>
-      </p:sp>
-      <p:sp>
-        <p:nvSpPr>
-          <p:cNvPr id="16" name="TextBox 15"/>
-          <p:cNvSpPr txBox="1"/>
-          <p:nvPr/>
-        </p:nvSpPr>
-        <p:spPr>
-          <a:xfrm>
-            <a:off x="1188720" y="3410712"/>
-            <a:ext cx="10271455" cy="786384"/>
-          </a:xfrm>
-          <a:prstGeom prst="rect">
-            <a:avLst/>
-          </a:prstGeom>
-          <a:noFill/>
-        </p:spPr>
-        <p:txBody>
-          <a:bodyPr wrap="square" anchor="ctr"/>
-          <a:lstStyle/>
-          <a:p>
-            <a:r>
-              <a:rPr sz="1400" b="1" i="0">
-                <a:solidFill>
-                  <a:srgbClr val="095292"/>
-                </a:solidFill>
-                <a:latin typeface="Calibri"/>
-              </a:rPr>
-              <a:t>Paso 3. Construyan el banco de diez preguntas del jurado con su respuesta en maximo dos frases, incluyendo obligatoriamente que pasa si dos recepcionistas registran la misma mascota, como se mide su RNF de tiempo de respuesta y que quedo fuera del alcance.</a:t>
-            </a:r>
-          </a:p>
-        </p:txBody>
-      </p:sp>
-      <p:sp>
-        <p:nvSpPr>
-          <p:cNvPr id="17" name="Rounded Rectangle 16"/>
-          <p:cNvSpPr/>
-          <p:nvPr/>
-        </p:nvSpPr>
-        <p:spPr>
-          <a:xfrm>
-            <a:off x="457200" y="4361688"/>
-            <a:ext cx="11277295" cy="950976"/>
-          </a:xfrm>
-          <a:prstGeom prst="roundRect">
-            <a:avLst>
-              <a:gd name="adj" fmla="val 12000"/>
-            </a:avLst>
-          </a:prstGeom>
-          <a:solidFill>
-            <a:srgbClr val="E8F4FA"/>
-          </a:solidFill>
-          <a:ln>
-            <a:noFill/>
-          </a:ln>
-        </p:spPr>
-        <p:style>
-          <a:lnRef idx="1">
-            <a:schemeClr val="accent1"/>
-          </a:lnRef>
-          <a:fillRef idx="3">
-            <a:schemeClr val="accent1"/>
-          </a:fillRef>
-          <a:effectRef idx="2">
-            <a:schemeClr val="accent1"/>
-          </a:effectRef>
-          <a:fontRef idx="minor">
-            <a:schemeClr val="lt1"/>
-          </a:fontRef>
-        </p:style>
-        <p:txBody>
-          <a:bodyPr rtlCol="0" anchor="ctr"/>
-          <a:lstStyle/>
-          <a:p>
-            <a:pPr algn="ctr"/>
-          </a:p>
-        </p:txBody>
-      </p:sp>
-      <p:sp>
-        <p:nvSpPr>
-          <p:cNvPr id="18" name="Rounded Rectangle 17"/>
-          <p:cNvSpPr/>
-          <p:nvPr/>
-        </p:nvSpPr>
-        <p:spPr>
-          <a:xfrm>
-            <a:off x="594360" y="4617720"/>
-            <a:ext cx="438912" cy="438912"/>
-          </a:xfrm>
-          <a:prstGeom prst="roundRect">
-            <a:avLst>
-              <a:gd name="adj" fmla="val 12000"/>
-            </a:avLst>
-          </a:prstGeom>
-          <a:solidFill>
-            <a:srgbClr val="095292"/>
-          </a:solidFill>
-          <a:ln>
-            <a:noFill/>
-          </a:ln>
-        </p:spPr>
-        <p:style>
-          <a:lnRef idx="1">
-            <a:schemeClr val="accent1"/>
-          </a:lnRef>
-          <a:fillRef idx="3">
-            <a:schemeClr val="accent1"/>
-          </a:fillRef>
-          <a:effectRef idx="2">
-            <a:schemeClr val="accent1"/>
-          </a:effectRef>
-          <a:fontRef idx="minor">
-            <a:schemeClr val="lt1"/>
-          </a:fontRef>
-        </p:style>
-        <p:txBody>
-          <a:bodyPr rtlCol="0" anchor="ctr"/>
-          <a:lstStyle/>
-          <a:p>
-            <a:pPr algn="ctr"/>
-          </a:p>
-        </p:txBody>
-      </p:sp>
-      <p:sp>
-        <p:nvSpPr>
-          <p:cNvPr id="19" name="TextBox 18"/>
-          <p:cNvSpPr txBox="1"/>
-          <p:nvPr/>
-        </p:nvSpPr>
-        <p:spPr>
-          <a:xfrm>
-            <a:off x="594360" y="4617720"/>
-            <a:ext cx="438912" cy="438912"/>
-          </a:xfrm>
-          <a:prstGeom prst="rect">
-            <a:avLst/>
-          </a:prstGeom>
-          <a:noFill/>
-        </p:spPr>
-        <p:txBody>
-          <a:bodyPr wrap="square" anchor="ctr"/>
-          <a:lstStyle/>
-          <a:p>
-            <a:pPr algn="ctr"/>
-            <a:r>
-              <a:rPr sz="1600" b="1" i="0">
-                <a:solidFill>
-                  <a:srgbClr val="FFFFFF"/>
-                </a:solidFill>
-                <a:latin typeface="Calibri"/>
-              </a:rPr>
-              <a:t>4</a:t>
-            </a:r>
-          </a:p>
-        </p:txBody>
-      </p:sp>
-      <p:sp>
-        <p:nvSpPr>
-          <p:cNvPr id="20" name="TextBox 19"/>
-          <p:cNvSpPr txBox="1"/>
-          <p:nvPr/>
-        </p:nvSpPr>
-        <p:spPr>
-          <a:xfrm>
-            <a:off x="1188720" y="4453128"/>
-            <a:ext cx="10271455" cy="786384"/>
-          </a:xfrm>
-          <a:prstGeom prst="rect">
-            <a:avLst/>
-          </a:prstGeom>
-          <a:noFill/>
-        </p:spPr>
-        <p:txBody>
-          <a:bodyPr wrap="square" anchor="ctr"/>
-          <a:lstStyle/>
-          <a:p>
-            <a:r>
-              <a:rPr sz="1400" b="1" i="0">
-                <a:solidFill>
-                  <a:srgbClr val="095292"/>
-                </a:solidFill>
-                <a:latin typeface="Calibri"/>
-              </a:rPr>
-              <a:t>Paso 4. Haga un ensayo cronometrado de pie, con el prototipo abierto, y registre el tiempo real de cada bloque; recorte lo que se paso y anote los dos puntos donde se enredo al hablar (si trabaja en equipo, donde se enredo la transicion entre un expositor y el siguiente).</a:t>
-            </a:r>
-          </a:p>
-        </p:txBody>
-      </p:sp>
-      <p:sp>
-        <p:nvSpPr>
-          <p:cNvPr id="21" name="Rounded Rectangle 20"/>
-          <p:cNvSpPr/>
-          <p:nvPr/>
-        </p:nvSpPr>
-        <p:spPr>
-          <a:xfrm>
-            <a:off x="457200" y="5404104"/>
-            <a:ext cx="11277295" cy="950976"/>
-          </a:xfrm>
-          <a:prstGeom prst="roundRect">
-            <a:avLst>
-              <a:gd name="adj" fmla="val 12000"/>
-            </a:avLst>
-          </a:prstGeom>
-          <a:solidFill>
-            <a:srgbClr val="F2F2F2"/>
-          </a:solidFill>
-          <a:ln>
-            <a:noFill/>
-          </a:ln>
-        </p:spPr>
-        <p:style>
-          <a:lnRef idx="1">
-            <a:schemeClr val="accent1"/>
-          </a:lnRef>
-          <a:fillRef idx="3">
-            <a:schemeClr val="accent1"/>
-          </a:fillRef>
-          <a:effectRef idx="2">
-            <a:schemeClr val="accent1"/>
-          </a:effectRef>
-          <a:fontRef idx="minor">
-            <a:schemeClr val="lt1"/>
-          </a:fontRef>
-        </p:style>
-        <p:txBody>
-          <a:bodyPr rtlCol="0" anchor="ctr"/>
-          <a:lstStyle/>
-          <a:p>
-            <a:pPr algn="ctr"/>
-          </a:p>
-        </p:txBody>
-      </p:sp>
-      <p:sp>
-        <p:nvSpPr>
-          <p:cNvPr id="22" name="Rounded Rectangle 21"/>
-          <p:cNvSpPr/>
-          <p:nvPr/>
-        </p:nvSpPr>
-        <p:spPr>
-          <a:xfrm>
-            <a:off x="594360" y="5660136"/>
-            <a:ext cx="438912" cy="438912"/>
-          </a:xfrm>
-          <a:prstGeom prst="roundRect">
-            <a:avLst>
-              <a:gd name="adj" fmla="val 12000"/>
-            </a:avLst>
-          </a:prstGeom>
-          <a:solidFill>
-            <a:srgbClr val="095292"/>
-          </a:solidFill>
-          <a:ln>
-            <a:noFill/>
-          </a:ln>
-        </p:spPr>
-        <p:style>
-          <a:lnRef idx="1">
-            <a:schemeClr val="accent1"/>
-          </a:lnRef>
-          <a:fillRef idx="3">
-            <a:schemeClr val="accent1"/>
-          </a:fillRef>
-          <a:effectRef idx="2">
-            <a:schemeClr val="accent1"/>
-          </a:effectRef>
-          <a:fontRef idx="minor">
-            <a:schemeClr val="lt1"/>
-          </a:fontRef>
-        </p:style>
-        <p:txBody>
-          <a:bodyPr rtlCol="0" anchor="ctr"/>
-          <a:lstStyle/>
-          <a:p>
-            <a:pPr algn="ctr"/>
-          </a:p>
-        </p:txBody>
-      </p:sp>
-      <p:sp>
-        <p:nvSpPr>
-          <p:cNvPr id="23" name="TextBox 22"/>
-          <p:cNvSpPr txBox="1"/>
-          <p:nvPr/>
-        </p:nvSpPr>
-        <p:spPr>
-          <a:xfrm>
-            <a:off x="594360" y="5660136"/>
-            <a:ext cx="438912" cy="438912"/>
-          </a:xfrm>
-          <a:prstGeom prst="rect">
-            <a:avLst/>
-          </a:prstGeom>
-          <a:noFill/>
-        </p:spPr>
-        <p:txBody>
-          <a:bodyPr wrap="square" anchor="ctr"/>
-          <a:lstStyle/>
-          <a:p>
-            <a:pPr algn="ctr"/>
-            <a:r>
-              <a:rPr sz="1600" b="1" i="0">
-                <a:solidFill>
-                  <a:srgbClr val="FFFFFF"/>
-                </a:solidFill>
-                <a:latin typeface="Calibri"/>
-              </a:rPr>
-              <a:t>5</a:t>
-            </a:r>
-          </a:p>
-        </p:txBody>
-      </p:sp>
-      <p:sp>
-        <p:nvSpPr>
-          <p:cNvPr id="24" name="TextBox 23"/>
-          <p:cNvSpPr txBox="1"/>
-          <p:nvPr/>
-        </p:nvSpPr>
-        <p:spPr>
-          <a:xfrm>
-            <a:off x="1188720" y="5495544"/>
-            <a:ext cx="10271455" cy="786384"/>
-          </a:xfrm>
-          <a:prstGeom prst="rect">
-            <a:avLst/>
-          </a:prstGeom>
-          <a:noFill/>
-        </p:spPr>
-        <p:txBody>
-          <a:bodyPr wrap="square" anchor="ctr"/>
-          <a:lstStyle/>
-          <a:p>
-            <a:r>
-              <a:rPr sz="1400" b="1" i="0">
-                <a:solidFill>
-                  <a:srgbClr val="095292"/>
-                </a:solidFill>
-                <a:latin typeface="Calibri"/>
-              </a:rPr>
-              <a:t>Paso 5. Consoliden el documento final armando el indice completo desde problema hasta trazabilidad, verifiquen que los nombres de las clases, los campos del diccionario y los campos de las pantallas coinciden exactamente, y corrijan al menos una inconsistencia encontrada dejando constancia de cual era.</a:t>
-            </a:r>
-          </a:p>
-        </p:txBody>
-      </p:sp>
-      <p:sp>
-        <p:nvSpPr>
-          <p:cNvPr id="25" name="TextBox 24"/>
-          <p:cNvSpPr txBox="1"/>
-          <p:nvPr/>
-        </p:nvSpPr>
-        <p:spPr>
-          <a:xfrm>
-            <a:off x="11185855" y="6473952"/>
-            <a:ext cx="640080" cy="274320"/>
-          </a:xfrm>
-          <a:prstGeom prst="rect">
-            <a:avLst/>
-          </a:prstGeom>
-          <a:noFill/>
-        </p:spPr>
-        <p:txBody>
-          <a:bodyPr wrap="square">
-            <a:spAutoFit/>
-          </a:bodyPr>
-          <a:lstStyle/>
-          <a:p>
-            <a:pPr algn="r"/>
-            <a:r>
-              <a:rPr sz="1100" b="0" i="0">
-                <a:solidFill>
-                  <a:srgbClr val="666666"/>
-                </a:solidFill>
-                <a:latin typeface="Calibri"/>
-              </a:rPr>
-              <a:t>18</a:t>
-            </a:r>
-          </a:p>
-        </p:txBody>
-      </p:sp>
-    </p:spTree>
-  </p:cSld>
-  <p:clrMapOvr>
-    <a:masterClrMapping/>
-  </p:clrMapOvr>
-</p:sld>
-</file>
-
-<file path=ppt/slides/slide19.xml><?xml version="1.0" encoding="utf-8"?>
-<p:sld xmlns:a="http://schemas.openxmlformats.org/drawingml/2006/main" xmlns:p="http://schemas.openxmlformats.org/presentationml/2006/main" xmlns:r="http://schemas.openxmlformats.org/officeDocument/2006/relationships">
-  <p:cSld>
-    <p:bg>
-      <p:bgPr>
-        <a:solidFill>
-          <a:srgbClr val="FFFFFF"/>
-        </a:solidFill>
-        <a:effectLst/>
-      </p:bgPr>
-    </p:bg>
-    <p:spTree>
-      <p:nvGrpSpPr>
-        <p:cNvPr id="1" name=""/>
-        <p:cNvGrpSpPr/>
-        <p:nvPr/>
-      </p:nvGrpSpPr>
-      <p:grpSpPr/>
-      <p:sp>
-        <p:nvSpPr>
-          <p:cNvPr id="2" name="Rectangle 1"/>
-          <p:cNvSpPr/>
-          <p:nvPr/>
-        </p:nvSpPr>
-        <p:spPr>
-          <a:xfrm>
-            <a:off x="0" y="0"/>
-            <a:ext cx="12191695" cy="960120"/>
-          </a:xfrm>
-          <a:prstGeom prst="rect">
-            <a:avLst/>
-          </a:prstGeom>
-          <a:solidFill>
-            <a:srgbClr val="095292"/>
-          </a:solidFill>
-          <a:ln>
-            <a:noFill/>
-          </a:ln>
-        </p:spPr>
-        <p:style>
-          <a:lnRef idx="1">
-            <a:schemeClr val="accent1"/>
-          </a:lnRef>
-          <a:fillRef idx="3">
-            <a:schemeClr val="accent1"/>
-          </a:fillRef>
-          <a:effectRef idx="2">
-            <a:schemeClr val="accent1"/>
-          </a:effectRef>
-          <a:fontRef idx="minor">
-            <a:schemeClr val="lt1"/>
-          </a:fontRef>
-        </p:style>
-        <p:txBody>
-          <a:bodyPr rtlCol="0" anchor="ctr"/>
-          <a:lstStyle/>
-          <a:p>
-            <a:pPr algn="ctr"/>
-          </a:p>
-        </p:txBody>
-      </p:sp>
-      <p:sp>
-        <p:nvSpPr>
-          <p:cNvPr id="3" name="Rectangle 2"/>
-          <p:cNvSpPr/>
-          <p:nvPr/>
-        </p:nvSpPr>
-        <p:spPr>
-          <a:xfrm>
-            <a:off x="0" y="960120"/>
-            <a:ext cx="12191695" cy="41148"/>
-          </a:xfrm>
-          <a:prstGeom prst="rect">
-            <a:avLst/>
-          </a:prstGeom>
-          <a:solidFill>
-            <a:srgbClr val="FFD000"/>
-          </a:solidFill>
-          <a:ln>
-            <a:noFill/>
-          </a:ln>
-        </p:spPr>
-        <p:style>
-          <a:lnRef idx="1">
-            <a:schemeClr val="accent1"/>
-          </a:lnRef>
-          <a:fillRef idx="3">
-            <a:schemeClr val="accent1"/>
-          </a:fillRef>
-          <a:effectRef idx="2">
-            <a:schemeClr val="accent1"/>
-          </a:effectRef>
-          <a:fontRef idx="minor">
-            <a:schemeClr val="lt1"/>
-          </a:fontRef>
-        </p:style>
-        <p:txBody>
-          <a:bodyPr rtlCol="0" anchor="ctr"/>
-          <a:lstStyle/>
-          <a:p>
-            <a:pPr algn="ctr"/>
-          </a:p>
-        </p:txBody>
-      </p:sp>
-      <p:sp>
-        <p:nvSpPr>
-          <p:cNvPr id="4" name="TextBox 3"/>
-          <p:cNvSpPr txBox="1"/>
-          <p:nvPr/>
-        </p:nvSpPr>
-        <p:spPr>
-          <a:xfrm>
-            <a:off x="457200" y="164592"/>
-            <a:ext cx="11277295" cy="502920"/>
-          </a:xfrm>
-          <a:prstGeom prst="rect">
-            <a:avLst/>
-          </a:prstGeom>
-          <a:noFill/>
-        </p:spPr>
-        <p:txBody>
-          <a:bodyPr wrap="square">
-            <a:spAutoFit/>
-          </a:bodyPr>
-          <a:lstStyle/>
-          <a:p>
-            <a:r>
-              <a:rPr sz="2600" b="1" i="0">
-                <a:solidFill>
-                  <a:srgbClr val="FFFFFF"/>
-                </a:solidFill>
-                <a:latin typeface="Calibri"/>
-              </a:rPr>
-              <a:t>Antes de entregar — autochequeo</a:t>
-            </a:r>
-          </a:p>
-        </p:txBody>
-      </p:sp>
-      <p:sp>
-        <p:nvSpPr>
-          <p:cNvPr id="5" name="Rounded Rectangle 4"/>
-          <p:cNvSpPr/>
-          <p:nvPr/>
-        </p:nvSpPr>
-        <p:spPr>
-          <a:xfrm>
-            <a:off x="457200" y="1261872"/>
-            <a:ext cx="11277295" cy="566928"/>
-          </a:xfrm>
-          <a:prstGeom prst="roundRect">
-            <a:avLst>
-              <a:gd name="adj" fmla="val 12000"/>
-            </a:avLst>
-          </a:prstGeom>
-          <a:solidFill>
-            <a:srgbClr val="F2F2F2"/>
-          </a:solidFill>
-          <a:ln>
-            <a:noFill/>
-          </a:ln>
-        </p:spPr>
-        <p:style>
-          <a:lnRef idx="1">
-            <a:schemeClr val="accent1"/>
-          </a:lnRef>
-          <a:fillRef idx="3">
-            <a:schemeClr val="accent1"/>
-          </a:fillRef>
-          <a:effectRef idx="2">
-            <a:schemeClr val="accent1"/>
-          </a:effectRef>
-          <a:fontRef idx="minor">
-            <a:schemeClr val="lt1"/>
-          </a:fontRef>
-        </p:style>
-        <p:txBody>
-          <a:bodyPr rtlCol="0" anchor="ctr"/>
-          <a:lstStyle/>
-          <a:p>
-            <a:pPr algn="ctr"/>
-          </a:p>
-        </p:txBody>
-      </p:sp>
-      <p:sp>
-        <p:nvSpPr>
-          <p:cNvPr id="6" name="Rectangle 5"/>
-          <p:cNvSpPr/>
-          <p:nvPr/>
-        </p:nvSpPr>
-        <p:spPr>
-          <a:xfrm>
-            <a:off x="640080" y="1408175"/>
-            <a:ext cx="274320" cy="274320"/>
-          </a:xfrm>
-          <a:prstGeom prst="rect">
-            <a:avLst/>
-          </a:prstGeom>
-          <a:solidFill>
-            <a:srgbClr val="FFFFFF"/>
-          </a:solidFill>
-          <a:ln>
-            <a:solidFill>
-              <a:srgbClr val="333333"/>
-            </a:solidFill>
-          </a:ln>
-        </p:spPr>
-        <p:style>
-          <a:lnRef idx="1">
-            <a:schemeClr val="accent1"/>
-          </a:lnRef>
-          <a:fillRef idx="3">
-            <a:schemeClr val="accent1"/>
-          </a:fillRef>
-          <a:effectRef idx="2">
-            <a:schemeClr val="accent1"/>
-          </a:effectRef>
-          <a:fontRef idx="minor">
-            <a:schemeClr val="lt1"/>
-          </a:fontRef>
-        </p:style>
-        <p:txBody>
-          <a:bodyPr rtlCol="0" anchor="ctr"/>
-          <a:lstStyle/>
-          <a:p>
-            <a:pPr algn="ctr"/>
-          </a:p>
-        </p:txBody>
-      </p:sp>
-      <p:sp>
-        <p:nvSpPr>
-          <p:cNvPr id="7" name="Rectangle 6"/>
-          <p:cNvSpPr/>
-          <p:nvPr/>
-        </p:nvSpPr>
-        <p:spPr>
-          <a:xfrm>
-            <a:off x="640080" y="1408175"/>
-            <a:ext cx="73152" cy="274320"/>
-          </a:xfrm>
-          <a:prstGeom prst="rect">
-            <a:avLst/>
-          </a:prstGeom>
-          <a:solidFill>
-            <a:srgbClr val="269CCB"/>
-          </a:solidFill>
-          <a:ln>
-            <a:noFill/>
-          </a:ln>
-        </p:spPr>
-        <p:style>
-          <a:lnRef idx="1">
-            <a:schemeClr val="accent1"/>
-          </a:lnRef>
-          <a:fillRef idx="3">
-            <a:schemeClr val="accent1"/>
-          </a:fillRef>
-          <a:effectRef idx="2">
-            <a:schemeClr val="accent1"/>
-          </a:effectRef>
-          <a:fontRef idx="minor">
-            <a:schemeClr val="lt1"/>
-          </a:fontRef>
-        </p:style>
-        <p:txBody>
-          <a:bodyPr rtlCol="0" anchor="ctr"/>
-          <a:lstStyle/>
-          <a:p>
-            <a:pPr algn="ctr"/>
-          </a:p>
-        </p:txBody>
-      </p:sp>
-      <p:sp>
-        <p:nvSpPr>
-          <p:cNvPr id="8" name="TextBox 7"/>
-          <p:cNvSpPr txBox="1"/>
-          <p:nvPr/>
-        </p:nvSpPr>
-        <p:spPr>
-          <a:xfrm>
-            <a:off x="1097280" y="1353312"/>
-            <a:ext cx="10362895" cy="402336"/>
-          </a:xfrm>
-          <a:prstGeom prst="rect">
-            <a:avLst/>
-          </a:prstGeom>
-          <a:noFill/>
-        </p:spPr>
-        <p:txBody>
-          <a:bodyPr wrap="square" anchor="ctr"/>
-          <a:lstStyle/>
-          <a:p>
-            <a:r>
-              <a:rPr sz="1500" b="0" i="0">
-                <a:solidFill>
-                  <a:srgbClr val="333333"/>
-                </a:solidFill>
-                <a:latin typeface="Calibri"/>
-              </a:rPr>
-              <a:t>Si el jurado le pregunta por una parte que no alcanzo a mostrar, puede responderla sin buscar ayuda (y si hay equipo autorizado, cualquier integrante puede responder por cualquier bloque).</a:t>
-            </a:r>
-          </a:p>
-        </p:txBody>
-      </p:sp>
-      <p:sp>
-        <p:nvSpPr>
-          <p:cNvPr id="9" name="Rounded Rectangle 8"/>
-          <p:cNvSpPr/>
-          <p:nvPr/>
-        </p:nvSpPr>
-        <p:spPr>
-          <a:xfrm>
-            <a:off x="457200" y="1938528"/>
-            <a:ext cx="11277295" cy="566928"/>
-          </a:xfrm>
-          <a:prstGeom prst="roundRect">
-            <a:avLst>
-              <a:gd name="adj" fmla="val 12000"/>
-            </a:avLst>
-          </a:prstGeom>
-          <a:solidFill>
-            <a:srgbClr val="F2F2F2"/>
-          </a:solidFill>
-          <a:ln>
-            <a:noFill/>
-          </a:ln>
-        </p:spPr>
-        <p:style>
-          <a:lnRef idx="1">
-            <a:schemeClr val="accent1"/>
-          </a:lnRef>
-          <a:fillRef idx="3">
-            <a:schemeClr val="accent1"/>
-          </a:fillRef>
-          <a:effectRef idx="2">
-            <a:schemeClr val="accent1"/>
-          </a:effectRef>
-          <a:fontRef idx="minor">
-            <a:schemeClr val="lt1"/>
-          </a:fontRef>
-        </p:style>
-        <p:txBody>
-          <a:bodyPr rtlCol="0" anchor="ctr"/>
-          <a:lstStyle/>
-          <a:p>
-            <a:pPr algn="ctr"/>
-          </a:p>
-        </p:txBody>
-      </p:sp>
-      <p:sp>
-        <p:nvSpPr>
-          <p:cNvPr id="10" name="Rectangle 9"/>
-          <p:cNvSpPr/>
-          <p:nvPr/>
-        </p:nvSpPr>
-        <p:spPr>
-          <a:xfrm>
-            <a:off x="640080" y="2084832"/>
-            <a:ext cx="274320" cy="274320"/>
-          </a:xfrm>
-          <a:prstGeom prst="rect">
-            <a:avLst/>
-          </a:prstGeom>
-          <a:solidFill>
-            <a:srgbClr val="FFFFFF"/>
-          </a:solidFill>
-          <a:ln>
-            <a:solidFill>
-              <a:srgbClr val="333333"/>
-            </a:solidFill>
-          </a:ln>
-        </p:spPr>
-        <p:style>
-          <a:lnRef idx="1">
-            <a:schemeClr val="accent1"/>
-          </a:lnRef>
-          <a:fillRef idx="3">
-            <a:schemeClr val="accent1"/>
-          </a:fillRef>
-          <a:effectRef idx="2">
-            <a:schemeClr val="accent1"/>
-          </a:effectRef>
-          <a:fontRef idx="minor">
-            <a:schemeClr val="lt1"/>
-          </a:fontRef>
-        </p:style>
-        <p:txBody>
-          <a:bodyPr rtlCol="0" anchor="ctr"/>
-          <a:lstStyle/>
-          <a:p>
-            <a:pPr algn="ctr"/>
-          </a:p>
-        </p:txBody>
-      </p:sp>
-      <p:sp>
-        <p:nvSpPr>
-          <p:cNvPr id="11" name="Rectangle 10"/>
-          <p:cNvSpPr/>
-          <p:nvPr/>
-        </p:nvSpPr>
-        <p:spPr>
-          <a:xfrm>
-            <a:off x="640080" y="2084832"/>
-            <a:ext cx="73152" cy="274320"/>
-          </a:xfrm>
-          <a:prstGeom prst="rect">
-            <a:avLst/>
-          </a:prstGeom>
-          <a:solidFill>
-            <a:srgbClr val="269CCB"/>
-          </a:solidFill>
-          <a:ln>
-            <a:noFill/>
-          </a:ln>
-        </p:spPr>
-        <p:style>
-          <a:lnRef idx="1">
-            <a:schemeClr val="accent1"/>
-          </a:lnRef>
-          <a:fillRef idx="3">
-            <a:schemeClr val="accent1"/>
-          </a:fillRef>
-          <a:effectRef idx="2">
-            <a:schemeClr val="accent1"/>
-          </a:effectRef>
-          <a:fontRef idx="minor">
-            <a:schemeClr val="lt1"/>
-          </a:fontRef>
-        </p:style>
-        <p:txBody>
-          <a:bodyPr rtlCol="0" anchor="ctr"/>
-          <a:lstStyle/>
-          <a:p>
-            <a:pPr algn="ctr"/>
-          </a:p>
-        </p:txBody>
-      </p:sp>
-      <p:sp>
-        <p:nvSpPr>
-          <p:cNvPr id="12" name="TextBox 11"/>
-          <p:cNvSpPr txBox="1"/>
-          <p:nvPr/>
-        </p:nvSpPr>
-        <p:spPr>
-          <a:xfrm>
-            <a:off x="1097280" y="2029968"/>
-            <a:ext cx="10362895" cy="402336"/>
-          </a:xfrm>
-          <a:prstGeom prst="rect">
-            <a:avLst/>
-          </a:prstGeom>
-          <a:noFill/>
-        </p:spPr>
-        <p:txBody>
-          <a:bodyPr wrap="square" anchor="ctr"/>
-          <a:lstStyle/>
-          <a:p>
-            <a:r>
-              <a:rPr sz="1500" b="0" i="0">
-                <a:solidFill>
-                  <a:srgbClr val="333333"/>
-                </a:solidFill>
-                <a:latin typeface="Calibri"/>
-              </a:rPr>
-              <a:t>De sus tres decisiones de diseño, cual podria haberse tomado al reves sin que el proyecto se cayera, y que perderia la clinica si se hubiera tomado asi.</a:t>
-            </a:r>
-          </a:p>
-        </p:txBody>
-      </p:sp>
-      <p:sp>
-        <p:nvSpPr>
-          <p:cNvPr id="13" name="Rounded Rectangle 12"/>
-          <p:cNvSpPr/>
-          <p:nvPr/>
-        </p:nvSpPr>
-        <p:spPr>
-          <a:xfrm>
-            <a:off x="457200" y="2615184"/>
-            <a:ext cx="11277295" cy="566928"/>
-          </a:xfrm>
-          <a:prstGeom prst="roundRect">
-            <a:avLst>
-              <a:gd name="adj" fmla="val 12000"/>
-            </a:avLst>
-          </a:prstGeom>
-          <a:solidFill>
-            <a:srgbClr val="F2F2F2"/>
-          </a:solidFill>
-          <a:ln>
-            <a:noFill/>
-          </a:ln>
-        </p:spPr>
-        <p:style>
-          <a:lnRef idx="1">
-            <a:schemeClr val="accent1"/>
-          </a:lnRef>
-          <a:fillRef idx="3">
-            <a:schemeClr val="accent1"/>
-          </a:fillRef>
-          <a:effectRef idx="2">
-            <a:schemeClr val="accent1"/>
-          </a:effectRef>
-          <a:fontRef idx="minor">
-            <a:schemeClr val="lt1"/>
-          </a:fontRef>
-        </p:style>
-        <p:txBody>
-          <a:bodyPr rtlCol="0" anchor="ctr"/>
-          <a:lstStyle/>
-          <a:p>
-            <a:pPr algn="ctr"/>
-          </a:p>
-        </p:txBody>
-      </p:sp>
-      <p:sp>
-        <p:nvSpPr>
-          <p:cNvPr id="14" name="Rectangle 13"/>
-          <p:cNvSpPr/>
-          <p:nvPr/>
-        </p:nvSpPr>
-        <p:spPr>
-          <a:xfrm>
-            <a:off x="640080" y="2761488"/>
-            <a:ext cx="274320" cy="274320"/>
-          </a:xfrm>
-          <a:prstGeom prst="rect">
-            <a:avLst/>
-          </a:prstGeom>
-          <a:solidFill>
-            <a:srgbClr val="FFFFFF"/>
-          </a:solidFill>
-          <a:ln>
-            <a:solidFill>
-              <a:srgbClr val="333333"/>
-            </a:solidFill>
-          </a:ln>
-        </p:spPr>
-        <p:style>
-          <a:lnRef idx="1">
-            <a:schemeClr val="accent1"/>
-          </a:lnRef>
-          <a:fillRef idx="3">
-            <a:schemeClr val="accent1"/>
-          </a:fillRef>
-          <a:effectRef idx="2">
-            <a:schemeClr val="accent1"/>
-          </a:effectRef>
-          <a:fontRef idx="minor">
-            <a:schemeClr val="lt1"/>
-          </a:fontRef>
-        </p:style>
-        <p:txBody>
-          <a:bodyPr rtlCol="0" anchor="ctr"/>
-          <a:lstStyle/>
-          <a:p>
-            <a:pPr algn="ctr"/>
-          </a:p>
-        </p:txBody>
-      </p:sp>
-      <p:sp>
-        <p:nvSpPr>
-          <p:cNvPr id="15" name="Rectangle 14"/>
-          <p:cNvSpPr/>
-          <p:nvPr/>
-        </p:nvSpPr>
-        <p:spPr>
-          <a:xfrm>
-            <a:off x="640080" y="2761488"/>
-            <a:ext cx="73152" cy="274320"/>
-          </a:xfrm>
-          <a:prstGeom prst="rect">
-            <a:avLst/>
-          </a:prstGeom>
-          <a:solidFill>
-            <a:srgbClr val="269CCB"/>
-          </a:solidFill>
-          <a:ln>
-            <a:noFill/>
-          </a:ln>
-        </p:spPr>
-        <p:style>
-          <a:lnRef idx="1">
-            <a:schemeClr val="accent1"/>
-          </a:lnRef>
-          <a:fillRef idx="3">
-            <a:schemeClr val="accent1"/>
-          </a:fillRef>
-          <a:effectRef idx="2">
-            <a:schemeClr val="accent1"/>
-          </a:effectRef>
-          <a:fontRef idx="minor">
-            <a:schemeClr val="lt1"/>
-          </a:fontRef>
-        </p:style>
-        <p:txBody>
-          <a:bodyPr rtlCol="0" anchor="ctr"/>
-          <a:lstStyle/>
-          <a:p>
-            <a:pPr algn="ctr"/>
-          </a:p>
-        </p:txBody>
-      </p:sp>
-      <p:sp>
-        <p:nvSpPr>
-          <p:cNvPr id="16" name="TextBox 15"/>
-          <p:cNvSpPr txBox="1"/>
-          <p:nvPr/>
-        </p:nvSpPr>
-        <p:spPr>
-          <a:xfrm>
-            <a:off x="1097280" y="2706624"/>
-            <a:ext cx="10362895" cy="402336"/>
-          </a:xfrm>
-          <a:prstGeom prst="rect">
-            <a:avLst/>
-          </a:prstGeom>
-          <a:noFill/>
-        </p:spPr>
-        <p:txBody>
-          <a:bodyPr wrap="square" anchor="ctr"/>
-          <a:lstStyle/>
-          <a:p>
-            <a:r>
-              <a:rPr sz="1500" b="0" i="0">
-                <a:solidFill>
-                  <a:srgbClr val="333333"/>
-                </a:solidFill>
-                <a:latin typeface="Calibri"/>
-              </a:rPr>
-              <a:t>Si el internet falla justo antes de mostrar el prototipo, que hace el equipo en los siguientes quince segundos para no perder el bloque de interfaz.</a:t>
-            </a:r>
-          </a:p>
-        </p:txBody>
-      </p:sp>
-      <p:sp>
-        <p:nvSpPr>
-          <p:cNvPr id="17" name="TextBox 16"/>
-          <p:cNvSpPr txBox="1"/>
-          <p:nvPr/>
-        </p:nvSpPr>
-        <p:spPr>
-          <a:xfrm>
-            <a:off x="11185855" y="6473952"/>
-            <a:ext cx="640080" cy="274320"/>
-          </a:xfrm>
-          <a:prstGeom prst="rect">
-            <a:avLst/>
-          </a:prstGeom>
-          <a:noFill/>
-        </p:spPr>
-        <p:txBody>
-          <a:bodyPr wrap="square">
-            <a:spAutoFit/>
-          </a:bodyPr>
-          <a:lstStyle/>
-          <a:p>
-            <a:pPr algn="r"/>
-            <a:r>
-              <a:rPr sz="1100" b="0" i="0">
-                <a:solidFill>
-                  <a:srgbClr val="666666"/>
-                </a:solidFill>
-                <a:latin typeface="Calibri"/>
-              </a:rPr>
-              <a:t>19</a:t>
+                  <a:srgbClr val="269CCB"/>
+                </a:solidFill>
+                <a:latin typeface="Calibri"/>
+              </a:rPr>
+              <a:t>Teoria al servicio del diseño</a:t>
             </a:r>
           </a:p>
         </p:txBody>
@@ -9079,7 +6449,7 @@
                 </a:solidFill>
                 <a:latin typeface="Calibri"/>
               </a:rPr>
-              <a:t>Encuadre de hoy · Objetivo del PI</a:t>
+              <a:t>Encuadre de hoy</a:t>
             </a:r>
           </a:p>
         </p:txBody>
@@ -9127,7 +6497,7 @@
                 </a:solidFill>
                 <a:latin typeface="Calibri"/>
               </a:rPr>
-              <a:t>Hoy avanzamos VetCare en:</a:t>
+              <a:t>Tema:</a:t>
             </a:r>
             <a:r>
               <a:rPr sz="2000" b="0" i="0">
@@ -9136,7 +6506,7 @@
                 </a:solidFill>
                 <a:latin typeface="Calibri"/>
               </a:rPr>
-              <a:t> Queda armado el guion cronometrado de sustentacion de VetCare y consolidado el documento final de diseño en una sola pieza coherente.</a:t>
+              <a:t> Preparacion de la sustentacion y cierre</a:t>
             </a:r>
           </a:p>
           <a:p>
@@ -9152,34 +6522,7 @@
                 </a:solidFill>
                 <a:latin typeface="Calibri"/>
               </a:rPr>
-              <a:t>–   Herramienta: </a:t>
-            </a:r>
-            <a:r>
-              <a:rPr sz="2000" b="1" i="0">
-                <a:solidFill>
-                  <a:srgbClr val="333333"/>
-                </a:solidFill>
-                <a:latin typeface="Calibri"/>
-              </a:rPr>
-              <a:t>Google Docs · draw.io · Figma o Penpot</a:t>
-            </a:r>
-            <a:r>
-              <a:rPr sz="2000" b="0" i="0">
-                <a:solidFill>
-                  <a:srgbClr val="333333"/>
-                </a:solidFill>
-                <a:latin typeface="Calibri"/>
-              </a:rPr>
-              <a:t> · Bloque </a:t>
-            </a:r>
-            <a:r>
-              <a:rPr sz="2000" b="1" i="0">
-                <a:solidFill>
-                  <a:srgbClr val="333333"/>
-                </a:solidFill>
-                <a:latin typeface="Calibri"/>
-              </a:rPr>
-              <a:t>120 min</a:t>
+              <a:t>–   Como se defiende un paquete de planos frente a un jurado</a:t>
             </a:r>
           </a:p>
           <a:p>
@@ -9195,7 +6538,7 @@
                 </a:solidFill>
                 <a:latin typeface="Calibri"/>
               </a:rPr>
-              <a:t>–   </a:t>
+              <a:t>–   Herramienta del tema: </a:t>
             </a:r>
             <a:r>
               <a:rPr sz="2000" b="1" i="0">
@@ -9204,7 +6547,7 @@
                 </a:solidFill>
                 <a:latin typeface="Calibri"/>
               </a:rPr>
-              <a:t>Entregable de hoy:</a:t>
+              <a:t>Google Docs · draw.io · Figma o Penpot</a:t>
             </a:r>
             <a:r>
               <a:rPr sz="2000" b="0" i="0">
@@ -9213,7 +6556,16 @@
                 </a:solidFill>
                 <a:latin typeface="Calibri"/>
               </a:rPr>
-              <a:t> Un documento en Google Docs con el guion minuto a minuto repartido en bloques con tiempos y evidencia (con responsable nominal solo si el docente autorizo equipo), la tabla de tres decisiones de diseño defendidas y el banco de diez preguntas con su respuesta, mas el indice del documento final consolidado, subido a la plataforma del curso.</a:t>
+              <a:t> · Bloque </a:t>
+            </a:r>
+            <a:r>
+              <a:rPr sz="2000" b="1" i="0">
+                <a:solidFill>
+                  <a:srgbClr val="333333"/>
+                </a:solidFill>
+                <a:latin typeface="Calibri"/>
+              </a:rPr>
+              <a:t>120 min</a:t>
             </a:r>
           </a:p>
           <a:p>
@@ -9229,7 +6581,7 @@
                 </a:solidFill>
                 <a:latin typeface="Calibri"/>
               </a:rPr>
-              <a:t>–   La teoria esta al servicio del producto: al salir, VetCare avanzo.</a:t>
+              <a:t>–   Ejemplo de toda la clase: VetCare, el sistema de la clinica «Huellitas».</a:t>
             </a:r>
           </a:p>
         </p:txBody>
@@ -9265,1241 +6617,6 @@
                 <a:latin typeface="Calibri"/>
               </a:rPr>
               <a:t>2</a:t>
-            </a:r>
-          </a:p>
-        </p:txBody>
-      </p:sp>
-    </p:spTree>
-  </p:cSld>
-  <p:clrMapOvr>
-    <a:masterClrMapping/>
-  </p:clrMapOvr>
-</p:sld>
-</file>
-
-<file path=ppt/slides/slide20.xml><?xml version="1.0" encoding="utf-8"?>
-<p:sld xmlns:a="http://schemas.openxmlformats.org/drawingml/2006/main" xmlns:p="http://schemas.openxmlformats.org/presentationml/2006/main" xmlns:r="http://schemas.openxmlformats.org/officeDocument/2006/relationships">
-  <p:cSld>
-    <p:bg>
-      <p:bgPr>
-        <a:solidFill>
-          <a:srgbClr val="FFFFFF"/>
-        </a:solidFill>
-        <a:effectLst/>
-      </p:bgPr>
-    </p:bg>
-    <p:spTree>
-      <p:nvGrpSpPr>
-        <p:cNvPr id="1" name=""/>
-        <p:cNvGrpSpPr/>
-        <p:nvPr/>
-      </p:nvGrpSpPr>
-      <p:grpSpPr/>
-      <p:sp>
-        <p:nvSpPr>
-          <p:cNvPr id="2" name="Rectangle 1"/>
-          <p:cNvSpPr/>
-          <p:nvPr/>
-        </p:nvSpPr>
-        <p:spPr>
-          <a:xfrm>
-            <a:off x="0" y="0"/>
-            <a:ext cx="12191695" cy="960120"/>
-          </a:xfrm>
-          <a:prstGeom prst="rect">
-            <a:avLst/>
-          </a:prstGeom>
-          <a:solidFill>
-            <a:srgbClr val="095292"/>
-          </a:solidFill>
-          <a:ln>
-            <a:noFill/>
-          </a:ln>
-        </p:spPr>
-        <p:style>
-          <a:lnRef idx="1">
-            <a:schemeClr val="accent1"/>
-          </a:lnRef>
-          <a:fillRef idx="3">
-            <a:schemeClr val="accent1"/>
-          </a:fillRef>
-          <a:effectRef idx="2">
-            <a:schemeClr val="accent1"/>
-          </a:effectRef>
-          <a:fontRef idx="minor">
-            <a:schemeClr val="lt1"/>
-          </a:fontRef>
-        </p:style>
-        <p:txBody>
-          <a:bodyPr rtlCol="0" anchor="ctr"/>
-          <a:lstStyle/>
-          <a:p>
-            <a:pPr algn="ctr"/>
-          </a:p>
-        </p:txBody>
-      </p:sp>
-      <p:sp>
-        <p:nvSpPr>
-          <p:cNvPr id="3" name="Rectangle 2"/>
-          <p:cNvSpPr/>
-          <p:nvPr/>
-        </p:nvSpPr>
-        <p:spPr>
-          <a:xfrm>
-            <a:off x="0" y="960120"/>
-            <a:ext cx="12191695" cy="41148"/>
-          </a:xfrm>
-          <a:prstGeom prst="rect">
-            <a:avLst/>
-          </a:prstGeom>
-          <a:solidFill>
-            <a:srgbClr val="FFD000"/>
-          </a:solidFill>
-          <a:ln>
-            <a:noFill/>
-          </a:ln>
-        </p:spPr>
-        <p:style>
-          <a:lnRef idx="1">
-            <a:schemeClr val="accent1"/>
-          </a:lnRef>
-          <a:fillRef idx="3">
-            <a:schemeClr val="accent1"/>
-          </a:fillRef>
-          <a:effectRef idx="2">
-            <a:schemeClr val="accent1"/>
-          </a:effectRef>
-          <a:fontRef idx="minor">
-            <a:schemeClr val="lt1"/>
-          </a:fontRef>
-        </p:style>
-        <p:txBody>
-          <a:bodyPr rtlCol="0" anchor="ctr"/>
-          <a:lstStyle/>
-          <a:p>
-            <a:pPr algn="ctr"/>
-          </a:p>
-        </p:txBody>
-      </p:sp>
-      <p:sp>
-        <p:nvSpPr>
-          <p:cNvPr id="4" name="TextBox 3"/>
-          <p:cNvSpPr txBox="1"/>
-          <p:nvPr/>
-        </p:nvSpPr>
-        <p:spPr>
-          <a:xfrm>
-            <a:off x="457200" y="164592"/>
-            <a:ext cx="11277295" cy="502920"/>
-          </a:xfrm>
-          <a:prstGeom prst="rect">
-            <a:avLst/>
-          </a:prstGeom>
-          <a:noFill/>
-        </p:spPr>
-        <p:txBody>
-          <a:bodyPr wrap="square">
-            <a:spAutoFit/>
-          </a:bodyPr>
-          <a:lstStyle/>
-          <a:p>
-            <a:r>
-              <a:rPr sz="2600" b="1" i="0">
-                <a:solidFill>
-                  <a:srgbClr val="FFFFFF"/>
-                </a:solidFill>
-                <a:latin typeface="Calibri"/>
-              </a:rPr>
-              <a:t>Criterios de exito / entregable</a:t>
-            </a:r>
-          </a:p>
-        </p:txBody>
-      </p:sp>
-      <p:sp>
-        <p:nvSpPr>
-          <p:cNvPr id="5" name="TextBox 4"/>
-          <p:cNvSpPr txBox="1"/>
-          <p:nvPr/>
-        </p:nvSpPr>
-        <p:spPr>
-          <a:xfrm>
-            <a:off x="457200" y="1170432"/>
-            <a:ext cx="11277295" cy="5230368"/>
-          </a:xfrm>
-          <a:prstGeom prst="rect">
-            <a:avLst/>
-          </a:prstGeom>
-          <a:noFill/>
-        </p:spPr>
-        <p:txBody>
-          <a:bodyPr wrap="square">
-            <a:spAutoFit/>
-          </a:bodyPr>
-          <a:lstStyle/>
-          <a:p>
-            <a:pPr>
-              <a:spcAft>
-                <a:spcPts val="800"/>
-              </a:spcAft>
-            </a:pPr>
-            <a:r>
-              <a:rPr sz="2000" b="0" i="0">
-                <a:solidFill>
-                  <a:srgbClr val="333333"/>
-                </a:solidFill>
-                <a:latin typeface="Calibri"/>
-              </a:rPr>
-              <a:t>–   </a:t>
-            </a:r>
-            <a:r>
-              <a:rPr sz="2000" b="1" i="0">
-                <a:solidFill>
-                  <a:srgbClr val="333333"/>
-                </a:solidFill>
-                <a:latin typeface="Calibri"/>
-              </a:rPr>
-              <a:t>Entregable:</a:t>
-            </a:r>
-            <a:r>
-              <a:rPr sz="2000" b="0" i="0">
-                <a:solidFill>
-                  <a:srgbClr val="333333"/>
-                </a:solidFill>
-                <a:latin typeface="Calibri"/>
-              </a:rPr>
-              <a:t> Un documento en Google Docs con el guion minuto a minuto repartido en bloques con tiempos y evidencia (con responsable nominal solo si el docente autorizo equipo), la tabla de tres decisiones de diseño defendidas y el banco de diez preguntas con su respuesta, mas el indice del documento final consolidado, subido a la plataforma del curso.</a:t>
-            </a:r>
-          </a:p>
-          <a:p>
-            <a:pPr>
-              <a:spcAft>
-                <a:spcPts val="800"/>
-              </a:spcAft>
-            </a:pPr>
-            <a:r>
-              <a:rPr sz="2000" b="0" i="0">
-                <a:solidFill>
-                  <a:srgbClr val="333333"/>
-                </a:solidFill>
-                <a:latin typeface="Calibri"/>
-              </a:rPr>
-              <a:t>–   </a:t>
-            </a:r>
-            <a:r>
-              <a:rPr sz="2000" b="1" i="0">
-                <a:solidFill>
-                  <a:srgbClr val="333333"/>
-                </a:solidFill>
-                <a:latin typeface="Calibri"/>
-              </a:rPr>
-              <a:t>Exito:</a:t>
-            </a:r>
-            <a:r>
-              <a:rPr sz="2000" b="0" i="0">
-                <a:solidFill>
-                  <a:srgbClr val="333333"/>
-                </a:solidFill>
-                <a:latin typeface="Calibri"/>
-              </a:rPr>
-              <a:t> El guion tiene las cinco secciones en el orden problema, requisitos, modelo, interfaz y decisiones, con minutos asignados que suman doce, cada bloque con su evidencia en pantalla y, si el docente autorizo equipo, todos los integrantes hablando al menos dos minutos.</a:t>
-            </a:r>
-          </a:p>
-          <a:p>
-            <a:pPr>
-              <a:spcAft>
-                <a:spcPts val="800"/>
-              </a:spcAft>
-            </a:pPr>
-            <a:r>
-              <a:rPr sz="2000" b="0" i="0">
-                <a:solidFill>
-                  <a:srgbClr val="333333"/>
-                </a:solidFill>
-                <a:latin typeface="Calibri"/>
-              </a:rPr>
-              <a:t>–   </a:t>
-            </a:r>
-            <a:r>
-              <a:rPr sz="2000" b="1" i="0">
-                <a:solidFill>
-                  <a:srgbClr val="333333"/>
-                </a:solidFill>
-                <a:latin typeface="Calibri"/>
-              </a:rPr>
-              <a:t>Exito:</a:t>
-            </a:r>
-            <a:r>
-              <a:rPr sz="2000" b="0" i="0">
-                <a:solidFill>
-                  <a:srgbClr val="333333"/>
-                </a:solidFill>
-                <a:latin typeface="Calibri"/>
-              </a:rPr>
-              <a:t> Las tres decisiones de diseño estan escritas con las cuatro columnas completas, incluida la consecuencia asumida, y ninguna se justifica por gusto o por costumbre.</a:t>
-            </a:r>
-          </a:p>
-          <a:p>
-            <a:pPr>
-              <a:spcAft>
-                <a:spcPts val="800"/>
-              </a:spcAft>
-            </a:pPr>
-            <a:r>
-              <a:rPr sz="2000" b="0" i="0">
-                <a:solidFill>
-                  <a:srgbClr val="333333"/>
-                </a:solidFill>
-                <a:latin typeface="Calibri"/>
-              </a:rPr>
-              <a:t>–   </a:t>
-            </a:r>
-            <a:r>
-              <a:rPr sz="2000" b="1" i="0">
-                <a:solidFill>
-                  <a:srgbClr val="333333"/>
-                </a:solidFill>
-                <a:latin typeface="Calibri"/>
-              </a:rPr>
-              <a:t>Exito:</a:t>
-            </a:r>
-            <a:r>
-              <a:rPr sz="2000" b="0" i="0">
-                <a:solidFill>
-                  <a:srgbClr val="333333"/>
-                </a:solidFill>
-                <a:latin typeface="Calibri"/>
-              </a:rPr>
-              <a:t> El banco tiene diez preguntas con respuesta de maximo dos frases y contempla al menos un caso de concurrencia, uno de medicion de RNF y uno de alcance excluido.</a:t>
-            </a:r>
-          </a:p>
-          <a:p>
-            <a:pPr>
-              <a:spcAft>
-                <a:spcPts val="800"/>
-              </a:spcAft>
-            </a:pPr>
-            <a:r>
-              <a:rPr sz="2000" b="0" i="0">
-                <a:solidFill>
-                  <a:srgbClr val="333333"/>
-                </a:solidFill>
-                <a:latin typeface="Calibri"/>
-              </a:rPr>
-              <a:t>–   </a:t>
-            </a:r>
-            <a:r>
-              <a:rPr sz="2000" b="1" i="0">
-                <a:solidFill>
-                  <a:srgbClr val="333333"/>
-                </a:solidFill>
-                <a:latin typeface="Calibri"/>
-              </a:rPr>
-              <a:t>Exito:</a:t>
-            </a:r>
-            <a:r>
-              <a:rPr sz="2000" b="0" i="0">
-                <a:solidFill>
-                  <a:srgbClr val="333333"/>
-                </a:solidFill>
-                <a:latin typeface="Calibri"/>
-              </a:rPr>
-              <a:t> El documento final consolidado tiene indice, version y al menos una inconsistencia entre artefactos detectada y corregida, dejando registro de cual era.</a:t>
-            </a:r>
-          </a:p>
-          <a:p>
-            <a:pPr>
-              <a:spcAft>
-                <a:spcPts val="800"/>
-              </a:spcAft>
-            </a:pPr>
-            <a:r>
-              <a:rPr sz="2000" b="0" i="0">
-                <a:solidFill>
-                  <a:srgbClr val="333333"/>
-                </a:solidFill>
-                <a:latin typeface="Calibri"/>
-              </a:rPr>
-              <a:t>–   </a:t>
-            </a:r>
-            <a:r>
-              <a:rPr sz="2000" b="1" i="0">
-                <a:solidFill>
-                  <a:srgbClr val="333333"/>
-                </a:solidFill>
-                <a:latin typeface="Calibri"/>
-              </a:rPr>
-              <a:t>Entrega en la plataforma del curso</a:t>
-            </a:r>
-            <a:r>
-              <a:rPr sz="2000" b="0" i="0">
-                <a:solidFill>
-                  <a:srgbClr val="333333"/>
-                </a:solidFill>
-                <a:latin typeface="Calibri"/>
-              </a:rPr>
-              <a:t> — en la fecha que indique el docente.</a:t>
-            </a:r>
-          </a:p>
-        </p:txBody>
-      </p:sp>
-      <p:sp>
-        <p:nvSpPr>
-          <p:cNvPr id="6" name="TextBox 5"/>
-          <p:cNvSpPr txBox="1"/>
-          <p:nvPr/>
-        </p:nvSpPr>
-        <p:spPr>
-          <a:xfrm>
-            <a:off x="11185855" y="6473952"/>
-            <a:ext cx="640080" cy="274320"/>
-          </a:xfrm>
-          <a:prstGeom prst="rect">
-            <a:avLst/>
-          </a:prstGeom>
-          <a:noFill/>
-        </p:spPr>
-        <p:txBody>
-          <a:bodyPr wrap="square">
-            <a:spAutoFit/>
-          </a:bodyPr>
-          <a:lstStyle/>
-          <a:p>
-            <a:pPr algn="r"/>
-            <a:r>
-              <a:rPr sz="1100" b="0" i="0">
-                <a:solidFill>
-                  <a:srgbClr val="666666"/>
-                </a:solidFill>
-                <a:latin typeface="Calibri"/>
-              </a:rPr>
-              <a:t>20</a:t>
-            </a:r>
-          </a:p>
-        </p:txBody>
-      </p:sp>
-    </p:spTree>
-  </p:cSld>
-  <p:clrMapOvr>
-    <a:masterClrMapping/>
-  </p:clrMapOvr>
-</p:sld>
-</file>
-
-<file path=ppt/slides/slide21.xml><?xml version="1.0" encoding="utf-8"?>
-<p:sld xmlns:a="http://schemas.openxmlformats.org/drawingml/2006/main" xmlns:p="http://schemas.openxmlformats.org/presentationml/2006/main" xmlns:r="http://schemas.openxmlformats.org/officeDocument/2006/relationships">
-  <p:cSld>
-    <p:bg>
-      <p:bgPr>
-        <a:solidFill>
-          <a:srgbClr val="FFFFFF"/>
-        </a:solidFill>
-        <a:effectLst/>
-      </p:bgPr>
-    </p:bg>
-    <p:spTree>
-      <p:nvGrpSpPr>
-        <p:cNvPr id="1" name=""/>
-        <p:cNvGrpSpPr/>
-        <p:nvPr/>
-      </p:nvGrpSpPr>
-      <p:grpSpPr/>
-      <p:sp>
-        <p:nvSpPr>
-          <p:cNvPr id="2" name="Rectangle 1"/>
-          <p:cNvSpPr/>
-          <p:nvPr/>
-        </p:nvSpPr>
-        <p:spPr>
-          <a:xfrm>
-            <a:off x="0" y="0"/>
-            <a:ext cx="12191695" cy="960120"/>
-          </a:xfrm>
-          <a:prstGeom prst="rect">
-            <a:avLst/>
-          </a:prstGeom>
-          <a:solidFill>
-            <a:srgbClr val="095292"/>
-          </a:solidFill>
-          <a:ln>
-            <a:noFill/>
-          </a:ln>
-        </p:spPr>
-        <p:style>
-          <a:lnRef idx="1">
-            <a:schemeClr val="accent1"/>
-          </a:lnRef>
-          <a:fillRef idx="3">
-            <a:schemeClr val="accent1"/>
-          </a:fillRef>
-          <a:effectRef idx="2">
-            <a:schemeClr val="accent1"/>
-          </a:effectRef>
-          <a:fontRef idx="minor">
-            <a:schemeClr val="lt1"/>
-          </a:fontRef>
-        </p:style>
-        <p:txBody>
-          <a:bodyPr rtlCol="0" anchor="ctr"/>
-          <a:lstStyle/>
-          <a:p>
-            <a:pPr algn="ctr"/>
-          </a:p>
-        </p:txBody>
-      </p:sp>
-      <p:sp>
-        <p:nvSpPr>
-          <p:cNvPr id="3" name="Rectangle 2"/>
-          <p:cNvSpPr/>
-          <p:nvPr/>
-        </p:nvSpPr>
-        <p:spPr>
-          <a:xfrm>
-            <a:off x="0" y="960120"/>
-            <a:ext cx="12191695" cy="41148"/>
-          </a:xfrm>
-          <a:prstGeom prst="rect">
-            <a:avLst/>
-          </a:prstGeom>
-          <a:solidFill>
-            <a:srgbClr val="FFD000"/>
-          </a:solidFill>
-          <a:ln>
-            <a:noFill/>
-          </a:ln>
-        </p:spPr>
-        <p:style>
-          <a:lnRef idx="1">
-            <a:schemeClr val="accent1"/>
-          </a:lnRef>
-          <a:fillRef idx="3">
-            <a:schemeClr val="accent1"/>
-          </a:fillRef>
-          <a:effectRef idx="2">
-            <a:schemeClr val="accent1"/>
-          </a:effectRef>
-          <a:fontRef idx="minor">
-            <a:schemeClr val="lt1"/>
-          </a:fontRef>
-        </p:style>
-        <p:txBody>
-          <a:bodyPr rtlCol="0" anchor="ctr"/>
-          <a:lstStyle/>
-          <a:p>
-            <a:pPr algn="ctr"/>
-          </a:p>
-        </p:txBody>
-      </p:sp>
-      <p:sp>
-        <p:nvSpPr>
-          <p:cNvPr id="4" name="TextBox 3"/>
-          <p:cNvSpPr txBox="1"/>
-          <p:nvPr/>
-        </p:nvSpPr>
-        <p:spPr>
-          <a:xfrm>
-            <a:off x="457200" y="164592"/>
-            <a:ext cx="11277295" cy="502920"/>
-          </a:xfrm>
-          <a:prstGeom prst="rect">
-            <a:avLst/>
-          </a:prstGeom>
-          <a:noFill/>
-        </p:spPr>
-        <p:txBody>
-          <a:bodyPr wrap="square">
-            <a:spAutoFit/>
-          </a:bodyPr>
-          <a:lstStyle/>
-          <a:p>
-            <a:r>
-              <a:rPr sz="2600" b="1" i="0">
-                <a:solidFill>
-                  <a:srgbClr val="FFFFFF"/>
-                </a:solidFill>
-                <a:latin typeface="Calibri"/>
-              </a:rPr>
-              <a:t>Para el PI esta semana</a:t>
-            </a:r>
-          </a:p>
-        </p:txBody>
-      </p:sp>
-      <p:sp>
-        <p:nvSpPr>
-          <p:cNvPr id="5" name="Rounded Rectangle 4"/>
-          <p:cNvSpPr/>
-          <p:nvPr/>
-        </p:nvSpPr>
-        <p:spPr>
-          <a:xfrm>
-            <a:off x="457200" y="1261872"/>
-            <a:ext cx="11277295" cy="1051560"/>
-          </a:xfrm>
-          <a:prstGeom prst="roundRect">
-            <a:avLst>
-              <a:gd name="adj" fmla="val 12000"/>
-            </a:avLst>
-          </a:prstGeom>
-          <a:solidFill>
-            <a:srgbClr val="E8F4FA"/>
-          </a:solidFill>
-          <a:ln>
-            <a:noFill/>
-          </a:ln>
-        </p:spPr>
-        <p:style>
-          <a:lnRef idx="1">
-            <a:schemeClr val="accent1"/>
-          </a:lnRef>
-          <a:fillRef idx="3">
-            <a:schemeClr val="accent1"/>
-          </a:fillRef>
-          <a:effectRef idx="2">
-            <a:schemeClr val="accent1"/>
-          </a:effectRef>
-          <a:fontRef idx="minor">
-            <a:schemeClr val="lt1"/>
-          </a:fontRef>
-        </p:style>
-        <p:txBody>
-          <a:bodyPr rtlCol="0" anchor="ctr"/>
-          <a:lstStyle/>
-          <a:p>
-            <a:pPr algn="ctr"/>
-          </a:p>
-        </p:txBody>
-      </p:sp>
-      <p:sp>
-        <p:nvSpPr>
-          <p:cNvPr id="6" name="Rectangle 5"/>
-          <p:cNvSpPr/>
-          <p:nvPr/>
-        </p:nvSpPr>
-        <p:spPr>
-          <a:xfrm>
-            <a:off x="457200" y="1261872"/>
-            <a:ext cx="128016" cy="1051560"/>
-          </a:xfrm>
-          <a:prstGeom prst="rect">
-            <a:avLst/>
-          </a:prstGeom>
-          <a:solidFill>
-            <a:srgbClr val="269CCB"/>
-          </a:solidFill>
-          <a:ln>
-            <a:noFill/>
-          </a:ln>
-        </p:spPr>
-        <p:style>
-          <a:lnRef idx="1">
-            <a:schemeClr val="accent1"/>
-          </a:lnRef>
-          <a:fillRef idx="3">
-            <a:schemeClr val="accent1"/>
-          </a:fillRef>
-          <a:effectRef idx="2">
-            <a:schemeClr val="accent1"/>
-          </a:effectRef>
-          <a:fontRef idx="minor">
-            <a:schemeClr val="lt1"/>
-          </a:fontRef>
-        </p:style>
-        <p:txBody>
-          <a:bodyPr rtlCol="0" anchor="ctr"/>
-          <a:lstStyle/>
-          <a:p>
-            <a:pPr algn="ctr"/>
-          </a:p>
-        </p:txBody>
-      </p:sp>
-      <p:sp>
-        <p:nvSpPr>
-          <p:cNvPr id="7" name="TextBox 6"/>
-          <p:cNvSpPr txBox="1"/>
-          <p:nvPr/>
-        </p:nvSpPr>
-        <p:spPr>
-          <a:xfrm>
-            <a:off x="777240" y="1399031"/>
-            <a:ext cx="10774375" cy="822959"/>
-          </a:xfrm>
-          <a:prstGeom prst="rect">
-            <a:avLst/>
-          </a:prstGeom>
-          <a:noFill/>
-        </p:spPr>
-        <p:txBody>
-          <a:bodyPr wrap="square">
-            <a:spAutoFit/>
-          </a:bodyPr>
-          <a:lstStyle/>
-          <a:p>
-            <a:r>
-              <a:rPr sz="1200" b="1" i="0">
-                <a:solidFill>
-                  <a:srgbClr val="269CCB"/>
-                </a:solidFill>
-                <a:latin typeface="Calibri"/>
-              </a:rPr>
-              <a:t>Info</a:t>
-            </a:r>
-          </a:p>
-          <a:p>
-            <a:pPr>
-              <a:spcBef>
-                <a:spcPts val="400"/>
-              </a:spcBef>
-            </a:pPr>
-            <a:r>
-              <a:rPr sz="1400" b="0" i="0">
-                <a:solidFill>
-                  <a:srgbClr val="333333"/>
-                </a:solidFill>
-                <a:latin typeface="Calibri"/>
-              </a:rPr>
-              <a:t>Hito: Queda armado el guion cronometrado de sustentacion de VetCare y consolidado el documento final de diseño en una sola pieza coherente.</a:t>
-            </a:r>
-          </a:p>
-        </p:txBody>
-      </p:sp>
-      <p:sp>
-        <p:nvSpPr>
-          <p:cNvPr id="8" name="Rounded Rectangle 7"/>
-          <p:cNvSpPr/>
-          <p:nvPr/>
-        </p:nvSpPr>
-        <p:spPr>
-          <a:xfrm>
-            <a:off x="457200" y="2478024"/>
-            <a:ext cx="11277295" cy="1051560"/>
-          </a:xfrm>
-          <a:prstGeom prst="roundRect">
-            <a:avLst>
-              <a:gd name="adj" fmla="val 12000"/>
-            </a:avLst>
-          </a:prstGeom>
-          <a:solidFill>
-            <a:srgbClr val="FFF8E1"/>
-          </a:solidFill>
-          <a:ln>
-            <a:noFill/>
-          </a:ln>
-        </p:spPr>
-        <p:style>
-          <a:lnRef idx="1">
-            <a:schemeClr val="accent1"/>
-          </a:lnRef>
-          <a:fillRef idx="3">
-            <a:schemeClr val="accent1"/>
-          </a:fillRef>
-          <a:effectRef idx="2">
-            <a:schemeClr val="accent1"/>
-          </a:effectRef>
-          <a:fontRef idx="minor">
-            <a:schemeClr val="lt1"/>
-          </a:fontRef>
-        </p:style>
-        <p:txBody>
-          <a:bodyPr rtlCol="0" anchor="ctr"/>
-          <a:lstStyle/>
-          <a:p>
-            <a:pPr algn="ctr"/>
-          </a:p>
-        </p:txBody>
-      </p:sp>
-      <p:sp>
-        <p:nvSpPr>
-          <p:cNvPr id="9" name="Rectangle 8"/>
-          <p:cNvSpPr/>
-          <p:nvPr/>
-        </p:nvSpPr>
-        <p:spPr>
-          <a:xfrm>
-            <a:off x="457200" y="2478024"/>
-            <a:ext cx="128016" cy="1051560"/>
-          </a:xfrm>
-          <a:prstGeom prst="rect">
-            <a:avLst/>
-          </a:prstGeom>
-          <a:solidFill>
-            <a:srgbClr val="FFD000"/>
-          </a:solidFill>
-          <a:ln>
-            <a:noFill/>
-          </a:ln>
-        </p:spPr>
-        <p:style>
-          <a:lnRef idx="1">
-            <a:schemeClr val="accent1"/>
-          </a:lnRef>
-          <a:fillRef idx="3">
-            <a:schemeClr val="accent1"/>
-          </a:fillRef>
-          <a:effectRef idx="2">
-            <a:schemeClr val="accent1"/>
-          </a:effectRef>
-          <a:fontRef idx="minor">
-            <a:schemeClr val="lt1"/>
-          </a:fontRef>
-        </p:style>
-        <p:txBody>
-          <a:bodyPr rtlCol="0" anchor="ctr"/>
-          <a:lstStyle/>
-          <a:p>
-            <a:pPr algn="ctr"/>
-          </a:p>
-        </p:txBody>
-      </p:sp>
-      <p:sp>
-        <p:nvSpPr>
-          <p:cNvPr id="10" name="TextBox 9"/>
-          <p:cNvSpPr txBox="1"/>
-          <p:nvPr/>
-        </p:nvSpPr>
-        <p:spPr>
-          <a:xfrm>
-            <a:off x="777240" y="2615184"/>
-            <a:ext cx="10774375" cy="822959"/>
-          </a:xfrm>
-          <a:prstGeom prst="rect">
-            <a:avLst/>
-          </a:prstGeom>
-          <a:noFill/>
-        </p:spPr>
-        <p:txBody>
-          <a:bodyPr wrap="square">
-            <a:spAutoFit/>
-          </a:bodyPr>
-          <a:lstStyle/>
-          <a:p>
-            <a:r>
-              <a:rPr sz="1200" b="1" i="0">
-                <a:solidFill>
-                  <a:srgbClr val="FFD000"/>
-                </a:solidFill>
-                <a:latin typeface="Calibri"/>
-              </a:rPr>
-              <a:t>Aclaración</a:t>
-            </a:r>
-          </a:p>
-          <a:p>
-            <a:pPr>
-              <a:spcBef>
-                <a:spcPts val="400"/>
-              </a:spcBef>
-            </a:pPr>
-            <a:r>
-              <a:rPr sz="1400" b="0" i="0">
-                <a:solidFill>
-                  <a:srgbClr val="333333"/>
-                </a:solidFill>
-                <a:latin typeface="Calibri"/>
-              </a:rPr>
-              <a:t>Enunciado completo: Clases/Proyecto Integrador/ (VetCare).</a:t>
-            </a:r>
-          </a:p>
-        </p:txBody>
-      </p:sp>
-      <p:sp>
-        <p:nvSpPr>
-          <p:cNvPr id="11" name="Rounded Rectangle 10"/>
-          <p:cNvSpPr/>
-          <p:nvPr/>
-        </p:nvSpPr>
-        <p:spPr>
-          <a:xfrm>
-            <a:off x="457200" y="3694176"/>
-            <a:ext cx="11277295" cy="1051560"/>
-          </a:xfrm>
-          <a:prstGeom prst="roundRect">
-            <a:avLst>
-              <a:gd name="adj" fmla="val 12000"/>
-            </a:avLst>
-          </a:prstGeom>
-          <a:solidFill>
-            <a:srgbClr val="FBE4E4"/>
-          </a:solidFill>
-          <a:ln>
-            <a:noFill/>
-          </a:ln>
-        </p:spPr>
-        <p:style>
-          <a:lnRef idx="1">
-            <a:schemeClr val="accent1"/>
-          </a:lnRef>
-          <a:fillRef idx="3">
-            <a:schemeClr val="accent1"/>
-          </a:fillRef>
-          <a:effectRef idx="2">
-            <a:schemeClr val="accent1"/>
-          </a:effectRef>
-          <a:fontRef idx="minor">
-            <a:schemeClr val="lt1"/>
-          </a:fontRef>
-        </p:style>
-        <p:txBody>
-          <a:bodyPr rtlCol="0" anchor="ctr"/>
-          <a:lstStyle/>
-          <a:p>
-            <a:pPr algn="ctr"/>
-          </a:p>
-        </p:txBody>
-      </p:sp>
-      <p:sp>
-        <p:nvSpPr>
-          <p:cNvPr id="12" name="Rectangle 11"/>
-          <p:cNvSpPr/>
-          <p:nvPr/>
-        </p:nvSpPr>
-        <p:spPr>
-          <a:xfrm>
-            <a:off x="457200" y="3694176"/>
-            <a:ext cx="128016" cy="1051560"/>
-          </a:xfrm>
-          <a:prstGeom prst="rect">
-            <a:avLst/>
-          </a:prstGeom>
-          <a:solidFill>
-            <a:srgbClr val="A02030"/>
-          </a:solidFill>
-          <a:ln>
-            <a:noFill/>
-          </a:ln>
-        </p:spPr>
-        <p:style>
-          <a:lnRef idx="1">
-            <a:schemeClr val="accent1"/>
-          </a:lnRef>
-          <a:fillRef idx="3">
-            <a:schemeClr val="accent1"/>
-          </a:fillRef>
-          <a:effectRef idx="2">
-            <a:schemeClr val="accent1"/>
-          </a:effectRef>
-          <a:fontRef idx="minor">
-            <a:schemeClr val="lt1"/>
-          </a:fontRef>
-        </p:style>
-        <p:txBody>
-          <a:bodyPr rtlCol="0" anchor="ctr"/>
-          <a:lstStyle/>
-          <a:p>
-            <a:pPr algn="ctr"/>
-          </a:p>
-        </p:txBody>
-      </p:sp>
-      <p:sp>
-        <p:nvSpPr>
-          <p:cNvPr id="13" name="TextBox 12"/>
-          <p:cNvSpPr txBox="1"/>
-          <p:nvPr/>
-        </p:nvSpPr>
-        <p:spPr>
-          <a:xfrm>
-            <a:off x="777240" y="3831336"/>
-            <a:ext cx="10774375" cy="822959"/>
-          </a:xfrm>
-          <a:prstGeom prst="rect">
-            <a:avLst/>
-          </a:prstGeom>
-          <a:noFill/>
-        </p:spPr>
-        <p:txBody>
-          <a:bodyPr wrap="square">
-            <a:spAutoFit/>
-          </a:bodyPr>
-          <a:lstStyle/>
-          <a:p>
-            <a:r>
-              <a:rPr sz="1200" b="1" i="0">
-                <a:solidFill>
-                  <a:srgbClr val="A02030"/>
-                </a:solidFill>
-                <a:latin typeface="Calibri"/>
-              </a:rPr>
-              <a:t>Atención</a:t>
-            </a:r>
-          </a:p>
-          <a:p>
-            <a:pPr>
-              <a:spcBef>
-                <a:spcPts val="400"/>
-              </a:spcBef>
-            </a:pPr>
-            <a:r>
-              <a:rPr sz="1400" b="0" i="0">
-                <a:solidFill>
-                  <a:srgbClr val="333333"/>
-                </a:solidFill>
-                <a:latin typeface="Calibri"/>
-              </a:rPr>
-              <a:t>Entrega del taller, si el docente lo asigna · en la fecha que indique el docente.</a:t>
-            </a:r>
-          </a:p>
-        </p:txBody>
-      </p:sp>
-      <p:sp>
-        <p:nvSpPr>
-          <p:cNvPr id="14" name="TextBox 13"/>
-          <p:cNvSpPr txBox="1"/>
-          <p:nvPr/>
-        </p:nvSpPr>
-        <p:spPr>
-          <a:xfrm>
-            <a:off x="11185855" y="6473952"/>
-            <a:ext cx="640080" cy="274320"/>
-          </a:xfrm>
-          <a:prstGeom prst="rect">
-            <a:avLst/>
-          </a:prstGeom>
-          <a:noFill/>
-        </p:spPr>
-        <p:txBody>
-          <a:bodyPr wrap="square">
-            <a:spAutoFit/>
-          </a:bodyPr>
-          <a:lstStyle/>
-          <a:p>
-            <a:pPr algn="r"/>
-            <a:r>
-              <a:rPr sz="1100" b="0" i="0">
-                <a:solidFill>
-                  <a:srgbClr val="666666"/>
-                </a:solidFill>
-                <a:latin typeface="Calibri"/>
-              </a:rPr>
-              <a:t>21</a:t>
-            </a:r>
-          </a:p>
-        </p:txBody>
-      </p:sp>
-    </p:spTree>
-  </p:cSld>
-  <p:clrMapOvr>
-    <a:masterClrMapping/>
-  </p:clrMapOvr>
-</p:sld>
-</file>
-
-<file path=ppt/slides/slide22.xml><?xml version="1.0" encoding="utf-8"?>
-<p:sld xmlns:a="http://schemas.openxmlformats.org/drawingml/2006/main" xmlns:p="http://schemas.openxmlformats.org/presentationml/2006/main" xmlns:r="http://schemas.openxmlformats.org/officeDocument/2006/relationships">
-  <p:cSld>
-    <p:bg>
-      <p:bgPr>
-        <a:solidFill>
-          <a:srgbClr val="FFFFFF"/>
-        </a:solidFill>
-        <a:effectLst/>
-      </p:bgPr>
-    </p:bg>
-    <p:spTree>
-      <p:nvGrpSpPr>
-        <p:cNvPr id="1" name=""/>
-        <p:cNvGrpSpPr/>
-        <p:nvPr/>
-      </p:nvGrpSpPr>
-      <p:grpSpPr/>
-      <p:sp>
-        <p:nvSpPr>
-          <p:cNvPr id="2" name="Rectangle 1"/>
-          <p:cNvSpPr/>
-          <p:nvPr/>
-        </p:nvSpPr>
-        <p:spPr>
-          <a:xfrm>
-            <a:off x="0" y="0"/>
-            <a:ext cx="12191695" cy="164592"/>
-          </a:xfrm>
-          <a:prstGeom prst="rect">
-            <a:avLst/>
-          </a:prstGeom>
-          <a:solidFill>
-            <a:srgbClr val="269CCB"/>
-          </a:solidFill>
-          <a:ln>
-            <a:noFill/>
-          </a:ln>
-        </p:spPr>
-        <p:style>
-          <a:lnRef idx="1">
-            <a:schemeClr val="accent1"/>
-          </a:lnRef>
-          <a:fillRef idx="3">
-            <a:schemeClr val="accent1"/>
-          </a:fillRef>
-          <a:effectRef idx="2">
-            <a:schemeClr val="accent1"/>
-          </a:effectRef>
-          <a:fontRef idx="minor">
-            <a:schemeClr val="lt1"/>
-          </a:fontRef>
-        </p:style>
-        <p:txBody>
-          <a:bodyPr rtlCol="0" anchor="ctr"/>
-          <a:lstStyle/>
-          <a:p>
-            <a:pPr algn="ctr"/>
-          </a:p>
-        </p:txBody>
-      </p:sp>
-      <p:pic>
-        <p:nvPicPr>
-          <p:cNvPr id="3" name="Picture 2" descr="logo_uniajc_color.png"/>
-          <p:cNvPicPr>
-            <a:picLocks noChangeAspect="1"/>
-          </p:cNvPicPr>
-          <p:nvPr/>
-        </p:nvPicPr>
-        <p:blipFill>
-          <a:blip r:embed="rId2"/>
-          <a:stretch>
-            <a:fillRect/>
-          </a:stretch>
-        </p:blipFill>
-        <p:spPr>
-          <a:xfrm>
-            <a:off x="10271455" y="5998464"/>
-            <a:ext cx="1463040" cy="643233"/>
-          </a:xfrm>
-          <a:prstGeom prst="rect">
-            <a:avLst/>
-          </a:prstGeom>
-        </p:spPr>
-      </p:pic>
-      <p:sp>
-        <p:nvSpPr>
-          <p:cNvPr id="4" name="TextBox 3"/>
-          <p:cNvSpPr txBox="1"/>
-          <p:nvPr/>
-        </p:nvSpPr>
-        <p:spPr>
-          <a:xfrm>
-            <a:off x="457200" y="1737360"/>
-            <a:ext cx="11277295" cy="1097280"/>
-          </a:xfrm>
-          <a:prstGeom prst="rect">
-            <a:avLst/>
-          </a:prstGeom>
-          <a:noFill/>
-        </p:spPr>
-        <p:txBody>
-          <a:bodyPr wrap="square" anchor="ctr"/>
-          <a:lstStyle/>
-          <a:p>
-            <a:pPr algn="ctr"/>
-            <a:r>
-              <a:rPr sz="3400" b="1" i="0">
-                <a:solidFill>
-                  <a:srgbClr val="095292"/>
-                </a:solidFill>
-                <a:latin typeface="Calibri"/>
-              </a:rPr>
-              <a:t>Clase 14 · VetCare avanza</a:t>
-            </a:r>
-          </a:p>
-        </p:txBody>
-      </p:sp>
-      <p:sp>
-        <p:nvSpPr>
-          <p:cNvPr id="5" name="TextBox 4"/>
-          <p:cNvSpPr txBox="1"/>
-          <p:nvPr/>
-        </p:nvSpPr>
-        <p:spPr>
-          <a:xfrm>
-            <a:off x="457200" y="3017520"/>
-            <a:ext cx="11277295" cy="1645920"/>
-          </a:xfrm>
-          <a:prstGeom prst="rect">
-            <a:avLst/>
-          </a:prstGeom>
-          <a:noFill/>
-        </p:spPr>
-        <p:txBody>
-          <a:bodyPr wrap="square">
-            <a:spAutoFit/>
-          </a:bodyPr>
-          <a:lstStyle/>
-          <a:p>
-            <a:pPr algn="ctr">
-              <a:spcAft>
-                <a:spcPts val="600"/>
-              </a:spcAft>
-            </a:pPr>
-            <a:r>
-              <a:rPr sz="1600" b="0" i="0">
-                <a:solidFill>
-                  <a:srgbClr val="333333"/>
-                </a:solidFill>
-                <a:latin typeface="Calibri"/>
-              </a:rPr>
-              <a:t>Queda armado el guion cronometrado de sustentacion de VetCare y consolidado el documento final de diseño en una sola pieza coherente.</a:t>
-            </a:r>
-          </a:p>
-          <a:p>
-            <a:pPr algn="ctr">
-              <a:spcAft>
-                <a:spcPts val="600"/>
-              </a:spcAft>
-            </a:pPr>
-            <a:r>
-              <a:rPr sz="1600" b="0" i="0">
-                <a:solidFill>
-                  <a:srgbClr val="333333"/>
-                </a:solidFill>
-                <a:latin typeface="Calibri"/>
-              </a:rPr>
-              <a:t>Entregable: Un documento en Google Docs con el guion minuto a minuto repartido en bloques con tiempos y evidencia (con responsable nominal solo si el docente autorizo equipo), la tabla de tres decisiones de diseño defendidas y el banco de diez preguntas con su respuesta, mas el indice del documento final consolidado, subido a la plataforma del curso.</a:t>
-            </a:r>
-          </a:p>
-          <a:p>
-            <a:pPr algn="ctr">
-              <a:spcAft>
-                <a:spcPts val="600"/>
-              </a:spcAft>
-            </a:pPr>
-            <a:r>
-              <a:rPr sz="1600" b="0" i="0">
-                <a:solidFill>
-                  <a:srgbClr val="333333"/>
-                </a:solidFill>
-                <a:latin typeface="Calibri"/>
-              </a:rPr>
-              <a:t>Siguiente clase: continuamos el hilo del PI</a:t>
-            </a:r>
-          </a:p>
-        </p:txBody>
-      </p:sp>
-      <p:sp>
-        <p:nvSpPr>
-          <p:cNvPr id="6" name="TextBox 5"/>
-          <p:cNvSpPr txBox="1"/>
-          <p:nvPr/>
-        </p:nvSpPr>
-        <p:spPr>
-          <a:xfrm>
-            <a:off x="457200" y="4754880"/>
-            <a:ext cx="11277295" cy="640080"/>
-          </a:xfrm>
-          <a:prstGeom prst="rect">
-            <a:avLst/>
-          </a:prstGeom>
-          <a:noFill/>
-        </p:spPr>
-        <p:txBody>
-          <a:bodyPr wrap="square">
-            <a:spAutoFit/>
-          </a:bodyPr>
-          <a:lstStyle/>
-          <a:p>
-            <a:pPr algn="ctr"/>
-            <a:r>
-              <a:rPr sz="2000" b="1" i="0">
-                <a:solidFill>
-                  <a:srgbClr val="269CCB"/>
-                </a:solidFill>
-                <a:latin typeface="Calibri"/>
-              </a:rPr>
-              <a:t>Teoria al servicio del proyecto</a:t>
             </a:r>
           </a:p>
         </p:txBody>
@@ -10803,7 +6920,7 @@
                 </a:solidFill>
                 <a:latin typeface="Calibri"/>
               </a:rPr>
-              <a:t>Encuadre y repaso del avance</a:t>
+              <a:t>Encuadre y repaso</a:t>
             </a:r>
           </a:p>
         </p:txBody>
@@ -11148,7 +7265,7 @@
                 </a:solidFill>
                 <a:latin typeface="Calibri"/>
               </a:rPr>
-              <a:t>Taller guiado = avance del PI</a:t>
+              <a:t>Practica (opcional, guia en la carpeta)</a:t>
             </a:r>
           </a:p>
         </p:txBody>
@@ -11263,7 +7380,7 @@
                 </a:solidFill>
                 <a:latin typeface="Calibri"/>
               </a:rPr>
-              <a:t>Criterios de exito y cierre</a:t>
+              <a:t>Sintesis y cierre</a:t>
             </a:r>
           </a:p>
         </p:txBody>
@@ -13290,4 +9407,324 @@
   </a:objectDefaults>
   <a:extraClrSchemeLst/>
 </a:theme>
+</file>
+
+<file path=ppt/theme/theme2.xml><?xml version="1.0" encoding="utf-8"?>
+<a:theme xmlns:a="http://schemas.openxmlformats.org/drawingml/2006/main" name="Office Theme">
+  <a:themeElements>
+    <a:clrScheme name="Office">
+      <a:dk1>
+        <a:sysClr val="windowText" lastClr="000000"/>
+      </a:dk1>
+      <a:lt1>
+        <a:sysClr val="window" lastClr="FFFFFF"/>
+      </a:lt1>
+      <a:dk2>
+        <a:srgbClr val="1F497D"/>
+      </a:dk2>
+      <a:lt2>
+        <a:srgbClr val="EEECE1"/>
+      </a:lt2>
+      <a:accent1>
+        <a:srgbClr val="4F81BD"/>
+      </a:accent1>
+      <a:accent2>
+        <a:srgbClr val="C0504D"/>
+      </a:accent2>
+      <a:accent3>
+        <a:srgbClr val="9BBB59"/>
+      </a:accent3>
+      <a:accent4>
+        <a:srgbClr val="8064A2"/>
+      </a:accent4>
+      <a:accent5>
+        <a:srgbClr val="4BACC6"/>
+      </a:accent5>
+      <a:accent6>
+        <a:srgbClr val="F79646"/>
+      </a:accent6>
+      <a:hlink>
+        <a:srgbClr val="0000FF"/>
+      </a:hlink>
+      <a:folHlink>
+        <a:srgbClr val="800080"/>
+      </a:folHlink>
+    </a:clrScheme>
+    <a:fontScheme name="Office">
+      <a:majorFont>
+        <a:latin typeface="Calibri"/>
+        <a:ea typeface=""/>
+        <a:cs typeface=""/>
+        <a:font script="Jpan" typeface="ＭＳ Ｐゴシック"/>
+        <a:font script="Hang" typeface="맑은 고딕"/>
+        <a:font script="Hans" typeface="宋体"/>
+        <a:font script="Hant" typeface="新細明體"/>
+        <a:font script="Arab" typeface="Times New Roman"/>
+        <a:font script="Hebr" typeface="Times New Roman"/>
+        <a:font script="Thai" typeface="Angsana New"/>
+        <a:font script="Ethi" typeface="Nyala"/>
+        <a:font script="Beng" typeface="Vrinda"/>
+        <a:font script="Gujr" typeface="Shruti"/>
+        <a:font script="Khmr" typeface="MoolBoran"/>
+        <a:font script="Knda" typeface="Tunga"/>
+        <a:font script="Guru" typeface="Raavi"/>
+        <a:font script="Cans" typeface="Euphemia"/>
+        <a:font script="Cher" typeface="Plantagenet Cherokee"/>
+        <a:font script="Yiii" typeface="Microsoft Yi Baiti"/>
+        <a:font script="Tibt" typeface="Microsoft Himalaya"/>
+        <a:font script="Thaa" typeface="MV Boli"/>
+        <a:font script="Deva" typeface="Mangal"/>
+        <a:font script="Telu" typeface="Gautami"/>
+        <a:font script="Taml" typeface="Latha"/>
+        <a:font script="Syrc" typeface="Estrangelo Edessa"/>
+        <a:font script="Orya" typeface="Kalinga"/>
+        <a:font script="Mlym" typeface="Kartika"/>
+        <a:font script="Laoo" typeface="DokChampa"/>
+        <a:font script="Sinh" typeface="Iskoola Pota"/>
+        <a:font script="Mong" typeface="Mongolian Baiti"/>
+        <a:font script="Viet" typeface="Times New Roman"/>
+        <a:font script="Uigh" typeface="Microsoft Uighur"/>
+        <a:font script="Geor" typeface="Sylfaen"/>
+      </a:majorFont>
+      <a:minorFont>
+        <a:latin typeface="Calibri"/>
+        <a:ea typeface=""/>
+        <a:cs typeface=""/>
+        <a:font script="Jpan" typeface="ＭＳ Ｐゴシック"/>
+        <a:font script="Hang" typeface="맑은 고딕"/>
+        <a:font script="Hans" typeface="宋体"/>
+        <a:font script="Hant" typeface="新細明體"/>
+        <a:font script="Arab" typeface="Arial"/>
+        <a:font script="Hebr" typeface="Arial"/>
+        <a:font script="Thai" typeface="Cordia New"/>
+        <a:font script="Ethi" typeface="Nyala"/>
+        <a:font script="Beng" typeface="Vrinda"/>
+        <a:font script="Gujr" typeface="Shruti"/>
+        <a:font script="Khmr" typeface="DaunPenh"/>
+        <a:font script="Knda" typeface="Tunga"/>
+        <a:font script="Guru" typeface="Raavi"/>
+        <a:font script="Cans" typeface="Euphemia"/>
+        <a:font script="Cher" typeface="Plantagenet Cherokee"/>
+        <a:font script="Yiii" typeface="Microsoft Yi Baiti"/>
+        <a:font script="Tibt" typeface="Microsoft Himalaya"/>
+        <a:font script="Thaa" typeface="MV Boli"/>
+        <a:font script="Deva" typeface="Mangal"/>
+        <a:font script="Telu" typeface="Gautami"/>
+        <a:font script="Taml" typeface="Latha"/>
+        <a:font script="Syrc" typeface="Estrangelo Edessa"/>
+        <a:font script="Orya" typeface="Kalinga"/>
+        <a:font script="Mlym" typeface="Kartika"/>
+        <a:font script="Laoo" typeface="DokChampa"/>
+        <a:font script="Sinh" typeface="Iskoola Pota"/>
+        <a:font script="Mong" typeface="Mongolian Baiti"/>
+        <a:font script="Viet" typeface="Arial"/>
+        <a:font script="Uigh" typeface="Microsoft Uighur"/>
+        <a:font script="Geor" typeface="Sylfaen"/>
+      </a:minorFont>
+    </a:fontScheme>
+    <a:fmtScheme name="Office">
+      <a:fillStyleLst>
+        <a:solidFill>
+          <a:schemeClr val="phClr"/>
+        </a:solidFill>
+        <a:gradFill rotWithShape="1">
+          <a:gsLst>
+            <a:gs pos="0">
+              <a:schemeClr val="phClr">
+                <a:tint val="50000"/>
+                <a:satMod val="300000"/>
+              </a:schemeClr>
+            </a:gs>
+            <a:gs pos="35000">
+              <a:schemeClr val="phClr">
+                <a:tint val="37000"/>
+                <a:satMod val="300000"/>
+              </a:schemeClr>
+            </a:gs>
+            <a:gs pos="100000">
+              <a:schemeClr val="phClr">
+                <a:tint val="15000"/>
+                <a:satMod val="350000"/>
+              </a:schemeClr>
+            </a:gs>
+          </a:gsLst>
+          <a:lin ang="16200000" scaled="1"/>
+        </a:gradFill>
+        <a:gradFill rotWithShape="1">
+          <a:gsLst>
+            <a:gs pos="0">
+              <a:schemeClr val="phClr">
+                <a:tint val="100000"/>
+                <a:shade val="100000"/>
+                <a:satMod val="130000"/>
+              </a:schemeClr>
+            </a:gs>
+            <a:gs pos="100000">
+              <a:schemeClr val="phClr">
+                <a:tint val="50000"/>
+                <a:shade val="100000"/>
+                <a:satMod val="350000"/>
+              </a:schemeClr>
+            </a:gs>
+          </a:gsLst>
+          <a:lin ang="16200000" scaled="0"/>
+        </a:gradFill>
+      </a:fillStyleLst>
+      <a:lnStyleLst>
+        <a:ln w="9525" cap="flat" cmpd="sng" algn="ctr">
+          <a:solidFill>
+            <a:schemeClr val="phClr">
+              <a:shade val="95000"/>
+              <a:satMod val="105000"/>
+            </a:schemeClr>
+          </a:solidFill>
+          <a:prstDash val="solid"/>
+        </a:ln>
+        <a:ln w="25400" cap="flat" cmpd="sng" algn="ctr">
+          <a:solidFill>
+            <a:schemeClr val="phClr"/>
+          </a:solidFill>
+          <a:prstDash val="solid"/>
+        </a:ln>
+        <a:ln w="38100" cap="flat" cmpd="sng" algn="ctr">
+          <a:solidFill>
+            <a:schemeClr val="phClr"/>
+          </a:solidFill>
+          <a:prstDash val="solid"/>
+        </a:ln>
+      </a:lnStyleLst>
+      <a:effectStyleLst>
+        <a:effectStyle>
+          <a:effectLst>
+            <a:outerShdw blurRad="40000" dist="20000" dir="5400000" rotWithShape="0">
+              <a:srgbClr val="000000">
+                <a:alpha val="38000"/>
+              </a:srgbClr>
+            </a:outerShdw>
+          </a:effectLst>
+        </a:effectStyle>
+        <a:effectStyle>
+          <a:effectLst>
+            <a:outerShdw blurRad="40000" dist="23000" dir="5400000" rotWithShape="0">
+              <a:srgbClr val="000000">
+                <a:alpha val="35000"/>
+              </a:srgbClr>
+            </a:outerShdw>
+          </a:effectLst>
+        </a:effectStyle>
+        <a:effectStyle>
+          <a:effectLst>
+            <a:outerShdw blurRad="40000" dist="23000" dir="5400000" rotWithShape="0">
+              <a:srgbClr val="000000">
+                <a:alpha val="35000"/>
+              </a:srgbClr>
+            </a:outerShdw>
+          </a:effectLst>
+          <a:scene3d>
+            <a:camera prst="orthographicFront">
+              <a:rot lat="0" lon="0" rev="0"/>
+            </a:camera>
+            <a:lightRig rig="threePt" dir="t">
+              <a:rot lat="0" lon="0" rev="1200000"/>
+            </a:lightRig>
+          </a:scene3d>
+          <a:sp3d>
+            <a:bevelT w="63500" h="25400"/>
+          </a:sp3d>
+        </a:effectStyle>
+      </a:effectStyleLst>
+      <a:bgFillStyleLst>
+        <a:solidFill>
+          <a:schemeClr val="phClr"/>
+        </a:solidFill>
+        <a:gradFill rotWithShape="1">
+          <a:gsLst>
+            <a:gs pos="0">
+              <a:schemeClr val="phClr">
+                <a:tint val="40000"/>
+                <a:satMod val="350000"/>
+              </a:schemeClr>
+            </a:gs>
+            <a:gs pos="40000">
+              <a:schemeClr val="phClr">
+                <a:tint val="45000"/>
+                <a:shade val="99000"/>
+                <a:satMod val="350000"/>
+              </a:schemeClr>
+            </a:gs>
+            <a:gs pos="100000">
+              <a:schemeClr val="phClr">
+                <a:shade val="20000"/>
+                <a:satMod val="255000"/>
+              </a:schemeClr>
+            </a:gs>
+          </a:gsLst>
+          <a:path path="circle">
+            <a:fillToRect l="50000" t="-80000" r="50000" b="180000"/>
+          </a:path>
+        </a:gradFill>
+        <a:gradFill rotWithShape="1">
+          <a:gsLst>
+            <a:gs pos="0">
+              <a:schemeClr val="phClr">
+                <a:tint val="80000"/>
+                <a:satMod val="300000"/>
+              </a:schemeClr>
+            </a:gs>
+            <a:gs pos="100000">
+              <a:schemeClr val="phClr">
+                <a:shade val="30000"/>
+                <a:satMod val="200000"/>
+              </a:schemeClr>
+            </a:gs>
+          </a:gsLst>
+          <a:path path="circle">
+            <a:fillToRect l="50000" t="50000" r="50000" b="50000"/>
+          </a:path>
+        </a:gradFill>
+      </a:bgFillStyleLst>
+    </a:fmtScheme>
+  </a:themeElements>
+  <a:objectDefaults>
+    <a:spDef>
+      <a:spPr/>
+      <a:bodyPr/>
+      <a:lstStyle/>
+      <a:style>
+        <a:lnRef idx="1">
+          <a:schemeClr val="accent1"/>
+        </a:lnRef>
+        <a:fillRef idx="3">
+          <a:schemeClr val="accent1"/>
+        </a:fillRef>
+        <a:effectRef idx="2">
+          <a:schemeClr val="accent1"/>
+        </a:effectRef>
+        <a:fontRef idx="minor">
+          <a:schemeClr val="lt1"/>
+        </a:fontRef>
+      </a:style>
+    </a:spDef>
+    <a:lnDef>
+      <a:spPr/>
+      <a:bodyPr/>
+      <a:lstStyle/>
+      <a:style>
+        <a:lnRef idx="2">
+          <a:schemeClr val="accent1"/>
+        </a:lnRef>
+        <a:fillRef idx="0">
+          <a:schemeClr val="accent1"/>
+        </a:fillRef>
+        <a:effectRef idx="1">
+          <a:schemeClr val="accent1"/>
+        </a:effectRef>
+        <a:fontRef idx="minor">
+          <a:schemeClr val="tx1"/>
+        </a:fontRef>
+      </a:style>
+    </a:lnDef>
+  </a:objectDefaults>
+  <a:extraClrSchemeLst/>
+</a:theme>
 </file>
--- a/Seminario de Sistemas/Clases/Clase 14 - Preparacion de la sustentacion y cierre/Presentacion.pptx
+++ b/Seminario de Sistemas/Clases/Clase 14 - Preparacion de la sustentacion y cierre/Presentacion.pptx
@@ -586,7 +586,7 @@
           <a:lstStyle/>
           <a:p>
             <a:r>
-              <a:t>Primero el problema, porque nada de lo que sigue tiene sentido si el jurado no sabe que duele en Huellitas.</a:t>
+              <a:t>Primero el problema, porque nada de lo que sigue tiene sentido si el jurado no sabe que duele en la clinica.</a:t>
             </a:r>
           </a:p>
           <a:p/>
@@ -4317,7 +4317,7 @@
                 </a:solidFill>
                 <a:latin typeface="Calibri"/>
               </a:rPr>
-              <a:t>–   La sustentacion es individual por defecto: el estudiante expone los cinco bloques y responde por todos, y lo que se califica es que cada bloque tenga su rango de minutos y su evidencia en pantalla, no quien lo dice.</a:t>
+              <a:t>–   La sustentacion es individual por defecto: el estudiante expone los cinco bloques y responde por todos, y lo que importa es que cada bloque tenga su rango de minutos y su evidencia en pantalla, no quien lo dice.</a:t>
             </a:r>
           </a:p>
           <a:p>
@@ -4333,7 +4333,7 @@
                 </a:solidFill>
                 <a:latin typeface="Calibri"/>
               </a:rPr>
-              <a:t>–   El orden que funciona para VetCare es: abrir con problema y alcance, seguir con requisitos y trazabilidad, luego los modelos UML, despues el prototipo en vivo y cerrar con decisiones, riesgos y siguiente paso hacia Programacion II.</a:t>
+              <a:t>–   El orden que funciona para el sistema de la clinica es: abrir con problema y alcance, seguir con requisitos y trazabilidad, luego los modelos UML, despues el prototipo en vivo y cerrar con decisiones, riesgos y siguiente paso hacia Programacion II.</a:t>
             </a:r>
           </a:p>
           <a:p>
@@ -4973,7 +4973,7 @@
                 </a:solidFill>
                 <a:latin typeface="Calibri"/>
               </a:rPr>
-              <a:t>  title Sustentacion VetCare - 15 minutos</a:t>
+              <a:t>  title Sustentacion - 15 minutos</a:t>
             </a:r>
           </a:p>
           <a:p>
@@ -5378,7 +5378,7 @@
                 </a:solidFill>
                 <a:latin typeface="Calibri"/>
               </a:rPr>
-              <a:t>Guion de sustentacion VetCare: doce minutos cronometrados y quien dice que</a:t>
+              <a:t>Guion de sustentacion: doce minutos cronometrados y quien dice que</a:t>
             </a:r>
           </a:p>
         </p:txBody>
@@ -5537,7 +5537,7 @@
                 </a:solidFill>
                 <a:latin typeface="Calibri"/>
               </a:rPr>
-              <a:t>00:00-01:30 | PROBLEMA    | Huellitas: fichas extraviadas, 8 min por historial, cero metricas</a:t>
+              <a:t>00:00-01:30 | PROBLEMA    | La clinica: fichas extraviadas, 8 min por historial, cero metricas</a:t>
             </a:r>
           </a:p>
           <a:p>
@@ -6020,7 +6020,7 @@
                 </a:solidFill>
                 <a:latin typeface="Calibri"/>
               </a:rPr>
-              <a:t> El docente proyecta una sustentacion mal hecha y una bien hecha del mismo paquete VetCare, y luego arma en vivo la tabla de decisiones para justificar por que Historia_Clinica es una clase aparte de Mascota.</a:t>
+              <a:t> El docente proyecta una sustentacion mal hecha y una bien hecha del mismo paquete, y luego arma en vivo la tabla de decisiones para justificar por que Historia_Clinica es una clase aparte de Mascota.</a:t>
             </a:r>
           </a:p>
           <a:p>
@@ -6036,7 +6036,7 @@
                 </a:solidFill>
                 <a:latin typeface="Calibri"/>
               </a:rPr>
-              <a:t>–   Mismo dominio VetCare — no otro ejemplo. Aqui se diseña, no se programa.</a:t>
+              <a:t>–   Mismo dominio: la clinica veterinaria — no otro ejemplo. Aqui se diseña, no se programa.</a:t>
             </a:r>
           </a:p>
         </p:txBody>
@@ -6581,7 +6581,7 @@
                 </a:solidFill>
                 <a:latin typeface="Calibri"/>
               </a:rPr>
-              <a:t>–   Ejemplo de toda la clase: VetCare, el sistema de la clinica «Huellitas».</a:t>
+              <a:t>–   Ejemplo de toda la clase: el sistema de una clinica veterinaria.</a:t>
             </a:r>
           </a:p>
         </p:txBody>
@@ -7150,7 +7150,7 @@
                 </a:solidFill>
                 <a:latin typeface="Calibri"/>
               </a:rPr>
-              <a:t>Demo en vivo sobre VetCare</a:t>
+              <a:t>Demo en vivo sobre la clinica</a:t>
             </a:r>
           </a:p>
         </p:txBody>
@@ -7669,7 +7669,7 @@
                 </a:solidFill>
                 <a:latin typeface="Calibri"/>
               </a:rPr>
-              <a:t>–   El jurado, sea el docente o un cliente simulado de la clinica Huellitas, no esta evaluando cuanto trabajaron sino tres cosas concretas: si el diseño resuelve el problema declarado, si las piezas son coherentes entre si y si el equipo entiende lo que entrego.</a:t>
+              <a:t>–   El jurado, sea el docente o un cliente simulado de la clinica, no esta evaluando cuanto trabajaron sino tres cosas concretas: si el diseño resuelve el problema declarado, si las piezas son coherentes entre si y si el equipo entiende lo que entrego.</a:t>
             </a:r>
           </a:p>
           <a:p>
@@ -7685,7 +7685,7 @@
                 </a:solidFill>
                 <a:latin typeface="Calibri"/>
               </a:rPr>
-              <a:t>–   La diferencia se nota en la primera frase: quien dice hicimos casos de uso, luego clases, luego pantallas, esta narrando; quien dice Huellitas pierde fichas y tarda ocho minutos en encontrar un historial</a:t>
+              <a:t>–   La diferencia se nota en la primera frase: quien dice hicimos casos de uso, luego clases, luego pantallas, esta narrando; quien dice la clinica pierde fichas y tarda ocho minutos en encontrar un historial</a:t>
             </a:r>
           </a:p>
         </p:txBody>
@@ -7921,7 +7921,7 @@
                 </a:solidFill>
                 <a:latin typeface="Calibri"/>
               </a:rPr>
-              <a:t>–   En VetCare la evidencia esta toda disponible: la tabla de RF y RNF, los diagramas UML, el diccionario de datos y el prototipo navegable.</a:t>
+              <a:t>–   En el sistema de la clinica la evidencia esta toda disponible: la tabla de RF y RNF, los diagramas UML, el diccionario de datos y el prototipo navegable.</a:t>
             </a:r>
           </a:p>
           <a:p>
@@ -8237,7 +8237,7 @@
                 </a:solidFill>
                 <a:latin typeface="Calibri"/>
               </a:rPr>
-              <a:t>–   Para VetCare doce minutos alcanzan de sobra si se respetan las proporciones: uno y medio para el problema, tres para requisitos, dos para modelo, dos para interfaz en vivo, dos para decisiones y el resto para riesgos y cierre.</a:t>
+              <a:t>–   Para el sistema de la clinica doce minutos alcanzan de sobra si se respetan las proporciones: uno y medio para el problema, tres para requisitos, dos para modelo, dos para interfaz en vivo, dos para decisiones y el resto para riesgos y cierre.</a:t>
             </a:r>
           </a:p>
         </p:txBody>
@@ -8489,7 +8489,7 @@
                 </a:solidFill>
                 <a:latin typeface="Calibri"/>
               </a:rPr>
-              <a:t>–   Ejemplo concreto de VetCare: decidimos separar Historia_Clinica de Mascota como clases distintas; la alternativa era guardar diagnosticos y tratamientos como campos dentro de Mascota</a:t>
+              <a:t>–   Ejemplo concreto del sistema de la clinica: decidimos separar Historia_Clinica de Mascota como clases distintas; la alternativa era guardar diagnosticos y tratamientos como campos dentro de Mascota</a:t>
             </a:r>
           </a:p>
           <a:p>
@@ -8757,7 +8757,7 @@
                 </a:solidFill>
                 <a:latin typeface="Calibri"/>
               </a:rPr>
-              <a:t>–   El criterio fue que en Huellitas muchos dueños de mascotas rescatadas no la conocen y un campo obligatorio los llevaria a inventar datos; la consecuencia es que la edad se muestra como aproximada cuando el dato falta.</a:t>
+              <a:t>–   El criterio fue que en la clinica muchos dueños de mascotas rescatadas no la conocen y un campo obligatorio los llevaria a inventar datos; la consecuencia es que la edad se muestra como aproximada cuando el dato falta.</a:t>
             </a:r>
           </a:p>
         </p:txBody>
@@ -8993,7 +8993,7 @@
                 </a:solidFill>
                 <a:latin typeface="Calibri"/>
               </a:rPr>
-              <a:t>–   Las mas frecuentes en un proyecto como VetCare son: como sabe usted que este requisito es realmente necesario; que pasa si dos recepcionistas registran la misma mascota al mismo tiempo; por que esta clase existe y no es un atributo de otra</a:t>
+              <a:t>–   Las mas frecuentes en un proyecto como el de la clinica son: como sabe usted que este requisito es realmente necesario; que pasa si dos recepcionistas registran la misma mascota al mismo tiempo; por que esta clase existe y no es un atributo de otra</a:t>
             </a:r>
           </a:p>
           <a:p>

--- a/Seminario de Sistemas/Clases/Clase 14 - Preparacion de la sustentacion y cierre/Presentacion.pptx
+++ b/Seminario de Sistemas/Clases/Clase 14 - Preparacion de la sustentacion y cierre/Presentacion.pptx
@@ -517,6 +517,12 @@
           <a:p>
             <a:r>
               <a:t>Por eso una sustentacion es un argumento con evidencia, no un recuento cronologico.</a:t>
+            </a:r>
+          </a:p>
+          <a:p/>
+          <a:p>
+            <a:r>
+              <a:t>En la clinica esa historia empieza por el problema, las fichas de papel que se pierden y los ocho minutos para encontrar un historial, y termina mostrando en el prototipo como cada requisito queda resuelto.</a:t>
             </a:r>
           </a:p>
         </p:txBody>
@@ -4262,7 +4268,7 @@
                 </a:solidFill>
                 <a:latin typeface="Calibri"/>
               </a:rPr>
-              <a:t>El reparto del guion en bloques con tiempos es criterio de evaluacion... (1/2)</a:t>
+              <a:t>El reparto del guion en bloques con tiempos es lo que sostiene una... (1/2)</a:t>
             </a:r>
           </a:p>
         </p:txBody>
@@ -4301,7 +4307,7 @@
                 </a:solidFill>
                 <a:latin typeface="Calibri"/>
               </a:rPr>
-              <a:t>–   El reparto del guion en bloques con tiempos es criterio de evaluacion, no un detalle logistico.</a:t>
+              <a:t>–   El reparto del guion en bloques con tiempos es lo que sostiene una sustentacion, no un detalle logistico.</a:t>
             </a:r>
           </a:p>
           <a:p>
@@ -4333,7 +4339,7 @@
                 </a:solidFill>
                 <a:latin typeface="Calibri"/>
               </a:rPr>
-              <a:t>–   El orden que funciona para el sistema de la clinica es: abrir con problema y alcance, seguir con requisitos y trazabilidad, luego los modelos UML, despues el prototipo en vivo y cerrar con decisiones, riesgos y siguiente paso hacia Programacion II.</a:t>
+              <a:t>–   El orden que funciona para la clinica es: abrir con problema y alcance, seguir con requisitos y trazabilidad, luego los modelos UML, despues el prototipo en vivo y cerrar con decisiones, riesgos y siguiente paso hacia Programacion II.</a:t>
             </a:r>
           </a:p>
           <a:p>
@@ -4530,7 +4536,7 @@
                 </a:solidFill>
                 <a:latin typeface="Calibri"/>
               </a:rPr>
-              <a:t>El reparto del guion en bloques con tiempos es criterio de evaluacion... (2/2)</a:t>
+              <a:t>El reparto del guion en bloques con tiempos es lo que sostiene una... (2/2)</a:t>
             </a:r>
           </a:p>
         </p:txBody>
@@ -6020,7 +6026,7 @@
                 </a:solidFill>
                 <a:latin typeface="Calibri"/>
               </a:rPr>
-              <a:t> El docente proyecta una sustentacion mal hecha y una bien hecha del mismo paquete, y luego arma en vivo la tabla de decisiones para justificar por que Historia_Clinica es una clase aparte de Mascota.</a:t>
+              <a:t> Se proyecta una sustentacion mal hecha y una bien hecha del mismo paquete, y luego arma en vivo la tabla de decisiones para justificar por que Historia_Clinica es una clase aparte de Mascota.</a:t>
             </a:r>
           </a:p>
           <a:p>
@@ -7921,7 +7927,7 @@
                 </a:solidFill>
                 <a:latin typeface="Calibri"/>
               </a:rPr>
-              <a:t>–   En el sistema de la clinica la evidencia esta toda disponible: la tabla de RF y RNF, los diagramas UML, el diccionario de datos y el prototipo navegable.</a:t>
+              <a:t>–   En la clinica la evidencia esta toda disponible: la tabla de RF y RNF, los diagramas UML, el diccionario de datos y el prototipo navegable.</a:t>
             </a:r>
           </a:p>
           <a:p>
@@ -7938,6 +7944,38 @@
                 <a:latin typeface="Calibri"/>
               </a:rPr>
               <a:t>–   El trabajo de hoy es ordenar esa evidencia para que cuente una sola historia.</a:t>
+            </a:r>
+          </a:p>
+          <a:p>
+            <a:pPr>
+              <a:spcAft>
+                <a:spcPts val="800"/>
+              </a:spcAft>
+            </a:pPr>
+            <a:r>
+              <a:rPr sz="2000" b="0" i="0">
+                <a:solidFill>
+                  <a:srgbClr val="333333"/>
+                </a:solidFill>
+                <a:latin typeface="Calibri"/>
+              </a:rPr>
+              <a:t>–   Una sustentacion es, por definicion, la defensa oral de un conjunto de decisiones frente a quien las va a evaluar o a usar.</a:t>
+            </a:r>
+          </a:p>
+          <a:p>
+            <a:pPr>
+              <a:spcAft>
+                <a:spcPts val="800"/>
+              </a:spcAft>
+            </a:pPr>
+            <a:r>
+              <a:rPr sz="2000" b="0" i="0">
+                <a:solidFill>
+                  <a:srgbClr val="333333"/>
+                </a:solidFill>
+                <a:latin typeface="Calibri"/>
+              </a:rPr>
+              <a:t>–   El error comun es ordenar la exposicion por documento, primero requisitos y luego diagramas, en lugar de ordenarla por problema resuelto.</a:t>
             </a:r>
           </a:p>
         </p:txBody>
@@ -8237,7 +8275,7 @@
                 </a:solidFill>
                 <a:latin typeface="Calibri"/>
               </a:rPr>
-              <a:t>–   Para el sistema de la clinica doce minutos alcanzan de sobra si se respetan las proporciones: uno y medio para el problema, tres para requisitos, dos para modelo, dos para interfaz en vivo, dos para decisiones y el resto para riesgos y cierre.</a:t>
+              <a:t>–   Para la clinica doce minutos alcanzan de sobra si se respetan las proporciones: uno y medio para el problema, tres para requisitos, dos para modelo, dos para interfaz en vivo, dos para decisiones y el resto para riesgos y cierre.</a:t>
             </a:r>
           </a:p>
         </p:txBody>
@@ -8489,7 +8527,7 @@
                 </a:solidFill>
                 <a:latin typeface="Calibri"/>
               </a:rPr>
-              <a:t>–   Ejemplo concreto del sistema de la clinica: decidimos separar Historia_Clinica de Mascota como clases distintas; la alternativa era guardar diagnosticos y tratamientos como campos dentro de Mascota</a:t>
+              <a:t>–   Ejemplo concreto de la clinica: decidimos separar Historia_Clinica de Mascota como clases distintas; la alternativa era guardar diagnosticos y tratamientos como campos dentro de Mascota</a:t>
             </a:r>
           </a:p>
           <a:p>

--- a/Seminario de Sistemas/Clases/Clase 14 - Preparacion de la sustentacion y cierre/Presentacion.pptx
+++ b/Seminario de Sistemas/Clases/Clase 14 - Preparacion de la sustentacion y cierre/Presentacion.pptx
@@ -17,9 +17,6 @@
     <p:sldId id="265" r:id="rId17"/>
     <p:sldId id="266" r:id="rId18"/>
     <p:sldId id="267" r:id="rId19"/>
-    <p:sldId id="268" r:id="rId20"/>
-    <p:sldId id="269" r:id="rId21"/>
-    <p:sldId id="270" r:id="rId22"/>
   </p:sldIdLst>
   <p:sldSz cx="12191695" cy="6858000" type="screen4x3"/>
   <p:notesSz cx="6858000" cy="9144000"/>
@@ -516,6 +513,66 @@
           <a:lstStyle/>
           <a:p>
             <a:r>
+              <a:t>DESARROLLO (para explicarlo, no se proyecta):</a:t>
+            </a:r>
+          </a:p>
+          <a:p/>
+          <a:p>
+            <a:r>
+              <a:t>Sustentar un paquete de diseño no es leer diapositivas ni narrar lo que el equipo hizo cada semana: es demostrar que las decisiones tomadas son defendibles.</a:t>
+            </a:r>
+          </a:p>
+          <a:p/>
+          <a:p>
+            <a:r>
+              <a:t>El jurado, sea el docente o un cliente simulado de la clinica, no esta evaluando cuanto trabajaron sino tres cosas concretas: si el diseño resuelve el problema declarado, si las piezas son coherentes entre si y si el equipo entiende lo que entrego.</a:t>
+            </a:r>
+          </a:p>
+          <a:p/>
+          <a:p>
+            <a:r>
+              <a:t>La diferencia se nota en la primera frase: quien dice hicimos casos de uso, luego clases, luego pantallas, esta narrando; quien dice la clinica pierde fichas y tarda ocho minutos en encontrar un historial</a:t>
+            </a:r>
+          </a:p>
+          <a:p/>
+          <a:p>
+            <a:r>
+              <a:t>Y este paquete de diseño ataca esos tres problemas asi, esta sustentando.</a:t>
+            </a:r>
+          </a:p>
+          <a:p/>
+          <a:p>
+            <a:r>
+              <a:t>En la clinica la evidencia esta toda disponible: la tabla de RF y RNF, los diagramas UML, el diccionario de datos y el prototipo navegable.</a:t>
+            </a:r>
+          </a:p>
+          <a:p/>
+          <a:p>
+            <a:r>
+              <a:t>El trabajo de hoy es ordenar esa evidencia para que cuente una sola historia.</a:t>
+            </a:r>
+          </a:p>
+          <a:p/>
+          <a:p>
+            <a:r>
+              <a:t>Una sustentacion es, por definicion, la defensa oral de un conjunto de decisiones frente a quien las va a evaluar o a usar.</a:t>
+            </a:r>
+          </a:p>
+          <a:p/>
+          <a:p>
+            <a:r>
+              <a:t>El error comun es ordenar la exposicion por documento, primero requisitos y luego diagramas, en lugar de ordenarla por problema resuelto.</a:t>
+            </a:r>
+          </a:p>
+          <a:p/>
+          <a:p>
+            <a:r>
+              <a:t>NOTAS:</a:t>
+            </a:r>
+          </a:p>
+          <a:p/>
+          <a:p>
+            <a:r>
               <a:t>Por eso una sustentacion es un argumento con evidencia, no un recuento cronologico.</a:t>
             </a:r>
           </a:p>
@@ -592,6 +649,60 @@
           <a:lstStyle/>
           <a:p>
             <a:r>
+              <a:t>DESARROLLO (para explicarlo, no se proyecta):</a:t>
+            </a:r>
+          </a:p>
+          <a:p/>
+          <a:p>
+            <a:r>
+              <a:t>El orden de la sustentacion no es libre, es un embudo y tiene una razon logica.</a:t>
+            </a:r>
+          </a:p>
+          <a:p/>
+          <a:p>
+            <a:r>
+              <a:t>Segundo los requisitos, porque son la promesa concreta: que va a hacer el sistema y con que restricciones.</a:t>
+            </a:r>
+          </a:p>
+          <a:p/>
+          <a:p>
+            <a:r>
+              <a:t>Cuarto la interfaz, porque es donde el jurado por fin ve y toca.</a:t>
+            </a:r>
+          </a:p>
+          <a:p/>
+          <a:p>
+            <a:r>
+              <a:t>Y quinto las decisiones, que es la parte que separa a un equipo que entendio de uno que copio plantillas.</a:t>
+            </a:r>
+          </a:p>
+          <a:p/>
+          <a:p>
+            <a:r>
+              <a:t>Invertir ese orden es el error mas comun: los equipos empiezan mostrando pantallas bonitas, el jurado pregunta que problema resuelve eso y ahi la sustentacion se desarma.</a:t>
+            </a:r>
+          </a:p>
+          <a:p/>
+          <a:p>
+            <a:r>
+              <a:t>Para la clinica doce minutos alcanzan de sobra si se respetan las proporciones: uno y medio para el problema, uno y medio para el alcance</a:t>
+            </a:r>
+          </a:p>
+          <a:p/>
+          <a:p>
+            <a:r>
+              <a:t>Dos para requisitos, dos para modelo, dos para interfaz en vivo, dos para decisiones y el ultimo minuto para riesgos y cierre.</a:t>
+            </a:r>
+          </a:p>
+          <a:p/>
+          <a:p>
+            <a:r>
+              <a:t>NOTAS:</a:t>
+            </a:r>
+          </a:p>
+          <a:p/>
+          <a:p>
+            <a:r>
               <a:t>Primero el problema, porque nada de lo que sigue tiene sentido si el jurado no sabe que duele en la clinica.</a:t>
             </a:r>
           </a:p>
@@ -668,6 +779,60 @@
           <a:lstStyle/>
           <a:p>
             <a:r>
+              <a:t>DESARROLLO (para explicarlo, no se proyecta):</a:t>
+            </a:r>
+          </a:p>
+          <a:p/>
+          <a:p>
+            <a:r>
+              <a:t>Defender una decision de diseño tiene una estructura fija que conviene memorizar: decision, alternativas consideradas, criterio de eleccion y consecuencia asumida.</a:t>
+            </a:r>
+          </a:p>
+          <a:p/>
+          <a:p>
+            <a:r>
+              <a:t>Ejemplo concreto de la clinica: decidimos separar Historia_Clinica de Mascota como clases distintas; la alternativa era guardar diagnosticos y tratamientos como campos dentro de Mascota</a:t>
+            </a:r>
+          </a:p>
+          <a:p/>
+          <a:p>
+            <a:r>
+              <a:t>El criterio fue que una mascota tiene muchas consultas a lo largo de su vida y una relacion uno a muchos no cabe en campos fijos</a:t>
+            </a:r>
+          </a:p>
+          <a:p/>
+          <a:p>
+            <a:r>
+              <a:t>La consecuencia es que hay una entidad mas y una consulta adicional al mostrar la ficha, lo cual se acepta porque el RNF de busqueda menor a tres segundos se sostiene con un indice.</a:t>
+            </a:r>
+          </a:p>
+          <a:p/>
+          <a:p>
+            <a:r>
+              <a:t>Otro ejemplo: decidimos que la fecha de nacimiento sea opcional; la alternativa era hacerla obligatoria</a:t>
+            </a:r>
+          </a:p>
+          <a:p/>
+          <a:p>
+            <a:r>
+              <a:t>El criterio fue que en la clinica muchos dueños de mascotas rescatadas no la conocen y un campo obligatorio los llevaria a inventar datos; la consecuencia es que la edad se muestra como aproximada cuando el dato falta.</a:t>
+            </a:r>
+          </a:p>
+          <a:p/>
+          <a:p>
+            <a:r>
+              <a:t>NOTAS:</a:t>
+            </a:r>
+          </a:p>
+          <a:p/>
+          <a:p>
+            <a:r>
+              <a:t>No basta decir que se hizo, hay que decir contra que se comparo y por que gano.</a:t>
+            </a:r>
+          </a:p>
+          <a:p/>
+          <a:p>
+            <a:r>
               <a:t>Una decision defendida asi resiste cualquier pregunta, porque el jurado ya sabe que el equipo penso en la alternativa.</a:t>
             </a:r>
           </a:p>
@@ -738,6 +903,48 @@
           <a:lstStyle/>
           <a:p>
             <a:r>
+              <a:t>DESARROLLO (para explicarlo, no se proyecta):</a:t>
+            </a:r>
+          </a:p>
+          <a:p/>
+          <a:p>
+            <a:r>
+              <a:t>Las preguntas del jurado son bastante predecibles y por eso se preparan.</a:t>
+            </a:r>
+          </a:p>
+          <a:p/>
+          <a:p>
+            <a:r>
+              <a:t>Las mas frecuentes en un proyecto como el de la clinica son: como sabe usted que este requisito es realmente necesario; que pasa si dos recepcionistas registran la misma mascota al mismo tiempo; por que esta clase existe y no es un atributo de otra</a:t>
+            </a:r>
+          </a:p>
+          <a:p/>
+          <a:p>
+            <a:r>
+              <a:t>Como se cumple el requisito no funcional que usted escribio y como se mediria; que pasa si el sistema se cae a mitad de un registro; que dejaron por fuera del alcance y por que; y quien de ustedes hizo esta parte.</a:t>
+            </a:r>
+          </a:p>
+          <a:p/>
+          <a:p>
+            <a:r>
+              <a:t>Hay que preparar la respuesta de cada una en dos frases, sin discursos.</a:t>
+            </a:r>
+          </a:p>
+          <a:p/>
+          <a:p>
+            <a:r>
+              <a:t>Y hay una regla de oro para cuando no se sabe: no se inventa.</a:t>
+            </a:r>
+          </a:p>
+          <a:p/>
+          <a:p>
+            <a:r>
+              <a:t>NOTAS:</a:t>
+            </a:r>
+          </a:p>
+          <a:p/>
+          <a:p>
+            <a:r>
               <a:t>La respuesta correcta es reconocer el vacio y proponer como se resolveria, por ejemplo no lo modelamos, lo registramos como riesgo abierto y se resolveria agregando una validacion de unicidad por dueño mas nombre en el diccionario de datos.</a:t>
             </a:r>
           </a:p>
@@ -745,6 +952,218 @@
           <a:p>
             <a:r>
               <a:t>Un jurado castiga mucho mas la improvisacion detectada que la honestidad tecnica.</a:t>
+            </a:r>
+          </a:p>
+        </p:txBody>
+      </p:sp>
+      <p:sp>
+        <p:nvSpPr>
+          <p:cNvPr id="4" name="Slide Number Placeholder 3"/>
+          <p:cNvSpPr>
+            <a:spLocks noGrp="1"/>
+          </p:cNvSpPr>
+          <p:nvPr>
+            <p:ph type="sldNum" idx="5" sz="quarter"/>
+          </p:nvPr>
+        </p:nvSpPr>
+        <p:spPr/>
+      </p:sp>
+    </p:spTree>
+  </p:cSld>
+  <p:clrMapOvr>
+    <a:masterClrMapping/>
+  </p:clrMapOvr>
+</p:notes>
+</file>
+
+<file path=ppt/notesSlides/notesSlide5.xml><?xml version="1.0" encoding="utf-8"?>
+<p:notes xmlns:a="http://schemas.openxmlformats.org/drawingml/2006/main" xmlns:p="http://schemas.openxmlformats.org/presentationml/2006/main" xmlns:r="http://schemas.openxmlformats.org/officeDocument/2006/relationships">
+  <p:cSld>
+    <p:spTree>
+      <p:nvGrpSpPr>
+        <p:cNvPr id="1" name=""/>
+        <p:cNvGrpSpPr/>
+        <p:nvPr/>
+      </p:nvGrpSpPr>
+      <p:grpSpPr>
+        <a:xfrm>
+          <a:off x="0" y="0"/>
+          <a:ext cx="0" cy="0"/>
+          <a:chOff x="0" y="0"/>
+          <a:chExt cx="0" cy="0"/>
+        </a:xfrm>
+      </p:grpSpPr>
+      <p:sp>
+        <p:nvSpPr>
+          <p:cNvPr id="2" name="Slide Image Placeholder 1"/>
+          <p:cNvSpPr>
+            <a:spLocks noGrp="1"/>
+          </p:cNvSpPr>
+          <p:nvPr>
+            <p:ph type="sldImg" idx="2"/>
+          </p:nvPr>
+        </p:nvSpPr>
+        <p:spPr/>
+      </p:sp>
+      <p:sp>
+        <p:nvSpPr>
+          <p:cNvPr id="3" name="Notes Placeholder 2"/>
+          <p:cNvSpPr>
+            <a:spLocks noGrp="1"/>
+          </p:cNvSpPr>
+          <p:nvPr>
+            <p:ph type="body" idx="3" sz="quarter"/>
+          </p:nvPr>
+        </p:nvSpPr>
+        <p:spPr/>
+        <p:txBody>
+          <a:bodyPr/>
+          <a:lstStyle/>
+          <a:p>
+            <a:r>
+              <a:t>DESARROLLO (para explicarlo, no se proyecta):</a:t>
+            </a:r>
+          </a:p>
+          <a:p/>
+          <a:p>
+            <a:r>
+              <a:t>El reparto del guion en bloques con tiempos es lo que sostiene una sustentacion, no un detalle logistico.</a:t>
+            </a:r>
+          </a:p>
+          <a:p/>
+          <a:p>
+            <a:r>
+              <a:t>La sustentacion es individual por defecto: el estudiante expone los cinco bloques y responde por todos, y lo que importa es que cada bloque tenga su rango de minutos y su evidencia en pantalla, no quien lo dice.</a:t>
+            </a:r>
+          </a:p>
+          <a:p/>
+          <a:p>
+            <a:r>
+              <a:t>El orden que funciona para la clinica es: abrir con problema y alcance, seguir con requisitos y trazabilidad, luego los modelos UML, despues el prototipo en vivo y cerrar con decisiones, riesgos y siguiente paso hacia Programacion II.</a:t>
+            </a:r>
+          </a:p>
+          <a:p/>
+          <a:p>
+            <a:r>
+              <a:t>Si el docente autorizo equipo de 2 o 3, se agrega el nombre del responsable a cada bloque, todos los integrantes deben hablar al menos dos minutos y ninguno puede hablar solo de lo suyo: cada persona domina una pieza pero debe conocer el todo</a:t>
+            </a:r>
+          </a:p>
+          <a:p/>
+          <a:p>
+            <a:r>
+              <a:t>Porque el jurado tiene derecho a preguntarle a cualquiera sobre cualquier parte.</a:t>
+            </a:r>
+          </a:p>
+          <a:p/>
+          <a:p>
+            <a:r>
+              <a:t>Ademas se prepara el plan B tecnico: capturas del prototipo por si falla el internet, el documento en PDF descargado y los diagramas exportados a imagen.</a:t>
+            </a:r>
+          </a:p>
+          <a:p/>
+          <a:p>
+            <a:r>
+              <a:t>Y algo que parece obvio pero se olvida siempre: quien maneja el prototipo debe haberlo recorrido antes haciendo clic en cosas que no estaban en el guion, porque el jurado va a hacer exactamente eso.</a:t>
+            </a:r>
+          </a:p>
+          <a:p/>
+          <a:p>
+            <a:r>
+              <a:t>NOTAS:</a:t>
+            </a:r>
+          </a:p>
+          <a:p/>
+          <a:p>
+            <a:r>
+              <a:t>Se ensaya cronometrado al menos dos veces, en voz alta y de pie, porque el tiempo estimado leyendo en silencio siempre es la mitad del real.</a:t>
+            </a:r>
+          </a:p>
+        </p:txBody>
+      </p:sp>
+      <p:sp>
+        <p:nvSpPr>
+          <p:cNvPr id="4" name="Slide Number Placeholder 3"/>
+          <p:cNvSpPr>
+            <a:spLocks noGrp="1"/>
+          </p:cNvSpPr>
+          <p:nvPr>
+            <p:ph type="sldNum" idx="5" sz="quarter"/>
+          </p:nvPr>
+        </p:nvSpPr>
+        <p:spPr/>
+      </p:sp>
+    </p:spTree>
+  </p:cSld>
+  <p:clrMapOvr>
+    <a:masterClrMapping/>
+  </p:clrMapOvr>
+</p:notes>
+</file>
+
+<file path=ppt/notesSlides/notesSlide6.xml><?xml version="1.0" encoding="utf-8"?>
+<p:notes xmlns:a="http://schemas.openxmlformats.org/drawingml/2006/main" xmlns:p="http://schemas.openxmlformats.org/presentationml/2006/main" xmlns:r="http://schemas.openxmlformats.org/officeDocument/2006/relationships">
+  <p:cSld>
+    <p:spTree>
+      <p:nvGrpSpPr>
+        <p:cNvPr id="1" name=""/>
+        <p:cNvGrpSpPr/>
+        <p:nvPr/>
+      </p:nvGrpSpPr>
+      <p:grpSpPr>
+        <a:xfrm>
+          <a:off x="0" y="0"/>
+          <a:ext cx="0" cy="0"/>
+          <a:chOff x="0" y="0"/>
+          <a:chExt cx="0" cy="0"/>
+        </a:xfrm>
+      </p:grpSpPr>
+      <p:sp>
+        <p:nvSpPr>
+          <p:cNvPr id="2" name="Slide Image Placeholder 1"/>
+          <p:cNvSpPr>
+            <a:spLocks noGrp="1"/>
+          </p:cNvSpPr>
+          <p:nvPr>
+            <p:ph type="sldImg" idx="2"/>
+          </p:nvPr>
+        </p:nvSpPr>
+        <p:spPr/>
+      </p:sp>
+      <p:sp>
+        <p:nvSpPr>
+          <p:cNvPr id="3" name="Notes Placeholder 2"/>
+          <p:cNvSpPr>
+            <a:spLocks noGrp="1"/>
+          </p:cNvSpPr>
+          <p:nvPr>
+            <p:ph type="body" idx="3" sz="quarter"/>
+          </p:nvPr>
+        </p:nvSpPr>
+        <p:spPr/>
+        <p:txBody>
+          <a:bodyPr/>
+          <a:lstStyle/>
+          <a:p>
+            <a:r>
+              <a:t>TEXTO COMPLETO DE LA LÁMINA (se proyecta resumido):</a:t>
+            </a:r>
+          </a:p>
+          <a:p/>
+          <a:p>
+            <a:r>
+              <a:t>Herramienta: Google Docs · draw.io · Figma o Penpot</a:t>
+            </a:r>
+          </a:p>
+          <a:p/>
+          <a:p>
+            <a:r>
+              <a:t>Demo: Se proyecta una sustentacion mal hecha y una bien hecha del mismo paquete, y luego arma en vivo la tabla de decisiones para justificar por que Historia_Clinica es una clase aparte de Mascota.</a:t>
+            </a:r>
+          </a:p>
+          <a:p/>
+          <a:p>
+            <a:r>
+              <a:t>Mismo dominio: la clinica veterinaria — no otro ejemplo. Aqui se diseña, no se programa.</a:t>
             </a:r>
           </a:p>
         </p:txBody>
@@ -4268,21 +4687,238 @@
                 </a:solidFill>
                 <a:latin typeface="Calibri"/>
               </a:rPr>
-              <a:t>El reparto del guion en bloques con tiempos es lo que sostiene una... (1/2)</a:t>
-            </a:r>
-          </a:p>
-        </p:txBody>
-      </p:sp>
-      <p:sp>
-        <p:nvSpPr>
-          <p:cNvPr id="5" name="TextBox 4"/>
+              <a:t>Guion de sustentacion: doce minutos cronometrados</a:t>
+            </a:r>
+          </a:p>
+        </p:txBody>
+      </p:sp>
+      <p:sp>
+        <p:nvSpPr>
+          <p:cNvPr id="5" name="Rounded Rectangle 4"/>
+          <p:cNvSpPr/>
+          <p:nvPr/>
+        </p:nvSpPr>
+        <p:spPr>
+          <a:xfrm>
+            <a:off x="457200" y="1261872"/>
+            <a:ext cx="11277295" cy="3986867"/>
+          </a:xfrm>
+          <a:prstGeom prst="roundRect">
+            <a:avLst>
+              <a:gd name="adj" fmla="val 4000"/>
+            </a:avLst>
+          </a:prstGeom>
+          <a:solidFill>
+            <a:srgbClr val="1E1E1E"/>
+          </a:solidFill>
+          <a:ln>
+            <a:noFill/>
+          </a:ln>
+        </p:spPr>
+        <p:style>
+          <a:lnRef idx="1">
+            <a:schemeClr val="accent1"/>
+          </a:lnRef>
+          <a:fillRef idx="3">
+            <a:schemeClr val="accent1"/>
+          </a:fillRef>
+          <a:effectRef idx="2">
+            <a:schemeClr val="accent1"/>
+          </a:effectRef>
+          <a:fontRef idx="minor">
+            <a:schemeClr val="lt1"/>
+          </a:fontRef>
+        </p:style>
+        <p:txBody>
+          <a:bodyPr rtlCol="0" anchor="ctr"/>
+          <a:lstStyle/>
+          <a:p>
+            <a:pPr algn="ctr"/>
+          </a:p>
+        </p:txBody>
+      </p:sp>
+      <p:sp>
+        <p:nvSpPr>
+          <p:cNvPr id="6" name="Rectangle 5"/>
+          <p:cNvSpPr/>
+          <p:nvPr/>
+        </p:nvSpPr>
+        <p:spPr>
+          <a:xfrm>
+            <a:off x="457200" y="1261872"/>
+            <a:ext cx="11277295" cy="365760"/>
+          </a:xfrm>
+          <a:prstGeom prst="rect">
+            <a:avLst/>
+          </a:prstGeom>
+          <a:solidFill>
+            <a:srgbClr val="2D2D30"/>
+          </a:solidFill>
+          <a:ln>
+            <a:noFill/>
+          </a:ln>
+        </p:spPr>
+        <p:style>
+          <a:lnRef idx="1">
+            <a:schemeClr val="accent1"/>
+          </a:lnRef>
+          <a:fillRef idx="3">
+            <a:schemeClr val="accent1"/>
+          </a:fillRef>
+          <a:effectRef idx="2">
+            <a:schemeClr val="accent1"/>
+          </a:effectRef>
+          <a:fontRef idx="minor">
+            <a:schemeClr val="lt1"/>
+          </a:fontRef>
+        </p:style>
+        <p:txBody>
+          <a:bodyPr rtlCol="0" anchor="ctr"/>
+          <a:lstStyle/>
+          <a:p>
+            <a:pPr algn="ctr"/>
+          </a:p>
+        </p:txBody>
+      </p:sp>
+      <p:sp>
+        <p:nvSpPr>
+          <p:cNvPr id="7" name="Oval 6"/>
+          <p:cNvSpPr/>
+          <p:nvPr/>
+        </p:nvSpPr>
+        <p:spPr>
+          <a:xfrm>
+            <a:off x="658368" y="1380743"/>
+            <a:ext cx="128016" cy="128016"/>
+          </a:xfrm>
+          <a:prstGeom prst="ellipse">
+            <a:avLst/>
+          </a:prstGeom>
+          <a:solidFill>
+            <a:srgbClr val="FF5F56"/>
+          </a:solidFill>
+          <a:ln>
+            <a:noFill/>
+          </a:ln>
+        </p:spPr>
+        <p:style>
+          <a:lnRef idx="1">
+            <a:schemeClr val="accent1"/>
+          </a:lnRef>
+          <a:fillRef idx="3">
+            <a:schemeClr val="accent1"/>
+          </a:fillRef>
+          <a:effectRef idx="2">
+            <a:schemeClr val="accent1"/>
+          </a:effectRef>
+          <a:fontRef idx="minor">
+            <a:schemeClr val="lt1"/>
+          </a:fontRef>
+        </p:style>
+        <p:txBody>
+          <a:bodyPr rtlCol="0" anchor="ctr"/>
+          <a:lstStyle/>
+          <a:p>
+            <a:pPr algn="ctr"/>
+          </a:p>
+        </p:txBody>
+      </p:sp>
+      <p:sp>
+        <p:nvSpPr>
+          <p:cNvPr id="8" name="Oval 7"/>
+          <p:cNvSpPr/>
+          <p:nvPr/>
+        </p:nvSpPr>
+        <p:spPr>
+          <a:xfrm>
+            <a:off x="877824" y="1380743"/>
+            <a:ext cx="128016" cy="128016"/>
+          </a:xfrm>
+          <a:prstGeom prst="ellipse">
+            <a:avLst/>
+          </a:prstGeom>
+          <a:solidFill>
+            <a:srgbClr val="FFBD2E"/>
+          </a:solidFill>
+          <a:ln>
+            <a:noFill/>
+          </a:ln>
+        </p:spPr>
+        <p:style>
+          <a:lnRef idx="1">
+            <a:schemeClr val="accent1"/>
+          </a:lnRef>
+          <a:fillRef idx="3">
+            <a:schemeClr val="accent1"/>
+          </a:fillRef>
+          <a:effectRef idx="2">
+            <a:schemeClr val="accent1"/>
+          </a:effectRef>
+          <a:fontRef idx="minor">
+            <a:schemeClr val="lt1"/>
+          </a:fontRef>
+        </p:style>
+        <p:txBody>
+          <a:bodyPr rtlCol="0" anchor="ctr"/>
+          <a:lstStyle/>
+          <a:p>
+            <a:pPr algn="ctr"/>
+          </a:p>
+        </p:txBody>
+      </p:sp>
+      <p:sp>
+        <p:nvSpPr>
+          <p:cNvPr id="9" name="Oval 8"/>
+          <p:cNvSpPr/>
+          <p:nvPr/>
+        </p:nvSpPr>
+        <p:spPr>
+          <a:xfrm>
+            <a:off x="1097280" y="1380743"/>
+            <a:ext cx="128016" cy="128016"/>
+          </a:xfrm>
+          <a:prstGeom prst="ellipse">
+            <a:avLst/>
+          </a:prstGeom>
+          <a:solidFill>
+            <a:srgbClr val="27C93F"/>
+          </a:solidFill>
+          <a:ln>
+            <a:noFill/>
+          </a:ln>
+        </p:spPr>
+        <p:style>
+          <a:lnRef idx="1">
+            <a:schemeClr val="accent1"/>
+          </a:lnRef>
+          <a:fillRef idx="3">
+            <a:schemeClr val="accent1"/>
+          </a:fillRef>
+          <a:effectRef idx="2">
+            <a:schemeClr val="accent1"/>
+          </a:effectRef>
+          <a:fontRef idx="minor">
+            <a:schemeClr val="lt1"/>
+          </a:fontRef>
+        </p:style>
+        <p:txBody>
+          <a:bodyPr rtlCol="0" anchor="ctr"/>
+          <a:lstStyle/>
+          <a:p>
+            <a:pPr algn="ctr"/>
+          </a:p>
+        </p:txBody>
+      </p:sp>
+      <p:sp>
+        <p:nvSpPr>
+          <p:cNvPr id="10" name="TextBox 9"/>
           <p:cNvSpPr txBox="1"/>
           <p:nvPr/>
         </p:nvSpPr>
         <p:spPr>
           <a:xfrm>
-            <a:off x="457200" y="1170432"/>
-            <a:ext cx="11277295" cy="5230368"/>
+            <a:off x="1371600" y="1298448"/>
+            <a:ext cx="10180015" cy="292608"/>
           </a:xfrm>
           <a:prstGeom prst="rect">
             <a:avLst/>
@@ -4290,79 +4926,2524 @@
           <a:noFill/>
         </p:spPr>
         <p:txBody>
+          <a:bodyPr wrap="square" anchor="ctr"/>
+          <a:lstStyle/>
+          <a:p>
+            <a:pPr algn="r"/>
+            <a:r>
+              <a:rPr sz="1100" b="1" i="0">
+                <a:solidFill>
+                  <a:srgbClr val="BBBBBB"/>
+                </a:solidFill>
+                <a:latin typeface="Calibri"/>
+              </a:rPr>
+              <a:t>Plantilla</a:t>
+            </a:r>
+          </a:p>
+        </p:txBody>
+      </p:sp>
+      <p:sp>
+        <p:nvSpPr>
+          <p:cNvPr id="11" name="TextBox 10"/>
+          <p:cNvSpPr txBox="1"/>
+          <p:nvPr/>
+        </p:nvSpPr>
+        <p:spPr>
+          <a:xfrm>
+            <a:off x="685800" y="1719072"/>
+            <a:ext cx="502920" cy="3392507"/>
+          </a:xfrm>
+          <a:prstGeom prst="rect">
+            <a:avLst/>
+          </a:prstGeom>
+          <a:noFill/>
+        </p:spPr>
+        <p:txBody>
           <a:bodyPr wrap="square">
             <a:spAutoFit/>
           </a:bodyPr>
           <a:lstStyle/>
           <a:p>
+            <a:pPr algn="r">
+              <a:spcAft>
+                <a:spcPts val="321"/>
+              </a:spcAft>
+            </a:pPr>
+            <a:r>
+              <a:rPr sz="1500" i="0" b="0">
+                <a:solidFill>
+                  <a:srgbClr val="858585"/>
+                </a:solidFill>
+                <a:latin typeface="Consolas"/>
+              </a:rPr>
+              <a:t>1</a:t>
+            </a:r>
+          </a:p>
+          <a:p>
+            <a:pPr algn="r">
+              <a:spcAft>
+                <a:spcPts val="321"/>
+              </a:spcAft>
+            </a:pPr>
+            <a:r>
+              <a:rPr sz="1500" i="0" b="0">
+                <a:solidFill>
+                  <a:srgbClr val="858585"/>
+                </a:solidFill>
+                <a:latin typeface="Consolas"/>
+              </a:rPr>
+              <a:t>2</a:t>
+            </a:r>
+          </a:p>
+          <a:p>
+            <a:pPr algn="r">
+              <a:spcAft>
+                <a:spcPts val="321"/>
+              </a:spcAft>
+            </a:pPr>
+            <a:r>
+              <a:rPr sz="1500" i="0" b="0">
+                <a:solidFill>
+                  <a:srgbClr val="858585"/>
+                </a:solidFill>
+                <a:latin typeface="Consolas"/>
+              </a:rPr>
+              <a:t>3</a:t>
+            </a:r>
+          </a:p>
+          <a:p>
+            <a:pPr algn="r">
+              <a:spcAft>
+                <a:spcPts val="321"/>
+              </a:spcAft>
+            </a:pPr>
+            <a:r>
+              <a:rPr sz="1500" i="0" b="0">
+                <a:solidFill>
+                  <a:srgbClr val="858585"/>
+                </a:solidFill>
+                <a:latin typeface="Consolas"/>
+              </a:rPr>
+              <a:t>4</a:t>
+            </a:r>
+          </a:p>
+          <a:p>
+            <a:pPr algn="r">
+              <a:spcAft>
+                <a:spcPts val="321"/>
+              </a:spcAft>
+            </a:pPr>
+            <a:r>
+              <a:rPr sz="1500" i="0" b="0">
+                <a:solidFill>
+                  <a:srgbClr val="858585"/>
+                </a:solidFill>
+                <a:latin typeface="Consolas"/>
+              </a:rPr>
+              <a:t>5</a:t>
+            </a:r>
+          </a:p>
+          <a:p>
+            <a:pPr algn="r">
+              <a:spcAft>
+                <a:spcPts val="321"/>
+              </a:spcAft>
+            </a:pPr>
+            <a:r>
+              <a:rPr sz="1500" i="0" b="0">
+                <a:solidFill>
+                  <a:srgbClr val="858585"/>
+                </a:solidFill>
+                <a:latin typeface="Consolas"/>
+              </a:rPr>
+              <a:t>6</a:t>
+            </a:r>
+          </a:p>
+          <a:p>
+            <a:pPr algn="r">
+              <a:spcAft>
+                <a:spcPts val="321"/>
+              </a:spcAft>
+            </a:pPr>
+            <a:r>
+              <a:rPr sz="1500" i="0" b="0">
+                <a:solidFill>
+                  <a:srgbClr val="858585"/>
+                </a:solidFill>
+                <a:latin typeface="Consolas"/>
+              </a:rPr>
+              <a:t>7</a:t>
+            </a:r>
+          </a:p>
+          <a:p>
+            <a:pPr algn="r">
+              <a:spcAft>
+                <a:spcPts val="321"/>
+              </a:spcAft>
+            </a:pPr>
+            <a:r>
+              <a:rPr sz="1500" i="0" b="0">
+                <a:solidFill>
+                  <a:srgbClr val="858585"/>
+                </a:solidFill>
+                <a:latin typeface="Consolas"/>
+              </a:rPr>
+              <a:t>8</a:t>
+            </a:r>
+          </a:p>
+          <a:p>
+            <a:pPr algn="r">
+              <a:spcAft>
+                <a:spcPts val="321"/>
+              </a:spcAft>
+            </a:pPr>
+            <a:r>
+              <a:rPr sz="1500" i="0" b="0">
+                <a:solidFill>
+                  <a:srgbClr val="858585"/>
+                </a:solidFill>
+                <a:latin typeface="Consolas"/>
+              </a:rPr>
+              <a:t>9</a:t>
+            </a:r>
+          </a:p>
+          <a:p>
+            <a:pPr algn="r">
+              <a:spcAft>
+                <a:spcPts val="321"/>
+              </a:spcAft>
+            </a:pPr>
+            <a:r>
+              <a:rPr sz="1500" i="0" b="0">
+                <a:solidFill>
+                  <a:srgbClr val="858585"/>
+                </a:solidFill>
+                <a:latin typeface="Consolas"/>
+              </a:rPr>
+              <a:t>10</a:t>
+            </a:r>
+          </a:p>
+          <a:p>
+            <a:pPr algn="r">
+              <a:spcAft>
+                <a:spcPts val="321"/>
+              </a:spcAft>
+            </a:pPr>
+            <a:r>
+              <a:rPr sz="1500" i="0" b="0">
+                <a:solidFill>
+                  <a:srgbClr val="858585"/>
+                </a:solidFill>
+                <a:latin typeface="Consolas"/>
+              </a:rPr>
+              <a:t>11</a:t>
+            </a:r>
+          </a:p>
+          <a:p>
+            <a:pPr algn="r">
+              <a:spcAft>
+                <a:spcPts val="321"/>
+              </a:spcAft>
+            </a:pPr>
+            <a:r>
+              <a:rPr sz="1500" i="0" b="0">
+                <a:solidFill>
+                  <a:srgbClr val="858585"/>
+                </a:solidFill>
+                <a:latin typeface="Consolas"/>
+              </a:rPr>
+              <a:t>12</a:t>
+            </a:r>
+          </a:p>
+        </p:txBody>
+      </p:sp>
+      <p:sp>
+        <p:nvSpPr>
+          <p:cNvPr id="12" name="TextBox 11"/>
+          <p:cNvSpPr txBox="1"/>
+          <p:nvPr/>
+        </p:nvSpPr>
+        <p:spPr>
+          <a:xfrm>
+            <a:off x="1188720" y="1719072"/>
+            <a:ext cx="10271455" cy="3392507"/>
+          </a:xfrm>
+          <a:prstGeom prst="rect">
+            <a:avLst/>
+          </a:prstGeom>
+          <a:noFill/>
+        </p:spPr>
+        <p:txBody>
+          <a:bodyPr wrap="square">
+            <a:spAutoFit/>
+          </a:bodyPr>
+          <a:lstStyle/>
+          <a:p>
             <a:pPr>
               <a:spcAft>
-                <a:spcPts val="800"/>
+                <a:spcPts val="321"/>
               </a:spcAft>
             </a:pPr>
             <a:r>
-              <a:rPr sz="2000" b="0" i="0">
-                <a:solidFill>
-                  <a:srgbClr val="333333"/>
-                </a:solidFill>
-                <a:latin typeface="Calibri"/>
-              </a:rPr>
-              <a:t>–   El reparto del guion en bloques con tiempos es lo que sostiene una sustentacion, no un detalle logistico.</a:t>
+              <a:rPr sz="1500" i="0" b="0">
+                <a:solidFill>
+                  <a:srgbClr val="B5CEA8"/>
+                </a:solidFill>
+                <a:latin typeface="Consolas"/>
+              </a:rPr>
+              <a:t>00</a:t>
+            </a:r>
+            <a:r>
+              <a:rPr sz="1500" i="0" b="0">
+                <a:solidFill>
+                  <a:srgbClr val="D4D4D4"/>
+                </a:solidFill>
+                <a:latin typeface="Consolas"/>
+              </a:rPr>
+              <a:t>:</a:t>
+            </a:r>
+            <a:r>
+              <a:rPr sz="1500" i="0" b="0">
+                <a:solidFill>
+                  <a:srgbClr val="B5CEA8"/>
+                </a:solidFill>
+                <a:latin typeface="Consolas"/>
+              </a:rPr>
+              <a:t>00</a:t>
+            </a:r>
+            <a:r>
+              <a:rPr sz="1500" i="0" b="0">
+                <a:solidFill>
+                  <a:srgbClr val="D4D4D4"/>
+                </a:solidFill>
+                <a:latin typeface="Consolas"/>
+              </a:rPr>
+              <a:t>-</a:t>
+            </a:r>
+            <a:r>
+              <a:rPr sz="1500" i="0" b="0">
+                <a:solidFill>
+                  <a:srgbClr val="B5CEA8"/>
+                </a:solidFill>
+                <a:latin typeface="Consolas"/>
+              </a:rPr>
+              <a:t>01</a:t>
+            </a:r>
+            <a:r>
+              <a:rPr sz="1500" i="0" b="0">
+                <a:solidFill>
+                  <a:srgbClr val="D4D4D4"/>
+                </a:solidFill>
+                <a:latin typeface="Consolas"/>
+              </a:rPr>
+              <a:t>:</a:t>
+            </a:r>
+            <a:r>
+              <a:rPr sz="1500" i="0" b="0">
+                <a:solidFill>
+                  <a:srgbClr val="B5CEA8"/>
+                </a:solidFill>
+                <a:latin typeface="Consolas"/>
+              </a:rPr>
+              <a:t>30</a:t>
+            </a:r>
+            <a:r>
+              <a:rPr sz="1500" i="0" b="0">
+                <a:solidFill>
+                  <a:srgbClr val="D4D4D4"/>
+                </a:solidFill>
+                <a:latin typeface="Consolas"/>
+              </a:rPr>
+              <a:t> | </a:t>
+            </a:r>
+            <a:r>
+              <a:rPr sz="1500" i="0" b="0">
+                <a:solidFill>
+                  <a:srgbClr val="D4D4D4"/>
+                </a:solidFill>
+                <a:latin typeface="Consolas"/>
+              </a:rPr>
+              <a:t>PROBLEMA</a:t>
+            </a:r>
+            <a:r>
+              <a:rPr sz="1500" i="0" b="0">
+                <a:solidFill>
+                  <a:srgbClr val="D4D4D4"/>
+                </a:solidFill>
+                <a:latin typeface="Consolas"/>
+              </a:rPr>
+              <a:t>    | </a:t>
+            </a:r>
+            <a:r>
+              <a:rPr sz="1500" i="0" b="0">
+                <a:solidFill>
+                  <a:srgbClr val="D4D4D4"/>
+                </a:solidFill>
+                <a:latin typeface="Consolas"/>
+              </a:rPr>
+              <a:t>La</a:t>
+            </a:r>
+            <a:r>
+              <a:rPr sz="1500" i="0" b="0">
+                <a:solidFill>
+                  <a:srgbClr val="D4D4D4"/>
+                </a:solidFill>
+                <a:latin typeface="Consolas"/>
+              </a:rPr>
+              <a:t> </a:t>
+            </a:r>
+            <a:r>
+              <a:rPr sz="1500" i="0" b="0">
+                <a:solidFill>
+                  <a:srgbClr val="D4D4D4"/>
+                </a:solidFill>
+                <a:latin typeface="Consolas"/>
+              </a:rPr>
+              <a:t>clinica</a:t>
+            </a:r>
+            <a:r>
+              <a:rPr sz="1500" i="0" b="0">
+                <a:solidFill>
+                  <a:srgbClr val="D4D4D4"/>
+                </a:solidFill>
+                <a:latin typeface="Consolas"/>
+              </a:rPr>
+              <a:t>: </a:t>
+            </a:r>
+            <a:r>
+              <a:rPr sz="1500" i="0" b="0">
+                <a:solidFill>
+                  <a:srgbClr val="D4D4D4"/>
+                </a:solidFill>
+                <a:latin typeface="Consolas"/>
+              </a:rPr>
+              <a:t>fichas</a:t>
+            </a:r>
+            <a:r>
+              <a:rPr sz="1500" i="0" b="0">
+                <a:solidFill>
+                  <a:srgbClr val="D4D4D4"/>
+                </a:solidFill>
+                <a:latin typeface="Consolas"/>
+              </a:rPr>
+              <a:t> </a:t>
+            </a:r>
+            <a:r>
+              <a:rPr sz="1500" i="0" b="0">
+                <a:solidFill>
+                  <a:srgbClr val="D4D4D4"/>
+                </a:solidFill>
+                <a:latin typeface="Consolas"/>
+              </a:rPr>
+              <a:t>extraviadas</a:t>
+            </a:r>
+            <a:r>
+              <a:rPr sz="1500" i="0" b="0">
+                <a:solidFill>
+                  <a:srgbClr val="D4D4D4"/>
+                </a:solidFill>
+                <a:latin typeface="Consolas"/>
+              </a:rPr>
+              <a:t>, </a:t>
+            </a:r>
+            <a:r>
+              <a:rPr sz="1500" i="0" b="0">
+                <a:solidFill>
+                  <a:srgbClr val="B5CEA8"/>
+                </a:solidFill>
+                <a:latin typeface="Consolas"/>
+              </a:rPr>
+              <a:t>8</a:t>
+            </a:r>
+            <a:r>
+              <a:rPr sz="1500" i="0" b="0">
+                <a:solidFill>
+                  <a:srgbClr val="D4D4D4"/>
+                </a:solidFill>
+                <a:latin typeface="Consolas"/>
+              </a:rPr>
+              <a:t> </a:t>
+            </a:r>
+            <a:r>
+              <a:rPr sz="1500" i="0" b="0">
+                <a:solidFill>
+                  <a:srgbClr val="D4D4D4"/>
+                </a:solidFill>
+                <a:latin typeface="Consolas"/>
+              </a:rPr>
+              <a:t>min</a:t>
+            </a:r>
+            <a:r>
+              <a:rPr sz="1500" i="0" b="0">
+                <a:solidFill>
+                  <a:srgbClr val="D4D4D4"/>
+                </a:solidFill>
+                <a:latin typeface="Consolas"/>
+              </a:rPr>
+              <a:t> </a:t>
+            </a:r>
+            <a:r>
+              <a:rPr sz="1500" i="0" b="0">
+                <a:solidFill>
+                  <a:srgbClr val="D4D4D4"/>
+                </a:solidFill>
+                <a:latin typeface="Consolas"/>
+              </a:rPr>
+              <a:t>por</a:t>
+            </a:r>
+            <a:r>
+              <a:rPr sz="1500" i="0" b="0">
+                <a:solidFill>
+                  <a:srgbClr val="D4D4D4"/>
+                </a:solidFill>
+                <a:latin typeface="Consolas"/>
+              </a:rPr>
+              <a:t> </a:t>
+            </a:r>
+            <a:r>
+              <a:rPr sz="1500" i="0" b="0">
+                <a:solidFill>
+                  <a:srgbClr val="D4D4D4"/>
+                </a:solidFill>
+                <a:latin typeface="Consolas"/>
+              </a:rPr>
+              <a:t>historial</a:t>
+            </a:r>
+            <a:r>
+              <a:rPr sz="1500" i="0" b="0">
+                <a:solidFill>
+                  <a:srgbClr val="D4D4D4"/>
+                </a:solidFill>
+                <a:latin typeface="Consolas"/>
+              </a:rPr>
+              <a:t>, </a:t>
+            </a:r>
+            <a:r>
+              <a:rPr sz="1500" i="0" b="0">
+                <a:solidFill>
+                  <a:srgbClr val="D4D4D4"/>
+                </a:solidFill>
+                <a:latin typeface="Consolas"/>
+              </a:rPr>
+              <a:t>cero</a:t>
+            </a:r>
+            <a:r>
+              <a:rPr sz="1500" i="0" b="0">
+                <a:solidFill>
+                  <a:srgbClr val="D4D4D4"/>
+                </a:solidFill>
+                <a:latin typeface="Consolas"/>
+              </a:rPr>
+              <a:t> </a:t>
+            </a:r>
+            <a:r>
+              <a:rPr sz="1500" i="0" b="0">
+                <a:solidFill>
+                  <a:srgbClr val="D4D4D4"/>
+                </a:solidFill>
+                <a:latin typeface="Consolas"/>
+              </a:rPr>
+              <a:t>metricas</a:t>
             </a:r>
           </a:p>
           <a:p>
             <a:pPr>
               <a:spcAft>
-                <a:spcPts val="800"/>
+                <a:spcPts val="321"/>
               </a:spcAft>
             </a:pPr>
             <a:r>
-              <a:rPr sz="2000" b="0" i="0">
-                <a:solidFill>
-                  <a:srgbClr val="333333"/>
-                </a:solidFill>
-                <a:latin typeface="Calibri"/>
-              </a:rPr>
-              <a:t>–   La sustentacion es individual por defecto: el estudiante expone los cinco bloques y responde por todos, y lo que importa es que cada bloque tenga su rango de minutos y su evidencia en pantalla, no quien lo dice.</a:t>
+              <a:rPr sz="1500" i="0" b="0">
+                <a:solidFill>
+                  <a:srgbClr val="B5CEA8"/>
+                </a:solidFill>
+                <a:latin typeface="Consolas"/>
+              </a:rPr>
+              <a:t>01</a:t>
+            </a:r>
+            <a:r>
+              <a:rPr sz="1500" i="0" b="0">
+                <a:solidFill>
+                  <a:srgbClr val="D4D4D4"/>
+                </a:solidFill>
+                <a:latin typeface="Consolas"/>
+              </a:rPr>
+              <a:t>:</a:t>
+            </a:r>
+            <a:r>
+              <a:rPr sz="1500" i="0" b="0">
+                <a:solidFill>
+                  <a:srgbClr val="B5CEA8"/>
+                </a:solidFill>
+                <a:latin typeface="Consolas"/>
+              </a:rPr>
+              <a:t>30</a:t>
+            </a:r>
+            <a:r>
+              <a:rPr sz="1500" i="0" b="0">
+                <a:solidFill>
+                  <a:srgbClr val="D4D4D4"/>
+                </a:solidFill>
+                <a:latin typeface="Consolas"/>
+              </a:rPr>
+              <a:t>-</a:t>
+            </a:r>
+            <a:r>
+              <a:rPr sz="1500" i="0" b="0">
+                <a:solidFill>
+                  <a:srgbClr val="B5CEA8"/>
+                </a:solidFill>
+                <a:latin typeface="Consolas"/>
+              </a:rPr>
+              <a:t>03</a:t>
+            </a:r>
+            <a:r>
+              <a:rPr sz="1500" i="0" b="0">
+                <a:solidFill>
+                  <a:srgbClr val="D4D4D4"/>
+                </a:solidFill>
+                <a:latin typeface="Consolas"/>
+              </a:rPr>
+              <a:t>:</a:t>
+            </a:r>
+            <a:r>
+              <a:rPr sz="1500" i="0" b="0">
+                <a:solidFill>
+                  <a:srgbClr val="B5CEA8"/>
+                </a:solidFill>
+                <a:latin typeface="Consolas"/>
+              </a:rPr>
+              <a:t>00</a:t>
+            </a:r>
+            <a:r>
+              <a:rPr sz="1500" i="0" b="0">
+                <a:solidFill>
+                  <a:srgbClr val="D4D4D4"/>
+                </a:solidFill>
+                <a:latin typeface="Consolas"/>
+              </a:rPr>
+              <a:t> | </a:t>
+            </a:r>
+            <a:r>
+              <a:rPr sz="1500" i="0" b="0">
+                <a:solidFill>
+                  <a:srgbClr val="D4D4D4"/>
+                </a:solidFill>
+                <a:latin typeface="Consolas"/>
+              </a:rPr>
+              <a:t>ALCANCE</a:t>
+            </a:r>
+            <a:r>
+              <a:rPr sz="1500" i="0" b="0">
+                <a:solidFill>
+                  <a:srgbClr val="D4D4D4"/>
+                </a:solidFill>
+                <a:latin typeface="Consolas"/>
+              </a:rPr>
+              <a:t>     | </a:t>
+            </a:r>
+            <a:r>
+              <a:rPr sz="1500" i="0" b="0">
+                <a:solidFill>
+                  <a:srgbClr val="D4D4D4"/>
+                </a:solidFill>
+                <a:latin typeface="Consolas"/>
+              </a:rPr>
+              <a:t>Lo</a:t>
+            </a:r>
+            <a:r>
+              <a:rPr sz="1500" i="0" b="0">
+                <a:solidFill>
+                  <a:srgbClr val="D4D4D4"/>
+                </a:solidFill>
+                <a:latin typeface="Consolas"/>
+              </a:rPr>
+              <a:t> </a:t>
+            </a:r>
+            <a:r>
+              <a:rPr sz="1500" i="0" b="0">
+                <a:solidFill>
+                  <a:srgbClr val="D4D4D4"/>
+                </a:solidFill>
+                <a:latin typeface="Consolas"/>
+              </a:rPr>
+              <a:t>que</a:t>
+            </a:r>
+            <a:r>
+              <a:rPr sz="1500" i="0" b="0">
+                <a:solidFill>
+                  <a:srgbClr val="D4D4D4"/>
+                </a:solidFill>
+                <a:latin typeface="Consolas"/>
+              </a:rPr>
+              <a:t> </a:t>
+            </a:r>
+            <a:r>
+              <a:rPr sz="1500" i="0" b="0">
+                <a:solidFill>
+                  <a:srgbClr val="D4D4D4"/>
+                </a:solidFill>
+                <a:latin typeface="Consolas"/>
+              </a:rPr>
+              <a:t>si</a:t>
+            </a:r>
+            <a:r>
+              <a:rPr sz="1500" i="0" b="0">
+                <a:solidFill>
+                  <a:srgbClr val="D4D4D4"/>
+                </a:solidFill>
+                <a:latin typeface="Consolas"/>
+              </a:rPr>
+              <a:t> </a:t>
+            </a:r>
+            <a:r>
+              <a:rPr sz="1500" i="0" b="0">
+                <a:solidFill>
+                  <a:srgbClr val="D4D4D4"/>
+                </a:solidFill>
+                <a:latin typeface="Consolas"/>
+              </a:rPr>
+              <a:t>entra</a:t>
+            </a:r>
+            <a:r>
+              <a:rPr sz="1500" i="0" b="0">
+                <a:solidFill>
+                  <a:srgbClr val="D4D4D4"/>
+                </a:solidFill>
+                <a:latin typeface="Consolas"/>
+              </a:rPr>
+              <a:t> </a:t>
+            </a:r>
+            <a:r>
+              <a:rPr sz="1500" i="0" b="0">
+                <a:solidFill>
+                  <a:srgbClr val="D4D4D4"/>
+                </a:solidFill>
+                <a:latin typeface="Consolas"/>
+              </a:rPr>
+              <a:t>y</a:t>
+            </a:r>
+            <a:r>
+              <a:rPr sz="1500" i="0" b="0">
+                <a:solidFill>
+                  <a:srgbClr val="D4D4D4"/>
+                </a:solidFill>
+                <a:latin typeface="Consolas"/>
+              </a:rPr>
+              <a:t> </a:t>
+            </a:r>
+            <a:r>
+              <a:rPr sz="1500" i="0" b="0">
+                <a:solidFill>
+                  <a:srgbClr val="D4D4D4"/>
+                </a:solidFill>
+                <a:latin typeface="Consolas"/>
+              </a:rPr>
+              <a:t>lo</a:t>
+            </a:r>
+            <a:r>
+              <a:rPr sz="1500" i="0" b="0">
+                <a:solidFill>
+                  <a:srgbClr val="D4D4D4"/>
+                </a:solidFill>
+                <a:latin typeface="Consolas"/>
+              </a:rPr>
+              <a:t> </a:t>
+            </a:r>
+            <a:r>
+              <a:rPr sz="1500" i="0" b="0">
+                <a:solidFill>
+                  <a:srgbClr val="D4D4D4"/>
+                </a:solidFill>
+                <a:latin typeface="Consolas"/>
+              </a:rPr>
+              <a:t>que</a:t>
+            </a:r>
+            <a:r>
+              <a:rPr sz="1500" i="0" b="0">
+                <a:solidFill>
+                  <a:srgbClr val="D4D4D4"/>
+                </a:solidFill>
+                <a:latin typeface="Consolas"/>
+              </a:rPr>
+              <a:t> </a:t>
+            </a:r>
+            <a:r>
+              <a:rPr sz="1500" i="0" b="0">
+                <a:solidFill>
+                  <a:srgbClr val="D4D4D4"/>
+                </a:solidFill>
+                <a:latin typeface="Consolas"/>
+              </a:rPr>
+              <a:t>quedo</a:t>
+            </a:r>
+            <a:r>
+              <a:rPr sz="1500" i="0" b="0">
+                <a:solidFill>
+                  <a:srgbClr val="D4D4D4"/>
+                </a:solidFill>
+                <a:latin typeface="Consolas"/>
+              </a:rPr>
+              <a:t> </a:t>
+            </a:r>
+            <a:r>
+              <a:rPr sz="1500" i="0" b="0">
+                <a:solidFill>
+                  <a:srgbClr val="D4D4D4"/>
+                </a:solidFill>
+                <a:latin typeface="Consolas"/>
+              </a:rPr>
+              <a:t>por</a:t>
+            </a:r>
+            <a:r>
+              <a:rPr sz="1500" i="0" b="0">
+                <a:solidFill>
+                  <a:srgbClr val="D4D4D4"/>
+                </a:solidFill>
+                <a:latin typeface="Consolas"/>
+              </a:rPr>
+              <a:t> </a:t>
+            </a:r>
+            <a:r>
+              <a:rPr sz="1500" i="0" b="0">
+                <a:solidFill>
+                  <a:srgbClr val="D4D4D4"/>
+                </a:solidFill>
+                <a:latin typeface="Consolas"/>
+              </a:rPr>
+              <a:t>fuera</a:t>
+            </a:r>
+            <a:r>
+              <a:rPr sz="1500" i="0" b="0">
+                <a:solidFill>
+                  <a:srgbClr val="D4D4D4"/>
+                </a:solidFill>
+                <a:latin typeface="Consolas"/>
+              </a:rPr>
+              <a:t>, </a:t>
+            </a:r>
+            <a:r>
+              <a:rPr sz="1500" i="0" b="0">
+                <a:solidFill>
+                  <a:srgbClr val="D4D4D4"/>
+                </a:solidFill>
+                <a:latin typeface="Consolas"/>
+              </a:rPr>
+              <a:t>con</a:t>
+            </a:r>
+            <a:r>
+              <a:rPr sz="1500" i="0" b="0">
+                <a:solidFill>
+                  <a:srgbClr val="D4D4D4"/>
+                </a:solidFill>
+                <a:latin typeface="Consolas"/>
+              </a:rPr>
+              <a:t> </a:t>
+            </a:r>
+            <a:r>
+              <a:rPr sz="1500" i="0" b="0">
+                <a:solidFill>
+                  <a:srgbClr val="D4D4D4"/>
+                </a:solidFill>
+                <a:latin typeface="Consolas"/>
+              </a:rPr>
+              <a:t>la</a:t>
+            </a:r>
+            <a:r>
+              <a:rPr sz="1500" i="0" b="0">
+                <a:solidFill>
+                  <a:srgbClr val="D4D4D4"/>
+                </a:solidFill>
+                <a:latin typeface="Consolas"/>
+              </a:rPr>
+              <a:t> </a:t>
+            </a:r>
+            <a:r>
+              <a:rPr sz="1500" i="0" b="0">
+                <a:solidFill>
+                  <a:srgbClr val="D4D4D4"/>
+                </a:solidFill>
+                <a:latin typeface="Consolas"/>
+              </a:rPr>
+              <a:t>razon</a:t>
             </a:r>
           </a:p>
           <a:p>
             <a:pPr>
               <a:spcAft>
-                <a:spcPts val="800"/>
+                <a:spcPts val="321"/>
               </a:spcAft>
             </a:pPr>
             <a:r>
-              <a:rPr sz="2000" b="0" i="0">
-                <a:solidFill>
-                  <a:srgbClr val="333333"/>
-                </a:solidFill>
-                <a:latin typeface="Calibri"/>
-              </a:rPr>
-              <a:t>–   El orden que funciona para la clinica es: abrir con problema y alcance, seguir con requisitos y trazabilidad, luego los modelos UML, despues el prototipo en vivo y cerrar con decisiones, riesgos y siguiente paso hacia Programacion II.</a:t>
+              <a:rPr sz="1500" i="0" b="0">
+                <a:solidFill>
+                  <a:srgbClr val="B5CEA8"/>
+                </a:solidFill>
+                <a:latin typeface="Consolas"/>
+              </a:rPr>
+              <a:t>03</a:t>
+            </a:r>
+            <a:r>
+              <a:rPr sz="1500" i="0" b="0">
+                <a:solidFill>
+                  <a:srgbClr val="D4D4D4"/>
+                </a:solidFill>
+                <a:latin typeface="Consolas"/>
+              </a:rPr>
+              <a:t>:</a:t>
+            </a:r>
+            <a:r>
+              <a:rPr sz="1500" i="0" b="0">
+                <a:solidFill>
+                  <a:srgbClr val="B5CEA8"/>
+                </a:solidFill>
+                <a:latin typeface="Consolas"/>
+              </a:rPr>
+              <a:t>00</a:t>
+            </a:r>
+            <a:r>
+              <a:rPr sz="1500" i="0" b="0">
+                <a:solidFill>
+                  <a:srgbClr val="D4D4D4"/>
+                </a:solidFill>
+                <a:latin typeface="Consolas"/>
+              </a:rPr>
+              <a:t>-</a:t>
+            </a:r>
+            <a:r>
+              <a:rPr sz="1500" i="0" b="0">
+                <a:solidFill>
+                  <a:srgbClr val="B5CEA8"/>
+                </a:solidFill>
+                <a:latin typeface="Consolas"/>
+              </a:rPr>
+              <a:t>05</a:t>
+            </a:r>
+            <a:r>
+              <a:rPr sz="1500" i="0" b="0">
+                <a:solidFill>
+                  <a:srgbClr val="D4D4D4"/>
+                </a:solidFill>
+                <a:latin typeface="Consolas"/>
+              </a:rPr>
+              <a:t>:</a:t>
+            </a:r>
+            <a:r>
+              <a:rPr sz="1500" i="0" b="0">
+                <a:solidFill>
+                  <a:srgbClr val="B5CEA8"/>
+                </a:solidFill>
+                <a:latin typeface="Consolas"/>
+              </a:rPr>
+              <a:t>00</a:t>
+            </a:r>
+            <a:r>
+              <a:rPr sz="1500" i="0" b="0">
+                <a:solidFill>
+                  <a:srgbClr val="D4D4D4"/>
+                </a:solidFill>
+                <a:latin typeface="Consolas"/>
+              </a:rPr>
+              <a:t> | </a:t>
+            </a:r>
+            <a:r>
+              <a:rPr sz="1500" i="0" b="0">
+                <a:solidFill>
+                  <a:srgbClr val="D4D4D4"/>
+                </a:solidFill>
+                <a:latin typeface="Consolas"/>
+              </a:rPr>
+              <a:t>REQUISITOS</a:t>
+            </a:r>
+            <a:r>
+              <a:rPr sz="1500" i="0" b="0">
+                <a:solidFill>
+                  <a:srgbClr val="D4D4D4"/>
+                </a:solidFill>
+                <a:latin typeface="Consolas"/>
+              </a:rPr>
+              <a:t>  | </a:t>
+            </a:r>
+            <a:r>
+              <a:rPr sz="1500" i="0" b="0">
+                <a:solidFill>
+                  <a:srgbClr val="D4D4D4"/>
+                </a:solidFill>
+                <a:latin typeface="Consolas"/>
+              </a:rPr>
+              <a:t>Solo</a:t>
+            </a:r>
+            <a:r>
+              <a:rPr sz="1500" i="0" b="0">
+                <a:solidFill>
+                  <a:srgbClr val="D4D4D4"/>
+                </a:solidFill>
+                <a:latin typeface="Consolas"/>
+              </a:rPr>
+              <a:t> </a:t>
+            </a:r>
+            <a:r>
+              <a:rPr sz="1500" i="0" b="0">
+                <a:solidFill>
+                  <a:srgbClr val="D4D4D4"/>
+                </a:solidFill>
+                <a:latin typeface="Consolas"/>
+              </a:rPr>
+              <a:t>los</a:t>
+            </a:r>
+            <a:r>
+              <a:rPr sz="1500" i="0" b="0">
+                <a:solidFill>
+                  <a:srgbClr val="D4D4D4"/>
+                </a:solidFill>
+                <a:latin typeface="Consolas"/>
+              </a:rPr>
+              <a:t> </a:t>
+            </a:r>
+            <a:r>
+              <a:rPr sz="1500" i="0" b="0">
+                <a:solidFill>
+                  <a:srgbClr val="B5CEA8"/>
+                </a:solidFill>
+                <a:latin typeface="Consolas"/>
+              </a:rPr>
+              <a:t>3</a:t>
+            </a:r>
+            <a:r>
+              <a:rPr sz="1500" i="0" b="0">
+                <a:solidFill>
+                  <a:srgbClr val="D4D4D4"/>
+                </a:solidFill>
+                <a:latin typeface="Consolas"/>
+              </a:rPr>
+              <a:t> </a:t>
+            </a:r>
+            <a:r>
+              <a:rPr sz="1500" i="0" b="0">
+                <a:solidFill>
+                  <a:srgbClr val="D4D4D4"/>
+                </a:solidFill>
+                <a:latin typeface="Consolas"/>
+              </a:rPr>
+              <a:t>RF</a:t>
+            </a:r>
+            <a:r>
+              <a:rPr sz="1500" i="0" b="0">
+                <a:solidFill>
+                  <a:srgbClr val="D4D4D4"/>
+                </a:solidFill>
+                <a:latin typeface="Consolas"/>
+              </a:rPr>
+              <a:t> </a:t>
+            </a:r>
+            <a:r>
+              <a:rPr sz="1500" i="0" b="0">
+                <a:solidFill>
+                  <a:srgbClr val="D4D4D4"/>
+                </a:solidFill>
+                <a:latin typeface="Consolas"/>
+              </a:rPr>
+              <a:t>criticos</a:t>
+            </a:r>
+            <a:r>
+              <a:rPr sz="1500" i="0" b="0">
+                <a:solidFill>
+                  <a:srgbClr val="D4D4D4"/>
+                </a:solidFill>
+                <a:latin typeface="Consolas"/>
+              </a:rPr>
+              <a:t> </a:t>
+            </a:r>
+            <a:r>
+              <a:rPr sz="1500" i="0" b="0">
+                <a:solidFill>
+                  <a:srgbClr val="D4D4D4"/>
+                </a:solidFill>
+                <a:latin typeface="Consolas"/>
+              </a:rPr>
+              <a:t>y</a:t>
+            </a:r>
+            <a:r>
+              <a:rPr sz="1500" i="0" b="0">
+                <a:solidFill>
+                  <a:srgbClr val="D4D4D4"/>
+                </a:solidFill>
+                <a:latin typeface="Consolas"/>
+              </a:rPr>
+              <a:t> </a:t>
+            </a:r>
+            <a:r>
+              <a:rPr sz="1500" i="0" b="0">
+                <a:solidFill>
+                  <a:srgbClr val="B5CEA8"/>
+                </a:solidFill>
+                <a:latin typeface="Consolas"/>
+              </a:rPr>
+              <a:t>2</a:t>
+            </a:r>
+            <a:r>
+              <a:rPr sz="1500" i="0" b="0">
+                <a:solidFill>
+                  <a:srgbClr val="D4D4D4"/>
+                </a:solidFill>
+                <a:latin typeface="Consolas"/>
+              </a:rPr>
+              <a:t> </a:t>
+            </a:r>
+            <a:r>
+              <a:rPr sz="1500" i="0" b="0">
+                <a:solidFill>
+                  <a:srgbClr val="D4D4D4"/>
+                </a:solidFill>
+                <a:latin typeface="Consolas"/>
+              </a:rPr>
+              <a:t>RNF</a:t>
+            </a:r>
+            <a:r>
+              <a:rPr sz="1500" i="0" b="0">
+                <a:solidFill>
+                  <a:srgbClr val="D4D4D4"/>
+                </a:solidFill>
+                <a:latin typeface="Consolas"/>
+              </a:rPr>
+              <a:t> </a:t>
+            </a:r>
+            <a:r>
+              <a:rPr sz="1500" i="0" b="0">
+                <a:solidFill>
+                  <a:srgbClr val="D4D4D4"/>
+                </a:solidFill>
+                <a:latin typeface="Consolas"/>
+              </a:rPr>
+              <a:t>medibles</a:t>
+            </a:r>
+            <a:r>
+              <a:rPr sz="1500" i="0" b="0">
+                <a:solidFill>
+                  <a:srgbClr val="D4D4D4"/>
+                </a:solidFill>
+                <a:latin typeface="Consolas"/>
+              </a:rPr>
+              <a:t>; </a:t>
+            </a:r>
+            <a:r>
+              <a:rPr sz="1500" i="0" b="0">
+                <a:solidFill>
+                  <a:srgbClr val="D4D4D4"/>
+                </a:solidFill>
+                <a:latin typeface="Consolas"/>
+              </a:rPr>
+              <a:t>el</a:t>
+            </a:r>
+            <a:r>
+              <a:rPr sz="1500" i="0" b="0">
+                <a:solidFill>
+                  <a:srgbClr val="D4D4D4"/>
+                </a:solidFill>
+                <a:latin typeface="Consolas"/>
+              </a:rPr>
+              <a:t> </a:t>
+            </a:r>
+            <a:r>
+              <a:rPr sz="1500" i="0" b="0">
+                <a:solidFill>
+                  <a:srgbClr val="D4D4D4"/>
+                </a:solidFill>
+                <a:latin typeface="Consolas"/>
+              </a:rPr>
+              <a:t>resto</a:t>
+            </a:r>
+            <a:r>
+              <a:rPr sz="1500" i="0" b="0">
+                <a:solidFill>
+                  <a:srgbClr val="D4D4D4"/>
+                </a:solidFill>
+                <a:latin typeface="Consolas"/>
+              </a:rPr>
+              <a:t> </a:t>
+            </a:r>
+            <a:r>
+              <a:rPr sz="1500" i="0" b="0">
+                <a:solidFill>
+                  <a:srgbClr val="D4D4D4"/>
+                </a:solidFill>
+                <a:latin typeface="Consolas"/>
+              </a:rPr>
+              <a:t>en</a:t>
+            </a:r>
+            <a:r>
+              <a:rPr sz="1500" i="0" b="0">
+                <a:solidFill>
+                  <a:srgbClr val="D4D4D4"/>
+                </a:solidFill>
+                <a:latin typeface="Consolas"/>
+              </a:rPr>
+              <a:t> </a:t>
+            </a:r>
+            <a:r>
+              <a:rPr sz="1500" i="0" b="0">
+                <a:solidFill>
+                  <a:srgbClr val="D4D4D4"/>
+                </a:solidFill>
+                <a:latin typeface="Consolas"/>
+              </a:rPr>
+              <a:t>el</a:t>
+            </a:r>
+            <a:r>
+              <a:rPr sz="1500" i="0" b="0">
+                <a:solidFill>
+                  <a:srgbClr val="D4D4D4"/>
+                </a:solidFill>
+                <a:latin typeface="Consolas"/>
+              </a:rPr>
+              <a:t> </a:t>
+            </a:r>
+            <a:r>
+              <a:rPr sz="1500" i="0" b="0">
+                <a:solidFill>
+                  <a:srgbClr val="D4D4D4"/>
+                </a:solidFill>
+                <a:latin typeface="Consolas"/>
+              </a:rPr>
+              <a:t>documento</a:t>
             </a:r>
           </a:p>
           <a:p>
             <a:pPr>
               <a:spcAft>
-                <a:spcPts val="800"/>
+                <a:spcPts val="321"/>
               </a:spcAft>
             </a:pPr>
             <a:r>
-              <a:rPr sz="2000" b="0" i="0">
-                <a:solidFill>
-                  <a:srgbClr val="333333"/>
+              <a:rPr sz="1500" i="0" b="0">
+                <a:solidFill>
+                  <a:srgbClr val="B5CEA8"/>
+                </a:solidFill>
+                <a:latin typeface="Consolas"/>
+              </a:rPr>
+              <a:t>05</a:t>
+            </a:r>
+            <a:r>
+              <a:rPr sz="1500" i="0" b="0">
+                <a:solidFill>
+                  <a:srgbClr val="D4D4D4"/>
+                </a:solidFill>
+                <a:latin typeface="Consolas"/>
+              </a:rPr>
+              <a:t>:</a:t>
+            </a:r>
+            <a:r>
+              <a:rPr sz="1500" i="0" b="0">
+                <a:solidFill>
+                  <a:srgbClr val="B5CEA8"/>
+                </a:solidFill>
+                <a:latin typeface="Consolas"/>
+              </a:rPr>
+              <a:t>00</a:t>
+            </a:r>
+            <a:r>
+              <a:rPr sz="1500" i="0" b="0">
+                <a:solidFill>
+                  <a:srgbClr val="D4D4D4"/>
+                </a:solidFill>
+                <a:latin typeface="Consolas"/>
+              </a:rPr>
+              <a:t>-</a:t>
+            </a:r>
+            <a:r>
+              <a:rPr sz="1500" i="0" b="0">
+                <a:solidFill>
+                  <a:srgbClr val="B5CEA8"/>
+                </a:solidFill>
+                <a:latin typeface="Consolas"/>
+              </a:rPr>
+              <a:t>07</a:t>
+            </a:r>
+            <a:r>
+              <a:rPr sz="1500" i="0" b="0">
+                <a:solidFill>
+                  <a:srgbClr val="D4D4D4"/>
+                </a:solidFill>
+                <a:latin typeface="Consolas"/>
+              </a:rPr>
+              <a:t>:</a:t>
+            </a:r>
+            <a:r>
+              <a:rPr sz="1500" i="0" b="0">
+                <a:solidFill>
+                  <a:srgbClr val="B5CEA8"/>
+                </a:solidFill>
+                <a:latin typeface="Consolas"/>
+              </a:rPr>
+              <a:t>00</a:t>
+            </a:r>
+            <a:r>
+              <a:rPr sz="1500" i="0" b="0">
+                <a:solidFill>
+                  <a:srgbClr val="D4D4D4"/>
+                </a:solidFill>
+                <a:latin typeface="Consolas"/>
+              </a:rPr>
+              <a:t> | </a:t>
+            </a:r>
+            <a:r>
+              <a:rPr sz="1500" i="0" b="0">
+                <a:solidFill>
+                  <a:srgbClr val="D4D4D4"/>
+                </a:solidFill>
+                <a:latin typeface="Consolas"/>
+              </a:rPr>
+              <a:t>MODELO</a:t>
+            </a:r>
+            <a:r>
+              <a:rPr sz="1500" i="0" b="0">
+                <a:solidFill>
+                  <a:srgbClr val="D4D4D4"/>
+                </a:solidFill>
+                <a:latin typeface="Consolas"/>
+              </a:rPr>
+              <a:t>      | </a:t>
+            </a:r>
+            <a:r>
+              <a:rPr sz="1500" i="0" b="0">
+                <a:solidFill>
+                  <a:srgbClr val="D4D4D4"/>
+                </a:solidFill>
+                <a:latin typeface="Consolas"/>
+              </a:rPr>
+              <a:t>Casos</a:t>
+            </a:r>
+            <a:r>
+              <a:rPr sz="1500" i="0" b="0">
+                <a:solidFill>
+                  <a:srgbClr val="D4D4D4"/>
+                </a:solidFill>
+                <a:latin typeface="Consolas"/>
+              </a:rPr>
+              <a:t> </a:t>
+            </a:r>
+            <a:r>
+              <a:rPr sz="1500" i="0" b="0">
+                <a:solidFill>
+                  <a:srgbClr val="D4D4D4"/>
+                </a:solidFill>
+                <a:latin typeface="Consolas"/>
+              </a:rPr>
+              <a:t>de</a:t>
+            </a:r>
+            <a:r>
+              <a:rPr sz="1500" i="0" b="0">
+                <a:solidFill>
+                  <a:srgbClr val="D4D4D4"/>
+                </a:solidFill>
+                <a:latin typeface="Consolas"/>
+              </a:rPr>
+              <a:t> </a:t>
+            </a:r>
+            <a:r>
+              <a:rPr sz="1500" i="0" b="0">
+                <a:solidFill>
+                  <a:srgbClr val="D4D4D4"/>
+                </a:solidFill>
+                <a:latin typeface="Consolas"/>
+              </a:rPr>
+              <a:t>uso</a:t>
+            </a:r>
+            <a:r>
+              <a:rPr sz="1500" i="0" b="0">
+                <a:solidFill>
+                  <a:srgbClr val="D4D4D4"/>
+                </a:solidFill>
+                <a:latin typeface="Consolas"/>
+              </a:rPr>
+              <a:t> </a:t>
+            </a:r>
+            <a:r>
+              <a:rPr sz="1500" i="0" b="0">
+                <a:solidFill>
+                  <a:srgbClr val="D4D4D4"/>
+                </a:solidFill>
+                <a:latin typeface="Consolas"/>
+              </a:rPr>
+              <a:t>y</a:t>
+            </a:r>
+            <a:r>
+              <a:rPr sz="1500" i="0" b="0">
+                <a:solidFill>
+                  <a:srgbClr val="D4D4D4"/>
+                </a:solidFill>
+                <a:latin typeface="Consolas"/>
+              </a:rPr>
+              <a:t> </a:t>
+            </a:r>
+            <a:r>
+              <a:rPr sz="1500" i="0" b="0">
+                <a:solidFill>
+                  <a:srgbClr val="D4D4D4"/>
+                </a:solidFill>
+                <a:latin typeface="Consolas"/>
+              </a:rPr>
+              <a:t>clases</a:t>
+            </a:r>
+            <a:r>
+              <a:rPr sz="1500" i="0" b="0">
+                <a:solidFill>
+                  <a:srgbClr val="D4D4D4"/>
+                </a:solidFill>
+                <a:latin typeface="Consolas"/>
+              </a:rPr>
+              <a:t>: </a:t>
+            </a:r>
+            <a:r>
+              <a:rPr sz="1500" i="0" b="0">
+                <a:solidFill>
+                  <a:srgbClr val="D4D4D4"/>
+                </a:solidFill>
+                <a:latin typeface="Consolas"/>
+              </a:rPr>
+              <a:t>Mascota</a:t>
+            </a:r>
+            <a:r>
+              <a:rPr sz="1500" i="0" b="0">
+                <a:solidFill>
+                  <a:srgbClr val="D4D4D4"/>
+                </a:solidFill>
+                <a:latin typeface="Consolas"/>
+              </a:rPr>
+              <a:t>, </a:t>
+            </a:r>
+            <a:r>
+              <a:rPr sz="1500" i="0" b="0">
+                <a:solidFill>
+                  <a:srgbClr val="D4D4D4"/>
+                </a:solidFill>
+                <a:latin typeface="Consolas"/>
+              </a:rPr>
+              <a:t>Dueño</a:t>
+            </a:r>
+            <a:r>
+              <a:rPr sz="1500" i="0" b="0">
+                <a:solidFill>
+                  <a:srgbClr val="D4D4D4"/>
+                </a:solidFill>
+                <a:latin typeface="Consolas"/>
+              </a:rPr>
+              <a:t>, </a:t>
+            </a:r>
+            <a:r>
+              <a:rPr sz="1500" i="0" b="0">
+                <a:solidFill>
+                  <a:srgbClr val="D4D4D4"/>
+                </a:solidFill>
+                <a:latin typeface="Consolas"/>
+              </a:rPr>
+              <a:t>Historia_Clinica</a:t>
+            </a:r>
+            <a:r>
+              <a:rPr sz="1500" i="0" b="0">
+                <a:solidFill>
+                  <a:srgbClr val="D4D4D4"/>
+                </a:solidFill>
+                <a:latin typeface="Consolas"/>
+              </a:rPr>
+              <a:t>, </a:t>
+            </a:r>
+            <a:r>
+              <a:rPr sz="1500" i="0" b="0">
+                <a:solidFill>
+                  <a:srgbClr val="D4D4D4"/>
+                </a:solidFill>
+                <a:latin typeface="Consolas"/>
+              </a:rPr>
+              <a:t>Cita</a:t>
+            </a:r>
+          </a:p>
+          <a:p>
+            <a:pPr>
+              <a:spcAft>
+                <a:spcPts val="321"/>
+              </a:spcAft>
+            </a:pPr>
+            <a:r>
+              <a:rPr sz="1500" i="0" b="0">
+                <a:solidFill>
+                  <a:srgbClr val="B5CEA8"/>
+                </a:solidFill>
+                <a:latin typeface="Consolas"/>
+              </a:rPr>
+              <a:t>07</a:t>
+            </a:r>
+            <a:r>
+              <a:rPr sz="1500" i="0" b="0">
+                <a:solidFill>
+                  <a:srgbClr val="D4D4D4"/>
+                </a:solidFill>
+                <a:latin typeface="Consolas"/>
+              </a:rPr>
+              <a:t>:</a:t>
+            </a:r>
+            <a:r>
+              <a:rPr sz="1500" i="0" b="0">
+                <a:solidFill>
+                  <a:srgbClr val="B5CEA8"/>
+                </a:solidFill>
+                <a:latin typeface="Consolas"/>
+              </a:rPr>
+              <a:t>00</a:t>
+            </a:r>
+            <a:r>
+              <a:rPr sz="1500" i="0" b="0">
+                <a:solidFill>
+                  <a:srgbClr val="D4D4D4"/>
+                </a:solidFill>
+                <a:latin typeface="Consolas"/>
+              </a:rPr>
+              <a:t>-</a:t>
+            </a:r>
+            <a:r>
+              <a:rPr sz="1500" i="0" b="0">
+                <a:solidFill>
+                  <a:srgbClr val="B5CEA8"/>
+                </a:solidFill>
+                <a:latin typeface="Consolas"/>
+              </a:rPr>
+              <a:t>09</a:t>
+            </a:r>
+            <a:r>
+              <a:rPr sz="1500" i="0" b="0">
+                <a:solidFill>
+                  <a:srgbClr val="D4D4D4"/>
+                </a:solidFill>
+                <a:latin typeface="Consolas"/>
+              </a:rPr>
+              <a:t>:</a:t>
+            </a:r>
+            <a:r>
+              <a:rPr sz="1500" i="0" b="0">
+                <a:solidFill>
+                  <a:srgbClr val="B5CEA8"/>
+                </a:solidFill>
+                <a:latin typeface="Consolas"/>
+              </a:rPr>
+              <a:t>00</a:t>
+            </a:r>
+            <a:r>
+              <a:rPr sz="1500" i="0" b="0">
+                <a:solidFill>
+                  <a:srgbClr val="D4D4D4"/>
+                </a:solidFill>
+                <a:latin typeface="Consolas"/>
+              </a:rPr>
+              <a:t> | </a:t>
+            </a:r>
+            <a:r>
+              <a:rPr sz="1500" i="0" b="0">
+                <a:solidFill>
+                  <a:srgbClr val="D4D4D4"/>
+                </a:solidFill>
+                <a:latin typeface="Consolas"/>
+              </a:rPr>
+              <a:t>INTERFAZ</a:t>
+            </a:r>
+            <a:r>
+              <a:rPr sz="1500" i="0" b="0">
+                <a:solidFill>
+                  <a:srgbClr val="D4D4D4"/>
+                </a:solidFill>
+                <a:latin typeface="Consolas"/>
+              </a:rPr>
+              <a:t>    | </a:t>
+            </a:r>
+            <a:r>
+              <a:rPr sz="1500" i="0" b="0">
+                <a:solidFill>
+                  <a:srgbClr val="D4D4D4"/>
+                </a:solidFill>
+                <a:latin typeface="Consolas"/>
+              </a:rPr>
+              <a:t>Prototipo</a:t>
+            </a:r>
+            <a:r>
+              <a:rPr sz="1500" i="0" b="0">
+                <a:solidFill>
+                  <a:srgbClr val="D4D4D4"/>
+                </a:solidFill>
+                <a:latin typeface="Consolas"/>
+              </a:rPr>
+              <a:t> </a:t>
+            </a:r>
+            <a:r>
+              <a:rPr sz="1500" i="0" b="0">
+                <a:solidFill>
+                  <a:srgbClr val="D4D4D4"/>
+                </a:solidFill>
+                <a:latin typeface="Consolas"/>
+              </a:rPr>
+              <a:t>en</a:t>
+            </a:r>
+            <a:r>
+              <a:rPr sz="1500" i="0" b="0">
+                <a:solidFill>
+                  <a:srgbClr val="D4D4D4"/>
+                </a:solidFill>
+                <a:latin typeface="Consolas"/>
+              </a:rPr>
+              <a:t> </a:t>
+            </a:r>
+            <a:r>
+              <a:rPr sz="1500" i="0" b="0">
+                <a:solidFill>
+                  <a:srgbClr val="D4D4D4"/>
+                </a:solidFill>
+                <a:latin typeface="Consolas"/>
+              </a:rPr>
+              <a:t>vivo</a:t>
+            </a:r>
+            <a:r>
+              <a:rPr sz="1500" i="0" b="0">
+                <a:solidFill>
+                  <a:srgbClr val="D4D4D4"/>
+                </a:solidFill>
+                <a:latin typeface="Consolas"/>
+              </a:rPr>
+              <a:t>: </a:t>
+            </a:r>
+            <a:r>
+              <a:rPr sz="1500" i="0" b="0">
+                <a:solidFill>
+                  <a:srgbClr val="D4D4D4"/>
+                </a:solidFill>
+                <a:latin typeface="Consolas"/>
+              </a:rPr>
+              <a:t>registrar</a:t>
+            </a:r>
+            <a:r>
+              <a:rPr sz="1500" i="0" b="0">
+                <a:solidFill>
+                  <a:srgbClr val="D4D4D4"/>
+                </a:solidFill>
+                <a:latin typeface="Consolas"/>
+              </a:rPr>
+              <a:t> </a:t>
+            </a:r>
+            <a:r>
+              <a:rPr sz="1500" i="0" b="0">
+                <a:solidFill>
+                  <a:srgbClr val="D4D4D4"/>
+                </a:solidFill>
+                <a:latin typeface="Consolas"/>
+              </a:rPr>
+              <a:t>mascota</a:t>
+            </a:r>
+            <a:r>
+              <a:rPr sz="1500" i="0" b="0">
+                <a:solidFill>
+                  <a:srgbClr val="D4D4D4"/>
+                </a:solidFill>
+                <a:latin typeface="Consolas"/>
+              </a:rPr>
+              <a:t> -&gt; </a:t>
+            </a:r>
+            <a:r>
+              <a:rPr sz="1500" i="0" b="0">
+                <a:solidFill>
+                  <a:srgbClr val="D4D4D4"/>
+                </a:solidFill>
+                <a:latin typeface="Consolas"/>
+              </a:rPr>
+              <a:t>confirmacion</a:t>
+            </a:r>
+            <a:r>
+              <a:rPr sz="1500" i="0" b="0">
+                <a:solidFill>
+                  <a:srgbClr val="D4D4D4"/>
+                </a:solidFill>
+                <a:latin typeface="Consolas"/>
+              </a:rPr>
+              <a:t> -&gt; </a:t>
+            </a:r>
+            <a:r>
+              <a:rPr sz="1500" i="0" b="0">
+                <a:solidFill>
+                  <a:srgbClr val="D4D4D4"/>
+                </a:solidFill>
+                <a:latin typeface="Consolas"/>
+              </a:rPr>
+              <a:t>buscar</a:t>
+            </a:r>
+          </a:p>
+          <a:p>
+            <a:pPr>
+              <a:spcAft>
+                <a:spcPts val="321"/>
+              </a:spcAft>
+            </a:pPr>
+            <a:r>
+              <a:rPr sz="1500" i="0" b="0">
+                <a:solidFill>
+                  <a:srgbClr val="B5CEA8"/>
+                </a:solidFill>
+                <a:latin typeface="Consolas"/>
+              </a:rPr>
+              <a:t>09</a:t>
+            </a:r>
+            <a:r>
+              <a:rPr sz="1500" i="0" b="0">
+                <a:solidFill>
+                  <a:srgbClr val="D4D4D4"/>
+                </a:solidFill>
+                <a:latin typeface="Consolas"/>
+              </a:rPr>
+              <a:t>:</a:t>
+            </a:r>
+            <a:r>
+              <a:rPr sz="1500" i="0" b="0">
+                <a:solidFill>
+                  <a:srgbClr val="B5CEA8"/>
+                </a:solidFill>
+                <a:latin typeface="Consolas"/>
+              </a:rPr>
+              <a:t>00</a:t>
+            </a:r>
+            <a:r>
+              <a:rPr sz="1500" i="0" b="0">
+                <a:solidFill>
+                  <a:srgbClr val="D4D4D4"/>
+                </a:solidFill>
+                <a:latin typeface="Consolas"/>
+              </a:rPr>
+              <a:t>-</a:t>
+            </a:r>
+            <a:r>
+              <a:rPr sz="1500" i="0" b="0">
+                <a:solidFill>
+                  <a:srgbClr val="B5CEA8"/>
+                </a:solidFill>
+                <a:latin typeface="Consolas"/>
+              </a:rPr>
+              <a:t>11</a:t>
+            </a:r>
+            <a:r>
+              <a:rPr sz="1500" i="0" b="0">
+                <a:solidFill>
+                  <a:srgbClr val="D4D4D4"/>
+                </a:solidFill>
+                <a:latin typeface="Consolas"/>
+              </a:rPr>
+              <a:t>:</a:t>
+            </a:r>
+            <a:r>
+              <a:rPr sz="1500" i="0" b="0">
+                <a:solidFill>
+                  <a:srgbClr val="B5CEA8"/>
+                </a:solidFill>
+                <a:latin typeface="Consolas"/>
+              </a:rPr>
+              <a:t>00</a:t>
+            </a:r>
+            <a:r>
+              <a:rPr sz="1500" i="0" b="0">
+                <a:solidFill>
+                  <a:srgbClr val="D4D4D4"/>
+                </a:solidFill>
+                <a:latin typeface="Consolas"/>
+              </a:rPr>
+              <a:t> | </a:t>
+            </a:r>
+            <a:r>
+              <a:rPr sz="1500" i="0" b="0">
+                <a:solidFill>
+                  <a:srgbClr val="D4D4D4"/>
+                </a:solidFill>
+                <a:latin typeface="Consolas"/>
+              </a:rPr>
+              <a:t>DECISIONES</a:t>
+            </a:r>
+            <a:r>
+              <a:rPr sz="1500" i="0" b="0">
+                <a:solidFill>
+                  <a:srgbClr val="D4D4D4"/>
+                </a:solidFill>
+                <a:latin typeface="Consolas"/>
+              </a:rPr>
+              <a:t>  | </a:t>
+            </a:r>
+            <a:r>
+              <a:rPr sz="1500" i="0" b="0">
+                <a:solidFill>
+                  <a:srgbClr val="B5CEA8"/>
+                </a:solidFill>
+                <a:latin typeface="Consolas"/>
+              </a:rPr>
+              <a:t>3</a:t>
+            </a:r>
+            <a:r>
+              <a:rPr sz="1500" i="0" b="0">
+                <a:solidFill>
+                  <a:srgbClr val="D4D4D4"/>
+                </a:solidFill>
+                <a:latin typeface="Consolas"/>
+              </a:rPr>
+              <a:t> </a:t>
+            </a:r>
+            <a:r>
+              <a:rPr sz="1500" i="0" b="0">
+                <a:solidFill>
+                  <a:srgbClr val="D4D4D4"/>
+                </a:solidFill>
+                <a:latin typeface="Consolas"/>
+              </a:rPr>
+              <a:t>decisiones</a:t>
+            </a:r>
+            <a:r>
+              <a:rPr sz="1500" i="0" b="0">
+                <a:solidFill>
+                  <a:srgbClr val="D4D4D4"/>
+                </a:solidFill>
+                <a:latin typeface="Consolas"/>
+              </a:rPr>
+              <a:t> </a:t>
+            </a:r>
+            <a:r>
+              <a:rPr sz="1500" i="0" b="0">
+                <a:solidFill>
+                  <a:srgbClr val="D4D4D4"/>
+                </a:solidFill>
+                <a:latin typeface="Consolas"/>
+              </a:rPr>
+              <a:t>con</a:t>
+            </a:r>
+            <a:r>
+              <a:rPr sz="1500" i="0" b="0">
+                <a:solidFill>
+                  <a:srgbClr val="D4D4D4"/>
+                </a:solidFill>
+                <a:latin typeface="Consolas"/>
+              </a:rPr>
+              <a:t> </a:t>
+            </a:r>
+            <a:r>
+              <a:rPr sz="1500" i="0" b="0">
+                <a:solidFill>
+                  <a:srgbClr val="D4D4D4"/>
+                </a:solidFill>
+                <a:latin typeface="Consolas"/>
+              </a:rPr>
+              <a:t>alternativa</a:t>
+            </a:r>
+            <a:r>
+              <a:rPr sz="1500" i="0" b="0">
+                <a:solidFill>
+                  <a:srgbClr val="D4D4D4"/>
+                </a:solidFill>
+                <a:latin typeface="Consolas"/>
+              </a:rPr>
+              <a:t> </a:t>
+            </a:r>
+            <a:r>
+              <a:rPr sz="1500" i="0" b="0">
+                <a:solidFill>
+                  <a:srgbClr val="D4D4D4"/>
+                </a:solidFill>
+                <a:latin typeface="Consolas"/>
+              </a:rPr>
+              <a:t>descartada</a:t>
+            </a:r>
+            <a:r>
+              <a:rPr sz="1500" i="0" b="0">
+                <a:solidFill>
+                  <a:srgbClr val="D4D4D4"/>
+                </a:solidFill>
+                <a:latin typeface="Consolas"/>
+              </a:rPr>
+              <a:t>, </a:t>
+            </a:r>
+            <a:r>
+              <a:rPr sz="1500" i="0" b="0">
+                <a:solidFill>
+                  <a:srgbClr val="D4D4D4"/>
+                </a:solidFill>
+                <a:latin typeface="Consolas"/>
+              </a:rPr>
+              <a:t>criterio</a:t>
+            </a:r>
+            <a:r>
+              <a:rPr sz="1500" i="0" b="0">
+                <a:solidFill>
+                  <a:srgbClr val="D4D4D4"/>
+                </a:solidFill>
+                <a:latin typeface="Consolas"/>
+              </a:rPr>
+              <a:t> </a:t>
+            </a:r>
+            <a:r>
+              <a:rPr sz="1500" i="0" b="0">
+                <a:solidFill>
+                  <a:srgbClr val="D4D4D4"/>
+                </a:solidFill>
+                <a:latin typeface="Consolas"/>
+              </a:rPr>
+              <a:t>y</a:t>
+            </a:r>
+            <a:r>
+              <a:rPr sz="1500" i="0" b="0">
+                <a:solidFill>
+                  <a:srgbClr val="D4D4D4"/>
+                </a:solidFill>
+                <a:latin typeface="Consolas"/>
+              </a:rPr>
+              <a:t> </a:t>
+            </a:r>
+            <a:r>
+              <a:rPr sz="1500" i="0" b="0">
+                <a:solidFill>
+                  <a:srgbClr val="D4D4D4"/>
+                </a:solidFill>
+                <a:latin typeface="Consolas"/>
+              </a:rPr>
+              <a:t>consecuencia</a:t>
+            </a:r>
+          </a:p>
+          <a:p>
+            <a:pPr>
+              <a:spcAft>
+                <a:spcPts val="321"/>
+              </a:spcAft>
+            </a:pPr>
+            <a:r>
+              <a:rPr sz="1500" i="0" b="0">
+                <a:solidFill>
+                  <a:srgbClr val="B5CEA8"/>
+                </a:solidFill>
+                <a:latin typeface="Consolas"/>
+              </a:rPr>
+              <a:t>11</a:t>
+            </a:r>
+            <a:r>
+              <a:rPr sz="1500" i="0" b="0">
+                <a:solidFill>
+                  <a:srgbClr val="D4D4D4"/>
+                </a:solidFill>
+                <a:latin typeface="Consolas"/>
+              </a:rPr>
+              <a:t>:</a:t>
+            </a:r>
+            <a:r>
+              <a:rPr sz="1500" i="0" b="0">
+                <a:solidFill>
+                  <a:srgbClr val="B5CEA8"/>
+                </a:solidFill>
+                <a:latin typeface="Consolas"/>
+              </a:rPr>
+              <a:t>00</a:t>
+            </a:r>
+            <a:r>
+              <a:rPr sz="1500" i="0" b="0">
+                <a:solidFill>
+                  <a:srgbClr val="D4D4D4"/>
+                </a:solidFill>
+                <a:latin typeface="Consolas"/>
+              </a:rPr>
+              <a:t>-</a:t>
+            </a:r>
+            <a:r>
+              <a:rPr sz="1500" i="0" b="0">
+                <a:solidFill>
+                  <a:srgbClr val="B5CEA8"/>
+                </a:solidFill>
+                <a:latin typeface="Consolas"/>
+              </a:rPr>
+              <a:t>11</a:t>
+            </a:r>
+            <a:r>
+              <a:rPr sz="1500" i="0" b="0">
+                <a:solidFill>
+                  <a:srgbClr val="D4D4D4"/>
+                </a:solidFill>
+                <a:latin typeface="Consolas"/>
+              </a:rPr>
+              <a:t>:</a:t>
+            </a:r>
+            <a:r>
+              <a:rPr sz="1500" i="0" b="0">
+                <a:solidFill>
+                  <a:srgbClr val="B5CEA8"/>
+                </a:solidFill>
+                <a:latin typeface="Consolas"/>
+              </a:rPr>
+              <a:t>30</a:t>
+            </a:r>
+            <a:r>
+              <a:rPr sz="1500" i="0" b="0">
+                <a:solidFill>
+                  <a:srgbClr val="D4D4D4"/>
+                </a:solidFill>
+                <a:latin typeface="Consolas"/>
+              </a:rPr>
+              <a:t> | </a:t>
+            </a:r>
+            <a:r>
+              <a:rPr sz="1500" i="0" b="0">
+                <a:solidFill>
+                  <a:srgbClr val="D4D4D4"/>
+                </a:solidFill>
+                <a:latin typeface="Consolas"/>
+              </a:rPr>
+              <a:t>RIESGOS</a:t>
+            </a:r>
+            <a:r>
+              <a:rPr sz="1500" i="0" b="0">
+                <a:solidFill>
+                  <a:srgbClr val="D4D4D4"/>
+                </a:solidFill>
+                <a:latin typeface="Consolas"/>
+              </a:rPr>
+              <a:t>     | </a:t>
+            </a:r>
+            <a:r>
+              <a:rPr sz="1500" i="0" b="0">
+                <a:solidFill>
+                  <a:srgbClr val="D4D4D4"/>
+                </a:solidFill>
+                <a:latin typeface="Consolas"/>
+              </a:rPr>
+              <a:t>Que</a:t>
+            </a:r>
+            <a:r>
+              <a:rPr sz="1500" i="0" b="0">
+                <a:solidFill>
+                  <a:srgbClr val="D4D4D4"/>
+                </a:solidFill>
+                <a:latin typeface="Consolas"/>
+              </a:rPr>
+              <a:t> </a:t>
+            </a:r>
+            <a:r>
+              <a:rPr sz="1500" i="0" b="0">
+                <a:solidFill>
+                  <a:srgbClr val="D4D4D4"/>
+                </a:solidFill>
+                <a:latin typeface="Consolas"/>
+              </a:rPr>
+              <a:t>queda</a:t>
+            </a:r>
+            <a:r>
+              <a:rPr sz="1500" i="0" b="0">
+                <a:solidFill>
+                  <a:srgbClr val="D4D4D4"/>
+                </a:solidFill>
+                <a:latin typeface="Consolas"/>
+              </a:rPr>
+              <a:t> </a:t>
+            </a:r>
+            <a:r>
+              <a:rPr sz="1500" i="0" b="0">
+                <a:solidFill>
+                  <a:srgbClr val="D4D4D4"/>
+                </a:solidFill>
+                <a:latin typeface="Consolas"/>
+              </a:rPr>
+              <a:t>abierto</a:t>
+            </a:r>
+            <a:r>
+              <a:rPr sz="1500" i="0" b="0">
+                <a:solidFill>
+                  <a:srgbClr val="D4D4D4"/>
+                </a:solidFill>
+                <a:latin typeface="Consolas"/>
+              </a:rPr>
+              <a:t> </a:t>
+            </a:r>
+            <a:r>
+              <a:rPr sz="1500" i="0" b="0">
+                <a:solidFill>
+                  <a:srgbClr val="D4D4D4"/>
+                </a:solidFill>
+                <a:latin typeface="Consolas"/>
+              </a:rPr>
+              <a:t>y</a:t>
+            </a:r>
+            <a:r>
+              <a:rPr sz="1500" i="0" b="0">
+                <a:solidFill>
+                  <a:srgbClr val="D4D4D4"/>
+                </a:solidFill>
+                <a:latin typeface="Consolas"/>
+              </a:rPr>
+              <a:t> </a:t>
+            </a:r>
+            <a:r>
+              <a:rPr sz="1500" i="0" b="0">
+                <a:solidFill>
+                  <a:srgbClr val="D4D4D4"/>
+                </a:solidFill>
+                <a:latin typeface="Consolas"/>
+              </a:rPr>
+              <a:t>que</a:t>
+            </a:r>
+            <a:r>
+              <a:rPr sz="1500" i="0" b="0">
+                <a:solidFill>
+                  <a:srgbClr val="D4D4D4"/>
+                </a:solidFill>
+                <a:latin typeface="Consolas"/>
+              </a:rPr>
+              <a:t> </a:t>
+            </a:r>
+            <a:r>
+              <a:rPr sz="1500" i="0" b="0">
+                <a:solidFill>
+                  <a:srgbClr val="D4D4D4"/>
+                </a:solidFill>
+                <a:latin typeface="Consolas"/>
+              </a:rPr>
+              <a:t>recibe</a:t>
+            </a:r>
+            <a:r>
+              <a:rPr sz="1500" i="0" b="0">
+                <a:solidFill>
+                  <a:srgbClr val="D4D4D4"/>
+                </a:solidFill>
+                <a:latin typeface="Consolas"/>
+              </a:rPr>
+              <a:t> </a:t>
+            </a:r>
+            <a:r>
+              <a:rPr sz="1500" i="0" b="0">
+                <a:solidFill>
+                  <a:srgbClr val="D4D4D4"/>
+                </a:solidFill>
+                <a:latin typeface="Consolas"/>
+              </a:rPr>
+              <a:t>Programacion</a:t>
+            </a:r>
+            <a:r>
+              <a:rPr sz="1500" i="0" b="0">
+                <a:solidFill>
+                  <a:srgbClr val="D4D4D4"/>
+                </a:solidFill>
+                <a:latin typeface="Consolas"/>
+              </a:rPr>
+              <a:t> </a:t>
+            </a:r>
+            <a:r>
+              <a:rPr sz="1500" i="0" b="0">
+                <a:solidFill>
+                  <a:srgbClr val="D4D4D4"/>
+                </a:solidFill>
+                <a:latin typeface="Consolas"/>
+              </a:rPr>
+              <a:t>II</a:t>
+            </a:r>
+          </a:p>
+          <a:p>
+            <a:pPr>
+              <a:spcAft>
+                <a:spcPts val="321"/>
+              </a:spcAft>
+            </a:pPr>
+            <a:r>
+              <a:rPr sz="1500" i="0" b="0">
+                <a:solidFill>
+                  <a:srgbClr val="B5CEA8"/>
+                </a:solidFill>
+                <a:latin typeface="Consolas"/>
+              </a:rPr>
+              <a:t>11</a:t>
+            </a:r>
+            <a:r>
+              <a:rPr sz="1500" i="0" b="0">
+                <a:solidFill>
+                  <a:srgbClr val="D4D4D4"/>
+                </a:solidFill>
+                <a:latin typeface="Consolas"/>
+              </a:rPr>
+              <a:t>:</a:t>
+            </a:r>
+            <a:r>
+              <a:rPr sz="1500" i="0" b="0">
+                <a:solidFill>
+                  <a:srgbClr val="B5CEA8"/>
+                </a:solidFill>
+                <a:latin typeface="Consolas"/>
+              </a:rPr>
+              <a:t>30</a:t>
+            </a:r>
+            <a:r>
+              <a:rPr sz="1500" i="0" b="0">
+                <a:solidFill>
+                  <a:srgbClr val="D4D4D4"/>
+                </a:solidFill>
+                <a:latin typeface="Consolas"/>
+              </a:rPr>
+              <a:t>-</a:t>
+            </a:r>
+            <a:r>
+              <a:rPr sz="1500" i="0" b="0">
+                <a:solidFill>
+                  <a:srgbClr val="B5CEA8"/>
+                </a:solidFill>
+                <a:latin typeface="Consolas"/>
+              </a:rPr>
+              <a:t>12</a:t>
+            </a:r>
+            <a:r>
+              <a:rPr sz="1500" i="0" b="0">
+                <a:solidFill>
+                  <a:srgbClr val="D4D4D4"/>
+                </a:solidFill>
+                <a:latin typeface="Consolas"/>
+              </a:rPr>
+              <a:t>:</a:t>
+            </a:r>
+            <a:r>
+              <a:rPr sz="1500" i="0" b="0">
+                <a:solidFill>
+                  <a:srgbClr val="B5CEA8"/>
+                </a:solidFill>
+                <a:latin typeface="Consolas"/>
+              </a:rPr>
+              <a:t>00</a:t>
+            </a:r>
+            <a:r>
+              <a:rPr sz="1500" i="0" b="0">
+                <a:solidFill>
+                  <a:srgbClr val="D4D4D4"/>
+                </a:solidFill>
+                <a:latin typeface="Consolas"/>
+              </a:rPr>
+              <a:t> | </a:t>
+            </a:r>
+            <a:r>
+              <a:rPr sz="1500" i="0" b="0">
+                <a:solidFill>
+                  <a:srgbClr val="D4D4D4"/>
+                </a:solidFill>
+                <a:latin typeface="Consolas"/>
+              </a:rPr>
+              <a:t>CIERRE</a:t>
+            </a:r>
+            <a:r>
+              <a:rPr sz="1500" i="0" b="0">
+                <a:solidFill>
+                  <a:srgbClr val="D4D4D4"/>
+                </a:solidFill>
+                <a:latin typeface="Consolas"/>
+              </a:rPr>
+              <a:t>      | </a:t>
+            </a:r>
+            <a:r>
+              <a:rPr sz="1500" i="0" b="0">
+                <a:solidFill>
+                  <a:srgbClr val="D4D4D4"/>
+                </a:solidFill>
+                <a:latin typeface="Consolas"/>
+              </a:rPr>
+              <a:t>Una</a:t>
+            </a:r>
+            <a:r>
+              <a:rPr sz="1500" i="0" b="0">
+                <a:solidFill>
+                  <a:srgbClr val="D4D4D4"/>
+                </a:solidFill>
+                <a:latin typeface="Consolas"/>
+              </a:rPr>
+              <a:t> </a:t>
+            </a:r>
+            <a:r>
+              <a:rPr sz="1500" i="0" b="0">
+                <a:solidFill>
+                  <a:srgbClr val="D4D4D4"/>
+                </a:solidFill>
+                <a:latin typeface="Consolas"/>
+              </a:rPr>
+              <a:t>frase</a:t>
+            </a:r>
+            <a:r>
+              <a:rPr sz="1500" i="0" b="0">
+                <a:solidFill>
+                  <a:srgbClr val="D4D4D4"/>
+                </a:solidFill>
+                <a:latin typeface="Consolas"/>
+              </a:rPr>
+              <a:t> </a:t>
+            </a:r>
+            <a:r>
+              <a:rPr sz="1500" i="0" b="0">
+                <a:solidFill>
+                  <a:srgbClr val="D4D4D4"/>
+                </a:solidFill>
+                <a:latin typeface="Consolas"/>
+              </a:rPr>
+              <a:t>de</a:t>
+            </a:r>
+            <a:r>
+              <a:rPr sz="1500" i="0" b="0">
+                <a:solidFill>
+                  <a:srgbClr val="D4D4D4"/>
+                </a:solidFill>
+                <a:latin typeface="Consolas"/>
+              </a:rPr>
+              <a:t> </a:t>
+            </a:r>
+            <a:r>
+              <a:rPr sz="1500" i="0" b="0">
+                <a:solidFill>
+                  <a:srgbClr val="D4D4D4"/>
+                </a:solidFill>
+                <a:latin typeface="Consolas"/>
+              </a:rPr>
+              <a:t>valor</a:t>
+            </a:r>
+            <a:r>
+              <a:rPr sz="1500" i="0" b="0">
+                <a:solidFill>
+                  <a:srgbClr val="D4D4D4"/>
+                </a:solidFill>
+                <a:latin typeface="Consolas"/>
+              </a:rPr>
+              <a:t> </a:t>
+            </a:r>
+            <a:r>
+              <a:rPr sz="1500" i="0" b="0">
+                <a:solidFill>
+                  <a:srgbClr val="D4D4D4"/>
+                </a:solidFill>
+                <a:latin typeface="Consolas"/>
+              </a:rPr>
+              <a:t>para</a:t>
+            </a:r>
+            <a:r>
+              <a:rPr sz="1500" i="0" b="0">
+                <a:solidFill>
+                  <a:srgbClr val="D4D4D4"/>
+                </a:solidFill>
+                <a:latin typeface="Consolas"/>
+              </a:rPr>
+              <a:t> </a:t>
+            </a:r>
+            <a:r>
+              <a:rPr sz="1500" i="0" b="0">
+                <a:solidFill>
+                  <a:srgbClr val="D4D4D4"/>
+                </a:solidFill>
+                <a:latin typeface="Consolas"/>
+              </a:rPr>
+              <a:t>la</a:t>
+            </a:r>
+            <a:r>
+              <a:rPr sz="1500" i="0" b="0">
+                <a:solidFill>
+                  <a:srgbClr val="D4D4D4"/>
+                </a:solidFill>
+                <a:latin typeface="Consolas"/>
+              </a:rPr>
+              <a:t> </a:t>
+            </a:r>
+            <a:r>
+              <a:rPr sz="1500" i="0" b="0">
+                <a:solidFill>
+                  <a:srgbClr val="D4D4D4"/>
+                </a:solidFill>
+                <a:latin typeface="Consolas"/>
+              </a:rPr>
+              <a:t>clinica</a:t>
+            </a:r>
+            <a:r>
+              <a:rPr sz="1500" i="0" b="0">
+                <a:solidFill>
+                  <a:srgbClr val="D4D4D4"/>
+                </a:solidFill>
+                <a:latin typeface="Consolas"/>
+              </a:rPr>
+              <a:t>, </a:t>
+            </a:r>
+            <a:r>
+              <a:rPr sz="1500" i="0" b="0">
+                <a:solidFill>
+                  <a:srgbClr val="D4D4D4"/>
+                </a:solidFill>
+                <a:latin typeface="Consolas"/>
+              </a:rPr>
+              <a:t>no</a:t>
+            </a:r>
+            <a:r>
+              <a:rPr sz="1500" i="0" b="0">
+                <a:solidFill>
+                  <a:srgbClr val="D4D4D4"/>
+                </a:solidFill>
+                <a:latin typeface="Consolas"/>
+              </a:rPr>
+              <a:t> </a:t>
+            </a:r>
+            <a:r>
+              <a:rPr sz="1500" i="0" b="0">
+                <a:solidFill>
+                  <a:srgbClr val="D4D4D4"/>
+                </a:solidFill>
+                <a:latin typeface="Consolas"/>
+              </a:rPr>
+              <a:t>un</a:t>
+            </a:r>
+            <a:r>
+              <a:rPr sz="1500" i="0" b="0">
+                <a:solidFill>
+                  <a:srgbClr val="D4D4D4"/>
+                </a:solidFill>
+                <a:latin typeface="Consolas"/>
+              </a:rPr>
+              <a:t> </a:t>
+            </a:r>
+            <a:r>
+              <a:rPr sz="1500" i="0" b="0">
+                <a:solidFill>
+                  <a:srgbClr val="D4D4D4"/>
+                </a:solidFill>
+                <a:latin typeface="Consolas"/>
+              </a:rPr>
+              <a:t>resumen</a:t>
+            </a:r>
+          </a:p>
+          <a:p>
+            <a:pPr>
+              <a:spcAft>
+                <a:spcPts val="321"/>
+              </a:spcAft>
+            </a:pPr>
+            <a:r>
+              <a:rPr sz="1500" i="0" b="0">
+                <a:solidFill>
+                  <a:srgbClr val="D4D4D4"/>
+                </a:solidFill>
+                <a:latin typeface="Consolas"/>
+              </a:rPr>
+              <a:t>-</a:t>
+            </a:r>
+            <a:r>
+              <a:rPr sz="1500" i="0" b="0">
+                <a:solidFill>
+                  <a:srgbClr val="D4D4D4"/>
+                </a:solidFill>
+                <a:latin typeface="Consolas"/>
+              </a:rPr>
+              <a:t>-- Individual por defecto: quien sustenta responde por los cinco bloques</a:t>
+            </a:r>
+          </a:p>
+          <a:p>
+            <a:pPr>
+              <a:spcAft>
+                <a:spcPts val="321"/>
+              </a:spcAft>
+            </a:pPr>
+            <a:r>
+              <a:rPr sz="1500" i="0" b="0">
+                <a:solidFill>
+                  <a:srgbClr val="D4D4D4"/>
+                </a:solidFill>
+                <a:latin typeface="Consolas"/>
+              </a:rPr>
+              <a:t>-</a:t>
+            </a:r>
+            <a:r>
+              <a:rPr sz="1500" i="0" b="0">
+                <a:solidFill>
+                  <a:srgbClr val="D4D4D4"/>
+                </a:solidFill>
+                <a:latin typeface="Consolas"/>
+              </a:rPr>
+              <a:t>-- Regla: nadie lee la diapositiva; la diapositiva es el plano, la voz es el argumento</a:t>
+            </a:r>
+          </a:p>
+          <a:p>
+            <a:pPr>
+              <a:spcAft>
+                <a:spcPts val="321"/>
+              </a:spcAft>
+            </a:pPr>
+            <a:r>
+              <a:rPr sz="1500" i="0" b="0">
+                <a:solidFill>
+                  <a:srgbClr val="D4D4D4"/>
+                </a:solidFill>
+                <a:latin typeface="Consolas"/>
+              </a:rPr>
+              <a:t>-</a:t>
+            </a:r>
+            <a:r>
+              <a:rPr sz="1500" i="0" b="0">
+                <a:solidFill>
+                  <a:srgbClr val="D4D4D4"/>
+                </a:solidFill>
+                <a:latin typeface="Consolas"/>
+              </a:rPr>
+              <a:t>-- Cada pantalla proyectada debe poder señalar el RF que la origina</a:t>
+            </a:r>
+          </a:p>
+          <a:p>
+            <a:pPr>
+              <a:spcAft>
+                <a:spcPts val="321"/>
+              </a:spcAft>
+            </a:pPr>
+            <a:r>
+              <a:rPr sz="1500" i="0" b="0">
+                <a:solidFill>
+                  <a:srgbClr val="D4D4D4"/>
+                </a:solidFill>
+                <a:latin typeface="Consolas"/>
+              </a:rPr>
+              <a:t>-</a:t>
+            </a:r>
+            <a:r>
+              <a:rPr sz="1500" i="0" b="0">
+                <a:solidFill>
+                  <a:srgbClr val="D4D4D4"/>
+                </a:solidFill>
+                <a:latin typeface="Consolas"/>
+              </a:rPr>
+              <a:t>-- Plan B: capturas del prototipo, PDF descargado y diagramas exportados a imagen</a:t>
+            </a:r>
+          </a:p>
+        </p:txBody>
+      </p:sp>
+      <p:sp>
+        <p:nvSpPr>
+          <p:cNvPr id="13" name="TextBox 12"/>
+          <p:cNvSpPr txBox="1"/>
+          <p:nvPr/>
+        </p:nvSpPr>
+        <p:spPr>
+          <a:xfrm>
+            <a:off x="457200" y="6035040"/>
+            <a:ext cx="11277295" cy="365760"/>
+          </a:xfrm>
+          <a:prstGeom prst="rect">
+            <a:avLst/>
+          </a:prstGeom>
+          <a:noFill/>
+        </p:spPr>
+        <p:txBody>
+          <a:bodyPr wrap="square">
+            <a:spAutoFit/>
+          </a:bodyPr>
+          <a:lstStyle/>
+          <a:p>
+            <a:pPr algn="ctr"/>
+            <a:r>
+              <a:rPr sz="1300" b="0" i="1">
+                <a:solidFill>
+                  <a:srgbClr val="666666"/>
                 </a:solidFill>
                 <a:latin typeface="Calibri"/>
               </a:rPr>
-              <a:t>–   Si el docente autorizo equipo de 2 o 3, se agrega el nombre del responsable a cada bloque, todos los integrantes deben hablar al menos dos minutos y ninguno puede hablar solo de lo suyo: cada persona domina una pieza pero debe conocer el todo</a:t>
-            </a:r>
-          </a:p>
-        </p:txBody>
-      </p:sp>
-      <p:sp>
-        <p:nvSpPr>
-          <p:cNvPr id="6" name="TextBox 5"/>
+              <a:t>Un paquete de diseño no se narra en orden cronologico: se defiende en orden de embudo, del dolor a la decision.</a:t>
+            </a:r>
+          </a:p>
+        </p:txBody>
+      </p:sp>
+      <p:sp>
+        <p:nvSpPr>
+          <p:cNvPr id="14" name="TextBox 13"/>
           <p:cNvSpPr txBox="1"/>
           <p:nvPr/>
         </p:nvSpPr>
@@ -4536,21 +7617,125 @@
                 </a:solidFill>
                 <a:latin typeface="Calibri"/>
               </a:rPr>
-              <a:t>El reparto del guion en bloques con tiempos es lo que sostiene una... (2/2)</a:t>
-            </a:r>
-          </a:p>
-        </p:txBody>
-      </p:sp>
-      <p:sp>
-        <p:nvSpPr>
-          <p:cNvPr id="5" name="TextBox 4"/>
+              <a:t>Demo del dia</a:t>
+            </a:r>
+          </a:p>
+        </p:txBody>
+      </p:sp>
+      <p:sp>
+        <p:nvSpPr>
+          <p:cNvPr id="5" name="Rounded Rectangle 4"/>
+          <p:cNvSpPr/>
+          <p:nvPr/>
+        </p:nvSpPr>
+        <p:spPr>
+          <a:xfrm>
+            <a:off x="5797149" y="1573813"/>
+            <a:ext cx="6010497" cy="4057845"/>
+          </a:xfrm>
+          <a:prstGeom prst="roundRect">
+            <a:avLst>
+              <a:gd name="adj" fmla="val 4000"/>
+            </a:avLst>
+          </a:prstGeom>
+          <a:solidFill>
+            <a:srgbClr val="E8EEF4"/>
+          </a:solidFill>
+          <a:ln>
+            <a:noFill/>
+          </a:ln>
+        </p:spPr>
+        <p:style>
+          <a:lnRef idx="1">
+            <a:schemeClr val="accent1"/>
+          </a:lnRef>
+          <a:fillRef idx="3">
+            <a:schemeClr val="accent1"/>
+          </a:fillRef>
+          <a:effectRef idx="2">
+            <a:schemeClr val="accent1"/>
+          </a:effectRef>
+          <a:fontRef idx="minor">
+            <a:schemeClr val="lt1"/>
+          </a:fontRef>
+        </p:style>
+        <p:txBody>
+          <a:bodyPr rtlCol="0" anchor="ctr"/>
+          <a:lstStyle/>
+          <a:p>
+            <a:pPr algn="ctr"/>
+          </a:p>
+        </p:txBody>
+      </p:sp>
+      <p:pic>
+        <p:nvPicPr>
+          <p:cNvPr id="6" name="Picture 5" descr="laptop-code-live-demo.jpg"/>
+          <p:cNvPicPr>
+            <a:picLocks noChangeAspect="1"/>
+          </p:cNvPicPr>
+          <p:nvPr/>
+        </p:nvPicPr>
+        <p:blipFill>
+          <a:blip r:embed="rId2"/>
+          <a:stretch>
+            <a:fillRect/>
+          </a:stretch>
+        </p:blipFill>
+        <p:spPr>
+          <a:xfrm>
+            <a:off x="5870301" y="1646965"/>
+            <a:ext cx="5864193" cy="3911541"/>
+          </a:xfrm>
+          <a:prstGeom prst="rect">
+            <a:avLst/>
+          </a:prstGeom>
+        </p:spPr>
+      </p:pic>
+      <p:sp>
+        <p:nvSpPr>
+          <p:cNvPr id="7" name="TextBox 6"/>
           <p:cNvSpPr txBox="1"/>
           <p:nvPr/>
         </p:nvSpPr>
         <p:spPr>
           <a:xfrm>
-            <a:off x="457200" y="1170432"/>
-            <a:ext cx="11277295" cy="5230368"/>
+            <a:off x="5870301" y="5961888"/>
+            <a:ext cx="5864193" cy="320040"/>
+          </a:xfrm>
+          <a:prstGeom prst="rect">
+            <a:avLst/>
+          </a:prstGeom>
+          <a:noFill/>
+        </p:spPr>
+        <p:txBody>
+          <a:bodyPr wrap="square">
+            <a:spAutoFit/>
+          </a:bodyPr>
+          <a:lstStyle/>
+          <a:p>
+            <a:pPr algn="ctr"/>
+            <a:r>
+              <a:rPr sz="1100" b="0" i="1">
+                <a:solidFill>
+                  <a:srgbClr val="666666"/>
+                </a:solidFill>
+                <a:latin typeface="Calibri"/>
+              </a:rPr>
+              <a:t>Foto: olia danilevich · Pexels</a:t>
+            </a:r>
+          </a:p>
+        </p:txBody>
+      </p:sp>
+      <p:sp>
+        <p:nvSpPr>
+          <p:cNvPr id="8" name="TextBox 7"/>
+          <p:cNvSpPr txBox="1"/>
+          <p:nvPr/>
+        </p:nvSpPr>
+        <p:spPr>
+          <a:xfrm>
+            <a:off x="457200" y="1353312"/>
+            <a:ext cx="5093061" cy="5047488"/>
           </a:xfrm>
           <a:prstGeom prst="rect">
             <a:avLst/>
@@ -4575,7 +7760,25 @@
                 </a:solidFill>
                 <a:latin typeface="Calibri"/>
               </a:rPr>
-              <a:t>–   Porque el jurado tiene derecho a preguntarle a cualquiera sobre cualquier parte.</a:t>
+              <a:t>–   </a:t>
+            </a:r>
+            <a:r>
+              <a:rPr sz="2000" b="1" i="0">
+                <a:solidFill>
+                  <a:srgbClr val="333333"/>
+                </a:solidFill>
+                <a:latin typeface="Calibri"/>
+              </a:rPr>
+              <a:t>Herramienta:</a:t>
+            </a:r>
+            <a:r>
+              <a:rPr sz="2000" b="0" i="0">
+                <a:solidFill>
+                  <a:srgbClr val="333333"/>
+                </a:solidFill>
+                <a:latin typeface="Calibri"/>
+              </a:rPr>
+              <a:t> Google Docs · draw.io · Figma o Penpot</a:t>
             </a:r>
           </a:p>
           <a:p>
@@ -4591,7 +7794,16 @@
                 </a:solidFill>
                 <a:latin typeface="Calibri"/>
               </a:rPr>
-              <a:t>–   Se ensaya cronometrado al menos dos veces, en voz alta y de pie, porque el tiempo estimado leyendo en silencio siempre es la mitad del real.</a:t>
+              <a:t>–   </a:t>
+            </a:r>
+            <a:r>
+              <a:rPr sz="2000" b="1" i="0">
+                <a:solidFill>
+                  <a:srgbClr val="333333"/>
+                </a:solidFill>
+                <a:latin typeface="Calibri"/>
+              </a:rPr>
+              <a:t>Demo:</a:t>
             </a:r>
           </a:p>
           <a:p>
@@ -4607,30 +7819,14 @@
                 </a:solidFill>
                 <a:latin typeface="Calibri"/>
               </a:rPr>
-              <a:t>–   Ademas se prepara el plan B tecnico: capturas del prototipo por si falla el internet, el documento en PDF descargado y los diagramas exportados a imagen.</a:t>
-            </a:r>
-          </a:p>
-          <a:p>
-            <a:pPr>
-              <a:spcAft>
-                <a:spcPts val="800"/>
-              </a:spcAft>
-            </a:pPr>
-            <a:r>
-              <a:rPr sz="2000" b="0" i="0">
-                <a:solidFill>
-                  <a:srgbClr val="333333"/>
-                </a:solidFill>
-                <a:latin typeface="Calibri"/>
-              </a:rPr>
-              <a:t>–   Y algo que parece obvio pero se olvida siempre: quien maneja el prototipo debe haberlo recorrido antes haciendo clic en cosas que no estaban en el guion, porque el jurado va a hacer exactamente eso.</a:t>
-            </a:r>
-          </a:p>
-        </p:txBody>
-      </p:sp>
-      <p:sp>
-        <p:nvSpPr>
-          <p:cNvPr id="6" name="TextBox 5"/>
+              <a:t>–   Mismo dominio: la clinica veterinaria — no otro ejemplo. Aqui se diseña, no se programa.</a:t>
+            </a:r>
+          </a:p>
+        </p:txBody>
+      </p:sp>
+      <p:sp>
+        <p:nvSpPr>
+          <p:cNvPr id="9" name="TextBox 8"/>
           <p:cNvSpPr txBox="1"/>
           <p:nvPr/>
         </p:nvSpPr>
@@ -4698,1425 +7894,6 @@
         <p:spPr>
           <a:xfrm>
             <a:off x="0" y="0"/>
-            <a:ext cx="12191695" cy="960120"/>
-          </a:xfrm>
-          <a:prstGeom prst="rect">
-            <a:avLst/>
-          </a:prstGeom>
-          <a:solidFill>
-            <a:srgbClr val="095292"/>
-          </a:solidFill>
-          <a:ln>
-            <a:noFill/>
-          </a:ln>
-        </p:spPr>
-        <p:style>
-          <a:lnRef idx="1">
-            <a:schemeClr val="accent1"/>
-          </a:lnRef>
-          <a:fillRef idx="3">
-            <a:schemeClr val="accent1"/>
-          </a:fillRef>
-          <a:effectRef idx="2">
-            <a:schemeClr val="accent1"/>
-          </a:effectRef>
-          <a:fontRef idx="minor">
-            <a:schemeClr val="lt1"/>
-          </a:fontRef>
-        </p:style>
-        <p:txBody>
-          <a:bodyPr rtlCol="0" anchor="ctr"/>
-          <a:lstStyle/>
-          <a:p>
-            <a:pPr algn="ctr"/>
-          </a:p>
-        </p:txBody>
-      </p:sp>
-      <p:sp>
-        <p:nvSpPr>
-          <p:cNvPr id="3" name="Rectangle 2"/>
-          <p:cNvSpPr/>
-          <p:nvPr/>
-        </p:nvSpPr>
-        <p:spPr>
-          <a:xfrm>
-            <a:off x="0" y="960120"/>
-            <a:ext cx="12191695" cy="41148"/>
-          </a:xfrm>
-          <a:prstGeom prst="rect">
-            <a:avLst/>
-          </a:prstGeom>
-          <a:solidFill>
-            <a:srgbClr val="FFD000"/>
-          </a:solidFill>
-          <a:ln>
-            <a:noFill/>
-          </a:ln>
-        </p:spPr>
-        <p:style>
-          <a:lnRef idx="1">
-            <a:schemeClr val="accent1"/>
-          </a:lnRef>
-          <a:fillRef idx="3">
-            <a:schemeClr val="accent1"/>
-          </a:fillRef>
-          <a:effectRef idx="2">
-            <a:schemeClr val="accent1"/>
-          </a:effectRef>
-          <a:fontRef idx="minor">
-            <a:schemeClr val="lt1"/>
-          </a:fontRef>
-        </p:style>
-        <p:txBody>
-          <a:bodyPr rtlCol="0" anchor="ctr"/>
-          <a:lstStyle/>
-          <a:p>
-            <a:pPr algn="ctr"/>
-          </a:p>
-        </p:txBody>
-      </p:sp>
-      <p:sp>
-        <p:nvSpPr>
-          <p:cNvPr id="4" name="TextBox 3"/>
-          <p:cNvSpPr txBox="1"/>
-          <p:nvPr/>
-        </p:nvSpPr>
-        <p:spPr>
-          <a:xfrm>
-            <a:off x="457200" y="164592"/>
-            <a:ext cx="11277295" cy="502920"/>
-          </a:xfrm>
-          <a:prstGeom prst="rect">
-            <a:avLst/>
-          </a:prstGeom>
-          <a:noFill/>
-        </p:spPr>
-        <p:txBody>
-          <a:bodyPr wrap="square">
-            <a:spAutoFit/>
-          </a:bodyPr>
-          <a:lstStyle/>
-          <a:p>
-            <a:r>
-              <a:rPr sz="2600" b="1" i="0">
-                <a:solidFill>
-                  <a:srgbClr val="FFFFFF"/>
-                </a:solidFill>
-                <a:latin typeface="Calibri"/>
-              </a:rPr>
-              <a:t>El guion cronometrado de la sustentacion</a:t>
-            </a:r>
-          </a:p>
-        </p:txBody>
-      </p:sp>
-      <p:sp>
-        <p:nvSpPr>
-          <p:cNvPr id="5" name="Rounded Rectangle 4"/>
-          <p:cNvSpPr/>
-          <p:nvPr/>
-        </p:nvSpPr>
-        <p:spPr>
-          <a:xfrm>
-            <a:off x="457200" y="1261872"/>
-            <a:ext cx="11277295" cy="5093208"/>
-          </a:xfrm>
-          <a:prstGeom prst="roundRect">
-            <a:avLst>
-              <a:gd name="adj" fmla="val 12000"/>
-            </a:avLst>
-          </a:prstGeom>
-          <a:solidFill>
-            <a:srgbClr val="1E2A38"/>
-          </a:solidFill>
-          <a:ln>
-            <a:noFill/>
-          </a:ln>
-        </p:spPr>
-        <p:style>
-          <a:lnRef idx="1">
-            <a:schemeClr val="accent1"/>
-          </a:lnRef>
-          <a:fillRef idx="3">
-            <a:schemeClr val="accent1"/>
-          </a:fillRef>
-          <a:effectRef idx="2">
-            <a:schemeClr val="accent1"/>
-          </a:effectRef>
-          <a:fontRef idx="minor">
-            <a:schemeClr val="lt1"/>
-          </a:fontRef>
-        </p:style>
-        <p:txBody>
-          <a:bodyPr rtlCol="0" anchor="ctr"/>
-          <a:lstStyle/>
-          <a:p>
-            <a:pPr algn="ctr"/>
-          </a:p>
-        </p:txBody>
-      </p:sp>
-      <p:sp>
-        <p:nvSpPr>
-          <p:cNvPr id="6" name="Rectangle 5"/>
-          <p:cNvSpPr/>
-          <p:nvPr/>
-        </p:nvSpPr>
-        <p:spPr>
-          <a:xfrm>
-            <a:off x="457200" y="1261872"/>
-            <a:ext cx="11277295" cy="320040"/>
-          </a:xfrm>
-          <a:prstGeom prst="rect">
-            <a:avLst/>
-          </a:prstGeom>
-          <a:solidFill>
-            <a:srgbClr val="095292"/>
-          </a:solidFill>
-          <a:ln>
-            <a:noFill/>
-          </a:ln>
-        </p:spPr>
-        <p:style>
-          <a:lnRef idx="1">
-            <a:schemeClr val="accent1"/>
-          </a:lnRef>
-          <a:fillRef idx="3">
-            <a:schemeClr val="accent1"/>
-          </a:fillRef>
-          <a:effectRef idx="2">
-            <a:schemeClr val="accent1"/>
-          </a:effectRef>
-          <a:fontRef idx="minor">
-            <a:schemeClr val="lt1"/>
-          </a:fontRef>
-        </p:style>
-        <p:txBody>
-          <a:bodyPr rtlCol="0" anchor="ctr"/>
-          <a:lstStyle/>
-          <a:p>
-            <a:pPr algn="ctr"/>
-          </a:p>
-        </p:txBody>
-      </p:sp>
-      <p:sp>
-        <p:nvSpPr>
-          <p:cNvPr id="7" name="TextBox 6"/>
-          <p:cNvSpPr txBox="1"/>
-          <p:nvPr/>
-        </p:nvSpPr>
-        <p:spPr>
-          <a:xfrm>
-            <a:off x="685800" y="1307592"/>
-            <a:ext cx="10820095" cy="256032"/>
-          </a:xfrm>
-          <a:prstGeom prst="rect">
-            <a:avLst/>
-          </a:prstGeom>
-          <a:noFill/>
-        </p:spPr>
-        <p:txBody>
-          <a:bodyPr wrap="square" anchor="ctr"/>
-          <a:lstStyle/>
-          <a:p>
-            <a:r>
-              <a:rPr sz="1000" b="1" i="0">
-                <a:solidFill>
-                  <a:srgbClr val="269CCB"/>
-                </a:solidFill>
-                <a:latin typeface="Calibri"/>
-              </a:rPr>
-              <a:t>● ● ●</a:t>
-            </a:r>
-          </a:p>
-        </p:txBody>
-      </p:sp>
-      <p:sp>
-        <p:nvSpPr>
-          <p:cNvPr id="8" name="TextBox 7"/>
-          <p:cNvSpPr txBox="1"/>
-          <p:nvPr/>
-        </p:nvSpPr>
-        <p:spPr>
-          <a:xfrm>
-            <a:off x="777240" y="1719072"/>
-            <a:ext cx="10637215" cy="4453128"/>
-          </a:xfrm>
-          <a:prstGeom prst="rect">
-            <a:avLst/>
-          </a:prstGeom>
-          <a:noFill/>
-        </p:spPr>
-        <p:txBody>
-          <a:bodyPr wrap="square">
-            <a:spAutoFit/>
-          </a:bodyPr>
-          <a:lstStyle/>
-          <a:p>
-            <a:pPr>
-              <a:spcAft>
-                <a:spcPts val="400"/>
-              </a:spcAft>
-            </a:pPr>
-            <a:r>
-              <a:rPr sz="1400" b="0" i="0">
-                <a:solidFill>
-                  <a:srgbClr val="FFFFFF"/>
-                </a:solidFill>
-                <a:latin typeface="Calibri"/>
-              </a:rPr>
-              <a:t>gantt</a:t>
-            </a:r>
-          </a:p>
-          <a:p>
-            <a:pPr>
-              <a:spcAft>
-                <a:spcPts val="400"/>
-              </a:spcAft>
-            </a:pPr>
-            <a:r>
-              <a:rPr sz="1400" b="0" i="0">
-                <a:solidFill>
-                  <a:srgbClr val="FFFFFF"/>
-                </a:solidFill>
-                <a:latin typeface="Calibri"/>
-              </a:rPr>
-              <a:t>  title Sustentacion - 15 minutos</a:t>
-            </a:r>
-          </a:p>
-          <a:p>
-            <a:pPr>
-              <a:spcAft>
-                <a:spcPts val="400"/>
-              </a:spcAft>
-            </a:pPr>
-            <a:r>
-              <a:rPr sz="1400" b="0" i="0">
-                <a:solidFill>
-                  <a:srgbClr val="FFFFFF"/>
-                </a:solidFill>
-                <a:latin typeface="Calibri"/>
-              </a:rPr>
-              <a:t>  dateFormat mm:ss</a:t>
-            </a:r>
-          </a:p>
-          <a:p>
-            <a:pPr>
-              <a:spcAft>
-                <a:spcPts val="400"/>
-              </a:spcAft>
-            </a:pPr>
-            <a:r>
-              <a:rPr sz="1400" b="0" i="0">
-                <a:solidFill>
-                  <a:srgbClr val="FFFFFF"/>
-                </a:solidFill>
-                <a:latin typeface="Calibri"/>
-              </a:rPr>
-              <a:t>  axisFormat %M:%S</a:t>
-            </a:r>
-          </a:p>
-          <a:p>
-            <a:pPr>
-              <a:spcAft>
-                <a:spcPts val="400"/>
-              </a:spcAft>
-            </a:pPr>
-            <a:r>
-              <a:rPr sz="1400" b="0" i="0">
-                <a:solidFill>
-                  <a:srgbClr val="FFFFFF"/>
-                </a:solidFill>
-                <a:latin typeface="Calibri"/>
-              </a:rPr>
-              <a:t/>
-            </a:r>
-          </a:p>
-          <a:p>
-            <a:pPr>
-              <a:spcAft>
-                <a:spcPts val="400"/>
-              </a:spcAft>
-            </a:pPr>
-            <a:r>
-              <a:rPr sz="1400" b="0" i="0">
-                <a:solidFill>
-                  <a:srgbClr val="FFFFFF"/>
-                </a:solidFill>
-                <a:latin typeface="Calibri"/>
-              </a:rPr>
-              <a:t>  section Guion</a:t>
-            </a:r>
-          </a:p>
-          <a:p>
-            <a:pPr>
-              <a:spcAft>
-                <a:spcPts val="400"/>
-              </a:spcAft>
-            </a:pPr>
-            <a:r>
-              <a:rPr sz="1400" b="0" i="0">
-                <a:solidFill>
-                  <a:srgbClr val="FFFFFF"/>
-                </a:solidFill>
-                <a:latin typeface="Calibri"/>
-              </a:rPr>
-              <a:t>  Problema y dominio        :00:00, 2m</a:t>
-            </a:r>
-          </a:p>
-          <a:p>
-            <a:pPr>
-              <a:spcAft>
-                <a:spcPts val="400"/>
-              </a:spcAft>
-            </a:pPr>
-            <a:r>
-              <a:rPr sz="1400" b="0" i="0">
-                <a:solidFill>
-                  <a:srgbClr val="FFFFFF"/>
-                </a:solidFill>
-                <a:latin typeface="Calibri"/>
-              </a:rPr>
-              <a:t>  Requisitos y alcance      :after a1, 2m</a:t>
-            </a:r>
-          </a:p>
-          <a:p>
-            <a:pPr>
-              <a:spcAft>
-                <a:spcPts val="400"/>
-              </a:spcAft>
-            </a:pPr>
-            <a:r>
-              <a:rPr sz="1400" b="0" i="0">
-                <a:solidFill>
-                  <a:srgbClr val="FFFFFF"/>
-                </a:solidFill>
-                <a:latin typeface="Calibri"/>
-              </a:rPr>
-              <a:t>  Modelo de dominio         :3m</a:t>
-            </a:r>
-          </a:p>
-          <a:p>
-            <a:pPr>
-              <a:spcAft>
-                <a:spcPts val="400"/>
-              </a:spcAft>
-            </a:pPr>
-            <a:r>
-              <a:rPr sz="1400" b="0" i="0">
-                <a:solidFill>
-                  <a:srgbClr val="FFFFFF"/>
-                </a:solidFill>
-                <a:latin typeface="Calibri"/>
-              </a:rPr>
-              <a:t>  Casos de uso y secuencia  :3m</a:t>
-            </a:r>
-          </a:p>
-          <a:p>
-            <a:pPr>
-              <a:spcAft>
-                <a:spcPts val="400"/>
-              </a:spcAft>
-            </a:pPr>
-            <a:r>
-              <a:rPr sz="1400" b="0" i="0">
-                <a:solidFill>
-                  <a:srgbClr val="FFFFFF"/>
-                </a:solidFill>
-                <a:latin typeface="Calibri"/>
-              </a:rPr>
-              <a:t>  Prototipo y navegacion    :2m</a:t>
-            </a:r>
-          </a:p>
-          <a:p>
-            <a:pPr>
-              <a:spcAft>
-                <a:spcPts val="400"/>
-              </a:spcAft>
-            </a:pPr>
-            <a:r>
-              <a:rPr sz="1400" b="0" i="0">
-                <a:solidFill>
-                  <a:srgbClr val="FFFFFF"/>
-                </a:solidFill>
-                <a:latin typeface="Calibri"/>
-              </a:rPr>
-              <a:t>  Decisiones defendidas     :2m</a:t>
-            </a:r>
-          </a:p>
-          <a:p>
-            <a:pPr>
-              <a:spcAft>
-                <a:spcPts val="400"/>
-              </a:spcAft>
-            </a:pPr>
-            <a:r>
-              <a:rPr sz="1400" b="0" i="0">
-                <a:solidFill>
-                  <a:srgbClr val="FFFFFF"/>
-                </a:solidFill>
-                <a:latin typeface="Calibri"/>
-              </a:rPr>
-              <a:t>  Cierre                    :1m</a:t>
-            </a:r>
-          </a:p>
-          <a:p>
-            <a:pPr>
-              <a:spcAft>
-                <a:spcPts val="400"/>
-              </a:spcAft>
-            </a:pPr>
-            <a:r>
-              <a:rPr sz="1400" b="0" i="0">
-                <a:solidFill>
-                  <a:srgbClr val="FFFFFF"/>
-                </a:solidFill>
-                <a:latin typeface="Calibri"/>
-              </a:rPr>
-              <a:t/>
-            </a:r>
-          </a:p>
-          <a:p>
-            <a:pPr>
-              <a:spcAft>
-                <a:spcPts val="400"/>
-              </a:spcAft>
-            </a:pPr>
-            <a:r>
-              <a:rPr sz="1400" b="0" i="0">
-                <a:solidFill>
-                  <a:srgbClr val="FFFFFF"/>
-                </a:solidFill>
-                <a:latin typeface="Calibri"/>
-              </a:rPr>
-              <a:t>%% Si el guion no esta cronometrado, el bloque de decisiones —que es el</a:t>
-            </a:r>
-          </a:p>
-          <a:p>
-            <a:pPr>
-              <a:spcAft>
-                <a:spcPts val="400"/>
-              </a:spcAft>
-            </a:pPr>
-            <a:r>
-              <a:rPr sz="1400" b="0" i="0">
-                <a:solidFill>
-                  <a:srgbClr val="FFFFFF"/>
-                </a:solidFill>
-                <a:latin typeface="Calibri"/>
-              </a:rPr>
-              <a:t>%% que el jurado califica— se queda sin tiempo. Siempre.</a:t>
-            </a:r>
-          </a:p>
-        </p:txBody>
-      </p:sp>
-      <p:sp>
-        <p:nvSpPr>
-          <p:cNvPr id="9" name="TextBox 8"/>
-          <p:cNvSpPr txBox="1"/>
-          <p:nvPr/>
-        </p:nvSpPr>
-        <p:spPr>
-          <a:xfrm>
-            <a:off x="11185855" y="6473952"/>
-            <a:ext cx="640080" cy="274320"/>
-          </a:xfrm>
-          <a:prstGeom prst="rect">
-            <a:avLst/>
-          </a:prstGeom>
-          <a:noFill/>
-        </p:spPr>
-        <p:txBody>
-          <a:bodyPr wrap="square">
-            <a:spAutoFit/>
-          </a:bodyPr>
-          <a:lstStyle/>
-          <a:p>
-            <a:pPr algn="r"/>
-            <a:r>
-              <a:rPr sz="1100" b="0" i="0">
-                <a:solidFill>
-                  <a:srgbClr val="666666"/>
-                </a:solidFill>
-                <a:latin typeface="Calibri"/>
-              </a:rPr>
-              <a:t>12</a:t>
-            </a:r>
-          </a:p>
-        </p:txBody>
-      </p:sp>
-    </p:spTree>
-  </p:cSld>
-  <p:clrMapOvr>
-    <a:masterClrMapping/>
-  </p:clrMapOvr>
-</p:sld>
-</file>
-
-<file path=ppt/slides/slide13.xml><?xml version="1.0" encoding="utf-8"?>
-<p:sld xmlns:a="http://schemas.openxmlformats.org/drawingml/2006/main" xmlns:p="http://schemas.openxmlformats.org/presentationml/2006/main" xmlns:r="http://schemas.openxmlformats.org/officeDocument/2006/relationships">
-  <p:cSld>
-    <p:bg>
-      <p:bgPr>
-        <a:solidFill>
-          <a:srgbClr val="FFFFFF"/>
-        </a:solidFill>
-        <a:effectLst/>
-      </p:bgPr>
-    </p:bg>
-    <p:spTree>
-      <p:nvGrpSpPr>
-        <p:cNvPr id="1" name=""/>
-        <p:cNvGrpSpPr/>
-        <p:nvPr/>
-      </p:nvGrpSpPr>
-      <p:grpSpPr/>
-      <p:sp>
-        <p:nvSpPr>
-          <p:cNvPr id="2" name="Rectangle 1"/>
-          <p:cNvSpPr/>
-          <p:nvPr/>
-        </p:nvSpPr>
-        <p:spPr>
-          <a:xfrm>
-            <a:off x="0" y="0"/>
-            <a:ext cx="12191695" cy="960120"/>
-          </a:xfrm>
-          <a:prstGeom prst="rect">
-            <a:avLst/>
-          </a:prstGeom>
-          <a:solidFill>
-            <a:srgbClr val="095292"/>
-          </a:solidFill>
-          <a:ln>
-            <a:noFill/>
-          </a:ln>
-        </p:spPr>
-        <p:style>
-          <a:lnRef idx="1">
-            <a:schemeClr val="accent1"/>
-          </a:lnRef>
-          <a:fillRef idx="3">
-            <a:schemeClr val="accent1"/>
-          </a:fillRef>
-          <a:effectRef idx="2">
-            <a:schemeClr val="accent1"/>
-          </a:effectRef>
-          <a:fontRef idx="minor">
-            <a:schemeClr val="lt1"/>
-          </a:fontRef>
-        </p:style>
-        <p:txBody>
-          <a:bodyPr rtlCol="0" anchor="ctr"/>
-          <a:lstStyle/>
-          <a:p>
-            <a:pPr algn="ctr"/>
-          </a:p>
-        </p:txBody>
-      </p:sp>
-      <p:sp>
-        <p:nvSpPr>
-          <p:cNvPr id="3" name="Rectangle 2"/>
-          <p:cNvSpPr/>
-          <p:nvPr/>
-        </p:nvSpPr>
-        <p:spPr>
-          <a:xfrm>
-            <a:off x="0" y="960120"/>
-            <a:ext cx="12191695" cy="41148"/>
-          </a:xfrm>
-          <a:prstGeom prst="rect">
-            <a:avLst/>
-          </a:prstGeom>
-          <a:solidFill>
-            <a:srgbClr val="FFD000"/>
-          </a:solidFill>
-          <a:ln>
-            <a:noFill/>
-          </a:ln>
-        </p:spPr>
-        <p:style>
-          <a:lnRef idx="1">
-            <a:schemeClr val="accent1"/>
-          </a:lnRef>
-          <a:fillRef idx="3">
-            <a:schemeClr val="accent1"/>
-          </a:fillRef>
-          <a:effectRef idx="2">
-            <a:schemeClr val="accent1"/>
-          </a:effectRef>
-          <a:fontRef idx="minor">
-            <a:schemeClr val="lt1"/>
-          </a:fontRef>
-        </p:style>
-        <p:txBody>
-          <a:bodyPr rtlCol="0" anchor="ctr"/>
-          <a:lstStyle/>
-          <a:p>
-            <a:pPr algn="ctr"/>
-          </a:p>
-        </p:txBody>
-      </p:sp>
-      <p:sp>
-        <p:nvSpPr>
-          <p:cNvPr id="4" name="TextBox 3"/>
-          <p:cNvSpPr txBox="1"/>
-          <p:nvPr/>
-        </p:nvSpPr>
-        <p:spPr>
-          <a:xfrm>
-            <a:off x="457200" y="164592"/>
-            <a:ext cx="11277295" cy="502920"/>
-          </a:xfrm>
-          <a:prstGeom prst="rect">
-            <a:avLst/>
-          </a:prstGeom>
-          <a:noFill/>
-        </p:spPr>
-        <p:txBody>
-          <a:bodyPr wrap="square">
-            <a:spAutoFit/>
-          </a:bodyPr>
-          <a:lstStyle/>
-          <a:p>
-            <a:r>
-              <a:rPr sz="2600" b="1" i="0">
-                <a:solidFill>
-                  <a:srgbClr val="FFFFFF"/>
-                </a:solidFill>
-                <a:latin typeface="Calibri"/>
-              </a:rPr>
-              <a:t>Guion de sustentacion: doce minutos cronometrados y quien dice que</a:t>
-            </a:r>
-          </a:p>
-        </p:txBody>
-      </p:sp>
-      <p:sp>
-        <p:nvSpPr>
-          <p:cNvPr id="5" name="Rounded Rectangle 4"/>
-          <p:cNvSpPr/>
-          <p:nvPr/>
-        </p:nvSpPr>
-        <p:spPr>
-          <a:xfrm>
-            <a:off x="457200" y="1261872"/>
-            <a:ext cx="11277295" cy="4773168"/>
-          </a:xfrm>
-          <a:prstGeom prst="roundRect">
-            <a:avLst>
-              <a:gd name="adj" fmla="val 12000"/>
-            </a:avLst>
-          </a:prstGeom>
-          <a:solidFill>
-            <a:srgbClr val="1E2A38"/>
-          </a:solidFill>
-          <a:ln>
-            <a:noFill/>
-          </a:ln>
-        </p:spPr>
-        <p:style>
-          <a:lnRef idx="1">
-            <a:schemeClr val="accent1"/>
-          </a:lnRef>
-          <a:fillRef idx="3">
-            <a:schemeClr val="accent1"/>
-          </a:fillRef>
-          <a:effectRef idx="2">
-            <a:schemeClr val="accent1"/>
-          </a:effectRef>
-          <a:fontRef idx="minor">
-            <a:schemeClr val="lt1"/>
-          </a:fontRef>
-        </p:style>
-        <p:txBody>
-          <a:bodyPr rtlCol="0" anchor="ctr"/>
-          <a:lstStyle/>
-          <a:p>
-            <a:pPr algn="ctr"/>
-          </a:p>
-        </p:txBody>
-      </p:sp>
-      <p:sp>
-        <p:nvSpPr>
-          <p:cNvPr id="6" name="Rectangle 5"/>
-          <p:cNvSpPr/>
-          <p:nvPr/>
-        </p:nvSpPr>
-        <p:spPr>
-          <a:xfrm>
-            <a:off x="457200" y="1261872"/>
-            <a:ext cx="11277295" cy="320040"/>
-          </a:xfrm>
-          <a:prstGeom prst="rect">
-            <a:avLst/>
-          </a:prstGeom>
-          <a:solidFill>
-            <a:srgbClr val="095292"/>
-          </a:solidFill>
-          <a:ln>
-            <a:noFill/>
-          </a:ln>
-        </p:spPr>
-        <p:style>
-          <a:lnRef idx="1">
-            <a:schemeClr val="accent1"/>
-          </a:lnRef>
-          <a:fillRef idx="3">
-            <a:schemeClr val="accent1"/>
-          </a:fillRef>
-          <a:effectRef idx="2">
-            <a:schemeClr val="accent1"/>
-          </a:effectRef>
-          <a:fontRef idx="minor">
-            <a:schemeClr val="lt1"/>
-          </a:fontRef>
-        </p:style>
-        <p:txBody>
-          <a:bodyPr rtlCol="0" anchor="ctr"/>
-          <a:lstStyle/>
-          <a:p>
-            <a:pPr algn="ctr"/>
-          </a:p>
-        </p:txBody>
-      </p:sp>
-      <p:sp>
-        <p:nvSpPr>
-          <p:cNvPr id="7" name="TextBox 6"/>
-          <p:cNvSpPr txBox="1"/>
-          <p:nvPr/>
-        </p:nvSpPr>
-        <p:spPr>
-          <a:xfrm>
-            <a:off x="685800" y="1307592"/>
-            <a:ext cx="10820095" cy="256032"/>
-          </a:xfrm>
-          <a:prstGeom prst="rect">
-            <a:avLst/>
-          </a:prstGeom>
-          <a:noFill/>
-        </p:spPr>
-        <p:txBody>
-          <a:bodyPr wrap="square" anchor="ctr"/>
-          <a:lstStyle/>
-          <a:p>
-            <a:r>
-              <a:rPr sz="1000" b="1" i="0">
-                <a:solidFill>
-                  <a:srgbClr val="269CCB"/>
-                </a:solidFill>
-                <a:latin typeface="Calibri"/>
-              </a:rPr>
-              <a:t>● ● ●</a:t>
-            </a:r>
-          </a:p>
-        </p:txBody>
-      </p:sp>
-      <p:sp>
-        <p:nvSpPr>
-          <p:cNvPr id="8" name="TextBox 7"/>
-          <p:cNvSpPr txBox="1"/>
-          <p:nvPr/>
-        </p:nvSpPr>
-        <p:spPr>
-          <a:xfrm>
-            <a:off x="777240" y="1719072"/>
-            <a:ext cx="10637215" cy="4133087"/>
-          </a:xfrm>
-          <a:prstGeom prst="rect">
-            <a:avLst/>
-          </a:prstGeom>
-          <a:noFill/>
-        </p:spPr>
-        <p:txBody>
-          <a:bodyPr wrap="square">
-            <a:spAutoFit/>
-          </a:bodyPr>
-          <a:lstStyle/>
-          <a:p>
-            <a:pPr>
-              <a:spcAft>
-                <a:spcPts val="400"/>
-              </a:spcAft>
-            </a:pPr>
-            <a:r>
-              <a:rPr sz="1400" b="0" i="0">
-                <a:solidFill>
-                  <a:srgbClr val="FFFFFF"/>
-                </a:solidFill>
-                <a:latin typeface="Calibri"/>
-              </a:rPr>
-              <a:t>00:00-01:30 | PROBLEMA    | La clinica: fichas extraviadas, 8 min por historial, cero metricas</a:t>
-            </a:r>
-          </a:p>
-          <a:p>
-            <a:pPr>
-              <a:spcAft>
-                <a:spcPts val="400"/>
-              </a:spcAft>
-            </a:pPr>
-            <a:r>
-              <a:rPr sz="1400" b="0" i="0">
-                <a:solidFill>
-                  <a:srgbClr val="FFFFFF"/>
-                </a:solidFill>
-                <a:latin typeface="Calibri"/>
-              </a:rPr>
-              <a:t>01:30-03:00 | ALCANCE     | Lo que si entra y lo que quedo por fuera, con la razon</a:t>
-            </a:r>
-          </a:p>
-          <a:p>
-            <a:pPr>
-              <a:spcAft>
-                <a:spcPts val="400"/>
-              </a:spcAft>
-            </a:pPr>
-            <a:r>
-              <a:rPr sz="1400" b="0" i="0">
-                <a:solidFill>
-                  <a:srgbClr val="FFFFFF"/>
-                </a:solidFill>
-                <a:latin typeface="Calibri"/>
-              </a:rPr>
-              <a:t>03:00-05:00 | REQUISITOS  | Solo los 3 RF criticos y 2 RNF medibles; el resto en el documento</a:t>
-            </a:r>
-          </a:p>
-          <a:p>
-            <a:pPr>
-              <a:spcAft>
-                <a:spcPts val="400"/>
-              </a:spcAft>
-            </a:pPr>
-            <a:r>
-              <a:rPr sz="1400" b="0" i="0">
-                <a:solidFill>
-                  <a:srgbClr val="FFFFFF"/>
-                </a:solidFill>
-                <a:latin typeface="Calibri"/>
-              </a:rPr>
-              <a:t>05:00-07:00 | MODELO      | Casos de uso y clases: Mascota, Dueño, Historia_Clinica, Cita</a:t>
-            </a:r>
-          </a:p>
-          <a:p>
-            <a:pPr>
-              <a:spcAft>
-                <a:spcPts val="400"/>
-              </a:spcAft>
-            </a:pPr>
-            <a:r>
-              <a:rPr sz="1400" b="0" i="0">
-                <a:solidFill>
-                  <a:srgbClr val="FFFFFF"/>
-                </a:solidFill>
-                <a:latin typeface="Calibri"/>
-              </a:rPr>
-              <a:t>07:00-09:00 | INTERFAZ    | Prototipo en vivo: registrar mascota -&gt; confirmacion -&gt; buscar</a:t>
-            </a:r>
-          </a:p>
-          <a:p>
-            <a:pPr>
-              <a:spcAft>
-                <a:spcPts val="400"/>
-              </a:spcAft>
-            </a:pPr>
-            <a:r>
-              <a:rPr sz="1400" b="0" i="0">
-                <a:solidFill>
-                  <a:srgbClr val="FFFFFF"/>
-                </a:solidFill>
-                <a:latin typeface="Calibri"/>
-              </a:rPr>
-              <a:t>09:00-11:00 | DECISIONES  | 3 decisiones con alternativa descartada, criterio y consecuencia</a:t>
-            </a:r>
-          </a:p>
-          <a:p>
-            <a:pPr>
-              <a:spcAft>
-                <a:spcPts val="400"/>
-              </a:spcAft>
-            </a:pPr>
-            <a:r>
-              <a:rPr sz="1400" b="0" i="0">
-                <a:solidFill>
-                  <a:srgbClr val="FFFFFF"/>
-                </a:solidFill>
-                <a:latin typeface="Calibri"/>
-              </a:rPr>
-              <a:t>11:00-11:30 | RIESGOS     | Que queda abierto y que recibe Programacion II</a:t>
-            </a:r>
-          </a:p>
-          <a:p>
-            <a:pPr>
-              <a:spcAft>
-                <a:spcPts val="400"/>
-              </a:spcAft>
-            </a:pPr>
-            <a:r>
-              <a:rPr sz="1400" b="0" i="0">
-                <a:solidFill>
-                  <a:srgbClr val="FFFFFF"/>
-                </a:solidFill>
-                <a:latin typeface="Calibri"/>
-              </a:rPr>
-              <a:t>11:30-12:00 | CIERRE      | Una frase de valor para la clinica, no un resumen</a:t>
-            </a:r>
-          </a:p>
-          <a:p>
-            <a:pPr>
-              <a:spcAft>
-                <a:spcPts val="400"/>
-              </a:spcAft>
-            </a:pPr>
-            <a:r>
-              <a:rPr sz="1400" b="0" i="0">
-                <a:solidFill>
-                  <a:srgbClr val="FFFFFF"/>
-                </a:solidFill>
-                <a:latin typeface="Calibri"/>
-              </a:rPr>
-              <a:t>--- Reparto: todos hablan minimo 2 minutos y todos responden minimo 1 pregunta</a:t>
-            </a:r>
-          </a:p>
-          <a:p>
-            <a:pPr>
-              <a:spcAft>
-                <a:spcPts val="400"/>
-              </a:spcAft>
-            </a:pPr>
-            <a:r>
-              <a:rPr sz="1400" b="0" i="0">
-                <a:solidFill>
-                  <a:srgbClr val="FFFFFF"/>
-                </a:solidFill>
-                <a:latin typeface="Calibri"/>
-              </a:rPr>
-              <a:t>--- Regla: nadie lee la diapositiva; la diapositiva es el plano, la voz es el argumento</a:t>
-            </a:r>
-          </a:p>
-          <a:p>
-            <a:pPr>
-              <a:spcAft>
-                <a:spcPts val="400"/>
-              </a:spcAft>
-            </a:pPr>
-            <a:r>
-              <a:rPr sz="1400" b="0" i="0">
-                <a:solidFill>
-                  <a:srgbClr val="FFFFFF"/>
-                </a:solidFill>
-                <a:latin typeface="Calibri"/>
-              </a:rPr>
-              <a:t>--- Cada pantalla proyectada debe poder señalar el RF que la origina</a:t>
-            </a:r>
-          </a:p>
-          <a:p>
-            <a:pPr>
-              <a:spcAft>
-                <a:spcPts val="400"/>
-              </a:spcAft>
-            </a:pPr>
-            <a:r>
-              <a:rPr sz="1400" b="0" i="0">
-                <a:solidFill>
-                  <a:srgbClr val="FFFFFF"/>
-                </a:solidFill>
-                <a:latin typeface="Calibri"/>
-              </a:rPr>
-              <a:t>--- Plan B: capturas del prototipo, PDF descargado y diagramas exportados a imagen</a:t>
-            </a:r>
-          </a:p>
-        </p:txBody>
-      </p:sp>
-      <p:sp>
-        <p:nvSpPr>
-          <p:cNvPr id="9" name="TextBox 8"/>
-          <p:cNvSpPr txBox="1"/>
-          <p:nvPr/>
-        </p:nvSpPr>
-        <p:spPr>
-          <a:xfrm>
-            <a:off x="457200" y="6080760"/>
-            <a:ext cx="11277295" cy="320040"/>
-          </a:xfrm>
-          <a:prstGeom prst="rect">
-            <a:avLst/>
-          </a:prstGeom>
-          <a:noFill/>
-        </p:spPr>
-        <p:txBody>
-          <a:bodyPr wrap="square">
-            <a:spAutoFit/>
-          </a:bodyPr>
-          <a:lstStyle/>
-          <a:p>
-            <a:pPr algn="ctr"/>
-            <a:r>
-              <a:rPr sz="1200" b="0" i="1">
-                <a:solidFill>
-                  <a:srgbClr val="666666"/>
-                </a:solidFill>
-                <a:latin typeface="Calibri"/>
-              </a:rPr>
-              <a:t>Un paquete de diseño no se narra en orden cronologico: se defiende en orden de embudo, del dolor a la decision.</a:t>
-            </a:r>
-          </a:p>
-        </p:txBody>
-      </p:sp>
-      <p:sp>
-        <p:nvSpPr>
-          <p:cNvPr id="10" name="TextBox 9"/>
-          <p:cNvSpPr txBox="1"/>
-          <p:nvPr/>
-        </p:nvSpPr>
-        <p:spPr>
-          <a:xfrm>
-            <a:off x="11185855" y="6473952"/>
-            <a:ext cx="640080" cy="274320"/>
-          </a:xfrm>
-          <a:prstGeom prst="rect">
-            <a:avLst/>
-          </a:prstGeom>
-          <a:noFill/>
-        </p:spPr>
-        <p:txBody>
-          <a:bodyPr wrap="square">
-            <a:spAutoFit/>
-          </a:bodyPr>
-          <a:lstStyle/>
-          <a:p>
-            <a:pPr algn="r"/>
-            <a:r>
-              <a:rPr sz="1100" b="0" i="0">
-                <a:solidFill>
-                  <a:srgbClr val="666666"/>
-                </a:solidFill>
-                <a:latin typeface="Calibri"/>
-              </a:rPr>
-              <a:t>13</a:t>
-            </a:r>
-          </a:p>
-        </p:txBody>
-      </p:sp>
-    </p:spTree>
-  </p:cSld>
-  <p:clrMapOvr>
-    <a:masterClrMapping/>
-  </p:clrMapOvr>
-</p:sld>
-</file>
-
-<file path=ppt/slides/slide14.xml><?xml version="1.0" encoding="utf-8"?>
-<p:sld xmlns:a="http://schemas.openxmlformats.org/drawingml/2006/main" xmlns:p="http://schemas.openxmlformats.org/presentationml/2006/main" xmlns:r="http://schemas.openxmlformats.org/officeDocument/2006/relationships">
-  <p:cSld>
-    <p:bg>
-      <p:bgPr>
-        <a:solidFill>
-          <a:srgbClr val="FFFFFF"/>
-        </a:solidFill>
-        <a:effectLst/>
-      </p:bgPr>
-    </p:bg>
-    <p:spTree>
-      <p:nvGrpSpPr>
-        <p:cNvPr id="1" name=""/>
-        <p:cNvGrpSpPr/>
-        <p:nvPr/>
-      </p:nvGrpSpPr>
-      <p:grpSpPr/>
-      <p:sp>
-        <p:nvSpPr>
-          <p:cNvPr id="2" name="Rectangle 1"/>
-          <p:cNvSpPr/>
-          <p:nvPr/>
-        </p:nvSpPr>
-        <p:spPr>
-          <a:xfrm>
-            <a:off x="0" y="0"/>
-            <a:ext cx="12191695" cy="960120"/>
-          </a:xfrm>
-          <a:prstGeom prst="rect">
-            <a:avLst/>
-          </a:prstGeom>
-          <a:solidFill>
-            <a:srgbClr val="095292"/>
-          </a:solidFill>
-          <a:ln>
-            <a:noFill/>
-          </a:ln>
-        </p:spPr>
-        <p:style>
-          <a:lnRef idx="1">
-            <a:schemeClr val="accent1"/>
-          </a:lnRef>
-          <a:fillRef idx="3">
-            <a:schemeClr val="accent1"/>
-          </a:fillRef>
-          <a:effectRef idx="2">
-            <a:schemeClr val="accent1"/>
-          </a:effectRef>
-          <a:fontRef idx="minor">
-            <a:schemeClr val="lt1"/>
-          </a:fontRef>
-        </p:style>
-        <p:txBody>
-          <a:bodyPr rtlCol="0" anchor="ctr"/>
-          <a:lstStyle/>
-          <a:p>
-            <a:pPr algn="ctr"/>
-          </a:p>
-        </p:txBody>
-      </p:sp>
-      <p:sp>
-        <p:nvSpPr>
-          <p:cNvPr id="3" name="Rectangle 2"/>
-          <p:cNvSpPr/>
-          <p:nvPr/>
-        </p:nvSpPr>
-        <p:spPr>
-          <a:xfrm>
-            <a:off x="0" y="960120"/>
-            <a:ext cx="12191695" cy="41148"/>
-          </a:xfrm>
-          <a:prstGeom prst="rect">
-            <a:avLst/>
-          </a:prstGeom>
-          <a:solidFill>
-            <a:srgbClr val="FFD000"/>
-          </a:solidFill>
-          <a:ln>
-            <a:noFill/>
-          </a:ln>
-        </p:spPr>
-        <p:style>
-          <a:lnRef idx="1">
-            <a:schemeClr val="accent1"/>
-          </a:lnRef>
-          <a:fillRef idx="3">
-            <a:schemeClr val="accent1"/>
-          </a:fillRef>
-          <a:effectRef idx="2">
-            <a:schemeClr val="accent1"/>
-          </a:effectRef>
-          <a:fontRef idx="minor">
-            <a:schemeClr val="lt1"/>
-          </a:fontRef>
-        </p:style>
-        <p:txBody>
-          <a:bodyPr rtlCol="0" anchor="ctr"/>
-          <a:lstStyle/>
-          <a:p>
-            <a:pPr algn="ctr"/>
-          </a:p>
-        </p:txBody>
-      </p:sp>
-      <p:sp>
-        <p:nvSpPr>
-          <p:cNvPr id="4" name="TextBox 3"/>
-          <p:cNvSpPr txBox="1"/>
-          <p:nvPr/>
-        </p:nvSpPr>
-        <p:spPr>
-          <a:xfrm>
-            <a:off x="457200" y="164592"/>
-            <a:ext cx="11277295" cy="502920"/>
-          </a:xfrm>
-          <a:prstGeom prst="rect">
-            <a:avLst/>
-          </a:prstGeom>
-          <a:noFill/>
-        </p:spPr>
-        <p:txBody>
-          <a:bodyPr wrap="square">
-            <a:spAutoFit/>
-          </a:bodyPr>
-          <a:lstStyle/>
-          <a:p>
-            <a:r>
-              <a:rPr sz="2600" b="1" i="0">
-                <a:solidFill>
-                  <a:srgbClr val="FFFFFF"/>
-                </a:solidFill>
-                <a:latin typeface="Calibri"/>
-              </a:rPr>
-              <a:t>Demo del dia</a:t>
-            </a:r>
-          </a:p>
-        </p:txBody>
-      </p:sp>
-      <p:sp>
-        <p:nvSpPr>
-          <p:cNvPr id="5" name="TextBox 4"/>
-          <p:cNvSpPr txBox="1"/>
-          <p:nvPr/>
-        </p:nvSpPr>
-        <p:spPr>
-          <a:xfrm>
-            <a:off x="457200" y="1170432"/>
-            <a:ext cx="11277295" cy="5230368"/>
-          </a:xfrm>
-          <a:prstGeom prst="rect">
-            <a:avLst/>
-          </a:prstGeom>
-          <a:noFill/>
-        </p:spPr>
-        <p:txBody>
-          <a:bodyPr wrap="square">
-            <a:spAutoFit/>
-          </a:bodyPr>
-          <a:lstStyle/>
-          <a:p>
-            <a:pPr>
-              <a:spcAft>
-                <a:spcPts val="800"/>
-              </a:spcAft>
-            </a:pPr>
-            <a:r>
-              <a:rPr sz="2000" b="0" i="0">
-                <a:solidFill>
-                  <a:srgbClr val="333333"/>
-                </a:solidFill>
-                <a:latin typeface="Calibri"/>
-              </a:rPr>
-              <a:t>–   </a:t>
-            </a:r>
-            <a:r>
-              <a:rPr sz="2000" b="1" i="0">
-                <a:solidFill>
-                  <a:srgbClr val="333333"/>
-                </a:solidFill>
-                <a:latin typeface="Calibri"/>
-              </a:rPr>
-              <a:t>Herramienta:</a:t>
-            </a:r>
-            <a:r>
-              <a:rPr sz="2000" b="0" i="0">
-                <a:solidFill>
-                  <a:srgbClr val="333333"/>
-                </a:solidFill>
-                <a:latin typeface="Calibri"/>
-              </a:rPr>
-              <a:t> Google Docs · draw.io · Figma o Penpot</a:t>
-            </a:r>
-          </a:p>
-          <a:p>
-            <a:pPr>
-              <a:spcAft>
-                <a:spcPts val="800"/>
-              </a:spcAft>
-            </a:pPr>
-            <a:r>
-              <a:rPr sz="2000" b="0" i="0">
-                <a:solidFill>
-                  <a:srgbClr val="333333"/>
-                </a:solidFill>
-                <a:latin typeface="Calibri"/>
-              </a:rPr>
-              <a:t>–   </a:t>
-            </a:r>
-            <a:r>
-              <a:rPr sz="2000" b="1" i="0">
-                <a:solidFill>
-                  <a:srgbClr val="333333"/>
-                </a:solidFill>
-                <a:latin typeface="Calibri"/>
-              </a:rPr>
-              <a:t>Demo:</a:t>
-            </a:r>
-            <a:r>
-              <a:rPr sz="2000" b="0" i="0">
-                <a:solidFill>
-                  <a:srgbClr val="333333"/>
-                </a:solidFill>
-                <a:latin typeface="Calibri"/>
-              </a:rPr>
-              <a:t> Se proyecta una sustentacion mal hecha y una bien hecha del mismo paquete, y luego arma en vivo la tabla de decisiones para justificar por que Historia_Clinica es una clase aparte de Mascota.</a:t>
-            </a:r>
-          </a:p>
-          <a:p>
-            <a:pPr>
-              <a:spcAft>
-                <a:spcPts val="800"/>
-              </a:spcAft>
-            </a:pPr>
-            <a:r>
-              <a:rPr sz="2000" b="0" i="0">
-                <a:solidFill>
-                  <a:srgbClr val="333333"/>
-                </a:solidFill>
-                <a:latin typeface="Calibri"/>
-              </a:rPr>
-              <a:t>–   Mismo dominio: la clinica veterinaria — no otro ejemplo. Aqui se diseña, no se programa.</a:t>
-            </a:r>
-          </a:p>
-        </p:txBody>
-      </p:sp>
-      <p:sp>
-        <p:nvSpPr>
-          <p:cNvPr id="6" name="TextBox 5"/>
-          <p:cNvSpPr txBox="1"/>
-          <p:nvPr/>
-        </p:nvSpPr>
-        <p:spPr>
-          <a:xfrm>
-            <a:off x="11185855" y="6473952"/>
-            <a:ext cx="640080" cy="274320"/>
-          </a:xfrm>
-          <a:prstGeom prst="rect">
-            <a:avLst/>
-          </a:prstGeom>
-          <a:noFill/>
-        </p:spPr>
-        <p:txBody>
-          <a:bodyPr wrap="square">
-            <a:spAutoFit/>
-          </a:bodyPr>
-          <a:lstStyle/>
-          <a:p>
-            <a:pPr algn="r"/>
-            <a:r>
-              <a:rPr sz="1100" b="0" i="0">
-                <a:solidFill>
-                  <a:srgbClr val="666666"/>
-                </a:solidFill>
-                <a:latin typeface="Calibri"/>
-              </a:rPr>
-              <a:t>14</a:t>
-            </a:r>
-          </a:p>
-        </p:txBody>
-      </p:sp>
-    </p:spTree>
-  </p:cSld>
-  <p:clrMapOvr>
-    <a:masterClrMapping/>
-  </p:clrMapOvr>
-</p:sld>
-</file>
-
-<file path=ppt/slides/slide15.xml><?xml version="1.0" encoding="utf-8"?>
-<p:sld xmlns:a="http://schemas.openxmlformats.org/drawingml/2006/main" xmlns:p="http://schemas.openxmlformats.org/presentationml/2006/main" xmlns:r="http://schemas.openxmlformats.org/officeDocument/2006/relationships">
-  <p:cSld>
-    <p:bg>
-      <p:bgPr>
-        <a:solidFill>
-          <a:srgbClr val="FFFFFF"/>
-        </a:solidFill>
-        <a:effectLst/>
-      </p:bgPr>
-    </p:bg>
-    <p:spTree>
-      <p:nvGrpSpPr>
-        <p:cNvPr id="1" name=""/>
-        <p:cNvGrpSpPr/>
-        <p:nvPr/>
-      </p:nvGrpSpPr>
-      <p:grpSpPr/>
-      <p:sp>
-        <p:nvSpPr>
-          <p:cNvPr id="2" name="Rectangle 1"/>
-          <p:cNvSpPr/>
-          <p:nvPr/>
-        </p:nvSpPr>
-        <p:spPr>
-          <a:xfrm>
-            <a:off x="0" y="0"/>
             <a:ext cx="12191695" cy="164592"/>
           </a:xfrm>
           <a:prstGeom prst="rect">
@@ -6462,14 +8239,118 @@
       </p:sp>
       <p:sp>
         <p:nvSpPr>
-          <p:cNvPr id="5" name="TextBox 4"/>
+          <p:cNvPr id="5" name="Rounded Rectangle 4"/>
+          <p:cNvSpPr/>
+          <p:nvPr/>
+        </p:nvSpPr>
+        <p:spPr>
+          <a:xfrm>
+            <a:off x="5797149" y="1573813"/>
+            <a:ext cx="6010497" cy="4057845"/>
+          </a:xfrm>
+          <a:prstGeom prst="roundRect">
+            <a:avLst>
+              <a:gd name="adj" fmla="val 4000"/>
+            </a:avLst>
+          </a:prstGeom>
+          <a:solidFill>
+            <a:srgbClr val="E8EEF4"/>
+          </a:solidFill>
+          <a:ln>
+            <a:noFill/>
+          </a:ln>
+        </p:spPr>
+        <p:style>
+          <a:lnRef idx="1">
+            <a:schemeClr val="accent1"/>
+          </a:lnRef>
+          <a:fillRef idx="3">
+            <a:schemeClr val="accent1"/>
+          </a:fillRef>
+          <a:effectRef idx="2">
+            <a:schemeClr val="accent1"/>
+          </a:effectRef>
+          <a:fontRef idx="minor">
+            <a:schemeClr val="lt1"/>
+          </a:fontRef>
+        </p:style>
+        <p:txBody>
+          <a:bodyPr rtlCol="0" anchor="ctr"/>
+          <a:lstStyle/>
+          <a:p>
+            <a:pPr algn="ctr"/>
+          </a:p>
+        </p:txBody>
+      </p:sp>
+      <p:pic>
+        <p:nvPicPr>
+          <p:cNvPr id="6" name="Picture 5" descr="notebook-planning-desk-coffee.jpg"/>
+          <p:cNvPicPr>
+            <a:picLocks noChangeAspect="1"/>
+          </p:cNvPicPr>
+          <p:nvPr/>
+        </p:nvPicPr>
+        <p:blipFill>
+          <a:blip r:embed="rId2"/>
+          <a:stretch>
+            <a:fillRect/>
+          </a:stretch>
+        </p:blipFill>
+        <p:spPr>
+          <a:xfrm>
+            <a:off x="5870301" y="1646965"/>
+            <a:ext cx="5864193" cy="3911541"/>
+          </a:xfrm>
+          <a:prstGeom prst="rect">
+            <a:avLst/>
+          </a:prstGeom>
+        </p:spPr>
+      </p:pic>
+      <p:sp>
+        <p:nvSpPr>
+          <p:cNvPr id="7" name="TextBox 6"/>
           <p:cNvSpPr txBox="1"/>
           <p:nvPr/>
         </p:nvSpPr>
         <p:spPr>
           <a:xfrm>
-            <a:off x="457200" y="1170432"/>
-            <a:ext cx="11277295" cy="5230368"/>
+            <a:off x="5870301" y="5961888"/>
+            <a:ext cx="5864193" cy="320040"/>
+          </a:xfrm>
+          <a:prstGeom prst="rect">
+            <a:avLst/>
+          </a:prstGeom>
+          <a:noFill/>
+        </p:spPr>
+        <p:txBody>
+          <a:bodyPr wrap="square">
+            <a:spAutoFit/>
+          </a:bodyPr>
+          <a:lstStyle/>
+          <a:p>
+            <a:pPr algn="ctr"/>
+            <a:r>
+              <a:rPr sz="1100" b="0" i="1">
+                <a:solidFill>
+                  <a:srgbClr val="666666"/>
+                </a:solidFill>
+                <a:latin typeface="Calibri"/>
+              </a:rPr>
+              <a:t>Foto: Cup of  Couple · Pexels</a:t>
+            </a:r>
+          </a:p>
+        </p:txBody>
+      </p:sp>
+      <p:sp>
+        <p:nvSpPr>
+          <p:cNvPr id="8" name="TextBox 7"/>
+          <p:cNvSpPr txBox="1"/>
+          <p:nvPr/>
+        </p:nvSpPr>
+        <p:spPr>
+          <a:xfrm>
+            <a:off x="457200" y="1353312"/>
+            <a:ext cx="5093061" cy="5047488"/>
           </a:xfrm>
           <a:prstGeom prst="rect">
             <a:avLst/>
@@ -6594,7 +8475,7 @@
       </p:sp>
       <p:sp>
         <p:nvSpPr>
-          <p:cNvPr id="6" name="TextBox 5"/>
+          <p:cNvPr id="9" name="TextBox 8"/>
           <p:cNvSpPr txBox="1"/>
           <p:nvPr/>
         </p:nvSpPr>
@@ -7620,21 +9501,173 @@
                 </a:solidFill>
                 <a:latin typeface="Calibri"/>
               </a:rPr>
-              <a:t>Sustentar un paquete de diseño no es leer diapositivas ni narrar lo que... (1/2)</a:t>
-            </a:r>
-          </a:p>
-        </p:txBody>
-      </p:sp>
-      <p:sp>
-        <p:nvSpPr>
-          <p:cNvPr id="5" name="TextBox 4"/>
+              <a:t>Sustentar es defender decisiones</a:t>
+            </a:r>
+          </a:p>
+        </p:txBody>
+      </p:sp>
+      <p:sp>
+        <p:nvSpPr>
+          <p:cNvPr id="5" name="Rounded Rectangle 4"/>
+          <p:cNvSpPr/>
+          <p:nvPr/>
+        </p:nvSpPr>
+        <p:spPr>
+          <a:xfrm>
+            <a:off x="5803166" y="1188719"/>
+            <a:ext cx="5998464" cy="4828032"/>
+          </a:xfrm>
+          <a:prstGeom prst="roundRect">
+            <a:avLst>
+              <a:gd name="adj" fmla="val 4000"/>
+            </a:avLst>
+          </a:prstGeom>
+          <a:solidFill>
+            <a:srgbClr val="E8EEF4"/>
+          </a:solidFill>
+          <a:ln>
+            <a:noFill/>
+          </a:ln>
+        </p:spPr>
+        <p:style>
+          <a:lnRef idx="1">
+            <a:schemeClr val="accent1"/>
+          </a:lnRef>
+          <a:fillRef idx="3">
+            <a:schemeClr val="accent1"/>
+          </a:fillRef>
+          <a:effectRef idx="2">
+            <a:schemeClr val="accent1"/>
+          </a:effectRef>
+          <a:fontRef idx="minor">
+            <a:schemeClr val="lt1"/>
+          </a:fontRef>
+        </p:style>
+        <p:txBody>
+          <a:bodyPr rtlCol="0" anchor="ctr"/>
+          <a:lstStyle/>
+          <a:p>
+            <a:pPr algn="ctr"/>
+          </a:p>
+        </p:txBody>
+      </p:sp>
+      <p:pic>
+        <p:nvPicPr>
+          <p:cNvPr id="6" name="Picture 5" descr="narrar-sustentar-paso1.png"/>
+          <p:cNvPicPr>
+            <a:picLocks noChangeAspect="1"/>
+          </p:cNvPicPr>
+          <p:nvPr/>
+        </p:nvPicPr>
+        <p:blipFill>
+          <a:blip r:embed="rId2"/>
+          <a:stretch>
+            <a:fillRect/>
+          </a:stretch>
+        </p:blipFill>
+        <p:spPr>
+          <a:xfrm>
+            <a:off x="5876318" y="1261872"/>
+            <a:ext cx="5852160" cy="4681728"/>
+          </a:xfrm>
+          <a:prstGeom prst="rect">
+            <a:avLst/>
+          </a:prstGeom>
+        </p:spPr>
+      </p:pic>
+      <p:pic>
+        <p:nvPicPr>
+          <p:cNvPr id="7" name="Picture 6" descr="narrar-sustentar-paso2.png"/>
+          <p:cNvPicPr>
+            <a:picLocks noChangeAspect="1"/>
+          </p:cNvPicPr>
+          <p:nvPr/>
+        </p:nvPicPr>
+        <p:blipFill>
+          <a:blip r:embed="rId3"/>
+          <a:stretch>
+            <a:fillRect/>
+          </a:stretch>
+        </p:blipFill>
+        <p:spPr>
+          <a:xfrm>
+            <a:off x="5876318" y="1261872"/>
+            <a:ext cx="5852160" cy="4681728"/>
+          </a:xfrm>
+          <a:prstGeom prst="rect">
+            <a:avLst/>
+          </a:prstGeom>
+        </p:spPr>
+      </p:pic>
+      <p:pic>
+        <p:nvPicPr>
+          <p:cNvPr id="8" name="Picture 7" descr="narrar-sustentar-paso3.png"/>
+          <p:cNvPicPr>
+            <a:picLocks noChangeAspect="1"/>
+          </p:cNvPicPr>
+          <p:nvPr/>
+        </p:nvPicPr>
+        <p:blipFill>
+          <a:blip r:embed="rId4"/>
+          <a:stretch>
+            <a:fillRect/>
+          </a:stretch>
+        </p:blipFill>
+        <p:spPr>
+          <a:xfrm>
+            <a:off x="5876318" y="1261872"/>
+            <a:ext cx="5852160" cy="4681728"/>
+          </a:xfrm>
+          <a:prstGeom prst="rect">
+            <a:avLst/>
+          </a:prstGeom>
+        </p:spPr>
+      </p:pic>
+      <p:sp>
+        <p:nvSpPr>
+          <p:cNvPr id="13" name="TextBox 12"/>
           <p:cNvSpPr txBox="1"/>
           <p:nvPr/>
         </p:nvSpPr>
         <p:spPr>
           <a:xfrm>
-            <a:off x="457200" y="1170432"/>
-            <a:ext cx="11277295" cy="5230368"/>
+            <a:off x="5870301" y="5961888"/>
+            <a:ext cx="5864193" cy="320040"/>
+          </a:xfrm>
+          <a:prstGeom prst="rect">
+            <a:avLst/>
+          </a:prstGeom>
+          <a:noFill/>
+        </p:spPr>
+        <p:txBody>
+          <a:bodyPr wrap="square">
+            <a:spAutoFit/>
+          </a:bodyPr>
+          <a:lstStyle/>
+          <a:p>
+            <a:pPr algn="ctr"/>
+            <a:r>
+              <a:rPr sz="1100" b="0" i="1">
+                <a:solidFill>
+                  <a:srgbClr val="666666"/>
+                </a:solidFill>
+                <a:latin typeface="Calibri"/>
+              </a:rPr>
+              <a:t>Clic para avanzar la animación</a:t>
+            </a:r>
+          </a:p>
+        </p:txBody>
+      </p:sp>
+      <p:sp>
+        <p:nvSpPr>
+          <p:cNvPr id="14" name="TextBox 13"/>
+          <p:cNvSpPr txBox="1"/>
+          <p:nvPr/>
+        </p:nvSpPr>
+        <p:spPr>
+          <a:xfrm>
+            <a:off x="457200" y="1353312"/>
+            <a:ext cx="5093061" cy="5047488"/>
           </a:xfrm>
           <a:prstGeom prst="rect">
             <a:avLst/>
@@ -7659,7 +9692,7 @@
                 </a:solidFill>
                 <a:latin typeface="Calibri"/>
               </a:rPr>
-              <a:t>–   Sustentar un paquete de diseño no es leer diapositivas ni narrar lo que el equipo hizo cada semana: es demostrar que las decisiones tomadas son defendibles.</a:t>
+              <a:t>–   No es leer diapositivas ni narrar lo hecho cada semana.</a:t>
             </a:r>
           </a:p>
           <a:p>
@@ -7675,7 +9708,7 @@
                 </a:solidFill>
                 <a:latin typeface="Calibri"/>
               </a:rPr>
-              <a:t>–   El jurado, sea el docente o un cliente simulado de la clinica, no esta evaluando cuanto trabajaron sino tres cosas concretas: si el diseño resuelve el problema declarado, si las piezas son coherentes entre si y si el equipo entiende lo que entrego.</a:t>
+              <a:t>–   El jurado mira tres cosas: si el diseño resuelve el problema, si las piezas son coherentes y si el autor entiende lo que entregó.</a:t>
             </a:r>
           </a:p>
           <a:p>
@@ -7691,14 +9724,30 @@
                 </a:solidFill>
                 <a:latin typeface="Calibri"/>
               </a:rPr>
-              <a:t>–   La diferencia se nota en la primera frase: quien dice hicimos casos de uso, luego clases, luego pantallas, esta narrando; quien dice la clinica pierde fichas y tarda ocho minutos en encontrar un historial</a:t>
-            </a:r>
-          </a:p>
-        </p:txBody>
-      </p:sp>
-      <p:sp>
-        <p:nvSpPr>
-          <p:cNvPr id="6" name="TextBox 5"/>
+              <a:t>–   Narrar: «hicimos casos de uso, luego clases». Sustentar: «la clínica pierde fichas, y esto lo resuelve así».</a:t>
+            </a:r>
+          </a:p>
+          <a:p>
+            <a:pPr>
+              <a:spcAft>
+                <a:spcPts val="800"/>
+              </a:spcAft>
+            </a:pPr>
+            <a:r>
+              <a:rPr sz="2000" b="0" i="0">
+                <a:solidFill>
+                  <a:srgbClr val="333333"/>
+                </a:solidFill>
+                <a:latin typeface="Calibri"/>
+              </a:rPr>
+              <a:t>–   Se ordena por problema resuelto, no por documento.</a:t>
+            </a:r>
+          </a:p>
+        </p:txBody>
+      </p:sp>
+      <p:sp>
+        <p:nvSpPr>
+          <p:cNvPr id="15" name="TextBox 14"/>
           <p:cNvSpPr txBox="1"/>
           <p:nvPr/>
         </p:nvSpPr>
@@ -7736,6 +9785,142 @@
   <p:clrMapOvr>
     <a:masterClrMapping/>
   </p:clrMapOvr>
+  <p:timing>
+    <p:tnLst>
+      <p:par>
+        <p:cTn id="1" dur="indefinite" restart="never" nodeType="tmRoot">
+          <p:childTnLst>
+            <p:seq concurrent="1" nextAc="seek">
+              <p:cTn id="2" dur="indefinite" nodeType="mainSeq">
+                <p:childTnLst>
+                  <p:par>
+                    <p:cTn id="3" fill="hold">
+                      <p:stCondLst>
+                        <p:cond delay="indefinite"/>
+                      </p:stCondLst>
+                      <p:childTnLst>
+                        <p:par>
+                          <p:cTn id="4" fill="hold">
+                            <p:stCondLst>
+                              <p:cond delay="0"/>
+                            </p:stCondLst>
+                            <p:childTnLst>
+                              <p:par>
+                                <p:cTn id="5" presetID="10" presetClass="entr" presetSubtype="0" fill="hold" nodeType="clickEffect">
+                                  <p:stCondLst>
+                                    <p:cond delay="0"/>
+                                  </p:stCondLst>
+                                  <p:childTnLst>
+                                    <p:set>
+                                      <p:cBhvr>
+                                        <p:cTn id="6" dur="1" fill="hold">
+                                          <p:stCondLst>
+                                            <p:cond delay="0"/>
+                                          </p:stCondLst>
+                                        </p:cTn>
+                                        <p:tgtEl>
+                                          <p:spTgt spid="7"/>
+                                        </p:tgtEl>
+                                        <p:attrNameLst>
+                                          <p:attrName>style.visibility</p:attrName>
+                                        </p:attrNameLst>
+                                      </p:cBhvr>
+                                      <p:to>
+                                        <p:strVal val="visible"/>
+                                      </p:to>
+                                    </p:set>
+                                    <p:animEffect transition="in" filter="fade">
+                                      <p:cBhvr>
+                                        <p:cTn id="7" dur="450"/>
+                                        <p:tgtEl>
+                                          <p:spTgt spid="7"/>
+                                        </p:tgtEl>
+                                      </p:cBhvr>
+                                    </p:animEffect>
+                                  </p:childTnLst>
+                                </p:cTn>
+                              </p:par>
+                            </p:childTnLst>
+                          </p:cTn>
+                        </p:par>
+                      </p:childTnLst>
+                    </p:cTn>
+                  </p:par>
+                  <p:par>
+                    <p:cTn id="8" fill="hold">
+                      <p:stCondLst>
+                        <p:cond delay="indefinite"/>
+                      </p:stCondLst>
+                      <p:childTnLst>
+                        <p:par>
+                          <p:cTn id="9" fill="hold">
+                            <p:stCondLst>
+                              <p:cond delay="0"/>
+                            </p:stCondLst>
+                            <p:childTnLst>
+                              <p:par>
+                                <p:cTn id="10" presetID="10" presetClass="entr" presetSubtype="0" fill="hold" nodeType="clickEffect">
+                                  <p:stCondLst>
+                                    <p:cond delay="0"/>
+                                  </p:stCondLst>
+                                  <p:childTnLst>
+                                    <p:set>
+                                      <p:cBhvr>
+                                        <p:cTn id="11" dur="1" fill="hold">
+                                          <p:stCondLst>
+                                            <p:cond delay="0"/>
+                                          </p:stCondLst>
+                                        </p:cTn>
+                                        <p:tgtEl>
+                                          <p:spTgt spid="8"/>
+                                        </p:tgtEl>
+                                        <p:attrNameLst>
+                                          <p:attrName>style.visibility</p:attrName>
+                                        </p:attrNameLst>
+                                      </p:cBhvr>
+                                      <p:to>
+                                        <p:strVal val="visible"/>
+                                      </p:to>
+                                    </p:set>
+                                    <p:animEffect transition="in" filter="fade">
+                                      <p:cBhvr>
+                                        <p:cTn id="12" dur="450"/>
+                                        <p:tgtEl>
+                                          <p:spTgt spid="8"/>
+                                        </p:tgtEl>
+                                      </p:cBhvr>
+                                    </p:animEffect>
+                                  </p:childTnLst>
+                                </p:cTn>
+                              </p:par>
+                            </p:childTnLst>
+                          </p:cTn>
+                        </p:par>
+                      </p:childTnLst>
+                    </p:cTn>
+                  </p:par>
+                </p:childTnLst>
+              </p:cTn>
+              <p:prevCondLst>
+                <p:cond evt="onPrev" delay="0">
+                  <p:tgtEl>
+                    <p:sldTgt/>
+                  </p:tgtEl>
+                </p:cond>
+              </p:prevCondLst>
+              <p:nextCondLst>
+                <p:cond evt="onNext" delay="0">
+                  <p:tgtEl>
+                    <p:sldTgt/>
+                  </p:tgtEl>
+                </p:cond>
+              </p:nextCondLst>
+            </p:seq>
+          </p:childTnLst>
+        </p:cTn>
+      </p:par>
+    </p:tnLst>
+  </p:timing>
 </p:sld>
 </file>
 
@@ -7872,21 +10057,173 @@
                 </a:solidFill>
                 <a:latin typeface="Calibri"/>
               </a:rPr>
-              <a:t>Sustentar un paquete de diseño no es leer diapositivas ni narrar lo que... (2/2)</a:t>
-            </a:r>
-          </a:p>
-        </p:txBody>
-      </p:sp>
-      <p:sp>
-        <p:nvSpPr>
-          <p:cNvPr id="5" name="TextBox 4"/>
+              <a:t>El orden en embudo</a:t>
+            </a:r>
+          </a:p>
+        </p:txBody>
+      </p:sp>
+      <p:sp>
+        <p:nvSpPr>
+          <p:cNvPr id="5" name="Rounded Rectangle 4"/>
+          <p:cNvSpPr/>
+          <p:nvPr/>
+        </p:nvSpPr>
+        <p:spPr>
+          <a:xfrm>
+            <a:off x="5803166" y="1188719"/>
+            <a:ext cx="5998464" cy="4828032"/>
+          </a:xfrm>
+          <a:prstGeom prst="roundRect">
+            <a:avLst>
+              <a:gd name="adj" fmla="val 4000"/>
+            </a:avLst>
+          </a:prstGeom>
+          <a:solidFill>
+            <a:srgbClr val="E8EEF4"/>
+          </a:solidFill>
+          <a:ln>
+            <a:noFill/>
+          </a:ln>
+        </p:spPr>
+        <p:style>
+          <a:lnRef idx="1">
+            <a:schemeClr val="accent1"/>
+          </a:lnRef>
+          <a:fillRef idx="3">
+            <a:schemeClr val="accent1"/>
+          </a:fillRef>
+          <a:effectRef idx="2">
+            <a:schemeClr val="accent1"/>
+          </a:effectRef>
+          <a:fontRef idx="minor">
+            <a:schemeClr val="lt1"/>
+          </a:fontRef>
+        </p:style>
+        <p:txBody>
+          <a:bodyPr rtlCol="0" anchor="ctr"/>
+          <a:lstStyle/>
+          <a:p>
+            <a:pPr algn="ctr"/>
+          </a:p>
+        </p:txBody>
+      </p:sp>
+      <p:pic>
+        <p:nvPicPr>
+          <p:cNvPr id="6" name="Picture 5" descr="embudo-paso1.png"/>
+          <p:cNvPicPr>
+            <a:picLocks noChangeAspect="1"/>
+          </p:cNvPicPr>
+          <p:nvPr/>
+        </p:nvPicPr>
+        <p:blipFill>
+          <a:blip r:embed="rId2"/>
+          <a:stretch>
+            <a:fillRect/>
+          </a:stretch>
+        </p:blipFill>
+        <p:spPr>
+          <a:xfrm>
+            <a:off x="5876318" y="1261872"/>
+            <a:ext cx="5852160" cy="4681728"/>
+          </a:xfrm>
+          <a:prstGeom prst="rect">
+            <a:avLst/>
+          </a:prstGeom>
+        </p:spPr>
+      </p:pic>
+      <p:pic>
+        <p:nvPicPr>
+          <p:cNvPr id="7" name="Picture 6" descr="embudo-paso2.png"/>
+          <p:cNvPicPr>
+            <a:picLocks noChangeAspect="1"/>
+          </p:cNvPicPr>
+          <p:nvPr/>
+        </p:nvPicPr>
+        <p:blipFill>
+          <a:blip r:embed="rId3"/>
+          <a:stretch>
+            <a:fillRect/>
+          </a:stretch>
+        </p:blipFill>
+        <p:spPr>
+          <a:xfrm>
+            <a:off x="5876318" y="1261872"/>
+            <a:ext cx="5852160" cy="4681728"/>
+          </a:xfrm>
+          <a:prstGeom prst="rect">
+            <a:avLst/>
+          </a:prstGeom>
+        </p:spPr>
+      </p:pic>
+      <p:pic>
+        <p:nvPicPr>
+          <p:cNvPr id="8" name="Picture 7" descr="embudo-paso3.png"/>
+          <p:cNvPicPr>
+            <a:picLocks noChangeAspect="1"/>
+          </p:cNvPicPr>
+          <p:nvPr/>
+        </p:nvPicPr>
+        <p:blipFill>
+          <a:blip r:embed="rId4"/>
+          <a:stretch>
+            <a:fillRect/>
+          </a:stretch>
+        </p:blipFill>
+        <p:spPr>
+          <a:xfrm>
+            <a:off x="5876318" y="1261872"/>
+            <a:ext cx="5852160" cy="4681728"/>
+          </a:xfrm>
+          <a:prstGeom prst="rect">
+            <a:avLst/>
+          </a:prstGeom>
+        </p:spPr>
+      </p:pic>
+      <p:sp>
+        <p:nvSpPr>
+          <p:cNvPr id="13" name="TextBox 12"/>
           <p:cNvSpPr txBox="1"/>
           <p:nvPr/>
         </p:nvSpPr>
         <p:spPr>
           <a:xfrm>
-            <a:off x="457200" y="1170432"/>
-            <a:ext cx="11277295" cy="5230368"/>
+            <a:off x="5870301" y="5961888"/>
+            <a:ext cx="5864193" cy="320040"/>
+          </a:xfrm>
+          <a:prstGeom prst="rect">
+            <a:avLst/>
+          </a:prstGeom>
+          <a:noFill/>
+        </p:spPr>
+        <p:txBody>
+          <a:bodyPr wrap="square">
+            <a:spAutoFit/>
+          </a:bodyPr>
+          <a:lstStyle/>
+          <a:p>
+            <a:pPr algn="ctr"/>
+            <a:r>
+              <a:rPr sz="1100" b="0" i="1">
+                <a:solidFill>
+                  <a:srgbClr val="666666"/>
+                </a:solidFill>
+                <a:latin typeface="Calibri"/>
+              </a:rPr>
+              <a:t>Clic para avanzar la animación</a:t>
+            </a:r>
+          </a:p>
+        </p:txBody>
+      </p:sp>
+      <p:sp>
+        <p:nvSpPr>
+          <p:cNvPr id="14" name="TextBox 13"/>
+          <p:cNvSpPr txBox="1"/>
+          <p:nvPr/>
+        </p:nvSpPr>
+        <p:spPr>
+          <a:xfrm>
+            <a:off x="457200" y="1353312"/>
+            <a:ext cx="5093061" cy="5047488"/>
           </a:xfrm>
           <a:prstGeom prst="rect">
             <a:avLst/>
@@ -7911,7 +10248,7 @@
                 </a:solidFill>
                 <a:latin typeface="Calibri"/>
               </a:rPr>
-              <a:t>–   Y este paquete de diseño ataca esos tres problemas asi, esta sustentando.</a:t>
+              <a:t>–   1 Problema · 2 Requisitos · 3 Modelo · 4 Interfaz · 5 Decisiones.</a:t>
             </a:r>
           </a:p>
           <a:p>
@@ -7927,7 +10264,7 @@
                 </a:solidFill>
                 <a:latin typeface="Calibri"/>
               </a:rPr>
-              <a:t>–   En la clinica la evidencia esta toda disponible: la tabla de RF y RNF, los diagramas UML, el diccionario de datos y el prototipo navegable.</a:t>
+              <a:t>–   El problema primero: sin saber qué duele, nada de lo que sigue tiene sentido.</a:t>
             </a:r>
           </a:p>
           <a:p>
@@ -7943,7 +10280,7 @@
                 </a:solidFill>
                 <a:latin typeface="Calibri"/>
               </a:rPr>
-              <a:t>–   El trabajo de hoy es ordenar esa evidencia para que cuente una sola historia.</a:t>
+              <a:t>–   Empezar por las pantallas bonitas es el error más común.</a:t>
             </a:r>
           </a:p>
           <a:p>
@@ -7959,30 +10296,14 @@
                 </a:solidFill>
                 <a:latin typeface="Calibri"/>
               </a:rPr>
-              <a:t>–   Una sustentacion es, por definicion, la defensa oral de un conjunto de decisiones frente a quien las va a evaluar o a usar.</a:t>
-            </a:r>
-          </a:p>
-          <a:p>
-            <a:pPr>
-              <a:spcAft>
-                <a:spcPts val="800"/>
-              </a:spcAft>
-            </a:pPr>
-            <a:r>
-              <a:rPr sz="2000" b="0" i="0">
-                <a:solidFill>
-                  <a:srgbClr val="333333"/>
-                </a:solidFill>
-                <a:latin typeface="Calibri"/>
-              </a:rPr>
-              <a:t>–   El error comun es ordenar la exposicion por documento, primero requisitos y luego diagramas, en lugar de ordenarla por problema resuelto.</a:t>
-            </a:r>
-          </a:p>
-        </p:txBody>
-      </p:sp>
-      <p:sp>
-        <p:nvSpPr>
-          <p:cNvPr id="6" name="TextBox 5"/>
+              <a:t>–   En doce minutos: problema y alcance 3, requisitos 2, modelo 2, interfaz 2, decisiones 2, riesgos y cierre 1.</a:t>
+            </a:r>
+          </a:p>
+        </p:txBody>
+      </p:sp>
+      <p:sp>
+        <p:nvSpPr>
+          <p:cNvPr id="15" name="TextBox 14"/>
           <p:cNvSpPr txBox="1"/>
           <p:nvPr/>
         </p:nvSpPr>
@@ -8020,6 +10341,142 @@
   <p:clrMapOvr>
     <a:masterClrMapping/>
   </p:clrMapOvr>
+  <p:timing>
+    <p:tnLst>
+      <p:par>
+        <p:cTn id="1" dur="indefinite" restart="never" nodeType="tmRoot">
+          <p:childTnLst>
+            <p:seq concurrent="1" nextAc="seek">
+              <p:cTn id="2" dur="indefinite" nodeType="mainSeq">
+                <p:childTnLst>
+                  <p:par>
+                    <p:cTn id="3" fill="hold">
+                      <p:stCondLst>
+                        <p:cond delay="indefinite"/>
+                      </p:stCondLst>
+                      <p:childTnLst>
+                        <p:par>
+                          <p:cTn id="4" fill="hold">
+                            <p:stCondLst>
+                              <p:cond delay="0"/>
+                            </p:stCondLst>
+                            <p:childTnLst>
+                              <p:par>
+                                <p:cTn id="5" presetID="10" presetClass="entr" presetSubtype="0" fill="hold" nodeType="clickEffect">
+                                  <p:stCondLst>
+                                    <p:cond delay="0"/>
+                                  </p:stCondLst>
+                                  <p:childTnLst>
+                                    <p:set>
+                                      <p:cBhvr>
+                                        <p:cTn id="6" dur="1" fill="hold">
+                                          <p:stCondLst>
+                                            <p:cond delay="0"/>
+                                          </p:stCondLst>
+                                        </p:cTn>
+                                        <p:tgtEl>
+                                          <p:spTgt spid="7"/>
+                                        </p:tgtEl>
+                                        <p:attrNameLst>
+                                          <p:attrName>style.visibility</p:attrName>
+                                        </p:attrNameLst>
+                                      </p:cBhvr>
+                                      <p:to>
+                                        <p:strVal val="visible"/>
+                                      </p:to>
+                                    </p:set>
+                                    <p:animEffect transition="in" filter="fade">
+                                      <p:cBhvr>
+                                        <p:cTn id="7" dur="450"/>
+                                        <p:tgtEl>
+                                          <p:spTgt spid="7"/>
+                                        </p:tgtEl>
+                                      </p:cBhvr>
+                                    </p:animEffect>
+                                  </p:childTnLst>
+                                </p:cTn>
+                              </p:par>
+                            </p:childTnLst>
+                          </p:cTn>
+                        </p:par>
+                      </p:childTnLst>
+                    </p:cTn>
+                  </p:par>
+                  <p:par>
+                    <p:cTn id="8" fill="hold">
+                      <p:stCondLst>
+                        <p:cond delay="indefinite"/>
+                      </p:stCondLst>
+                      <p:childTnLst>
+                        <p:par>
+                          <p:cTn id="9" fill="hold">
+                            <p:stCondLst>
+                              <p:cond delay="0"/>
+                            </p:stCondLst>
+                            <p:childTnLst>
+                              <p:par>
+                                <p:cTn id="10" presetID="10" presetClass="entr" presetSubtype="0" fill="hold" nodeType="clickEffect">
+                                  <p:stCondLst>
+                                    <p:cond delay="0"/>
+                                  </p:stCondLst>
+                                  <p:childTnLst>
+                                    <p:set>
+                                      <p:cBhvr>
+                                        <p:cTn id="11" dur="1" fill="hold">
+                                          <p:stCondLst>
+                                            <p:cond delay="0"/>
+                                          </p:stCondLst>
+                                        </p:cTn>
+                                        <p:tgtEl>
+                                          <p:spTgt spid="8"/>
+                                        </p:tgtEl>
+                                        <p:attrNameLst>
+                                          <p:attrName>style.visibility</p:attrName>
+                                        </p:attrNameLst>
+                                      </p:cBhvr>
+                                      <p:to>
+                                        <p:strVal val="visible"/>
+                                      </p:to>
+                                    </p:set>
+                                    <p:animEffect transition="in" filter="fade">
+                                      <p:cBhvr>
+                                        <p:cTn id="12" dur="450"/>
+                                        <p:tgtEl>
+                                          <p:spTgt spid="8"/>
+                                        </p:tgtEl>
+                                      </p:cBhvr>
+                                    </p:animEffect>
+                                  </p:childTnLst>
+                                </p:cTn>
+                              </p:par>
+                            </p:childTnLst>
+                          </p:cTn>
+                        </p:par>
+                      </p:childTnLst>
+                    </p:cTn>
+                  </p:par>
+                </p:childTnLst>
+              </p:cTn>
+              <p:prevCondLst>
+                <p:cond evt="onPrev" delay="0">
+                  <p:tgtEl>
+                    <p:sldTgt/>
+                  </p:tgtEl>
+                </p:cond>
+              </p:prevCondLst>
+              <p:nextCondLst>
+                <p:cond evt="onNext" delay="0">
+                  <p:tgtEl>
+                    <p:sldTgt/>
+                  </p:tgtEl>
+                </p:cond>
+              </p:nextCondLst>
+            </p:seq>
+          </p:childTnLst>
+        </p:cTn>
+      </p:par>
+    </p:tnLst>
+  </p:timing>
 </p:sld>
 </file>
 
@@ -8156,21 +10613,197 @@
                 </a:solidFill>
                 <a:latin typeface="Calibri"/>
               </a:rPr>
-              <a:t>El orden de la sustentacion no es libre, es un embudo y tiene una razon...</a:t>
-            </a:r>
-          </a:p>
-        </p:txBody>
-      </p:sp>
-      <p:sp>
-        <p:nvSpPr>
-          <p:cNvPr id="5" name="TextBox 4"/>
+              <a:t>Cómo se defiende una decisión</a:t>
+            </a:r>
+          </a:p>
+        </p:txBody>
+      </p:sp>
+      <p:sp>
+        <p:nvSpPr>
+          <p:cNvPr id="5" name="Rounded Rectangle 4"/>
+          <p:cNvSpPr/>
+          <p:nvPr/>
+        </p:nvSpPr>
+        <p:spPr>
+          <a:xfrm>
+            <a:off x="5803166" y="1188719"/>
+            <a:ext cx="5998464" cy="4828032"/>
+          </a:xfrm>
+          <a:prstGeom prst="roundRect">
+            <a:avLst>
+              <a:gd name="adj" fmla="val 4000"/>
+            </a:avLst>
+          </a:prstGeom>
+          <a:solidFill>
+            <a:srgbClr val="E8EEF4"/>
+          </a:solidFill>
+          <a:ln>
+            <a:noFill/>
+          </a:ln>
+        </p:spPr>
+        <p:style>
+          <a:lnRef idx="1">
+            <a:schemeClr val="accent1"/>
+          </a:lnRef>
+          <a:fillRef idx="3">
+            <a:schemeClr val="accent1"/>
+          </a:fillRef>
+          <a:effectRef idx="2">
+            <a:schemeClr val="accent1"/>
+          </a:effectRef>
+          <a:fontRef idx="minor">
+            <a:schemeClr val="lt1"/>
+          </a:fontRef>
+        </p:style>
+        <p:txBody>
+          <a:bodyPr rtlCol="0" anchor="ctr"/>
+          <a:lstStyle/>
+          <a:p>
+            <a:pPr algn="ctr"/>
+          </a:p>
+        </p:txBody>
+      </p:sp>
+      <p:pic>
+        <p:nvPicPr>
+          <p:cNvPr id="6" name="Picture 5" descr="defender-decision-paso1.png"/>
+          <p:cNvPicPr>
+            <a:picLocks noChangeAspect="1"/>
+          </p:cNvPicPr>
+          <p:nvPr/>
+        </p:nvPicPr>
+        <p:blipFill>
+          <a:blip r:embed="rId2"/>
+          <a:stretch>
+            <a:fillRect/>
+          </a:stretch>
+        </p:blipFill>
+        <p:spPr>
+          <a:xfrm>
+            <a:off x="5876318" y="1261872"/>
+            <a:ext cx="5852160" cy="4681728"/>
+          </a:xfrm>
+          <a:prstGeom prst="rect">
+            <a:avLst/>
+          </a:prstGeom>
+        </p:spPr>
+      </p:pic>
+      <p:pic>
+        <p:nvPicPr>
+          <p:cNvPr id="7" name="Picture 6" descr="defender-decision-paso2.png"/>
+          <p:cNvPicPr>
+            <a:picLocks noChangeAspect="1"/>
+          </p:cNvPicPr>
+          <p:nvPr/>
+        </p:nvPicPr>
+        <p:blipFill>
+          <a:blip r:embed="rId3"/>
+          <a:stretch>
+            <a:fillRect/>
+          </a:stretch>
+        </p:blipFill>
+        <p:spPr>
+          <a:xfrm>
+            <a:off x="5876318" y="1261872"/>
+            <a:ext cx="5852160" cy="4681728"/>
+          </a:xfrm>
+          <a:prstGeom prst="rect">
+            <a:avLst/>
+          </a:prstGeom>
+        </p:spPr>
+      </p:pic>
+      <p:pic>
+        <p:nvPicPr>
+          <p:cNvPr id="8" name="Picture 7" descr="defender-decision-paso3.png"/>
+          <p:cNvPicPr>
+            <a:picLocks noChangeAspect="1"/>
+          </p:cNvPicPr>
+          <p:nvPr/>
+        </p:nvPicPr>
+        <p:blipFill>
+          <a:blip r:embed="rId4"/>
+          <a:stretch>
+            <a:fillRect/>
+          </a:stretch>
+        </p:blipFill>
+        <p:spPr>
+          <a:xfrm>
+            <a:off x="5876318" y="1261872"/>
+            <a:ext cx="5852160" cy="4681728"/>
+          </a:xfrm>
+          <a:prstGeom prst="rect">
+            <a:avLst/>
+          </a:prstGeom>
+        </p:spPr>
+      </p:pic>
+      <p:pic>
+        <p:nvPicPr>
+          <p:cNvPr id="9" name="Picture 8" descr="defender-decision-paso4.png"/>
+          <p:cNvPicPr>
+            <a:picLocks noChangeAspect="1"/>
+          </p:cNvPicPr>
+          <p:nvPr/>
+        </p:nvPicPr>
+        <p:blipFill>
+          <a:blip r:embed="rId5"/>
+          <a:stretch>
+            <a:fillRect/>
+          </a:stretch>
+        </p:blipFill>
+        <p:spPr>
+          <a:xfrm>
+            <a:off x="5876318" y="1261872"/>
+            <a:ext cx="5852160" cy="4681728"/>
+          </a:xfrm>
+          <a:prstGeom prst="rect">
+            <a:avLst/>
+          </a:prstGeom>
+        </p:spPr>
+      </p:pic>
+      <p:sp>
+        <p:nvSpPr>
+          <p:cNvPr id="18" name="TextBox 17"/>
           <p:cNvSpPr txBox="1"/>
           <p:nvPr/>
         </p:nvSpPr>
         <p:spPr>
           <a:xfrm>
-            <a:off x="457200" y="1170432"/>
-            <a:ext cx="11277295" cy="5230368"/>
+            <a:off x="5870301" y="5961888"/>
+            <a:ext cx="5864193" cy="320040"/>
+          </a:xfrm>
+          <a:prstGeom prst="rect">
+            <a:avLst/>
+          </a:prstGeom>
+          <a:noFill/>
+        </p:spPr>
+        <p:txBody>
+          <a:bodyPr wrap="square">
+            <a:spAutoFit/>
+          </a:bodyPr>
+          <a:lstStyle/>
+          <a:p>
+            <a:pPr algn="ctr"/>
+            <a:r>
+              <a:rPr sz="1100" b="0" i="1">
+                <a:solidFill>
+                  <a:srgbClr val="666666"/>
+                </a:solidFill>
+                <a:latin typeface="Calibri"/>
+              </a:rPr>
+              <a:t>Clic para avanzar la animación</a:t>
+            </a:r>
+          </a:p>
+        </p:txBody>
+      </p:sp>
+      <p:sp>
+        <p:nvSpPr>
+          <p:cNvPr id="19" name="TextBox 18"/>
+          <p:cNvSpPr txBox="1"/>
+          <p:nvPr/>
+        </p:nvSpPr>
+        <p:spPr>
+          <a:xfrm>
+            <a:off x="457200" y="1353312"/>
+            <a:ext cx="5093061" cy="5047488"/>
           </a:xfrm>
           <a:prstGeom prst="rect">
             <a:avLst/>
@@ -8195,7 +10828,7 @@
                 </a:solidFill>
                 <a:latin typeface="Calibri"/>
               </a:rPr>
-              <a:t>–   El orden de la sustentacion no es libre, es un embudo y tiene una razon logica.</a:t>
+              <a:t>–   Decisión · alternativas consideradas · criterio de elección · consecuencia asumida.</a:t>
             </a:r>
           </a:p>
           <a:p>
@@ -8211,7 +10844,7 @@
                 </a:solidFill>
                 <a:latin typeface="Calibri"/>
               </a:rPr>
-              <a:t>–   Segundo los requisitos, porque son la promesa concreta: que va a hacer el sistema y con que restricciones.</a:t>
+              <a:t>–   Decisión: separar Historia_Clinica de Mascota. Alternativa: campos dentro de Mascota.</a:t>
             </a:r>
           </a:p>
           <a:p>
@@ -8227,7 +10860,7 @@
                 </a:solidFill>
                 <a:latin typeface="Calibri"/>
               </a:rPr>
-              <a:t>–   Cuarto la interfaz, porque es donde el jurado por fin ve y toca.</a:t>
+              <a:t>–   Criterio: una mascota tiene muchas consultas en su vida. Consecuencia: una entidad más, aceptada porque el RNF de 3 s se sostiene.</a:t>
             </a:r>
           </a:p>
           <a:p>
@@ -8243,46 +10876,14 @@
                 </a:solidFill>
                 <a:latin typeface="Calibri"/>
               </a:rPr>
-              <a:t>–   Y quinto las decisiones, que es la parte que separa a un equipo que entendio de uno que copio plantillas.</a:t>
-            </a:r>
-          </a:p>
-          <a:p>
-            <a:pPr>
-              <a:spcAft>
-                <a:spcPts val="800"/>
-              </a:spcAft>
-            </a:pPr>
-            <a:r>
-              <a:rPr sz="2000" b="0" i="0">
-                <a:solidFill>
-                  <a:srgbClr val="333333"/>
-                </a:solidFill>
-                <a:latin typeface="Calibri"/>
-              </a:rPr>
-              <a:t>–   Invertir ese orden es el error mas comun: los equipos empiezan mostrando pantallas bonitas, el jurado pregunta que problema resuelve eso y ahi la sustentacion se desarma.</a:t>
-            </a:r>
-          </a:p>
-          <a:p>
-            <a:pPr>
-              <a:spcAft>
-                <a:spcPts val="800"/>
-              </a:spcAft>
-            </a:pPr>
-            <a:r>
-              <a:rPr sz="2000" b="0" i="0">
-                <a:solidFill>
-                  <a:srgbClr val="333333"/>
-                </a:solidFill>
-                <a:latin typeface="Calibri"/>
-              </a:rPr>
-              <a:t>–   Para la clinica doce minutos alcanzan de sobra si se respetan las proporciones: uno y medio para el problema, tres para requisitos, dos para modelo, dos para interfaz en vivo, dos para decisiones y el resto para riesgos y cierre.</a:t>
-            </a:r>
-          </a:p>
-        </p:txBody>
-      </p:sp>
-      <p:sp>
-        <p:nvSpPr>
-          <p:cNvPr id="6" name="TextBox 5"/>
+              <a:t>–   Así el jurado ya sabe que se pensó en la alternativa.</a:t>
+            </a:r>
+          </a:p>
+        </p:txBody>
+      </p:sp>
+      <p:sp>
+        <p:nvSpPr>
+          <p:cNvPr id="20" name="TextBox 19"/>
           <p:cNvSpPr txBox="1"/>
           <p:nvPr/>
         </p:nvSpPr>
@@ -8320,6 +10921,195 @@
   <p:clrMapOvr>
     <a:masterClrMapping/>
   </p:clrMapOvr>
+  <p:timing>
+    <p:tnLst>
+      <p:par>
+        <p:cTn id="1" dur="indefinite" restart="never" nodeType="tmRoot">
+          <p:childTnLst>
+            <p:seq concurrent="1" nextAc="seek">
+              <p:cTn id="2" dur="indefinite" nodeType="mainSeq">
+                <p:childTnLst>
+                  <p:par>
+                    <p:cTn id="3" fill="hold">
+                      <p:stCondLst>
+                        <p:cond delay="indefinite"/>
+                      </p:stCondLst>
+                      <p:childTnLst>
+                        <p:par>
+                          <p:cTn id="4" fill="hold">
+                            <p:stCondLst>
+                              <p:cond delay="0"/>
+                            </p:stCondLst>
+                            <p:childTnLst>
+                              <p:par>
+                                <p:cTn id="5" presetID="10" presetClass="entr" presetSubtype="0" fill="hold" nodeType="clickEffect">
+                                  <p:stCondLst>
+                                    <p:cond delay="0"/>
+                                  </p:stCondLst>
+                                  <p:childTnLst>
+                                    <p:set>
+                                      <p:cBhvr>
+                                        <p:cTn id="6" dur="1" fill="hold">
+                                          <p:stCondLst>
+                                            <p:cond delay="0"/>
+                                          </p:stCondLst>
+                                        </p:cTn>
+                                        <p:tgtEl>
+                                          <p:spTgt spid="7"/>
+                                        </p:tgtEl>
+                                        <p:attrNameLst>
+                                          <p:attrName>style.visibility</p:attrName>
+                                        </p:attrNameLst>
+                                      </p:cBhvr>
+                                      <p:to>
+                                        <p:strVal val="visible"/>
+                                      </p:to>
+                                    </p:set>
+                                    <p:animEffect transition="in" filter="fade">
+                                      <p:cBhvr>
+                                        <p:cTn id="7" dur="450"/>
+                                        <p:tgtEl>
+                                          <p:spTgt spid="7"/>
+                                        </p:tgtEl>
+                                      </p:cBhvr>
+                                    </p:animEffect>
+                                  </p:childTnLst>
+                                </p:cTn>
+                              </p:par>
+                            </p:childTnLst>
+                          </p:cTn>
+                        </p:par>
+                      </p:childTnLst>
+                    </p:cTn>
+                  </p:par>
+                  <p:par>
+                    <p:cTn id="8" fill="hold">
+                      <p:stCondLst>
+                        <p:cond delay="indefinite"/>
+                      </p:stCondLst>
+                      <p:childTnLst>
+                        <p:par>
+                          <p:cTn id="9" fill="hold">
+                            <p:stCondLst>
+                              <p:cond delay="0"/>
+                            </p:stCondLst>
+                            <p:childTnLst>
+                              <p:par>
+                                <p:cTn id="10" presetID="10" presetClass="entr" presetSubtype="0" fill="hold" nodeType="clickEffect">
+                                  <p:stCondLst>
+                                    <p:cond delay="0"/>
+                                  </p:stCondLst>
+                                  <p:childTnLst>
+                                    <p:set>
+                                      <p:cBhvr>
+                                        <p:cTn id="11" dur="1" fill="hold">
+                                          <p:stCondLst>
+                                            <p:cond delay="0"/>
+                                          </p:stCondLst>
+                                        </p:cTn>
+                                        <p:tgtEl>
+                                          <p:spTgt spid="8"/>
+                                        </p:tgtEl>
+                                        <p:attrNameLst>
+                                          <p:attrName>style.visibility</p:attrName>
+                                        </p:attrNameLst>
+                                      </p:cBhvr>
+                                      <p:to>
+                                        <p:strVal val="visible"/>
+                                      </p:to>
+                                    </p:set>
+                                    <p:animEffect transition="in" filter="fade">
+                                      <p:cBhvr>
+                                        <p:cTn id="12" dur="450"/>
+                                        <p:tgtEl>
+                                          <p:spTgt spid="8"/>
+                                        </p:tgtEl>
+                                      </p:cBhvr>
+                                    </p:animEffect>
+                                  </p:childTnLst>
+                                </p:cTn>
+                              </p:par>
+                            </p:childTnLst>
+                          </p:cTn>
+                        </p:par>
+                      </p:childTnLst>
+                    </p:cTn>
+                  </p:par>
+                  <p:par>
+                    <p:cTn id="13" fill="hold">
+                      <p:stCondLst>
+                        <p:cond delay="indefinite"/>
+                      </p:stCondLst>
+                      <p:childTnLst>
+                        <p:par>
+                          <p:cTn id="14" fill="hold">
+                            <p:stCondLst>
+                              <p:cond delay="0"/>
+                            </p:stCondLst>
+                            <p:childTnLst>
+                              <p:par>
+                                <p:cTn id="15" presetID="10" presetClass="entr" presetSubtype="0" fill="hold" nodeType="clickEffect">
+                                  <p:stCondLst>
+                                    <p:cond delay="0"/>
+                                  </p:stCondLst>
+                                  <p:childTnLst>
+                                    <p:set>
+                                      <p:cBhvr>
+                                        <p:cTn id="16" dur="1" fill="hold">
+                                          <p:stCondLst>
+                                            <p:cond delay="0"/>
+                                          </p:stCondLst>
+                                        </p:cTn>
+                                        <p:tgtEl>
+                                          <p:spTgt spid="9"/>
+                                        </p:tgtEl>
+                                        <p:attrNameLst>
+                                          <p:attrName>style.visibility</p:attrName>
+                                        </p:attrNameLst>
+                                      </p:cBhvr>
+                                      <p:to>
+                                        <p:strVal val="visible"/>
+                                      </p:to>
+                                    </p:set>
+                                    <p:animEffect transition="in" filter="fade">
+                                      <p:cBhvr>
+                                        <p:cTn id="17" dur="450"/>
+                                        <p:tgtEl>
+                                          <p:spTgt spid="9"/>
+                                        </p:tgtEl>
+                                      </p:cBhvr>
+                                    </p:animEffect>
+                                  </p:childTnLst>
+                                </p:cTn>
+                              </p:par>
+                            </p:childTnLst>
+                          </p:cTn>
+                        </p:par>
+                      </p:childTnLst>
+                    </p:cTn>
+                  </p:par>
+                </p:childTnLst>
+              </p:cTn>
+              <p:prevCondLst>
+                <p:cond evt="onPrev" delay="0">
+                  <p:tgtEl>
+                    <p:sldTgt/>
+                  </p:tgtEl>
+                </p:cond>
+              </p:prevCondLst>
+              <p:nextCondLst>
+                <p:cond evt="onNext" delay="0">
+                  <p:tgtEl>
+                    <p:sldTgt/>
+                  </p:tgtEl>
+                </p:cond>
+              </p:nextCondLst>
+            </p:seq>
+          </p:childTnLst>
+        </p:cTn>
+      </p:par>
+    </p:tnLst>
+  </p:timing>
 </p:sld>
 </file>
 
@@ -8456,21 +11246,125 @@
                 </a:solidFill>
                 <a:latin typeface="Calibri"/>
               </a:rPr>
-              <a:t>Defender una decision de diseño tiene una estructura fija que conviene... (1/2)</a:t>
-            </a:r>
-          </a:p>
-        </p:txBody>
-      </p:sp>
-      <p:sp>
-        <p:nvSpPr>
-          <p:cNvPr id="5" name="TextBox 4"/>
+              <a:t>Las preguntas previsibles del jurado</a:t>
+            </a:r>
+          </a:p>
+        </p:txBody>
+      </p:sp>
+      <p:sp>
+        <p:nvSpPr>
+          <p:cNvPr id="5" name="Rounded Rectangle 4"/>
+          <p:cNvSpPr/>
+          <p:nvPr/>
+        </p:nvSpPr>
+        <p:spPr>
+          <a:xfrm>
+            <a:off x="5797149" y="1573813"/>
+            <a:ext cx="6010497" cy="4057845"/>
+          </a:xfrm>
+          <a:prstGeom prst="roundRect">
+            <a:avLst>
+              <a:gd name="adj" fmla="val 4000"/>
+            </a:avLst>
+          </a:prstGeom>
+          <a:solidFill>
+            <a:srgbClr val="E8EEF4"/>
+          </a:solidFill>
+          <a:ln>
+            <a:noFill/>
+          </a:ln>
+        </p:spPr>
+        <p:style>
+          <a:lnRef idx="1">
+            <a:schemeClr val="accent1"/>
+          </a:lnRef>
+          <a:fillRef idx="3">
+            <a:schemeClr val="accent1"/>
+          </a:fillRef>
+          <a:effectRef idx="2">
+            <a:schemeClr val="accent1"/>
+          </a:effectRef>
+          <a:fontRef idx="minor">
+            <a:schemeClr val="lt1"/>
+          </a:fontRef>
+        </p:style>
+        <p:txBody>
+          <a:bodyPr rtlCol="0" anchor="ctr"/>
+          <a:lstStyle/>
+          <a:p>
+            <a:pPr algn="ctr"/>
+          </a:p>
+        </p:txBody>
+      </p:sp>
+      <p:pic>
+        <p:nvPicPr>
+          <p:cNvPr id="6" name="Picture 5" descr="job-interview-panel-table.jpg"/>
+          <p:cNvPicPr>
+            <a:picLocks noChangeAspect="1"/>
+          </p:cNvPicPr>
+          <p:nvPr/>
+        </p:nvPicPr>
+        <p:blipFill>
+          <a:blip r:embed="rId2"/>
+          <a:stretch>
+            <a:fillRect/>
+          </a:stretch>
+        </p:blipFill>
+        <p:spPr>
+          <a:xfrm>
+            <a:off x="5870301" y="1646965"/>
+            <a:ext cx="5864193" cy="3911541"/>
+          </a:xfrm>
+          <a:prstGeom prst="rect">
+            <a:avLst/>
+          </a:prstGeom>
+        </p:spPr>
+      </p:pic>
+      <p:sp>
+        <p:nvSpPr>
+          <p:cNvPr id="7" name="TextBox 6"/>
           <p:cNvSpPr txBox="1"/>
           <p:nvPr/>
         </p:nvSpPr>
         <p:spPr>
           <a:xfrm>
-            <a:off x="457200" y="1170432"/>
-            <a:ext cx="11277295" cy="5230368"/>
+            <a:off x="5870301" y="5961888"/>
+            <a:ext cx="5864193" cy="320040"/>
+          </a:xfrm>
+          <a:prstGeom prst="rect">
+            <a:avLst/>
+          </a:prstGeom>
+          <a:noFill/>
+        </p:spPr>
+        <p:txBody>
+          <a:bodyPr wrap="square">
+            <a:spAutoFit/>
+          </a:bodyPr>
+          <a:lstStyle/>
+          <a:p>
+            <a:pPr algn="ctr"/>
+            <a:r>
+              <a:rPr sz="1100" b="0" i="1">
+                <a:solidFill>
+                  <a:srgbClr val="666666"/>
+                </a:solidFill>
+                <a:latin typeface="Calibri"/>
+              </a:rPr>
+              <a:t>Foto: Anna Shvets · Pexels</a:t>
+            </a:r>
+          </a:p>
+        </p:txBody>
+      </p:sp>
+      <p:sp>
+        <p:nvSpPr>
+          <p:cNvPr id="8" name="TextBox 7"/>
+          <p:cNvSpPr txBox="1"/>
+          <p:nvPr/>
+        </p:nvSpPr>
+        <p:spPr>
+          <a:xfrm>
+            <a:off x="457200" y="1353312"/>
+            <a:ext cx="5093061" cy="5047488"/>
           </a:xfrm>
           <a:prstGeom prst="rect">
             <a:avLst/>
@@ -8495,7 +11389,7 @@
                 </a:solidFill>
                 <a:latin typeface="Calibri"/>
               </a:rPr>
-              <a:t>–   Defender una decision de diseño tiene una estructura fija que conviene memorizar: decision, alternativas consideradas, criterio de eleccion y consecuencia asumida.</a:t>
+              <a:t>–   ¿Por qué es necesario este requisito? ¿Qué pasa si dos registran la misma mascota a la vez?</a:t>
             </a:r>
           </a:p>
           <a:p>
@@ -8511,7 +11405,7 @@
                 </a:solidFill>
                 <a:latin typeface="Calibri"/>
               </a:rPr>
-              <a:t>–   No basta decir que se hizo, hay que decir contra que se comparo y por que gano.</a:t>
+              <a:t>–   ¿Por qué esto es una clase y no un atributo? ¿Cómo se mide el RNF? ¿Qué quedó fuera?</a:t>
             </a:r>
           </a:p>
           <a:p>
@@ -8527,7 +11421,7 @@
                 </a:solidFill>
                 <a:latin typeface="Calibri"/>
               </a:rPr>
-              <a:t>–   Ejemplo concreto de la clinica: decidimos separar Historia_Clinica de Mascota como clases distintas; la alternativa era guardar diagnosticos y tratamientos como campos dentro de Mascota</a:t>
+              <a:t>–   Cada respuesta en dos frases, sin discursos.</a:t>
             </a:r>
           </a:p>
           <a:p>
@@ -8543,14 +11437,14 @@
                 </a:solidFill>
                 <a:latin typeface="Calibri"/>
               </a:rPr>
-              <a:t>–   El criterio fue que una mascota tiene muchas consultas a lo largo de su vida y una relacion uno a muchos no cabe en campos fijos</a:t>
-            </a:r>
-          </a:p>
-        </p:txBody>
-      </p:sp>
-      <p:sp>
-        <p:nvSpPr>
-          <p:cNvPr id="6" name="TextBox 5"/>
+              <a:t>–   Si no se sabe, no se inventa: se reconoce el vacío y se propone cómo se resolvería.</a:t>
+            </a:r>
+          </a:p>
+        </p:txBody>
+      </p:sp>
+      <p:sp>
+        <p:nvSpPr>
+          <p:cNvPr id="9" name="TextBox 8"/>
           <p:cNvSpPr txBox="1"/>
           <p:nvPr/>
         </p:nvSpPr>
@@ -8724,21 +11618,125 @@
                 </a:solidFill>
                 <a:latin typeface="Calibri"/>
               </a:rPr>
-              <a:t>Defender una decision de diseño tiene una estructura fija que conviene... (2/2)</a:t>
-            </a:r>
-          </a:p>
-        </p:txBody>
-      </p:sp>
-      <p:sp>
-        <p:nvSpPr>
-          <p:cNvPr id="5" name="TextBox 4"/>
+              <a:t>El guion en bloques con tiempos</a:t>
+            </a:r>
+          </a:p>
+        </p:txBody>
+      </p:sp>
+      <p:sp>
+        <p:nvSpPr>
+          <p:cNvPr id="5" name="Rounded Rectangle 4"/>
+          <p:cNvSpPr/>
+          <p:nvPr/>
+        </p:nvSpPr>
+        <p:spPr>
+          <a:xfrm>
+            <a:off x="5797149" y="1879499"/>
+            <a:ext cx="6010497" cy="3446472"/>
+          </a:xfrm>
+          <a:prstGeom prst="roundRect">
+            <a:avLst>
+              <a:gd name="adj" fmla="val 4000"/>
+            </a:avLst>
+          </a:prstGeom>
+          <a:solidFill>
+            <a:srgbClr val="E8EEF4"/>
+          </a:solidFill>
+          <a:ln>
+            <a:noFill/>
+          </a:ln>
+        </p:spPr>
+        <p:style>
+          <a:lnRef idx="1">
+            <a:schemeClr val="accent1"/>
+          </a:lnRef>
+          <a:fillRef idx="3">
+            <a:schemeClr val="accent1"/>
+          </a:fillRef>
+          <a:effectRef idx="2">
+            <a:schemeClr val="accent1"/>
+          </a:effectRef>
+          <a:fontRef idx="minor">
+            <a:schemeClr val="lt1"/>
+          </a:fontRef>
+        </p:style>
+        <p:txBody>
+          <a:bodyPr rtlCol="0" anchor="ctr"/>
+          <a:lstStyle/>
+          <a:p>
+            <a:pPr algn="ctr"/>
+          </a:p>
+        </p:txBody>
+      </p:sp>
+      <p:pic>
+        <p:nvPicPr>
+          <p:cNvPr id="6" name="Picture 5" descr="stopwatch-on-desk.jpg"/>
+          <p:cNvPicPr>
+            <a:picLocks noChangeAspect="1"/>
+          </p:cNvPicPr>
+          <p:nvPr/>
+        </p:nvPicPr>
+        <p:blipFill>
+          <a:blip r:embed="rId2"/>
+          <a:stretch>
+            <a:fillRect/>
+          </a:stretch>
+        </p:blipFill>
+        <p:spPr>
+          <a:xfrm>
+            <a:off x="5870301" y="1952651"/>
+            <a:ext cx="5864193" cy="3300168"/>
+          </a:xfrm>
+          <a:prstGeom prst="rect">
+            <a:avLst/>
+          </a:prstGeom>
+        </p:spPr>
+      </p:pic>
+      <p:sp>
+        <p:nvSpPr>
+          <p:cNvPr id="7" name="TextBox 6"/>
           <p:cNvSpPr txBox="1"/>
           <p:nvPr/>
         </p:nvSpPr>
         <p:spPr>
           <a:xfrm>
-            <a:off x="457200" y="1170432"/>
-            <a:ext cx="11277295" cy="5230368"/>
+            <a:off x="5870301" y="5961888"/>
+            <a:ext cx="5864193" cy="320040"/>
+          </a:xfrm>
+          <a:prstGeom prst="rect">
+            <a:avLst/>
+          </a:prstGeom>
+          <a:noFill/>
+        </p:spPr>
+        <p:txBody>
+          <a:bodyPr wrap="square">
+            <a:spAutoFit/>
+          </a:bodyPr>
+          <a:lstStyle/>
+          <a:p>
+            <a:pPr algn="ctr"/>
+            <a:r>
+              <a:rPr sz="1100" b="0" i="1">
+                <a:solidFill>
+                  <a:srgbClr val="666666"/>
+                </a:solidFill>
+                <a:latin typeface="Calibri"/>
+              </a:rPr>
+              <a:t>Foto: Anton Makarenko · Pexels</a:t>
+            </a:r>
+          </a:p>
+        </p:txBody>
+      </p:sp>
+      <p:sp>
+        <p:nvSpPr>
+          <p:cNvPr id="8" name="TextBox 7"/>
+          <p:cNvSpPr txBox="1"/>
+          <p:nvPr/>
+        </p:nvSpPr>
+        <p:spPr>
+          <a:xfrm>
+            <a:off x="457200" y="1353312"/>
+            <a:ext cx="5093061" cy="5047488"/>
           </a:xfrm>
           <a:prstGeom prst="rect">
             <a:avLst/>
@@ -8763,7 +11761,7 @@
                 </a:solidFill>
                 <a:latin typeface="Calibri"/>
               </a:rPr>
-              <a:t>–   La consecuencia es que hay una entidad mas y una consulta adicional al mostrar la ficha, lo cual se acepta porque el RNF de busqueda menor a tres segundos se sostiene con un indice.</a:t>
+              <a:t>–   Cada bloque con su rango de minutos y su evidencia en pantalla.</a:t>
             </a:r>
           </a:p>
           <a:p>
@@ -8779,7 +11777,7 @@
                 </a:solidFill>
                 <a:latin typeface="Calibri"/>
               </a:rPr>
-              <a:t>–   Otro ejemplo: decidimos que la fecha de nacimiento sea opcional; la alternativa era hacerla obligatoria</a:t>
+              <a:t>–   Problema y alcance → requisitos y trazabilidad → modelos UML → prototipo en vivo → decisiones y riesgos.</a:t>
             </a:r>
           </a:p>
           <a:p>
@@ -8795,14 +11793,30 @@
                 </a:solidFill>
                 <a:latin typeface="Calibri"/>
               </a:rPr>
-              <a:t>–   El criterio fue que en la clinica muchos dueños de mascotas rescatadas no la conocen y un campo obligatorio los llevaria a inventar datos; la consecuencia es que la edad se muestra como aproximada cuando el dato falta.</a:t>
-            </a:r>
-          </a:p>
-        </p:txBody>
-      </p:sp>
-      <p:sp>
-        <p:nvSpPr>
-          <p:cNvPr id="6" name="TextBox 5"/>
+              <a:t>–   Se ensaya cronometrado dos veces, en voz alta: leído en silencio dura la mitad.</a:t>
+            </a:r>
+          </a:p>
+          <a:p>
+            <a:pPr>
+              <a:spcAft>
+                <a:spcPts val="800"/>
+              </a:spcAft>
+            </a:pPr>
+            <a:r>
+              <a:rPr sz="2000" b="0" i="0">
+                <a:solidFill>
+                  <a:srgbClr val="333333"/>
+                </a:solidFill>
+                <a:latin typeface="Calibri"/>
+              </a:rPr>
+              <a:t>–   Plan B: capturas del prototipo, PDF descargado y diagramas en imagen.</a:t>
+            </a:r>
+          </a:p>
+        </p:txBody>
+      </p:sp>
+      <p:sp>
+        <p:nvSpPr>
+          <p:cNvPr id="9" name="TextBox 8"/>
           <p:cNvSpPr txBox="1"/>
           <p:nvPr/>
         </p:nvSpPr>
@@ -8976,21 +11990,238 @@
                 </a:solidFill>
                 <a:latin typeface="Calibri"/>
               </a:rPr>
-              <a:t>Las preguntas del jurado son bastante predecibles y por eso se preparan</a:t>
-            </a:r>
-          </a:p>
-        </p:txBody>
-      </p:sp>
-      <p:sp>
-        <p:nvSpPr>
-          <p:cNvPr id="5" name="TextBox 4"/>
+              <a:t>El guion cronometrado de la sustentacion</a:t>
+            </a:r>
+          </a:p>
+        </p:txBody>
+      </p:sp>
+      <p:sp>
+        <p:nvSpPr>
+          <p:cNvPr id="5" name="Rounded Rectangle 4"/>
+          <p:cNvSpPr/>
+          <p:nvPr/>
+        </p:nvSpPr>
+        <p:spPr>
+          <a:xfrm>
+            <a:off x="457200" y="1261872"/>
+            <a:ext cx="11277295" cy="5069443"/>
+          </a:xfrm>
+          <a:prstGeom prst="roundRect">
+            <a:avLst>
+              <a:gd name="adj" fmla="val 4000"/>
+            </a:avLst>
+          </a:prstGeom>
+          <a:solidFill>
+            <a:srgbClr val="1E1E1E"/>
+          </a:solidFill>
+          <a:ln>
+            <a:noFill/>
+          </a:ln>
+        </p:spPr>
+        <p:style>
+          <a:lnRef idx="1">
+            <a:schemeClr val="accent1"/>
+          </a:lnRef>
+          <a:fillRef idx="3">
+            <a:schemeClr val="accent1"/>
+          </a:fillRef>
+          <a:effectRef idx="2">
+            <a:schemeClr val="accent1"/>
+          </a:effectRef>
+          <a:fontRef idx="minor">
+            <a:schemeClr val="lt1"/>
+          </a:fontRef>
+        </p:style>
+        <p:txBody>
+          <a:bodyPr rtlCol="0" anchor="ctr"/>
+          <a:lstStyle/>
+          <a:p>
+            <a:pPr algn="ctr"/>
+          </a:p>
+        </p:txBody>
+      </p:sp>
+      <p:sp>
+        <p:nvSpPr>
+          <p:cNvPr id="6" name="Rectangle 5"/>
+          <p:cNvSpPr/>
+          <p:nvPr/>
+        </p:nvSpPr>
+        <p:spPr>
+          <a:xfrm>
+            <a:off x="457200" y="1261872"/>
+            <a:ext cx="11277295" cy="365760"/>
+          </a:xfrm>
+          <a:prstGeom prst="rect">
+            <a:avLst/>
+          </a:prstGeom>
+          <a:solidFill>
+            <a:srgbClr val="2D2D30"/>
+          </a:solidFill>
+          <a:ln>
+            <a:noFill/>
+          </a:ln>
+        </p:spPr>
+        <p:style>
+          <a:lnRef idx="1">
+            <a:schemeClr val="accent1"/>
+          </a:lnRef>
+          <a:fillRef idx="3">
+            <a:schemeClr val="accent1"/>
+          </a:fillRef>
+          <a:effectRef idx="2">
+            <a:schemeClr val="accent1"/>
+          </a:effectRef>
+          <a:fontRef idx="minor">
+            <a:schemeClr val="lt1"/>
+          </a:fontRef>
+        </p:style>
+        <p:txBody>
+          <a:bodyPr rtlCol="0" anchor="ctr"/>
+          <a:lstStyle/>
+          <a:p>
+            <a:pPr algn="ctr"/>
+          </a:p>
+        </p:txBody>
+      </p:sp>
+      <p:sp>
+        <p:nvSpPr>
+          <p:cNvPr id="7" name="Oval 6"/>
+          <p:cNvSpPr/>
+          <p:nvPr/>
+        </p:nvSpPr>
+        <p:spPr>
+          <a:xfrm>
+            <a:off x="658368" y="1380743"/>
+            <a:ext cx="128016" cy="128016"/>
+          </a:xfrm>
+          <a:prstGeom prst="ellipse">
+            <a:avLst/>
+          </a:prstGeom>
+          <a:solidFill>
+            <a:srgbClr val="FF5F56"/>
+          </a:solidFill>
+          <a:ln>
+            <a:noFill/>
+          </a:ln>
+        </p:spPr>
+        <p:style>
+          <a:lnRef idx="1">
+            <a:schemeClr val="accent1"/>
+          </a:lnRef>
+          <a:fillRef idx="3">
+            <a:schemeClr val="accent1"/>
+          </a:fillRef>
+          <a:effectRef idx="2">
+            <a:schemeClr val="accent1"/>
+          </a:effectRef>
+          <a:fontRef idx="minor">
+            <a:schemeClr val="lt1"/>
+          </a:fontRef>
+        </p:style>
+        <p:txBody>
+          <a:bodyPr rtlCol="0" anchor="ctr"/>
+          <a:lstStyle/>
+          <a:p>
+            <a:pPr algn="ctr"/>
+          </a:p>
+        </p:txBody>
+      </p:sp>
+      <p:sp>
+        <p:nvSpPr>
+          <p:cNvPr id="8" name="Oval 7"/>
+          <p:cNvSpPr/>
+          <p:nvPr/>
+        </p:nvSpPr>
+        <p:spPr>
+          <a:xfrm>
+            <a:off x="877824" y="1380743"/>
+            <a:ext cx="128016" cy="128016"/>
+          </a:xfrm>
+          <a:prstGeom prst="ellipse">
+            <a:avLst/>
+          </a:prstGeom>
+          <a:solidFill>
+            <a:srgbClr val="FFBD2E"/>
+          </a:solidFill>
+          <a:ln>
+            <a:noFill/>
+          </a:ln>
+        </p:spPr>
+        <p:style>
+          <a:lnRef idx="1">
+            <a:schemeClr val="accent1"/>
+          </a:lnRef>
+          <a:fillRef idx="3">
+            <a:schemeClr val="accent1"/>
+          </a:fillRef>
+          <a:effectRef idx="2">
+            <a:schemeClr val="accent1"/>
+          </a:effectRef>
+          <a:fontRef idx="minor">
+            <a:schemeClr val="lt1"/>
+          </a:fontRef>
+        </p:style>
+        <p:txBody>
+          <a:bodyPr rtlCol="0" anchor="ctr"/>
+          <a:lstStyle/>
+          <a:p>
+            <a:pPr algn="ctr"/>
+          </a:p>
+        </p:txBody>
+      </p:sp>
+      <p:sp>
+        <p:nvSpPr>
+          <p:cNvPr id="9" name="Oval 8"/>
+          <p:cNvSpPr/>
+          <p:nvPr/>
+        </p:nvSpPr>
+        <p:spPr>
+          <a:xfrm>
+            <a:off x="1097280" y="1380743"/>
+            <a:ext cx="128016" cy="128016"/>
+          </a:xfrm>
+          <a:prstGeom prst="ellipse">
+            <a:avLst/>
+          </a:prstGeom>
+          <a:solidFill>
+            <a:srgbClr val="27C93F"/>
+          </a:solidFill>
+          <a:ln>
+            <a:noFill/>
+          </a:ln>
+        </p:spPr>
+        <p:style>
+          <a:lnRef idx="1">
+            <a:schemeClr val="accent1"/>
+          </a:lnRef>
+          <a:fillRef idx="3">
+            <a:schemeClr val="accent1"/>
+          </a:fillRef>
+          <a:effectRef idx="2">
+            <a:schemeClr val="accent1"/>
+          </a:effectRef>
+          <a:fontRef idx="minor">
+            <a:schemeClr val="lt1"/>
+          </a:fontRef>
+        </p:style>
+        <p:txBody>
+          <a:bodyPr rtlCol="0" anchor="ctr"/>
+          <a:lstStyle/>
+          <a:p>
+            <a:pPr algn="ctr"/>
+          </a:p>
+        </p:txBody>
+      </p:sp>
+      <p:sp>
+        <p:nvSpPr>
+          <p:cNvPr id="10" name="TextBox 9"/>
           <p:cNvSpPr txBox="1"/>
           <p:nvPr/>
         </p:nvSpPr>
         <p:spPr>
           <a:xfrm>
-            <a:off x="457200" y="1170432"/>
-            <a:ext cx="11277295" cy="5230368"/>
+            <a:off x="1371600" y="1298448"/>
+            <a:ext cx="10180015" cy="292608"/>
           </a:xfrm>
           <a:prstGeom prst="rect">
             <a:avLst/>
@@ -8998,95 +12229,1438 @@
           <a:noFill/>
         </p:spPr>
         <p:txBody>
+          <a:bodyPr wrap="square" anchor="ctr"/>
+          <a:lstStyle/>
+          <a:p>
+            <a:pPr algn="r"/>
+            <a:r>
+              <a:rPr sz="1100" b="1" i="0">
+                <a:solidFill>
+                  <a:srgbClr val="BBBBBB"/>
+                </a:solidFill>
+                <a:latin typeface="Calibri"/>
+              </a:rPr>
+              <a:t>Mermaid</a:t>
+            </a:r>
+          </a:p>
+        </p:txBody>
+      </p:sp>
+      <p:sp>
+        <p:nvSpPr>
+          <p:cNvPr id="11" name="TextBox 10"/>
+          <p:cNvSpPr txBox="1"/>
+          <p:nvPr/>
+        </p:nvSpPr>
+        <p:spPr>
+          <a:xfrm>
+            <a:off x="685800" y="1719072"/>
+            <a:ext cx="502920" cy="4475083"/>
+          </a:xfrm>
+          <a:prstGeom prst="rect">
+            <a:avLst/>
+          </a:prstGeom>
+          <a:noFill/>
+        </p:spPr>
+        <p:txBody>
           <a:bodyPr wrap="square">
             <a:spAutoFit/>
           </a:bodyPr>
           <a:lstStyle/>
           <a:p>
+            <a:pPr algn="r">
+              <a:spcAft>
+                <a:spcPts val="321"/>
+              </a:spcAft>
+            </a:pPr>
+            <a:r>
+              <a:rPr sz="1500" i="0" b="0">
+                <a:solidFill>
+                  <a:srgbClr val="858585"/>
+                </a:solidFill>
+                <a:latin typeface="Consolas"/>
+              </a:rPr>
+              <a:t>1</a:t>
+            </a:r>
+          </a:p>
+          <a:p>
+            <a:pPr algn="r">
+              <a:spcAft>
+                <a:spcPts val="321"/>
+              </a:spcAft>
+            </a:pPr>
+            <a:r>
+              <a:rPr sz="1500" i="0" b="0">
+                <a:solidFill>
+                  <a:srgbClr val="858585"/>
+                </a:solidFill>
+                <a:latin typeface="Consolas"/>
+              </a:rPr>
+              <a:t>2</a:t>
+            </a:r>
+          </a:p>
+          <a:p>
+            <a:pPr algn="r">
+              <a:spcAft>
+                <a:spcPts val="321"/>
+              </a:spcAft>
+            </a:pPr>
+            <a:r>
+              <a:rPr sz="1500" i="0" b="0">
+                <a:solidFill>
+                  <a:srgbClr val="858585"/>
+                </a:solidFill>
+                <a:latin typeface="Consolas"/>
+              </a:rPr>
+              <a:t>3</a:t>
+            </a:r>
+          </a:p>
+          <a:p>
+            <a:pPr algn="r">
+              <a:spcAft>
+                <a:spcPts val="321"/>
+              </a:spcAft>
+            </a:pPr>
+            <a:r>
+              <a:rPr sz="1500" i="0" b="0">
+                <a:solidFill>
+                  <a:srgbClr val="858585"/>
+                </a:solidFill>
+                <a:latin typeface="Consolas"/>
+              </a:rPr>
+              <a:t>4</a:t>
+            </a:r>
+          </a:p>
+          <a:p>
+            <a:pPr algn="r">
+              <a:spcAft>
+                <a:spcPts val="321"/>
+              </a:spcAft>
+            </a:pPr>
+            <a:r>
+              <a:rPr sz="1500" i="0" b="0">
+                <a:solidFill>
+                  <a:srgbClr val="858585"/>
+                </a:solidFill>
+                <a:latin typeface="Consolas"/>
+              </a:rPr>
+              <a:t>5</a:t>
+            </a:r>
+          </a:p>
+          <a:p>
+            <a:pPr algn="r">
+              <a:spcAft>
+                <a:spcPts val="321"/>
+              </a:spcAft>
+            </a:pPr>
+            <a:r>
+              <a:rPr sz="1500" i="0" b="0">
+                <a:solidFill>
+                  <a:srgbClr val="858585"/>
+                </a:solidFill>
+                <a:latin typeface="Consolas"/>
+              </a:rPr>
+              <a:t>6</a:t>
+            </a:r>
+          </a:p>
+          <a:p>
+            <a:pPr algn="r">
+              <a:spcAft>
+                <a:spcPts val="321"/>
+              </a:spcAft>
+            </a:pPr>
+            <a:r>
+              <a:rPr sz="1500" i="0" b="0">
+                <a:solidFill>
+                  <a:srgbClr val="858585"/>
+                </a:solidFill>
+                <a:latin typeface="Consolas"/>
+              </a:rPr>
+              <a:t>7</a:t>
+            </a:r>
+          </a:p>
+          <a:p>
+            <a:pPr algn="r">
+              <a:spcAft>
+                <a:spcPts val="321"/>
+              </a:spcAft>
+            </a:pPr>
+            <a:r>
+              <a:rPr sz="1500" i="0" b="0">
+                <a:solidFill>
+                  <a:srgbClr val="858585"/>
+                </a:solidFill>
+                <a:latin typeface="Consolas"/>
+              </a:rPr>
+              <a:t>8</a:t>
+            </a:r>
+          </a:p>
+          <a:p>
+            <a:pPr algn="r">
+              <a:spcAft>
+                <a:spcPts val="321"/>
+              </a:spcAft>
+            </a:pPr>
+            <a:r>
+              <a:rPr sz="1500" i="0" b="0">
+                <a:solidFill>
+                  <a:srgbClr val="858585"/>
+                </a:solidFill>
+                <a:latin typeface="Consolas"/>
+              </a:rPr>
+              <a:t>9</a:t>
+            </a:r>
+          </a:p>
+          <a:p>
+            <a:pPr algn="r">
+              <a:spcAft>
+                <a:spcPts val="321"/>
+              </a:spcAft>
+            </a:pPr>
+            <a:r>
+              <a:rPr sz="1500" i="0" b="0">
+                <a:solidFill>
+                  <a:srgbClr val="858585"/>
+                </a:solidFill>
+                <a:latin typeface="Consolas"/>
+              </a:rPr>
+              <a:t>10</a:t>
+            </a:r>
+          </a:p>
+          <a:p>
+            <a:pPr algn="r">
+              <a:spcAft>
+                <a:spcPts val="321"/>
+              </a:spcAft>
+            </a:pPr>
+            <a:r>
+              <a:rPr sz="1500" i="0" b="0">
+                <a:solidFill>
+                  <a:srgbClr val="858585"/>
+                </a:solidFill>
+                <a:latin typeface="Consolas"/>
+              </a:rPr>
+              <a:t>11</a:t>
+            </a:r>
+          </a:p>
+          <a:p>
+            <a:pPr algn="r">
+              <a:spcAft>
+                <a:spcPts val="321"/>
+              </a:spcAft>
+            </a:pPr>
+            <a:r>
+              <a:rPr sz="1500" i="0" b="0">
+                <a:solidFill>
+                  <a:srgbClr val="858585"/>
+                </a:solidFill>
+                <a:latin typeface="Consolas"/>
+              </a:rPr>
+              <a:t>12</a:t>
+            </a:r>
+          </a:p>
+          <a:p>
+            <a:pPr algn="r">
+              <a:spcAft>
+                <a:spcPts val="321"/>
+              </a:spcAft>
+            </a:pPr>
+            <a:r>
+              <a:rPr sz="1500" i="0" b="0">
+                <a:solidFill>
+                  <a:srgbClr val="858585"/>
+                </a:solidFill>
+                <a:latin typeface="Consolas"/>
+              </a:rPr>
+              <a:t>13</a:t>
+            </a:r>
+          </a:p>
+          <a:p>
+            <a:pPr algn="r">
+              <a:spcAft>
+                <a:spcPts val="321"/>
+              </a:spcAft>
+            </a:pPr>
+            <a:r>
+              <a:rPr sz="1500" i="0" b="0">
+                <a:solidFill>
+                  <a:srgbClr val="858585"/>
+                </a:solidFill>
+                <a:latin typeface="Consolas"/>
+              </a:rPr>
+              <a:t>14</a:t>
+            </a:r>
+          </a:p>
+          <a:p>
+            <a:pPr algn="r">
+              <a:spcAft>
+                <a:spcPts val="321"/>
+              </a:spcAft>
+            </a:pPr>
+            <a:r>
+              <a:rPr sz="1500" i="0" b="0">
+                <a:solidFill>
+                  <a:srgbClr val="858585"/>
+                </a:solidFill>
+                <a:latin typeface="Consolas"/>
+              </a:rPr>
+              <a:t>15</a:t>
+            </a:r>
+          </a:p>
+          <a:p>
+            <a:pPr algn="r">
+              <a:spcAft>
+                <a:spcPts val="321"/>
+              </a:spcAft>
+            </a:pPr>
+            <a:r>
+              <a:rPr sz="1500" i="0" b="0">
+                <a:solidFill>
+                  <a:srgbClr val="858585"/>
+                </a:solidFill>
+                <a:latin typeface="Consolas"/>
+              </a:rPr>
+              <a:t>16</a:t>
+            </a:r>
+          </a:p>
+        </p:txBody>
+      </p:sp>
+      <p:sp>
+        <p:nvSpPr>
+          <p:cNvPr id="12" name="TextBox 11"/>
+          <p:cNvSpPr txBox="1"/>
+          <p:nvPr/>
+        </p:nvSpPr>
+        <p:spPr>
+          <a:xfrm>
+            <a:off x="1188720" y="1719072"/>
+            <a:ext cx="10271455" cy="4475083"/>
+          </a:xfrm>
+          <a:prstGeom prst="rect">
+            <a:avLst/>
+          </a:prstGeom>
+          <a:noFill/>
+        </p:spPr>
+        <p:txBody>
+          <a:bodyPr wrap="square">
+            <a:spAutoFit/>
+          </a:bodyPr>
+          <a:lstStyle/>
+          <a:p>
             <a:pPr>
               <a:spcAft>
-                <a:spcPts val="800"/>
+                <a:spcPts val="321"/>
               </a:spcAft>
             </a:pPr>
             <a:r>
-              <a:rPr sz="2000" b="0" i="0">
-                <a:solidFill>
-                  <a:srgbClr val="333333"/>
-                </a:solidFill>
-                <a:latin typeface="Calibri"/>
-              </a:rPr>
-              <a:t>–   Las preguntas del jurado son bastante predecibles y por eso se preparan.</a:t>
+              <a:rPr sz="1500" i="0" b="0">
+                <a:solidFill>
+                  <a:srgbClr val="D4D4D4"/>
+                </a:solidFill>
+                <a:latin typeface="Consolas"/>
+              </a:rPr>
+              <a:t>gantt</a:t>
             </a:r>
           </a:p>
           <a:p>
             <a:pPr>
               <a:spcAft>
-                <a:spcPts val="800"/>
+                <a:spcPts val="321"/>
               </a:spcAft>
             </a:pPr>
             <a:r>
-              <a:rPr sz="2000" b="0" i="0">
-                <a:solidFill>
-                  <a:srgbClr val="333333"/>
-                </a:solidFill>
-                <a:latin typeface="Calibri"/>
-              </a:rPr>
-              <a:t>–   Las mas frecuentes en un proyecto como el de la clinica son: como sabe usted que este requisito es realmente necesario; que pasa si dos recepcionistas registran la misma mascota al mismo tiempo; por que esta clase existe y no es un atributo de otra</a:t>
+              <a:rPr sz="1500" i="0" b="0">
+                <a:solidFill>
+                  <a:srgbClr val="D4D4D4"/>
+                </a:solidFill>
+                <a:latin typeface="Consolas"/>
+              </a:rPr>
+              <a:t>  </a:t>
+            </a:r>
+            <a:r>
+              <a:rPr sz="1500" i="0" b="0">
+                <a:solidFill>
+                  <a:srgbClr val="D4D4D4"/>
+                </a:solidFill>
+                <a:latin typeface="Consolas"/>
+              </a:rPr>
+              <a:t>title</a:t>
+            </a:r>
+            <a:r>
+              <a:rPr sz="1500" i="0" b="0">
+                <a:solidFill>
+                  <a:srgbClr val="D4D4D4"/>
+                </a:solidFill>
+                <a:latin typeface="Consolas"/>
+              </a:rPr>
+              <a:t> </a:t>
+            </a:r>
+            <a:r>
+              <a:rPr sz="1500" i="0" b="0">
+                <a:solidFill>
+                  <a:srgbClr val="D4D4D4"/>
+                </a:solidFill>
+                <a:latin typeface="Consolas"/>
+              </a:rPr>
+              <a:t>Sustentacion</a:t>
+            </a:r>
+            <a:r>
+              <a:rPr sz="1500" i="0" b="0">
+                <a:solidFill>
+                  <a:srgbClr val="D4D4D4"/>
+                </a:solidFill>
+                <a:latin typeface="Consolas"/>
+              </a:rPr>
+              <a:t> - </a:t>
+            </a:r>
+            <a:r>
+              <a:rPr sz="1500" i="0" b="0">
+                <a:solidFill>
+                  <a:srgbClr val="B5CEA8"/>
+                </a:solidFill>
+                <a:latin typeface="Consolas"/>
+              </a:rPr>
+              <a:t>12</a:t>
+            </a:r>
+            <a:r>
+              <a:rPr sz="1500" i="0" b="0">
+                <a:solidFill>
+                  <a:srgbClr val="D4D4D4"/>
+                </a:solidFill>
+                <a:latin typeface="Consolas"/>
+              </a:rPr>
+              <a:t> </a:t>
+            </a:r>
+            <a:r>
+              <a:rPr sz="1500" i="0" b="0">
+                <a:solidFill>
+                  <a:srgbClr val="D4D4D4"/>
+                </a:solidFill>
+                <a:latin typeface="Consolas"/>
+              </a:rPr>
+              <a:t>minutos</a:t>
             </a:r>
           </a:p>
           <a:p>
             <a:pPr>
               <a:spcAft>
-                <a:spcPts val="800"/>
+                <a:spcPts val="321"/>
               </a:spcAft>
             </a:pPr>
             <a:r>
-              <a:rPr sz="2000" b="0" i="0">
-                <a:solidFill>
-                  <a:srgbClr val="333333"/>
-                </a:solidFill>
-                <a:latin typeface="Calibri"/>
-              </a:rPr>
-              <a:t>–   Como se cumple el requisito no funcional que usted escribio y como se mediria; que pasa si el sistema se cae a mitad de un registro; que dejaron por fuera del alcance y por que; y quien de ustedes hizo esta parte.</a:t>
+              <a:rPr sz="1500" i="0" b="0">
+                <a:solidFill>
+                  <a:srgbClr val="D4D4D4"/>
+                </a:solidFill>
+                <a:latin typeface="Consolas"/>
+              </a:rPr>
+              <a:t>  </a:t>
+            </a:r>
+            <a:r>
+              <a:rPr sz="1500" i="0" b="0">
+                <a:solidFill>
+                  <a:srgbClr val="D4D4D4"/>
+                </a:solidFill>
+                <a:latin typeface="Consolas"/>
+              </a:rPr>
+              <a:t>dateFormat</a:t>
+            </a:r>
+            <a:r>
+              <a:rPr sz="1500" i="0" b="0">
+                <a:solidFill>
+                  <a:srgbClr val="D4D4D4"/>
+                </a:solidFill>
+                <a:latin typeface="Consolas"/>
+              </a:rPr>
+              <a:t> </a:t>
+            </a:r>
+            <a:r>
+              <a:rPr sz="1500" i="0" b="0">
+                <a:solidFill>
+                  <a:srgbClr val="D4D4D4"/>
+                </a:solidFill>
+                <a:latin typeface="Consolas"/>
+              </a:rPr>
+              <a:t>mm</a:t>
+            </a:r>
+            <a:r>
+              <a:rPr sz="1500" i="0" b="0">
+                <a:solidFill>
+                  <a:srgbClr val="D4D4D4"/>
+                </a:solidFill>
+                <a:latin typeface="Consolas"/>
+              </a:rPr>
+              <a:t>:</a:t>
+            </a:r>
+            <a:r>
+              <a:rPr sz="1500" i="0" b="0">
+                <a:solidFill>
+                  <a:srgbClr val="D4D4D4"/>
+                </a:solidFill>
+                <a:latin typeface="Consolas"/>
+              </a:rPr>
+              <a:t>ss</a:t>
             </a:r>
           </a:p>
           <a:p>
             <a:pPr>
               <a:spcAft>
-                <a:spcPts val="800"/>
+                <a:spcPts val="321"/>
               </a:spcAft>
             </a:pPr>
             <a:r>
-              <a:rPr sz="2000" b="0" i="0">
-                <a:solidFill>
-                  <a:srgbClr val="333333"/>
-                </a:solidFill>
-                <a:latin typeface="Calibri"/>
-              </a:rPr>
-              <a:t>–   Hay que preparar la respuesta de cada una en dos frases, sin discursos.</a:t>
+              <a:rPr sz="1500" i="0" b="0">
+                <a:solidFill>
+                  <a:srgbClr val="D4D4D4"/>
+                </a:solidFill>
+                <a:latin typeface="Consolas"/>
+              </a:rPr>
+              <a:t>  </a:t>
+            </a:r>
+            <a:r>
+              <a:rPr sz="1500" i="0" b="0">
+                <a:solidFill>
+                  <a:srgbClr val="D4D4D4"/>
+                </a:solidFill>
+                <a:latin typeface="Consolas"/>
+              </a:rPr>
+              <a:t>axisFormat</a:t>
+            </a:r>
+            <a:r>
+              <a:rPr sz="1500" i="0" b="0">
+                <a:solidFill>
+                  <a:srgbClr val="D4D4D4"/>
+                </a:solidFill>
+                <a:latin typeface="Consolas"/>
+              </a:rPr>
+              <a:t> %</a:t>
+            </a:r>
+            <a:r>
+              <a:rPr sz="1500" i="0" b="0">
+                <a:solidFill>
+                  <a:srgbClr val="D4D4D4"/>
+                </a:solidFill>
+                <a:latin typeface="Consolas"/>
+              </a:rPr>
+              <a:t>M</a:t>
+            </a:r>
+            <a:r>
+              <a:rPr sz="1500" i="0" b="0">
+                <a:solidFill>
+                  <a:srgbClr val="D4D4D4"/>
+                </a:solidFill>
+                <a:latin typeface="Consolas"/>
+              </a:rPr>
+              <a:t>:%</a:t>
+            </a:r>
+            <a:r>
+              <a:rPr sz="1500" i="0" b="0">
+                <a:solidFill>
+                  <a:srgbClr val="D4D4D4"/>
+                </a:solidFill>
+                <a:latin typeface="Consolas"/>
+              </a:rPr>
+              <a:t>S</a:t>
             </a:r>
           </a:p>
           <a:p>
             <a:pPr>
               <a:spcAft>
-                <a:spcPts val="800"/>
+                <a:spcPts val="321"/>
               </a:spcAft>
             </a:pPr>
             <a:r>
-              <a:rPr sz="2000" b="0" i="0">
-                <a:solidFill>
-                  <a:srgbClr val="333333"/>
-                </a:solidFill>
-                <a:latin typeface="Calibri"/>
-              </a:rPr>
-              <a:t>–   Y hay una regla de oro para cuando no se sabe: no se inventa.</a:t>
-            </a:r>
-          </a:p>
-        </p:txBody>
-      </p:sp>
-      <p:sp>
-        <p:nvSpPr>
-          <p:cNvPr id="6" name="TextBox 5"/>
+              <a:rPr sz="1500" i="0" b="0">
+                <a:solidFill>
+                  <a:srgbClr val="D4D4D4"/>
+                </a:solidFill>
+                <a:latin typeface="Consolas"/>
+              </a:rPr>
+              <a:t/>
+            </a:r>
+          </a:p>
+          <a:p>
+            <a:pPr>
+              <a:spcAft>
+                <a:spcPts val="321"/>
+              </a:spcAft>
+            </a:pPr>
+            <a:r>
+              <a:rPr sz="1500" i="0" b="0">
+                <a:solidFill>
+                  <a:srgbClr val="D4D4D4"/>
+                </a:solidFill>
+                <a:latin typeface="Consolas"/>
+              </a:rPr>
+              <a:t>  </a:t>
+            </a:r>
+            <a:r>
+              <a:rPr sz="1500" i="0" b="0">
+                <a:solidFill>
+                  <a:srgbClr val="D4D4D4"/>
+                </a:solidFill>
+                <a:latin typeface="Consolas"/>
+              </a:rPr>
+              <a:t>section</a:t>
+            </a:r>
+            <a:r>
+              <a:rPr sz="1500" i="0" b="0">
+                <a:solidFill>
+                  <a:srgbClr val="D4D4D4"/>
+                </a:solidFill>
+                <a:latin typeface="Consolas"/>
+              </a:rPr>
+              <a:t> </a:t>
+            </a:r>
+            <a:r>
+              <a:rPr sz="1500" i="0" b="0">
+                <a:solidFill>
+                  <a:srgbClr val="D4D4D4"/>
+                </a:solidFill>
+                <a:latin typeface="Consolas"/>
+              </a:rPr>
+              <a:t>Guion</a:t>
+            </a:r>
+          </a:p>
+          <a:p>
+            <a:pPr>
+              <a:spcAft>
+                <a:spcPts val="321"/>
+              </a:spcAft>
+            </a:pPr>
+            <a:r>
+              <a:rPr sz="1500" i="0" b="0">
+                <a:solidFill>
+                  <a:srgbClr val="D4D4D4"/>
+                </a:solidFill>
+                <a:latin typeface="Consolas"/>
+              </a:rPr>
+              <a:t>  </a:t>
+            </a:r>
+            <a:r>
+              <a:rPr sz="1500" i="0" b="0">
+                <a:solidFill>
+                  <a:srgbClr val="D4D4D4"/>
+                </a:solidFill>
+                <a:latin typeface="Consolas"/>
+              </a:rPr>
+              <a:t>Problema</a:t>
+            </a:r>
+            <a:r>
+              <a:rPr sz="1500" i="0" b="0">
+                <a:solidFill>
+                  <a:srgbClr val="D4D4D4"/>
+                </a:solidFill>
+                <a:latin typeface="Consolas"/>
+              </a:rPr>
+              <a:t>               :</a:t>
+            </a:r>
+            <a:r>
+              <a:rPr sz="1500" i="0" b="0">
+                <a:solidFill>
+                  <a:srgbClr val="D4D4D4"/>
+                </a:solidFill>
+                <a:latin typeface="Consolas"/>
+              </a:rPr>
+              <a:t>g1</a:t>
+            </a:r>
+            <a:r>
+              <a:rPr sz="1500" i="0" b="0">
+                <a:solidFill>
+                  <a:srgbClr val="D4D4D4"/>
+                </a:solidFill>
+                <a:latin typeface="Consolas"/>
+              </a:rPr>
+              <a:t>, </a:t>
+            </a:r>
+            <a:r>
+              <a:rPr sz="1500" i="0" b="0">
+                <a:solidFill>
+                  <a:srgbClr val="B5CEA8"/>
+                </a:solidFill>
+                <a:latin typeface="Consolas"/>
+              </a:rPr>
+              <a:t>00</a:t>
+            </a:r>
+            <a:r>
+              <a:rPr sz="1500" i="0" b="0">
+                <a:solidFill>
+                  <a:srgbClr val="D4D4D4"/>
+                </a:solidFill>
+                <a:latin typeface="Consolas"/>
+              </a:rPr>
+              <a:t>:</a:t>
+            </a:r>
+            <a:r>
+              <a:rPr sz="1500" i="0" b="0">
+                <a:solidFill>
+                  <a:srgbClr val="B5CEA8"/>
+                </a:solidFill>
+                <a:latin typeface="Consolas"/>
+              </a:rPr>
+              <a:t>00</a:t>
+            </a:r>
+            <a:r>
+              <a:rPr sz="1500" i="0" b="0">
+                <a:solidFill>
+                  <a:srgbClr val="D4D4D4"/>
+                </a:solidFill>
+                <a:latin typeface="Consolas"/>
+              </a:rPr>
+              <a:t>, 90</a:t>
+            </a:r>
+            <a:r>
+              <a:rPr sz="1500" i="0" b="0">
+                <a:solidFill>
+                  <a:srgbClr val="D4D4D4"/>
+                </a:solidFill>
+                <a:latin typeface="Consolas"/>
+              </a:rPr>
+              <a:t>s</a:t>
+            </a:r>
+          </a:p>
+          <a:p>
+            <a:pPr>
+              <a:spcAft>
+                <a:spcPts val="321"/>
+              </a:spcAft>
+            </a:pPr>
+            <a:r>
+              <a:rPr sz="1500" i="0" b="0">
+                <a:solidFill>
+                  <a:srgbClr val="D4D4D4"/>
+                </a:solidFill>
+                <a:latin typeface="Consolas"/>
+              </a:rPr>
+              <a:t>  </a:t>
+            </a:r>
+            <a:r>
+              <a:rPr sz="1500" i="0" b="0">
+                <a:solidFill>
+                  <a:srgbClr val="D4D4D4"/>
+                </a:solidFill>
+                <a:latin typeface="Consolas"/>
+              </a:rPr>
+              <a:t>Alcance</a:t>
+            </a:r>
+            <a:r>
+              <a:rPr sz="1500" i="0" b="0">
+                <a:solidFill>
+                  <a:srgbClr val="D4D4D4"/>
+                </a:solidFill>
+                <a:latin typeface="Consolas"/>
+              </a:rPr>
+              <a:t>                :</a:t>
+            </a:r>
+            <a:r>
+              <a:rPr sz="1500" i="0" b="0">
+                <a:solidFill>
+                  <a:srgbClr val="D4D4D4"/>
+                </a:solidFill>
+                <a:latin typeface="Consolas"/>
+              </a:rPr>
+              <a:t>g2</a:t>
+            </a:r>
+            <a:r>
+              <a:rPr sz="1500" i="0" b="0">
+                <a:solidFill>
+                  <a:srgbClr val="D4D4D4"/>
+                </a:solidFill>
+                <a:latin typeface="Consolas"/>
+              </a:rPr>
+              <a:t>, </a:t>
+            </a:r>
+            <a:r>
+              <a:rPr sz="1500" i="0" b="0">
+                <a:solidFill>
+                  <a:srgbClr val="D4D4D4"/>
+                </a:solidFill>
+                <a:latin typeface="Consolas"/>
+              </a:rPr>
+              <a:t>after</a:t>
+            </a:r>
+            <a:r>
+              <a:rPr sz="1500" i="0" b="0">
+                <a:solidFill>
+                  <a:srgbClr val="D4D4D4"/>
+                </a:solidFill>
+                <a:latin typeface="Consolas"/>
+              </a:rPr>
+              <a:t> </a:t>
+            </a:r>
+            <a:r>
+              <a:rPr sz="1500" i="0" b="0">
+                <a:solidFill>
+                  <a:srgbClr val="D4D4D4"/>
+                </a:solidFill>
+                <a:latin typeface="Consolas"/>
+              </a:rPr>
+              <a:t>g1</a:t>
+            </a:r>
+            <a:r>
+              <a:rPr sz="1500" i="0" b="0">
+                <a:solidFill>
+                  <a:srgbClr val="D4D4D4"/>
+                </a:solidFill>
+                <a:latin typeface="Consolas"/>
+              </a:rPr>
+              <a:t>, 90</a:t>
+            </a:r>
+            <a:r>
+              <a:rPr sz="1500" i="0" b="0">
+                <a:solidFill>
+                  <a:srgbClr val="D4D4D4"/>
+                </a:solidFill>
+                <a:latin typeface="Consolas"/>
+              </a:rPr>
+              <a:t>s</a:t>
+            </a:r>
+          </a:p>
+          <a:p>
+            <a:pPr>
+              <a:spcAft>
+                <a:spcPts val="321"/>
+              </a:spcAft>
+            </a:pPr>
+            <a:r>
+              <a:rPr sz="1500" i="0" b="0">
+                <a:solidFill>
+                  <a:srgbClr val="D4D4D4"/>
+                </a:solidFill>
+                <a:latin typeface="Consolas"/>
+              </a:rPr>
+              <a:t>  </a:t>
+            </a:r>
+            <a:r>
+              <a:rPr sz="1500" i="0" b="0">
+                <a:solidFill>
+                  <a:srgbClr val="D4D4D4"/>
+                </a:solidFill>
+                <a:latin typeface="Consolas"/>
+              </a:rPr>
+              <a:t>Requisitos</a:t>
+            </a:r>
+            <a:r>
+              <a:rPr sz="1500" i="0" b="0">
+                <a:solidFill>
+                  <a:srgbClr val="D4D4D4"/>
+                </a:solidFill>
+                <a:latin typeface="Consolas"/>
+              </a:rPr>
+              <a:t>             :</a:t>
+            </a:r>
+            <a:r>
+              <a:rPr sz="1500" i="0" b="0">
+                <a:solidFill>
+                  <a:srgbClr val="D4D4D4"/>
+                </a:solidFill>
+                <a:latin typeface="Consolas"/>
+              </a:rPr>
+              <a:t>g3</a:t>
+            </a:r>
+            <a:r>
+              <a:rPr sz="1500" i="0" b="0">
+                <a:solidFill>
+                  <a:srgbClr val="D4D4D4"/>
+                </a:solidFill>
+                <a:latin typeface="Consolas"/>
+              </a:rPr>
+              <a:t>, </a:t>
+            </a:r>
+            <a:r>
+              <a:rPr sz="1500" i="0" b="0">
+                <a:solidFill>
+                  <a:srgbClr val="D4D4D4"/>
+                </a:solidFill>
+                <a:latin typeface="Consolas"/>
+              </a:rPr>
+              <a:t>after</a:t>
+            </a:r>
+            <a:r>
+              <a:rPr sz="1500" i="0" b="0">
+                <a:solidFill>
+                  <a:srgbClr val="D4D4D4"/>
+                </a:solidFill>
+                <a:latin typeface="Consolas"/>
+              </a:rPr>
+              <a:t> </a:t>
+            </a:r>
+            <a:r>
+              <a:rPr sz="1500" i="0" b="0">
+                <a:solidFill>
+                  <a:srgbClr val="D4D4D4"/>
+                </a:solidFill>
+                <a:latin typeface="Consolas"/>
+              </a:rPr>
+              <a:t>g2</a:t>
+            </a:r>
+            <a:r>
+              <a:rPr sz="1500" i="0" b="0">
+                <a:solidFill>
+                  <a:srgbClr val="D4D4D4"/>
+                </a:solidFill>
+                <a:latin typeface="Consolas"/>
+              </a:rPr>
+              <a:t>, 2</a:t>
+            </a:r>
+            <a:r>
+              <a:rPr sz="1500" i="0" b="0">
+                <a:solidFill>
+                  <a:srgbClr val="D4D4D4"/>
+                </a:solidFill>
+                <a:latin typeface="Consolas"/>
+              </a:rPr>
+              <a:t>m</a:t>
+            </a:r>
+          </a:p>
+          <a:p>
+            <a:pPr>
+              <a:spcAft>
+                <a:spcPts val="321"/>
+              </a:spcAft>
+            </a:pPr>
+            <a:r>
+              <a:rPr sz="1500" i="0" b="0">
+                <a:solidFill>
+                  <a:srgbClr val="D4D4D4"/>
+                </a:solidFill>
+                <a:latin typeface="Consolas"/>
+              </a:rPr>
+              <a:t>  </a:t>
+            </a:r>
+            <a:r>
+              <a:rPr sz="1500" i="0" b="0">
+                <a:solidFill>
+                  <a:srgbClr val="D4D4D4"/>
+                </a:solidFill>
+                <a:latin typeface="Consolas"/>
+              </a:rPr>
+              <a:t>Modelo</a:t>
+            </a:r>
+            <a:r>
+              <a:rPr sz="1500" i="0" b="0">
+                <a:solidFill>
+                  <a:srgbClr val="D4D4D4"/>
+                </a:solidFill>
+                <a:latin typeface="Consolas"/>
+              </a:rPr>
+              <a:t> </a:t>
+            </a:r>
+            <a:r>
+              <a:rPr sz="1500" i="0" b="0">
+                <a:solidFill>
+                  <a:srgbClr val="D4D4D4"/>
+                </a:solidFill>
+                <a:latin typeface="Consolas"/>
+              </a:rPr>
+              <a:t>UML</a:t>
+            </a:r>
+            <a:r>
+              <a:rPr sz="1500" i="0" b="0">
+                <a:solidFill>
+                  <a:srgbClr val="D4D4D4"/>
+                </a:solidFill>
+                <a:latin typeface="Consolas"/>
+              </a:rPr>
+              <a:t>             :</a:t>
+            </a:r>
+            <a:r>
+              <a:rPr sz="1500" i="0" b="0">
+                <a:solidFill>
+                  <a:srgbClr val="D4D4D4"/>
+                </a:solidFill>
+                <a:latin typeface="Consolas"/>
+              </a:rPr>
+              <a:t>g4</a:t>
+            </a:r>
+            <a:r>
+              <a:rPr sz="1500" i="0" b="0">
+                <a:solidFill>
+                  <a:srgbClr val="D4D4D4"/>
+                </a:solidFill>
+                <a:latin typeface="Consolas"/>
+              </a:rPr>
+              <a:t>, </a:t>
+            </a:r>
+            <a:r>
+              <a:rPr sz="1500" i="0" b="0">
+                <a:solidFill>
+                  <a:srgbClr val="D4D4D4"/>
+                </a:solidFill>
+                <a:latin typeface="Consolas"/>
+              </a:rPr>
+              <a:t>after</a:t>
+            </a:r>
+            <a:r>
+              <a:rPr sz="1500" i="0" b="0">
+                <a:solidFill>
+                  <a:srgbClr val="D4D4D4"/>
+                </a:solidFill>
+                <a:latin typeface="Consolas"/>
+              </a:rPr>
+              <a:t> </a:t>
+            </a:r>
+            <a:r>
+              <a:rPr sz="1500" i="0" b="0">
+                <a:solidFill>
+                  <a:srgbClr val="D4D4D4"/>
+                </a:solidFill>
+                <a:latin typeface="Consolas"/>
+              </a:rPr>
+              <a:t>g3</a:t>
+            </a:r>
+            <a:r>
+              <a:rPr sz="1500" i="0" b="0">
+                <a:solidFill>
+                  <a:srgbClr val="D4D4D4"/>
+                </a:solidFill>
+                <a:latin typeface="Consolas"/>
+              </a:rPr>
+              <a:t>, 2</a:t>
+            </a:r>
+            <a:r>
+              <a:rPr sz="1500" i="0" b="0">
+                <a:solidFill>
+                  <a:srgbClr val="D4D4D4"/>
+                </a:solidFill>
+                <a:latin typeface="Consolas"/>
+              </a:rPr>
+              <a:t>m</a:t>
+            </a:r>
+          </a:p>
+          <a:p>
+            <a:pPr>
+              <a:spcAft>
+                <a:spcPts val="321"/>
+              </a:spcAft>
+            </a:pPr>
+            <a:r>
+              <a:rPr sz="1500" i="0" b="0">
+                <a:solidFill>
+                  <a:srgbClr val="D4D4D4"/>
+                </a:solidFill>
+                <a:latin typeface="Consolas"/>
+              </a:rPr>
+              <a:t>  </a:t>
+            </a:r>
+            <a:r>
+              <a:rPr sz="1500" i="0" b="0">
+                <a:solidFill>
+                  <a:srgbClr val="D4D4D4"/>
+                </a:solidFill>
+                <a:latin typeface="Consolas"/>
+              </a:rPr>
+              <a:t>Prototipo</a:t>
+            </a:r>
+            <a:r>
+              <a:rPr sz="1500" i="0" b="0">
+                <a:solidFill>
+                  <a:srgbClr val="D4D4D4"/>
+                </a:solidFill>
+                <a:latin typeface="Consolas"/>
+              </a:rPr>
+              <a:t> </a:t>
+            </a:r>
+            <a:r>
+              <a:rPr sz="1500" i="0" b="0">
+                <a:solidFill>
+                  <a:srgbClr val="D4D4D4"/>
+                </a:solidFill>
+                <a:latin typeface="Consolas"/>
+              </a:rPr>
+              <a:t>en</a:t>
+            </a:r>
+            <a:r>
+              <a:rPr sz="1500" i="0" b="0">
+                <a:solidFill>
+                  <a:srgbClr val="D4D4D4"/>
+                </a:solidFill>
+                <a:latin typeface="Consolas"/>
+              </a:rPr>
+              <a:t> </a:t>
+            </a:r>
+            <a:r>
+              <a:rPr sz="1500" i="0" b="0">
+                <a:solidFill>
+                  <a:srgbClr val="D4D4D4"/>
+                </a:solidFill>
+                <a:latin typeface="Consolas"/>
+              </a:rPr>
+              <a:t>vivo</a:t>
+            </a:r>
+            <a:r>
+              <a:rPr sz="1500" i="0" b="0">
+                <a:solidFill>
+                  <a:srgbClr val="D4D4D4"/>
+                </a:solidFill>
+                <a:latin typeface="Consolas"/>
+              </a:rPr>
+              <a:t>      :</a:t>
+            </a:r>
+            <a:r>
+              <a:rPr sz="1500" i="0" b="0">
+                <a:solidFill>
+                  <a:srgbClr val="D4D4D4"/>
+                </a:solidFill>
+                <a:latin typeface="Consolas"/>
+              </a:rPr>
+              <a:t>g5</a:t>
+            </a:r>
+            <a:r>
+              <a:rPr sz="1500" i="0" b="0">
+                <a:solidFill>
+                  <a:srgbClr val="D4D4D4"/>
+                </a:solidFill>
+                <a:latin typeface="Consolas"/>
+              </a:rPr>
+              <a:t>, </a:t>
+            </a:r>
+            <a:r>
+              <a:rPr sz="1500" i="0" b="0">
+                <a:solidFill>
+                  <a:srgbClr val="D4D4D4"/>
+                </a:solidFill>
+                <a:latin typeface="Consolas"/>
+              </a:rPr>
+              <a:t>after</a:t>
+            </a:r>
+            <a:r>
+              <a:rPr sz="1500" i="0" b="0">
+                <a:solidFill>
+                  <a:srgbClr val="D4D4D4"/>
+                </a:solidFill>
+                <a:latin typeface="Consolas"/>
+              </a:rPr>
+              <a:t> </a:t>
+            </a:r>
+            <a:r>
+              <a:rPr sz="1500" i="0" b="0">
+                <a:solidFill>
+                  <a:srgbClr val="D4D4D4"/>
+                </a:solidFill>
+                <a:latin typeface="Consolas"/>
+              </a:rPr>
+              <a:t>g4</a:t>
+            </a:r>
+            <a:r>
+              <a:rPr sz="1500" i="0" b="0">
+                <a:solidFill>
+                  <a:srgbClr val="D4D4D4"/>
+                </a:solidFill>
+                <a:latin typeface="Consolas"/>
+              </a:rPr>
+              <a:t>, 2</a:t>
+            </a:r>
+            <a:r>
+              <a:rPr sz="1500" i="0" b="0">
+                <a:solidFill>
+                  <a:srgbClr val="D4D4D4"/>
+                </a:solidFill>
+                <a:latin typeface="Consolas"/>
+              </a:rPr>
+              <a:t>m</a:t>
+            </a:r>
+          </a:p>
+          <a:p>
+            <a:pPr>
+              <a:spcAft>
+                <a:spcPts val="321"/>
+              </a:spcAft>
+            </a:pPr>
+            <a:r>
+              <a:rPr sz="1500" i="0" b="0">
+                <a:solidFill>
+                  <a:srgbClr val="D4D4D4"/>
+                </a:solidFill>
+                <a:latin typeface="Consolas"/>
+              </a:rPr>
+              <a:t>  </a:t>
+            </a:r>
+            <a:r>
+              <a:rPr sz="1500" i="0" b="0">
+                <a:solidFill>
+                  <a:srgbClr val="D4D4D4"/>
+                </a:solidFill>
+                <a:latin typeface="Consolas"/>
+              </a:rPr>
+              <a:t>Decisiones</a:t>
+            </a:r>
+            <a:r>
+              <a:rPr sz="1500" i="0" b="0">
+                <a:solidFill>
+                  <a:srgbClr val="D4D4D4"/>
+                </a:solidFill>
+                <a:latin typeface="Consolas"/>
+              </a:rPr>
+              <a:t> </a:t>
+            </a:r>
+            <a:r>
+              <a:rPr sz="1500" i="0" b="0">
+                <a:solidFill>
+                  <a:srgbClr val="D4D4D4"/>
+                </a:solidFill>
+                <a:latin typeface="Consolas"/>
+              </a:rPr>
+              <a:t>defendidas</a:t>
+            </a:r>
+            <a:r>
+              <a:rPr sz="1500" i="0" b="0">
+                <a:solidFill>
+                  <a:srgbClr val="D4D4D4"/>
+                </a:solidFill>
+                <a:latin typeface="Consolas"/>
+              </a:rPr>
+              <a:t>  :</a:t>
+            </a:r>
+            <a:r>
+              <a:rPr sz="1500" i="0" b="0">
+                <a:solidFill>
+                  <a:srgbClr val="D4D4D4"/>
+                </a:solidFill>
+                <a:latin typeface="Consolas"/>
+              </a:rPr>
+              <a:t>g6</a:t>
+            </a:r>
+            <a:r>
+              <a:rPr sz="1500" i="0" b="0">
+                <a:solidFill>
+                  <a:srgbClr val="D4D4D4"/>
+                </a:solidFill>
+                <a:latin typeface="Consolas"/>
+              </a:rPr>
+              <a:t>, </a:t>
+            </a:r>
+            <a:r>
+              <a:rPr sz="1500" i="0" b="0">
+                <a:solidFill>
+                  <a:srgbClr val="D4D4D4"/>
+                </a:solidFill>
+                <a:latin typeface="Consolas"/>
+              </a:rPr>
+              <a:t>after</a:t>
+            </a:r>
+            <a:r>
+              <a:rPr sz="1500" i="0" b="0">
+                <a:solidFill>
+                  <a:srgbClr val="D4D4D4"/>
+                </a:solidFill>
+                <a:latin typeface="Consolas"/>
+              </a:rPr>
+              <a:t> </a:t>
+            </a:r>
+            <a:r>
+              <a:rPr sz="1500" i="0" b="0">
+                <a:solidFill>
+                  <a:srgbClr val="D4D4D4"/>
+                </a:solidFill>
+                <a:latin typeface="Consolas"/>
+              </a:rPr>
+              <a:t>g5</a:t>
+            </a:r>
+            <a:r>
+              <a:rPr sz="1500" i="0" b="0">
+                <a:solidFill>
+                  <a:srgbClr val="D4D4D4"/>
+                </a:solidFill>
+                <a:latin typeface="Consolas"/>
+              </a:rPr>
+              <a:t>, 2</a:t>
+            </a:r>
+            <a:r>
+              <a:rPr sz="1500" i="0" b="0">
+                <a:solidFill>
+                  <a:srgbClr val="D4D4D4"/>
+                </a:solidFill>
+                <a:latin typeface="Consolas"/>
+              </a:rPr>
+              <a:t>m</a:t>
+            </a:r>
+          </a:p>
+          <a:p>
+            <a:pPr>
+              <a:spcAft>
+                <a:spcPts val="321"/>
+              </a:spcAft>
+            </a:pPr>
+            <a:r>
+              <a:rPr sz="1500" i="0" b="0">
+                <a:solidFill>
+                  <a:srgbClr val="D4D4D4"/>
+                </a:solidFill>
+                <a:latin typeface="Consolas"/>
+              </a:rPr>
+              <a:t>  </a:t>
+            </a:r>
+            <a:r>
+              <a:rPr sz="1500" i="0" b="0">
+                <a:solidFill>
+                  <a:srgbClr val="D4D4D4"/>
+                </a:solidFill>
+                <a:latin typeface="Consolas"/>
+              </a:rPr>
+              <a:t>Riesgos</a:t>
+            </a:r>
+            <a:r>
+              <a:rPr sz="1500" i="0" b="0">
+                <a:solidFill>
+                  <a:srgbClr val="D4D4D4"/>
+                </a:solidFill>
+                <a:latin typeface="Consolas"/>
+              </a:rPr>
+              <a:t> </a:t>
+            </a:r>
+            <a:r>
+              <a:rPr sz="1500" i="0" b="0">
+                <a:solidFill>
+                  <a:srgbClr val="D4D4D4"/>
+                </a:solidFill>
+                <a:latin typeface="Consolas"/>
+              </a:rPr>
+              <a:t>y</a:t>
+            </a:r>
+            <a:r>
+              <a:rPr sz="1500" i="0" b="0">
+                <a:solidFill>
+                  <a:srgbClr val="D4D4D4"/>
+                </a:solidFill>
+                <a:latin typeface="Consolas"/>
+              </a:rPr>
+              <a:t> </a:t>
+            </a:r>
+            <a:r>
+              <a:rPr sz="1500" i="0" b="0">
+                <a:solidFill>
+                  <a:srgbClr val="D4D4D4"/>
+                </a:solidFill>
+                <a:latin typeface="Consolas"/>
+              </a:rPr>
+              <a:t>cierre</a:t>
+            </a:r>
+            <a:r>
+              <a:rPr sz="1500" i="0" b="0">
+                <a:solidFill>
+                  <a:srgbClr val="D4D4D4"/>
+                </a:solidFill>
+                <a:latin typeface="Consolas"/>
+              </a:rPr>
+              <a:t>       :</a:t>
+            </a:r>
+            <a:r>
+              <a:rPr sz="1500" i="0" b="0">
+                <a:solidFill>
+                  <a:srgbClr val="D4D4D4"/>
+                </a:solidFill>
+                <a:latin typeface="Consolas"/>
+              </a:rPr>
+              <a:t>g7</a:t>
+            </a:r>
+            <a:r>
+              <a:rPr sz="1500" i="0" b="0">
+                <a:solidFill>
+                  <a:srgbClr val="D4D4D4"/>
+                </a:solidFill>
+                <a:latin typeface="Consolas"/>
+              </a:rPr>
+              <a:t>, </a:t>
+            </a:r>
+            <a:r>
+              <a:rPr sz="1500" i="0" b="0">
+                <a:solidFill>
+                  <a:srgbClr val="D4D4D4"/>
+                </a:solidFill>
+                <a:latin typeface="Consolas"/>
+              </a:rPr>
+              <a:t>after</a:t>
+            </a:r>
+            <a:r>
+              <a:rPr sz="1500" i="0" b="0">
+                <a:solidFill>
+                  <a:srgbClr val="D4D4D4"/>
+                </a:solidFill>
+                <a:latin typeface="Consolas"/>
+              </a:rPr>
+              <a:t> </a:t>
+            </a:r>
+            <a:r>
+              <a:rPr sz="1500" i="0" b="0">
+                <a:solidFill>
+                  <a:srgbClr val="D4D4D4"/>
+                </a:solidFill>
+                <a:latin typeface="Consolas"/>
+              </a:rPr>
+              <a:t>g6</a:t>
+            </a:r>
+            <a:r>
+              <a:rPr sz="1500" i="0" b="0">
+                <a:solidFill>
+                  <a:srgbClr val="D4D4D4"/>
+                </a:solidFill>
+                <a:latin typeface="Consolas"/>
+              </a:rPr>
+              <a:t>, 1</a:t>
+            </a:r>
+            <a:r>
+              <a:rPr sz="1500" i="0" b="0">
+                <a:solidFill>
+                  <a:srgbClr val="D4D4D4"/>
+                </a:solidFill>
+                <a:latin typeface="Consolas"/>
+              </a:rPr>
+              <a:t>m</a:t>
+            </a:r>
+          </a:p>
+          <a:p>
+            <a:pPr>
+              <a:spcAft>
+                <a:spcPts val="321"/>
+              </a:spcAft>
+            </a:pPr>
+            <a:r>
+              <a:rPr sz="1500" i="0" b="0">
+                <a:solidFill>
+                  <a:srgbClr val="D4D4D4"/>
+                </a:solidFill>
+                <a:latin typeface="Consolas"/>
+              </a:rPr>
+              <a:t/>
+            </a:r>
+          </a:p>
+          <a:p>
+            <a:pPr>
+              <a:spcAft>
+                <a:spcPts val="321"/>
+              </a:spcAft>
+            </a:pPr>
+            <a:r>
+              <a:rPr sz="1500" i="1" b="0">
+                <a:solidFill>
+                  <a:srgbClr val="6A9955"/>
+                </a:solidFill>
+                <a:latin typeface="Consolas"/>
+              </a:rPr>
+              <a:t>%% Si el guion no esta cronometrado, el bloque de decisiones —el que mas</a:t>
+            </a:r>
+          </a:p>
+          <a:p>
+            <a:pPr>
+              <a:spcAft>
+                <a:spcPts val="321"/>
+              </a:spcAft>
+            </a:pPr>
+            <a:r>
+              <a:rPr sz="1500" i="1" b="0">
+                <a:solidFill>
+                  <a:srgbClr val="6A9955"/>
+                </a:solidFill>
+                <a:latin typeface="Consolas"/>
+              </a:rPr>
+              <a:t>%% pesa ante el jurado— se queda sin tiempo. Siempre.</a:t>
+            </a:r>
+          </a:p>
+        </p:txBody>
+      </p:sp>
+      <p:sp>
+        <p:nvSpPr>
+          <p:cNvPr id="13" name="TextBox 12"/>
           <p:cNvSpPr txBox="1"/>
           <p:nvPr/>
         </p:nvSpPr>

--- a/Seminario de Sistemas/Clases/Clase 14 - Preparacion de la sustentacion y cierre/Presentacion.pptx
+++ b/Seminario de Sistemas/Clases/Clase 14 - Preparacion de la sustentacion y cierre/Presentacion.pptx
@@ -1076,94 +1076,6 @@
           <a:p>
             <a:r>
               <a:t>Se ensaya cronometrado al menos dos veces, en voz alta y de pie, porque el tiempo estimado leyendo en silencio siempre es la mitad del real.</a:t>
-            </a:r>
-          </a:p>
-        </p:txBody>
-      </p:sp>
-      <p:sp>
-        <p:nvSpPr>
-          <p:cNvPr id="4" name="Slide Number Placeholder 3"/>
-          <p:cNvSpPr>
-            <a:spLocks noGrp="1"/>
-          </p:cNvSpPr>
-          <p:nvPr>
-            <p:ph type="sldNum" idx="5" sz="quarter"/>
-          </p:nvPr>
-        </p:nvSpPr>
-        <p:spPr/>
-      </p:sp>
-    </p:spTree>
-  </p:cSld>
-  <p:clrMapOvr>
-    <a:masterClrMapping/>
-  </p:clrMapOvr>
-</p:notes>
-</file>
-
-<file path=ppt/notesSlides/notesSlide6.xml><?xml version="1.0" encoding="utf-8"?>
-<p:notes xmlns:a="http://schemas.openxmlformats.org/drawingml/2006/main" xmlns:p="http://schemas.openxmlformats.org/presentationml/2006/main" xmlns:r="http://schemas.openxmlformats.org/officeDocument/2006/relationships">
-  <p:cSld>
-    <p:spTree>
-      <p:nvGrpSpPr>
-        <p:cNvPr id="1" name=""/>
-        <p:cNvGrpSpPr/>
-        <p:nvPr/>
-      </p:nvGrpSpPr>
-      <p:grpSpPr>
-        <a:xfrm>
-          <a:off x="0" y="0"/>
-          <a:ext cx="0" cy="0"/>
-          <a:chOff x="0" y="0"/>
-          <a:chExt cx="0" cy="0"/>
-        </a:xfrm>
-      </p:grpSpPr>
-      <p:sp>
-        <p:nvSpPr>
-          <p:cNvPr id="2" name="Slide Image Placeholder 1"/>
-          <p:cNvSpPr>
-            <a:spLocks noGrp="1"/>
-          </p:cNvSpPr>
-          <p:nvPr>
-            <p:ph type="sldImg" idx="2"/>
-          </p:nvPr>
-        </p:nvSpPr>
-        <p:spPr/>
-      </p:sp>
-      <p:sp>
-        <p:nvSpPr>
-          <p:cNvPr id="3" name="Notes Placeholder 2"/>
-          <p:cNvSpPr>
-            <a:spLocks noGrp="1"/>
-          </p:cNvSpPr>
-          <p:nvPr>
-            <p:ph type="body" idx="3" sz="quarter"/>
-          </p:nvPr>
-        </p:nvSpPr>
-        <p:spPr/>
-        <p:txBody>
-          <a:bodyPr/>
-          <a:lstStyle/>
-          <a:p>
-            <a:r>
-              <a:t>TEXTO COMPLETO DE LA LÁMINA (se proyecta resumido):</a:t>
-            </a:r>
-          </a:p>
-          <a:p/>
-          <a:p>
-            <a:r>
-              <a:t>Herramienta: Google Docs · draw.io · Figma o Penpot</a:t>
-            </a:r>
-          </a:p>
-          <a:p/>
-          <a:p>
-            <a:r>
-              <a:t>Demo: Se proyecta una sustentacion mal hecha y una bien hecha del mismo paquete, y luego arma en vivo la tabla de decisiones para justificar por que Historia_Clinica es una clase aparte de Mascota.</a:t>
-            </a:r>
-          </a:p>
-          <a:p/>
-          <a:p>
-            <a:r>
-              <a:t>Mismo dominio: la clinica veterinaria — no otro ejemplo. Aqui se diseña, no se programa.</a:t>
             </a:r>
           </a:p>
         </p:txBody>
@@ -7624,118 +7536,14 @@
       </p:sp>
       <p:sp>
         <p:nvSpPr>
-          <p:cNvPr id="5" name="Rounded Rectangle 4"/>
-          <p:cNvSpPr/>
-          <p:nvPr/>
-        </p:nvSpPr>
-        <p:spPr>
-          <a:xfrm>
-            <a:off x="5797149" y="1573813"/>
-            <a:ext cx="6010497" cy="4057845"/>
-          </a:xfrm>
-          <a:prstGeom prst="roundRect">
-            <a:avLst>
-              <a:gd name="adj" fmla="val 4000"/>
-            </a:avLst>
-          </a:prstGeom>
-          <a:solidFill>
-            <a:srgbClr val="E8EEF4"/>
-          </a:solidFill>
-          <a:ln>
-            <a:noFill/>
-          </a:ln>
-        </p:spPr>
-        <p:style>
-          <a:lnRef idx="1">
-            <a:schemeClr val="accent1"/>
-          </a:lnRef>
-          <a:fillRef idx="3">
-            <a:schemeClr val="accent1"/>
-          </a:fillRef>
-          <a:effectRef idx="2">
-            <a:schemeClr val="accent1"/>
-          </a:effectRef>
-          <a:fontRef idx="minor">
-            <a:schemeClr val="lt1"/>
-          </a:fontRef>
-        </p:style>
-        <p:txBody>
-          <a:bodyPr rtlCol="0" anchor="ctr"/>
-          <a:lstStyle/>
-          <a:p>
-            <a:pPr algn="ctr"/>
-          </a:p>
-        </p:txBody>
-      </p:sp>
-      <p:pic>
-        <p:nvPicPr>
-          <p:cNvPr id="6" name="Picture 5" descr="laptop-code-live-demo.jpg"/>
-          <p:cNvPicPr>
-            <a:picLocks noChangeAspect="1"/>
-          </p:cNvPicPr>
-          <p:nvPr/>
-        </p:nvPicPr>
-        <p:blipFill>
-          <a:blip r:embed="rId2"/>
-          <a:stretch>
-            <a:fillRect/>
-          </a:stretch>
-        </p:blipFill>
-        <p:spPr>
-          <a:xfrm>
-            <a:off x="5870301" y="1646965"/>
-            <a:ext cx="5864193" cy="3911541"/>
-          </a:xfrm>
-          <a:prstGeom prst="rect">
-            <a:avLst/>
-          </a:prstGeom>
-        </p:spPr>
-      </p:pic>
-      <p:sp>
-        <p:nvSpPr>
-          <p:cNvPr id="7" name="TextBox 6"/>
+          <p:cNvPr id="5" name="TextBox 4"/>
           <p:cNvSpPr txBox="1"/>
           <p:nvPr/>
         </p:nvSpPr>
         <p:spPr>
           <a:xfrm>
-            <a:off x="5870301" y="5961888"/>
-            <a:ext cx="5864193" cy="320040"/>
-          </a:xfrm>
-          <a:prstGeom prst="rect">
-            <a:avLst/>
-          </a:prstGeom>
-          <a:noFill/>
-        </p:spPr>
-        <p:txBody>
-          <a:bodyPr wrap="square">
-            <a:spAutoFit/>
-          </a:bodyPr>
-          <a:lstStyle/>
-          <a:p>
-            <a:pPr algn="ctr"/>
-            <a:r>
-              <a:rPr sz="1100" b="0" i="1">
-                <a:solidFill>
-                  <a:srgbClr val="666666"/>
-                </a:solidFill>
-                <a:latin typeface="Calibri"/>
-              </a:rPr>
-              <a:t>Foto: olia danilevich · Pexels</a:t>
-            </a:r>
-          </a:p>
-        </p:txBody>
-      </p:sp>
-      <p:sp>
-        <p:nvSpPr>
-          <p:cNvPr id="8" name="TextBox 7"/>
-          <p:cNvSpPr txBox="1"/>
-          <p:nvPr/>
-        </p:nvSpPr>
-        <p:spPr>
-          <a:xfrm>
-            <a:off x="457200" y="1353312"/>
-            <a:ext cx="5093061" cy="5047488"/>
+            <a:off x="457200" y="1170432"/>
+            <a:ext cx="11277295" cy="5230368"/>
           </a:xfrm>
           <a:prstGeom prst="rect">
             <a:avLst/>
@@ -7805,6 +7613,15 @@
               </a:rPr>
               <a:t>Demo:</a:t>
             </a:r>
+            <a:r>
+              <a:rPr sz="2000" b="0" i="0">
+                <a:solidFill>
+                  <a:srgbClr val="333333"/>
+                </a:solidFill>
+                <a:latin typeface="Calibri"/>
+              </a:rPr>
+              <a:t> Se proyecta una sustentacion mal hecha y una bien hecha del mismo paquete, y luego arma en vivo la tabla de decisiones para justificar por que Historia_Clinica es una clase aparte de Mascota.</a:t>
+            </a:r>
           </a:p>
           <a:p>
             <a:pPr>
@@ -7826,7 +7643,7 @@
       </p:sp>
       <p:sp>
         <p:nvSpPr>
-          <p:cNvPr id="9" name="TextBox 8"/>
+          <p:cNvPr id="6" name="TextBox 5"/>
           <p:cNvSpPr txBox="1"/>
           <p:nvPr/>
         </p:nvSpPr>
@@ -8239,118 +8056,14 @@
       </p:sp>
       <p:sp>
         <p:nvSpPr>
-          <p:cNvPr id="5" name="Rounded Rectangle 4"/>
-          <p:cNvSpPr/>
-          <p:nvPr/>
-        </p:nvSpPr>
-        <p:spPr>
-          <a:xfrm>
-            <a:off x="5797149" y="1573813"/>
-            <a:ext cx="6010497" cy="4057845"/>
-          </a:xfrm>
-          <a:prstGeom prst="roundRect">
-            <a:avLst>
-              <a:gd name="adj" fmla="val 4000"/>
-            </a:avLst>
-          </a:prstGeom>
-          <a:solidFill>
-            <a:srgbClr val="E8EEF4"/>
-          </a:solidFill>
-          <a:ln>
-            <a:noFill/>
-          </a:ln>
-        </p:spPr>
-        <p:style>
-          <a:lnRef idx="1">
-            <a:schemeClr val="accent1"/>
-          </a:lnRef>
-          <a:fillRef idx="3">
-            <a:schemeClr val="accent1"/>
-          </a:fillRef>
-          <a:effectRef idx="2">
-            <a:schemeClr val="accent1"/>
-          </a:effectRef>
-          <a:fontRef idx="minor">
-            <a:schemeClr val="lt1"/>
-          </a:fontRef>
-        </p:style>
-        <p:txBody>
-          <a:bodyPr rtlCol="0" anchor="ctr"/>
-          <a:lstStyle/>
-          <a:p>
-            <a:pPr algn="ctr"/>
-          </a:p>
-        </p:txBody>
-      </p:sp>
-      <p:pic>
-        <p:nvPicPr>
-          <p:cNvPr id="6" name="Picture 5" descr="notebook-planning-desk-coffee.jpg"/>
-          <p:cNvPicPr>
-            <a:picLocks noChangeAspect="1"/>
-          </p:cNvPicPr>
-          <p:nvPr/>
-        </p:nvPicPr>
-        <p:blipFill>
-          <a:blip r:embed="rId2"/>
-          <a:stretch>
-            <a:fillRect/>
-          </a:stretch>
-        </p:blipFill>
-        <p:spPr>
-          <a:xfrm>
-            <a:off x="5870301" y="1646965"/>
-            <a:ext cx="5864193" cy="3911541"/>
-          </a:xfrm>
-          <a:prstGeom prst="rect">
-            <a:avLst/>
-          </a:prstGeom>
-        </p:spPr>
-      </p:pic>
-      <p:sp>
-        <p:nvSpPr>
-          <p:cNvPr id="7" name="TextBox 6"/>
+          <p:cNvPr id="5" name="TextBox 4"/>
           <p:cNvSpPr txBox="1"/>
           <p:nvPr/>
         </p:nvSpPr>
         <p:spPr>
           <a:xfrm>
-            <a:off x="5870301" y="5961888"/>
-            <a:ext cx="5864193" cy="320040"/>
-          </a:xfrm>
-          <a:prstGeom prst="rect">
-            <a:avLst/>
-          </a:prstGeom>
-          <a:noFill/>
-        </p:spPr>
-        <p:txBody>
-          <a:bodyPr wrap="square">
-            <a:spAutoFit/>
-          </a:bodyPr>
-          <a:lstStyle/>
-          <a:p>
-            <a:pPr algn="ctr"/>
-            <a:r>
-              <a:rPr sz="1100" b="0" i="1">
-                <a:solidFill>
-                  <a:srgbClr val="666666"/>
-                </a:solidFill>
-                <a:latin typeface="Calibri"/>
-              </a:rPr>
-              <a:t>Foto: Cup of  Couple · Pexels</a:t>
-            </a:r>
-          </a:p>
-        </p:txBody>
-      </p:sp>
-      <p:sp>
-        <p:nvSpPr>
-          <p:cNvPr id="8" name="TextBox 7"/>
-          <p:cNvSpPr txBox="1"/>
-          <p:nvPr/>
-        </p:nvSpPr>
-        <p:spPr>
-          <a:xfrm>
-            <a:off x="457200" y="1353312"/>
-            <a:ext cx="5093061" cy="5047488"/>
+            <a:off x="457200" y="1170432"/>
+            <a:ext cx="11277295" cy="5230368"/>
           </a:xfrm>
           <a:prstGeom prst="rect">
             <a:avLst/>
@@ -8475,7 +8188,7 @@
       </p:sp>
       <p:sp>
         <p:nvSpPr>
-          <p:cNvPr id="9" name="TextBox 8"/>
+          <p:cNvPr id="6" name="TextBox 5"/>
           <p:cNvSpPr txBox="1"/>
           <p:nvPr/>
         </p:nvSpPr>
@@ -11253,118 +10966,14 @@
       </p:sp>
       <p:sp>
         <p:nvSpPr>
-          <p:cNvPr id="5" name="Rounded Rectangle 4"/>
-          <p:cNvSpPr/>
-          <p:nvPr/>
-        </p:nvSpPr>
-        <p:spPr>
-          <a:xfrm>
-            <a:off x="5797149" y="1573813"/>
-            <a:ext cx="6010497" cy="4057845"/>
-          </a:xfrm>
-          <a:prstGeom prst="roundRect">
-            <a:avLst>
-              <a:gd name="adj" fmla="val 4000"/>
-            </a:avLst>
-          </a:prstGeom>
-          <a:solidFill>
-            <a:srgbClr val="E8EEF4"/>
-          </a:solidFill>
-          <a:ln>
-            <a:noFill/>
-          </a:ln>
-        </p:spPr>
-        <p:style>
-          <a:lnRef idx="1">
-            <a:schemeClr val="accent1"/>
-          </a:lnRef>
-          <a:fillRef idx="3">
-            <a:schemeClr val="accent1"/>
-          </a:fillRef>
-          <a:effectRef idx="2">
-            <a:schemeClr val="accent1"/>
-          </a:effectRef>
-          <a:fontRef idx="minor">
-            <a:schemeClr val="lt1"/>
-          </a:fontRef>
-        </p:style>
-        <p:txBody>
-          <a:bodyPr rtlCol="0" anchor="ctr"/>
-          <a:lstStyle/>
-          <a:p>
-            <a:pPr algn="ctr"/>
-          </a:p>
-        </p:txBody>
-      </p:sp>
-      <p:pic>
-        <p:nvPicPr>
-          <p:cNvPr id="6" name="Picture 5" descr="job-interview-panel-table.jpg"/>
-          <p:cNvPicPr>
-            <a:picLocks noChangeAspect="1"/>
-          </p:cNvPicPr>
-          <p:nvPr/>
-        </p:nvPicPr>
-        <p:blipFill>
-          <a:blip r:embed="rId2"/>
-          <a:stretch>
-            <a:fillRect/>
-          </a:stretch>
-        </p:blipFill>
-        <p:spPr>
-          <a:xfrm>
-            <a:off x="5870301" y="1646965"/>
-            <a:ext cx="5864193" cy="3911541"/>
-          </a:xfrm>
-          <a:prstGeom prst="rect">
-            <a:avLst/>
-          </a:prstGeom>
-        </p:spPr>
-      </p:pic>
-      <p:sp>
-        <p:nvSpPr>
-          <p:cNvPr id="7" name="TextBox 6"/>
+          <p:cNvPr id="5" name="TextBox 4"/>
           <p:cNvSpPr txBox="1"/>
           <p:nvPr/>
         </p:nvSpPr>
         <p:spPr>
           <a:xfrm>
-            <a:off x="5870301" y="5961888"/>
-            <a:ext cx="5864193" cy="320040"/>
-          </a:xfrm>
-          <a:prstGeom prst="rect">
-            <a:avLst/>
-          </a:prstGeom>
-          <a:noFill/>
-        </p:spPr>
-        <p:txBody>
-          <a:bodyPr wrap="square">
-            <a:spAutoFit/>
-          </a:bodyPr>
-          <a:lstStyle/>
-          <a:p>
-            <a:pPr algn="ctr"/>
-            <a:r>
-              <a:rPr sz="1100" b="0" i="1">
-                <a:solidFill>
-                  <a:srgbClr val="666666"/>
-                </a:solidFill>
-                <a:latin typeface="Calibri"/>
-              </a:rPr>
-              <a:t>Foto: Anna Shvets · Pexels</a:t>
-            </a:r>
-          </a:p>
-        </p:txBody>
-      </p:sp>
-      <p:sp>
-        <p:nvSpPr>
-          <p:cNvPr id="8" name="TextBox 7"/>
-          <p:cNvSpPr txBox="1"/>
-          <p:nvPr/>
-        </p:nvSpPr>
-        <p:spPr>
-          <a:xfrm>
-            <a:off x="457200" y="1353312"/>
-            <a:ext cx="5093061" cy="5047488"/>
+            <a:off x="457200" y="1170432"/>
+            <a:ext cx="11277295" cy="5230368"/>
           </a:xfrm>
           <a:prstGeom prst="rect">
             <a:avLst/>
@@ -11444,7 +11053,7 @@
       </p:sp>
       <p:sp>
         <p:nvSpPr>
-          <p:cNvPr id="9" name="TextBox 8"/>
+          <p:cNvPr id="6" name="TextBox 5"/>
           <p:cNvSpPr txBox="1"/>
           <p:nvPr/>
         </p:nvSpPr>
@@ -11625,118 +11234,14 @@
       </p:sp>
       <p:sp>
         <p:nvSpPr>
-          <p:cNvPr id="5" name="Rounded Rectangle 4"/>
-          <p:cNvSpPr/>
-          <p:nvPr/>
-        </p:nvSpPr>
-        <p:spPr>
-          <a:xfrm>
-            <a:off x="5797149" y="1879499"/>
-            <a:ext cx="6010497" cy="3446472"/>
-          </a:xfrm>
-          <a:prstGeom prst="roundRect">
-            <a:avLst>
-              <a:gd name="adj" fmla="val 4000"/>
-            </a:avLst>
-          </a:prstGeom>
-          <a:solidFill>
-            <a:srgbClr val="E8EEF4"/>
-          </a:solidFill>
-          <a:ln>
-            <a:noFill/>
-          </a:ln>
-        </p:spPr>
-        <p:style>
-          <a:lnRef idx="1">
-            <a:schemeClr val="accent1"/>
-          </a:lnRef>
-          <a:fillRef idx="3">
-            <a:schemeClr val="accent1"/>
-          </a:fillRef>
-          <a:effectRef idx="2">
-            <a:schemeClr val="accent1"/>
-          </a:effectRef>
-          <a:fontRef idx="minor">
-            <a:schemeClr val="lt1"/>
-          </a:fontRef>
-        </p:style>
-        <p:txBody>
-          <a:bodyPr rtlCol="0" anchor="ctr"/>
-          <a:lstStyle/>
-          <a:p>
-            <a:pPr algn="ctr"/>
-          </a:p>
-        </p:txBody>
-      </p:sp>
-      <p:pic>
-        <p:nvPicPr>
-          <p:cNvPr id="6" name="Picture 5" descr="stopwatch-on-desk.jpg"/>
-          <p:cNvPicPr>
-            <a:picLocks noChangeAspect="1"/>
-          </p:cNvPicPr>
-          <p:nvPr/>
-        </p:nvPicPr>
-        <p:blipFill>
-          <a:blip r:embed="rId2"/>
-          <a:stretch>
-            <a:fillRect/>
-          </a:stretch>
-        </p:blipFill>
-        <p:spPr>
-          <a:xfrm>
-            <a:off x="5870301" y="1952651"/>
-            <a:ext cx="5864193" cy="3300168"/>
-          </a:xfrm>
-          <a:prstGeom prst="rect">
-            <a:avLst/>
-          </a:prstGeom>
-        </p:spPr>
-      </p:pic>
-      <p:sp>
-        <p:nvSpPr>
-          <p:cNvPr id="7" name="TextBox 6"/>
+          <p:cNvPr id="5" name="TextBox 4"/>
           <p:cNvSpPr txBox="1"/>
           <p:nvPr/>
         </p:nvSpPr>
         <p:spPr>
           <a:xfrm>
-            <a:off x="5870301" y="5961888"/>
-            <a:ext cx="5864193" cy="320040"/>
-          </a:xfrm>
-          <a:prstGeom prst="rect">
-            <a:avLst/>
-          </a:prstGeom>
-          <a:noFill/>
-        </p:spPr>
-        <p:txBody>
-          <a:bodyPr wrap="square">
-            <a:spAutoFit/>
-          </a:bodyPr>
-          <a:lstStyle/>
-          <a:p>
-            <a:pPr algn="ctr"/>
-            <a:r>
-              <a:rPr sz="1100" b="0" i="1">
-                <a:solidFill>
-                  <a:srgbClr val="666666"/>
-                </a:solidFill>
-                <a:latin typeface="Calibri"/>
-              </a:rPr>
-              <a:t>Foto: Anton Makarenko · Pexels</a:t>
-            </a:r>
-          </a:p>
-        </p:txBody>
-      </p:sp>
-      <p:sp>
-        <p:nvSpPr>
-          <p:cNvPr id="8" name="TextBox 7"/>
-          <p:cNvSpPr txBox="1"/>
-          <p:nvPr/>
-        </p:nvSpPr>
-        <p:spPr>
-          <a:xfrm>
-            <a:off x="457200" y="1353312"/>
-            <a:ext cx="5093061" cy="5047488"/>
+            <a:off x="457200" y="1170432"/>
+            <a:ext cx="11277295" cy="5230368"/>
           </a:xfrm>
           <a:prstGeom prst="rect">
             <a:avLst/>
@@ -11816,7 +11321,7 @@
       </p:sp>
       <p:sp>
         <p:nvSpPr>
-          <p:cNvPr id="9" name="TextBox 8"/>
+          <p:cNvPr id="6" name="TextBox 5"/>
           <p:cNvSpPr txBox="1"/>
           <p:nvPr/>
         </p:nvSpPr>

--- a/Seminario de Sistemas/Clases/Clase 14 - Preparacion de la sustentacion y cierre/Presentacion.pptx
+++ b/Seminario de Sistemas/Clases/Clase 14 - Preparacion de la sustentacion y cierre/Presentacion.pptx
@@ -1076,6 +1076,94 @@
           <a:p>
             <a:r>
               <a:t>Se ensaya cronometrado al menos dos veces, en voz alta y de pie, porque el tiempo estimado leyendo en silencio siempre es la mitad del real.</a:t>
+            </a:r>
+          </a:p>
+        </p:txBody>
+      </p:sp>
+      <p:sp>
+        <p:nvSpPr>
+          <p:cNvPr id="4" name="Slide Number Placeholder 3"/>
+          <p:cNvSpPr>
+            <a:spLocks noGrp="1"/>
+          </p:cNvSpPr>
+          <p:nvPr>
+            <p:ph type="sldNum" idx="5" sz="quarter"/>
+          </p:nvPr>
+        </p:nvSpPr>
+        <p:spPr/>
+      </p:sp>
+    </p:spTree>
+  </p:cSld>
+  <p:clrMapOvr>
+    <a:masterClrMapping/>
+  </p:clrMapOvr>
+</p:notes>
+</file>
+
+<file path=ppt/notesSlides/notesSlide6.xml><?xml version="1.0" encoding="utf-8"?>
+<p:notes xmlns:a="http://schemas.openxmlformats.org/drawingml/2006/main" xmlns:p="http://schemas.openxmlformats.org/presentationml/2006/main" xmlns:r="http://schemas.openxmlformats.org/officeDocument/2006/relationships">
+  <p:cSld>
+    <p:spTree>
+      <p:nvGrpSpPr>
+        <p:cNvPr id="1" name=""/>
+        <p:cNvGrpSpPr/>
+        <p:nvPr/>
+      </p:nvGrpSpPr>
+      <p:grpSpPr>
+        <a:xfrm>
+          <a:off x="0" y="0"/>
+          <a:ext cx="0" cy="0"/>
+          <a:chOff x="0" y="0"/>
+          <a:chExt cx="0" cy="0"/>
+        </a:xfrm>
+      </p:grpSpPr>
+      <p:sp>
+        <p:nvSpPr>
+          <p:cNvPr id="2" name="Slide Image Placeholder 1"/>
+          <p:cNvSpPr>
+            <a:spLocks noGrp="1"/>
+          </p:cNvSpPr>
+          <p:nvPr>
+            <p:ph type="sldImg" idx="2"/>
+          </p:nvPr>
+        </p:nvSpPr>
+        <p:spPr/>
+      </p:sp>
+      <p:sp>
+        <p:nvSpPr>
+          <p:cNvPr id="3" name="Notes Placeholder 2"/>
+          <p:cNvSpPr>
+            <a:spLocks noGrp="1"/>
+          </p:cNvSpPr>
+          <p:nvPr>
+            <p:ph type="body" idx="3" sz="quarter"/>
+          </p:nvPr>
+        </p:nvSpPr>
+        <p:spPr/>
+        <p:txBody>
+          <a:bodyPr/>
+          <a:lstStyle/>
+          <a:p>
+            <a:r>
+              <a:t>TEXTO COMPLETO DE LA LÁMINA (se proyecta resumido):</a:t>
+            </a:r>
+          </a:p>
+          <a:p/>
+          <a:p>
+            <a:r>
+              <a:t>Herramienta: Google Docs · draw.io · Figma o Penpot</a:t>
+            </a:r>
+          </a:p>
+          <a:p/>
+          <a:p>
+            <a:r>
+              <a:t>Demo: Se proyecta una sustentacion mal hecha y una bien hecha del mismo paquete, y luego arma en vivo la tabla de decisiones para justificar por que Historia_Clinica es una clase aparte de Mascota.</a:t>
+            </a:r>
+          </a:p>
+          <a:p/>
+          <a:p>
+            <a:r>
+              <a:t>Mismo dominio: la clinica veterinaria — no otro ejemplo. Aqui se diseña, no se programa.</a:t>
             </a:r>
           </a:p>
         </p:txBody>
@@ -7536,14 +7624,83 @@
       </p:sp>
       <p:sp>
         <p:nvSpPr>
-          <p:cNvPr id="5" name="TextBox 4"/>
+          <p:cNvPr id="5" name="Rounded Rectangle 4"/>
+          <p:cNvSpPr/>
+          <p:nvPr/>
+        </p:nvSpPr>
+        <p:spPr>
+          <a:xfrm>
+            <a:off x="5797149" y="1343926"/>
+            <a:ext cx="6010497" cy="4837658"/>
+          </a:xfrm>
+          <a:prstGeom prst="roundRect">
+            <a:avLst>
+              <a:gd name="adj" fmla="val 4000"/>
+            </a:avLst>
+          </a:prstGeom>
+          <a:solidFill>
+            <a:srgbClr val="E8EEF4"/>
+          </a:solidFill>
+          <a:ln>
+            <a:noFill/>
+          </a:ln>
+        </p:spPr>
+        <p:style>
+          <a:lnRef idx="1">
+            <a:schemeClr val="accent1"/>
+          </a:lnRef>
+          <a:fillRef idx="3">
+            <a:schemeClr val="accent1"/>
+          </a:fillRef>
+          <a:effectRef idx="2">
+            <a:schemeClr val="accent1"/>
+          </a:effectRef>
+          <a:fontRef idx="minor">
+            <a:schemeClr val="lt1"/>
+          </a:fontRef>
+        </p:style>
+        <p:txBody>
+          <a:bodyPr rtlCol="0" anchor="ctr"/>
+          <a:lstStyle/>
+          <a:p>
+            <a:pPr algn="ctr"/>
+          </a:p>
+        </p:txBody>
+      </p:sp>
+      <p:pic>
+        <p:nvPicPr>
+          <p:cNvPr id="6" name="Picture 5" descr="ilus-demo-paso1.png"/>
+          <p:cNvPicPr>
+            <a:picLocks noChangeAspect="1"/>
+          </p:cNvPicPr>
+          <p:nvPr/>
+        </p:nvPicPr>
+        <p:blipFill>
+          <a:blip r:embed="rId2"/>
+          <a:stretch>
+            <a:fillRect/>
+          </a:stretch>
+        </p:blipFill>
+        <p:spPr>
+          <a:xfrm>
+            <a:off x="5870301" y="1417078"/>
+            <a:ext cx="5864193" cy="4691354"/>
+          </a:xfrm>
+          <a:prstGeom prst="rect">
+            <a:avLst/>
+          </a:prstGeom>
+        </p:spPr>
+      </p:pic>
+      <p:sp>
+        <p:nvSpPr>
+          <p:cNvPr id="7" name="TextBox 6"/>
           <p:cNvSpPr txBox="1"/>
           <p:nvPr/>
         </p:nvSpPr>
         <p:spPr>
           <a:xfrm>
-            <a:off x="457200" y="1170432"/>
-            <a:ext cx="11277295" cy="5230368"/>
+            <a:off x="457200" y="1353312"/>
+            <a:ext cx="5093061" cy="5047488"/>
           </a:xfrm>
           <a:prstGeom prst="rect">
             <a:avLst/>
@@ -7620,7 +7777,7 @@
                 </a:solidFill>
                 <a:latin typeface="Calibri"/>
               </a:rPr>
-              <a:t> Se proyecta una sustentacion mal hecha y una bien hecha del mismo paquete, y luego arma en vivo la tabla de decisiones para justificar por que Historia_Clinica es una clase aparte de Mascota.</a:t>
+              <a:t> Se proyecta una sustentacion mal hecha y una bien hecha del mismo paquete, y luego arma en vivo la tabla de decisiones para justificar por…</a:t>
             </a:r>
           </a:p>
           <a:p>
@@ -7643,7 +7800,7 @@
       </p:sp>
       <p:sp>
         <p:nvSpPr>
-          <p:cNvPr id="6" name="TextBox 5"/>
+          <p:cNvPr id="8" name="TextBox 7"/>
           <p:cNvSpPr txBox="1"/>
           <p:nvPr/>
         </p:nvSpPr>
@@ -10966,14 +11123,83 @@
       </p:sp>
       <p:sp>
         <p:nvSpPr>
-          <p:cNvPr id="5" name="TextBox 4"/>
+          <p:cNvPr id="5" name="Rounded Rectangle 4"/>
+          <p:cNvSpPr/>
+          <p:nvPr/>
+        </p:nvSpPr>
+        <p:spPr>
+          <a:xfrm>
+            <a:off x="5797149" y="1343926"/>
+            <a:ext cx="6010497" cy="4837658"/>
+          </a:xfrm>
+          <a:prstGeom prst="roundRect">
+            <a:avLst>
+              <a:gd name="adj" fmla="val 4000"/>
+            </a:avLst>
+          </a:prstGeom>
+          <a:solidFill>
+            <a:srgbClr val="E8EEF4"/>
+          </a:solidFill>
+          <a:ln>
+            <a:noFill/>
+          </a:ln>
+        </p:spPr>
+        <p:style>
+          <a:lnRef idx="1">
+            <a:schemeClr val="accent1"/>
+          </a:lnRef>
+          <a:fillRef idx="3">
+            <a:schemeClr val="accent1"/>
+          </a:fillRef>
+          <a:effectRef idx="2">
+            <a:schemeClr val="accent1"/>
+          </a:effectRef>
+          <a:fontRef idx="minor">
+            <a:schemeClr val="lt1"/>
+          </a:fontRef>
+        </p:style>
+        <p:txBody>
+          <a:bodyPr rtlCol="0" anchor="ctr"/>
+          <a:lstStyle/>
+          <a:p>
+            <a:pPr algn="ctr"/>
+          </a:p>
+        </p:txBody>
+      </p:sp>
+      <p:pic>
+        <p:nvPicPr>
+          <p:cNvPr id="6" name="Picture 5" descr="ilus-preguntas-jurado-paso1.png"/>
+          <p:cNvPicPr>
+            <a:picLocks noChangeAspect="1"/>
+          </p:cNvPicPr>
+          <p:nvPr/>
+        </p:nvPicPr>
+        <p:blipFill>
+          <a:blip r:embed="rId2"/>
+          <a:stretch>
+            <a:fillRect/>
+          </a:stretch>
+        </p:blipFill>
+        <p:spPr>
+          <a:xfrm>
+            <a:off x="5870301" y="1417078"/>
+            <a:ext cx="5864193" cy="4691354"/>
+          </a:xfrm>
+          <a:prstGeom prst="rect">
+            <a:avLst/>
+          </a:prstGeom>
+        </p:spPr>
+      </p:pic>
+      <p:sp>
+        <p:nvSpPr>
+          <p:cNvPr id="7" name="TextBox 6"/>
           <p:cNvSpPr txBox="1"/>
           <p:nvPr/>
         </p:nvSpPr>
         <p:spPr>
           <a:xfrm>
-            <a:off x="457200" y="1170432"/>
-            <a:ext cx="11277295" cy="5230368"/>
+            <a:off x="457200" y="1353312"/>
+            <a:ext cx="5093061" cy="5047488"/>
           </a:xfrm>
           <a:prstGeom prst="rect">
             <a:avLst/>
@@ -11053,7 +11279,7 @@
       </p:sp>
       <p:sp>
         <p:nvSpPr>
-          <p:cNvPr id="6" name="TextBox 5"/>
+          <p:cNvPr id="8" name="TextBox 7"/>
           <p:cNvSpPr txBox="1"/>
           <p:nvPr/>
         </p:nvSpPr>
@@ -11234,14 +11460,83 @@
       </p:sp>
       <p:sp>
         <p:nvSpPr>
-          <p:cNvPr id="5" name="TextBox 4"/>
+          <p:cNvPr id="5" name="Rounded Rectangle 4"/>
+          <p:cNvSpPr/>
+          <p:nvPr/>
+        </p:nvSpPr>
+        <p:spPr>
+          <a:xfrm>
+            <a:off x="5797149" y="1343926"/>
+            <a:ext cx="6010497" cy="4837658"/>
+          </a:xfrm>
+          <a:prstGeom prst="roundRect">
+            <a:avLst>
+              <a:gd name="adj" fmla="val 4000"/>
+            </a:avLst>
+          </a:prstGeom>
+          <a:solidFill>
+            <a:srgbClr val="E8EEF4"/>
+          </a:solidFill>
+          <a:ln>
+            <a:noFill/>
+          </a:ln>
+        </p:spPr>
+        <p:style>
+          <a:lnRef idx="1">
+            <a:schemeClr val="accent1"/>
+          </a:lnRef>
+          <a:fillRef idx="3">
+            <a:schemeClr val="accent1"/>
+          </a:fillRef>
+          <a:effectRef idx="2">
+            <a:schemeClr val="accent1"/>
+          </a:effectRef>
+          <a:fontRef idx="minor">
+            <a:schemeClr val="lt1"/>
+          </a:fontRef>
+        </p:style>
+        <p:txBody>
+          <a:bodyPr rtlCol="0" anchor="ctr"/>
+          <a:lstStyle/>
+          <a:p>
+            <a:pPr algn="ctr"/>
+          </a:p>
+        </p:txBody>
+      </p:sp>
+      <p:pic>
+        <p:nvPicPr>
+          <p:cNvPr id="6" name="Picture 5" descr="ilus-guion-bloques-paso1.png"/>
+          <p:cNvPicPr>
+            <a:picLocks noChangeAspect="1"/>
+          </p:cNvPicPr>
+          <p:nvPr/>
+        </p:nvPicPr>
+        <p:blipFill>
+          <a:blip r:embed="rId2"/>
+          <a:stretch>
+            <a:fillRect/>
+          </a:stretch>
+        </p:blipFill>
+        <p:spPr>
+          <a:xfrm>
+            <a:off x="5870301" y="1417078"/>
+            <a:ext cx="5864193" cy="4691354"/>
+          </a:xfrm>
+          <a:prstGeom prst="rect">
+            <a:avLst/>
+          </a:prstGeom>
+        </p:spPr>
+      </p:pic>
+      <p:sp>
+        <p:nvSpPr>
+          <p:cNvPr id="7" name="TextBox 6"/>
           <p:cNvSpPr txBox="1"/>
           <p:nvPr/>
         </p:nvSpPr>
         <p:spPr>
           <a:xfrm>
-            <a:off x="457200" y="1170432"/>
-            <a:ext cx="11277295" cy="5230368"/>
+            <a:off x="457200" y="1353312"/>
+            <a:ext cx="5093061" cy="5047488"/>
           </a:xfrm>
           <a:prstGeom prst="rect">
             <a:avLst/>
@@ -11321,7 +11616,7 @@
       </p:sp>
       <p:sp>
         <p:nvSpPr>
-          <p:cNvPr id="6" name="TextBox 5"/>
+          <p:cNvPr id="8" name="TextBox 7"/>
           <p:cNvSpPr txBox="1"/>
           <p:nvPr/>
         </p:nvSpPr>

--- a/Seminario de Sistemas/Clases/Clase 14 - Preparacion de la sustentacion y cierre/Presentacion.pptx
+++ b/Seminario de Sistemas/Clases/Clase 14 - Preparacion de la sustentacion y cierre/Presentacion.pptx
@@ -4701,7 +4701,7 @@
         <p:spPr>
           <a:xfrm>
             <a:off x="457200" y="1261872"/>
-            <a:ext cx="11277295" cy="3986867"/>
+            <a:ext cx="11277295" cy="3800832"/>
           </a:xfrm>
           <a:prstGeom prst="roundRect">
             <a:avLst>
@@ -4951,7 +4951,7 @@
         <p:spPr>
           <a:xfrm>
             <a:off x="685800" y="1719072"/>
-            <a:ext cx="502920" cy="3392507"/>
+            <a:ext cx="502920" cy="3206472"/>
           </a:xfrm>
           <a:prstGeom prst="rect">
             <a:avLst/>
@@ -4966,11 +4966,11 @@
           <a:p>
             <a:pPr algn="r">
               <a:spcAft>
-                <a:spcPts val="321"/>
+                <a:spcPts val="300"/>
               </a:spcAft>
             </a:pPr>
             <a:r>
-              <a:rPr sz="1500" i="0" b="0">
+              <a:rPr sz="1400" i="0" b="0">
                 <a:solidFill>
                   <a:srgbClr val="858585"/>
                 </a:solidFill>
@@ -4982,11 +4982,11 @@
           <a:p>
             <a:pPr algn="r">
               <a:spcAft>
-                <a:spcPts val="321"/>
+                <a:spcPts val="300"/>
               </a:spcAft>
             </a:pPr>
             <a:r>
-              <a:rPr sz="1500" i="0" b="0">
+              <a:rPr sz="1400" i="0" b="0">
                 <a:solidFill>
                   <a:srgbClr val="858585"/>
                 </a:solidFill>
@@ -4998,11 +4998,11 @@
           <a:p>
             <a:pPr algn="r">
               <a:spcAft>
-                <a:spcPts val="321"/>
+                <a:spcPts val="300"/>
               </a:spcAft>
             </a:pPr>
             <a:r>
-              <a:rPr sz="1500" i="0" b="0">
+              <a:rPr sz="1400" i="0" b="0">
                 <a:solidFill>
                   <a:srgbClr val="858585"/>
                 </a:solidFill>
@@ -5014,11 +5014,11 @@
           <a:p>
             <a:pPr algn="r">
               <a:spcAft>
-                <a:spcPts val="321"/>
+                <a:spcPts val="300"/>
               </a:spcAft>
             </a:pPr>
             <a:r>
-              <a:rPr sz="1500" i="0" b="0">
+              <a:rPr sz="1400" i="0" b="0">
                 <a:solidFill>
                   <a:srgbClr val="858585"/>
                 </a:solidFill>
@@ -5030,11 +5030,11 @@
           <a:p>
             <a:pPr algn="r">
               <a:spcAft>
-                <a:spcPts val="321"/>
+                <a:spcPts val="300"/>
               </a:spcAft>
             </a:pPr>
             <a:r>
-              <a:rPr sz="1500" i="0" b="0">
+              <a:rPr sz="1400" i="0" b="0">
                 <a:solidFill>
                   <a:srgbClr val="858585"/>
                 </a:solidFill>
@@ -5046,11 +5046,11 @@
           <a:p>
             <a:pPr algn="r">
               <a:spcAft>
-                <a:spcPts val="321"/>
+                <a:spcPts val="300"/>
               </a:spcAft>
             </a:pPr>
             <a:r>
-              <a:rPr sz="1500" i="0" b="0">
+              <a:rPr sz="1400" i="0" b="0">
                 <a:solidFill>
                   <a:srgbClr val="858585"/>
                 </a:solidFill>
@@ -5062,11 +5062,11 @@
           <a:p>
             <a:pPr algn="r">
               <a:spcAft>
-                <a:spcPts val="321"/>
+                <a:spcPts val="300"/>
               </a:spcAft>
             </a:pPr>
             <a:r>
-              <a:rPr sz="1500" i="0" b="0">
+              <a:rPr sz="1400" i="0" b="0">
                 <a:solidFill>
                   <a:srgbClr val="858585"/>
                 </a:solidFill>
@@ -5078,11 +5078,11 @@
           <a:p>
             <a:pPr algn="r">
               <a:spcAft>
-                <a:spcPts val="321"/>
+                <a:spcPts val="300"/>
               </a:spcAft>
             </a:pPr>
             <a:r>
-              <a:rPr sz="1500" i="0" b="0">
+              <a:rPr sz="1400" i="0" b="0">
                 <a:solidFill>
                   <a:srgbClr val="858585"/>
                 </a:solidFill>
@@ -5094,11 +5094,11 @@
           <a:p>
             <a:pPr algn="r">
               <a:spcAft>
-                <a:spcPts val="321"/>
+                <a:spcPts val="300"/>
               </a:spcAft>
             </a:pPr>
             <a:r>
-              <a:rPr sz="1500" i="0" b="0">
+              <a:rPr sz="1400" i="0" b="0">
                 <a:solidFill>
                   <a:srgbClr val="858585"/>
                 </a:solidFill>
@@ -5110,11 +5110,11 @@
           <a:p>
             <a:pPr algn="r">
               <a:spcAft>
-                <a:spcPts val="321"/>
+                <a:spcPts val="300"/>
               </a:spcAft>
             </a:pPr>
             <a:r>
-              <a:rPr sz="1500" i="0" b="0">
+              <a:rPr sz="1400" i="0" b="0">
                 <a:solidFill>
                   <a:srgbClr val="858585"/>
                 </a:solidFill>
@@ -5126,11 +5126,11 @@
           <a:p>
             <a:pPr algn="r">
               <a:spcAft>
-                <a:spcPts val="321"/>
+                <a:spcPts val="300"/>
               </a:spcAft>
             </a:pPr>
             <a:r>
-              <a:rPr sz="1500" i="0" b="0">
+              <a:rPr sz="1400" i="0" b="0">
                 <a:solidFill>
                   <a:srgbClr val="858585"/>
                 </a:solidFill>
@@ -5142,11 +5142,11 @@
           <a:p>
             <a:pPr algn="r">
               <a:spcAft>
-                <a:spcPts val="321"/>
+                <a:spcPts val="300"/>
               </a:spcAft>
             </a:pPr>
             <a:r>
-              <a:rPr sz="1500" i="0" b="0">
+              <a:rPr sz="1400" i="0" b="0">
                 <a:solidFill>
                   <a:srgbClr val="858585"/>
                 </a:solidFill>
@@ -5166,7 +5166,7 @@
         <p:spPr>
           <a:xfrm>
             <a:off x="1188720" y="1719072"/>
-            <a:ext cx="10271455" cy="3392507"/>
+            <a:ext cx="10271455" cy="3206472"/>
           </a:xfrm>
           <a:prstGeom prst="rect">
             <a:avLst/>
@@ -5181,11 +5181,11 @@
           <a:p>
             <a:pPr>
               <a:spcAft>
-                <a:spcPts val="321"/>
+                <a:spcPts val="300"/>
               </a:spcAft>
             </a:pPr>
             <a:r>
-              <a:rPr sz="1500" i="0" b="0">
+              <a:rPr sz="1400" i="0" b="0">
                 <a:solidFill>
                   <a:srgbClr val="B5CEA8"/>
                 </a:solidFill>
@@ -5194,7 +5194,7 @@
               <a:t>00</a:t>
             </a:r>
             <a:r>
-              <a:rPr sz="1500" i="0" b="0">
+              <a:rPr sz="1400" i="0" b="0">
                 <a:solidFill>
                   <a:srgbClr val="D4D4D4"/>
                 </a:solidFill>
@@ -5203,7 +5203,7 @@
               <a:t>:</a:t>
             </a:r>
             <a:r>
-              <a:rPr sz="1500" i="0" b="0">
+              <a:rPr sz="1400" i="0" b="0">
                 <a:solidFill>
                   <a:srgbClr val="B5CEA8"/>
                 </a:solidFill>
@@ -5212,7 +5212,7 @@
               <a:t>00</a:t>
             </a:r>
             <a:r>
-              <a:rPr sz="1500" i="0" b="0">
+              <a:rPr sz="1400" i="0" b="0">
                 <a:solidFill>
                   <a:srgbClr val="D4D4D4"/>
                 </a:solidFill>
@@ -5221,7 +5221,7 @@
               <a:t>-</a:t>
             </a:r>
             <a:r>
-              <a:rPr sz="1500" i="0" b="0">
+              <a:rPr sz="1400" i="0" b="0">
                 <a:solidFill>
                   <a:srgbClr val="B5CEA8"/>
                 </a:solidFill>
@@ -5230,7 +5230,7 @@
               <a:t>01</a:t>
             </a:r>
             <a:r>
-              <a:rPr sz="1500" i="0" b="0">
+              <a:rPr sz="1400" i="0" b="0">
                 <a:solidFill>
                   <a:srgbClr val="D4D4D4"/>
                 </a:solidFill>
@@ -5239,7 +5239,7 @@
               <a:t>:</a:t>
             </a:r>
             <a:r>
-              <a:rPr sz="1500" i="0" b="0">
+              <a:rPr sz="1400" i="0" b="0">
                 <a:solidFill>
                   <a:srgbClr val="B5CEA8"/>
                 </a:solidFill>
@@ -5248,7 +5248,7 @@
               <a:t>30</a:t>
             </a:r>
             <a:r>
-              <a:rPr sz="1500" i="0" b="0">
+              <a:rPr sz="1400" i="0" b="0">
                 <a:solidFill>
                   <a:srgbClr val="D4D4D4"/>
                 </a:solidFill>
@@ -5257,7 +5257,7 @@
               <a:t> | </a:t>
             </a:r>
             <a:r>
-              <a:rPr sz="1500" i="0" b="0">
+              <a:rPr sz="1400" i="0" b="0">
                 <a:solidFill>
                   <a:srgbClr val="D4D4D4"/>
                 </a:solidFill>
@@ -5266,7 +5266,7 @@
               <a:t>PROBLEMA</a:t>
             </a:r>
             <a:r>
-              <a:rPr sz="1500" i="0" b="0">
+              <a:rPr sz="1400" i="0" b="0">
                 <a:solidFill>
                   <a:srgbClr val="D4D4D4"/>
                 </a:solidFill>
@@ -5275,7 +5275,7 @@
               <a:t>    | </a:t>
             </a:r>
             <a:r>
-              <a:rPr sz="1500" i="0" b="0">
+              <a:rPr sz="1400" i="0" b="0">
                 <a:solidFill>
                   <a:srgbClr val="D4D4D4"/>
                 </a:solidFill>
@@ -5284,7 +5284,7 @@
               <a:t>La</a:t>
             </a:r>
             <a:r>
-              <a:rPr sz="1500" i="0" b="0">
+              <a:rPr sz="1400" i="0" b="0">
                 <a:solidFill>
                   <a:srgbClr val="D4D4D4"/>
                 </a:solidFill>
@@ -5293,7 +5293,7 @@
               <a:t> </a:t>
             </a:r>
             <a:r>
-              <a:rPr sz="1500" i="0" b="0">
+              <a:rPr sz="1400" i="0" b="0">
                 <a:solidFill>
                   <a:srgbClr val="D4D4D4"/>
                 </a:solidFill>
@@ -5302,7 +5302,7 @@
               <a:t>clinica</a:t>
             </a:r>
             <a:r>
-              <a:rPr sz="1500" i="0" b="0">
+              <a:rPr sz="1400" i="0" b="0">
                 <a:solidFill>
                   <a:srgbClr val="D4D4D4"/>
                 </a:solidFill>
@@ -5311,7 +5311,7 @@
               <a:t>: </a:t>
             </a:r>
             <a:r>
-              <a:rPr sz="1500" i="0" b="0">
+              <a:rPr sz="1400" i="0" b="0">
                 <a:solidFill>
                   <a:srgbClr val="D4D4D4"/>
                 </a:solidFill>
@@ -5320,7 +5320,7 @@
               <a:t>fichas</a:t>
             </a:r>
             <a:r>
-              <a:rPr sz="1500" i="0" b="0">
+              <a:rPr sz="1400" i="0" b="0">
                 <a:solidFill>
                   <a:srgbClr val="D4D4D4"/>
                 </a:solidFill>
@@ -5329,7 +5329,7 @@
               <a:t> </a:t>
             </a:r>
             <a:r>
-              <a:rPr sz="1500" i="0" b="0">
+              <a:rPr sz="1400" i="0" b="0">
                 <a:solidFill>
                   <a:srgbClr val="D4D4D4"/>
                 </a:solidFill>
@@ -5338,7 +5338,7 @@
               <a:t>extraviadas</a:t>
             </a:r>
             <a:r>
-              <a:rPr sz="1500" i="0" b="0">
+              <a:rPr sz="1400" i="0" b="0">
                 <a:solidFill>
                   <a:srgbClr val="D4D4D4"/>
                 </a:solidFill>
@@ -5347,7 +5347,7 @@
               <a:t>, </a:t>
             </a:r>
             <a:r>
-              <a:rPr sz="1500" i="0" b="0">
+              <a:rPr sz="1400" i="0" b="0">
                 <a:solidFill>
                   <a:srgbClr val="B5CEA8"/>
                 </a:solidFill>
@@ -5356,7 +5356,7 @@
               <a:t>8</a:t>
             </a:r>
             <a:r>
-              <a:rPr sz="1500" i="0" b="0">
+              <a:rPr sz="1400" i="0" b="0">
                 <a:solidFill>
                   <a:srgbClr val="D4D4D4"/>
                 </a:solidFill>
@@ -5365,7 +5365,7 @@
               <a:t> </a:t>
             </a:r>
             <a:r>
-              <a:rPr sz="1500" i="0" b="0">
+              <a:rPr sz="1400" i="0" b="0">
                 <a:solidFill>
                   <a:srgbClr val="D4D4D4"/>
                 </a:solidFill>
@@ -5374,7 +5374,7 @@
               <a:t>min</a:t>
             </a:r>
             <a:r>
-              <a:rPr sz="1500" i="0" b="0">
+              <a:rPr sz="1400" i="0" b="0">
                 <a:solidFill>
                   <a:srgbClr val="D4D4D4"/>
                 </a:solidFill>
@@ -5383,7 +5383,7 @@
               <a:t> </a:t>
             </a:r>
             <a:r>
-              <a:rPr sz="1500" i="0" b="0">
+              <a:rPr sz="1400" i="0" b="0">
                 <a:solidFill>
                   <a:srgbClr val="D4D4D4"/>
                 </a:solidFill>
@@ -5392,7 +5392,7 @@
               <a:t>por</a:t>
             </a:r>
             <a:r>
-              <a:rPr sz="1500" i="0" b="0">
+              <a:rPr sz="1400" i="0" b="0">
                 <a:solidFill>
                   <a:srgbClr val="D4D4D4"/>
                 </a:solidFill>
@@ -5401,7 +5401,7 @@
               <a:t> </a:t>
             </a:r>
             <a:r>
-              <a:rPr sz="1500" i="0" b="0">
+              <a:rPr sz="1400" i="0" b="0">
                 <a:solidFill>
                   <a:srgbClr val="D4D4D4"/>
                 </a:solidFill>
@@ -5410,7 +5410,7 @@
               <a:t>historial</a:t>
             </a:r>
             <a:r>
-              <a:rPr sz="1500" i="0" b="0">
+              <a:rPr sz="1400" i="0" b="0">
                 <a:solidFill>
                   <a:srgbClr val="D4D4D4"/>
                 </a:solidFill>
@@ -5419,7 +5419,7 @@
               <a:t>, </a:t>
             </a:r>
             <a:r>
-              <a:rPr sz="1500" i="0" b="0">
+              <a:rPr sz="1400" i="0" b="0">
                 <a:solidFill>
                   <a:srgbClr val="D4D4D4"/>
                 </a:solidFill>
@@ -5428,7 +5428,7 @@
               <a:t>cero</a:t>
             </a:r>
             <a:r>
-              <a:rPr sz="1500" i="0" b="0">
+              <a:rPr sz="1400" i="0" b="0">
                 <a:solidFill>
                   <a:srgbClr val="D4D4D4"/>
                 </a:solidFill>
@@ -5437,7 +5437,7 @@
               <a:t> </a:t>
             </a:r>
             <a:r>
-              <a:rPr sz="1500" i="0" b="0">
+              <a:rPr sz="1400" i="0" b="0">
                 <a:solidFill>
                   <a:srgbClr val="D4D4D4"/>
                 </a:solidFill>
@@ -5449,11 +5449,11 @@
           <a:p>
             <a:pPr>
               <a:spcAft>
-                <a:spcPts val="321"/>
+                <a:spcPts val="300"/>
               </a:spcAft>
             </a:pPr>
             <a:r>
-              <a:rPr sz="1500" i="0" b="0">
+              <a:rPr sz="1400" i="0" b="0">
                 <a:solidFill>
                   <a:srgbClr val="B5CEA8"/>
                 </a:solidFill>
@@ -5462,7 +5462,7 @@
               <a:t>01</a:t>
             </a:r>
             <a:r>
-              <a:rPr sz="1500" i="0" b="0">
+              <a:rPr sz="1400" i="0" b="0">
                 <a:solidFill>
                   <a:srgbClr val="D4D4D4"/>
                 </a:solidFill>
@@ -5471,7 +5471,7 @@
               <a:t>:</a:t>
             </a:r>
             <a:r>
-              <a:rPr sz="1500" i="0" b="0">
+              <a:rPr sz="1400" i="0" b="0">
                 <a:solidFill>
                   <a:srgbClr val="B5CEA8"/>
                 </a:solidFill>
@@ -5480,7 +5480,7 @@
               <a:t>30</a:t>
             </a:r>
             <a:r>
-              <a:rPr sz="1500" i="0" b="0">
+              <a:rPr sz="1400" i="0" b="0">
                 <a:solidFill>
                   <a:srgbClr val="D4D4D4"/>
                 </a:solidFill>
@@ -5489,7 +5489,7 @@
               <a:t>-</a:t>
             </a:r>
             <a:r>
-              <a:rPr sz="1500" i="0" b="0">
+              <a:rPr sz="1400" i="0" b="0">
                 <a:solidFill>
                   <a:srgbClr val="B5CEA8"/>
                 </a:solidFill>
@@ -5498,7 +5498,7 @@
               <a:t>03</a:t>
             </a:r>
             <a:r>
-              <a:rPr sz="1500" i="0" b="0">
+              <a:rPr sz="1400" i="0" b="0">
                 <a:solidFill>
                   <a:srgbClr val="D4D4D4"/>
                 </a:solidFill>
@@ -5507,7 +5507,7 @@
               <a:t>:</a:t>
             </a:r>
             <a:r>
-              <a:rPr sz="1500" i="0" b="0">
+              <a:rPr sz="1400" i="0" b="0">
                 <a:solidFill>
                   <a:srgbClr val="B5CEA8"/>
                 </a:solidFill>
@@ -5516,7 +5516,7 @@
               <a:t>00</a:t>
             </a:r>
             <a:r>
-              <a:rPr sz="1500" i="0" b="0">
+              <a:rPr sz="1400" i="0" b="0">
                 <a:solidFill>
                   <a:srgbClr val="D4D4D4"/>
                 </a:solidFill>
@@ -5525,7 +5525,7 @@
               <a:t> | </a:t>
             </a:r>
             <a:r>
-              <a:rPr sz="1500" i="0" b="0">
+              <a:rPr sz="1400" i="0" b="0">
                 <a:solidFill>
                   <a:srgbClr val="D4D4D4"/>
                 </a:solidFill>
@@ -5534,7 +5534,7 @@
               <a:t>ALCANCE</a:t>
             </a:r>
             <a:r>
-              <a:rPr sz="1500" i="0" b="0">
+              <a:rPr sz="1400" i="0" b="0">
                 <a:solidFill>
                   <a:srgbClr val="D4D4D4"/>
                 </a:solidFill>
@@ -5543,7 +5543,7 @@
               <a:t>     | </a:t>
             </a:r>
             <a:r>
-              <a:rPr sz="1500" i="0" b="0">
+              <a:rPr sz="1400" i="0" b="0">
                 <a:solidFill>
                   <a:srgbClr val="D4D4D4"/>
                 </a:solidFill>
@@ -5552,7 +5552,7 @@
               <a:t>Lo</a:t>
             </a:r>
             <a:r>
-              <a:rPr sz="1500" i="0" b="0">
+              <a:rPr sz="1400" i="0" b="0">
                 <a:solidFill>
                   <a:srgbClr val="D4D4D4"/>
                 </a:solidFill>
@@ -5561,7 +5561,7 @@
               <a:t> </a:t>
             </a:r>
             <a:r>
-              <a:rPr sz="1500" i="0" b="0">
+              <a:rPr sz="1400" i="0" b="0">
                 <a:solidFill>
                   <a:srgbClr val="D4D4D4"/>
                 </a:solidFill>
@@ -5570,7 +5570,7 @@
               <a:t>que</a:t>
             </a:r>
             <a:r>
-              <a:rPr sz="1500" i="0" b="0">
+              <a:rPr sz="1400" i="0" b="0">
                 <a:solidFill>
                   <a:srgbClr val="D4D4D4"/>
                 </a:solidFill>
@@ -5579,7 +5579,7 @@
               <a:t> </a:t>
             </a:r>
             <a:r>
-              <a:rPr sz="1500" i="0" b="0">
+              <a:rPr sz="1400" i="0" b="0">
                 <a:solidFill>
                   <a:srgbClr val="D4D4D4"/>
                 </a:solidFill>
@@ -5588,7 +5588,7 @@
               <a:t>si</a:t>
             </a:r>
             <a:r>
-              <a:rPr sz="1500" i="0" b="0">
+              <a:rPr sz="1400" i="0" b="0">
                 <a:solidFill>
                   <a:srgbClr val="D4D4D4"/>
                 </a:solidFill>
@@ -5597,7 +5597,7 @@
               <a:t> </a:t>
             </a:r>
             <a:r>
-              <a:rPr sz="1500" i="0" b="0">
+              <a:rPr sz="1400" i="0" b="0">
                 <a:solidFill>
                   <a:srgbClr val="D4D4D4"/>
                 </a:solidFill>
@@ -5606,7 +5606,7 @@
               <a:t>entra</a:t>
             </a:r>
             <a:r>
-              <a:rPr sz="1500" i="0" b="0">
+              <a:rPr sz="1400" i="0" b="0">
                 <a:solidFill>
                   <a:srgbClr val="D4D4D4"/>
                 </a:solidFill>
@@ -5615,7 +5615,7 @@
               <a:t> </a:t>
             </a:r>
             <a:r>
-              <a:rPr sz="1500" i="0" b="0">
+              <a:rPr sz="1400" i="0" b="0">
                 <a:solidFill>
                   <a:srgbClr val="D4D4D4"/>
                 </a:solidFill>
@@ -5624,7 +5624,7 @@
               <a:t>y</a:t>
             </a:r>
             <a:r>
-              <a:rPr sz="1500" i="0" b="0">
+              <a:rPr sz="1400" i="0" b="0">
                 <a:solidFill>
                   <a:srgbClr val="D4D4D4"/>
                 </a:solidFill>
@@ -5633,7 +5633,7 @@
               <a:t> </a:t>
             </a:r>
             <a:r>
-              <a:rPr sz="1500" i="0" b="0">
+              <a:rPr sz="1400" i="0" b="0">
                 <a:solidFill>
                   <a:srgbClr val="D4D4D4"/>
                 </a:solidFill>
@@ -5642,7 +5642,7 @@
               <a:t>lo</a:t>
             </a:r>
             <a:r>
-              <a:rPr sz="1500" i="0" b="0">
+              <a:rPr sz="1400" i="0" b="0">
                 <a:solidFill>
                   <a:srgbClr val="D4D4D4"/>
                 </a:solidFill>
@@ -5651,7 +5651,7 @@
               <a:t> </a:t>
             </a:r>
             <a:r>
-              <a:rPr sz="1500" i="0" b="0">
+              <a:rPr sz="1400" i="0" b="0">
                 <a:solidFill>
                   <a:srgbClr val="D4D4D4"/>
                 </a:solidFill>
@@ -5660,7 +5660,7 @@
               <a:t>que</a:t>
             </a:r>
             <a:r>
-              <a:rPr sz="1500" i="0" b="0">
+              <a:rPr sz="1400" i="0" b="0">
                 <a:solidFill>
                   <a:srgbClr val="D4D4D4"/>
                 </a:solidFill>
@@ -5669,7 +5669,7 @@
               <a:t> </a:t>
             </a:r>
             <a:r>
-              <a:rPr sz="1500" i="0" b="0">
+              <a:rPr sz="1400" i="0" b="0">
                 <a:solidFill>
                   <a:srgbClr val="D4D4D4"/>
                 </a:solidFill>
@@ -5678,7 +5678,7 @@
               <a:t>quedo</a:t>
             </a:r>
             <a:r>
-              <a:rPr sz="1500" i="0" b="0">
+              <a:rPr sz="1400" i="0" b="0">
                 <a:solidFill>
                   <a:srgbClr val="D4D4D4"/>
                 </a:solidFill>
@@ -5687,7 +5687,7 @@
               <a:t> </a:t>
             </a:r>
             <a:r>
-              <a:rPr sz="1500" i="0" b="0">
+              <a:rPr sz="1400" i="0" b="0">
                 <a:solidFill>
                   <a:srgbClr val="D4D4D4"/>
                 </a:solidFill>
@@ -5696,7 +5696,7 @@
               <a:t>por</a:t>
             </a:r>
             <a:r>
-              <a:rPr sz="1500" i="0" b="0">
+              <a:rPr sz="1400" i="0" b="0">
                 <a:solidFill>
                   <a:srgbClr val="D4D4D4"/>
                 </a:solidFill>
@@ -5705,7 +5705,7 @@
               <a:t> </a:t>
             </a:r>
             <a:r>
-              <a:rPr sz="1500" i="0" b="0">
+              <a:rPr sz="1400" i="0" b="0">
                 <a:solidFill>
                   <a:srgbClr val="D4D4D4"/>
                 </a:solidFill>
@@ -5714,7 +5714,7 @@
               <a:t>fuera</a:t>
             </a:r>
             <a:r>
-              <a:rPr sz="1500" i="0" b="0">
+              <a:rPr sz="1400" i="0" b="0">
                 <a:solidFill>
                   <a:srgbClr val="D4D4D4"/>
                 </a:solidFill>
@@ -5723,7 +5723,7 @@
               <a:t>, </a:t>
             </a:r>
             <a:r>
-              <a:rPr sz="1500" i="0" b="0">
+              <a:rPr sz="1400" i="0" b="0">
                 <a:solidFill>
                   <a:srgbClr val="D4D4D4"/>
                 </a:solidFill>
@@ -5732,7 +5732,7 @@
               <a:t>con</a:t>
             </a:r>
             <a:r>
-              <a:rPr sz="1500" i="0" b="0">
+              <a:rPr sz="1400" i="0" b="0">
                 <a:solidFill>
                   <a:srgbClr val="D4D4D4"/>
                 </a:solidFill>
@@ -5741,7 +5741,7 @@
               <a:t> </a:t>
             </a:r>
             <a:r>
-              <a:rPr sz="1500" i="0" b="0">
+              <a:rPr sz="1400" i="0" b="0">
                 <a:solidFill>
                   <a:srgbClr val="D4D4D4"/>
                 </a:solidFill>
@@ -5750,7 +5750,7 @@
               <a:t>la</a:t>
             </a:r>
             <a:r>
-              <a:rPr sz="1500" i="0" b="0">
+              <a:rPr sz="1400" i="0" b="0">
                 <a:solidFill>
                   <a:srgbClr val="D4D4D4"/>
                 </a:solidFill>
@@ -5759,7 +5759,7 @@
               <a:t> </a:t>
             </a:r>
             <a:r>
-              <a:rPr sz="1500" i="0" b="0">
+              <a:rPr sz="1400" i="0" b="0">
                 <a:solidFill>
                   <a:srgbClr val="D4D4D4"/>
                 </a:solidFill>
@@ -5771,11 +5771,11 @@
           <a:p>
             <a:pPr>
               <a:spcAft>
-                <a:spcPts val="321"/>
+                <a:spcPts val="300"/>
               </a:spcAft>
             </a:pPr>
             <a:r>
-              <a:rPr sz="1500" i="0" b="0">
+              <a:rPr sz="1400" i="0" b="0">
                 <a:solidFill>
                   <a:srgbClr val="B5CEA8"/>
                 </a:solidFill>
@@ -5784,7 +5784,7 @@
               <a:t>03</a:t>
             </a:r>
             <a:r>
-              <a:rPr sz="1500" i="0" b="0">
+              <a:rPr sz="1400" i="0" b="0">
                 <a:solidFill>
                   <a:srgbClr val="D4D4D4"/>
                 </a:solidFill>
@@ -5793,7 +5793,7 @@
               <a:t>:</a:t>
             </a:r>
             <a:r>
-              <a:rPr sz="1500" i="0" b="0">
+              <a:rPr sz="1400" i="0" b="0">
                 <a:solidFill>
                   <a:srgbClr val="B5CEA8"/>
                 </a:solidFill>
@@ -5802,7 +5802,7 @@
               <a:t>00</a:t>
             </a:r>
             <a:r>
-              <a:rPr sz="1500" i="0" b="0">
+              <a:rPr sz="1400" i="0" b="0">
                 <a:solidFill>
                   <a:srgbClr val="D4D4D4"/>
                 </a:solidFill>
@@ -5811,7 +5811,7 @@
               <a:t>-</a:t>
             </a:r>
             <a:r>
-              <a:rPr sz="1500" i="0" b="0">
+              <a:rPr sz="1400" i="0" b="0">
                 <a:solidFill>
                   <a:srgbClr val="B5CEA8"/>
                 </a:solidFill>
@@ -5820,7 +5820,7 @@
               <a:t>05</a:t>
             </a:r>
             <a:r>
-              <a:rPr sz="1500" i="0" b="0">
+              <a:rPr sz="1400" i="0" b="0">
                 <a:solidFill>
                   <a:srgbClr val="D4D4D4"/>
                 </a:solidFill>
@@ -5829,7 +5829,7 @@
               <a:t>:</a:t>
             </a:r>
             <a:r>
-              <a:rPr sz="1500" i="0" b="0">
+              <a:rPr sz="1400" i="0" b="0">
                 <a:solidFill>
                   <a:srgbClr val="B5CEA8"/>
                 </a:solidFill>
@@ -5838,7 +5838,7 @@
               <a:t>00</a:t>
             </a:r>
             <a:r>
-              <a:rPr sz="1500" i="0" b="0">
+              <a:rPr sz="1400" i="0" b="0">
                 <a:solidFill>
                   <a:srgbClr val="D4D4D4"/>
                 </a:solidFill>
@@ -5847,7 +5847,7 @@
               <a:t> | </a:t>
             </a:r>
             <a:r>
-              <a:rPr sz="1500" i="0" b="0">
+              <a:rPr sz="1400" i="0" b="0">
                 <a:solidFill>
                   <a:srgbClr val="D4D4D4"/>
                 </a:solidFill>
@@ -5856,7 +5856,7 @@
               <a:t>REQUISITOS</a:t>
             </a:r>
             <a:r>
-              <a:rPr sz="1500" i="0" b="0">
+              <a:rPr sz="1400" i="0" b="0">
                 <a:solidFill>
                   <a:srgbClr val="D4D4D4"/>
                 </a:solidFill>
@@ -5865,7 +5865,7 @@
               <a:t>  | </a:t>
             </a:r>
             <a:r>
-              <a:rPr sz="1500" i="0" b="0">
+              <a:rPr sz="1400" i="0" b="0">
                 <a:solidFill>
                   <a:srgbClr val="D4D4D4"/>
                 </a:solidFill>
@@ -5874,7 +5874,7 @@
               <a:t>Solo</a:t>
             </a:r>
             <a:r>
-              <a:rPr sz="1500" i="0" b="0">
+              <a:rPr sz="1400" i="0" b="0">
                 <a:solidFill>
                   <a:srgbClr val="D4D4D4"/>
                 </a:solidFill>
@@ -5883,7 +5883,7 @@
               <a:t> </a:t>
             </a:r>
             <a:r>
-              <a:rPr sz="1500" i="0" b="0">
+              <a:rPr sz="1400" i="0" b="0">
                 <a:solidFill>
                   <a:srgbClr val="D4D4D4"/>
                 </a:solidFill>
@@ -5892,7 +5892,7 @@
               <a:t>los</a:t>
             </a:r>
             <a:r>
-              <a:rPr sz="1500" i="0" b="0">
+              <a:rPr sz="1400" i="0" b="0">
                 <a:solidFill>
                   <a:srgbClr val="D4D4D4"/>
                 </a:solidFill>
@@ -5901,7 +5901,7 @@
               <a:t> </a:t>
             </a:r>
             <a:r>
-              <a:rPr sz="1500" i="0" b="0">
+              <a:rPr sz="1400" i="0" b="0">
                 <a:solidFill>
                   <a:srgbClr val="B5CEA8"/>
                 </a:solidFill>
@@ -5910,7 +5910,7 @@
               <a:t>3</a:t>
             </a:r>
             <a:r>
-              <a:rPr sz="1500" i="0" b="0">
+              <a:rPr sz="1400" i="0" b="0">
                 <a:solidFill>
                   <a:srgbClr val="D4D4D4"/>
                 </a:solidFill>
@@ -5919,7 +5919,7 @@
               <a:t> </a:t>
             </a:r>
             <a:r>
-              <a:rPr sz="1500" i="0" b="0">
+              <a:rPr sz="1400" i="0" b="0">
                 <a:solidFill>
                   <a:srgbClr val="D4D4D4"/>
                 </a:solidFill>
@@ -5928,7 +5928,7 @@
               <a:t>RF</a:t>
             </a:r>
             <a:r>
-              <a:rPr sz="1500" i="0" b="0">
+              <a:rPr sz="1400" i="0" b="0">
                 <a:solidFill>
                   <a:srgbClr val="D4D4D4"/>
                 </a:solidFill>
@@ -5937,7 +5937,7 @@
               <a:t> </a:t>
             </a:r>
             <a:r>
-              <a:rPr sz="1500" i="0" b="0">
+              <a:rPr sz="1400" i="0" b="0">
                 <a:solidFill>
                   <a:srgbClr val="D4D4D4"/>
                 </a:solidFill>
@@ -5946,7 +5946,7 @@
               <a:t>criticos</a:t>
             </a:r>
             <a:r>
-              <a:rPr sz="1500" i="0" b="0">
+              <a:rPr sz="1400" i="0" b="0">
                 <a:solidFill>
                   <a:srgbClr val="D4D4D4"/>
                 </a:solidFill>
@@ -5955,7 +5955,7 @@
               <a:t> </a:t>
             </a:r>
             <a:r>
-              <a:rPr sz="1500" i="0" b="0">
+              <a:rPr sz="1400" i="0" b="0">
                 <a:solidFill>
                   <a:srgbClr val="D4D4D4"/>
                 </a:solidFill>
@@ -5964,7 +5964,7 @@
               <a:t>y</a:t>
             </a:r>
             <a:r>
-              <a:rPr sz="1500" i="0" b="0">
+              <a:rPr sz="1400" i="0" b="0">
                 <a:solidFill>
                   <a:srgbClr val="D4D4D4"/>
                 </a:solidFill>
@@ -5973,7 +5973,7 @@
               <a:t> </a:t>
             </a:r>
             <a:r>
-              <a:rPr sz="1500" i="0" b="0">
+              <a:rPr sz="1400" i="0" b="0">
                 <a:solidFill>
                   <a:srgbClr val="B5CEA8"/>
                 </a:solidFill>
@@ -5982,7 +5982,7 @@
               <a:t>2</a:t>
             </a:r>
             <a:r>
-              <a:rPr sz="1500" i="0" b="0">
+              <a:rPr sz="1400" i="0" b="0">
                 <a:solidFill>
                   <a:srgbClr val="D4D4D4"/>
                 </a:solidFill>
@@ -5991,7 +5991,7 @@
               <a:t> </a:t>
             </a:r>
             <a:r>
-              <a:rPr sz="1500" i="0" b="0">
+              <a:rPr sz="1400" i="0" b="0">
                 <a:solidFill>
                   <a:srgbClr val="D4D4D4"/>
                 </a:solidFill>
@@ -6000,7 +6000,7 @@
               <a:t>RNF</a:t>
             </a:r>
             <a:r>
-              <a:rPr sz="1500" i="0" b="0">
+              <a:rPr sz="1400" i="0" b="0">
                 <a:solidFill>
                   <a:srgbClr val="D4D4D4"/>
                 </a:solidFill>
@@ -6009,7 +6009,7 @@
               <a:t> </a:t>
             </a:r>
             <a:r>
-              <a:rPr sz="1500" i="0" b="0">
+              <a:rPr sz="1400" i="0" b="0">
                 <a:solidFill>
                   <a:srgbClr val="D4D4D4"/>
                 </a:solidFill>
@@ -6018,7 +6018,7 @@
               <a:t>medibles</a:t>
             </a:r>
             <a:r>
-              <a:rPr sz="1500" i="0" b="0">
+              <a:rPr sz="1400" i="0" b="0">
                 <a:solidFill>
                   <a:srgbClr val="D4D4D4"/>
                 </a:solidFill>
@@ -6027,7 +6027,7 @@
               <a:t>; </a:t>
             </a:r>
             <a:r>
-              <a:rPr sz="1500" i="0" b="0">
+              <a:rPr sz="1400" i="0" b="0">
                 <a:solidFill>
                   <a:srgbClr val="D4D4D4"/>
                 </a:solidFill>
@@ -6036,7 +6036,7 @@
               <a:t>el</a:t>
             </a:r>
             <a:r>
-              <a:rPr sz="1500" i="0" b="0">
+              <a:rPr sz="1400" i="0" b="0">
                 <a:solidFill>
                   <a:srgbClr val="D4D4D4"/>
                 </a:solidFill>
@@ -6045,7 +6045,7 @@
               <a:t> </a:t>
             </a:r>
             <a:r>
-              <a:rPr sz="1500" i="0" b="0">
+              <a:rPr sz="1400" i="0" b="0">
                 <a:solidFill>
                   <a:srgbClr val="D4D4D4"/>
                 </a:solidFill>
@@ -6054,7 +6054,7 @@
               <a:t>resto</a:t>
             </a:r>
             <a:r>
-              <a:rPr sz="1500" i="0" b="0">
+              <a:rPr sz="1400" i="0" b="0">
                 <a:solidFill>
                   <a:srgbClr val="D4D4D4"/>
                 </a:solidFill>
@@ -6063,7 +6063,7 @@
               <a:t> </a:t>
             </a:r>
             <a:r>
-              <a:rPr sz="1500" i="0" b="0">
+              <a:rPr sz="1400" i="0" b="0">
                 <a:solidFill>
                   <a:srgbClr val="D4D4D4"/>
                 </a:solidFill>
@@ -6072,7 +6072,7 @@
               <a:t>en</a:t>
             </a:r>
             <a:r>
-              <a:rPr sz="1500" i="0" b="0">
+              <a:rPr sz="1400" i="0" b="0">
                 <a:solidFill>
                   <a:srgbClr val="D4D4D4"/>
                 </a:solidFill>
@@ -6081,7 +6081,7 @@
               <a:t> </a:t>
             </a:r>
             <a:r>
-              <a:rPr sz="1500" i="0" b="0">
+              <a:rPr sz="1400" i="0" b="0">
                 <a:solidFill>
                   <a:srgbClr val="D4D4D4"/>
                 </a:solidFill>
@@ -6090,7 +6090,7 @@
               <a:t>el</a:t>
             </a:r>
             <a:r>
-              <a:rPr sz="1500" i="0" b="0">
+              <a:rPr sz="1400" i="0" b="0">
                 <a:solidFill>
                   <a:srgbClr val="D4D4D4"/>
                 </a:solidFill>
@@ -6099,7 +6099,7 @@
               <a:t> </a:t>
             </a:r>
             <a:r>
-              <a:rPr sz="1500" i="0" b="0">
+              <a:rPr sz="1400" i="0" b="0">
                 <a:solidFill>
                   <a:srgbClr val="D4D4D4"/>
                 </a:solidFill>
@@ -6111,11 +6111,11 @@
           <a:p>
             <a:pPr>
               <a:spcAft>
-                <a:spcPts val="321"/>
+                <a:spcPts val="300"/>
               </a:spcAft>
             </a:pPr>
             <a:r>
-              <a:rPr sz="1500" i="0" b="0">
+              <a:rPr sz="1400" i="0" b="0">
                 <a:solidFill>
                   <a:srgbClr val="B5CEA8"/>
                 </a:solidFill>
@@ -6124,7 +6124,7 @@
               <a:t>05</a:t>
             </a:r>
             <a:r>
-              <a:rPr sz="1500" i="0" b="0">
+              <a:rPr sz="1400" i="0" b="0">
                 <a:solidFill>
                   <a:srgbClr val="D4D4D4"/>
                 </a:solidFill>
@@ -6133,7 +6133,7 @@
               <a:t>:</a:t>
             </a:r>
             <a:r>
-              <a:rPr sz="1500" i="0" b="0">
+              <a:rPr sz="1400" i="0" b="0">
                 <a:solidFill>
                   <a:srgbClr val="B5CEA8"/>
                 </a:solidFill>
@@ -6142,7 +6142,7 @@
               <a:t>00</a:t>
             </a:r>
             <a:r>
-              <a:rPr sz="1500" i="0" b="0">
+              <a:rPr sz="1400" i="0" b="0">
                 <a:solidFill>
                   <a:srgbClr val="D4D4D4"/>
                 </a:solidFill>
@@ -6151,7 +6151,7 @@
               <a:t>-</a:t>
             </a:r>
             <a:r>
-              <a:rPr sz="1500" i="0" b="0">
+              <a:rPr sz="1400" i="0" b="0">
                 <a:solidFill>
                   <a:srgbClr val="B5CEA8"/>
                 </a:solidFill>
@@ -6160,7 +6160,7 @@
               <a:t>07</a:t>
             </a:r>
             <a:r>
-              <a:rPr sz="1500" i="0" b="0">
+              <a:rPr sz="1400" i="0" b="0">
                 <a:solidFill>
                   <a:srgbClr val="D4D4D4"/>
                 </a:solidFill>
@@ -6169,7 +6169,7 @@
               <a:t>:</a:t>
             </a:r>
             <a:r>
-              <a:rPr sz="1500" i="0" b="0">
+              <a:rPr sz="1400" i="0" b="0">
                 <a:solidFill>
                   <a:srgbClr val="B5CEA8"/>
                 </a:solidFill>
@@ -6178,7 +6178,7 @@
               <a:t>00</a:t>
             </a:r>
             <a:r>
-              <a:rPr sz="1500" i="0" b="0">
+              <a:rPr sz="1400" i="0" b="0">
                 <a:solidFill>
                   <a:srgbClr val="D4D4D4"/>
                 </a:solidFill>
@@ -6187,7 +6187,7 @@
               <a:t> | </a:t>
             </a:r>
             <a:r>
-              <a:rPr sz="1500" i="0" b="0">
+              <a:rPr sz="1400" i="0" b="0">
                 <a:solidFill>
                   <a:srgbClr val="D4D4D4"/>
                 </a:solidFill>
@@ -6196,7 +6196,7 @@
               <a:t>MODELO</a:t>
             </a:r>
             <a:r>
-              <a:rPr sz="1500" i="0" b="0">
+              <a:rPr sz="1400" i="0" b="0">
                 <a:solidFill>
                   <a:srgbClr val="D4D4D4"/>
                 </a:solidFill>
@@ -6205,7 +6205,7 @@
               <a:t>      | </a:t>
             </a:r>
             <a:r>
-              <a:rPr sz="1500" i="0" b="0">
+              <a:rPr sz="1400" i="0" b="0">
                 <a:solidFill>
                   <a:srgbClr val="D4D4D4"/>
                 </a:solidFill>
@@ -6214,7 +6214,7 @@
               <a:t>Casos</a:t>
             </a:r>
             <a:r>
-              <a:rPr sz="1500" i="0" b="0">
+              <a:rPr sz="1400" i="0" b="0">
                 <a:solidFill>
                   <a:srgbClr val="D4D4D4"/>
                 </a:solidFill>
@@ -6223,7 +6223,7 @@
               <a:t> </a:t>
             </a:r>
             <a:r>
-              <a:rPr sz="1500" i="0" b="0">
+              <a:rPr sz="1400" i="0" b="0">
                 <a:solidFill>
                   <a:srgbClr val="D4D4D4"/>
                 </a:solidFill>
@@ -6232,7 +6232,7 @@
               <a:t>de</a:t>
             </a:r>
             <a:r>
-              <a:rPr sz="1500" i="0" b="0">
+              <a:rPr sz="1400" i="0" b="0">
                 <a:solidFill>
                   <a:srgbClr val="D4D4D4"/>
                 </a:solidFill>
@@ -6241,7 +6241,7 @@
               <a:t> </a:t>
             </a:r>
             <a:r>
-              <a:rPr sz="1500" i="0" b="0">
+              <a:rPr sz="1400" i="0" b="0">
                 <a:solidFill>
                   <a:srgbClr val="D4D4D4"/>
                 </a:solidFill>
@@ -6250,7 +6250,7 @@
               <a:t>uso</a:t>
             </a:r>
             <a:r>
-              <a:rPr sz="1500" i="0" b="0">
+              <a:rPr sz="1400" i="0" b="0">
                 <a:solidFill>
                   <a:srgbClr val="D4D4D4"/>
                 </a:solidFill>
@@ -6259,7 +6259,7 @@
               <a:t> </a:t>
             </a:r>
             <a:r>
-              <a:rPr sz="1500" i="0" b="0">
+              <a:rPr sz="1400" i="0" b="0">
                 <a:solidFill>
                   <a:srgbClr val="D4D4D4"/>
                 </a:solidFill>
@@ -6268,7 +6268,7 @@
               <a:t>y</a:t>
             </a:r>
             <a:r>
-              <a:rPr sz="1500" i="0" b="0">
+              <a:rPr sz="1400" i="0" b="0">
                 <a:solidFill>
                   <a:srgbClr val="D4D4D4"/>
                 </a:solidFill>
@@ -6277,7 +6277,7 @@
               <a:t> </a:t>
             </a:r>
             <a:r>
-              <a:rPr sz="1500" i="0" b="0">
+              <a:rPr sz="1400" i="0" b="0">
                 <a:solidFill>
                   <a:srgbClr val="D4D4D4"/>
                 </a:solidFill>
@@ -6286,7 +6286,7 @@
               <a:t>clases</a:t>
             </a:r>
             <a:r>
-              <a:rPr sz="1500" i="0" b="0">
+              <a:rPr sz="1400" i="0" b="0">
                 <a:solidFill>
                   <a:srgbClr val="D4D4D4"/>
                 </a:solidFill>
@@ -6295,7 +6295,7 @@
               <a:t>: </a:t>
             </a:r>
             <a:r>
-              <a:rPr sz="1500" i="0" b="0">
+              <a:rPr sz="1400" i="0" b="0">
                 <a:solidFill>
                   <a:srgbClr val="D4D4D4"/>
                 </a:solidFill>
@@ -6304,7 +6304,7 @@
               <a:t>Mascota</a:t>
             </a:r>
             <a:r>
-              <a:rPr sz="1500" i="0" b="0">
+              <a:rPr sz="1400" i="0" b="0">
                 <a:solidFill>
                   <a:srgbClr val="D4D4D4"/>
                 </a:solidFill>
@@ -6313,7 +6313,7 @@
               <a:t>, </a:t>
             </a:r>
             <a:r>
-              <a:rPr sz="1500" i="0" b="0">
+              <a:rPr sz="1400" i="0" b="0">
                 <a:solidFill>
                   <a:srgbClr val="D4D4D4"/>
                 </a:solidFill>
@@ -6322,7 +6322,7 @@
               <a:t>Dueño</a:t>
             </a:r>
             <a:r>
-              <a:rPr sz="1500" i="0" b="0">
+              <a:rPr sz="1400" i="0" b="0">
                 <a:solidFill>
                   <a:srgbClr val="D4D4D4"/>
                 </a:solidFill>
@@ -6331,7 +6331,7 @@
               <a:t>, </a:t>
             </a:r>
             <a:r>
-              <a:rPr sz="1500" i="0" b="0">
+              <a:rPr sz="1400" i="0" b="0">
                 <a:solidFill>
                   <a:srgbClr val="D4D4D4"/>
                 </a:solidFill>
@@ -6340,7 +6340,7 @@
               <a:t>Historia_Clinica</a:t>
             </a:r>
             <a:r>
-              <a:rPr sz="1500" i="0" b="0">
+              <a:rPr sz="1400" i="0" b="0">
                 <a:solidFill>
                   <a:srgbClr val="D4D4D4"/>
                 </a:solidFill>
@@ -6349,7 +6349,7 @@
               <a:t>, </a:t>
             </a:r>
             <a:r>
-              <a:rPr sz="1500" i="0" b="0">
+              <a:rPr sz="1400" i="0" b="0">
                 <a:solidFill>
                   <a:srgbClr val="D4D4D4"/>
                 </a:solidFill>
@@ -6361,11 +6361,11 @@
           <a:p>
             <a:pPr>
               <a:spcAft>
-                <a:spcPts val="321"/>
+                <a:spcPts val="300"/>
               </a:spcAft>
             </a:pPr>
             <a:r>
-              <a:rPr sz="1500" i="0" b="0">
+              <a:rPr sz="1400" i="0" b="0">
                 <a:solidFill>
                   <a:srgbClr val="B5CEA8"/>
                 </a:solidFill>
@@ -6374,7 +6374,7 @@
               <a:t>07</a:t>
             </a:r>
             <a:r>
-              <a:rPr sz="1500" i="0" b="0">
+              <a:rPr sz="1400" i="0" b="0">
                 <a:solidFill>
                   <a:srgbClr val="D4D4D4"/>
                 </a:solidFill>
@@ -6383,7 +6383,7 @@
               <a:t>:</a:t>
             </a:r>
             <a:r>
-              <a:rPr sz="1500" i="0" b="0">
+              <a:rPr sz="1400" i="0" b="0">
                 <a:solidFill>
                   <a:srgbClr val="B5CEA8"/>
                 </a:solidFill>
@@ -6392,7 +6392,7 @@
               <a:t>00</a:t>
             </a:r>
             <a:r>
-              <a:rPr sz="1500" i="0" b="0">
+              <a:rPr sz="1400" i="0" b="0">
                 <a:solidFill>
                   <a:srgbClr val="D4D4D4"/>
                 </a:solidFill>
@@ -6401,7 +6401,7 @@
               <a:t>-</a:t>
             </a:r>
             <a:r>
-              <a:rPr sz="1500" i="0" b="0">
+              <a:rPr sz="1400" i="0" b="0">
                 <a:solidFill>
                   <a:srgbClr val="B5CEA8"/>
                 </a:solidFill>
@@ -6410,7 +6410,7 @@
               <a:t>09</a:t>
             </a:r>
             <a:r>
-              <a:rPr sz="1500" i="0" b="0">
+              <a:rPr sz="1400" i="0" b="0">
                 <a:solidFill>
                   <a:srgbClr val="D4D4D4"/>
                 </a:solidFill>
@@ -6419,7 +6419,7 @@
               <a:t>:</a:t>
             </a:r>
             <a:r>
-              <a:rPr sz="1500" i="0" b="0">
+              <a:rPr sz="1400" i="0" b="0">
                 <a:solidFill>
                   <a:srgbClr val="B5CEA8"/>
                 </a:solidFill>
@@ -6428,7 +6428,7 @@
               <a:t>00</a:t>
             </a:r>
             <a:r>
-              <a:rPr sz="1500" i="0" b="0">
+              <a:rPr sz="1400" i="0" b="0">
                 <a:solidFill>
                   <a:srgbClr val="D4D4D4"/>
                 </a:solidFill>
@@ -6437,7 +6437,7 @@
               <a:t> | </a:t>
             </a:r>
             <a:r>
-              <a:rPr sz="1500" i="0" b="0">
+              <a:rPr sz="1400" i="0" b="0">
                 <a:solidFill>
                   <a:srgbClr val="D4D4D4"/>
                 </a:solidFill>
@@ -6446,7 +6446,7 @@
               <a:t>INTERFAZ</a:t>
             </a:r>
             <a:r>
-              <a:rPr sz="1500" i="0" b="0">
+              <a:rPr sz="1400" i="0" b="0">
                 <a:solidFill>
                   <a:srgbClr val="D4D4D4"/>
                 </a:solidFill>
@@ -6455,7 +6455,7 @@
               <a:t>    | </a:t>
             </a:r>
             <a:r>
-              <a:rPr sz="1500" i="0" b="0">
+              <a:rPr sz="1400" i="0" b="0">
                 <a:solidFill>
                   <a:srgbClr val="D4D4D4"/>
                 </a:solidFill>
@@ -6464,7 +6464,7 @@
               <a:t>Prototipo</a:t>
             </a:r>
             <a:r>
-              <a:rPr sz="1500" i="0" b="0">
+              <a:rPr sz="1400" i="0" b="0">
                 <a:solidFill>
                   <a:srgbClr val="D4D4D4"/>
                 </a:solidFill>
@@ -6473,7 +6473,7 @@
               <a:t> </a:t>
             </a:r>
             <a:r>
-              <a:rPr sz="1500" i="0" b="0">
+              <a:rPr sz="1400" i="0" b="0">
                 <a:solidFill>
                   <a:srgbClr val="D4D4D4"/>
                 </a:solidFill>
@@ -6482,7 +6482,7 @@
               <a:t>en</a:t>
             </a:r>
             <a:r>
-              <a:rPr sz="1500" i="0" b="0">
+              <a:rPr sz="1400" i="0" b="0">
                 <a:solidFill>
                   <a:srgbClr val="D4D4D4"/>
                 </a:solidFill>
@@ -6491,7 +6491,7 @@
               <a:t> </a:t>
             </a:r>
             <a:r>
-              <a:rPr sz="1500" i="0" b="0">
+              <a:rPr sz="1400" i="0" b="0">
                 <a:solidFill>
                   <a:srgbClr val="D4D4D4"/>
                 </a:solidFill>
@@ -6500,7 +6500,7 @@
               <a:t>vivo</a:t>
             </a:r>
             <a:r>
-              <a:rPr sz="1500" i="0" b="0">
+              <a:rPr sz="1400" i="0" b="0">
                 <a:solidFill>
                   <a:srgbClr val="D4D4D4"/>
                 </a:solidFill>
@@ -6509,7 +6509,7 @@
               <a:t>: </a:t>
             </a:r>
             <a:r>
-              <a:rPr sz="1500" i="0" b="0">
+              <a:rPr sz="1400" i="0" b="0">
                 <a:solidFill>
                   <a:srgbClr val="D4D4D4"/>
                 </a:solidFill>
@@ -6518,7 +6518,7 @@
               <a:t>registrar</a:t>
             </a:r>
             <a:r>
-              <a:rPr sz="1500" i="0" b="0">
+              <a:rPr sz="1400" i="0" b="0">
                 <a:solidFill>
                   <a:srgbClr val="D4D4D4"/>
                 </a:solidFill>
@@ -6527,7 +6527,7 @@
               <a:t> </a:t>
             </a:r>
             <a:r>
-              <a:rPr sz="1500" i="0" b="0">
+              <a:rPr sz="1400" i="0" b="0">
                 <a:solidFill>
                   <a:srgbClr val="D4D4D4"/>
                 </a:solidFill>
@@ -6536,7 +6536,7 @@
               <a:t>mascota</a:t>
             </a:r>
             <a:r>
-              <a:rPr sz="1500" i="0" b="0">
+              <a:rPr sz="1400" i="0" b="0">
                 <a:solidFill>
                   <a:srgbClr val="D4D4D4"/>
                 </a:solidFill>
@@ -6545,7 +6545,7 @@
               <a:t> -&gt; </a:t>
             </a:r>
             <a:r>
-              <a:rPr sz="1500" i="0" b="0">
+              <a:rPr sz="1400" i="0" b="0">
                 <a:solidFill>
                   <a:srgbClr val="D4D4D4"/>
                 </a:solidFill>
@@ -6554,7 +6554,7 @@
               <a:t>confirmacion</a:t>
             </a:r>
             <a:r>
-              <a:rPr sz="1500" i="0" b="0">
+              <a:rPr sz="1400" i="0" b="0">
                 <a:solidFill>
                   <a:srgbClr val="D4D4D4"/>
                 </a:solidFill>
@@ -6563,7 +6563,7 @@
               <a:t> -&gt; </a:t>
             </a:r>
             <a:r>
-              <a:rPr sz="1500" i="0" b="0">
+              <a:rPr sz="1400" i="0" b="0">
                 <a:solidFill>
                   <a:srgbClr val="D4D4D4"/>
                 </a:solidFill>
@@ -6575,11 +6575,11 @@
           <a:p>
             <a:pPr>
               <a:spcAft>
-                <a:spcPts val="321"/>
+                <a:spcPts val="300"/>
               </a:spcAft>
             </a:pPr>
             <a:r>
-              <a:rPr sz="1500" i="0" b="0">
+              <a:rPr sz="1400" i="0" b="0">
                 <a:solidFill>
                   <a:srgbClr val="B5CEA8"/>
                 </a:solidFill>
@@ -6588,7 +6588,7 @@
               <a:t>09</a:t>
             </a:r>
             <a:r>
-              <a:rPr sz="1500" i="0" b="0">
+              <a:rPr sz="1400" i="0" b="0">
                 <a:solidFill>
                   <a:srgbClr val="D4D4D4"/>
                 </a:solidFill>
@@ -6597,7 +6597,7 @@
               <a:t>:</a:t>
             </a:r>
             <a:r>
-              <a:rPr sz="1500" i="0" b="0">
+              <a:rPr sz="1400" i="0" b="0">
                 <a:solidFill>
                   <a:srgbClr val="B5CEA8"/>
                 </a:solidFill>
@@ -6606,7 +6606,7 @@
               <a:t>00</a:t>
             </a:r>
             <a:r>
-              <a:rPr sz="1500" i="0" b="0">
+              <a:rPr sz="1400" i="0" b="0">
                 <a:solidFill>
                   <a:srgbClr val="D4D4D4"/>
                 </a:solidFill>
@@ -6615,7 +6615,7 @@
               <a:t>-</a:t>
             </a:r>
             <a:r>
-              <a:rPr sz="1500" i="0" b="0">
+              <a:rPr sz="1400" i="0" b="0">
                 <a:solidFill>
                   <a:srgbClr val="B5CEA8"/>
                 </a:solidFill>
@@ -6624,7 +6624,7 @@
               <a:t>11</a:t>
             </a:r>
             <a:r>
-              <a:rPr sz="1500" i="0" b="0">
+              <a:rPr sz="1400" i="0" b="0">
                 <a:solidFill>
                   <a:srgbClr val="D4D4D4"/>
                 </a:solidFill>
@@ -6633,7 +6633,7 @@
               <a:t>:</a:t>
             </a:r>
             <a:r>
-              <a:rPr sz="1500" i="0" b="0">
+              <a:rPr sz="1400" i="0" b="0">
                 <a:solidFill>
                   <a:srgbClr val="B5CEA8"/>
                 </a:solidFill>
@@ -6642,7 +6642,7 @@
               <a:t>00</a:t>
             </a:r>
             <a:r>
-              <a:rPr sz="1500" i="0" b="0">
+              <a:rPr sz="1400" i="0" b="0">
                 <a:solidFill>
                   <a:srgbClr val="D4D4D4"/>
                 </a:solidFill>
@@ -6651,7 +6651,7 @@
               <a:t> | </a:t>
             </a:r>
             <a:r>
-              <a:rPr sz="1500" i="0" b="0">
+              <a:rPr sz="1400" i="0" b="0">
                 <a:solidFill>
                   <a:srgbClr val="D4D4D4"/>
                 </a:solidFill>
@@ -6660,7 +6660,7 @@
               <a:t>DECISIONES</a:t>
             </a:r>
             <a:r>
-              <a:rPr sz="1500" i="0" b="0">
+              <a:rPr sz="1400" i="0" b="0">
                 <a:solidFill>
                   <a:srgbClr val="D4D4D4"/>
                 </a:solidFill>
@@ -6669,7 +6669,7 @@
               <a:t>  | </a:t>
             </a:r>
             <a:r>
-              <a:rPr sz="1500" i="0" b="0">
+              <a:rPr sz="1400" i="0" b="0">
                 <a:solidFill>
                   <a:srgbClr val="B5CEA8"/>
                 </a:solidFill>
@@ -6678,7 +6678,7 @@
               <a:t>3</a:t>
             </a:r>
             <a:r>
-              <a:rPr sz="1500" i="0" b="0">
+              <a:rPr sz="1400" i="0" b="0">
                 <a:solidFill>
                   <a:srgbClr val="D4D4D4"/>
                 </a:solidFill>
@@ -6687,7 +6687,7 @@
               <a:t> </a:t>
             </a:r>
             <a:r>
-              <a:rPr sz="1500" i="0" b="0">
+              <a:rPr sz="1400" i="0" b="0">
                 <a:solidFill>
                   <a:srgbClr val="D4D4D4"/>
                 </a:solidFill>
@@ -6696,7 +6696,7 @@
               <a:t>decisiones</a:t>
             </a:r>
             <a:r>
-              <a:rPr sz="1500" i="0" b="0">
+              <a:rPr sz="1400" i="0" b="0">
                 <a:solidFill>
                   <a:srgbClr val="D4D4D4"/>
                 </a:solidFill>
@@ -6705,7 +6705,7 @@
               <a:t> </a:t>
             </a:r>
             <a:r>
-              <a:rPr sz="1500" i="0" b="0">
+              <a:rPr sz="1400" i="0" b="0">
                 <a:solidFill>
                   <a:srgbClr val="D4D4D4"/>
                 </a:solidFill>
@@ -6714,7 +6714,7 @@
               <a:t>con</a:t>
             </a:r>
             <a:r>
-              <a:rPr sz="1500" i="0" b="0">
+              <a:rPr sz="1400" i="0" b="0">
                 <a:solidFill>
                   <a:srgbClr val="D4D4D4"/>
                 </a:solidFill>
@@ -6723,7 +6723,7 @@
               <a:t> </a:t>
             </a:r>
             <a:r>
-              <a:rPr sz="1500" i="0" b="0">
+              <a:rPr sz="1400" i="0" b="0">
                 <a:solidFill>
                   <a:srgbClr val="D4D4D4"/>
                 </a:solidFill>
@@ -6732,7 +6732,7 @@
               <a:t>alternativa</a:t>
             </a:r>
             <a:r>
-              <a:rPr sz="1500" i="0" b="0">
+              <a:rPr sz="1400" i="0" b="0">
                 <a:solidFill>
                   <a:srgbClr val="D4D4D4"/>
                 </a:solidFill>
@@ -6741,7 +6741,7 @@
               <a:t> </a:t>
             </a:r>
             <a:r>
-              <a:rPr sz="1500" i="0" b="0">
+              <a:rPr sz="1400" i="0" b="0">
                 <a:solidFill>
                   <a:srgbClr val="D4D4D4"/>
                 </a:solidFill>
@@ -6750,7 +6750,7 @@
               <a:t>descartada</a:t>
             </a:r>
             <a:r>
-              <a:rPr sz="1500" i="0" b="0">
+              <a:rPr sz="1400" i="0" b="0">
                 <a:solidFill>
                   <a:srgbClr val="D4D4D4"/>
                 </a:solidFill>
@@ -6759,7 +6759,7 @@
               <a:t>, </a:t>
             </a:r>
             <a:r>
-              <a:rPr sz="1500" i="0" b="0">
+              <a:rPr sz="1400" i="0" b="0">
                 <a:solidFill>
                   <a:srgbClr val="D4D4D4"/>
                 </a:solidFill>
@@ -6768,7 +6768,7 @@
               <a:t>criterio</a:t>
             </a:r>
             <a:r>
-              <a:rPr sz="1500" i="0" b="0">
+              <a:rPr sz="1400" i="0" b="0">
                 <a:solidFill>
                   <a:srgbClr val="D4D4D4"/>
                 </a:solidFill>
@@ -6777,7 +6777,7 @@
               <a:t> </a:t>
             </a:r>
             <a:r>
-              <a:rPr sz="1500" i="0" b="0">
+              <a:rPr sz="1400" i="0" b="0">
                 <a:solidFill>
                   <a:srgbClr val="D4D4D4"/>
                 </a:solidFill>
@@ -6786,7 +6786,7 @@
               <a:t>y</a:t>
             </a:r>
             <a:r>
-              <a:rPr sz="1500" i="0" b="0">
+              <a:rPr sz="1400" i="0" b="0">
                 <a:solidFill>
                   <a:srgbClr val="D4D4D4"/>
                 </a:solidFill>
@@ -6795,7 +6795,7 @@
               <a:t> </a:t>
             </a:r>
             <a:r>
-              <a:rPr sz="1500" i="0" b="0">
+              <a:rPr sz="1400" i="0" b="0">
                 <a:solidFill>
                   <a:srgbClr val="D4D4D4"/>
                 </a:solidFill>
@@ -6807,11 +6807,11 @@
           <a:p>
             <a:pPr>
               <a:spcAft>
-                <a:spcPts val="321"/>
+                <a:spcPts val="300"/>
               </a:spcAft>
             </a:pPr>
             <a:r>
-              <a:rPr sz="1500" i="0" b="0">
+              <a:rPr sz="1400" i="0" b="0">
                 <a:solidFill>
                   <a:srgbClr val="B5CEA8"/>
                 </a:solidFill>
@@ -6820,7 +6820,7 @@
               <a:t>11</a:t>
             </a:r>
             <a:r>
-              <a:rPr sz="1500" i="0" b="0">
+              <a:rPr sz="1400" i="0" b="0">
                 <a:solidFill>
                   <a:srgbClr val="D4D4D4"/>
                 </a:solidFill>
@@ -6829,7 +6829,7 @@
               <a:t>:</a:t>
             </a:r>
             <a:r>
-              <a:rPr sz="1500" i="0" b="0">
+              <a:rPr sz="1400" i="0" b="0">
                 <a:solidFill>
                   <a:srgbClr val="B5CEA8"/>
                 </a:solidFill>
@@ -6838,7 +6838,7 @@
               <a:t>00</a:t>
             </a:r>
             <a:r>
-              <a:rPr sz="1500" i="0" b="0">
+              <a:rPr sz="1400" i="0" b="0">
                 <a:solidFill>
                   <a:srgbClr val="D4D4D4"/>
                 </a:solidFill>
@@ -6847,7 +6847,7 @@
               <a:t>-</a:t>
             </a:r>
             <a:r>
-              <a:rPr sz="1500" i="0" b="0">
+              <a:rPr sz="1400" i="0" b="0">
                 <a:solidFill>
                   <a:srgbClr val="B5CEA8"/>
                 </a:solidFill>
@@ -6856,7 +6856,7 @@
               <a:t>11</a:t>
             </a:r>
             <a:r>
-              <a:rPr sz="1500" i="0" b="0">
+              <a:rPr sz="1400" i="0" b="0">
                 <a:solidFill>
                   <a:srgbClr val="D4D4D4"/>
                 </a:solidFill>
@@ -6865,7 +6865,7 @@
               <a:t>:</a:t>
             </a:r>
             <a:r>
-              <a:rPr sz="1500" i="0" b="0">
+              <a:rPr sz="1400" i="0" b="0">
                 <a:solidFill>
                   <a:srgbClr val="B5CEA8"/>
                 </a:solidFill>
@@ -6874,7 +6874,7 @@
               <a:t>30</a:t>
             </a:r>
             <a:r>
-              <a:rPr sz="1500" i="0" b="0">
+              <a:rPr sz="1400" i="0" b="0">
                 <a:solidFill>
                   <a:srgbClr val="D4D4D4"/>
                 </a:solidFill>
@@ -6883,7 +6883,7 @@
               <a:t> | </a:t>
             </a:r>
             <a:r>
-              <a:rPr sz="1500" i="0" b="0">
+              <a:rPr sz="1400" i="0" b="0">
                 <a:solidFill>
                   <a:srgbClr val="D4D4D4"/>
                 </a:solidFill>
@@ -6892,7 +6892,7 @@
               <a:t>RIESGOS</a:t>
             </a:r>
             <a:r>
-              <a:rPr sz="1500" i="0" b="0">
+              <a:rPr sz="1400" i="0" b="0">
                 <a:solidFill>
                   <a:srgbClr val="D4D4D4"/>
                 </a:solidFill>
@@ -6901,7 +6901,7 @@
               <a:t>     | </a:t>
             </a:r>
             <a:r>
-              <a:rPr sz="1500" i="0" b="0">
+              <a:rPr sz="1400" i="0" b="0">
                 <a:solidFill>
                   <a:srgbClr val="D4D4D4"/>
                 </a:solidFill>
@@ -6910,7 +6910,7 @@
               <a:t>Que</a:t>
             </a:r>
             <a:r>
-              <a:rPr sz="1500" i="0" b="0">
+              <a:rPr sz="1400" i="0" b="0">
                 <a:solidFill>
                   <a:srgbClr val="D4D4D4"/>
                 </a:solidFill>
@@ -6919,7 +6919,7 @@
               <a:t> </a:t>
             </a:r>
             <a:r>
-              <a:rPr sz="1500" i="0" b="0">
+              <a:rPr sz="1400" i="0" b="0">
                 <a:solidFill>
                   <a:srgbClr val="D4D4D4"/>
                 </a:solidFill>
@@ -6928,7 +6928,7 @@
               <a:t>queda</a:t>
             </a:r>
             <a:r>
-              <a:rPr sz="1500" i="0" b="0">
+              <a:rPr sz="1400" i="0" b="0">
                 <a:solidFill>
                   <a:srgbClr val="D4D4D4"/>
                 </a:solidFill>
@@ -6937,7 +6937,7 @@
               <a:t> </a:t>
             </a:r>
             <a:r>
-              <a:rPr sz="1500" i="0" b="0">
+              <a:rPr sz="1400" i="0" b="0">
                 <a:solidFill>
                   <a:srgbClr val="D4D4D4"/>
                 </a:solidFill>
@@ -6946,7 +6946,7 @@
               <a:t>abierto</a:t>
             </a:r>
             <a:r>
-              <a:rPr sz="1500" i="0" b="0">
+              <a:rPr sz="1400" i="0" b="0">
                 <a:solidFill>
                   <a:srgbClr val="D4D4D4"/>
                 </a:solidFill>
@@ -6955,7 +6955,7 @@
               <a:t> </a:t>
             </a:r>
             <a:r>
-              <a:rPr sz="1500" i="0" b="0">
+              <a:rPr sz="1400" i="0" b="0">
                 <a:solidFill>
                   <a:srgbClr val="D4D4D4"/>
                 </a:solidFill>
@@ -6964,7 +6964,7 @@
               <a:t>y</a:t>
             </a:r>
             <a:r>
-              <a:rPr sz="1500" i="0" b="0">
+              <a:rPr sz="1400" i="0" b="0">
                 <a:solidFill>
                   <a:srgbClr val="D4D4D4"/>
                 </a:solidFill>
@@ -6973,7 +6973,7 @@
               <a:t> </a:t>
             </a:r>
             <a:r>
-              <a:rPr sz="1500" i="0" b="0">
+              <a:rPr sz="1400" i="0" b="0">
                 <a:solidFill>
                   <a:srgbClr val="D4D4D4"/>
                 </a:solidFill>
@@ -6982,7 +6982,7 @@
               <a:t>que</a:t>
             </a:r>
             <a:r>
-              <a:rPr sz="1500" i="0" b="0">
+              <a:rPr sz="1400" i="0" b="0">
                 <a:solidFill>
                   <a:srgbClr val="D4D4D4"/>
                 </a:solidFill>
@@ -6991,7 +6991,7 @@
               <a:t> </a:t>
             </a:r>
             <a:r>
-              <a:rPr sz="1500" i="0" b="0">
+              <a:rPr sz="1400" i="0" b="0">
                 <a:solidFill>
                   <a:srgbClr val="D4D4D4"/>
                 </a:solidFill>
@@ -7000,7 +7000,7 @@
               <a:t>recibe</a:t>
             </a:r>
             <a:r>
-              <a:rPr sz="1500" i="0" b="0">
+              <a:rPr sz="1400" i="0" b="0">
                 <a:solidFill>
                   <a:srgbClr val="D4D4D4"/>
                 </a:solidFill>
@@ -7009,7 +7009,7 @@
               <a:t> </a:t>
             </a:r>
             <a:r>
-              <a:rPr sz="1500" i="0" b="0">
+              <a:rPr sz="1400" i="0" b="0">
                 <a:solidFill>
                   <a:srgbClr val="D4D4D4"/>
                 </a:solidFill>
@@ -7018,7 +7018,7 @@
               <a:t>Programacion</a:t>
             </a:r>
             <a:r>
-              <a:rPr sz="1500" i="0" b="0">
+              <a:rPr sz="1400" i="0" b="0">
                 <a:solidFill>
                   <a:srgbClr val="D4D4D4"/>
                 </a:solidFill>
@@ -7027,7 +7027,7 @@
               <a:t> </a:t>
             </a:r>
             <a:r>
-              <a:rPr sz="1500" i="0" b="0">
+              <a:rPr sz="1400" i="0" b="0">
                 <a:solidFill>
                   <a:srgbClr val="D4D4D4"/>
                 </a:solidFill>
@@ -7039,11 +7039,11 @@
           <a:p>
             <a:pPr>
               <a:spcAft>
-                <a:spcPts val="321"/>
+                <a:spcPts val="300"/>
               </a:spcAft>
             </a:pPr>
             <a:r>
-              <a:rPr sz="1500" i="0" b="0">
+              <a:rPr sz="1400" i="0" b="0">
                 <a:solidFill>
                   <a:srgbClr val="B5CEA8"/>
                 </a:solidFill>
@@ -7052,7 +7052,7 @@
               <a:t>11</a:t>
             </a:r>
             <a:r>
-              <a:rPr sz="1500" i="0" b="0">
+              <a:rPr sz="1400" i="0" b="0">
                 <a:solidFill>
                   <a:srgbClr val="D4D4D4"/>
                 </a:solidFill>
@@ -7061,7 +7061,7 @@
               <a:t>:</a:t>
             </a:r>
             <a:r>
-              <a:rPr sz="1500" i="0" b="0">
+              <a:rPr sz="1400" i="0" b="0">
                 <a:solidFill>
                   <a:srgbClr val="B5CEA8"/>
                 </a:solidFill>
@@ -7070,7 +7070,7 @@
               <a:t>30</a:t>
             </a:r>
             <a:r>
-              <a:rPr sz="1500" i="0" b="0">
+              <a:rPr sz="1400" i="0" b="0">
                 <a:solidFill>
                   <a:srgbClr val="D4D4D4"/>
                 </a:solidFill>
@@ -7079,7 +7079,7 @@
               <a:t>-</a:t>
             </a:r>
             <a:r>
-              <a:rPr sz="1500" i="0" b="0">
+              <a:rPr sz="1400" i="0" b="0">
                 <a:solidFill>
                   <a:srgbClr val="B5CEA8"/>
                 </a:solidFill>
@@ -7088,7 +7088,7 @@
               <a:t>12</a:t>
             </a:r>
             <a:r>
-              <a:rPr sz="1500" i="0" b="0">
+              <a:rPr sz="1400" i="0" b="0">
                 <a:solidFill>
                   <a:srgbClr val="D4D4D4"/>
                 </a:solidFill>
@@ -7097,7 +7097,7 @@
               <a:t>:</a:t>
             </a:r>
             <a:r>
-              <a:rPr sz="1500" i="0" b="0">
+              <a:rPr sz="1400" i="0" b="0">
                 <a:solidFill>
                   <a:srgbClr val="B5CEA8"/>
                 </a:solidFill>
@@ -7106,7 +7106,7 @@
               <a:t>00</a:t>
             </a:r>
             <a:r>
-              <a:rPr sz="1500" i="0" b="0">
+              <a:rPr sz="1400" i="0" b="0">
                 <a:solidFill>
                   <a:srgbClr val="D4D4D4"/>
                 </a:solidFill>
@@ -7115,7 +7115,7 @@
               <a:t> | </a:t>
             </a:r>
             <a:r>
-              <a:rPr sz="1500" i="0" b="0">
+              <a:rPr sz="1400" i="0" b="0">
                 <a:solidFill>
                   <a:srgbClr val="D4D4D4"/>
                 </a:solidFill>
@@ -7124,7 +7124,7 @@
               <a:t>CIERRE</a:t>
             </a:r>
             <a:r>
-              <a:rPr sz="1500" i="0" b="0">
+              <a:rPr sz="1400" i="0" b="0">
                 <a:solidFill>
                   <a:srgbClr val="D4D4D4"/>
                 </a:solidFill>
@@ -7133,7 +7133,7 @@
               <a:t>      | </a:t>
             </a:r>
             <a:r>
-              <a:rPr sz="1500" i="0" b="0">
+              <a:rPr sz="1400" i="0" b="0">
                 <a:solidFill>
                   <a:srgbClr val="D4D4D4"/>
                 </a:solidFill>
@@ -7142,7 +7142,7 @@
               <a:t>Una</a:t>
             </a:r>
             <a:r>
-              <a:rPr sz="1500" i="0" b="0">
+              <a:rPr sz="1400" i="0" b="0">
                 <a:solidFill>
                   <a:srgbClr val="D4D4D4"/>
                 </a:solidFill>
@@ -7151,7 +7151,7 @@
               <a:t> </a:t>
             </a:r>
             <a:r>
-              <a:rPr sz="1500" i="0" b="0">
+              <a:rPr sz="1400" i="0" b="0">
                 <a:solidFill>
                   <a:srgbClr val="D4D4D4"/>
                 </a:solidFill>
@@ -7160,7 +7160,7 @@
               <a:t>frase</a:t>
             </a:r>
             <a:r>
-              <a:rPr sz="1500" i="0" b="0">
+              <a:rPr sz="1400" i="0" b="0">
                 <a:solidFill>
                   <a:srgbClr val="D4D4D4"/>
                 </a:solidFill>
@@ -7169,7 +7169,7 @@
               <a:t> </a:t>
             </a:r>
             <a:r>
-              <a:rPr sz="1500" i="0" b="0">
+              <a:rPr sz="1400" i="0" b="0">
                 <a:solidFill>
                   <a:srgbClr val="D4D4D4"/>
                 </a:solidFill>
@@ -7178,7 +7178,7 @@
               <a:t>de</a:t>
             </a:r>
             <a:r>
-              <a:rPr sz="1500" i="0" b="0">
+              <a:rPr sz="1400" i="0" b="0">
                 <a:solidFill>
                   <a:srgbClr val="D4D4D4"/>
                 </a:solidFill>
@@ -7187,7 +7187,7 @@
               <a:t> </a:t>
             </a:r>
             <a:r>
-              <a:rPr sz="1500" i="0" b="0">
+              <a:rPr sz="1400" i="0" b="0">
                 <a:solidFill>
                   <a:srgbClr val="D4D4D4"/>
                 </a:solidFill>
@@ -7196,7 +7196,7 @@
               <a:t>valor</a:t>
             </a:r>
             <a:r>
-              <a:rPr sz="1500" i="0" b="0">
+              <a:rPr sz="1400" i="0" b="0">
                 <a:solidFill>
                   <a:srgbClr val="D4D4D4"/>
                 </a:solidFill>
@@ -7205,7 +7205,7 @@
               <a:t> </a:t>
             </a:r>
             <a:r>
-              <a:rPr sz="1500" i="0" b="0">
+              <a:rPr sz="1400" i="0" b="0">
                 <a:solidFill>
                   <a:srgbClr val="D4D4D4"/>
                 </a:solidFill>
@@ -7214,7 +7214,7 @@
               <a:t>para</a:t>
             </a:r>
             <a:r>
-              <a:rPr sz="1500" i="0" b="0">
+              <a:rPr sz="1400" i="0" b="0">
                 <a:solidFill>
                   <a:srgbClr val="D4D4D4"/>
                 </a:solidFill>
@@ -7223,7 +7223,7 @@
               <a:t> </a:t>
             </a:r>
             <a:r>
-              <a:rPr sz="1500" i="0" b="0">
+              <a:rPr sz="1400" i="0" b="0">
                 <a:solidFill>
                   <a:srgbClr val="D4D4D4"/>
                 </a:solidFill>
@@ -7232,7 +7232,7 @@
               <a:t>la</a:t>
             </a:r>
             <a:r>
-              <a:rPr sz="1500" i="0" b="0">
+              <a:rPr sz="1400" i="0" b="0">
                 <a:solidFill>
                   <a:srgbClr val="D4D4D4"/>
                 </a:solidFill>
@@ -7241,7 +7241,7 @@
               <a:t> </a:t>
             </a:r>
             <a:r>
-              <a:rPr sz="1500" i="0" b="0">
+              <a:rPr sz="1400" i="0" b="0">
                 <a:solidFill>
                   <a:srgbClr val="D4D4D4"/>
                 </a:solidFill>
@@ -7250,7 +7250,7 @@
               <a:t>clinica</a:t>
             </a:r>
             <a:r>
-              <a:rPr sz="1500" i="0" b="0">
+              <a:rPr sz="1400" i="0" b="0">
                 <a:solidFill>
                   <a:srgbClr val="D4D4D4"/>
                 </a:solidFill>
@@ -7259,7 +7259,7 @@
               <a:t>, </a:t>
             </a:r>
             <a:r>
-              <a:rPr sz="1500" i="0" b="0">
+              <a:rPr sz="1400" i="0" b="0">
                 <a:solidFill>
                   <a:srgbClr val="D4D4D4"/>
                 </a:solidFill>
@@ -7268,7 +7268,7 @@
               <a:t>no</a:t>
             </a:r>
             <a:r>
-              <a:rPr sz="1500" i="0" b="0">
+              <a:rPr sz="1400" i="0" b="0">
                 <a:solidFill>
                   <a:srgbClr val="D4D4D4"/>
                 </a:solidFill>
@@ -7277,7 +7277,7 @@
               <a:t> </a:t>
             </a:r>
             <a:r>
-              <a:rPr sz="1500" i="0" b="0">
+              <a:rPr sz="1400" i="0" b="0">
                 <a:solidFill>
                   <a:srgbClr val="D4D4D4"/>
                 </a:solidFill>
@@ -7286,7 +7286,7 @@
               <a:t>un</a:t>
             </a:r>
             <a:r>
-              <a:rPr sz="1500" i="0" b="0">
+              <a:rPr sz="1400" i="0" b="0">
                 <a:solidFill>
                   <a:srgbClr val="D4D4D4"/>
                 </a:solidFill>
@@ -7295,7 +7295,7 @@
               <a:t> </a:t>
             </a:r>
             <a:r>
-              <a:rPr sz="1500" i="0" b="0">
+              <a:rPr sz="1400" i="0" b="0">
                 <a:solidFill>
                   <a:srgbClr val="D4D4D4"/>
                 </a:solidFill>
@@ -7307,11 +7307,11 @@
           <a:p>
             <a:pPr>
               <a:spcAft>
-                <a:spcPts val="321"/>
+                <a:spcPts val="300"/>
               </a:spcAft>
             </a:pPr>
             <a:r>
-              <a:rPr sz="1500" i="0" b="0">
+              <a:rPr sz="1400" i="0" b="0">
                 <a:solidFill>
                   <a:srgbClr val="D4D4D4"/>
                 </a:solidFill>
@@ -7320,7 +7320,7 @@
               <a:t>-</a:t>
             </a:r>
             <a:r>
-              <a:rPr sz="1500" i="0" b="0">
+              <a:rPr sz="1400" i="0" b="0">
                 <a:solidFill>
                   <a:srgbClr val="D4D4D4"/>
                 </a:solidFill>
@@ -7332,11 +7332,11 @@
           <a:p>
             <a:pPr>
               <a:spcAft>
-                <a:spcPts val="321"/>
+                <a:spcPts val="300"/>
               </a:spcAft>
             </a:pPr>
             <a:r>
-              <a:rPr sz="1500" i="0" b="0">
+              <a:rPr sz="1400" i="0" b="0">
                 <a:solidFill>
                   <a:srgbClr val="D4D4D4"/>
                 </a:solidFill>
@@ -7345,7 +7345,7 @@
               <a:t>-</a:t>
             </a:r>
             <a:r>
-              <a:rPr sz="1500" i="0" b="0">
+              <a:rPr sz="1400" i="0" b="0">
                 <a:solidFill>
                   <a:srgbClr val="D4D4D4"/>
                 </a:solidFill>
@@ -7357,11 +7357,11 @@
           <a:p>
             <a:pPr>
               <a:spcAft>
-                <a:spcPts val="321"/>
+                <a:spcPts val="300"/>
               </a:spcAft>
             </a:pPr>
             <a:r>
-              <a:rPr sz="1500" i="0" b="0">
+              <a:rPr sz="1400" i="0" b="0">
                 <a:solidFill>
                   <a:srgbClr val="D4D4D4"/>
                 </a:solidFill>
@@ -7370,7 +7370,7 @@
               <a:t>-</a:t>
             </a:r>
             <a:r>
-              <a:rPr sz="1500" i="0" b="0">
+              <a:rPr sz="1400" i="0" b="0">
                 <a:solidFill>
                   <a:srgbClr val="D4D4D4"/>
                 </a:solidFill>
@@ -7382,11 +7382,11 @@
           <a:p>
             <a:pPr>
               <a:spcAft>
-                <a:spcPts val="321"/>
+                <a:spcPts val="300"/>
               </a:spcAft>
             </a:pPr>
             <a:r>
-              <a:rPr sz="1500" i="0" b="0">
+              <a:rPr sz="1400" i="0" b="0">
                 <a:solidFill>
                   <a:srgbClr val="D4D4D4"/>
                 </a:solidFill>
@@ -7395,7 +7395,7 @@
               <a:t>-</a:t>
             </a:r>
             <a:r>
-              <a:rPr sz="1500" i="0" b="0">
+              <a:rPr sz="1400" i="0" b="0">
                 <a:solidFill>
                   <a:srgbClr val="D4D4D4"/>
                 </a:solidFill>
@@ -11804,7 +11804,7 @@
         <p:spPr>
           <a:xfrm>
             <a:off x="457200" y="1261872"/>
-            <a:ext cx="11277295" cy="5069443"/>
+            <a:ext cx="6991923" cy="4660587"/>
           </a:xfrm>
           <a:prstGeom prst="roundRect">
             <a:avLst>
@@ -11849,7 +11849,7 @@
         <p:spPr>
           <a:xfrm>
             <a:off x="457200" y="1261872"/>
-            <a:ext cx="11277295" cy="365760"/>
+            <a:ext cx="6991923" cy="365760"/>
           </a:xfrm>
           <a:prstGeom prst="rect">
             <a:avLst/>
@@ -12021,7 +12021,7 @@
         <p:spPr>
           <a:xfrm>
             <a:off x="1371600" y="1298448"/>
-            <a:ext cx="10180015" cy="292608"/>
+            <a:ext cx="5894643" cy="292608"/>
           </a:xfrm>
           <a:prstGeom prst="rect">
             <a:avLst/>
@@ -12054,7 +12054,7 @@
         <p:spPr>
           <a:xfrm>
             <a:off x="685800" y="1719072"/>
-            <a:ext cx="502920" cy="4475083"/>
+            <a:ext cx="502920" cy="4066227"/>
           </a:xfrm>
           <a:prstGeom prst="rect">
             <a:avLst/>
@@ -12069,11 +12069,11 @@
           <a:p>
             <a:pPr algn="r">
               <a:spcAft>
-                <a:spcPts val="321"/>
+                <a:spcPts val="364"/>
               </a:spcAft>
             </a:pPr>
             <a:r>
-              <a:rPr sz="1500" i="0" b="0">
+              <a:rPr sz="1700" i="0" b="0">
                 <a:solidFill>
                   <a:srgbClr val="858585"/>
                 </a:solidFill>
@@ -12085,11 +12085,11 @@
           <a:p>
             <a:pPr algn="r">
               <a:spcAft>
-                <a:spcPts val="321"/>
+                <a:spcPts val="364"/>
               </a:spcAft>
             </a:pPr>
             <a:r>
-              <a:rPr sz="1500" i="0" b="0">
+              <a:rPr sz="1700" i="0" b="0">
                 <a:solidFill>
                   <a:srgbClr val="858585"/>
                 </a:solidFill>
@@ -12101,11 +12101,11 @@
           <a:p>
             <a:pPr algn="r">
               <a:spcAft>
-                <a:spcPts val="321"/>
+                <a:spcPts val="364"/>
               </a:spcAft>
             </a:pPr>
             <a:r>
-              <a:rPr sz="1500" i="0" b="0">
+              <a:rPr sz="1700" i="0" b="0">
                 <a:solidFill>
                   <a:srgbClr val="858585"/>
                 </a:solidFill>
@@ -12117,11 +12117,11 @@
           <a:p>
             <a:pPr algn="r">
               <a:spcAft>
-                <a:spcPts val="321"/>
+                <a:spcPts val="364"/>
               </a:spcAft>
             </a:pPr>
             <a:r>
-              <a:rPr sz="1500" i="0" b="0">
+              <a:rPr sz="1700" i="0" b="0">
                 <a:solidFill>
                   <a:srgbClr val="858585"/>
                 </a:solidFill>
@@ -12133,11 +12133,11 @@
           <a:p>
             <a:pPr algn="r">
               <a:spcAft>
-                <a:spcPts val="321"/>
+                <a:spcPts val="364"/>
               </a:spcAft>
             </a:pPr>
             <a:r>
-              <a:rPr sz="1500" i="0" b="0">
+              <a:rPr sz="1700" i="0" b="0">
                 <a:solidFill>
                   <a:srgbClr val="858585"/>
                 </a:solidFill>
@@ -12149,11 +12149,11 @@
           <a:p>
             <a:pPr algn="r">
               <a:spcAft>
-                <a:spcPts val="321"/>
+                <a:spcPts val="364"/>
               </a:spcAft>
             </a:pPr>
             <a:r>
-              <a:rPr sz="1500" i="0" b="0">
+              <a:rPr sz="1700" i="0" b="0">
                 <a:solidFill>
                   <a:srgbClr val="858585"/>
                 </a:solidFill>
@@ -12165,11 +12165,11 @@
           <a:p>
             <a:pPr algn="r">
               <a:spcAft>
-                <a:spcPts val="321"/>
+                <a:spcPts val="364"/>
               </a:spcAft>
             </a:pPr>
             <a:r>
-              <a:rPr sz="1500" i="0" b="0">
+              <a:rPr sz="1700" i="0" b="0">
                 <a:solidFill>
                   <a:srgbClr val="858585"/>
                 </a:solidFill>
@@ -12181,11 +12181,11 @@
           <a:p>
             <a:pPr algn="r">
               <a:spcAft>
-                <a:spcPts val="321"/>
+                <a:spcPts val="364"/>
               </a:spcAft>
             </a:pPr>
             <a:r>
-              <a:rPr sz="1500" i="0" b="0">
+              <a:rPr sz="1700" i="0" b="0">
                 <a:solidFill>
                   <a:srgbClr val="858585"/>
                 </a:solidFill>
@@ -12197,11 +12197,11 @@
           <a:p>
             <a:pPr algn="r">
               <a:spcAft>
-                <a:spcPts val="321"/>
+                <a:spcPts val="364"/>
               </a:spcAft>
             </a:pPr>
             <a:r>
-              <a:rPr sz="1500" i="0" b="0">
+              <a:rPr sz="1700" i="0" b="0">
                 <a:solidFill>
                   <a:srgbClr val="858585"/>
                 </a:solidFill>
@@ -12213,11 +12213,11 @@
           <a:p>
             <a:pPr algn="r">
               <a:spcAft>
-                <a:spcPts val="321"/>
+                <a:spcPts val="364"/>
               </a:spcAft>
             </a:pPr>
             <a:r>
-              <a:rPr sz="1500" i="0" b="0">
+              <a:rPr sz="1700" i="0" b="0">
                 <a:solidFill>
                   <a:srgbClr val="858585"/>
                 </a:solidFill>
@@ -12229,11 +12229,11 @@
           <a:p>
             <a:pPr algn="r">
               <a:spcAft>
-                <a:spcPts val="321"/>
+                <a:spcPts val="364"/>
               </a:spcAft>
             </a:pPr>
             <a:r>
-              <a:rPr sz="1500" i="0" b="0">
+              <a:rPr sz="1700" i="0" b="0">
                 <a:solidFill>
                   <a:srgbClr val="858585"/>
                 </a:solidFill>
@@ -12245,11 +12245,11 @@
           <a:p>
             <a:pPr algn="r">
               <a:spcAft>
-                <a:spcPts val="321"/>
+                <a:spcPts val="364"/>
               </a:spcAft>
             </a:pPr>
             <a:r>
-              <a:rPr sz="1500" i="0" b="0">
+              <a:rPr sz="1700" i="0" b="0">
                 <a:solidFill>
                   <a:srgbClr val="858585"/>
                 </a:solidFill>
@@ -12261,65 +12261,17 @@
           <a:p>
             <a:pPr algn="r">
               <a:spcAft>
-                <a:spcPts val="321"/>
+                <a:spcPts val="364"/>
               </a:spcAft>
             </a:pPr>
             <a:r>
-              <a:rPr sz="1500" i="0" b="0">
+              <a:rPr sz="1700" i="0" b="0">
                 <a:solidFill>
                   <a:srgbClr val="858585"/>
                 </a:solidFill>
                 <a:latin typeface="Consolas"/>
               </a:rPr>
               <a:t>13</a:t>
-            </a:r>
-          </a:p>
-          <a:p>
-            <a:pPr algn="r">
-              <a:spcAft>
-                <a:spcPts val="321"/>
-              </a:spcAft>
-            </a:pPr>
-            <a:r>
-              <a:rPr sz="1500" i="0" b="0">
-                <a:solidFill>
-                  <a:srgbClr val="858585"/>
-                </a:solidFill>
-                <a:latin typeface="Consolas"/>
-              </a:rPr>
-              <a:t>14</a:t>
-            </a:r>
-          </a:p>
-          <a:p>
-            <a:pPr algn="r">
-              <a:spcAft>
-                <a:spcPts val="321"/>
-              </a:spcAft>
-            </a:pPr>
-            <a:r>
-              <a:rPr sz="1500" i="0" b="0">
-                <a:solidFill>
-                  <a:srgbClr val="858585"/>
-                </a:solidFill>
-                <a:latin typeface="Consolas"/>
-              </a:rPr>
-              <a:t>15</a:t>
-            </a:r>
-          </a:p>
-          <a:p>
-            <a:pPr algn="r">
-              <a:spcAft>
-                <a:spcPts val="321"/>
-              </a:spcAft>
-            </a:pPr>
-            <a:r>
-              <a:rPr sz="1500" i="0" b="0">
-                <a:solidFill>
-                  <a:srgbClr val="858585"/>
-                </a:solidFill>
-                <a:latin typeface="Consolas"/>
-              </a:rPr>
-              <a:t>16</a:t>
             </a:r>
           </a:p>
         </p:txBody>
@@ -12333,7 +12285,7 @@
         <p:spPr>
           <a:xfrm>
             <a:off x="1188720" y="1719072"/>
-            <a:ext cx="10271455" cy="4475083"/>
+            <a:ext cx="5986083" cy="4066227"/>
           </a:xfrm>
           <a:prstGeom prst="rect">
             <a:avLst/>
@@ -12348,11 +12300,11 @@
           <a:p>
             <a:pPr>
               <a:spcAft>
-                <a:spcPts val="321"/>
+                <a:spcPts val="364"/>
               </a:spcAft>
             </a:pPr>
             <a:r>
-              <a:rPr sz="1500" i="0" b="0">
+              <a:rPr sz="1700" i="0" b="0">
                 <a:solidFill>
                   <a:srgbClr val="D4D4D4"/>
                 </a:solidFill>
@@ -12364,11 +12316,11 @@
           <a:p>
             <a:pPr>
               <a:spcAft>
-                <a:spcPts val="321"/>
+                <a:spcPts val="364"/>
               </a:spcAft>
             </a:pPr>
             <a:r>
-              <a:rPr sz="1500" i="0" b="0">
+              <a:rPr sz="1700" i="0" b="0">
                 <a:solidFill>
                   <a:srgbClr val="D4D4D4"/>
                 </a:solidFill>
@@ -12377,7 +12329,7 @@
               <a:t>  </a:t>
             </a:r>
             <a:r>
-              <a:rPr sz="1500" i="0" b="0">
+              <a:rPr sz="1700" i="0" b="0">
                 <a:solidFill>
                   <a:srgbClr val="D4D4D4"/>
                 </a:solidFill>
@@ -12386,7 +12338,7 @@
               <a:t>title</a:t>
             </a:r>
             <a:r>
-              <a:rPr sz="1500" i="0" b="0">
+              <a:rPr sz="1700" i="0" b="0">
                 <a:solidFill>
                   <a:srgbClr val="D4D4D4"/>
                 </a:solidFill>
@@ -12395,7 +12347,7 @@
               <a:t> </a:t>
             </a:r>
             <a:r>
-              <a:rPr sz="1500" i="0" b="0">
+              <a:rPr sz="1700" i="0" b="0">
                 <a:solidFill>
                   <a:srgbClr val="D4D4D4"/>
                 </a:solidFill>
@@ -12404,7 +12356,7 @@
               <a:t>Sustentacion</a:t>
             </a:r>
             <a:r>
-              <a:rPr sz="1500" i="0" b="0">
+              <a:rPr sz="1700" i="0" b="0">
                 <a:solidFill>
                   <a:srgbClr val="D4D4D4"/>
                 </a:solidFill>
@@ -12413,7 +12365,7 @@
               <a:t> - </a:t>
             </a:r>
             <a:r>
-              <a:rPr sz="1500" i="0" b="0">
+              <a:rPr sz="1700" i="0" b="0">
                 <a:solidFill>
                   <a:srgbClr val="B5CEA8"/>
                 </a:solidFill>
@@ -12422,7 +12374,7 @@
               <a:t>12</a:t>
             </a:r>
             <a:r>
-              <a:rPr sz="1500" i="0" b="0">
+              <a:rPr sz="1700" i="0" b="0">
                 <a:solidFill>
                   <a:srgbClr val="D4D4D4"/>
                 </a:solidFill>
@@ -12431,7 +12383,7 @@
               <a:t> </a:t>
             </a:r>
             <a:r>
-              <a:rPr sz="1500" i="0" b="0">
+              <a:rPr sz="1700" i="0" b="0">
                 <a:solidFill>
                   <a:srgbClr val="D4D4D4"/>
                 </a:solidFill>
@@ -12443,11 +12395,11 @@
           <a:p>
             <a:pPr>
               <a:spcAft>
-                <a:spcPts val="321"/>
+                <a:spcPts val="364"/>
               </a:spcAft>
             </a:pPr>
             <a:r>
-              <a:rPr sz="1500" i="0" b="0">
+              <a:rPr sz="1700" i="0" b="0">
                 <a:solidFill>
                   <a:srgbClr val="D4D4D4"/>
                 </a:solidFill>
@@ -12456,7 +12408,7 @@
               <a:t>  </a:t>
             </a:r>
             <a:r>
-              <a:rPr sz="1500" i="0" b="0">
+              <a:rPr sz="1700" i="0" b="0">
                 <a:solidFill>
                   <a:srgbClr val="D4D4D4"/>
                 </a:solidFill>
@@ -12465,7 +12417,7 @@
               <a:t>dateFormat</a:t>
             </a:r>
             <a:r>
-              <a:rPr sz="1500" i="0" b="0">
+              <a:rPr sz="1700" i="0" b="0">
                 <a:solidFill>
                   <a:srgbClr val="D4D4D4"/>
                 </a:solidFill>
@@ -12474,7 +12426,7 @@
               <a:t> </a:t>
             </a:r>
             <a:r>
-              <a:rPr sz="1500" i="0" b="0">
+              <a:rPr sz="1700" i="0" b="0">
                 <a:solidFill>
                   <a:srgbClr val="D4D4D4"/>
                 </a:solidFill>
@@ -12483,7 +12435,7 @@
               <a:t>mm</a:t>
             </a:r>
             <a:r>
-              <a:rPr sz="1500" i="0" b="0">
+              <a:rPr sz="1700" i="0" b="0">
                 <a:solidFill>
                   <a:srgbClr val="D4D4D4"/>
                 </a:solidFill>
@@ -12492,7 +12444,7 @@
               <a:t>:</a:t>
             </a:r>
             <a:r>
-              <a:rPr sz="1500" i="0" b="0">
+              <a:rPr sz="1700" i="0" b="0">
                 <a:solidFill>
                   <a:srgbClr val="D4D4D4"/>
                 </a:solidFill>
@@ -12504,11 +12456,11 @@
           <a:p>
             <a:pPr>
               <a:spcAft>
-                <a:spcPts val="321"/>
+                <a:spcPts val="364"/>
               </a:spcAft>
             </a:pPr>
             <a:r>
-              <a:rPr sz="1500" i="0" b="0">
+              <a:rPr sz="1700" i="0" b="0">
                 <a:solidFill>
                   <a:srgbClr val="D4D4D4"/>
                 </a:solidFill>
@@ -12517,7 +12469,7 @@
               <a:t>  </a:t>
             </a:r>
             <a:r>
-              <a:rPr sz="1500" i="0" b="0">
+              <a:rPr sz="1700" i="0" b="0">
                 <a:solidFill>
                   <a:srgbClr val="D4D4D4"/>
                 </a:solidFill>
@@ -12526,7 +12478,7 @@
               <a:t>axisFormat</a:t>
             </a:r>
             <a:r>
-              <a:rPr sz="1500" i="0" b="0">
+              <a:rPr sz="1700" i="0" b="0">
                 <a:solidFill>
                   <a:srgbClr val="D4D4D4"/>
                 </a:solidFill>
@@ -12535,7 +12487,7 @@
               <a:t> %</a:t>
             </a:r>
             <a:r>
-              <a:rPr sz="1500" i="0" b="0">
+              <a:rPr sz="1700" i="0" b="0">
                 <a:solidFill>
                   <a:srgbClr val="D4D4D4"/>
                 </a:solidFill>
@@ -12544,7 +12496,7 @@
               <a:t>M</a:t>
             </a:r>
             <a:r>
-              <a:rPr sz="1500" i="0" b="0">
+              <a:rPr sz="1700" i="0" b="0">
                 <a:solidFill>
                   <a:srgbClr val="D4D4D4"/>
                 </a:solidFill>
@@ -12553,7 +12505,7 @@
               <a:t>:%</a:t>
             </a:r>
             <a:r>
-              <a:rPr sz="1500" i="0" b="0">
+              <a:rPr sz="1700" i="0" b="0">
                 <a:solidFill>
                   <a:srgbClr val="D4D4D4"/>
                 </a:solidFill>
@@ -12565,11 +12517,11 @@
           <a:p>
             <a:pPr>
               <a:spcAft>
-                <a:spcPts val="321"/>
+                <a:spcPts val="364"/>
               </a:spcAft>
             </a:pPr>
             <a:r>
-              <a:rPr sz="1500" i="0" b="0">
+              <a:rPr sz="1700" i="0" b="0">
                 <a:solidFill>
                   <a:srgbClr val="D4D4D4"/>
                 </a:solidFill>
@@ -12581,11 +12533,11 @@
           <a:p>
             <a:pPr>
               <a:spcAft>
-                <a:spcPts val="321"/>
+                <a:spcPts val="364"/>
               </a:spcAft>
             </a:pPr>
             <a:r>
-              <a:rPr sz="1500" i="0" b="0">
+              <a:rPr sz="1700" i="0" b="0">
                 <a:solidFill>
                   <a:srgbClr val="D4D4D4"/>
                 </a:solidFill>
@@ -12594,7 +12546,7 @@
               <a:t>  </a:t>
             </a:r>
             <a:r>
-              <a:rPr sz="1500" i="0" b="0">
+              <a:rPr sz="1700" i="0" b="0">
                 <a:solidFill>
                   <a:srgbClr val="D4D4D4"/>
                 </a:solidFill>
@@ -12603,7 +12555,7 @@
               <a:t>section</a:t>
             </a:r>
             <a:r>
-              <a:rPr sz="1500" i="0" b="0">
+              <a:rPr sz="1700" i="0" b="0">
                 <a:solidFill>
                   <a:srgbClr val="D4D4D4"/>
                 </a:solidFill>
@@ -12612,7 +12564,7 @@
               <a:t> </a:t>
             </a:r>
             <a:r>
-              <a:rPr sz="1500" i="0" b="0">
+              <a:rPr sz="1700" i="0" b="0">
                 <a:solidFill>
                   <a:srgbClr val="D4D4D4"/>
                 </a:solidFill>
@@ -12624,11 +12576,11 @@
           <a:p>
             <a:pPr>
               <a:spcAft>
-                <a:spcPts val="321"/>
+                <a:spcPts val="364"/>
               </a:spcAft>
             </a:pPr>
             <a:r>
-              <a:rPr sz="1500" i="0" b="0">
+              <a:rPr sz="1700" i="0" b="0">
                 <a:solidFill>
                   <a:srgbClr val="D4D4D4"/>
                 </a:solidFill>
@@ -12637,7 +12589,7 @@
               <a:t>  </a:t>
             </a:r>
             <a:r>
-              <a:rPr sz="1500" i="0" b="0">
+              <a:rPr sz="1700" i="0" b="0">
                 <a:solidFill>
                   <a:srgbClr val="D4D4D4"/>
                 </a:solidFill>
@@ -12646,7 +12598,7 @@
               <a:t>Problema</a:t>
             </a:r>
             <a:r>
-              <a:rPr sz="1500" i="0" b="0">
+              <a:rPr sz="1700" i="0" b="0">
                 <a:solidFill>
                   <a:srgbClr val="D4D4D4"/>
                 </a:solidFill>
@@ -12655,7 +12607,7 @@
               <a:t>               :</a:t>
             </a:r>
             <a:r>
-              <a:rPr sz="1500" i="0" b="0">
+              <a:rPr sz="1700" i="0" b="0">
                 <a:solidFill>
                   <a:srgbClr val="D4D4D4"/>
                 </a:solidFill>
@@ -12664,7 +12616,7 @@
               <a:t>g1</a:t>
             </a:r>
             <a:r>
-              <a:rPr sz="1500" i="0" b="0">
+              <a:rPr sz="1700" i="0" b="0">
                 <a:solidFill>
                   <a:srgbClr val="D4D4D4"/>
                 </a:solidFill>
@@ -12673,7 +12625,7 @@
               <a:t>, </a:t>
             </a:r>
             <a:r>
-              <a:rPr sz="1500" i="0" b="0">
+              <a:rPr sz="1700" i="0" b="0">
                 <a:solidFill>
                   <a:srgbClr val="B5CEA8"/>
                 </a:solidFill>
@@ -12682,7 +12634,7 @@
               <a:t>00</a:t>
             </a:r>
             <a:r>
-              <a:rPr sz="1500" i="0" b="0">
+              <a:rPr sz="1700" i="0" b="0">
                 <a:solidFill>
                   <a:srgbClr val="D4D4D4"/>
                 </a:solidFill>
@@ -12691,7 +12643,7 @@
               <a:t>:</a:t>
             </a:r>
             <a:r>
-              <a:rPr sz="1500" i="0" b="0">
+              <a:rPr sz="1700" i="0" b="0">
                 <a:solidFill>
                   <a:srgbClr val="B5CEA8"/>
                 </a:solidFill>
@@ -12700,7 +12652,7 @@
               <a:t>00</a:t>
             </a:r>
             <a:r>
-              <a:rPr sz="1500" i="0" b="0">
+              <a:rPr sz="1700" i="0" b="0">
                 <a:solidFill>
                   <a:srgbClr val="D4D4D4"/>
                 </a:solidFill>
@@ -12709,7 +12661,7 @@
               <a:t>, 90</a:t>
             </a:r>
             <a:r>
-              <a:rPr sz="1500" i="0" b="0">
+              <a:rPr sz="1700" i="0" b="0">
                 <a:solidFill>
                   <a:srgbClr val="D4D4D4"/>
                 </a:solidFill>
@@ -12721,11 +12673,11 @@
           <a:p>
             <a:pPr>
               <a:spcAft>
-                <a:spcPts val="321"/>
+                <a:spcPts val="364"/>
               </a:spcAft>
             </a:pPr>
             <a:r>
-              <a:rPr sz="1500" i="0" b="0">
+              <a:rPr sz="1700" i="0" b="0">
                 <a:solidFill>
                   <a:srgbClr val="D4D4D4"/>
                 </a:solidFill>
@@ -12734,7 +12686,7 @@
               <a:t>  </a:t>
             </a:r>
             <a:r>
-              <a:rPr sz="1500" i="0" b="0">
+              <a:rPr sz="1700" i="0" b="0">
                 <a:solidFill>
                   <a:srgbClr val="D4D4D4"/>
                 </a:solidFill>
@@ -12743,7 +12695,7 @@
               <a:t>Alcance</a:t>
             </a:r>
             <a:r>
-              <a:rPr sz="1500" i="0" b="0">
+              <a:rPr sz="1700" i="0" b="0">
                 <a:solidFill>
                   <a:srgbClr val="D4D4D4"/>
                 </a:solidFill>
@@ -12752,7 +12704,7 @@
               <a:t>                :</a:t>
             </a:r>
             <a:r>
-              <a:rPr sz="1500" i="0" b="0">
+              <a:rPr sz="1700" i="0" b="0">
                 <a:solidFill>
                   <a:srgbClr val="D4D4D4"/>
                 </a:solidFill>
@@ -12761,7 +12713,7 @@
               <a:t>g2</a:t>
             </a:r>
             <a:r>
-              <a:rPr sz="1500" i="0" b="0">
+              <a:rPr sz="1700" i="0" b="0">
                 <a:solidFill>
                   <a:srgbClr val="D4D4D4"/>
                 </a:solidFill>
@@ -12770,7 +12722,7 @@
               <a:t>, </a:t>
             </a:r>
             <a:r>
-              <a:rPr sz="1500" i="0" b="0">
+              <a:rPr sz="1700" i="0" b="0">
                 <a:solidFill>
                   <a:srgbClr val="D4D4D4"/>
                 </a:solidFill>
@@ -12779,7 +12731,7 @@
               <a:t>after</a:t>
             </a:r>
             <a:r>
-              <a:rPr sz="1500" i="0" b="0">
+              <a:rPr sz="1700" i="0" b="0">
                 <a:solidFill>
                   <a:srgbClr val="D4D4D4"/>
                 </a:solidFill>
@@ -12788,7 +12740,7 @@
               <a:t> </a:t>
             </a:r>
             <a:r>
-              <a:rPr sz="1500" i="0" b="0">
+              <a:rPr sz="1700" i="0" b="0">
                 <a:solidFill>
                   <a:srgbClr val="D4D4D4"/>
                 </a:solidFill>
@@ -12797,7 +12749,7 @@
               <a:t>g1</a:t>
             </a:r>
             <a:r>
-              <a:rPr sz="1500" i="0" b="0">
+              <a:rPr sz="1700" i="0" b="0">
                 <a:solidFill>
                   <a:srgbClr val="D4D4D4"/>
                 </a:solidFill>
@@ -12806,7 +12758,7 @@
               <a:t>, 90</a:t>
             </a:r>
             <a:r>
-              <a:rPr sz="1500" i="0" b="0">
+              <a:rPr sz="1700" i="0" b="0">
                 <a:solidFill>
                   <a:srgbClr val="D4D4D4"/>
                 </a:solidFill>
@@ -12818,11 +12770,11 @@
           <a:p>
             <a:pPr>
               <a:spcAft>
-                <a:spcPts val="321"/>
+                <a:spcPts val="364"/>
               </a:spcAft>
             </a:pPr>
             <a:r>
-              <a:rPr sz="1500" i="0" b="0">
+              <a:rPr sz="1700" i="0" b="0">
                 <a:solidFill>
                   <a:srgbClr val="D4D4D4"/>
                 </a:solidFill>
@@ -12831,7 +12783,7 @@
               <a:t>  </a:t>
             </a:r>
             <a:r>
-              <a:rPr sz="1500" i="0" b="0">
+              <a:rPr sz="1700" i="0" b="0">
                 <a:solidFill>
                   <a:srgbClr val="D4D4D4"/>
                 </a:solidFill>
@@ -12840,7 +12792,7 @@
               <a:t>Requisitos</a:t>
             </a:r>
             <a:r>
-              <a:rPr sz="1500" i="0" b="0">
+              <a:rPr sz="1700" i="0" b="0">
                 <a:solidFill>
                   <a:srgbClr val="D4D4D4"/>
                 </a:solidFill>
@@ -12849,7 +12801,7 @@
               <a:t>             :</a:t>
             </a:r>
             <a:r>
-              <a:rPr sz="1500" i="0" b="0">
+              <a:rPr sz="1700" i="0" b="0">
                 <a:solidFill>
                   <a:srgbClr val="D4D4D4"/>
                 </a:solidFill>
@@ -12858,7 +12810,7 @@
               <a:t>g3</a:t>
             </a:r>
             <a:r>
-              <a:rPr sz="1500" i="0" b="0">
+              <a:rPr sz="1700" i="0" b="0">
                 <a:solidFill>
                   <a:srgbClr val="D4D4D4"/>
                 </a:solidFill>
@@ -12867,7 +12819,7 @@
               <a:t>, </a:t>
             </a:r>
             <a:r>
-              <a:rPr sz="1500" i="0" b="0">
+              <a:rPr sz="1700" i="0" b="0">
                 <a:solidFill>
                   <a:srgbClr val="D4D4D4"/>
                 </a:solidFill>
@@ -12876,7 +12828,7 @@
               <a:t>after</a:t>
             </a:r>
             <a:r>
-              <a:rPr sz="1500" i="0" b="0">
+              <a:rPr sz="1700" i="0" b="0">
                 <a:solidFill>
                   <a:srgbClr val="D4D4D4"/>
                 </a:solidFill>
@@ -12885,7 +12837,7 @@
               <a:t> </a:t>
             </a:r>
             <a:r>
-              <a:rPr sz="1500" i="0" b="0">
+              <a:rPr sz="1700" i="0" b="0">
                 <a:solidFill>
                   <a:srgbClr val="D4D4D4"/>
                 </a:solidFill>
@@ -12894,7 +12846,7 @@
               <a:t>g2</a:t>
             </a:r>
             <a:r>
-              <a:rPr sz="1500" i="0" b="0">
+              <a:rPr sz="1700" i="0" b="0">
                 <a:solidFill>
                   <a:srgbClr val="D4D4D4"/>
                 </a:solidFill>
@@ -12903,7 +12855,7 @@
               <a:t>, 2</a:t>
             </a:r>
             <a:r>
-              <a:rPr sz="1500" i="0" b="0">
+              <a:rPr sz="1700" i="0" b="0">
                 <a:solidFill>
                   <a:srgbClr val="D4D4D4"/>
                 </a:solidFill>
@@ -12915,11 +12867,11 @@
           <a:p>
             <a:pPr>
               <a:spcAft>
-                <a:spcPts val="321"/>
+                <a:spcPts val="364"/>
               </a:spcAft>
             </a:pPr>
             <a:r>
-              <a:rPr sz="1500" i="0" b="0">
+              <a:rPr sz="1700" i="0" b="0">
                 <a:solidFill>
                   <a:srgbClr val="D4D4D4"/>
                 </a:solidFill>
@@ -12928,7 +12880,7 @@
               <a:t>  </a:t>
             </a:r>
             <a:r>
-              <a:rPr sz="1500" i="0" b="0">
+              <a:rPr sz="1700" i="0" b="0">
                 <a:solidFill>
                   <a:srgbClr val="D4D4D4"/>
                 </a:solidFill>
@@ -12937,7 +12889,7 @@
               <a:t>Modelo</a:t>
             </a:r>
             <a:r>
-              <a:rPr sz="1500" i="0" b="0">
+              <a:rPr sz="1700" i="0" b="0">
                 <a:solidFill>
                   <a:srgbClr val="D4D4D4"/>
                 </a:solidFill>
@@ -12946,7 +12898,7 @@
               <a:t> </a:t>
             </a:r>
             <a:r>
-              <a:rPr sz="1500" i="0" b="0">
+              <a:rPr sz="1700" i="0" b="0">
                 <a:solidFill>
                   <a:srgbClr val="D4D4D4"/>
                 </a:solidFill>
@@ -12955,7 +12907,7 @@
               <a:t>UML</a:t>
             </a:r>
             <a:r>
-              <a:rPr sz="1500" i="0" b="0">
+              <a:rPr sz="1700" i="0" b="0">
                 <a:solidFill>
                   <a:srgbClr val="D4D4D4"/>
                 </a:solidFill>
@@ -12964,7 +12916,7 @@
               <a:t>             :</a:t>
             </a:r>
             <a:r>
-              <a:rPr sz="1500" i="0" b="0">
+              <a:rPr sz="1700" i="0" b="0">
                 <a:solidFill>
                   <a:srgbClr val="D4D4D4"/>
                 </a:solidFill>
@@ -12973,7 +12925,7 @@
               <a:t>g4</a:t>
             </a:r>
             <a:r>
-              <a:rPr sz="1500" i="0" b="0">
+              <a:rPr sz="1700" i="0" b="0">
                 <a:solidFill>
                   <a:srgbClr val="D4D4D4"/>
                 </a:solidFill>
@@ -12982,7 +12934,7 @@
               <a:t>, </a:t>
             </a:r>
             <a:r>
-              <a:rPr sz="1500" i="0" b="0">
+              <a:rPr sz="1700" i="0" b="0">
                 <a:solidFill>
                   <a:srgbClr val="D4D4D4"/>
                 </a:solidFill>
@@ -12991,7 +12943,7 @@
               <a:t>after</a:t>
             </a:r>
             <a:r>
-              <a:rPr sz="1500" i="0" b="0">
+              <a:rPr sz="1700" i="0" b="0">
                 <a:solidFill>
                   <a:srgbClr val="D4D4D4"/>
                 </a:solidFill>
@@ -13000,7 +12952,7 @@
               <a:t> </a:t>
             </a:r>
             <a:r>
-              <a:rPr sz="1500" i="0" b="0">
+              <a:rPr sz="1700" i="0" b="0">
                 <a:solidFill>
                   <a:srgbClr val="D4D4D4"/>
                 </a:solidFill>
@@ -13009,7 +12961,7 @@
               <a:t>g3</a:t>
             </a:r>
             <a:r>
-              <a:rPr sz="1500" i="0" b="0">
+              <a:rPr sz="1700" i="0" b="0">
                 <a:solidFill>
                   <a:srgbClr val="D4D4D4"/>
                 </a:solidFill>
@@ -13018,7 +12970,7 @@
               <a:t>, 2</a:t>
             </a:r>
             <a:r>
-              <a:rPr sz="1500" i="0" b="0">
+              <a:rPr sz="1700" i="0" b="0">
                 <a:solidFill>
                   <a:srgbClr val="D4D4D4"/>
                 </a:solidFill>
@@ -13030,11 +12982,11 @@
           <a:p>
             <a:pPr>
               <a:spcAft>
-                <a:spcPts val="321"/>
+                <a:spcPts val="364"/>
               </a:spcAft>
             </a:pPr>
             <a:r>
-              <a:rPr sz="1500" i="0" b="0">
+              <a:rPr sz="1700" i="0" b="0">
                 <a:solidFill>
                   <a:srgbClr val="D4D4D4"/>
                 </a:solidFill>
@@ -13043,7 +12995,7 @@
               <a:t>  </a:t>
             </a:r>
             <a:r>
-              <a:rPr sz="1500" i="0" b="0">
+              <a:rPr sz="1700" i="0" b="0">
                 <a:solidFill>
                   <a:srgbClr val="D4D4D4"/>
                 </a:solidFill>
@@ -13052,7 +13004,7 @@
               <a:t>Prototipo</a:t>
             </a:r>
             <a:r>
-              <a:rPr sz="1500" i="0" b="0">
+              <a:rPr sz="1700" i="0" b="0">
                 <a:solidFill>
                   <a:srgbClr val="D4D4D4"/>
                 </a:solidFill>
@@ -13061,7 +13013,7 @@
               <a:t> </a:t>
             </a:r>
             <a:r>
-              <a:rPr sz="1500" i="0" b="0">
+              <a:rPr sz="1700" i="0" b="0">
                 <a:solidFill>
                   <a:srgbClr val="D4D4D4"/>
                 </a:solidFill>
@@ -13070,7 +13022,7 @@
               <a:t>en</a:t>
             </a:r>
             <a:r>
-              <a:rPr sz="1500" i="0" b="0">
+              <a:rPr sz="1700" i="0" b="0">
                 <a:solidFill>
                   <a:srgbClr val="D4D4D4"/>
                 </a:solidFill>
@@ -13079,7 +13031,7 @@
               <a:t> </a:t>
             </a:r>
             <a:r>
-              <a:rPr sz="1500" i="0" b="0">
+              <a:rPr sz="1700" i="0" b="0">
                 <a:solidFill>
                   <a:srgbClr val="D4D4D4"/>
                 </a:solidFill>
@@ -13088,7 +13040,7 @@
               <a:t>vivo</a:t>
             </a:r>
             <a:r>
-              <a:rPr sz="1500" i="0" b="0">
+              <a:rPr sz="1700" i="0" b="0">
                 <a:solidFill>
                   <a:srgbClr val="D4D4D4"/>
                 </a:solidFill>
@@ -13097,7 +13049,7 @@
               <a:t>      :</a:t>
             </a:r>
             <a:r>
-              <a:rPr sz="1500" i="0" b="0">
+              <a:rPr sz="1700" i="0" b="0">
                 <a:solidFill>
                   <a:srgbClr val="D4D4D4"/>
                 </a:solidFill>
@@ -13106,7 +13058,7 @@
               <a:t>g5</a:t>
             </a:r>
             <a:r>
-              <a:rPr sz="1500" i="0" b="0">
+              <a:rPr sz="1700" i="0" b="0">
                 <a:solidFill>
                   <a:srgbClr val="D4D4D4"/>
                 </a:solidFill>
@@ -13115,7 +13067,7 @@
               <a:t>, </a:t>
             </a:r>
             <a:r>
-              <a:rPr sz="1500" i="0" b="0">
+              <a:rPr sz="1700" i="0" b="0">
                 <a:solidFill>
                   <a:srgbClr val="D4D4D4"/>
                 </a:solidFill>
@@ -13124,7 +13076,7 @@
               <a:t>after</a:t>
             </a:r>
             <a:r>
-              <a:rPr sz="1500" i="0" b="0">
+              <a:rPr sz="1700" i="0" b="0">
                 <a:solidFill>
                   <a:srgbClr val="D4D4D4"/>
                 </a:solidFill>
@@ -13133,7 +13085,7 @@
               <a:t> </a:t>
             </a:r>
             <a:r>
-              <a:rPr sz="1500" i="0" b="0">
+              <a:rPr sz="1700" i="0" b="0">
                 <a:solidFill>
                   <a:srgbClr val="D4D4D4"/>
                 </a:solidFill>
@@ -13142,7 +13094,7 @@
               <a:t>g4</a:t>
             </a:r>
             <a:r>
-              <a:rPr sz="1500" i="0" b="0">
+              <a:rPr sz="1700" i="0" b="0">
                 <a:solidFill>
                   <a:srgbClr val="D4D4D4"/>
                 </a:solidFill>
@@ -13151,7 +13103,7 @@
               <a:t>, 2</a:t>
             </a:r>
             <a:r>
-              <a:rPr sz="1500" i="0" b="0">
+              <a:rPr sz="1700" i="0" b="0">
                 <a:solidFill>
                   <a:srgbClr val="D4D4D4"/>
                 </a:solidFill>
@@ -13163,11 +13115,11 @@
           <a:p>
             <a:pPr>
               <a:spcAft>
-                <a:spcPts val="321"/>
+                <a:spcPts val="364"/>
               </a:spcAft>
             </a:pPr>
             <a:r>
-              <a:rPr sz="1500" i="0" b="0">
+              <a:rPr sz="1700" i="0" b="0">
                 <a:solidFill>
                   <a:srgbClr val="D4D4D4"/>
                 </a:solidFill>
@@ -13176,7 +13128,7 @@
               <a:t>  </a:t>
             </a:r>
             <a:r>
-              <a:rPr sz="1500" i="0" b="0">
+              <a:rPr sz="1700" i="0" b="0">
                 <a:solidFill>
                   <a:srgbClr val="D4D4D4"/>
                 </a:solidFill>
@@ -13185,7 +13137,7 @@
               <a:t>Decisiones</a:t>
             </a:r>
             <a:r>
-              <a:rPr sz="1500" i="0" b="0">
+              <a:rPr sz="1700" i="0" b="0">
                 <a:solidFill>
                   <a:srgbClr val="D4D4D4"/>
                 </a:solidFill>
@@ -13194,7 +13146,7 @@
               <a:t> </a:t>
             </a:r>
             <a:r>
-              <a:rPr sz="1500" i="0" b="0">
+              <a:rPr sz="1700" i="0" b="0">
                 <a:solidFill>
                   <a:srgbClr val="D4D4D4"/>
                 </a:solidFill>
@@ -13203,7 +13155,7 @@
               <a:t>defendidas</a:t>
             </a:r>
             <a:r>
-              <a:rPr sz="1500" i="0" b="0">
+              <a:rPr sz="1700" i="0" b="0">
                 <a:solidFill>
                   <a:srgbClr val="D4D4D4"/>
                 </a:solidFill>
@@ -13212,7 +13164,7 @@
               <a:t>  :</a:t>
             </a:r>
             <a:r>
-              <a:rPr sz="1500" i="0" b="0">
+              <a:rPr sz="1700" i="0" b="0">
                 <a:solidFill>
                   <a:srgbClr val="D4D4D4"/>
                 </a:solidFill>
@@ -13221,7 +13173,7 @@
               <a:t>g6</a:t>
             </a:r>
             <a:r>
-              <a:rPr sz="1500" i="0" b="0">
+              <a:rPr sz="1700" i="0" b="0">
                 <a:solidFill>
                   <a:srgbClr val="D4D4D4"/>
                 </a:solidFill>
@@ -13230,7 +13182,7 @@
               <a:t>, </a:t>
             </a:r>
             <a:r>
-              <a:rPr sz="1500" i="0" b="0">
+              <a:rPr sz="1700" i="0" b="0">
                 <a:solidFill>
                   <a:srgbClr val="D4D4D4"/>
                 </a:solidFill>
@@ -13239,7 +13191,7 @@
               <a:t>after</a:t>
             </a:r>
             <a:r>
-              <a:rPr sz="1500" i="0" b="0">
+              <a:rPr sz="1700" i="0" b="0">
                 <a:solidFill>
                   <a:srgbClr val="D4D4D4"/>
                 </a:solidFill>
@@ -13248,7 +13200,7 @@
               <a:t> </a:t>
             </a:r>
             <a:r>
-              <a:rPr sz="1500" i="0" b="0">
+              <a:rPr sz="1700" i="0" b="0">
                 <a:solidFill>
                   <a:srgbClr val="D4D4D4"/>
                 </a:solidFill>
@@ -13257,7 +13209,7 @@
               <a:t>g5</a:t>
             </a:r>
             <a:r>
-              <a:rPr sz="1500" i="0" b="0">
+              <a:rPr sz="1700" i="0" b="0">
                 <a:solidFill>
                   <a:srgbClr val="D4D4D4"/>
                 </a:solidFill>
@@ -13266,7 +13218,7 @@
               <a:t>, 2</a:t>
             </a:r>
             <a:r>
-              <a:rPr sz="1500" i="0" b="0">
+              <a:rPr sz="1700" i="0" b="0">
                 <a:solidFill>
                   <a:srgbClr val="D4D4D4"/>
                 </a:solidFill>
@@ -13278,11 +13230,11 @@
           <a:p>
             <a:pPr>
               <a:spcAft>
-                <a:spcPts val="321"/>
+                <a:spcPts val="364"/>
               </a:spcAft>
             </a:pPr>
             <a:r>
-              <a:rPr sz="1500" i="0" b="0">
+              <a:rPr sz="1700" i="0" b="0">
                 <a:solidFill>
                   <a:srgbClr val="D4D4D4"/>
                 </a:solidFill>
@@ -13291,7 +13243,7 @@
               <a:t>  </a:t>
             </a:r>
             <a:r>
-              <a:rPr sz="1500" i="0" b="0">
+              <a:rPr sz="1700" i="0" b="0">
                 <a:solidFill>
                   <a:srgbClr val="D4D4D4"/>
                 </a:solidFill>
@@ -13300,7 +13252,7 @@
               <a:t>Riesgos</a:t>
             </a:r>
             <a:r>
-              <a:rPr sz="1500" i="0" b="0">
+              <a:rPr sz="1700" i="0" b="0">
                 <a:solidFill>
                   <a:srgbClr val="D4D4D4"/>
                 </a:solidFill>
@@ -13309,7 +13261,7 @@
               <a:t> </a:t>
             </a:r>
             <a:r>
-              <a:rPr sz="1500" i="0" b="0">
+              <a:rPr sz="1700" i="0" b="0">
                 <a:solidFill>
                   <a:srgbClr val="D4D4D4"/>
                 </a:solidFill>
@@ -13318,7 +13270,7 @@
               <a:t>y</a:t>
             </a:r>
             <a:r>
-              <a:rPr sz="1500" i="0" b="0">
+              <a:rPr sz="1700" i="0" b="0">
                 <a:solidFill>
                   <a:srgbClr val="D4D4D4"/>
                 </a:solidFill>
@@ -13327,7 +13279,7 @@
               <a:t> </a:t>
             </a:r>
             <a:r>
-              <a:rPr sz="1500" i="0" b="0">
+              <a:rPr sz="1700" i="0" b="0">
                 <a:solidFill>
                   <a:srgbClr val="D4D4D4"/>
                 </a:solidFill>
@@ -13336,7 +13288,7 @@
               <a:t>cierre</a:t>
             </a:r>
             <a:r>
-              <a:rPr sz="1500" i="0" b="0">
+              <a:rPr sz="1700" i="0" b="0">
                 <a:solidFill>
                   <a:srgbClr val="D4D4D4"/>
                 </a:solidFill>
@@ -13345,7 +13297,7 @@
               <a:t>       :</a:t>
             </a:r>
             <a:r>
-              <a:rPr sz="1500" i="0" b="0">
+              <a:rPr sz="1700" i="0" b="0">
                 <a:solidFill>
                   <a:srgbClr val="D4D4D4"/>
                 </a:solidFill>
@@ -13354,7 +13306,7 @@
               <a:t>g7</a:t>
             </a:r>
             <a:r>
-              <a:rPr sz="1500" i="0" b="0">
+              <a:rPr sz="1700" i="0" b="0">
                 <a:solidFill>
                   <a:srgbClr val="D4D4D4"/>
                 </a:solidFill>
@@ -13363,7 +13315,7 @@
               <a:t>, </a:t>
             </a:r>
             <a:r>
-              <a:rPr sz="1500" i="0" b="0">
+              <a:rPr sz="1700" i="0" b="0">
                 <a:solidFill>
                   <a:srgbClr val="D4D4D4"/>
                 </a:solidFill>
@@ -13372,7 +13324,7 @@
               <a:t>after</a:t>
             </a:r>
             <a:r>
-              <a:rPr sz="1500" i="0" b="0">
+              <a:rPr sz="1700" i="0" b="0">
                 <a:solidFill>
                   <a:srgbClr val="D4D4D4"/>
                 </a:solidFill>
@@ -13381,7 +13333,7 @@
               <a:t> </a:t>
             </a:r>
             <a:r>
-              <a:rPr sz="1500" i="0" b="0">
+              <a:rPr sz="1700" i="0" b="0">
                 <a:solidFill>
                   <a:srgbClr val="D4D4D4"/>
                 </a:solidFill>
@@ -13390,7 +13342,7 @@
               <a:t>g6</a:t>
             </a:r>
             <a:r>
-              <a:rPr sz="1500" i="0" b="0">
+              <a:rPr sz="1700" i="0" b="0">
                 <a:solidFill>
                   <a:srgbClr val="D4D4D4"/>
                 </a:solidFill>
@@ -13399,7 +13351,7 @@
               <a:t>, 1</a:t>
             </a:r>
             <a:r>
-              <a:rPr sz="1500" i="0" b="0">
+              <a:rPr sz="1700" i="0" b="0">
                 <a:solidFill>
                   <a:srgbClr val="D4D4D4"/>
                 </a:solidFill>
@@ -13408,59 +13360,150 @@
               <a:t>m</a:t>
             </a:r>
           </a:p>
-          <a:p>
-            <a:pPr>
-              <a:spcAft>
-                <a:spcPts val="321"/>
-              </a:spcAft>
-            </a:pPr>
-            <a:r>
-              <a:rPr sz="1500" i="0" b="0">
-                <a:solidFill>
-                  <a:srgbClr val="D4D4D4"/>
-                </a:solidFill>
-                <a:latin typeface="Consolas"/>
-              </a:rPr>
-              <a:t/>
-            </a:r>
-          </a:p>
-          <a:p>
-            <a:pPr>
-              <a:spcAft>
-                <a:spcPts val="321"/>
-              </a:spcAft>
-            </a:pPr>
-            <a:r>
-              <a:rPr sz="1500" i="1" b="0">
-                <a:solidFill>
-                  <a:srgbClr val="6A9955"/>
-                </a:solidFill>
-                <a:latin typeface="Consolas"/>
-              </a:rPr>
-              <a:t>%% Si el guion no esta cronometrado, el bloque de decisiones —el que mas</a:t>
-            </a:r>
-          </a:p>
-          <a:p>
-            <a:pPr>
-              <a:spcAft>
-                <a:spcPts val="321"/>
-              </a:spcAft>
-            </a:pPr>
-            <a:r>
-              <a:rPr sz="1500" i="1" b="0">
-                <a:solidFill>
-                  <a:srgbClr val="6A9955"/>
-                </a:solidFill>
-                <a:latin typeface="Consolas"/>
-              </a:rPr>
-              <a:t>%% pesa ante el jurado— se queda sin tiempo. Siempre.</a:t>
-            </a:r>
-          </a:p>
-        </p:txBody>
-      </p:sp>
-      <p:sp>
-        <p:nvSpPr>
-          <p:cNvPr id="13" name="TextBox 12"/>
+        </p:txBody>
+      </p:sp>
+      <p:sp>
+        <p:nvSpPr>
+          <p:cNvPr id="13" name="Rounded Rectangle 12"/>
+          <p:cNvSpPr/>
+          <p:nvPr/>
+        </p:nvSpPr>
+        <p:spPr>
+          <a:xfrm>
+            <a:off x="7668579" y="1261872"/>
+            <a:ext cx="4120780" cy="3318569"/>
+          </a:xfrm>
+          <a:prstGeom prst="roundRect">
+            <a:avLst>
+              <a:gd name="adj" fmla="val 4000"/>
+            </a:avLst>
+          </a:prstGeom>
+          <a:solidFill>
+            <a:srgbClr val="E8EEF4"/>
+          </a:solidFill>
+          <a:ln>
+            <a:noFill/>
+          </a:ln>
+        </p:spPr>
+        <p:style>
+          <a:lnRef idx="1">
+            <a:schemeClr val="accent1"/>
+          </a:lnRef>
+          <a:fillRef idx="3">
+            <a:schemeClr val="accent1"/>
+          </a:fillRef>
+          <a:effectRef idx="2">
+            <a:schemeClr val="accent1"/>
+          </a:effectRef>
+          <a:fontRef idx="minor">
+            <a:schemeClr val="lt1"/>
+          </a:fontRef>
+        </p:style>
+        <p:txBody>
+          <a:bodyPr rtlCol="0" anchor="ctr"/>
+          <a:lstStyle/>
+          <a:p>
+            <a:pPr algn="ctr"/>
+          </a:p>
+        </p:txBody>
+      </p:sp>
+      <p:pic>
+        <p:nvPicPr>
+          <p:cNvPr id="14" name="Picture 13" descr="dg-guion-gantt-paso1.png"/>
+          <p:cNvPicPr>
+            <a:picLocks noChangeAspect="1"/>
+          </p:cNvPicPr>
+          <p:nvPr/>
+        </p:nvPicPr>
+        <p:blipFill>
+          <a:blip r:embed="rId2"/>
+          <a:stretch>
+            <a:fillRect/>
+          </a:stretch>
+        </p:blipFill>
+        <p:spPr>
+          <a:xfrm>
+            <a:off x="7723443" y="1316736"/>
+            <a:ext cx="4011052" cy="3208841"/>
+          </a:xfrm>
+          <a:prstGeom prst="rect">
+            <a:avLst/>
+          </a:prstGeom>
+        </p:spPr>
+      </p:pic>
+      <p:sp>
+        <p:nvSpPr>
+          <p:cNvPr id="15" name="TextBox 14"/>
+          <p:cNvSpPr txBox="1"/>
+          <p:nvPr/>
+        </p:nvSpPr>
+        <p:spPr>
+          <a:xfrm>
+            <a:off x="7723443" y="4580441"/>
+            <a:ext cx="4011052" cy="320040"/>
+          </a:xfrm>
+          <a:prstGeom prst="rect">
+            <a:avLst/>
+          </a:prstGeom>
+          <a:noFill/>
+        </p:spPr>
+        <p:txBody>
+          <a:bodyPr wrap="square">
+            <a:spAutoFit/>
+          </a:bodyPr>
+          <a:lstStyle/>
+          <a:p>
+            <a:pPr algn="ctr"/>
+            <a:r>
+              <a:rPr sz="1200" b="0" i="1">
+                <a:solidFill>
+                  <a:srgbClr val="666666"/>
+                </a:solidFill>
+                <a:latin typeface="Calibri"/>
+              </a:rPr>
+              <a:t>Lo que dibuja este código</a:t>
+            </a:r>
+          </a:p>
+        </p:txBody>
+      </p:sp>
+      <p:sp>
+        <p:nvSpPr>
+          <p:cNvPr id="16" name="TextBox 15"/>
+          <p:cNvSpPr txBox="1"/>
+          <p:nvPr/>
+        </p:nvSpPr>
+        <p:spPr>
+          <a:xfrm>
+            <a:off x="457200" y="6035040"/>
+            <a:ext cx="11277295" cy="365760"/>
+          </a:xfrm>
+          <a:prstGeom prst="rect">
+            <a:avLst/>
+          </a:prstGeom>
+          <a:noFill/>
+        </p:spPr>
+        <p:txBody>
+          <a:bodyPr wrap="square">
+            <a:spAutoFit/>
+          </a:bodyPr>
+          <a:lstStyle/>
+          <a:p>
+            <a:pPr algn="ctr"/>
+            <a:r>
+              <a:rPr sz="1300" b="0" i="1">
+                <a:solidFill>
+                  <a:srgbClr val="666666"/>
+                </a:solidFill>
+                <a:latin typeface="Calibri"/>
+              </a:rPr>
+              <a:t>Sin cronometro, el bloque de decisiones —el que mas pesa ante el jurado— se queda sin tiempo.</a:t>
+            </a:r>
+          </a:p>
+        </p:txBody>
+      </p:sp>
+      <p:sp>
+        <p:nvSpPr>
+          <p:cNvPr id="17" name="TextBox 16"/>
           <p:cNvSpPr txBox="1"/>
           <p:nvPr/>
         </p:nvSpPr>
